--- a/slides/00-DailyAnnouncements.pptx
+++ b/slides/00-DailyAnnouncements.pptx
@@ -5,7 +5,7 @@
     <p:sldMasterId id="2147484006" r:id="rId1"/>
   </p:sldMasterIdLst>
   <p:notesMasterIdLst>
-    <p:notesMasterId r:id="rId9"/>
+    <p:notesMasterId r:id="rId11"/>
   </p:notesMasterIdLst>
   <p:sldIdLst>
     <p:sldId id="256" r:id="rId2"/>
@@ -14,7 +14,9 @@
     <p:sldId id="517" r:id="rId5"/>
     <p:sldId id="518" r:id="rId6"/>
     <p:sldId id="519" r:id="rId7"/>
-    <p:sldId id="515" r:id="rId8"/>
+    <p:sldId id="520" r:id="rId8"/>
+    <p:sldId id="521" r:id="rId9"/>
+    <p:sldId id="515" r:id="rId10"/>
   </p:sldIdLst>
   <p:sldSz cx="12192000" cy="6858000"/>
   <p:notesSz cx="6858000" cy="9144000"/>
@@ -203,7 +205,7 @@
           <a:p>
             <a:fld id="{C5B45307-6ED4-B142-BD64-10F739779302}" type="datetimeFigureOut">
               <a:rPr lang="en-US" smtClean="0"/>
-              <a:t>9/10/26</a:t>
+              <a:t>9/15/26</a:t>
             </a:fld>
             <a:endParaRPr lang="en-US"/>
           </a:p>
@@ -611,7 +613,7 @@
           <a:noFill/>
           <a:extLst>
             <a:ext uri="{909E8E84-426E-40dd-AFC4-6F175D3DCCD1}">
-              <a14:hiddenFill xmlns:a14="http://schemas.microsoft.com/office/drawing/2010/main" xmlns="">
+              <a14:hiddenFill xmlns="" xmlns:a14="http://schemas.microsoft.com/office/drawing/2010/main">
                 <a:solidFill>
                   <a:srgbClr val="FFFFFF"/>
                 </a:solidFill>
@@ -670,7 +672,7 @@
             </a:ln>
             <a:extLst>
               <a:ext uri="{91240B29-F687-4f45-9708-019B960494DF}">
-                <a14:hiddenLine xmlns:a14="http://schemas.microsoft.com/office/drawing/2010/main" xmlns="" w="9525">
+                <a14:hiddenLine xmlns="" xmlns:a14="http://schemas.microsoft.com/office/drawing/2010/main" w="9525">
                   <a:solidFill>
                     <a:srgbClr val="000000"/>
                   </a:solidFill>
@@ -760,7 +762,7 @@
             </a:ln>
             <a:extLst>
               <a:ext uri="{91240B29-F687-4f45-9708-019B960494DF}">
-                <a14:hiddenLine xmlns:a14="http://schemas.microsoft.com/office/drawing/2010/main" xmlns="" w="9525">
+                <a14:hiddenLine xmlns="" xmlns:a14="http://schemas.microsoft.com/office/drawing/2010/main" w="9525">
                   <a:solidFill>
                     <a:srgbClr val="000000"/>
                   </a:solidFill>
@@ -850,7 +852,7 @@
             </a:ln>
             <a:extLst>
               <a:ext uri="{91240B29-F687-4f45-9708-019B960494DF}">
-                <a14:hiddenLine xmlns:a14="http://schemas.microsoft.com/office/drawing/2010/main" xmlns="" w="9525">
+                <a14:hiddenLine xmlns="" xmlns:a14="http://schemas.microsoft.com/office/drawing/2010/main" w="9525">
                   <a:solidFill>
                     <a:srgbClr val="000000"/>
                   </a:solidFill>
@@ -884,7 +886,7 @@
             </a:ln>
             <a:extLst>
               <a:ext uri="{91240B29-F687-4f45-9708-019B960494DF}">
-                <a14:hiddenLine xmlns:a14="http://schemas.microsoft.com/office/drawing/2010/main" xmlns="" w="9525">
+                <a14:hiddenLine xmlns="" xmlns:a14="http://schemas.microsoft.com/office/drawing/2010/main" w="9525">
                   <a:solidFill>
                     <a:srgbClr val="000000"/>
                   </a:solidFill>
@@ -974,7 +976,7 @@
             </a:ln>
             <a:extLst>
               <a:ext uri="{91240B29-F687-4f45-9708-019B960494DF}">
-                <a14:hiddenLine xmlns:a14="http://schemas.microsoft.com/office/drawing/2010/main" xmlns="" w="9525">
+                <a14:hiddenLine xmlns="" xmlns:a14="http://schemas.microsoft.com/office/drawing/2010/main" w="9525">
                   <a:solidFill>
                     <a:srgbClr val="000000"/>
                   </a:solidFill>
@@ -1036,7 +1038,7 @@
             </a:ln>
             <a:extLst>
               <a:ext uri="{91240B29-F687-4f45-9708-019B960494DF}">
-                <a14:hiddenLine xmlns:a14="http://schemas.microsoft.com/office/drawing/2010/main" xmlns="" w="9525">
+                <a14:hiddenLine xmlns="" xmlns:a14="http://schemas.microsoft.com/office/drawing/2010/main" w="9525">
                   <a:solidFill>
                     <a:srgbClr val="000000"/>
                   </a:solidFill>
@@ -1098,7 +1100,7 @@
             </a:ln>
             <a:extLst>
               <a:ext uri="{91240B29-F687-4f45-9708-019B960494DF}">
-                <a14:hiddenLine xmlns:a14="http://schemas.microsoft.com/office/drawing/2010/main" xmlns="" w="9525">
+                <a14:hiddenLine xmlns="" xmlns:a14="http://schemas.microsoft.com/office/drawing/2010/main" w="9525">
                   <a:solidFill>
                     <a:srgbClr val="000000"/>
                   </a:solidFill>
@@ -1188,7 +1190,7 @@
             </a:ln>
             <a:extLst>
               <a:ext uri="{91240B29-F687-4f45-9708-019B960494DF}">
-                <a14:hiddenLine xmlns:a14="http://schemas.microsoft.com/office/drawing/2010/main" xmlns="" w="9525">
+                <a14:hiddenLine xmlns="" xmlns:a14="http://schemas.microsoft.com/office/drawing/2010/main" w="9525">
                   <a:solidFill>
                     <a:srgbClr val="000000"/>
                   </a:solidFill>
@@ -1250,7 +1252,7 @@
             </a:ln>
             <a:extLst>
               <a:ext uri="{91240B29-F687-4f45-9708-019B960494DF}">
-                <a14:hiddenLine xmlns:a14="http://schemas.microsoft.com/office/drawing/2010/main" xmlns="" w="9525">
+                <a14:hiddenLine xmlns="" xmlns:a14="http://schemas.microsoft.com/office/drawing/2010/main" w="9525">
                   <a:solidFill>
                     <a:srgbClr val="000000"/>
                   </a:solidFill>
@@ -1312,7 +1314,7 @@
             </a:ln>
             <a:extLst>
               <a:ext uri="{91240B29-F687-4f45-9708-019B960494DF}">
-                <a14:hiddenLine xmlns:a14="http://schemas.microsoft.com/office/drawing/2010/main" xmlns="" w="9525">
+                <a14:hiddenLine xmlns="" xmlns:a14="http://schemas.microsoft.com/office/drawing/2010/main" w="9525">
                   <a:solidFill>
                     <a:srgbClr val="000000"/>
                   </a:solidFill>
@@ -1402,7 +1404,7 @@
             </a:ln>
             <a:extLst>
               <a:ext uri="{91240B29-F687-4f45-9708-019B960494DF}">
-                <a14:hiddenLine xmlns:a14="http://schemas.microsoft.com/office/drawing/2010/main" xmlns="" w="9525">
+                <a14:hiddenLine xmlns="" xmlns:a14="http://schemas.microsoft.com/office/drawing/2010/main" w="9525">
                   <a:solidFill>
                     <a:srgbClr val="000000"/>
                   </a:solidFill>
@@ -1492,7 +1494,7 @@
             </a:ln>
             <a:extLst>
               <a:ext uri="{91240B29-F687-4f45-9708-019B960494DF}">
-                <a14:hiddenLine xmlns:a14="http://schemas.microsoft.com/office/drawing/2010/main" xmlns="" w="9525">
+                <a14:hiddenLine xmlns="" xmlns:a14="http://schemas.microsoft.com/office/drawing/2010/main" w="9525">
                   <a:solidFill>
                     <a:srgbClr val="000000"/>
                   </a:solidFill>
@@ -1554,7 +1556,7 @@
             </a:ln>
             <a:extLst>
               <a:ext uri="{91240B29-F687-4f45-9708-019B960494DF}">
-                <a14:hiddenLine xmlns:a14="http://schemas.microsoft.com/office/drawing/2010/main" xmlns="" w="9525">
+                <a14:hiddenLine xmlns="" xmlns:a14="http://schemas.microsoft.com/office/drawing/2010/main" w="9525">
                   <a:solidFill>
                     <a:srgbClr val="000000"/>
                   </a:solidFill>
@@ -1664,7 +1666,7 @@
             </a:ln>
             <a:extLst>
               <a:ext uri="{91240B29-F687-4f45-9708-019B960494DF}">
-                <a14:hiddenLine xmlns:a14="http://schemas.microsoft.com/office/drawing/2010/main" xmlns="" w="9525">
+                <a14:hiddenLine xmlns="" xmlns:a14="http://schemas.microsoft.com/office/drawing/2010/main" w="9525">
                   <a:solidFill>
                     <a:srgbClr val="000000"/>
                   </a:solidFill>
@@ -1726,7 +1728,7 @@
             </a:ln>
             <a:extLst>
               <a:ext uri="{91240B29-F687-4f45-9708-019B960494DF}">
-                <a14:hiddenLine xmlns:a14="http://schemas.microsoft.com/office/drawing/2010/main" xmlns="" w="9525">
+                <a14:hiddenLine xmlns="" xmlns:a14="http://schemas.microsoft.com/office/drawing/2010/main" w="9525">
                   <a:solidFill>
                     <a:srgbClr val="000000"/>
                   </a:solidFill>
@@ -1816,7 +1818,7 @@
             </a:ln>
             <a:extLst>
               <a:ext uri="{91240B29-F687-4f45-9708-019B960494DF}">
-                <a14:hiddenLine xmlns:a14="http://schemas.microsoft.com/office/drawing/2010/main" xmlns="" w="9525">
+                <a14:hiddenLine xmlns="" xmlns:a14="http://schemas.microsoft.com/office/drawing/2010/main" w="9525">
                   <a:solidFill>
                     <a:srgbClr val="000000"/>
                   </a:solidFill>
@@ -1906,7 +1908,7 @@
             </a:ln>
             <a:extLst>
               <a:ext uri="{91240B29-F687-4f45-9708-019B960494DF}">
-                <a14:hiddenLine xmlns:a14="http://schemas.microsoft.com/office/drawing/2010/main" xmlns="" w="9525">
+                <a14:hiddenLine xmlns="" xmlns:a14="http://schemas.microsoft.com/office/drawing/2010/main" w="9525">
                   <a:solidFill>
                     <a:srgbClr val="000000"/>
                   </a:solidFill>
@@ -1968,7 +1970,7 @@
             </a:ln>
             <a:extLst>
               <a:ext uri="{91240B29-F687-4f45-9708-019B960494DF}">
-                <a14:hiddenLine xmlns:a14="http://schemas.microsoft.com/office/drawing/2010/main" xmlns="" w="9525">
+                <a14:hiddenLine xmlns="" xmlns:a14="http://schemas.microsoft.com/office/drawing/2010/main" w="9525">
                   <a:solidFill>
                     <a:srgbClr val="000000"/>
                   </a:solidFill>
@@ -2058,7 +2060,7 @@
             </a:ln>
             <a:extLst>
               <a:ext uri="{91240B29-F687-4f45-9708-019B960494DF}">
-                <a14:hiddenLine xmlns:a14="http://schemas.microsoft.com/office/drawing/2010/main" xmlns="" w="9525">
+                <a14:hiddenLine xmlns="" xmlns:a14="http://schemas.microsoft.com/office/drawing/2010/main" w="9525">
                   <a:solidFill>
                     <a:srgbClr val="000000"/>
                   </a:solidFill>
@@ -2148,7 +2150,7 @@
             </a:ln>
             <a:extLst>
               <a:ext uri="{91240B29-F687-4f45-9708-019B960494DF}">
-                <a14:hiddenLine xmlns:a14="http://schemas.microsoft.com/office/drawing/2010/main" xmlns="" w="9525">
+                <a14:hiddenLine xmlns="" xmlns:a14="http://schemas.microsoft.com/office/drawing/2010/main" w="9525">
                   <a:solidFill>
                     <a:srgbClr val="000000"/>
                   </a:solidFill>
@@ -2204,7 +2206,7 @@
             </a:ln>
             <a:extLst>
               <a:ext uri="{91240B29-F687-4f45-9708-019B960494DF}">
-                <a14:hiddenLine xmlns:a14="http://schemas.microsoft.com/office/drawing/2010/main" xmlns="" w="9525">
+                <a14:hiddenLine xmlns="" xmlns:a14="http://schemas.microsoft.com/office/drawing/2010/main" w="9525">
                   <a:solidFill>
                     <a:srgbClr val="000000"/>
                   </a:solidFill>
@@ -2294,7 +2296,7 @@
             </a:ln>
             <a:extLst>
               <a:ext uri="{91240B29-F687-4f45-9708-019B960494DF}">
-                <a14:hiddenLine xmlns:a14="http://schemas.microsoft.com/office/drawing/2010/main" xmlns="" w="9525">
+                <a14:hiddenLine xmlns="" xmlns:a14="http://schemas.microsoft.com/office/drawing/2010/main" w="9525">
                   <a:solidFill>
                     <a:srgbClr val="000000"/>
                   </a:solidFill>
@@ -2350,7 +2352,7 @@
             </a:ln>
             <a:extLst>
               <a:ext uri="{91240B29-F687-4f45-9708-019B960494DF}">
-                <a14:hiddenLine xmlns:a14="http://schemas.microsoft.com/office/drawing/2010/main" xmlns="" w="9525">
+                <a14:hiddenLine xmlns="" xmlns:a14="http://schemas.microsoft.com/office/drawing/2010/main" w="9525">
                   <a:solidFill>
                     <a:srgbClr val="000000"/>
                   </a:solidFill>
@@ -2440,7 +2442,7 @@
             </a:ln>
             <a:extLst>
               <a:ext uri="{91240B29-F687-4f45-9708-019B960494DF}">
-                <a14:hiddenLine xmlns:a14="http://schemas.microsoft.com/office/drawing/2010/main" xmlns="" w="9525">
+                <a14:hiddenLine xmlns="" xmlns:a14="http://schemas.microsoft.com/office/drawing/2010/main" w="9525">
                   <a:solidFill>
                     <a:srgbClr val="000000"/>
                   </a:solidFill>
@@ -2508,7 +2510,7 @@
             </a:ln>
             <a:extLst>
               <a:ext uri="{91240B29-F687-4f45-9708-019B960494DF}">
-                <a14:hiddenLine xmlns:a14="http://schemas.microsoft.com/office/drawing/2010/main" xmlns="" w="9525">
+                <a14:hiddenLine xmlns="" xmlns:a14="http://schemas.microsoft.com/office/drawing/2010/main" w="9525">
                   <a:solidFill>
                     <a:srgbClr val="000000"/>
                   </a:solidFill>
@@ -2598,7 +2600,7 @@
             </a:ln>
             <a:extLst>
               <a:ext uri="{91240B29-F687-4f45-9708-019B960494DF}">
-                <a14:hiddenLine xmlns:a14="http://schemas.microsoft.com/office/drawing/2010/main" xmlns="" w="9525">
+                <a14:hiddenLine xmlns="" xmlns:a14="http://schemas.microsoft.com/office/drawing/2010/main" w="9525">
                   <a:solidFill>
                     <a:srgbClr val="000000"/>
                   </a:solidFill>
@@ -2666,7 +2668,7 @@
             </a:ln>
             <a:extLst>
               <a:ext uri="{91240B29-F687-4f45-9708-019B960494DF}">
-                <a14:hiddenLine xmlns:a14="http://schemas.microsoft.com/office/drawing/2010/main" xmlns="" w="9525">
+                <a14:hiddenLine xmlns="" xmlns:a14="http://schemas.microsoft.com/office/drawing/2010/main" w="9525">
                   <a:solidFill>
                     <a:srgbClr val="000000"/>
                   </a:solidFill>
@@ -2756,7 +2758,7 @@
             </a:ln>
             <a:extLst>
               <a:ext uri="{91240B29-F687-4f45-9708-019B960494DF}">
-                <a14:hiddenLine xmlns:a14="http://schemas.microsoft.com/office/drawing/2010/main" xmlns="" w="9525">
+                <a14:hiddenLine xmlns="" xmlns:a14="http://schemas.microsoft.com/office/drawing/2010/main" w="9525">
                   <a:solidFill>
                     <a:srgbClr val="000000"/>
                   </a:solidFill>
@@ -2790,7 +2792,7 @@
             </a:ln>
             <a:extLst>
               <a:ext uri="{91240B29-F687-4f45-9708-019B960494DF}">
-                <a14:hiddenLine xmlns:a14="http://schemas.microsoft.com/office/drawing/2010/main" xmlns="" w="9525">
+                <a14:hiddenLine xmlns="" xmlns:a14="http://schemas.microsoft.com/office/drawing/2010/main" w="9525">
                   <a:solidFill>
                     <a:srgbClr val="000000"/>
                   </a:solidFill>
@@ -2880,7 +2882,7 @@
             </a:ln>
             <a:extLst>
               <a:ext uri="{91240B29-F687-4f45-9708-019B960494DF}">
-                <a14:hiddenLine xmlns:a14="http://schemas.microsoft.com/office/drawing/2010/main" xmlns="" w="9525">
+                <a14:hiddenLine xmlns="" xmlns:a14="http://schemas.microsoft.com/office/drawing/2010/main" w="9525">
                   <a:solidFill>
                     <a:srgbClr val="000000"/>
                   </a:solidFill>
@@ -2942,7 +2944,7 @@
             </a:ln>
             <a:extLst>
               <a:ext uri="{91240B29-F687-4f45-9708-019B960494DF}">
-                <a14:hiddenLine xmlns:a14="http://schemas.microsoft.com/office/drawing/2010/main" xmlns="" w="9525">
+                <a14:hiddenLine xmlns="" xmlns:a14="http://schemas.microsoft.com/office/drawing/2010/main" w="9525">
                   <a:solidFill>
                     <a:srgbClr val="000000"/>
                   </a:solidFill>
@@ -3004,7 +3006,7 @@
             </a:ln>
             <a:extLst>
               <a:ext uri="{91240B29-F687-4f45-9708-019B960494DF}">
-                <a14:hiddenLine xmlns:a14="http://schemas.microsoft.com/office/drawing/2010/main" xmlns="" w="9525">
+                <a14:hiddenLine xmlns="" xmlns:a14="http://schemas.microsoft.com/office/drawing/2010/main" w="9525">
                   <a:solidFill>
                     <a:srgbClr val="000000"/>
                   </a:solidFill>
@@ -3094,7 +3096,7 @@
             </a:ln>
             <a:extLst>
               <a:ext uri="{91240B29-F687-4f45-9708-019B960494DF}">
-                <a14:hiddenLine xmlns:a14="http://schemas.microsoft.com/office/drawing/2010/main" xmlns="" w="9525">
+                <a14:hiddenLine xmlns="" xmlns:a14="http://schemas.microsoft.com/office/drawing/2010/main" w="9525">
                   <a:solidFill>
                     <a:srgbClr val="000000"/>
                   </a:solidFill>
@@ -3162,7 +3164,7 @@
             </a:ln>
             <a:extLst>
               <a:ext uri="{91240B29-F687-4f45-9708-019B960494DF}">
-                <a14:hiddenLine xmlns:a14="http://schemas.microsoft.com/office/drawing/2010/main" xmlns="" w="9525">
+                <a14:hiddenLine xmlns="" xmlns:a14="http://schemas.microsoft.com/office/drawing/2010/main" w="9525">
                   <a:solidFill>
                     <a:srgbClr val="000000"/>
                   </a:solidFill>
@@ -3224,7 +3226,7 @@
             </a:ln>
             <a:extLst>
               <a:ext uri="{91240B29-F687-4f45-9708-019B960494DF}">
-                <a14:hiddenLine xmlns:a14="http://schemas.microsoft.com/office/drawing/2010/main" xmlns="" w="9525">
+                <a14:hiddenLine xmlns="" xmlns:a14="http://schemas.microsoft.com/office/drawing/2010/main" w="9525">
                   <a:solidFill>
                     <a:srgbClr val="000000"/>
                   </a:solidFill>
@@ -3314,7 +3316,7 @@
             </a:ln>
             <a:extLst>
               <a:ext uri="{91240B29-F687-4f45-9708-019B960494DF}">
-                <a14:hiddenLine xmlns:a14="http://schemas.microsoft.com/office/drawing/2010/main" xmlns="" w="9525">
+                <a14:hiddenLine xmlns="" xmlns:a14="http://schemas.microsoft.com/office/drawing/2010/main" w="9525">
                   <a:solidFill>
                     <a:srgbClr val="000000"/>
                   </a:solidFill>
@@ -3376,7 +3378,7 @@
             </a:ln>
             <a:extLst>
               <a:ext uri="{91240B29-F687-4f45-9708-019B960494DF}">
-                <a14:hiddenLine xmlns:a14="http://schemas.microsoft.com/office/drawing/2010/main" xmlns="" w="9525">
+                <a14:hiddenLine xmlns="" xmlns:a14="http://schemas.microsoft.com/office/drawing/2010/main" w="9525">
                   <a:solidFill>
                     <a:srgbClr val="000000"/>
                   </a:solidFill>
@@ -3466,7 +3468,7 @@
             </a:ln>
             <a:extLst>
               <a:ext uri="{91240B29-F687-4f45-9708-019B960494DF}">
-                <a14:hiddenLine xmlns:a14="http://schemas.microsoft.com/office/drawing/2010/main" xmlns="" w="9525">
+                <a14:hiddenLine xmlns="" xmlns:a14="http://schemas.microsoft.com/office/drawing/2010/main" w="9525">
                   <a:solidFill>
                     <a:srgbClr val="000000"/>
                   </a:solidFill>
@@ -3528,7 +3530,7 @@
             </a:ln>
             <a:extLst>
               <a:ext uri="{91240B29-F687-4f45-9708-019B960494DF}">
-                <a14:hiddenLine xmlns:a14="http://schemas.microsoft.com/office/drawing/2010/main" xmlns="" w="9525">
+                <a14:hiddenLine xmlns="" xmlns:a14="http://schemas.microsoft.com/office/drawing/2010/main" w="9525">
                   <a:solidFill>
                     <a:srgbClr val="000000"/>
                   </a:solidFill>
@@ -3618,7 +3620,7 @@
             </a:ln>
             <a:extLst>
               <a:ext uri="{91240B29-F687-4f45-9708-019B960494DF}">
-                <a14:hiddenLine xmlns:a14="http://schemas.microsoft.com/office/drawing/2010/main" xmlns="" w="9525">
+                <a14:hiddenLine xmlns="" xmlns:a14="http://schemas.microsoft.com/office/drawing/2010/main" w="9525">
                   <a:solidFill>
                     <a:srgbClr val="000000"/>
                   </a:solidFill>
@@ -3652,7 +3654,7 @@
             </a:ln>
             <a:extLst>
               <a:ext uri="{91240B29-F687-4f45-9708-019B960494DF}">
-                <a14:hiddenLine xmlns:a14="http://schemas.microsoft.com/office/drawing/2010/main" xmlns="" w="9525">
+                <a14:hiddenLine xmlns="" xmlns:a14="http://schemas.microsoft.com/office/drawing/2010/main" w="9525">
                   <a:solidFill>
                     <a:srgbClr val="000000"/>
                   </a:solidFill>
@@ -3717,7 +3719,7 @@
             </a:ln>
             <a:extLst>
               <a:ext uri="{91240B29-F687-4f45-9708-019B960494DF}">
-                <a14:hiddenLine xmlns:a14="http://schemas.microsoft.com/office/drawing/2010/main" xmlns="" w="9525">
+                <a14:hiddenLine xmlns="" xmlns:a14="http://schemas.microsoft.com/office/drawing/2010/main" w="9525">
                   <a:solidFill>
                     <a:srgbClr val="000000"/>
                   </a:solidFill>
@@ -3807,7 +3809,7 @@
             </a:ln>
             <a:extLst>
               <a:ext uri="{91240B29-F687-4f45-9708-019B960494DF}">
-                <a14:hiddenLine xmlns:a14="http://schemas.microsoft.com/office/drawing/2010/main" xmlns="" w="9525">
+                <a14:hiddenLine xmlns="" xmlns:a14="http://schemas.microsoft.com/office/drawing/2010/main" w="9525">
                   <a:solidFill>
                     <a:srgbClr val="000000"/>
                   </a:solidFill>
@@ -3869,7 +3871,7 @@
             </a:ln>
             <a:extLst>
               <a:ext uri="{91240B29-F687-4f45-9708-019B960494DF}">
-                <a14:hiddenLine xmlns:a14="http://schemas.microsoft.com/office/drawing/2010/main" xmlns="" w="9525">
+                <a14:hiddenLine xmlns="" xmlns:a14="http://schemas.microsoft.com/office/drawing/2010/main" w="9525">
                   <a:solidFill>
                     <a:srgbClr val="000000"/>
                   </a:solidFill>
@@ -3959,7 +3961,7 @@
             </a:ln>
             <a:extLst>
               <a:ext uri="{91240B29-F687-4f45-9708-019B960494DF}">
-                <a14:hiddenLine xmlns:a14="http://schemas.microsoft.com/office/drawing/2010/main" xmlns="" w="9525">
+                <a14:hiddenLine xmlns="" xmlns:a14="http://schemas.microsoft.com/office/drawing/2010/main" w="9525">
                   <a:solidFill>
                     <a:srgbClr val="000000"/>
                   </a:solidFill>
@@ -4049,7 +4051,7 @@
             </a:ln>
             <a:extLst>
               <a:ext uri="{91240B29-F687-4f45-9708-019B960494DF}">
-                <a14:hiddenLine xmlns:a14="http://schemas.microsoft.com/office/drawing/2010/main" xmlns="" w="9525">
+                <a14:hiddenLine xmlns="" xmlns:a14="http://schemas.microsoft.com/office/drawing/2010/main" w="9525">
                   <a:solidFill>
                     <a:srgbClr val="000000"/>
                   </a:solidFill>
@@ -4114,7 +4116,7 @@
             </a:ln>
             <a:extLst>
               <a:ext uri="{91240B29-F687-4f45-9708-019B960494DF}">
-                <a14:hiddenLine xmlns:a14="http://schemas.microsoft.com/office/drawing/2010/main" xmlns="" w="9525">
+                <a14:hiddenLine xmlns="" xmlns:a14="http://schemas.microsoft.com/office/drawing/2010/main" w="9525">
                   <a:solidFill>
                     <a:srgbClr val="000000"/>
                   </a:solidFill>
@@ -4176,7 +4178,7 @@
             </a:ln>
             <a:extLst>
               <a:ext uri="{91240B29-F687-4f45-9708-019B960494DF}">
-                <a14:hiddenLine xmlns:a14="http://schemas.microsoft.com/office/drawing/2010/main" xmlns="" w="9525">
+                <a14:hiddenLine xmlns="" xmlns:a14="http://schemas.microsoft.com/office/drawing/2010/main" w="9525">
                   <a:solidFill>
                     <a:srgbClr val="000000"/>
                   </a:solidFill>
@@ -4266,7 +4268,7 @@
             </a:ln>
             <a:extLst>
               <a:ext uri="{91240B29-F687-4f45-9708-019B960494DF}">
-                <a14:hiddenLine xmlns:a14="http://schemas.microsoft.com/office/drawing/2010/main" xmlns="" w="9525">
+                <a14:hiddenLine xmlns="" xmlns:a14="http://schemas.microsoft.com/office/drawing/2010/main" w="9525">
                   <a:solidFill>
                     <a:srgbClr val="000000"/>
                   </a:solidFill>
@@ -4356,7 +4358,7 @@
             </a:ln>
             <a:extLst>
               <a:ext uri="{91240B29-F687-4f45-9708-019B960494DF}">
-                <a14:hiddenLine xmlns:a14="http://schemas.microsoft.com/office/drawing/2010/main" xmlns="" w="9525">
+                <a14:hiddenLine xmlns="" xmlns:a14="http://schemas.microsoft.com/office/drawing/2010/main" w="9525">
                   <a:solidFill>
                     <a:srgbClr val="000000"/>
                   </a:solidFill>
@@ -4418,7 +4420,7 @@
             </a:ln>
             <a:extLst>
               <a:ext uri="{91240B29-F687-4f45-9708-019B960494DF}">
-                <a14:hiddenLine xmlns:a14="http://schemas.microsoft.com/office/drawing/2010/main" xmlns="" w="9525">
+                <a14:hiddenLine xmlns="" xmlns:a14="http://schemas.microsoft.com/office/drawing/2010/main" w="9525">
                   <a:solidFill>
                     <a:srgbClr val="000000"/>
                   </a:solidFill>
@@ -4538,7 +4540,7 @@
             </a:ln>
             <a:extLst>
               <a:ext uri="{91240B29-F687-4f45-9708-019B960494DF}">
-                <a14:hiddenLine xmlns:a14="http://schemas.microsoft.com/office/drawing/2010/main" xmlns="" w="9525">
+                <a14:hiddenLine xmlns="" xmlns:a14="http://schemas.microsoft.com/office/drawing/2010/main" w="9525">
                   <a:solidFill>
                     <a:srgbClr val="000000"/>
                   </a:solidFill>
@@ -4606,7 +4608,7 @@
             </a:ln>
             <a:extLst>
               <a:ext uri="{91240B29-F687-4f45-9708-019B960494DF}">
-                <a14:hiddenLine xmlns:a14="http://schemas.microsoft.com/office/drawing/2010/main" xmlns="" w="9525">
+                <a14:hiddenLine xmlns="" xmlns:a14="http://schemas.microsoft.com/office/drawing/2010/main" w="9525">
                   <a:solidFill>
                     <a:srgbClr val="000000"/>
                   </a:solidFill>
@@ -4696,7 +4698,7 @@
             </a:ln>
             <a:extLst>
               <a:ext uri="{91240B29-F687-4f45-9708-019B960494DF}">
-                <a14:hiddenLine xmlns:a14="http://schemas.microsoft.com/office/drawing/2010/main" xmlns="" w="9525">
+                <a14:hiddenLine xmlns="" xmlns:a14="http://schemas.microsoft.com/office/drawing/2010/main" w="9525">
                   <a:solidFill>
                     <a:srgbClr val="000000"/>
                   </a:solidFill>
@@ -4836,7 +4838,7 @@
           <a:p>
             <a:fld id="{4313F670-7F9A-774D-B73D-573401E44297}" type="datetime1">
               <a:rPr lang="en-US" smtClean="0"/>
-              <a:t>9/10/26</a:t>
+              <a:t>9/15/26</a:t>
             </a:fld>
             <a:endParaRPr lang="en-US"/>
           </a:p>
@@ -5103,7 +5105,7 @@
           <a:p>
             <a:fld id="{446F9669-A8A7-2D40-9D01-B35FC337AA30}" type="datetime1">
               <a:rPr lang="en-US" smtClean="0"/>
-              <a:t>9/10/26</a:t>
+              <a:t>9/15/26</a:t>
             </a:fld>
             <a:endParaRPr lang="en-US"/>
           </a:p>
@@ -5299,7 +5301,7 @@
           <a:p>
             <a:fld id="{FA76CF18-F41B-6B48-B3E5-599E9795C2C3}" type="datetime1">
               <a:rPr lang="en-US" smtClean="0"/>
-              <a:t>9/10/26</a:t>
+              <a:t>9/15/26</a:t>
             </a:fld>
             <a:endParaRPr lang="en-US"/>
           </a:p>
@@ -5562,7 +5564,7 @@
           <a:p>
             <a:fld id="{B9654854-6457-164F-A077-6B3035079B82}" type="datetime1">
               <a:rPr lang="en-US" smtClean="0"/>
-              <a:t>9/10/26</a:t>
+              <a:t>9/15/26</a:t>
             </a:fld>
             <a:endParaRPr lang="en-US"/>
           </a:p>
@@ -5996,7 +5998,7 @@
           <a:p>
             <a:fld id="{CE3DBFD7-E611-8C40-AC73-0C29FF63F0CD}" type="datetime1">
               <a:rPr lang="en-US" smtClean="0"/>
-              <a:t>9/10/26</a:t>
+              <a:t>9/15/26</a:t>
             </a:fld>
             <a:endParaRPr lang="en-US"/>
           </a:p>
@@ -6542,7 +6544,7 @@
           <a:p>
             <a:fld id="{C8B63B06-0493-2840-9F37-30C9412BBF17}" type="datetime1">
               <a:rPr lang="en-US" smtClean="0"/>
-              <a:t>9/10/26</a:t>
+              <a:t>9/15/26</a:t>
             </a:fld>
             <a:endParaRPr lang="en-US"/>
           </a:p>
@@ -7262,7 +7264,7 @@
           <a:p>
             <a:fld id="{72B5C0FA-8C46-E84D-B6D7-B673F2CA0A0E}" type="datetime1">
               <a:rPr lang="en-US" smtClean="0"/>
-              <a:t>9/10/26</a:t>
+              <a:t>9/15/26</a:t>
             </a:fld>
             <a:endParaRPr lang="en-US"/>
           </a:p>
@@ -7432,7 +7434,7 @@
           <a:p>
             <a:fld id="{60B9CDE1-97B4-BF46-B69C-B86855B18820}" type="datetime1">
               <a:rPr lang="en-US" smtClean="0"/>
-              <a:t>9/10/26</a:t>
+              <a:t>9/15/26</a:t>
             </a:fld>
             <a:endParaRPr lang="en-US"/>
           </a:p>
@@ -7612,7 +7614,7 @@
           <a:p>
             <a:fld id="{BE51D3A4-F9E5-FD49-AA87-B395F50451DC}" type="datetime1">
               <a:rPr lang="en-US" smtClean="0"/>
-              <a:t>9/10/26</a:t>
+              <a:t>9/15/26</a:t>
             </a:fld>
             <a:endParaRPr lang="en-US"/>
           </a:p>
@@ -7782,7 +7784,7 @@
           <a:p>
             <a:fld id="{880DFB37-B0AE-9449-85EC-14F9C83B6084}" type="datetime1">
               <a:rPr lang="en-US" smtClean="0"/>
-              <a:t>9/10/26</a:t>
+              <a:t>9/15/26</a:t>
             </a:fld>
             <a:endParaRPr lang="en-US"/>
           </a:p>
@@ -8032,7 +8034,7 @@
           <a:p>
             <a:fld id="{C939124A-616E-6944-A21A-1839F5DBE7BB}" type="datetime1">
               <a:rPr lang="en-US" smtClean="0"/>
-              <a:t>9/10/26</a:t>
+              <a:t>9/15/26</a:t>
             </a:fld>
             <a:endParaRPr lang="en-US"/>
           </a:p>
@@ -8264,7 +8266,7 @@
           <a:p>
             <a:fld id="{C6E9A026-D48C-FD43-8676-CD625DD5D84B}" type="datetime1">
               <a:rPr lang="en-US" smtClean="0"/>
-              <a:t>9/10/26</a:t>
+              <a:t>9/15/26</a:t>
             </a:fld>
             <a:endParaRPr lang="en-US"/>
           </a:p>
@@ -8650,7 +8652,7 @@
           <a:p>
             <a:fld id="{EA35111E-23A3-1440-99A3-C4C665908E3D}" type="datetime1">
               <a:rPr lang="en-US" smtClean="0"/>
-              <a:t>9/10/26</a:t>
+              <a:t>9/15/26</a:t>
             </a:fld>
             <a:endParaRPr lang="en-US"/>
           </a:p>
@@ -8773,7 +8775,7 @@
           <a:p>
             <a:fld id="{249983B9-88EF-D74B-BA6D-6A3BF17C2B38}" type="datetime1">
               <a:rPr lang="en-US" smtClean="0"/>
-              <a:t>9/10/26</a:t>
+              <a:t>9/15/26</a:t>
             </a:fld>
             <a:endParaRPr lang="en-US"/>
           </a:p>
@@ -8868,7 +8870,7 @@
           <a:p>
             <a:fld id="{E2A00AEF-B4EC-084A-8DB8-A225C7981CBB}" type="datetime1">
               <a:rPr lang="en-US" smtClean="0"/>
-              <a:t>9/10/26</a:t>
+              <a:t>9/15/26</a:t>
             </a:fld>
             <a:endParaRPr lang="en-US"/>
           </a:p>
@@ -9117,7 +9119,7 @@
           <a:p>
             <a:fld id="{97860299-21CD-A94A-A7B0-44E787F8D42C}" type="datetime1">
               <a:rPr lang="en-US" smtClean="0"/>
-              <a:t>9/10/26</a:t>
+              <a:t>9/15/26</a:t>
             </a:fld>
             <a:endParaRPr lang="en-US"/>
           </a:p>
@@ -9402,7 +9404,7 @@
           <a:p>
             <a:fld id="{3DFD19CF-4E62-D246-BA61-7B528271315F}" type="datetime1">
               <a:rPr lang="en-US" smtClean="0"/>
-              <a:t>9/10/26</a:t>
+              <a:t>9/15/26</a:t>
             </a:fld>
             <a:endParaRPr lang="en-US"/>
           </a:p>
@@ -9525,7 +9527,7 @@
           <a:noFill/>
           <a:extLst>
             <a:ext uri="{909E8E84-426E-40dd-AFC4-6F175D3DCCD1}">
-              <a14:hiddenFill xmlns:a14="http://schemas.microsoft.com/office/drawing/2010/main" xmlns="">
+              <a14:hiddenFill xmlns="" xmlns:a14="http://schemas.microsoft.com/office/drawing/2010/main">
                 <a:solidFill>
                   <a:srgbClr val="FFFFFF"/>
                 </a:solidFill>
@@ -9599,7 +9601,7 @@
               </a:ln>
               <a:extLst>
                 <a:ext uri="{91240B29-F687-4f45-9708-019B960494DF}">
-                  <a14:hiddenLine xmlns:a14="http://schemas.microsoft.com/office/drawing/2010/main" xmlns="" w="9525">
+                  <a14:hiddenLine xmlns="" xmlns:a14="http://schemas.microsoft.com/office/drawing/2010/main" w="9525">
                     <a:solidFill>
                       <a:srgbClr val="000000"/>
                     </a:solidFill>
@@ -9689,7 +9691,7 @@
               </a:ln>
               <a:extLst>
                 <a:ext uri="{91240B29-F687-4f45-9708-019B960494DF}">
-                  <a14:hiddenLine xmlns:a14="http://schemas.microsoft.com/office/drawing/2010/main" xmlns="" w="9525">
+                  <a14:hiddenLine xmlns="" xmlns:a14="http://schemas.microsoft.com/office/drawing/2010/main" w="9525">
                     <a:solidFill>
                       <a:srgbClr val="000000"/>
                     </a:solidFill>
@@ -9779,7 +9781,7 @@
               </a:ln>
               <a:extLst>
                 <a:ext uri="{91240B29-F687-4f45-9708-019B960494DF}">
-                  <a14:hiddenLine xmlns:a14="http://schemas.microsoft.com/office/drawing/2010/main" xmlns="" w="9525">
+                  <a14:hiddenLine xmlns="" xmlns:a14="http://schemas.microsoft.com/office/drawing/2010/main" w="9525">
                     <a:solidFill>
                       <a:srgbClr val="000000"/>
                     </a:solidFill>
@@ -9841,7 +9843,7 @@
               </a:ln>
               <a:extLst>
                 <a:ext uri="{91240B29-F687-4f45-9708-019B960494DF}">
-                  <a14:hiddenLine xmlns:a14="http://schemas.microsoft.com/office/drawing/2010/main" xmlns="" w="9525">
+                  <a14:hiddenLine xmlns="" xmlns:a14="http://schemas.microsoft.com/office/drawing/2010/main" w="9525">
                     <a:solidFill>
                       <a:srgbClr val="000000"/>
                     </a:solidFill>
@@ -9931,7 +9933,7 @@
               </a:ln>
               <a:extLst>
                 <a:ext uri="{91240B29-F687-4f45-9708-019B960494DF}">
-                  <a14:hiddenLine xmlns:a14="http://schemas.microsoft.com/office/drawing/2010/main" xmlns="" w="9525">
+                  <a14:hiddenLine xmlns="" xmlns:a14="http://schemas.microsoft.com/office/drawing/2010/main" w="9525">
                     <a:solidFill>
                       <a:srgbClr val="000000"/>
                     </a:solidFill>
@@ -9993,7 +9995,7 @@
               </a:ln>
               <a:extLst>
                 <a:ext uri="{91240B29-F687-4f45-9708-019B960494DF}">
-                  <a14:hiddenLine xmlns:a14="http://schemas.microsoft.com/office/drawing/2010/main" xmlns="" w="9525">
+                  <a14:hiddenLine xmlns="" xmlns:a14="http://schemas.microsoft.com/office/drawing/2010/main" w="9525">
                     <a:solidFill>
                       <a:srgbClr val="000000"/>
                     </a:solidFill>
@@ -10055,7 +10057,7 @@
               </a:ln>
               <a:extLst>
                 <a:ext uri="{91240B29-F687-4f45-9708-019B960494DF}">
-                  <a14:hiddenLine xmlns:a14="http://schemas.microsoft.com/office/drawing/2010/main" xmlns="" w="9525">
+                  <a14:hiddenLine xmlns="" xmlns:a14="http://schemas.microsoft.com/office/drawing/2010/main" w="9525">
                     <a:solidFill>
                       <a:srgbClr val="000000"/>
                     </a:solidFill>
@@ -10145,7 +10147,7 @@
               </a:ln>
               <a:extLst>
                 <a:ext uri="{91240B29-F687-4f45-9708-019B960494DF}">
-                  <a14:hiddenLine xmlns:a14="http://schemas.microsoft.com/office/drawing/2010/main" xmlns="" w="9525">
+                  <a14:hiddenLine xmlns="" xmlns:a14="http://schemas.microsoft.com/office/drawing/2010/main" w="9525">
                     <a:solidFill>
                       <a:srgbClr val="000000"/>
                     </a:solidFill>
@@ -10235,7 +10237,7 @@
               </a:ln>
               <a:extLst>
                 <a:ext uri="{91240B29-F687-4f45-9708-019B960494DF}">
-                  <a14:hiddenLine xmlns:a14="http://schemas.microsoft.com/office/drawing/2010/main" xmlns="" w="9525">
+                  <a14:hiddenLine xmlns="" xmlns:a14="http://schemas.microsoft.com/office/drawing/2010/main" w="9525">
                     <a:solidFill>
                       <a:srgbClr val="000000"/>
                     </a:solidFill>
@@ -10297,7 +10299,7 @@
               </a:ln>
               <a:extLst>
                 <a:ext uri="{91240B29-F687-4f45-9708-019B960494DF}">
-                  <a14:hiddenLine xmlns:a14="http://schemas.microsoft.com/office/drawing/2010/main" xmlns="" w="9525">
+                  <a14:hiddenLine xmlns="" xmlns:a14="http://schemas.microsoft.com/office/drawing/2010/main" w="9525">
                     <a:solidFill>
                       <a:srgbClr val="000000"/>
                     </a:solidFill>
@@ -10407,7 +10409,7 @@
               </a:ln>
               <a:extLst>
                 <a:ext uri="{91240B29-F687-4f45-9708-019B960494DF}">
-                  <a14:hiddenLine xmlns:a14="http://schemas.microsoft.com/office/drawing/2010/main" xmlns="" w="9525">
+                  <a14:hiddenLine xmlns="" xmlns:a14="http://schemas.microsoft.com/office/drawing/2010/main" w="9525">
                     <a:solidFill>
                       <a:srgbClr val="000000"/>
                     </a:solidFill>
@@ -10491,7 +10493,7 @@
               </a:ln>
               <a:extLst>
                 <a:ext uri="{91240B29-F687-4f45-9708-019B960494DF}">
-                  <a14:hiddenLine xmlns:a14="http://schemas.microsoft.com/office/drawing/2010/main" xmlns="" w="9525">
+                  <a14:hiddenLine xmlns="" xmlns:a14="http://schemas.microsoft.com/office/drawing/2010/main" w="9525">
                     <a:solidFill>
                       <a:srgbClr val="000000"/>
                     </a:solidFill>
@@ -10553,7 +10555,7 @@
               </a:ln>
               <a:extLst>
                 <a:ext uri="{91240B29-F687-4f45-9708-019B960494DF}">
-                  <a14:hiddenLine xmlns:a14="http://schemas.microsoft.com/office/drawing/2010/main" xmlns="" w="9525">
+                  <a14:hiddenLine xmlns="" xmlns:a14="http://schemas.microsoft.com/office/drawing/2010/main" w="9525">
                     <a:solidFill>
                       <a:srgbClr val="000000"/>
                     </a:solidFill>
@@ -10615,7 +10617,7 @@
               </a:ln>
               <a:extLst>
                 <a:ext uri="{91240B29-F687-4f45-9708-019B960494DF}">
-                  <a14:hiddenLine xmlns:a14="http://schemas.microsoft.com/office/drawing/2010/main" xmlns="" w="9525">
+                  <a14:hiddenLine xmlns="" xmlns:a14="http://schemas.microsoft.com/office/drawing/2010/main" w="9525">
                     <a:solidFill>
                       <a:srgbClr val="000000"/>
                     </a:solidFill>
@@ -10705,7 +10707,7 @@
               </a:ln>
               <a:extLst>
                 <a:ext uri="{91240B29-F687-4f45-9708-019B960494DF}">
-                  <a14:hiddenLine xmlns:a14="http://schemas.microsoft.com/office/drawing/2010/main" xmlns="" w="9525">
+                  <a14:hiddenLine xmlns="" xmlns:a14="http://schemas.microsoft.com/office/drawing/2010/main" w="9525">
                     <a:solidFill>
                       <a:srgbClr val="000000"/>
                     </a:solidFill>
@@ -10739,7 +10741,7 @@
               </a:ln>
               <a:extLst>
                 <a:ext uri="{91240B29-F687-4f45-9708-019B960494DF}">
-                  <a14:hiddenLine xmlns:a14="http://schemas.microsoft.com/office/drawing/2010/main" xmlns="" w="9525">
+                  <a14:hiddenLine xmlns="" xmlns:a14="http://schemas.microsoft.com/office/drawing/2010/main" w="9525">
                     <a:solidFill>
                       <a:srgbClr val="000000"/>
                     </a:solidFill>
@@ -10804,7 +10806,7 @@
               </a:ln>
               <a:extLst>
                 <a:ext uri="{91240B29-F687-4f45-9708-019B960494DF}">
-                  <a14:hiddenLine xmlns:a14="http://schemas.microsoft.com/office/drawing/2010/main" xmlns="" w="9525">
+                  <a14:hiddenLine xmlns="" xmlns:a14="http://schemas.microsoft.com/office/drawing/2010/main" w="9525">
                     <a:solidFill>
                       <a:srgbClr val="000000"/>
                     </a:solidFill>
@@ -10894,7 +10896,7 @@
               </a:ln>
               <a:extLst>
                 <a:ext uri="{91240B29-F687-4f45-9708-019B960494DF}">
-                  <a14:hiddenLine xmlns:a14="http://schemas.microsoft.com/office/drawing/2010/main" xmlns="" w="9525">
+                  <a14:hiddenLine xmlns="" xmlns:a14="http://schemas.microsoft.com/office/drawing/2010/main" w="9525">
                     <a:solidFill>
                       <a:srgbClr val="000000"/>
                     </a:solidFill>
@@ -10956,7 +10958,7 @@
               </a:ln>
               <a:extLst>
                 <a:ext uri="{91240B29-F687-4f45-9708-019B960494DF}">
-                  <a14:hiddenLine xmlns:a14="http://schemas.microsoft.com/office/drawing/2010/main" xmlns="" w="9525">
+                  <a14:hiddenLine xmlns="" xmlns:a14="http://schemas.microsoft.com/office/drawing/2010/main" w="9525">
                     <a:solidFill>
                       <a:srgbClr val="000000"/>
                     </a:solidFill>
@@ -11046,7 +11048,7 @@
               </a:ln>
               <a:extLst>
                 <a:ext uri="{91240B29-F687-4f45-9708-019B960494DF}">
-                  <a14:hiddenLine xmlns:a14="http://schemas.microsoft.com/office/drawing/2010/main" xmlns="" w="9525">
+                  <a14:hiddenLine xmlns="" xmlns:a14="http://schemas.microsoft.com/office/drawing/2010/main" w="9525">
                     <a:solidFill>
                       <a:srgbClr val="000000"/>
                     </a:solidFill>
@@ -11111,7 +11113,7 @@
               </a:ln>
               <a:extLst>
                 <a:ext uri="{91240B29-F687-4f45-9708-019B960494DF}">
-                  <a14:hiddenLine xmlns:a14="http://schemas.microsoft.com/office/drawing/2010/main" xmlns="" w="9525">
+                  <a14:hiddenLine xmlns="" xmlns:a14="http://schemas.microsoft.com/office/drawing/2010/main" w="9525">
                     <a:solidFill>
                       <a:srgbClr val="000000"/>
                     </a:solidFill>
@@ -11173,7 +11175,7 @@
               </a:ln>
               <a:extLst>
                 <a:ext uri="{91240B29-F687-4f45-9708-019B960494DF}">
-                  <a14:hiddenLine xmlns:a14="http://schemas.microsoft.com/office/drawing/2010/main" xmlns="" w="9525">
+                  <a14:hiddenLine xmlns="" xmlns:a14="http://schemas.microsoft.com/office/drawing/2010/main" w="9525">
                     <a:solidFill>
                       <a:srgbClr val="000000"/>
                     </a:solidFill>
@@ -11263,7 +11265,7 @@
               </a:ln>
               <a:extLst>
                 <a:ext uri="{91240B29-F687-4f45-9708-019B960494DF}">
-                  <a14:hiddenLine xmlns:a14="http://schemas.microsoft.com/office/drawing/2010/main" xmlns="" w="9525">
+                  <a14:hiddenLine xmlns="" xmlns:a14="http://schemas.microsoft.com/office/drawing/2010/main" w="9525">
                     <a:solidFill>
                       <a:srgbClr val="000000"/>
                     </a:solidFill>
@@ -11353,7 +11355,7 @@
               </a:ln>
               <a:extLst>
                 <a:ext uri="{91240B29-F687-4f45-9708-019B960494DF}">
-                  <a14:hiddenLine xmlns:a14="http://schemas.microsoft.com/office/drawing/2010/main" xmlns="" w="9525">
+                  <a14:hiddenLine xmlns="" xmlns:a14="http://schemas.microsoft.com/office/drawing/2010/main" w="9525">
                     <a:solidFill>
                       <a:srgbClr val="000000"/>
                     </a:solidFill>
@@ -11418,7 +11420,7 @@
               </a:ln>
               <a:extLst>
                 <a:ext uri="{91240B29-F687-4f45-9708-019B960494DF}">
-                  <a14:hiddenLine xmlns:a14="http://schemas.microsoft.com/office/drawing/2010/main" xmlns="" w="9525">
+                  <a14:hiddenLine xmlns="" xmlns:a14="http://schemas.microsoft.com/office/drawing/2010/main" w="9525">
                     <a:solidFill>
                       <a:srgbClr val="000000"/>
                     </a:solidFill>
@@ -11538,7 +11540,7 @@
               </a:ln>
               <a:extLst>
                 <a:ext uri="{91240B29-F687-4f45-9708-019B960494DF}">
-                  <a14:hiddenLine xmlns:a14="http://schemas.microsoft.com/office/drawing/2010/main" xmlns="" w="9525">
+                  <a14:hiddenLine xmlns="" xmlns:a14="http://schemas.microsoft.com/office/drawing/2010/main" w="9525">
                     <a:solidFill>
                       <a:srgbClr val="000000"/>
                     </a:solidFill>
@@ -11619,7 +11621,7 @@
               </a:ln>
               <a:extLst>
                 <a:ext uri="{91240B29-F687-4f45-9708-019B960494DF}">
-                  <a14:hiddenLine xmlns:a14="http://schemas.microsoft.com/office/drawing/2010/main" xmlns="" w="9525">
+                  <a14:hiddenLine xmlns="" xmlns:a14="http://schemas.microsoft.com/office/drawing/2010/main" w="9525">
                     <a:solidFill>
                       <a:srgbClr val="000000"/>
                     </a:solidFill>
@@ -11734,7 +11736,7 @@
               </a:ln>
               <a:extLst>
                 <a:ext uri="{91240B29-F687-4f45-9708-019B960494DF}">
-                  <a14:hiddenLine xmlns:a14="http://schemas.microsoft.com/office/drawing/2010/main" xmlns="" w="9525">
+                  <a14:hiddenLine xmlns="" xmlns:a14="http://schemas.microsoft.com/office/drawing/2010/main" w="9525">
                     <a:solidFill>
                       <a:srgbClr val="000000"/>
                     </a:solidFill>
@@ -11824,7 +11826,7 @@
               </a:ln>
               <a:extLst>
                 <a:ext uri="{91240B29-F687-4f45-9708-019B960494DF}">
-                  <a14:hiddenLine xmlns:a14="http://schemas.microsoft.com/office/drawing/2010/main" xmlns="" w="9525">
+                  <a14:hiddenLine xmlns="" xmlns:a14="http://schemas.microsoft.com/office/drawing/2010/main" w="9525">
                     <a:solidFill>
                       <a:srgbClr val="000000"/>
                     </a:solidFill>
@@ -11889,7 +11891,7 @@
               </a:ln>
               <a:extLst>
                 <a:ext uri="{91240B29-F687-4f45-9708-019B960494DF}">
-                  <a14:hiddenLine xmlns:a14="http://schemas.microsoft.com/office/drawing/2010/main" xmlns="" w="9525">
+                  <a14:hiddenLine xmlns="" xmlns:a14="http://schemas.microsoft.com/office/drawing/2010/main" w="9525">
                     <a:solidFill>
                       <a:srgbClr val="000000"/>
                     </a:solidFill>
@@ -11979,7 +11981,7 @@
               </a:ln>
               <a:extLst>
                 <a:ext uri="{91240B29-F687-4f45-9708-019B960494DF}">
-                  <a14:hiddenLine xmlns:a14="http://schemas.microsoft.com/office/drawing/2010/main" xmlns="" w="9525">
+                  <a14:hiddenLine xmlns="" xmlns:a14="http://schemas.microsoft.com/office/drawing/2010/main" w="9525">
                     <a:solidFill>
                       <a:srgbClr val="000000"/>
                     </a:solidFill>
@@ -12047,7 +12049,7 @@
               </a:ln>
               <a:extLst>
                 <a:ext uri="{91240B29-F687-4f45-9708-019B960494DF}">
-                  <a14:hiddenLine xmlns:a14="http://schemas.microsoft.com/office/drawing/2010/main" xmlns="" w="9525">
+                  <a14:hiddenLine xmlns="" xmlns:a14="http://schemas.microsoft.com/office/drawing/2010/main" w="9525">
                     <a:solidFill>
                       <a:srgbClr val="000000"/>
                     </a:solidFill>
@@ -12137,7 +12139,7 @@
               </a:ln>
               <a:extLst>
                 <a:ext uri="{91240B29-F687-4f45-9708-019B960494DF}">
-                  <a14:hiddenLine xmlns:a14="http://schemas.microsoft.com/office/drawing/2010/main" xmlns="" w="9525">
+                  <a14:hiddenLine xmlns="" xmlns:a14="http://schemas.microsoft.com/office/drawing/2010/main" w="9525">
                     <a:solidFill>
                       <a:srgbClr val="000000"/>
                     </a:solidFill>
@@ -12205,7 +12207,7 @@
               </a:ln>
               <a:extLst>
                 <a:ext uri="{91240B29-F687-4f45-9708-019B960494DF}">
-                  <a14:hiddenLine xmlns:a14="http://schemas.microsoft.com/office/drawing/2010/main" xmlns="" w="9525">
+                  <a14:hiddenLine xmlns="" xmlns:a14="http://schemas.microsoft.com/office/drawing/2010/main" w="9525">
                     <a:solidFill>
                       <a:srgbClr val="000000"/>
                     </a:solidFill>
@@ -12295,7 +12297,7 @@
               </a:ln>
               <a:extLst>
                 <a:ext uri="{91240B29-F687-4f45-9708-019B960494DF}">
-                  <a14:hiddenLine xmlns:a14="http://schemas.microsoft.com/office/drawing/2010/main" xmlns="" w="9525">
+                  <a14:hiddenLine xmlns="" xmlns:a14="http://schemas.microsoft.com/office/drawing/2010/main" w="9525">
                     <a:solidFill>
                       <a:srgbClr val="000000"/>
                     </a:solidFill>
@@ -12329,7 +12331,7 @@
               </a:ln>
               <a:extLst>
                 <a:ext uri="{91240B29-F687-4f45-9708-019B960494DF}">
-                  <a14:hiddenLine xmlns:a14="http://schemas.microsoft.com/office/drawing/2010/main" xmlns="" w="9525">
+                  <a14:hiddenLine xmlns="" xmlns:a14="http://schemas.microsoft.com/office/drawing/2010/main" w="9525">
                     <a:solidFill>
                       <a:srgbClr val="000000"/>
                     </a:solidFill>
@@ -12469,7 +12471,7 @@
           <a:p>
             <a:fld id="{92FF8978-FE14-CC4A-93A6-934EB06543C0}" type="datetime1">
               <a:rPr lang="en-US" smtClean="0"/>
-              <a:t>9/10/26</a:t>
+              <a:t>9/15/26</a:t>
             </a:fld>
             <a:endParaRPr lang="en-US"/>
           </a:p>
@@ -14306,6 +14308,456 @@
   <p:cSld>
     <p:spTree>
       <p:nvGrpSpPr>
+        <p:cNvPr id="1" name="">
+          <a:extLst>
+            <a:ext uri="{FF2B5EF4-FFF2-40B4-BE49-F238E27FC236}">
+              <a16:creationId xmlns:a16="http://schemas.microsoft.com/office/drawing/2014/main" id="{A6B2F0E4-C58F-C5FB-CF85-889969DC27CF}"/>
+            </a:ext>
+          </a:extLst>
+        </p:cNvPr>
+        <p:cNvGrpSpPr/>
+        <p:nvPr/>
+      </p:nvGrpSpPr>
+      <p:grpSpPr>
+        <a:xfrm>
+          <a:off x="0" y="0"/>
+          <a:ext cx="0" cy="0"/>
+          <a:chOff x="0" y="0"/>
+          <a:chExt cx="0" cy="0"/>
+        </a:xfrm>
+      </p:grpSpPr>
+      <p:sp>
+        <p:nvSpPr>
+          <p:cNvPr id="6146" name="Rectangle 2">
+            <a:extLst>
+              <a:ext uri="{FF2B5EF4-FFF2-40B4-BE49-F238E27FC236}">
+                <a16:creationId xmlns:a16="http://schemas.microsoft.com/office/drawing/2014/main" id="{E20399C6-7F38-7C99-A332-AB14ABCE2E53}"/>
+              </a:ext>
+            </a:extLst>
+          </p:cNvPr>
+          <p:cNvSpPr>
+            <a:spLocks noGrp="1" noChangeArrowheads="1"/>
+          </p:cNvSpPr>
+          <p:nvPr>
+            <p:ph type="title"/>
+            <p:custDataLst>
+              <p:tags r:id="rId1"/>
+            </p:custDataLst>
+          </p:nvPr>
+        </p:nvSpPr>
+        <p:spPr>
+          <a:xfrm>
+            <a:off x="1141413" y="284084"/>
+            <a:ext cx="9905998" cy="620791"/>
+          </a:xfrm>
+        </p:spPr>
+        <p:txBody>
+          <a:bodyPr/>
+          <a:lstStyle/>
+          <a:p>
+            <a:pPr algn="ctr"/>
+            <a:r>
+              <a:rPr lang="en-US" dirty="0"/>
+              <a:t>Lecture 7 - Tuesday, Sep. 15</a:t>
+            </a:r>
+          </a:p>
+        </p:txBody>
+      </p:sp>
+      <p:sp>
+        <p:nvSpPr>
+          <p:cNvPr id="6147" name="Rectangle 3">
+            <a:extLst>
+              <a:ext uri="{FF2B5EF4-FFF2-40B4-BE49-F238E27FC236}">
+                <a16:creationId xmlns:a16="http://schemas.microsoft.com/office/drawing/2014/main" id="{A51177BB-7848-6E8A-D293-654E3D3D78AD}"/>
+              </a:ext>
+            </a:extLst>
+          </p:cNvPr>
+          <p:cNvSpPr>
+            <a:spLocks noGrp="1" noChangeArrowheads="1"/>
+          </p:cNvSpPr>
+          <p:nvPr>
+            <p:ph idx="1"/>
+            <p:custDataLst>
+              <p:tags r:id="rId2"/>
+            </p:custDataLst>
+          </p:nvPr>
+        </p:nvSpPr>
+        <p:spPr>
+          <a:xfrm>
+            <a:off x="1294151" y="1098548"/>
+            <a:ext cx="9600522" cy="5475367"/>
+          </a:xfrm>
+        </p:spPr>
+        <p:txBody>
+          <a:bodyPr>
+            <a:normAutofit fontScale="77500" lnSpcReduction="20000"/>
+          </a:bodyPr>
+          <a:lstStyle/>
+          <a:p>
+            <a:r>
+              <a:rPr lang="en-US" dirty="0">
+                <a:latin typeface="Arial" panose="020B0604020202020204" pitchFamily="34" charset="0"/>
+                <a:cs typeface="Arial" panose="020B0604020202020204" pitchFamily="34" charset="0"/>
+              </a:rPr>
+              <a:t>Please remember </a:t>
+            </a:r>
+            <a:r>
+              <a:rPr lang="en-US" b="1" i="1" u="sng" dirty="0">
+                <a:latin typeface="Arial" panose="020B0604020202020204" pitchFamily="34" charset="0"/>
+                <a:cs typeface="Arial" panose="020B0604020202020204" pitchFamily="34" charset="0"/>
+              </a:rPr>
+              <a:t>no laptops / phones</a:t>
+            </a:r>
+            <a:r>
+              <a:rPr lang="en-US" dirty="0">
+                <a:latin typeface="Arial" panose="020B0604020202020204" pitchFamily="34" charset="0"/>
+                <a:cs typeface="Arial" panose="020B0604020202020204" pitchFamily="34" charset="0"/>
+              </a:rPr>
+              <a:t> and </a:t>
+            </a:r>
+            <a:r>
+              <a:rPr lang="en-US" b="1" i="1" u="sng" dirty="0">
+                <a:latin typeface="Arial" panose="020B0604020202020204" pitchFamily="34" charset="0"/>
+                <a:cs typeface="Arial" panose="020B0604020202020204" pitchFamily="34" charset="0"/>
+              </a:rPr>
+              <a:t>attendance policy</a:t>
+            </a:r>
+          </a:p>
+          <a:p>
+            <a:r>
+              <a:rPr lang="en-US" dirty="0">
+                <a:latin typeface="Arial" panose="020B0604020202020204" pitchFamily="34" charset="0"/>
+                <a:cs typeface="Arial" panose="020B0604020202020204" pitchFamily="34" charset="0"/>
+              </a:rPr>
+              <a:t>Module 0 homework has been returned! Let Thomas know if you have any questions or concerns</a:t>
+            </a:r>
+          </a:p>
+          <a:p>
+            <a:r>
+              <a:rPr lang="en-US" dirty="0">
+                <a:latin typeface="Arial" panose="020B0604020202020204" pitchFamily="34" charset="0"/>
+                <a:cs typeface="Arial" panose="020B0604020202020204" pitchFamily="34" charset="0"/>
+              </a:rPr>
+              <a:t>This week:</a:t>
+            </a:r>
+          </a:p>
+          <a:p>
+            <a:pPr lvl="1"/>
+            <a:r>
+              <a:rPr lang="en-US" dirty="0">
+                <a:latin typeface="Arial" panose="020B0604020202020204" pitchFamily="34" charset="0"/>
+                <a:cs typeface="Arial" panose="020B0604020202020204" pitchFamily="34" charset="0"/>
+              </a:rPr>
+              <a:t>Written Assignment for Module 1 is due on Thursday!!</a:t>
+            </a:r>
+          </a:p>
+          <a:p>
+            <a:pPr lvl="1"/>
+            <a:r>
+              <a:rPr lang="en-US" dirty="0">
+                <a:latin typeface="Arial" panose="020B0604020202020204" pitchFamily="34" charset="0"/>
+                <a:cs typeface="Arial" panose="020B0604020202020204" pitchFamily="34" charset="0"/>
+              </a:rPr>
+              <a:t>Study for the first quiz!</a:t>
+            </a:r>
+          </a:p>
+          <a:p>
+            <a:r>
+              <a:rPr lang="en-US" dirty="0">
+                <a:latin typeface="Arial" panose="020B0604020202020204" pitchFamily="34" charset="0"/>
+                <a:cs typeface="Arial" panose="020B0604020202020204" pitchFamily="34" charset="0"/>
+              </a:rPr>
+              <a:t>Module 1 Practice Quiz</a:t>
+            </a:r>
+          </a:p>
+          <a:p>
+            <a:pPr lvl="1"/>
+            <a:r>
+              <a:rPr lang="en-US" dirty="0">
+                <a:latin typeface="Arial" panose="020B0604020202020204" pitchFamily="34" charset="0"/>
+                <a:cs typeface="Arial" panose="020B0604020202020204" pitchFamily="34" charset="0"/>
+              </a:rPr>
+              <a:t>You have been invited to the Prairie Learn / Test. Please go in and accept the invitation ASAP!</a:t>
+            </a:r>
+          </a:p>
+          <a:p>
+            <a:pPr lvl="1"/>
+            <a:r>
+              <a:rPr lang="en-US" dirty="0">
+                <a:latin typeface="Arial" panose="020B0604020202020204" pitchFamily="34" charset="0"/>
+                <a:cs typeface="Arial" panose="020B0604020202020204" pitchFamily="34" charset="0"/>
+              </a:rPr>
+              <a:t>Prairie Learn now has a practice quiz that you can take to get used to the mechanics of the questions.</a:t>
+            </a:r>
+          </a:p>
+          <a:p>
+            <a:r>
+              <a:rPr lang="en-US" dirty="0">
+                <a:latin typeface="Arial" panose="020B0604020202020204" pitchFamily="34" charset="0"/>
+                <a:cs typeface="Arial" panose="020B0604020202020204" pitchFamily="34" charset="0"/>
+              </a:rPr>
+              <a:t>First real quiz is NEXT week</a:t>
+            </a:r>
+          </a:p>
+          <a:p>
+            <a:pPr lvl="1"/>
+            <a:r>
+              <a:rPr lang="en-US" dirty="0">
+                <a:latin typeface="Arial" panose="020B0604020202020204" pitchFamily="34" charset="0"/>
+                <a:cs typeface="Arial" panose="020B0604020202020204" pitchFamily="34" charset="0"/>
+              </a:rPr>
+              <a:t>Reservations are open NOW on Prairie Test. Please login and make your reservation ASAP!</a:t>
+            </a:r>
+          </a:p>
+          <a:p>
+            <a:pPr lvl="1"/>
+            <a:r>
+              <a:rPr lang="en-US" dirty="0">
+                <a:latin typeface="Arial" panose="020B0604020202020204" pitchFamily="34" charset="0"/>
+                <a:cs typeface="Arial" panose="020B0604020202020204" pitchFamily="34" charset="0"/>
+              </a:rPr>
+              <a:t>Overview of the questions is on the next slide</a:t>
+            </a:r>
+          </a:p>
+          <a:p>
+            <a:r>
+              <a:rPr lang="en-US" dirty="0">
+                <a:latin typeface="Arial" panose="020B0604020202020204" pitchFamily="34" charset="0"/>
+                <a:cs typeface="Arial" panose="020B0604020202020204" pitchFamily="34" charset="0"/>
+              </a:rPr>
+              <a:t>These slides are linked on the course webpage “slides” page.</a:t>
+            </a:r>
+          </a:p>
+          <a:p>
+            <a:r>
+              <a:rPr lang="en-US" dirty="0">
+                <a:latin typeface="Arial" panose="020B0604020202020204" pitchFamily="34" charset="0"/>
+                <a:cs typeface="Arial" panose="020B0604020202020204" pitchFamily="34" charset="0"/>
+              </a:rPr>
+              <a:t>Today we will continue with module 1 on regular languages.</a:t>
+            </a:r>
+          </a:p>
+        </p:txBody>
+      </p:sp>
+    </p:spTree>
+    <p:extLst>
+      <p:ext uri="{BB962C8B-B14F-4D97-AF65-F5344CB8AC3E}">
+        <p14:creationId xmlns:p14="http://schemas.microsoft.com/office/powerpoint/2010/main" val="2166409388"/>
+      </p:ext>
+    </p:extLst>
+  </p:cSld>
+  <p:clrMapOvr>
+    <a:masterClrMapping/>
+  </p:clrMapOvr>
+</p:sld>
+</file>
+
+<file path=ppt/slides/slide8.xml><?xml version="1.0" encoding="utf-8"?>
+<p:sld xmlns:a="http://schemas.openxmlformats.org/drawingml/2006/main" xmlns:r="http://schemas.openxmlformats.org/officeDocument/2006/relationships" xmlns:p="http://schemas.openxmlformats.org/presentationml/2006/main">
+  <p:cSld>
+    <p:spTree>
+      <p:nvGrpSpPr>
+        <p:cNvPr id="1" name="">
+          <a:extLst>
+            <a:ext uri="{FF2B5EF4-FFF2-40B4-BE49-F238E27FC236}">
+              <a16:creationId xmlns:a16="http://schemas.microsoft.com/office/drawing/2014/main" id="{BD983385-6C8F-46CD-2B07-00E8119F8A3B}"/>
+            </a:ext>
+          </a:extLst>
+        </p:cNvPr>
+        <p:cNvGrpSpPr/>
+        <p:nvPr/>
+      </p:nvGrpSpPr>
+      <p:grpSpPr>
+        <a:xfrm>
+          <a:off x="0" y="0"/>
+          <a:ext cx="0" cy="0"/>
+          <a:chOff x="0" y="0"/>
+          <a:chExt cx="0" cy="0"/>
+        </a:xfrm>
+      </p:grpSpPr>
+      <p:sp>
+        <p:nvSpPr>
+          <p:cNvPr id="6146" name="Rectangle 2">
+            <a:extLst>
+              <a:ext uri="{FF2B5EF4-FFF2-40B4-BE49-F238E27FC236}">
+                <a16:creationId xmlns:a16="http://schemas.microsoft.com/office/drawing/2014/main" id="{32A1F65C-6252-AE60-522B-8F061101A2E7}"/>
+              </a:ext>
+            </a:extLst>
+          </p:cNvPr>
+          <p:cNvSpPr>
+            <a:spLocks noGrp="1" noChangeArrowheads="1"/>
+          </p:cNvSpPr>
+          <p:nvPr>
+            <p:ph type="title"/>
+            <p:custDataLst>
+              <p:tags r:id="rId1"/>
+            </p:custDataLst>
+          </p:nvPr>
+        </p:nvSpPr>
+        <p:spPr>
+          <a:xfrm>
+            <a:off x="1141413" y="284084"/>
+            <a:ext cx="9905998" cy="620791"/>
+          </a:xfrm>
+        </p:spPr>
+        <p:txBody>
+          <a:bodyPr/>
+          <a:lstStyle/>
+          <a:p>
+            <a:pPr algn="ctr"/>
+            <a:r>
+              <a:rPr lang="en-US" dirty="0"/>
+              <a:t>Quiz 1 – Question Summary</a:t>
+            </a:r>
+          </a:p>
+        </p:txBody>
+      </p:sp>
+      <p:sp>
+        <p:nvSpPr>
+          <p:cNvPr id="6147" name="Rectangle 3">
+            <a:extLst>
+              <a:ext uri="{FF2B5EF4-FFF2-40B4-BE49-F238E27FC236}">
+                <a16:creationId xmlns:a16="http://schemas.microsoft.com/office/drawing/2014/main" id="{3417B98D-521A-B9E3-4522-F6B1F5050BA4}"/>
+              </a:ext>
+            </a:extLst>
+          </p:cNvPr>
+          <p:cNvSpPr>
+            <a:spLocks noGrp="1" noChangeArrowheads="1"/>
+          </p:cNvSpPr>
+          <p:nvPr>
+            <p:ph idx="1"/>
+            <p:custDataLst>
+              <p:tags r:id="rId2"/>
+            </p:custDataLst>
+          </p:nvPr>
+        </p:nvSpPr>
+        <p:spPr>
+          <a:xfrm>
+            <a:off x="1664842" y="1311217"/>
+            <a:ext cx="8859140" cy="5202315"/>
+          </a:xfrm>
+        </p:spPr>
+        <p:txBody>
+          <a:bodyPr>
+            <a:normAutofit/>
+          </a:bodyPr>
+          <a:lstStyle/>
+          <a:p>
+            <a:r>
+              <a:rPr lang="en-US" dirty="0">
+                <a:latin typeface="Arial" panose="020B0604020202020204" pitchFamily="34" charset="0"/>
+                <a:cs typeface="Arial" panose="020B0604020202020204" pitchFamily="34" charset="0"/>
+              </a:rPr>
+              <a:t>Q1: True / False Questions (10 of them)</a:t>
+            </a:r>
+          </a:p>
+          <a:p>
+            <a:pPr lvl="1"/>
+            <a:r>
+              <a:rPr lang="en-US" dirty="0">
+                <a:latin typeface="Arial" panose="020B0604020202020204" pitchFamily="34" charset="0"/>
+                <a:cs typeface="Arial" panose="020B0604020202020204" pitchFamily="34" charset="0"/>
+              </a:rPr>
+              <a:t>Span the entire module, may reference module 0 material</a:t>
+            </a:r>
+          </a:p>
+          <a:p>
+            <a:r>
+              <a:rPr lang="en-US" dirty="0">
+                <a:latin typeface="Arial" panose="020B0604020202020204" pitchFamily="34" charset="0"/>
+                <a:cs typeface="Arial" panose="020B0604020202020204" pitchFamily="34" charset="0"/>
+              </a:rPr>
+              <a:t>Q2-3: Draw a DFA from description (2 of these)</a:t>
+            </a:r>
+          </a:p>
+          <a:p>
+            <a:pPr lvl="1"/>
+            <a:r>
+              <a:rPr lang="en-US" dirty="0">
+                <a:latin typeface="Arial" panose="020B0604020202020204" pitchFamily="34" charset="0"/>
+                <a:cs typeface="Arial" panose="020B0604020202020204" pitchFamily="34" charset="0"/>
+              </a:rPr>
+              <a:t>Given a language description, draw the DFA for that language</a:t>
+            </a:r>
+          </a:p>
+          <a:p>
+            <a:r>
+              <a:rPr lang="en-US" dirty="0">
+                <a:latin typeface="Arial" panose="020B0604020202020204" pitchFamily="34" charset="0"/>
+                <a:cs typeface="Arial" panose="020B0604020202020204" pitchFamily="34" charset="0"/>
+              </a:rPr>
+              <a:t>Q4-5: Write out regular expression from DFA (2 of these)</a:t>
+            </a:r>
+          </a:p>
+          <a:p>
+            <a:pPr lvl="1"/>
+            <a:r>
+              <a:rPr lang="en-US" dirty="0">
+                <a:latin typeface="Arial" panose="020B0604020202020204" pitchFamily="34" charset="0"/>
+                <a:cs typeface="Arial" panose="020B0604020202020204" pitchFamily="34" charset="0"/>
+              </a:rPr>
+              <a:t>Given an image of a DFA, write the equivalent regular expression for it</a:t>
+            </a:r>
+          </a:p>
+          <a:p>
+            <a:pPr lvl="1"/>
+            <a:r>
+              <a:rPr lang="en-US" dirty="0">
+                <a:latin typeface="Arial" panose="020B0604020202020204" pitchFamily="34" charset="0"/>
+                <a:cs typeface="Arial" panose="020B0604020202020204" pitchFamily="34" charset="0"/>
+              </a:rPr>
+              <a:t>We will study this concept TODAY</a:t>
+            </a:r>
+          </a:p>
+          <a:p>
+            <a:r>
+              <a:rPr lang="en-US" dirty="0">
+                <a:latin typeface="Arial" panose="020B0604020202020204" pitchFamily="34" charset="0"/>
+                <a:cs typeface="Arial" panose="020B0604020202020204" pitchFamily="34" charset="0"/>
+              </a:rPr>
+              <a:t>Q6: Pumping Lemma</a:t>
+            </a:r>
+          </a:p>
+          <a:p>
+            <a:pPr lvl="1"/>
+            <a:r>
+              <a:rPr lang="en-US" dirty="0">
+                <a:latin typeface="Arial" panose="020B0604020202020204" pitchFamily="34" charset="0"/>
+                <a:cs typeface="Arial" panose="020B0604020202020204" pitchFamily="34" charset="0"/>
+              </a:rPr>
+              <a:t>Prove a language is not regular by using the pumping lemma</a:t>
+            </a:r>
+          </a:p>
+          <a:p>
+            <a:pPr lvl="1"/>
+            <a:r>
+              <a:rPr lang="en-US" dirty="0">
+                <a:latin typeface="Arial" panose="020B0604020202020204" pitchFamily="34" charset="0"/>
+                <a:cs typeface="Arial" panose="020B0604020202020204" pitchFamily="34" charset="0"/>
+              </a:rPr>
+              <a:t>We will study this concept on THURSDAY</a:t>
+            </a:r>
+          </a:p>
+        </p:txBody>
+      </p:sp>
+    </p:spTree>
+    <p:extLst>
+      <p:ext uri="{BB962C8B-B14F-4D97-AF65-F5344CB8AC3E}">
+        <p14:creationId xmlns:p14="http://schemas.microsoft.com/office/powerpoint/2010/main" val="2190362403"/>
+      </p:ext>
+    </p:extLst>
+  </p:cSld>
+  <p:clrMapOvr>
+    <a:masterClrMapping/>
+  </p:clrMapOvr>
+</p:sld>
+</file>
+
+<file path=ppt/slides/slide9.xml><?xml version="1.0" encoding="utf-8"?>
+<p:sld xmlns:a="http://schemas.openxmlformats.org/drawingml/2006/main" xmlns:r="http://schemas.openxmlformats.org/officeDocument/2006/relationships" xmlns:p="http://schemas.openxmlformats.org/presentationml/2006/main">
+  <p:cSld>
+    <p:spTree>
+      <p:nvGrpSpPr>
         <p:cNvPr id="1" name=""/>
         <p:cNvGrpSpPr/>
         <p:nvPr/>
@@ -14642,7 +15094,7 @@
           <p:nvPr>
             <p:extLst>
               <p:ext uri="{D42A27DB-BD31-4B8C-83A1-F6EECF244321}">
-                <p14:modId xmlns:p14="http://schemas.microsoft.com/office/powerpoint/2010/main" val="1569035790"/>
+                <p14:modId xmlns:p14="http://schemas.microsoft.com/office/powerpoint/2010/main" val="1220026444"/>
               </p:ext>
             </p:extLst>
           </p:nvPr>
@@ -14738,7 +15190,7 @@
                       <a:pPr algn="ctr"/>
                       <a:r>
                         <a:rPr lang="en-US" i="0" dirty="0"/>
-                        <a:t>5</a:t>
+                        <a:t>6</a:t>
                       </a:r>
                     </a:p>
                   </a:txBody>
@@ -14752,7 +15204,7 @@
                       <a:pPr algn="ctr"/>
                       <a:r>
                         <a:rPr lang="en-US" i="0" dirty="0"/>
-                        <a:t>5</a:t>
+                        <a:t>6</a:t>
                       </a:r>
                     </a:p>
                   </a:txBody>
@@ -15534,7 +15986,7 @@
           <p:nvPr>
             <p:extLst>
               <p:ext uri="{D42A27DB-BD31-4B8C-83A1-F6EECF244321}">
-                <p14:modId xmlns:p14="http://schemas.microsoft.com/office/powerpoint/2010/main" val="2425957762"/>
+                <p14:modId xmlns:p14="http://schemas.microsoft.com/office/powerpoint/2010/main" val="3626772447"/>
               </p:ext>
             </p:extLst>
           </p:nvPr>
@@ -15630,7 +16082,7 @@
                       <a:pPr algn="ctr"/>
                       <a:r>
                         <a:rPr lang="en-US" i="0" dirty="0"/>
-                        <a:t>2</a:t>
+                        <a:t>3</a:t>
                       </a:r>
                     </a:p>
                   </a:txBody>
@@ -15644,7 +16096,7 @@
                       <a:pPr algn="ctr"/>
                       <a:r>
                         <a:rPr lang="en-US" i="0" dirty="0"/>
-                        <a:t>2</a:t>
+                        <a:t>3</a:t>
                       </a:r>
                     </a:p>
                   </a:txBody>
@@ -15922,7 +16374,7 @@
           <p:nvPr>
             <p:extLst>
               <p:ext uri="{D42A27DB-BD31-4B8C-83A1-F6EECF244321}">
-                <p14:modId xmlns:p14="http://schemas.microsoft.com/office/powerpoint/2010/main" val="2180148324"/>
+                <p14:modId xmlns:p14="http://schemas.microsoft.com/office/powerpoint/2010/main" val="2618045101"/>
               </p:ext>
             </p:extLst>
           </p:nvPr>
@@ -16018,7 +16470,7 @@
                       <a:pPr algn="ctr"/>
                       <a:r>
                         <a:rPr lang="en-US" i="0" dirty="0"/>
-                        <a:t>5</a:t>
+                        <a:t>6</a:t>
                       </a:r>
                     </a:p>
                   </a:txBody>
@@ -16032,7 +16484,7 @@
                       <a:pPr algn="ctr"/>
                       <a:r>
                         <a:rPr lang="en-US" i="0" dirty="0"/>
-                        <a:t>5</a:t>
+                        <a:t>6</a:t>
                       </a:r>
                     </a:p>
                   </a:txBody>
@@ -16303,7 +16755,7 @@
           <p:nvPr>
             <p:extLst>
               <p:ext uri="{D42A27DB-BD31-4B8C-83A1-F6EECF244321}">
-                <p14:modId xmlns:p14="http://schemas.microsoft.com/office/powerpoint/2010/main" val="1809022337"/>
+                <p14:modId xmlns:p14="http://schemas.microsoft.com/office/powerpoint/2010/main" val="1958645561"/>
               </p:ext>
             </p:extLst>
           </p:nvPr>
@@ -16399,7 +16851,7 @@
                       <a:pPr algn="ctr"/>
                       <a:r>
                         <a:rPr lang="en-US" i="0" dirty="0"/>
-                        <a:t>2</a:t>
+                        <a:t>3</a:t>
                       </a:r>
                     </a:p>
                   </a:txBody>
@@ -16413,7 +16865,7 @@
                       <a:pPr algn="ctr"/>
                       <a:r>
                         <a:rPr lang="en-US" i="0" dirty="0"/>
-                        <a:t>2</a:t>
+                        <a:t>3</a:t>
                       </a:r>
                     </a:p>
                   </a:txBody>
@@ -16504,7 +16956,31 @@
 </p:tagLst>
 </file>
 
+<file path=ppt/tags/tag17.xml><?xml version="1.0" encoding="utf-8"?>
+<p:tagLst xmlns:a="http://schemas.openxmlformats.org/drawingml/2006/main" xmlns:r="http://schemas.openxmlformats.org/officeDocument/2006/relationships" xmlns:p="http://schemas.openxmlformats.org/presentationml/2006/main">
+  <p:tag name="_INSTRUCTOR VIEW19C14C36-AC8E-43BC-9DB6-C2AAF774C7DC|PANE__TAG" val="_"/>
+</p:tagLst>
+</file>
+
+<file path=ppt/tags/tag18.xml><?xml version="1.0" encoding="utf-8"?>
+<p:tagLst xmlns:a="http://schemas.openxmlformats.org/drawingml/2006/main" xmlns:r="http://schemas.openxmlformats.org/officeDocument/2006/relationships" xmlns:p="http://schemas.openxmlformats.org/presentationml/2006/main">
+  <p:tag name="_INSTRUCTOR VIEW19C14C36-AC8E-43BC-9DB6-C2AAF774C7DC|PANE__TAG" val="_"/>
+</p:tagLst>
+</file>
+
+<file path=ppt/tags/tag19.xml><?xml version="1.0" encoding="utf-8"?>
+<p:tagLst xmlns:a="http://schemas.openxmlformats.org/drawingml/2006/main" xmlns:r="http://schemas.openxmlformats.org/officeDocument/2006/relationships" xmlns:p="http://schemas.openxmlformats.org/presentationml/2006/main">
+  <p:tag name="_INSTRUCTOR VIEW19C14C36-AC8E-43BC-9DB6-C2AAF774C7DC|PANE__TAG" val="_"/>
+</p:tagLst>
+</file>
+
 <file path=ppt/tags/tag2.xml><?xml version="1.0" encoding="utf-8"?>
+<p:tagLst xmlns:a="http://schemas.openxmlformats.org/drawingml/2006/main" xmlns:r="http://schemas.openxmlformats.org/officeDocument/2006/relationships" xmlns:p="http://schemas.openxmlformats.org/presentationml/2006/main">
+  <p:tag name="_INSTRUCTOR VIEW19C14C36-AC8E-43BC-9DB6-C2AAF774C7DC|PANE__TAG" val="_"/>
+</p:tagLst>
+</file>
+
+<file path=ppt/tags/tag20.xml><?xml version="1.0" encoding="utf-8"?>
 <p:tagLst xmlns:a="http://schemas.openxmlformats.org/drawingml/2006/main" xmlns:r="http://schemas.openxmlformats.org/officeDocument/2006/relationships" xmlns:p="http://schemas.openxmlformats.org/presentationml/2006/main">
   <p:tag name="_INSTRUCTOR VIEW19C14C36-AC8E-43BC-9DB6-C2AAF774C7DC|PANE__TAG" val="_"/>
 </p:tagLst>

--- a/slides/00-DailyAnnouncements.pptx
+++ b/slides/00-DailyAnnouncements.pptx
@@ -5,7 +5,7 @@
     <p:sldMasterId id="2147484006" r:id="rId1"/>
   </p:sldMasterIdLst>
   <p:notesMasterIdLst>
-    <p:notesMasterId r:id="rId11"/>
+    <p:notesMasterId r:id="rId13"/>
   </p:notesMasterIdLst>
   <p:sldIdLst>
     <p:sldId id="256" r:id="rId2"/>
@@ -16,7 +16,9 @@
     <p:sldId id="519" r:id="rId7"/>
     <p:sldId id="520" r:id="rId8"/>
     <p:sldId id="521" r:id="rId9"/>
-    <p:sldId id="515" r:id="rId10"/>
+    <p:sldId id="522" r:id="rId10"/>
+    <p:sldId id="523" r:id="rId11"/>
+    <p:sldId id="515" r:id="rId12"/>
   </p:sldIdLst>
   <p:sldSz cx="12192000" cy="6858000"/>
   <p:notesSz cx="6858000" cy="9144000"/>
@@ -12989,195 +12991,7 @@
 </p:sld>
 </file>
 
-<file path=ppt/slides/slide2.xml><?xml version="1.0" encoding="utf-8"?>
-<p:sld xmlns:a="http://schemas.openxmlformats.org/drawingml/2006/main" xmlns:r="http://schemas.openxmlformats.org/officeDocument/2006/relationships" xmlns:p="http://schemas.openxmlformats.org/presentationml/2006/main">
-  <p:cSld>
-    <p:spTree>
-      <p:nvGrpSpPr>
-        <p:cNvPr id="1" name=""/>
-        <p:cNvGrpSpPr/>
-        <p:nvPr/>
-      </p:nvGrpSpPr>
-      <p:grpSpPr>
-        <a:xfrm>
-          <a:off x="0" y="0"/>
-          <a:ext cx="0" cy="0"/>
-          <a:chOff x="0" y="0"/>
-          <a:chExt cx="0" cy="0"/>
-        </a:xfrm>
-      </p:grpSpPr>
-      <p:sp>
-        <p:nvSpPr>
-          <p:cNvPr id="6146" name="Rectangle 2"/>
-          <p:cNvSpPr>
-            <a:spLocks noGrp="1" noChangeArrowheads="1"/>
-          </p:cNvSpPr>
-          <p:nvPr>
-            <p:ph type="title"/>
-            <p:custDataLst>
-              <p:tags r:id="rId1"/>
-            </p:custDataLst>
-          </p:nvPr>
-        </p:nvSpPr>
-        <p:spPr>
-          <a:xfrm>
-            <a:off x="1141413" y="284084"/>
-            <a:ext cx="9905998" cy="620791"/>
-          </a:xfrm>
-        </p:spPr>
-        <p:txBody>
-          <a:bodyPr/>
-          <a:lstStyle/>
-          <a:p>
-            <a:pPr algn="ctr"/>
-            <a:r>
-              <a:rPr lang="en-US" dirty="0"/>
-              <a:t>Lecture 2 - Thursday, Aug. 27</a:t>
-            </a:r>
-          </a:p>
-        </p:txBody>
-      </p:sp>
-      <p:sp>
-        <p:nvSpPr>
-          <p:cNvPr id="6147" name="Rectangle 3"/>
-          <p:cNvSpPr>
-            <a:spLocks noGrp="1" noChangeArrowheads="1"/>
-          </p:cNvSpPr>
-          <p:nvPr>
-            <p:ph idx="1"/>
-            <p:custDataLst>
-              <p:tags r:id="rId2"/>
-            </p:custDataLst>
-          </p:nvPr>
-        </p:nvSpPr>
-        <p:spPr>
-          <a:xfrm>
-            <a:off x="1294151" y="1098549"/>
-            <a:ext cx="9600522" cy="5149850"/>
-          </a:xfrm>
-        </p:spPr>
-        <p:txBody>
-          <a:bodyPr>
-            <a:normAutofit/>
-          </a:bodyPr>
-          <a:lstStyle/>
-          <a:p>
-            <a:r>
-              <a:rPr lang="en-US" dirty="0">
-                <a:latin typeface="Arial" panose="020B0604020202020204" pitchFamily="34" charset="0"/>
-                <a:cs typeface="Arial" panose="020B0604020202020204" pitchFamily="34" charset="0"/>
-              </a:rPr>
-              <a:t>Any questions about course policies from last time?</a:t>
-            </a:r>
-          </a:p>
-          <a:p>
-            <a:r>
-              <a:rPr lang="en-US" dirty="0">
-                <a:latin typeface="Arial" panose="020B0604020202020204" pitchFamily="34" charset="0"/>
-                <a:cs typeface="Arial" panose="020B0604020202020204" pitchFamily="34" charset="0"/>
-              </a:rPr>
-              <a:t>Please remember </a:t>
-            </a:r>
-            <a:r>
-              <a:rPr lang="en-US" b="1" i="1" u="sng" dirty="0">
-                <a:latin typeface="Arial" panose="020B0604020202020204" pitchFamily="34" charset="0"/>
-                <a:cs typeface="Arial" panose="020B0604020202020204" pitchFamily="34" charset="0"/>
-              </a:rPr>
-              <a:t>no laptops / phones</a:t>
-            </a:r>
-            <a:r>
-              <a:rPr lang="en-US" dirty="0">
-                <a:latin typeface="Arial" panose="020B0604020202020204" pitchFamily="34" charset="0"/>
-                <a:cs typeface="Arial" panose="020B0604020202020204" pitchFamily="34" charset="0"/>
-              </a:rPr>
-              <a:t> and </a:t>
-            </a:r>
-            <a:r>
-              <a:rPr lang="en-US" b="1" i="1" u="sng" dirty="0">
-                <a:latin typeface="Arial" panose="020B0604020202020204" pitchFamily="34" charset="0"/>
-                <a:cs typeface="Arial" panose="020B0604020202020204" pitchFamily="34" charset="0"/>
-              </a:rPr>
-              <a:t>attendance policy</a:t>
-            </a:r>
-          </a:p>
-          <a:p>
-            <a:r>
-              <a:rPr lang="en-US" dirty="0">
-                <a:latin typeface="Arial" panose="020B0604020202020204" pitchFamily="34" charset="0"/>
-                <a:cs typeface="Arial" panose="020B0604020202020204" pitchFamily="34" charset="0"/>
-              </a:rPr>
-              <a:t>First homework  is due one week from today (Thursday)</a:t>
-            </a:r>
-          </a:p>
-          <a:p>
-            <a:pPr lvl="1"/>
-            <a:r>
-              <a:rPr lang="en-US" dirty="0">
-                <a:latin typeface="Arial" panose="020B0604020202020204" pitchFamily="34" charset="0"/>
-                <a:cs typeface="Arial" panose="020B0604020202020204" pitchFamily="34" charset="0"/>
-              </a:rPr>
-              <a:t>Remember you can get an extension by filling out form linked on HW page</a:t>
-            </a:r>
-          </a:p>
-          <a:p>
-            <a:pPr lvl="1"/>
-            <a:r>
-              <a:rPr lang="en-US" dirty="0">
-                <a:latin typeface="Arial" panose="020B0604020202020204" pitchFamily="34" charset="0"/>
-                <a:cs typeface="Arial" panose="020B0604020202020204" pitchFamily="34" charset="0"/>
-              </a:rPr>
-              <a:t>Hopefully we get through enough material. Might be tight.</a:t>
-            </a:r>
-          </a:p>
-          <a:p>
-            <a:r>
-              <a:rPr lang="en-US" dirty="0">
-                <a:latin typeface="Arial" panose="020B0604020202020204" pitchFamily="34" charset="0"/>
-                <a:cs typeface="Arial" panose="020B0604020202020204" pitchFamily="34" charset="0"/>
-              </a:rPr>
-              <a:t>First quiz is 9/22 (but we have some time before that arrives)</a:t>
-            </a:r>
-          </a:p>
-          <a:p>
-            <a:r>
-              <a:rPr lang="en-US" dirty="0">
-                <a:latin typeface="Arial" panose="020B0604020202020204" pitchFamily="34" charset="0"/>
-                <a:cs typeface="Arial" panose="020B0604020202020204" pitchFamily="34" charset="0"/>
-              </a:rPr>
-              <a:t>These slides are linked on the course webpage “slides” page.</a:t>
-            </a:r>
-          </a:p>
-          <a:p>
-            <a:r>
-              <a:rPr lang="en-US" dirty="0">
-                <a:latin typeface="Arial" panose="020B0604020202020204" pitchFamily="34" charset="0"/>
-                <a:cs typeface="Arial" panose="020B0604020202020204" pitchFamily="34" charset="0"/>
-              </a:rPr>
-              <a:t>Today we will start module 0 which is a half review, half overview of what to expect in the course.</a:t>
-            </a:r>
-          </a:p>
-          <a:p>
-            <a:endParaRPr lang="en-US" dirty="0">
-              <a:latin typeface="Arial" panose="020B0604020202020204" pitchFamily="34" charset="0"/>
-              <a:cs typeface="Arial" panose="020B0604020202020204" pitchFamily="34" charset="0"/>
-            </a:endParaRPr>
-          </a:p>
-        </p:txBody>
-      </p:sp>
-    </p:spTree>
-    <p:extLst>
-      <p:ext uri="{BB962C8B-B14F-4D97-AF65-F5344CB8AC3E}">
-        <p14:creationId xmlns:p14="http://schemas.microsoft.com/office/powerpoint/2010/main" val="2431754002"/>
-      </p:ext>
-    </p:extLst>
-  </p:cSld>
-  <p:clrMapOvr>
-    <a:masterClrMapping/>
-  </p:clrMapOvr>
-</p:sld>
-</file>
-
-<file path=ppt/slides/slide3.xml><?xml version="1.0" encoding="utf-8"?>
+<file path=ppt/slides/slide10.xml><?xml version="1.0" encoding="utf-8"?>
 <p:sld xmlns:a="http://schemas.openxmlformats.org/drawingml/2006/main" xmlns:r="http://schemas.openxmlformats.org/officeDocument/2006/relationships" xmlns:p="http://schemas.openxmlformats.org/presentationml/2006/main">
   <p:cSld>
     <p:spTree>
@@ -13185,7 +12999,7 @@
         <p:cNvPr id="1" name="">
           <a:extLst>
             <a:ext uri="{FF2B5EF4-FFF2-40B4-BE49-F238E27FC236}">
-              <a16:creationId xmlns:a16="http://schemas.microsoft.com/office/drawing/2014/main" id="{00419291-25F8-18DA-FFB0-F2D78FAFA6E5}"/>
+              <a16:creationId xmlns:a16="http://schemas.microsoft.com/office/drawing/2014/main" id="{A7F361D6-9202-84D1-E2E7-BEA1121F76BF}"/>
             </a:ext>
           </a:extLst>
         </p:cNvPr>
@@ -13205,7 +13019,7 @@
           <p:cNvPr id="6146" name="Rectangle 2">
             <a:extLst>
               <a:ext uri="{FF2B5EF4-FFF2-40B4-BE49-F238E27FC236}">
-                <a16:creationId xmlns:a16="http://schemas.microsoft.com/office/drawing/2014/main" id="{BC245597-867F-85D8-54E8-C994C2B86CC0}"/>
+                <a16:creationId xmlns:a16="http://schemas.microsoft.com/office/drawing/2014/main" id="{A28F14D2-1243-1FB6-5A32-4EE1964E5790}"/>
               </a:ext>
             </a:extLst>
           </p:cNvPr>
@@ -13232,7 +13046,7 @@
             <a:pPr algn="ctr"/>
             <a:r>
               <a:rPr lang="en-US" dirty="0"/>
-              <a:t>Lecture 3 - Tuesday, Sep. 1</a:t>
+              <a:t>Quiz 1 – Question Summary</a:t>
             </a:r>
           </a:p>
         </p:txBody>
@@ -13242,1382 +13056,7 @@
           <p:cNvPr id="6147" name="Rectangle 3">
             <a:extLst>
               <a:ext uri="{FF2B5EF4-FFF2-40B4-BE49-F238E27FC236}">
-                <a16:creationId xmlns:a16="http://schemas.microsoft.com/office/drawing/2014/main" id="{CADA2C73-9E49-295C-F482-FE94D3E2E9E2}"/>
-              </a:ext>
-            </a:extLst>
-          </p:cNvPr>
-          <p:cNvSpPr>
-            <a:spLocks noGrp="1" noChangeArrowheads="1"/>
-          </p:cNvSpPr>
-          <p:nvPr>
-            <p:ph idx="1"/>
-            <p:custDataLst>
-              <p:tags r:id="rId2"/>
-            </p:custDataLst>
-          </p:nvPr>
-        </p:nvSpPr>
-        <p:spPr>
-          <a:xfrm>
-            <a:off x="1294151" y="1098549"/>
-            <a:ext cx="9600522" cy="5149850"/>
-          </a:xfrm>
-        </p:spPr>
-        <p:txBody>
-          <a:bodyPr>
-            <a:normAutofit fontScale="92500" lnSpcReduction="20000"/>
-          </a:bodyPr>
-          <a:lstStyle/>
-          <a:p>
-            <a:r>
-              <a:rPr lang="en-US" dirty="0">
-                <a:latin typeface="Arial" panose="020B0604020202020204" pitchFamily="34" charset="0"/>
-                <a:cs typeface="Arial" panose="020B0604020202020204" pitchFamily="34" charset="0"/>
-              </a:rPr>
-              <a:t>Welcome to September, hopefully temp cools down soon?</a:t>
-            </a:r>
-          </a:p>
-          <a:p>
-            <a:r>
-              <a:rPr lang="en-US" dirty="0">
-                <a:latin typeface="Arial" panose="020B0604020202020204" pitchFamily="34" charset="0"/>
-                <a:cs typeface="Arial" panose="020B0604020202020204" pitchFamily="34" charset="0"/>
-              </a:rPr>
-              <a:t>Please remember </a:t>
-            </a:r>
-            <a:r>
-              <a:rPr lang="en-US" b="1" i="1" u="sng" dirty="0">
-                <a:latin typeface="Arial" panose="020B0604020202020204" pitchFamily="34" charset="0"/>
-                <a:cs typeface="Arial" panose="020B0604020202020204" pitchFamily="34" charset="0"/>
-              </a:rPr>
-              <a:t>no laptops / phones</a:t>
-            </a:r>
-            <a:r>
-              <a:rPr lang="en-US" dirty="0">
-                <a:latin typeface="Arial" panose="020B0604020202020204" pitchFamily="34" charset="0"/>
-                <a:cs typeface="Arial" panose="020B0604020202020204" pitchFamily="34" charset="0"/>
-              </a:rPr>
-              <a:t> and </a:t>
-            </a:r>
-            <a:r>
-              <a:rPr lang="en-US" b="1" i="1" u="sng" dirty="0">
-                <a:latin typeface="Arial" panose="020B0604020202020204" pitchFamily="34" charset="0"/>
-                <a:cs typeface="Arial" panose="020B0604020202020204" pitchFamily="34" charset="0"/>
-              </a:rPr>
-              <a:t>attendance policy</a:t>
-            </a:r>
-          </a:p>
-          <a:p>
-            <a:r>
-              <a:rPr lang="en-US" dirty="0">
-                <a:latin typeface="Arial" panose="020B0604020202020204" pitchFamily="34" charset="0"/>
-                <a:cs typeface="Arial" panose="020B0604020202020204" pitchFamily="34" charset="0"/>
-              </a:rPr>
-              <a:t>First homework  is due </a:t>
-            </a:r>
-            <a:r>
-              <a:rPr lang="en-US" b="1" i="1" u="sng" dirty="0">
-                <a:latin typeface="Arial" panose="020B0604020202020204" pitchFamily="34" charset="0"/>
-                <a:cs typeface="Arial" panose="020B0604020202020204" pitchFamily="34" charset="0"/>
-              </a:rPr>
-              <a:t>THIS Thursday</a:t>
-            </a:r>
-          </a:p>
-          <a:p>
-            <a:pPr lvl="1"/>
-            <a:r>
-              <a:rPr lang="en-US" dirty="0">
-                <a:latin typeface="Arial" panose="020B0604020202020204" pitchFamily="34" charset="0"/>
-                <a:cs typeface="Arial" panose="020B0604020202020204" pitchFamily="34" charset="0"/>
-              </a:rPr>
-              <a:t>Remember you can get an extension by filling out form linked on HW page</a:t>
-            </a:r>
-          </a:p>
-          <a:p>
-            <a:pPr lvl="1"/>
-            <a:r>
-              <a:rPr lang="en-US" dirty="0">
-                <a:latin typeface="Arial" panose="020B0604020202020204" pitchFamily="34" charset="0"/>
-                <a:cs typeface="Arial" panose="020B0604020202020204" pitchFamily="34" charset="0"/>
-              </a:rPr>
-              <a:t>Hopefully we get through enough material. Might be tight.</a:t>
-            </a:r>
-          </a:p>
-          <a:p>
-            <a:r>
-              <a:rPr lang="en-US" dirty="0">
-                <a:latin typeface="Arial" panose="020B0604020202020204" pitchFamily="34" charset="0"/>
-                <a:cs typeface="Arial" panose="020B0604020202020204" pitchFamily="34" charset="0"/>
-              </a:rPr>
-              <a:t>CBTF Practice Quiz</a:t>
-            </a:r>
-          </a:p>
-          <a:p>
-            <a:pPr lvl="1"/>
-            <a:r>
-              <a:rPr lang="en-US" dirty="0">
-                <a:latin typeface="Arial" panose="020B0604020202020204" pitchFamily="34" charset="0"/>
-                <a:cs typeface="Arial" panose="020B0604020202020204" pitchFamily="34" charset="0"/>
-              </a:rPr>
-              <a:t>Please make a </a:t>
-            </a:r>
-            <a:r>
-              <a:rPr lang="en-US" dirty="0" err="1">
-                <a:latin typeface="Arial" panose="020B0604020202020204" pitchFamily="34" charset="0"/>
-                <a:cs typeface="Arial" panose="020B0604020202020204" pitchFamily="34" charset="0"/>
-              </a:rPr>
-              <a:t>PrairieLearn</a:t>
-            </a:r>
-            <a:r>
-              <a:rPr lang="en-US" dirty="0">
-                <a:latin typeface="Arial" panose="020B0604020202020204" pitchFamily="34" charset="0"/>
-                <a:cs typeface="Arial" panose="020B0604020202020204" pitchFamily="34" charset="0"/>
-              </a:rPr>
-              <a:t>/</a:t>
-            </a:r>
-            <a:r>
-              <a:rPr lang="en-US" dirty="0" err="1">
-                <a:latin typeface="Arial" panose="020B0604020202020204" pitchFamily="34" charset="0"/>
-                <a:cs typeface="Arial" panose="020B0604020202020204" pitchFamily="34" charset="0"/>
-              </a:rPr>
-              <a:t>PrairieTest</a:t>
-            </a:r>
-            <a:r>
-              <a:rPr lang="en-US" dirty="0">
-                <a:latin typeface="Arial" panose="020B0604020202020204" pitchFamily="34" charset="0"/>
-                <a:cs typeface="Arial" panose="020B0604020202020204" pitchFamily="34" charset="0"/>
-              </a:rPr>
-              <a:t> account NOW</a:t>
-            </a:r>
-          </a:p>
-          <a:p>
-            <a:pPr lvl="1"/>
-            <a:r>
-              <a:rPr lang="en-US" dirty="0">
-                <a:latin typeface="Arial" panose="020B0604020202020204" pitchFamily="34" charset="0"/>
-                <a:cs typeface="Arial" panose="020B0604020202020204" pitchFamily="34" charset="0"/>
-              </a:rPr>
-              <a:t>Practice Quiz is LIVE now. Make a reservation. You have until 9/11!!!</a:t>
-            </a:r>
-          </a:p>
-          <a:p>
-            <a:r>
-              <a:rPr lang="en-US" dirty="0">
-                <a:latin typeface="Arial" panose="020B0604020202020204" pitchFamily="34" charset="0"/>
-                <a:cs typeface="Arial" panose="020B0604020202020204" pitchFamily="34" charset="0"/>
-              </a:rPr>
-              <a:t>First real quiz is 9/22 (but we have some time before that arrives)</a:t>
-            </a:r>
-          </a:p>
-          <a:p>
-            <a:r>
-              <a:rPr lang="en-US" dirty="0">
-                <a:latin typeface="Arial" panose="020B0604020202020204" pitchFamily="34" charset="0"/>
-                <a:cs typeface="Arial" panose="020B0604020202020204" pitchFamily="34" charset="0"/>
-              </a:rPr>
-              <a:t>These slides are linked on the course webpage “slides” page.</a:t>
-            </a:r>
-          </a:p>
-          <a:p>
-            <a:r>
-              <a:rPr lang="en-US" dirty="0">
-                <a:latin typeface="Arial" panose="020B0604020202020204" pitchFamily="34" charset="0"/>
-                <a:cs typeface="Arial" panose="020B0604020202020204" pitchFamily="34" charset="0"/>
-              </a:rPr>
-              <a:t>Today we will try to finish module 0 which is a half review, half overview of what to expect in the course.</a:t>
-            </a:r>
-          </a:p>
-          <a:p>
-            <a:endParaRPr lang="en-US" dirty="0">
-              <a:latin typeface="Arial" panose="020B0604020202020204" pitchFamily="34" charset="0"/>
-              <a:cs typeface="Arial" panose="020B0604020202020204" pitchFamily="34" charset="0"/>
-            </a:endParaRPr>
-          </a:p>
-        </p:txBody>
-      </p:sp>
-    </p:spTree>
-    <p:extLst>
-      <p:ext uri="{BB962C8B-B14F-4D97-AF65-F5344CB8AC3E}">
-        <p14:creationId xmlns:p14="http://schemas.microsoft.com/office/powerpoint/2010/main" val="3593160646"/>
-      </p:ext>
-    </p:extLst>
-  </p:cSld>
-  <p:clrMapOvr>
-    <a:masterClrMapping/>
-  </p:clrMapOvr>
-</p:sld>
-</file>
-
-<file path=ppt/slides/slide4.xml><?xml version="1.0" encoding="utf-8"?>
-<p:sld xmlns:a="http://schemas.openxmlformats.org/drawingml/2006/main" xmlns:r="http://schemas.openxmlformats.org/officeDocument/2006/relationships" xmlns:p="http://schemas.openxmlformats.org/presentationml/2006/main">
-  <p:cSld>
-    <p:spTree>
-      <p:nvGrpSpPr>
-        <p:cNvPr id="1" name="">
-          <a:extLst>
-            <a:ext uri="{FF2B5EF4-FFF2-40B4-BE49-F238E27FC236}">
-              <a16:creationId xmlns:a16="http://schemas.microsoft.com/office/drawing/2014/main" id="{907B1675-49DF-67C9-1FAF-5C90913689D9}"/>
-            </a:ext>
-          </a:extLst>
-        </p:cNvPr>
-        <p:cNvGrpSpPr/>
-        <p:nvPr/>
-      </p:nvGrpSpPr>
-      <p:grpSpPr>
-        <a:xfrm>
-          <a:off x="0" y="0"/>
-          <a:ext cx="0" cy="0"/>
-          <a:chOff x="0" y="0"/>
-          <a:chExt cx="0" cy="0"/>
-        </a:xfrm>
-      </p:grpSpPr>
-      <p:sp>
-        <p:nvSpPr>
-          <p:cNvPr id="6146" name="Rectangle 2">
-            <a:extLst>
-              <a:ext uri="{FF2B5EF4-FFF2-40B4-BE49-F238E27FC236}">
-                <a16:creationId xmlns:a16="http://schemas.microsoft.com/office/drawing/2014/main" id="{ABFB7E90-8A54-F2EA-2394-86E45E5E40AC}"/>
-              </a:ext>
-            </a:extLst>
-          </p:cNvPr>
-          <p:cNvSpPr>
-            <a:spLocks noGrp="1" noChangeArrowheads="1"/>
-          </p:cNvSpPr>
-          <p:nvPr>
-            <p:ph type="title"/>
-            <p:custDataLst>
-              <p:tags r:id="rId1"/>
-            </p:custDataLst>
-          </p:nvPr>
-        </p:nvSpPr>
-        <p:spPr>
-          <a:xfrm>
-            <a:off x="1141413" y="284084"/>
-            <a:ext cx="9905998" cy="620791"/>
-          </a:xfrm>
-        </p:spPr>
-        <p:txBody>
-          <a:bodyPr/>
-          <a:lstStyle/>
-          <a:p>
-            <a:pPr algn="ctr"/>
-            <a:r>
-              <a:rPr lang="en-US" dirty="0"/>
-              <a:t>Lecture 4 - Thursday, Sep. 3</a:t>
-            </a:r>
-          </a:p>
-        </p:txBody>
-      </p:sp>
-      <p:sp>
-        <p:nvSpPr>
-          <p:cNvPr id="6147" name="Rectangle 3">
-            <a:extLst>
-              <a:ext uri="{FF2B5EF4-FFF2-40B4-BE49-F238E27FC236}">
-                <a16:creationId xmlns:a16="http://schemas.microsoft.com/office/drawing/2014/main" id="{7211D196-1060-AFCA-137B-4611930C381A}"/>
-              </a:ext>
-            </a:extLst>
-          </p:cNvPr>
-          <p:cNvSpPr>
-            <a:spLocks noGrp="1" noChangeArrowheads="1"/>
-          </p:cNvSpPr>
-          <p:nvPr>
-            <p:ph idx="1"/>
-            <p:custDataLst>
-              <p:tags r:id="rId2"/>
-            </p:custDataLst>
-          </p:nvPr>
-        </p:nvSpPr>
-        <p:spPr>
-          <a:xfrm>
-            <a:off x="1294151" y="1098549"/>
-            <a:ext cx="9600522" cy="5149850"/>
-          </a:xfrm>
-        </p:spPr>
-        <p:txBody>
-          <a:bodyPr>
-            <a:normAutofit fontScale="92500" lnSpcReduction="20000"/>
-          </a:bodyPr>
-          <a:lstStyle/>
-          <a:p>
-            <a:r>
-              <a:rPr lang="en-US" dirty="0">
-                <a:latin typeface="Arial" panose="020B0604020202020204" pitchFamily="34" charset="0"/>
-                <a:cs typeface="Arial" panose="020B0604020202020204" pitchFamily="34" charset="0"/>
-              </a:rPr>
-              <a:t>Welcome to September, hopefully temp cools down soon?</a:t>
-            </a:r>
-          </a:p>
-          <a:p>
-            <a:r>
-              <a:rPr lang="en-US" dirty="0">
-                <a:latin typeface="Arial" panose="020B0604020202020204" pitchFamily="34" charset="0"/>
-                <a:cs typeface="Arial" panose="020B0604020202020204" pitchFamily="34" charset="0"/>
-              </a:rPr>
-              <a:t>Please remember </a:t>
-            </a:r>
-            <a:r>
-              <a:rPr lang="en-US" b="1" i="1" u="sng" dirty="0">
-                <a:latin typeface="Arial" panose="020B0604020202020204" pitchFamily="34" charset="0"/>
-                <a:cs typeface="Arial" panose="020B0604020202020204" pitchFamily="34" charset="0"/>
-              </a:rPr>
-              <a:t>no laptops / phones</a:t>
-            </a:r>
-            <a:r>
-              <a:rPr lang="en-US" dirty="0">
-                <a:latin typeface="Arial" panose="020B0604020202020204" pitchFamily="34" charset="0"/>
-                <a:cs typeface="Arial" panose="020B0604020202020204" pitchFamily="34" charset="0"/>
-              </a:rPr>
-              <a:t> and </a:t>
-            </a:r>
-            <a:r>
-              <a:rPr lang="en-US" b="1" i="1" u="sng" dirty="0">
-                <a:latin typeface="Arial" panose="020B0604020202020204" pitchFamily="34" charset="0"/>
-                <a:cs typeface="Arial" panose="020B0604020202020204" pitchFamily="34" charset="0"/>
-              </a:rPr>
-              <a:t>attendance policy</a:t>
-            </a:r>
-          </a:p>
-          <a:p>
-            <a:r>
-              <a:rPr lang="en-US" dirty="0">
-                <a:latin typeface="Arial" panose="020B0604020202020204" pitchFamily="34" charset="0"/>
-                <a:cs typeface="Arial" panose="020B0604020202020204" pitchFamily="34" charset="0"/>
-              </a:rPr>
-              <a:t>First homework  is due </a:t>
-            </a:r>
-            <a:r>
-              <a:rPr lang="en-US" b="1" i="1" u="sng" dirty="0">
-                <a:latin typeface="Arial" panose="020B0604020202020204" pitchFamily="34" charset="0"/>
-                <a:cs typeface="Arial" panose="020B0604020202020204" pitchFamily="34" charset="0"/>
-              </a:rPr>
-              <a:t>Tonight!</a:t>
-            </a:r>
-          </a:p>
-          <a:p>
-            <a:pPr lvl="1"/>
-            <a:r>
-              <a:rPr lang="en-US" dirty="0">
-                <a:latin typeface="Arial" panose="020B0604020202020204" pitchFamily="34" charset="0"/>
-                <a:cs typeface="Arial" panose="020B0604020202020204" pitchFamily="34" charset="0"/>
-              </a:rPr>
-              <a:t>Remember you can get an extension by filling out form linked on HW page</a:t>
-            </a:r>
-          </a:p>
-          <a:p>
-            <a:pPr lvl="1"/>
-            <a:r>
-              <a:rPr lang="en-US" dirty="0">
-                <a:latin typeface="Arial" panose="020B0604020202020204" pitchFamily="34" charset="0"/>
-                <a:cs typeface="Arial" panose="020B0604020202020204" pitchFamily="34" charset="0"/>
-              </a:rPr>
-              <a:t>Remember that we want count(</a:t>
-            </a:r>
-            <a:r>
-              <a:rPr lang="en-US" dirty="0" err="1">
-                <a:latin typeface="Arial" panose="020B0604020202020204" pitchFamily="34" charset="0"/>
-                <a:cs typeface="Arial" panose="020B0604020202020204" pitchFamily="34" charset="0"/>
-              </a:rPr>
-              <a:t>on_time_submissions</a:t>
-            </a:r>
-            <a:r>
-              <a:rPr lang="en-US" dirty="0">
-                <a:latin typeface="Arial" panose="020B0604020202020204" pitchFamily="34" charset="0"/>
-                <a:cs typeface="Arial" panose="020B0604020202020204" pitchFamily="34" charset="0"/>
-              </a:rPr>
-              <a:t>)/</a:t>
-            </a:r>
-            <a:r>
-              <a:rPr lang="en-US" dirty="0" err="1">
-                <a:latin typeface="Arial" panose="020B0604020202020204" pitchFamily="34" charset="0"/>
-                <a:cs typeface="Arial" panose="020B0604020202020204" pitchFamily="34" charset="0"/>
-              </a:rPr>
-              <a:t>num_students</a:t>
-            </a:r>
-            <a:r>
-              <a:rPr lang="en-US" dirty="0">
-                <a:latin typeface="Arial" panose="020B0604020202020204" pitchFamily="34" charset="0"/>
-                <a:cs typeface="Arial" panose="020B0604020202020204" pitchFamily="34" charset="0"/>
-              </a:rPr>
-              <a:t> &gt;= -.75</a:t>
-            </a:r>
-          </a:p>
-          <a:p>
-            <a:r>
-              <a:rPr lang="en-US" dirty="0">
-                <a:latin typeface="Arial" panose="020B0604020202020204" pitchFamily="34" charset="0"/>
-                <a:cs typeface="Arial" panose="020B0604020202020204" pitchFamily="34" charset="0"/>
-              </a:rPr>
-              <a:t>CBTF Practice Quiz</a:t>
-            </a:r>
-          </a:p>
-          <a:p>
-            <a:pPr lvl="1"/>
-            <a:r>
-              <a:rPr lang="en-US" dirty="0">
-                <a:latin typeface="Arial" panose="020B0604020202020204" pitchFamily="34" charset="0"/>
-                <a:cs typeface="Arial" panose="020B0604020202020204" pitchFamily="34" charset="0"/>
-              </a:rPr>
-              <a:t>Please make a </a:t>
-            </a:r>
-            <a:r>
-              <a:rPr lang="en-US" dirty="0" err="1">
-                <a:latin typeface="Arial" panose="020B0604020202020204" pitchFamily="34" charset="0"/>
-                <a:cs typeface="Arial" panose="020B0604020202020204" pitchFamily="34" charset="0"/>
-              </a:rPr>
-              <a:t>PrairieLearn</a:t>
-            </a:r>
-            <a:r>
-              <a:rPr lang="en-US" dirty="0">
-                <a:latin typeface="Arial" panose="020B0604020202020204" pitchFamily="34" charset="0"/>
-                <a:cs typeface="Arial" panose="020B0604020202020204" pitchFamily="34" charset="0"/>
-              </a:rPr>
-              <a:t>/</a:t>
-            </a:r>
-            <a:r>
-              <a:rPr lang="en-US" dirty="0" err="1">
-                <a:latin typeface="Arial" panose="020B0604020202020204" pitchFamily="34" charset="0"/>
-                <a:cs typeface="Arial" panose="020B0604020202020204" pitchFamily="34" charset="0"/>
-              </a:rPr>
-              <a:t>PrairieTest</a:t>
-            </a:r>
-            <a:r>
-              <a:rPr lang="en-US" dirty="0">
-                <a:latin typeface="Arial" panose="020B0604020202020204" pitchFamily="34" charset="0"/>
-                <a:cs typeface="Arial" panose="020B0604020202020204" pitchFamily="34" charset="0"/>
-              </a:rPr>
-              <a:t> account NOW</a:t>
-            </a:r>
-          </a:p>
-          <a:p>
-            <a:pPr lvl="1"/>
-            <a:r>
-              <a:rPr lang="en-US" dirty="0">
-                <a:latin typeface="Arial" panose="020B0604020202020204" pitchFamily="34" charset="0"/>
-                <a:cs typeface="Arial" panose="020B0604020202020204" pitchFamily="34" charset="0"/>
-              </a:rPr>
-              <a:t>Practice Quiz is LIVE now. Make a reservation. You have until 9/11!!!</a:t>
-            </a:r>
-          </a:p>
-          <a:p>
-            <a:pPr lvl="1"/>
-            <a:r>
-              <a:rPr lang="en-US" dirty="0">
-                <a:latin typeface="Arial" panose="020B0604020202020204" pitchFamily="34" charset="0"/>
-                <a:cs typeface="Arial" panose="020B0604020202020204" pitchFamily="34" charset="0"/>
-              </a:rPr>
-              <a:t>On the subject of changing / </a:t>
-            </a:r>
-            <a:r>
-              <a:rPr lang="en-US">
-                <a:latin typeface="Arial" panose="020B0604020202020204" pitchFamily="34" charset="0"/>
-                <a:cs typeface="Arial" panose="020B0604020202020204" pitchFamily="34" charset="0"/>
-              </a:rPr>
-              <a:t>missing reservations…</a:t>
-            </a:r>
-            <a:endParaRPr lang="en-US" dirty="0">
-              <a:latin typeface="Arial" panose="020B0604020202020204" pitchFamily="34" charset="0"/>
-              <a:cs typeface="Arial" panose="020B0604020202020204" pitchFamily="34" charset="0"/>
-            </a:endParaRPr>
-          </a:p>
-          <a:p>
-            <a:r>
-              <a:rPr lang="en-US" dirty="0">
-                <a:latin typeface="Arial" panose="020B0604020202020204" pitchFamily="34" charset="0"/>
-                <a:cs typeface="Arial" panose="020B0604020202020204" pitchFamily="34" charset="0"/>
-              </a:rPr>
-              <a:t>First real quiz is 9/22 (but we have some time before that arrives)</a:t>
-            </a:r>
-          </a:p>
-          <a:p>
-            <a:r>
-              <a:rPr lang="en-US" dirty="0">
-                <a:latin typeface="Arial" panose="020B0604020202020204" pitchFamily="34" charset="0"/>
-                <a:cs typeface="Arial" panose="020B0604020202020204" pitchFamily="34" charset="0"/>
-              </a:rPr>
-              <a:t>These slides are linked on the course webpage “slides” page.</a:t>
-            </a:r>
-          </a:p>
-          <a:p>
-            <a:r>
-              <a:rPr lang="en-US" dirty="0">
-                <a:latin typeface="Arial" panose="020B0604020202020204" pitchFamily="34" charset="0"/>
-                <a:cs typeface="Arial" panose="020B0604020202020204" pitchFamily="34" charset="0"/>
-              </a:rPr>
-              <a:t>Today we will continue with module 1 on regular languages.</a:t>
-            </a:r>
-          </a:p>
-          <a:p>
-            <a:endParaRPr lang="en-US" dirty="0">
-              <a:latin typeface="Arial" panose="020B0604020202020204" pitchFamily="34" charset="0"/>
-              <a:cs typeface="Arial" panose="020B0604020202020204" pitchFamily="34" charset="0"/>
-            </a:endParaRPr>
-          </a:p>
-        </p:txBody>
-      </p:sp>
-    </p:spTree>
-    <p:extLst>
-      <p:ext uri="{BB962C8B-B14F-4D97-AF65-F5344CB8AC3E}">
-        <p14:creationId xmlns:p14="http://schemas.microsoft.com/office/powerpoint/2010/main" val="3993108104"/>
-      </p:ext>
-    </p:extLst>
-  </p:cSld>
-  <p:clrMapOvr>
-    <a:masterClrMapping/>
-  </p:clrMapOvr>
-</p:sld>
-</file>
-
-<file path=ppt/slides/slide5.xml><?xml version="1.0" encoding="utf-8"?>
-<p:sld xmlns:a="http://schemas.openxmlformats.org/drawingml/2006/main" xmlns:r="http://schemas.openxmlformats.org/officeDocument/2006/relationships" xmlns:p="http://schemas.openxmlformats.org/presentationml/2006/main">
-  <p:cSld>
-    <p:spTree>
-      <p:nvGrpSpPr>
-        <p:cNvPr id="1" name="">
-          <a:extLst>
-            <a:ext uri="{FF2B5EF4-FFF2-40B4-BE49-F238E27FC236}">
-              <a16:creationId xmlns:a16="http://schemas.microsoft.com/office/drawing/2014/main" id="{7EEC5B83-0D05-973D-10B8-618E407513DC}"/>
-            </a:ext>
-          </a:extLst>
-        </p:cNvPr>
-        <p:cNvGrpSpPr/>
-        <p:nvPr/>
-      </p:nvGrpSpPr>
-      <p:grpSpPr>
-        <a:xfrm>
-          <a:off x="0" y="0"/>
-          <a:ext cx="0" cy="0"/>
-          <a:chOff x="0" y="0"/>
-          <a:chExt cx="0" cy="0"/>
-        </a:xfrm>
-      </p:grpSpPr>
-      <p:sp>
-        <p:nvSpPr>
-          <p:cNvPr id="6146" name="Rectangle 2">
-            <a:extLst>
-              <a:ext uri="{FF2B5EF4-FFF2-40B4-BE49-F238E27FC236}">
-                <a16:creationId xmlns:a16="http://schemas.microsoft.com/office/drawing/2014/main" id="{E00A8CCF-6475-47C1-2674-1A77A783997F}"/>
-              </a:ext>
-            </a:extLst>
-          </p:cNvPr>
-          <p:cNvSpPr>
-            <a:spLocks noGrp="1" noChangeArrowheads="1"/>
-          </p:cNvSpPr>
-          <p:nvPr>
-            <p:ph type="title"/>
-            <p:custDataLst>
-              <p:tags r:id="rId1"/>
-            </p:custDataLst>
-          </p:nvPr>
-        </p:nvSpPr>
-        <p:spPr>
-          <a:xfrm>
-            <a:off x="1141413" y="284084"/>
-            <a:ext cx="9905998" cy="620791"/>
-          </a:xfrm>
-        </p:spPr>
-        <p:txBody>
-          <a:bodyPr/>
-          <a:lstStyle/>
-          <a:p>
-            <a:pPr algn="ctr"/>
-            <a:r>
-              <a:rPr lang="en-US" dirty="0"/>
-              <a:t>Lecture 5 - Tuesday, Sep. 8</a:t>
-            </a:r>
-          </a:p>
-        </p:txBody>
-      </p:sp>
-      <p:sp>
-        <p:nvSpPr>
-          <p:cNvPr id="6147" name="Rectangle 3">
-            <a:extLst>
-              <a:ext uri="{FF2B5EF4-FFF2-40B4-BE49-F238E27FC236}">
-                <a16:creationId xmlns:a16="http://schemas.microsoft.com/office/drawing/2014/main" id="{6AD7214A-D852-5E38-8C7E-1CA40550B5C7}"/>
-              </a:ext>
-            </a:extLst>
-          </p:cNvPr>
-          <p:cNvSpPr>
-            <a:spLocks noGrp="1" noChangeArrowheads="1"/>
-          </p:cNvSpPr>
-          <p:nvPr>
-            <p:ph idx="1"/>
-            <p:custDataLst>
-              <p:tags r:id="rId2"/>
-            </p:custDataLst>
-          </p:nvPr>
-        </p:nvSpPr>
-        <p:spPr>
-          <a:xfrm>
-            <a:off x="1294151" y="1098549"/>
-            <a:ext cx="9600522" cy="5149850"/>
-          </a:xfrm>
-        </p:spPr>
-        <p:txBody>
-          <a:bodyPr>
-            <a:normAutofit fontScale="77500" lnSpcReduction="20000"/>
-          </a:bodyPr>
-          <a:lstStyle/>
-          <a:p>
-            <a:r>
-              <a:rPr lang="en-US" dirty="0">
-                <a:latin typeface="Arial" panose="020B0604020202020204" pitchFamily="34" charset="0"/>
-                <a:cs typeface="Arial" panose="020B0604020202020204" pitchFamily="34" charset="0"/>
-              </a:rPr>
-              <a:t>Weather is actually nice today! Hooray!</a:t>
-            </a:r>
-          </a:p>
-          <a:p>
-            <a:r>
-              <a:rPr lang="en-US" dirty="0">
-                <a:latin typeface="Arial" panose="020B0604020202020204" pitchFamily="34" charset="0"/>
-                <a:cs typeface="Arial" panose="020B0604020202020204" pitchFamily="34" charset="0"/>
-              </a:rPr>
-              <a:t>Please remember </a:t>
-            </a:r>
-            <a:r>
-              <a:rPr lang="en-US" b="1" i="1" u="sng" dirty="0">
-                <a:latin typeface="Arial" panose="020B0604020202020204" pitchFamily="34" charset="0"/>
-                <a:cs typeface="Arial" panose="020B0604020202020204" pitchFamily="34" charset="0"/>
-              </a:rPr>
-              <a:t>no laptops / phones</a:t>
-            </a:r>
-            <a:r>
-              <a:rPr lang="en-US" dirty="0">
-                <a:latin typeface="Arial" panose="020B0604020202020204" pitchFamily="34" charset="0"/>
-                <a:cs typeface="Arial" panose="020B0604020202020204" pitchFamily="34" charset="0"/>
-              </a:rPr>
-              <a:t> and </a:t>
-            </a:r>
-            <a:r>
-              <a:rPr lang="en-US" b="1" i="1" u="sng" dirty="0">
-                <a:latin typeface="Arial" panose="020B0604020202020204" pitchFamily="34" charset="0"/>
-                <a:cs typeface="Arial" panose="020B0604020202020204" pitchFamily="34" charset="0"/>
-              </a:rPr>
-              <a:t>attendance policy</a:t>
-            </a:r>
-          </a:p>
-          <a:p>
-            <a:r>
-              <a:rPr lang="en-US" dirty="0">
-                <a:latin typeface="Arial" panose="020B0604020202020204" pitchFamily="34" charset="0"/>
-                <a:cs typeface="Arial" panose="020B0604020202020204" pitchFamily="34" charset="0"/>
-              </a:rPr>
-              <a:t>First homework is past due</a:t>
-            </a:r>
-          </a:p>
-          <a:p>
-            <a:pPr lvl="1"/>
-            <a:r>
-              <a:rPr lang="en-US" dirty="0">
-                <a:latin typeface="Arial" panose="020B0604020202020204" pitchFamily="34" charset="0"/>
-                <a:cs typeface="Arial" panose="020B0604020202020204" pitchFamily="34" charset="0"/>
-              </a:rPr>
-              <a:t>Unless you took extension in which case you have until tonight</a:t>
-            </a:r>
-          </a:p>
-          <a:p>
-            <a:pPr lvl="1"/>
-            <a:r>
-              <a:rPr lang="en-US" dirty="0">
-                <a:latin typeface="Arial" panose="020B0604020202020204" pitchFamily="34" charset="0"/>
-                <a:cs typeface="Arial" panose="020B0604020202020204" pitchFamily="34" charset="0"/>
-              </a:rPr>
-              <a:t>It is currently being graded. We will be spot grading some Qs for correctness.</a:t>
-            </a:r>
-          </a:p>
-          <a:p>
-            <a:r>
-              <a:rPr lang="en-US" dirty="0">
-                <a:latin typeface="Arial" panose="020B0604020202020204" pitchFamily="34" charset="0"/>
-                <a:cs typeface="Arial" panose="020B0604020202020204" pitchFamily="34" charset="0"/>
-              </a:rPr>
-              <a:t>This week:</a:t>
-            </a:r>
-          </a:p>
-          <a:p>
-            <a:pPr lvl="1"/>
-            <a:r>
-              <a:rPr lang="en-US" dirty="0">
-                <a:latin typeface="Arial" panose="020B0604020202020204" pitchFamily="34" charset="0"/>
-                <a:cs typeface="Arial" panose="020B0604020202020204" pitchFamily="34" charset="0"/>
-              </a:rPr>
-              <a:t>No homework, but you can start working on module 1 written assignment!</a:t>
-            </a:r>
-          </a:p>
-          <a:p>
-            <a:r>
-              <a:rPr lang="en-US" dirty="0">
-                <a:latin typeface="Arial" panose="020B0604020202020204" pitchFamily="34" charset="0"/>
-                <a:cs typeface="Arial" panose="020B0604020202020204" pitchFamily="34" charset="0"/>
-              </a:rPr>
-              <a:t>CBTF Practice Quiz</a:t>
-            </a:r>
-          </a:p>
-          <a:p>
-            <a:pPr lvl="1"/>
-            <a:r>
-              <a:rPr lang="en-US" dirty="0">
-                <a:latin typeface="Arial" panose="020B0604020202020204" pitchFamily="34" charset="0"/>
-                <a:cs typeface="Arial" panose="020B0604020202020204" pitchFamily="34" charset="0"/>
-              </a:rPr>
-              <a:t>Please make a </a:t>
-            </a:r>
-            <a:r>
-              <a:rPr lang="en-US" dirty="0" err="1">
-                <a:latin typeface="Arial" panose="020B0604020202020204" pitchFamily="34" charset="0"/>
-                <a:cs typeface="Arial" panose="020B0604020202020204" pitchFamily="34" charset="0"/>
-              </a:rPr>
-              <a:t>PrairieLearn</a:t>
-            </a:r>
-            <a:r>
-              <a:rPr lang="en-US" dirty="0">
-                <a:latin typeface="Arial" panose="020B0604020202020204" pitchFamily="34" charset="0"/>
-                <a:cs typeface="Arial" panose="020B0604020202020204" pitchFamily="34" charset="0"/>
-              </a:rPr>
-              <a:t>/</a:t>
-            </a:r>
-            <a:r>
-              <a:rPr lang="en-US" dirty="0" err="1">
-                <a:latin typeface="Arial" panose="020B0604020202020204" pitchFamily="34" charset="0"/>
-                <a:cs typeface="Arial" panose="020B0604020202020204" pitchFamily="34" charset="0"/>
-              </a:rPr>
-              <a:t>PrairieTest</a:t>
-            </a:r>
-            <a:r>
-              <a:rPr lang="en-US" dirty="0">
-                <a:latin typeface="Arial" panose="020B0604020202020204" pitchFamily="34" charset="0"/>
-                <a:cs typeface="Arial" panose="020B0604020202020204" pitchFamily="34" charset="0"/>
-              </a:rPr>
-              <a:t> account NOW</a:t>
-            </a:r>
-          </a:p>
-          <a:p>
-            <a:pPr lvl="1"/>
-            <a:r>
-              <a:rPr lang="en-US" dirty="0">
-                <a:latin typeface="Arial" panose="020B0604020202020204" pitchFamily="34" charset="0"/>
-                <a:cs typeface="Arial" panose="020B0604020202020204" pitchFamily="34" charset="0"/>
-              </a:rPr>
-              <a:t>Practice Quiz is LIVE now. Make a reservation. You have until 9/11!!!</a:t>
-            </a:r>
-          </a:p>
-          <a:p>
-            <a:pPr lvl="1"/>
-            <a:r>
-              <a:rPr lang="en-US" dirty="0">
-                <a:latin typeface="Arial" panose="020B0604020202020204" pitchFamily="34" charset="0"/>
-                <a:cs typeface="Arial" panose="020B0604020202020204" pitchFamily="34" charset="0"/>
-              </a:rPr>
-              <a:t>I added a CBTF FAQ, contains info about changing reservations (check webpage)</a:t>
-            </a:r>
-          </a:p>
-          <a:p>
-            <a:r>
-              <a:rPr lang="en-US" dirty="0">
-                <a:latin typeface="Arial" panose="020B0604020202020204" pitchFamily="34" charset="0"/>
-                <a:cs typeface="Arial" panose="020B0604020202020204" pitchFamily="34" charset="0"/>
-              </a:rPr>
-              <a:t>First real quiz is 9/22 (but we have some time before that arrives)</a:t>
-            </a:r>
-          </a:p>
-          <a:p>
-            <a:r>
-              <a:rPr lang="en-US" dirty="0">
-                <a:latin typeface="Arial" panose="020B0604020202020204" pitchFamily="34" charset="0"/>
-                <a:cs typeface="Arial" panose="020B0604020202020204" pitchFamily="34" charset="0"/>
-              </a:rPr>
-              <a:t>These slides are linked on the course webpage “slides” page.</a:t>
-            </a:r>
-          </a:p>
-          <a:p>
-            <a:r>
-              <a:rPr lang="en-US" dirty="0">
-                <a:latin typeface="Arial" panose="020B0604020202020204" pitchFamily="34" charset="0"/>
-                <a:cs typeface="Arial" panose="020B0604020202020204" pitchFamily="34" charset="0"/>
-              </a:rPr>
-              <a:t>Today we will continue with module 1 on regular languages.</a:t>
-            </a:r>
-          </a:p>
-          <a:p>
-            <a:endParaRPr lang="en-US" dirty="0">
-              <a:latin typeface="Arial" panose="020B0604020202020204" pitchFamily="34" charset="0"/>
-              <a:cs typeface="Arial" panose="020B0604020202020204" pitchFamily="34" charset="0"/>
-            </a:endParaRPr>
-          </a:p>
-        </p:txBody>
-      </p:sp>
-    </p:spTree>
-    <p:extLst>
-      <p:ext uri="{BB962C8B-B14F-4D97-AF65-F5344CB8AC3E}">
-        <p14:creationId xmlns:p14="http://schemas.microsoft.com/office/powerpoint/2010/main" val="1812451809"/>
-      </p:ext>
-    </p:extLst>
-  </p:cSld>
-  <p:clrMapOvr>
-    <a:masterClrMapping/>
-  </p:clrMapOvr>
-</p:sld>
-</file>
-
-<file path=ppt/slides/slide6.xml><?xml version="1.0" encoding="utf-8"?>
-<p:sld xmlns:a="http://schemas.openxmlformats.org/drawingml/2006/main" xmlns:r="http://schemas.openxmlformats.org/officeDocument/2006/relationships" xmlns:p="http://schemas.openxmlformats.org/presentationml/2006/main">
-  <p:cSld>
-    <p:spTree>
-      <p:nvGrpSpPr>
-        <p:cNvPr id="1" name="">
-          <a:extLst>
-            <a:ext uri="{FF2B5EF4-FFF2-40B4-BE49-F238E27FC236}">
-              <a16:creationId xmlns:a16="http://schemas.microsoft.com/office/drawing/2014/main" id="{DE7F56D7-6C7F-69E1-753E-9EE25F64A713}"/>
-            </a:ext>
-          </a:extLst>
-        </p:cNvPr>
-        <p:cNvGrpSpPr/>
-        <p:nvPr/>
-      </p:nvGrpSpPr>
-      <p:grpSpPr>
-        <a:xfrm>
-          <a:off x="0" y="0"/>
-          <a:ext cx="0" cy="0"/>
-          <a:chOff x="0" y="0"/>
-          <a:chExt cx="0" cy="0"/>
-        </a:xfrm>
-      </p:grpSpPr>
-      <p:sp>
-        <p:nvSpPr>
-          <p:cNvPr id="6146" name="Rectangle 2">
-            <a:extLst>
-              <a:ext uri="{FF2B5EF4-FFF2-40B4-BE49-F238E27FC236}">
-                <a16:creationId xmlns:a16="http://schemas.microsoft.com/office/drawing/2014/main" id="{D65F6D1A-0C39-2701-2A7D-5A983C8D9AA9}"/>
-              </a:ext>
-            </a:extLst>
-          </p:cNvPr>
-          <p:cNvSpPr>
-            <a:spLocks noGrp="1" noChangeArrowheads="1"/>
-          </p:cNvSpPr>
-          <p:nvPr>
-            <p:ph type="title"/>
-            <p:custDataLst>
-              <p:tags r:id="rId1"/>
-            </p:custDataLst>
-          </p:nvPr>
-        </p:nvSpPr>
-        <p:spPr>
-          <a:xfrm>
-            <a:off x="1141413" y="284084"/>
-            <a:ext cx="9905998" cy="620791"/>
-          </a:xfrm>
-        </p:spPr>
-        <p:txBody>
-          <a:bodyPr/>
-          <a:lstStyle/>
-          <a:p>
-            <a:pPr algn="ctr"/>
-            <a:r>
-              <a:rPr lang="en-US" dirty="0"/>
-              <a:t>Lecture 6 - Thursday, Sep. 10</a:t>
-            </a:r>
-          </a:p>
-        </p:txBody>
-      </p:sp>
-      <p:sp>
-        <p:nvSpPr>
-          <p:cNvPr id="6147" name="Rectangle 3">
-            <a:extLst>
-              <a:ext uri="{FF2B5EF4-FFF2-40B4-BE49-F238E27FC236}">
-                <a16:creationId xmlns:a16="http://schemas.microsoft.com/office/drawing/2014/main" id="{1BD10984-63D9-8622-4339-6AC9C6AE47D3}"/>
-              </a:ext>
-            </a:extLst>
-          </p:cNvPr>
-          <p:cNvSpPr>
-            <a:spLocks noGrp="1" noChangeArrowheads="1"/>
-          </p:cNvSpPr>
-          <p:nvPr>
-            <p:ph idx="1"/>
-            <p:custDataLst>
-              <p:tags r:id="rId2"/>
-            </p:custDataLst>
-          </p:nvPr>
-        </p:nvSpPr>
-        <p:spPr>
-          <a:xfrm>
-            <a:off x="1294151" y="1098549"/>
-            <a:ext cx="9600522" cy="5149850"/>
-          </a:xfrm>
-        </p:spPr>
-        <p:txBody>
-          <a:bodyPr>
-            <a:normAutofit fontScale="85000" lnSpcReduction="20000"/>
-          </a:bodyPr>
-          <a:lstStyle/>
-          <a:p>
-            <a:r>
-              <a:rPr lang="en-US" dirty="0">
-                <a:latin typeface="Arial" panose="020B0604020202020204" pitchFamily="34" charset="0"/>
-                <a:cs typeface="Arial" panose="020B0604020202020204" pitchFamily="34" charset="0"/>
-              </a:rPr>
-              <a:t>Please remember </a:t>
-            </a:r>
-            <a:r>
-              <a:rPr lang="en-US" b="1" i="1" u="sng" dirty="0">
-                <a:latin typeface="Arial" panose="020B0604020202020204" pitchFamily="34" charset="0"/>
-                <a:cs typeface="Arial" panose="020B0604020202020204" pitchFamily="34" charset="0"/>
-              </a:rPr>
-              <a:t>no laptops / phones</a:t>
-            </a:r>
-            <a:r>
-              <a:rPr lang="en-US" dirty="0">
-                <a:latin typeface="Arial" panose="020B0604020202020204" pitchFamily="34" charset="0"/>
-                <a:cs typeface="Arial" panose="020B0604020202020204" pitchFamily="34" charset="0"/>
-              </a:rPr>
-              <a:t> and </a:t>
-            </a:r>
-            <a:r>
-              <a:rPr lang="en-US" b="1" i="1" u="sng" dirty="0">
-                <a:latin typeface="Arial" panose="020B0604020202020204" pitchFamily="34" charset="0"/>
-                <a:cs typeface="Arial" panose="020B0604020202020204" pitchFamily="34" charset="0"/>
-              </a:rPr>
-              <a:t>attendance policy</a:t>
-            </a:r>
-          </a:p>
-          <a:p>
-            <a:r>
-              <a:rPr lang="en-US" dirty="0">
-                <a:latin typeface="Arial" panose="020B0604020202020204" pitchFamily="34" charset="0"/>
-                <a:cs typeface="Arial" panose="020B0604020202020204" pitchFamily="34" charset="0"/>
-              </a:rPr>
-              <a:t>Module 0 homework is almost graded. Sit tight.</a:t>
-            </a:r>
-          </a:p>
-          <a:p>
-            <a:r>
-              <a:rPr lang="en-US" dirty="0">
-                <a:latin typeface="Arial" panose="020B0604020202020204" pitchFamily="34" charset="0"/>
-                <a:cs typeface="Arial" panose="020B0604020202020204" pitchFamily="34" charset="0"/>
-              </a:rPr>
-              <a:t>This week:</a:t>
-            </a:r>
-          </a:p>
-          <a:p>
-            <a:pPr lvl="1"/>
-            <a:r>
-              <a:rPr lang="en-US" dirty="0">
-                <a:latin typeface="Arial" panose="020B0604020202020204" pitchFamily="34" charset="0"/>
-                <a:cs typeface="Arial" panose="020B0604020202020204" pitchFamily="34" charset="0"/>
-              </a:rPr>
-              <a:t>No homework, but you can start working on module 1 written assignment!</a:t>
-            </a:r>
-          </a:p>
-          <a:p>
-            <a:r>
-              <a:rPr lang="en-US" dirty="0">
-                <a:latin typeface="Arial" panose="020B0604020202020204" pitchFamily="34" charset="0"/>
-                <a:cs typeface="Arial" panose="020B0604020202020204" pitchFamily="34" charset="0"/>
-              </a:rPr>
-              <a:t>CBTF Practice Quiz</a:t>
-            </a:r>
-          </a:p>
-          <a:p>
-            <a:pPr lvl="1"/>
-            <a:r>
-              <a:rPr lang="en-US" dirty="0">
-                <a:latin typeface="Arial" panose="020B0604020202020204" pitchFamily="34" charset="0"/>
-                <a:cs typeface="Arial" panose="020B0604020202020204" pitchFamily="34" charset="0"/>
-              </a:rPr>
-              <a:t>You have been invited to the Prairie Learn / Test classes now. Please go in and accept the invitation ASAP!</a:t>
-            </a:r>
-          </a:p>
-          <a:p>
-            <a:pPr lvl="1"/>
-            <a:r>
-              <a:rPr lang="en-US" dirty="0">
-                <a:latin typeface="Arial" panose="020B0604020202020204" pitchFamily="34" charset="0"/>
-                <a:cs typeface="Arial" panose="020B0604020202020204" pitchFamily="34" charset="0"/>
-              </a:rPr>
-              <a:t>Practice Quiz extended through 9/15 if you want to do it still.</a:t>
-            </a:r>
-          </a:p>
-          <a:p>
-            <a:r>
-              <a:rPr lang="en-US" dirty="0">
-                <a:latin typeface="Arial" panose="020B0604020202020204" pitchFamily="34" charset="0"/>
-                <a:cs typeface="Arial" panose="020B0604020202020204" pitchFamily="34" charset="0"/>
-              </a:rPr>
-              <a:t>First real quiz is 9/22 (week after next)</a:t>
-            </a:r>
-          </a:p>
-          <a:p>
-            <a:pPr lvl="1"/>
-            <a:r>
-              <a:rPr lang="en-US" dirty="0">
-                <a:latin typeface="Arial" panose="020B0604020202020204" pitchFamily="34" charset="0"/>
-                <a:cs typeface="Arial" panose="020B0604020202020204" pitchFamily="34" charset="0"/>
-              </a:rPr>
-              <a:t>I will release a practice quiz on Prairie Learn. It is for controls / procedure mostly, not really meant to be content rich. Will be released early next week.</a:t>
-            </a:r>
-          </a:p>
-          <a:p>
-            <a:pPr lvl="1"/>
-            <a:r>
-              <a:rPr lang="en-US" dirty="0">
-                <a:latin typeface="Arial" panose="020B0604020202020204" pitchFamily="34" charset="0"/>
-                <a:cs typeface="Arial" panose="020B0604020202020204" pitchFamily="34" charset="0"/>
-              </a:rPr>
-              <a:t>Sign ups for the first real quiz in CBTF should start next week as well.</a:t>
-            </a:r>
-          </a:p>
-          <a:p>
-            <a:r>
-              <a:rPr lang="en-US" dirty="0">
-                <a:latin typeface="Arial" panose="020B0604020202020204" pitchFamily="34" charset="0"/>
-                <a:cs typeface="Arial" panose="020B0604020202020204" pitchFamily="34" charset="0"/>
-              </a:rPr>
-              <a:t>These slides are linked on the course webpage “slides” page.</a:t>
-            </a:r>
-          </a:p>
-          <a:p>
-            <a:r>
-              <a:rPr lang="en-US" dirty="0">
-                <a:latin typeface="Arial" panose="020B0604020202020204" pitchFamily="34" charset="0"/>
-                <a:cs typeface="Arial" panose="020B0604020202020204" pitchFamily="34" charset="0"/>
-              </a:rPr>
-              <a:t>Today we will continue with module 1 on regular languages.</a:t>
-            </a:r>
-          </a:p>
-          <a:p>
-            <a:endParaRPr lang="en-US" dirty="0">
-              <a:latin typeface="Arial" panose="020B0604020202020204" pitchFamily="34" charset="0"/>
-              <a:cs typeface="Arial" panose="020B0604020202020204" pitchFamily="34" charset="0"/>
-            </a:endParaRPr>
-          </a:p>
-        </p:txBody>
-      </p:sp>
-    </p:spTree>
-    <p:extLst>
-      <p:ext uri="{BB962C8B-B14F-4D97-AF65-F5344CB8AC3E}">
-        <p14:creationId xmlns:p14="http://schemas.microsoft.com/office/powerpoint/2010/main" val="1050830353"/>
-      </p:ext>
-    </p:extLst>
-  </p:cSld>
-  <p:clrMapOvr>
-    <a:masterClrMapping/>
-  </p:clrMapOvr>
-</p:sld>
-</file>
-
-<file path=ppt/slides/slide7.xml><?xml version="1.0" encoding="utf-8"?>
-<p:sld xmlns:a="http://schemas.openxmlformats.org/drawingml/2006/main" xmlns:r="http://schemas.openxmlformats.org/officeDocument/2006/relationships" xmlns:p="http://schemas.openxmlformats.org/presentationml/2006/main">
-  <p:cSld>
-    <p:spTree>
-      <p:nvGrpSpPr>
-        <p:cNvPr id="1" name="">
-          <a:extLst>
-            <a:ext uri="{FF2B5EF4-FFF2-40B4-BE49-F238E27FC236}">
-              <a16:creationId xmlns:a16="http://schemas.microsoft.com/office/drawing/2014/main" id="{A6B2F0E4-C58F-C5FB-CF85-889969DC27CF}"/>
-            </a:ext>
-          </a:extLst>
-        </p:cNvPr>
-        <p:cNvGrpSpPr/>
-        <p:nvPr/>
-      </p:nvGrpSpPr>
-      <p:grpSpPr>
-        <a:xfrm>
-          <a:off x="0" y="0"/>
-          <a:ext cx="0" cy="0"/>
-          <a:chOff x="0" y="0"/>
-          <a:chExt cx="0" cy="0"/>
-        </a:xfrm>
-      </p:grpSpPr>
-      <p:sp>
-        <p:nvSpPr>
-          <p:cNvPr id="6146" name="Rectangle 2">
-            <a:extLst>
-              <a:ext uri="{FF2B5EF4-FFF2-40B4-BE49-F238E27FC236}">
-                <a16:creationId xmlns:a16="http://schemas.microsoft.com/office/drawing/2014/main" id="{E20399C6-7F38-7C99-A332-AB14ABCE2E53}"/>
-              </a:ext>
-            </a:extLst>
-          </p:cNvPr>
-          <p:cNvSpPr>
-            <a:spLocks noGrp="1" noChangeArrowheads="1"/>
-          </p:cNvSpPr>
-          <p:nvPr>
-            <p:ph type="title"/>
-            <p:custDataLst>
-              <p:tags r:id="rId1"/>
-            </p:custDataLst>
-          </p:nvPr>
-        </p:nvSpPr>
-        <p:spPr>
-          <a:xfrm>
-            <a:off x="1141413" y="284084"/>
-            <a:ext cx="9905998" cy="620791"/>
-          </a:xfrm>
-        </p:spPr>
-        <p:txBody>
-          <a:bodyPr/>
-          <a:lstStyle/>
-          <a:p>
-            <a:pPr algn="ctr"/>
-            <a:r>
-              <a:rPr lang="en-US" dirty="0"/>
-              <a:t>Lecture 7 - Tuesday, Sep. 15</a:t>
-            </a:r>
-          </a:p>
-        </p:txBody>
-      </p:sp>
-      <p:sp>
-        <p:nvSpPr>
-          <p:cNvPr id="6147" name="Rectangle 3">
-            <a:extLst>
-              <a:ext uri="{FF2B5EF4-FFF2-40B4-BE49-F238E27FC236}">
-                <a16:creationId xmlns:a16="http://schemas.microsoft.com/office/drawing/2014/main" id="{A51177BB-7848-6E8A-D293-654E3D3D78AD}"/>
-              </a:ext>
-            </a:extLst>
-          </p:cNvPr>
-          <p:cNvSpPr>
-            <a:spLocks noGrp="1" noChangeArrowheads="1"/>
-          </p:cNvSpPr>
-          <p:nvPr>
-            <p:ph idx="1"/>
-            <p:custDataLst>
-              <p:tags r:id="rId2"/>
-            </p:custDataLst>
-          </p:nvPr>
-        </p:nvSpPr>
-        <p:spPr>
-          <a:xfrm>
-            <a:off x="1294151" y="1098548"/>
-            <a:ext cx="9600522" cy="5475367"/>
-          </a:xfrm>
-        </p:spPr>
-        <p:txBody>
-          <a:bodyPr>
-            <a:normAutofit fontScale="77500" lnSpcReduction="20000"/>
-          </a:bodyPr>
-          <a:lstStyle/>
-          <a:p>
-            <a:r>
-              <a:rPr lang="en-US" dirty="0">
-                <a:latin typeface="Arial" panose="020B0604020202020204" pitchFamily="34" charset="0"/>
-                <a:cs typeface="Arial" panose="020B0604020202020204" pitchFamily="34" charset="0"/>
-              </a:rPr>
-              <a:t>Please remember </a:t>
-            </a:r>
-            <a:r>
-              <a:rPr lang="en-US" b="1" i="1" u="sng" dirty="0">
-                <a:latin typeface="Arial" panose="020B0604020202020204" pitchFamily="34" charset="0"/>
-                <a:cs typeface="Arial" panose="020B0604020202020204" pitchFamily="34" charset="0"/>
-              </a:rPr>
-              <a:t>no laptops / phones</a:t>
-            </a:r>
-            <a:r>
-              <a:rPr lang="en-US" dirty="0">
-                <a:latin typeface="Arial" panose="020B0604020202020204" pitchFamily="34" charset="0"/>
-                <a:cs typeface="Arial" panose="020B0604020202020204" pitchFamily="34" charset="0"/>
-              </a:rPr>
-              <a:t> and </a:t>
-            </a:r>
-            <a:r>
-              <a:rPr lang="en-US" b="1" i="1" u="sng" dirty="0">
-                <a:latin typeface="Arial" panose="020B0604020202020204" pitchFamily="34" charset="0"/>
-                <a:cs typeface="Arial" panose="020B0604020202020204" pitchFamily="34" charset="0"/>
-              </a:rPr>
-              <a:t>attendance policy</a:t>
-            </a:r>
-          </a:p>
-          <a:p>
-            <a:r>
-              <a:rPr lang="en-US" dirty="0">
-                <a:latin typeface="Arial" panose="020B0604020202020204" pitchFamily="34" charset="0"/>
-                <a:cs typeface="Arial" panose="020B0604020202020204" pitchFamily="34" charset="0"/>
-              </a:rPr>
-              <a:t>Module 0 homework has been returned! Let Thomas know if you have any questions or concerns</a:t>
-            </a:r>
-          </a:p>
-          <a:p>
-            <a:r>
-              <a:rPr lang="en-US" dirty="0">
-                <a:latin typeface="Arial" panose="020B0604020202020204" pitchFamily="34" charset="0"/>
-                <a:cs typeface="Arial" panose="020B0604020202020204" pitchFamily="34" charset="0"/>
-              </a:rPr>
-              <a:t>This week:</a:t>
-            </a:r>
-          </a:p>
-          <a:p>
-            <a:pPr lvl="1"/>
-            <a:r>
-              <a:rPr lang="en-US" dirty="0">
-                <a:latin typeface="Arial" panose="020B0604020202020204" pitchFamily="34" charset="0"/>
-                <a:cs typeface="Arial" panose="020B0604020202020204" pitchFamily="34" charset="0"/>
-              </a:rPr>
-              <a:t>Written Assignment for Module 1 is due on Thursday!!</a:t>
-            </a:r>
-          </a:p>
-          <a:p>
-            <a:pPr lvl="1"/>
-            <a:r>
-              <a:rPr lang="en-US" dirty="0">
-                <a:latin typeface="Arial" panose="020B0604020202020204" pitchFamily="34" charset="0"/>
-                <a:cs typeface="Arial" panose="020B0604020202020204" pitchFamily="34" charset="0"/>
-              </a:rPr>
-              <a:t>Study for the first quiz!</a:t>
-            </a:r>
-          </a:p>
-          <a:p>
-            <a:r>
-              <a:rPr lang="en-US" dirty="0">
-                <a:latin typeface="Arial" panose="020B0604020202020204" pitchFamily="34" charset="0"/>
-                <a:cs typeface="Arial" panose="020B0604020202020204" pitchFamily="34" charset="0"/>
-              </a:rPr>
-              <a:t>Module 1 Practice Quiz</a:t>
-            </a:r>
-          </a:p>
-          <a:p>
-            <a:pPr lvl="1"/>
-            <a:r>
-              <a:rPr lang="en-US" dirty="0">
-                <a:latin typeface="Arial" panose="020B0604020202020204" pitchFamily="34" charset="0"/>
-                <a:cs typeface="Arial" panose="020B0604020202020204" pitchFamily="34" charset="0"/>
-              </a:rPr>
-              <a:t>You have been invited to the Prairie Learn / Test. Please go in and accept the invitation ASAP!</a:t>
-            </a:r>
-          </a:p>
-          <a:p>
-            <a:pPr lvl="1"/>
-            <a:r>
-              <a:rPr lang="en-US" dirty="0">
-                <a:latin typeface="Arial" panose="020B0604020202020204" pitchFamily="34" charset="0"/>
-                <a:cs typeface="Arial" panose="020B0604020202020204" pitchFamily="34" charset="0"/>
-              </a:rPr>
-              <a:t>Prairie Learn now has a practice quiz that you can take to get used to the mechanics of the questions.</a:t>
-            </a:r>
-          </a:p>
-          <a:p>
-            <a:r>
-              <a:rPr lang="en-US" dirty="0">
-                <a:latin typeface="Arial" panose="020B0604020202020204" pitchFamily="34" charset="0"/>
-                <a:cs typeface="Arial" panose="020B0604020202020204" pitchFamily="34" charset="0"/>
-              </a:rPr>
-              <a:t>First real quiz is NEXT week</a:t>
-            </a:r>
-          </a:p>
-          <a:p>
-            <a:pPr lvl="1"/>
-            <a:r>
-              <a:rPr lang="en-US" dirty="0">
-                <a:latin typeface="Arial" panose="020B0604020202020204" pitchFamily="34" charset="0"/>
-                <a:cs typeface="Arial" panose="020B0604020202020204" pitchFamily="34" charset="0"/>
-              </a:rPr>
-              <a:t>Reservations are open NOW on Prairie Test. Please login and make your reservation ASAP!</a:t>
-            </a:r>
-          </a:p>
-          <a:p>
-            <a:pPr lvl="1"/>
-            <a:r>
-              <a:rPr lang="en-US" dirty="0">
-                <a:latin typeface="Arial" panose="020B0604020202020204" pitchFamily="34" charset="0"/>
-                <a:cs typeface="Arial" panose="020B0604020202020204" pitchFamily="34" charset="0"/>
-              </a:rPr>
-              <a:t>Overview of the questions is on the next slide</a:t>
-            </a:r>
-          </a:p>
-          <a:p>
-            <a:r>
-              <a:rPr lang="en-US" dirty="0">
-                <a:latin typeface="Arial" panose="020B0604020202020204" pitchFamily="34" charset="0"/>
-                <a:cs typeface="Arial" panose="020B0604020202020204" pitchFamily="34" charset="0"/>
-              </a:rPr>
-              <a:t>These slides are linked on the course webpage “slides” page.</a:t>
-            </a:r>
-          </a:p>
-          <a:p>
-            <a:r>
-              <a:rPr lang="en-US" dirty="0">
-                <a:latin typeface="Arial" panose="020B0604020202020204" pitchFamily="34" charset="0"/>
-                <a:cs typeface="Arial" panose="020B0604020202020204" pitchFamily="34" charset="0"/>
-              </a:rPr>
-              <a:t>Today we will continue with module 1 on regular languages.</a:t>
-            </a:r>
-          </a:p>
-        </p:txBody>
-      </p:sp>
-    </p:spTree>
-    <p:extLst>
-      <p:ext uri="{BB962C8B-B14F-4D97-AF65-F5344CB8AC3E}">
-        <p14:creationId xmlns:p14="http://schemas.microsoft.com/office/powerpoint/2010/main" val="2166409388"/>
-      </p:ext>
-    </p:extLst>
-  </p:cSld>
-  <p:clrMapOvr>
-    <a:masterClrMapping/>
-  </p:clrMapOvr>
-</p:sld>
-</file>
-
-<file path=ppt/slides/slide8.xml><?xml version="1.0" encoding="utf-8"?>
-<p:sld xmlns:a="http://schemas.openxmlformats.org/drawingml/2006/main" xmlns:r="http://schemas.openxmlformats.org/officeDocument/2006/relationships" xmlns:p="http://schemas.openxmlformats.org/presentationml/2006/main">
-  <p:cSld>
-    <p:spTree>
-      <p:nvGrpSpPr>
-        <p:cNvPr id="1" name="">
-          <a:extLst>
-            <a:ext uri="{FF2B5EF4-FFF2-40B4-BE49-F238E27FC236}">
-              <a16:creationId xmlns:a16="http://schemas.microsoft.com/office/drawing/2014/main" id="{BD983385-6C8F-46CD-2B07-00E8119F8A3B}"/>
-            </a:ext>
-          </a:extLst>
-        </p:cNvPr>
-        <p:cNvGrpSpPr/>
-        <p:nvPr/>
-      </p:nvGrpSpPr>
-      <p:grpSpPr>
-        <a:xfrm>
-          <a:off x="0" y="0"/>
-          <a:ext cx="0" cy="0"/>
-          <a:chOff x="0" y="0"/>
-          <a:chExt cx="0" cy="0"/>
-        </a:xfrm>
-      </p:grpSpPr>
-      <p:sp>
-        <p:nvSpPr>
-          <p:cNvPr id="6146" name="Rectangle 2">
-            <a:extLst>
-              <a:ext uri="{FF2B5EF4-FFF2-40B4-BE49-F238E27FC236}">
-                <a16:creationId xmlns:a16="http://schemas.microsoft.com/office/drawing/2014/main" id="{32A1F65C-6252-AE60-522B-8F061101A2E7}"/>
-              </a:ext>
-            </a:extLst>
-          </p:cNvPr>
-          <p:cNvSpPr>
-            <a:spLocks noGrp="1" noChangeArrowheads="1"/>
-          </p:cNvSpPr>
-          <p:nvPr>
-            <p:ph type="title"/>
-            <p:custDataLst>
-              <p:tags r:id="rId1"/>
-            </p:custDataLst>
-          </p:nvPr>
-        </p:nvSpPr>
-        <p:spPr>
-          <a:xfrm>
-            <a:off x="1141413" y="284084"/>
-            <a:ext cx="9905998" cy="620791"/>
-          </a:xfrm>
-        </p:spPr>
-        <p:txBody>
-          <a:bodyPr/>
-          <a:lstStyle/>
-          <a:p>
-            <a:pPr algn="ctr"/>
-            <a:r>
-              <a:rPr lang="en-US" dirty="0"/>
-              <a:t>Quiz 1 – Question Summary</a:t>
-            </a:r>
-          </a:p>
-        </p:txBody>
-      </p:sp>
-      <p:sp>
-        <p:nvSpPr>
-          <p:cNvPr id="6147" name="Rectangle 3">
-            <a:extLst>
-              <a:ext uri="{FF2B5EF4-FFF2-40B4-BE49-F238E27FC236}">
-                <a16:creationId xmlns:a16="http://schemas.microsoft.com/office/drawing/2014/main" id="{3417B98D-521A-B9E3-4522-F6B1F5050BA4}"/>
+                <a16:creationId xmlns:a16="http://schemas.microsoft.com/office/drawing/2014/main" id="{CB7CA8AC-9611-9E9D-5F1E-A8227E9644FC}"/>
               </a:ext>
             </a:extLst>
           </p:cNvPr>
@@ -14743,7 +13182,7 @@
     </p:spTree>
     <p:extLst>
       <p:ext uri="{BB962C8B-B14F-4D97-AF65-F5344CB8AC3E}">
-        <p14:creationId xmlns:p14="http://schemas.microsoft.com/office/powerpoint/2010/main" val="2190362403"/>
+        <p14:creationId xmlns:p14="http://schemas.microsoft.com/office/powerpoint/2010/main" val="2230955824"/>
       </p:ext>
     </p:extLst>
   </p:cSld>
@@ -14753,7 +13192,7 @@
 </p:sld>
 </file>
 
-<file path=ppt/slides/slide9.xml><?xml version="1.0" encoding="utf-8"?>
+<file path=ppt/slides/slide11.xml><?xml version="1.0" encoding="utf-8"?>
 <p:sld xmlns:a="http://schemas.openxmlformats.org/drawingml/2006/main" xmlns:r="http://schemas.openxmlformats.org/officeDocument/2006/relationships" xmlns:p="http://schemas.openxmlformats.org/presentationml/2006/main">
   <p:cSld>
     <p:spTree>
@@ -15094,7 +13533,7 @@
           <p:nvPr>
             <p:extLst>
               <p:ext uri="{D42A27DB-BD31-4B8C-83A1-F6EECF244321}">
-                <p14:modId xmlns:p14="http://schemas.microsoft.com/office/powerpoint/2010/main" val="1220026444"/>
+                <p14:modId xmlns:p14="http://schemas.microsoft.com/office/powerpoint/2010/main" val="1938593800"/>
               </p:ext>
             </p:extLst>
           </p:nvPr>
@@ -15190,7 +13629,7 @@
                       <a:pPr algn="ctr"/>
                       <a:r>
                         <a:rPr lang="en-US" i="0" dirty="0"/>
-                        <a:t>6</a:t>
+                        <a:t>7</a:t>
                       </a:r>
                     </a:p>
                   </a:txBody>
@@ -15204,7 +13643,7 @@
                       <a:pPr algn="ctr"/>
                       <a:r>
                         <a:rPr lang="en-US" i="0" dirty="0"/>
-                        <a:t>6</a:t>
+                        <a:t>7</a:t>
                       </a:r>
                     </a:p>
                   </a:txBody>
@@ -15249,7 +13688,7 @@
           <p:nvPr>
             <p:extLst>
               <p:ext uri="{D42A27DB-BD31-4B8C-83A1-F6EECF244321}">
-                <p14:modId xmlns:p14="http://schemas.microsoft.com/office/powerpoint/2010/main" val="3808041916"/>
+                <p14:modId xmlns:p14="http://schemas.microsoft.com/office/powerpoint/2010/main" val="2003054135"/>
               </p:ext>
             </p:extLst>
           </p:nvPr>
@@ -15444,7 +13883,7 @@
                       <a:pPr algn="ctr"/>
                       <a:r>
                         <a:rPr lang="en-US" dirty="0"/>
-                        <a:t>-</a:t>
+                        <a:t>10</a:t>
                       </a:r>
                     </a:p>
                   </a:txBody>
@@ -15986,7 +14425,7 @@
           <p:nvPr>
             <p:extLst>
               <p:ext uri="{D42A27DB-BD31-4B8C-83A1-F6EECF244321}">
-                <p14:modId xmlns:p14="http://schemas.microsoft.com/office/powerpoint/2010/main" val="3626772447"/>
+                <p14:modId xmlns:p14="http://schemas.microsoft.com/office/powerpoint/2010/main" val="3741389918"/>
               </p:ext>
             </p:extLst>
           </p:nvPr>
@@ -16082,7 +14521,7 @@
                       <a:pPr algn="ctr"/>
                       <a:r>
                         <a:rPr lang="en-US" i="0" dirty="0"/>
-                        <a:t>3</a:t>
+                        <a:t>4</a:t>
                       </a:r>
                     </a:p>
                   </a:txBody>
@@ -16096,7 +14535,7 @@
                       <a:pPr algn="ctr"/>
                       <a:r>
                         <a:rPr lang="en-US" i="0" dirty="0"/>
-                        <a:t>3</a:t>
+                        <a:t>4</a:t>
                       </a:r>
                     </a:p>
                   </a:txBody>
@@ -16374,7 +14813,7 @@
           <p:nvPr>
             <p:extLst>
               <p:ext uri="{D42A27DB-BD31-4B8C-83A1-F6EECF244321}">
-                <p14:modId xmlns:p14="http://schemas.microsoft.com/office/powerpoint/2010/main" val="2618045101"/>
+                <p14:modId xmlns:p14="http://schemas.microsoft.com/office/powerpoint/2010/main" val="1262790351"/>
               </p:ext>
             </p:extLst>
           </p:nvPr>
@@ -16470,7 +14909,7 @@
                       <a:pPr algn="ctr"/>
                       <a:r>
                         <a:rPr lang="en-US" i="0" dirty="0"/>
-                        <a:t>6</a:t>
+                        <a:t>7</a:t>
                       </a:r>
                     </a:p>
                   </a:txBody>
@@ -16484,7 +14923,7 @@
                       <a:pPr algn="ctr"/>
                       <a:r>
                         <a:rPr lang="en-US" i="0" dirty="0"/>
-                        <a:t>6</a:t>
+                        <a:t>7</a:t>
                       </a:r>
                     </a:p>
                   </a:txBody>
@@ -16755,7 +15194,7 @@
           <p:nvPr>
             <p:extLst>
               <p:ext uri="{D42A27DB-BD31-4B8C-83A1-F6EECF244321}">
-                <p14:modId xmlns:p14="http://schemas.microsoft.com/office/powerpoint/2010/main" val="1958645561"/>
+                <p14:modId xmlns:p14="http://schemas.microsoft.com/office/powerpoint/2010/main" val="2995271694"/>
               </p:ext>
             </p:extLst>
           </p:nvPr>
@@ -16851,7 +15290,7 @@
                       <a:pPr algn="ctr"/>
                       <a:r>
                         <a:rPr lang="en-US" i="0" dirty="0"/>
-                        <a:t>3</a:t>
+                        <a:t>4</a:t>
                       </a:r>
                     </a:p>
                   </a:txBody>
@@ -16865,7 +15304,7 @@
                       <a:pPr algn="ctr"/>
                       <a:r>
                         <a:rPr lang="en-US" i="0" dirty="0"/>
-                        <a:t>3</a:t>
+                        <a:t>4</a:t>
                       </a:r>
                     </a:p>
                   </a:txBody>
@@ -16899,6 +15338,2014 @@
     <p:extLst>
       <p:ext uri="{BB962C8B-B14F-4D97-AF65-F5344CB8AC3E}">
         <p14:creationId xmlns:p14="http://schemas.microsoft.com/office/powerpoint/2010/main" val="748716362"/>
+      </p:ext>
+    </p:extLst>
+  </p:cSld>
+  <p:clrMapOvr>
+    <a:masterClrMapping/>
+  </p:clrMapOvr>
+</p:sld>
+</file>
+
+<file path=ppt/slides/slide2.xml><?xml version="1.0" encoding="utf-8"?>
+<p:sld xmlns:a="http://schemas.openxmlformats.org/drawingml/2006/main" xmlns:r="http://schemas.openxmlformats.org/officeDocument/2006/relationships" xmlns:p="http://schemas.openxmlformats.org/presentationml/2006/main">
+  <p:cSld>
+    <p:spTree>
+      <p:nvGrpSpPr>
+        <p:cNvPr id="1" name=""/>
+        <p:cNvGrpSpPr/>
+        <p:nvPr/>
+      </p:nvGrpSpPr>
+      <p:grpSpPr>
+        <a:xfrm>
+          <a:off x="0" y="0"/>
+          <a:ext cx="0" cy="0"/>
+          <a:chOff x="0" y="0"/>
+          <a:chExt cx="0" cy="0"/>
+        </a:xfrm>
+      </p:grpSpPr>
+      <p:sp>
+        <p:nvSpPr>
+          <p:cNvPr id="6146" name="Rectangle 2"/>
+          <p:cNvSpPr>
+            <a:spLocks noGrp="1" noChangeArrowheads="1"/>
+          </p:cNvSpPr>
+          <p:nvPr>
+            <p:ph type="title"/>
+            <p:custDataLst>
+              <p:tags r:id="rId1"/>
+            </p:custDataLst>
+          </p:nvPr>
+        </p:nvSpPr>
+        <p:spPr>
+          <a:xfrm>
+            <a:off x="1141413" y="284084"/>
+            <a:ext cx="9905998" cy="620791"/>
+          </a:xfrm>
+        </p:spPr>
+        <p:txBody>
+          <a:bodyPr/>
+          <a:lstStyle/>
+          <a:p>
+            <a:pPr algn="ctr"/>
+            <a:r>
+              <a:rPr lang="en-US" dirty="0"/>
+              <a:t>Lecture 2 - Thursday, Aug. 27</a:t>
+            </a:r>
+          </a:p>
+        </p:txBody>
+      </p:sp>
+      <p:sp>
+        <p:nvSpPr>
+          <p:cNvPr id="6147" name="Rectangle 3"/>
+          <p:cNvSpPr>
+            <a:spLocks noGrp="1" noChangeArrowheads="1"/>
+          </p:cNvSpPr>
+          <p:nvPr>
+            <p:ph idx="1"/>
+            <p:custDataLst>
+              <p:tags r:id="rId2"/>
+            </p:custDataLst>
+          </p:nvPr>
+        </p:nvSpPr>
+        <p:spPr>
+          <a:xfrm>
+            <a:off x="1294151" y="1098549"/>
+            <a:ext cx="9600522" cy="5149850"/>
+          </a:xfrm>
+        </p:spPr>
+        <p:txBody>
+          <a:bodyPr>
+            <a:normAutofit/>
+          </a:bodyPr>
+          <a:lstStyle/>
+          <a:p>
+            <a:r>
+              <a:rPr lang="en-US" dirty="0">
+                <a:latin typeface="Arial" panose="020B0604020202020204" pitchFamily="34" charset="0"/>
+                <a:cs typeface="Arial" panose="020B0604020202020204" pitchFamily="34" charset="0"/>
+              </a:rPr>
+              <a:t>Any questions about course policies from last time?</a:t>
+            </a:r>
+          </a:p>
+          <a:p>
+            <a:r>
+              <a:rPr lang="en-US" dirty="0">
+                <a:latin typeface="Arial" panose="020B0604020202020204" pitchFamily="34" charset="0"/>
+                <a:cs typeface="Arial" panose="020B0604020202020204" pitchFamily="34" charset="0"/>
+              </a:rPr>
+              <a:t>Please remember </a:t>
+            </a:r>
+            <a:r>
+              <a:rPr lang="en-US" b="1" i="1" u="sng" dirty="0">
+                <a:latin typeface="Arial" panose="020B0604020202020204" pitchFamily="34" charset="0"/>
+                <a:cs typeface="Arial" panose="020B0604020202020204" pitchFamily="34" charset="0"/>
+              </a:rPr>
+              <a:t>no laptops / phones</a:t>
+            </a:r>
+            <a:r>
+              <a:rPr lang="en-US" dirty="0">
+                <a:latin typeface="Arial" panose="020B0604020202020204" pitchFamily="34" charset="0"/>
+                <a:cs typeface="Arial" panose="020B0604020202020204" pitchFamily="34" charset="0"/>
+              </a:rPr>
+              <a:t> and </a:t>
+            </a:r>
+            <a:r>
+              <a:rPr lang="en-US" b="1" i="1" u="sng" dirty="0">
+                <a:latin typeface="Arial" panose="020B0604020202020204" pitchFamily="34" charset="0"/>
+                <a:cs typeface="Arial" panose="020B0604020202020204" pitchFamily="34" charset="0"/>
+              </a:rPr>
+              <a:t>attendance policy</a:t>
+            </a:r>
+          </a:p>
+          <a:p>
+            <a:r>
+              <a:rPr lang="en-US" dirty="0">
+                <a:latin typeface="Arial" panose="020B0604020202020204" pitchFamily="34" charset="0"/>
+                <a:cs typeface="Arial" panose="020B0604020202020204" pitchFamily="34" charset="0"/>
+              </a:rPr>
+              <a:t>First homework  is due one week from today (Thursday)</a:t>
+            </a:r>
+          </a:p>
+          <a:p>
+            <a:pPr lvl="1"/>
+            <a:r>
+              <a:rPr lang="en-US" dirty="0">
+                <a:latin typeface="Arial" panose="020B0604020202020204" pitchFamily="34" charset="0"/>
+                <a:cs typeface="Arial" panose="020B0604020202020204" pitchFamily="34" charset="0"/>
+              </a:rPr>
+              <a:t>Remember you can get an extension by filling out form linked on HW page</a:t>
+            </a:r>
+          </a:p>
+          <a:p>
+            <a:pPr lvl="1"/>
+            <a:r>
+              <a:rPr lang="en-US" dirty="0">
+                <a:latin typeface="Arial" panose="020B0604020202020204" pitchFamily="34" charset="0"/>
+                <a:cs typeface="Arial" panose="020B0604020202020204" pitchFamily="34" charset="0"/>
+              </a:rPr>
+              <a:t>Hopefully we get through enough material. Might be tight.</a:t>
+            </a:r>
+          </a:p>
+          <a:p>
+            <a:r>
+              <a:rPr lang="en-US" dirty="0">
+                <a:latin typeface="Arial" panose="020B0604020202020204" pitchFamily="34" charset="0"/>
+                <a:cs typeface="Arial" panose="020B0604020202020204" pitchFamily="34" charset="0"/>
+              </a:rPr>
+              <a:t>First quiz is 9/22 (but we have some time before that arrives)</a:t>
+            </a:r>
+          </a:p>
+          <a:p>
+            <a:r>
+              <a:rPr lang="en-US" dirty="0">
+                <a:latin typeface="Arial" panose="020B0604020202020204" pitchFamily="34" charset="0"/>
+                <a:cs typeface="Arial" panose="020B0604020202020204" pitchFamily="34" charset="0"/>
+              </a:rPr>
+              <a:t>These slides are linked on the course webpage “slides” page.</a:t>
+            </a:r>
+          </a:p>
+          <a:p>
+            <a:r>
+              <a:rPr lang="en-US" dirty="0">
+                <a:latin typeface="Arial" panose="020B0604020202020204" pitchFamily="34" charset="0"/>
+                <a:cs typeface="Arial" panose="020B0604020202020204" pitchFamily="34" charset="0"/>
+              </a:rPr>
+              <a:t>Today we will start module 0 which is a half review, half overview of what to expect in the course.</a:t>
+            </a:r>
+          </a:p>
+          <a:p>
+            <a:endParaRPr lang="en-US" dirty="0">
+              <a:latin typeface="Arial" panose="020B0604020202020204" pitchFamily="34" charset="0"/>
+              <a:cs typeface="Arial" panose="020B0604020202020204" pitchFamily="34" charset="0"/>
+            </a:endParaRPr>
+          </a:p>
+        </p:txBody>
+      </p:sp>
+    </p:spTree>
+    <p:extLst>
+      <p:ext uri="{BB962C8B-B14F-4D97-AF65-F5344CB8AC3E}">
+        <p14:creationId xmlns:p14="http://schemas.microsoft.com/office/powerpoint/2010/main" val="2431754002"/>
+      </p:ext>
+    </p:extLst>
+  </p:cSld>
+  <p:clrMapOvr>
+    <a:masterClrMapping/>
+  </p:clrMapOvr>
+</p:sld>
+</file>
+
+<file path=ppt/slides/slide3.xml><?xml version="1.0" encoding="utf-8"?>
+<p:sld xmlns:a="http://schemas.openxmlformats.org/drawingml/2006/main" xmlns:r="http://schemas.openxmlformats.org/officeDocument/2006/relationships" xmlns:p="http://schemas.openxmlformats.org/presentationml/2006/main">
+  <p:cSld>
+    <p:spTree>
+      <p:nvGrpSpPr>
+        <p:cNvPr id="1" name="">
+          <a:extLst>
+            <a:ext uri="{FF2B5EF4-FFF2-40B4-BE49-F238E27FC236}">
+              <a16:creationId xmlns:a16="http://schemas.microsoft.com/office/drawing/2014/main" id="{00419291-25F8-18DA-FFB0-F2D78FAFA6E5}"/>
+            </a:ext>
+          </a:extLst>
+        </p:cNvPr>
+        <p:cNvGrpSpPr/>
+        <p:nvPr/>
+      </p:nvGrpSpPr>
+      <p:grpSpPr>
+        <a:xfrm>
+          <a:off x="0" y="0"/>
+          <a:ext cx="0" cy="0"/>
+          <a:chOff x="0" y="0"/>
+          <a:chExt cx="0" cy="0"/>
+        </a:xfrm>
+      </p:grpSpPr>
+      <p:sp>
+        <p:nvSpPr>
+          <p:cNvPr id="6146" name="Rectangle 2">
+            <a:extLst>
+              <a:ext uri="{FF2B5EF4-FFF2-40B4-BE49-F238E27FC236}">
+                <a16:creationId xmlns:a16="http://schemas.microsoft.com/office/drawing/2014/main" id="{BC245597-867F-85D8-54E8-C994C2B86CC0}"/>
+              </a:ext>
+            </a:extLst>
+          </p:cNvPr>
+          <p:cNvSpPr>
+            <a:spLocks noGrp="1" noChangeArrowheads="1"/>
+          </p:cNvSpPr>
+          <p:nvPr>
+            <p:ph type="title"/>
+            <p:custDataLst>
+              <p:tags r:id="rId1"/>
+            </p:custDataLst>
+          </p:nvPr>
+        </p:nvSpPr>
+        <p:spPr>
+          <a:xfrm>
+            <a:off x="1141413" y="284084"/>
+            <a:ext cx="9905998" cy="620791"/>
+          </a:xfrm>
+        </p:spPr>
+        <p:txBody>
+          <a:bodyPr/>
+          <a:lstStyle/>
+          <a:p>
+            <a:pPr algn="ctr"/>
+            <a:r>
+              <a:rPr lang="en-US" dirty="0"/>
+              <a:t>Lecture 3 - Tuesday, Sep. 1</a:t>
+            </a:r>
+          </a:p>
+        </p:txBody>
+      </p:sp>
+      <p:sp>
+        <p:nvSpPr>
+          <p:cNvPr id="6147" name="Rectangle 3">
+            <a:extLst>
+              <a:ext uri="{FF2B5EF4-FFF2-40B4-BE49-F238E27FC236}">
+                <a16:creationId xmlns:a16="http://schemas.microsoft.com/office/drawing/2014/main" id="{CADA2C73-9E49-295C-F482-FE94D3E2E9E2}"/>
+              </a:ext>
+            </a:extLst>
+          </p:cNvPr>
+          <p:cNvSpPr>
+            <a:spLocks noGrp="1" noChangeArrowheads="1"/>
+          </p:cNvSpPr>
+          <p:nvPr>
+            <p:ph idx="1"/>
+            <p:custDataLst>
+              <p:tags r:id="rId2"/>
+            </p:custDataLst>
+          </p:nvPr>
+        </p:nvSpPr>
+        <p:spPr>
+          <a:xfrm>
+            <a:off x="1294151" y="1098549"/>
+            <a:ext cx="9600522" cy="5149850"/>
+          </a:xfrm>
+        </p:spPr>
+        <p:txBody>
+          <a:bodyPr>
+            <a:normAutofit fontScale="92500" lnSpcReduction="20000"/>
+          </a:bodyPr>
+          <a:lstStyle/>
+          <a:p>
+            <a:r>
+              <a:rPr lang="en-US" dirty="0">
+                <a:latin typeface="Arial" panose="020B0604020202020204" pitchFamily="34" charset="0"/>
+                <a:cs typeface="Arial" panose="020B0604020202020204" pitchFamily="34" charset="0"/>
+              </a:rPr>
+              <a:t>Welcome to September, hopefully temp cools down soon?</a:t>
+            </a:r>
+          </a:p>
+          <a:p>
+            <a:r>
+              <a:rPr lang="en-US" dirty="0">
+                <a:latin typeface="Arial" panose="020B0604020202020204" pitchFamily="34" charset="0"/>
+                <a:cs typeface="Arial" panose="020B0604020202020204" pitchFamily="34" charset="0"/>
+              </a:rPr>
+              <a:t>Please remember </a:t>
+            </a:r>
+            <a:r>
+              <a:rPr lang="en-US" b="1" i="1" u="sng" dirty="0">
+                <a:latin typeface="Arial" panose="020B0604020202020204" pitchFamily="34" charset="0"/>
+                <a:cs typeface="Arial" panose="020B0604020202020204" pitchFamily="34" charset="0"/>
+              </a:rPr>
+              <a:t>no laptops / phones</a:t>
+            </a:r>
+            <a:r>
+              <a:rPr lang="en-US" dirty="0">
+                <a:latin typeface="Arial" panose="020B0604020202020204" pitchFamily="34" charset="0"/>
+                <a:cs typeface="Arial" panose="020B0604020202020204" pitchFamily="34" charset="0"/>
+              </a:rPr>
+              <a:t> and </a:t>
+            </a:r>
+            <a:r>
+              <a:rPr lang="en-US" b="1" i="1" u="sng" dirty="0">
+                <a:latin typeface="Arial" panose="020B0604020202020204" pitchFamily="34" charset="0"/>
+                <a:cs typeface="Arial" panose="020B0604020202020204" pitchFamily="34" charset="0"/>
+              </a:rPr>
+              <a:t>attendance policy</a:t>
+            </a:r>
+          </a:p>
+          <a:p>
+            <a:r>
+              <a:rPr lang="en-US" dirty="0">
+                <a:latin typeface="Arial" panose="020B0604020202020204" pitchFamily="34" charset="0"/>
+                <a:cs typeface="Arial" panose="020B0604020202020204" pitchFamily="34" charset="0"/>
+              </a:rPr>
+              <a:t>First homework  is due </a:t>
+            </a:r>
+            <a:r>
+              <a:rPr lang="en-US" b="1" i="1" u="sng" dirty="0">
+                <a:latin typeface="Arial" panose="020B0604020202020204" pitchFamily="34" charset="0"/>
+                <a:cs typeface="Arial" panose="020B0604020202020204" pitchFamily="34" charset="0"/>
+              </a:rPr>
+              <a:t>THIS Thursday</a:t>
+            </a:r>
+          </a:p>
+          <a:p>
+            <a:pPr lvl="1"/>
+            <a:r>
+              <a:rPr lang="en-US" dirty="0">
+                <a:latin typeface="Arial" panose="020B0604020202020204" pitchFamily="34" charset="0"/>
+                <a:cs typeface="Arial" panose="020B0604020202020204" pitchFamily="34" charset="0"/>
+              </a:rPr>
+              <a:t>Remember you can get an extension by filling out form linked on HW page</a:t>
+            </a:r>
+          </a:p>
+          <a:p>
+            <a:pPr lvl="1"/>
+            <a:r>
+              <a:rPr lang="en-US" dirty="0">
+                <a:latin typeface="Arial" panose="020B0604020202020204" pitchFamily="34" charset="0"/>
+                <a:cs typeface="Arial" panose="020B0604020202020204" pitchFamily="34" charset="0"/>
+              </a:rPr>
+              <a:t>Hopefully we get through enough material. Might be tight.</a:t>
+            </a:r>
+          </a:p>
+          <a:p>
+            <a:r>
+              <a:rPr lang="en-US" dirty="0">
+                <a:latin typeface="Arial" panose="020B0604020202020204" pitchFamily="34" charset="0"/>
+                <a:cs typeface="Arial" panose="020B0604020202020204" pitchFamily="34" charset="0"/>
+              </a:rPr>
+              <a:t>CBTF Practice Quiz</a:t>
+            </a:r>
+          </a:p>
+          <a:p>
+            <a:pPr lvl="1"/>
+            <a:r>
+              <a:rPr lang="en-US" dirty="0">
+                <a:latin typeface="Arial" panose="020B0604020202020204" pitchFamily="34" charset="0"/>
+                <a:cs typeface="Arial" panose="020B0604020202020204" pitchFamily="34" charset="0"/>
+              </a:rPr>
+              <a:t>Please make a </a:t>
+            </a:r>
+            <a:r>
+              <a:rPr lang="en-US" dirty="0" err="1">
+                <a:latin typeface="Arial" panose="020B0604020202020204" pitchFamily="34" charset="0"/>
+                <a:cs typeface="Arial" panose="020B0604020202020204" pitchFamily="34" charset="0"/>
+              </a:rPr>
+              <a:t>PrairieLearn</a:t>
+            </a:r>
+            <a:r>
+              <a:rPr lang="en-US" dirty="0">
+                <a:latin typeface="Arial" panose="020B0604020202020204" pitchFamily="34" charset="0"/>
+                <a:cs typeface="Arial" panose="020B0604020202020204" pitchFamily="34" charset="0"/>
+              </a:rPr>
+              <a:t>/</a:t>
+            </a:r>
+            <a:r>
+              <a:rPr lang="en-US" dirty="0" err="1">
+                <a:latin typeface="Arial" panose="020B0604020202020204" pitchFamily="34" charset="0"/>
+                <a:cs typeface="Arial" panose="020B0604020202020204" pitchFamily="34" charset="0"/>
+              </a:rPr>
+              <a:t>PrairieTest</a:t>
+            </a:r>
+            <a:r>
+              <a:rPr lang="en-US" dirty="0">
+                <a:latin typeface="Arial" panose="020B0604020202020204" pitchFamily="34" charset="0"/>
+                <a:cs typeface="Arial" panose="020B0604020202020204" pitchFamily="34" charset="0"/>
+              </a:rPr>
+              <a:t> account NOW</a:t>
+            </a:r>
+          </a:p>
+          <a:p>
+            <a:pPr lvl="1"/>
+            <a:r>
+              <a:rPr lang="en-US" dirty="0">
+                <a:latin typeface="Arial" panose="020B0604020202020204" pitchFamily="34" charset="0"/>
+                <a:cs typeface="Arial" panose="020B0604020202020204" pitchFamily="34" charset="0"/>
+              </a:rPr>
+              <a:t>Practice Quiz is LIVE now. Make a reservation. You have until 9/11!!!</a:t>
+            </a:r>
+          </a:p>
+          <a:p>
+            <a:r>
+              <a:rPr lang="en-US" dirty="0">
+                <a:latin typeface="Arial" panose="020B0604020202020204" pitchFamily="34" charset="0"/>
+                <a:cs typeface="Arial" panose="020B0604020202020204" pitchFamily="34" charset="0"/>
+              </a:rPr>
+              <a:t>First real quiz is 9/22 (but we have some time before that arrives)</a:t>
+            </a:r>
+          </a:p>
+          <a:p>
+            <a:r>
+              <a:rPr lang="en-US" dirty="0">
+                <a:latin typeface="Arial" panose="020B0604020202020204" pitchFamily="34" charset="0"/>
+                <a:cs typeface="Arial" panose="020B0604020202020204" pitchFamily="34" charset="0"/>
+              </a:rPr>
+              <a:t>These slides are linked on the course webpage “slides” page.</a:t>
+            </a:r>
+          </a:p>
+          <a:p>
+            <a:r>
+              <a:rPr lang="en-US" dirty="0">
+                <a:latin typeface="Arial" panose="020B0604020202020204" pitchFamily="34" charset="0"/>
+                <a:cs typeface="Arial" panose="020B0604020202020204" pitchFamily="34" charset="0"/>
+              </a:rPr>
+              <a:t>Today we will try to finish module 0 which is a half review, half overview of what to expect in the course.</a:t>
+            </a:r>
+          </a:p>
+          <a:p>
+            <a:endParaRPr lang="en-US" dirty="0">
+              <a:latin typeface="Arial" panose="020B0604020202020204" pitchFamily="34" charset="0"/>
+              <a:cs typeface="Arial" panose="020B0604020202020204" pitchFamily="34" charset="0"/>
+            </a:endParaRPr>
+          </a:p>
+        </p:txBody>
+      </p:sp>
+    </p:spTree>
+    <p:extLst>
+      <p:ext uri="{BB962C8B-B14F-4D97-AF65-F5344CB8AC3E}">
+        <p14:creationId xmlns:p14="http://schemas.microsoft.com/office/powerpoint/2010/main" val="3593160646"/>
+      </p:ext>
+    </p:extLst>
+  </p:cSld>
+  <p:clrMapOvr>
+    <a:masterClrMapping/>
+  </p:clrMapOvr>
+</p:sld>
+</file>
+
+<file path=ppt/slides/slide4.xml><?xml version="1.0" encoding="utf-8"?>
+<p:sld xmlns:a="http://schemas.openxmlformats.org/drawingml/2006/main" xmlns:r="http://schemas.openxmlformats.org/officeDocument/2006/relationships" xmlns:p="http://schemas.openxmlformats.org/presentationml/2006/main">
+  <p:cSld>
+    <p:spTree>
+      <p:nvGrpSpPr>
+        <p:cNvPr id="1" name="">
+          <a:extLst>
+            <a:ext uri="{FF2B5EF4-FFF2-40B4-BE49-F238E27FC236}">
+              <a16:creationId xmlns:a16="http://schemas.microsoft.com/office/drawing/2014/main" id="{907B1675-49DF-67C9-1FAF-5C90913689D9}"/>
+            </a:ext>
+          </a:extLst>
+        </p:cNvPr>
+        <p:cNvGrpSpPr/>
+        <p:nvPr/>
+      </p:nvGrpSpPr>
+      <p:grpSpPr>
+        <a:xfrm>
+          <a:off x="0" y="0"/>
+          <a:ext cx="0" cy="0"/>
+          <a:chOff x="0" y="0"/>
+          <a:chExt cx="0" cy="0"/>
+        </a:xfrm>
+      </p:grpSpPr>
+      <p:sp>
+        <p:nvSpPr>
+          <p:cNvPr id="6146" name="Rectangle 2">
+            <a:extLst>
+              <a:ext uri="{FF2B5EF4-FFF2-40B4-BE49-F238E27FC236}">
+                <a16:creationId xmlns:a16="http://schemas.microsoft.com/office/drawing/2014/main" id="{ABFB7E90-8A54-F2EA-2394-86E45E5E40AC}"/>
+              </a:ext>
+            </a:extLst>
+          </p:cNvPr>
+          <p:cNvSpPr>
+            <a:spLocks noGrp="1" noChangeArrowheads="1"/>
+          </p:cNvSpPr>
+          <p:nvPr>
+            <p:ph type="title"/>
+            <p:custDataLst>
+              <p:tags r:id="rId1"/>
+            </p:custDataLst>
+          </p:nvPr>
+        </p:nvSpPr>
+        <p:spPr>
+          <a:xfrm>
+            <a:off x="1141413" y="284084"/>
+            <a:ext cx="9905998" cy="620791"/>
+          </a:xfrm>
+        </p:spPr>
+        <p:txBody>
+          <a:bodyPr/>
+          <a:lstStyle/>
+          <a:p>
+            <a:pPr algn="ctr"/>
+            <a:r>
+              <a:rPr lang="en-US" dirty="0"/>
+              <a:t>Lecture 4 - Thursday, Sep. 3</a:t>
+            </a:r>
+          </a:p>
+        </p:txBody>
+      </p:sp>
+      <p:sp>
+        <p:nvSpPr>
+          <p:cNvPr id="6147" name="Rectangle 3">
+            <a:extLst>
+              <a:ext uri="{FF2B5EF4-FFF2-40B4-BE49-F238E27FC236}">
+                <a16:creationId xmlns:a16="http://schemas.microsoft.com/office/drawing/2014/main" id="{7211D196-1060-AFCA-137B-4611930C381A}"/>
+              </a:ext>
+            </a:extLst>
+          </p:cNvPr>
+          <p:cNvSpPr>
+            <a:spLocks noGrp="1" noChangeArrowheads="1"/>
+          </p:cNvSpPr>
+          <p:nvPr>
+            <p:ph idx="1"/>
+            <p:custDataLst>
+              <p:tags r:id="rId2"/>
+            </p:custDataLst>
+          </p:nvPr>
+        </p:nvSpPr>
+        <p:spPr>
+          <a:xfrm>
+            <a:off x="1294151" y="1098549"/>
+            <a:ext cx="9600522" cy="5149850"/>
+          </a:xfrm>
+        </p:spPr>
+        <p:txBody>
+          <a:bodyPr>
+            <a:normAutofit fontScale="92500" lnSpcReduction="20000"/>
+          </a:bodyPr>
+          <a:lstStyle/>
+          <a:p>
+            <a:r>
+              <a:rPr lang="en-US" dirty="0">
+                <a:latin typeface="Arial" panose="020B0604020202020204" pitchFamily="34" charset="0"/>
+                <a:cs typeface="Arial" panose="020B0604020202020204" pitchFamily="34" charset="0"/>
+              </a:rPr>
+              <a:t>Welcome to September, hopefully temp cools down soon?</a:t>
+            </a:r>
+          </a:p>
+          <a:p>
+            <a:r>
+              <a:rPr lang="en-US" dirty="0">
+                <a:latin typeface="Arial" panose="020B0604020202020204" pitchFamily="34" charset="0"/>
+                <a:cs typeface="Arial" panose="020B0604020202020204" pitchFamily="34" charset="0"/>
+              </a:rPr>
+              <a:t>Please remember </a:t>
+            </a:r>
+            <a:r>
+              <a:rPr lang="en-US" b="1" i="1" u="sng" dirty="0">
+                <a:latin typeface="Arial" panose="020B0604020202020204" pitchFamily="34" charset="0"/>
+                <a:cs typeface="Arial" panose="020B0604020202020204" pitchFamily="34" charset="0"/>
+              </a:rPr>
+              <a:t>no laptops / phones</a:t>
+            </a:r>
+            <a:r>
+              <a:rPr lang="en-US" dirty="0">
+                <a:latin typeface="Arial" panose="020B0604020202020204" pitchFamily="34" charset="0"/>
+                <a:cs typeface="Arial" panose="020B0604020202020204" pitchFamily="34" charset="0"/>
+              </a:rPr>
+              <a:t> and </a:t>
+            </a:r>
+            <a:r>
+              <a:rPr lang="en-US" b="1" i="1" u="sng" dirty="0">
+                <a:latin typeface="Arial" panose="020B0604020202020204" pitchFamily="34" charset="0"/>
+                <a:cs typeface="Arial" panose="020B0604020202020204" pitchFamily="34" charset="0"/>
+              </a:rPr>
+              <a:t>attendance policy</a:t>
+            </a:r>
+          </a:p>
+          <a:p>
+            <a:r>
+              <a:rPr lang="en-US" dirty="0">
+                <a:latin typeface="Arial" panose="020B0604020202020204" pitchFamily="34" charset="0"/>
+                <a:cs typeface="Arial" panose="020B0604020202020204" pitchFamily="34" charset="0"/>
+              </a:rPr>
+              <a:t>First homework  is due </a:t>
+            </a:r>
+            <a:r>
+              <a:rPr lang="en-US" b="1" i="1" u="sng" dirty="0">
+                <a:latin typeface="Arial" panose="020B0604020202020204" pitchFamily="34" charset="0"/>
+                <a:cs typeface="Arial" panose="020B0604020202020204" pitchFamily="34" charset="0"/>
+              </a:rPr>
+              <a:t>Tonight!</a:t>
+            </a:r>
+          </a:p>
+          <a:p>
+            <a:pPr lvl="1"/>
+            <a:r>
+              <a:rPr lang="en-US" dirty="0">
+                <a:latin typeface="Arial" panose="020B0604020202020204" pitchFamily="34" charset="0"/>
+                <a:cs typeface="Arial" panose="020B0604020202020204" pitchFamily="34" charset="0"/>
+              </a:rPr>
+              <a:t>Remember you can get an extension by filling out form linked on HW page</a:t>
+            </a:r>
+          </a:p>
+          <a:p>
+            <a:pPr lvl="1"/>
+            <a:r>
+              <a:rPr lang="en-US" dirty="0">
+                <a:latin typeface="Arial" panose="020B0604020202020204" pitchFamily="34" charset="0"/>
+                <a:cs typeface="Arial" panose="020B0604020202020204" pitchFamily="34" charset="0"/>
+              </a:rPr>
+              <a:t>Remember that we want count(</a:t>
+            </a:r>
+            <a:r>
+              <a:rPr lang="en-US" dirty="0" err="1">
+                <a:latin typeface="Arial" panose="020B0604020202020204" pitchFamily="34" charset="0"/>
+                <a:cs typeface="Arial" panose="020B0604020202020204" pitchFamily="34" charset="0"/>
+              </a:rPr>
+              <a:t>on_time_submissions</a:t>
+            </a:r>
+            <a:r>
+              <a:rPr lang="en-US" dirty="0">
+                <a:latin typeface="Arial" panose="020B0604020202020204" pitchFamily="34" charset="0"/>
+                <a:cs typeface="Arial" panose="020B0604020202020204" pitchFamily="34" charset="0"/>
+              </a:rPr>
+              <a:t>)/</a:t>
+            </a:r>
+            <a:r>
+              <a:rPr lang="en-US" dirty="0" err="1">
+                <a:latin typeface="Arial" panose="020B0604020202020204" pitchFamily="34" charset="0"/>
+                <a:cs typeface="Arial" panose="020B0604020202020204" pitchFamily="34" charset="0"/>
+              </a:rPr>
+              <a:t>num_students</a:t>
+            </a:r>
+            <a:r>
+              <a:rPr lang="en-US" dirty="0">
+                <a:latin typeface="Arial" panose="020B0604020202020204" pitchFamily="34" charset="0"/>
+                <a:cs typeface="Arial" panose="020B0604020202020204" pitchFamily="34" charset="0"/>
+              </a:rPr>
+              <a:t> &gt;= -.75</a:t>
+            </a:r>
+          </a:p>
+          <a:p>
+            <a:r>
+              <a:rPr lang="en-US" dirty="0">
+                <a:latin typeface="Arial" panose="020B0604020202020204" pitchFamily="34" charset="0"/>
+                <a:cs typeface="Arial" panose="020B0604020202020204" pitchFamily="34" charset="0"/>
+              </a:rPr>
+              <a:t>CBTF Practice Quiz</a:t>
+            </a:r>
+          </a:p>
+          <a:p>
+            <a:pPr lvl="1"/>
+            <a:r>
+              <a:rPr lang="en-US" dirty="0">
+                <a:latin typeface="Arial" panose="020B0604020202020204" pitchFamily="34" charset="0"/>
+                <a:cs typeface="Arial" panose="020B0604020202020204" pitchFamily="34" charset="0"/>
+              </a:rPr>
+              <a:t>Please make a </a:t>
+            </a:r>
+            <a:r>
+              <a:rPr lang="en-US" dirty="0" err="1">
+                <a:latin typeface="Arial" panose="020B0604020202020204" pitchFamily="34" charset="0"/>
+                <a:cs typeface="Arial" panose="020B0604020202020204" pitchFamily="34" charset="0"/>
+              </a:rPr>
+              <a:t>PrairieLearn</a:t>
+            </a:r>
+            <a:r>
+              <a:rPr lang="en-US" dirty="0">
+                <a:latin typeface="Arial" panose="020B0604020202020204" pitchFamily="34" charset="0"/>
+                <a:cs typeface="Arial" panose="020B0604020202020204" pitchFamily="34" charset="0"/>
+              </a:rPr>
+              <a:t>/</a:t>
+            </a:r>
+            <a:r>
+              <a:rPr lang="en-US" dirty="0" err="1">
+                <a:latin typeface="Arial" panose="020B0604020202020204" pitchFamily="34" charset="0"/>
+                <a:cs typeface="Arial" panose="020B0604020202020204" pitchFamily="34" charset="0"/>
+              </a:rPr>
+              <a:t>PrairieTest</a:t>
+            </a:r>
+            <a:r>
+              <a:rPr lang="en-US" dirty="0">
+                <a:latin typeface="Arial" panose="020B0604020202020204" pitchFamily="34" charset="0"/>
+                <a:cs typeface="Arial" panose="020B0604020202020204" pitchFamily="34" charset="0"/>
+              </a:rPr>
+              <a:t> account NOW</a:t>
+            </a:r>
+          </a:p>
+          <a:p>
+            <a:pPr lvl="1"/>
+            <a:r>
+              <a:rPr lang="en-US" dirty="0">
+                <a:latin typeface="Arial" panose="020B0604020202020204" pitchFamily="34" charset="0"/>
+                <a:cs typeface="Arial" panose="020B0604020202020204" pitchFamily="34" charset="0"/>
+              </a:rPr>
+              <a:t>Practice Quiz is LIVE now. Make a reservation. You have until 9/11!!!</a:t>
+            </a:r>
+          </a:p>
+          <a:p>
+            <a:pPr lvl="1"/>
+            <a:r>
+              <a:rPr lang="en-US" dirty="0">
+                <a:latin typeface="Arial" panose="020B0604020202020204" pitchFamily="34" charset="0"/>
+                <a:cs typeface="Arial" panose="020B0604020202020204" pitchFamily="34" charset="0"/>
+              </a:rPr>
+              <a:t>On the subject of changing / </a:t>
+            </a:r>
+            <a:r>
+              <a:rPr lang="en-US">
+                <a:latin typeface="Arial" panose="020B0604020202020204" pitchFamily="34" charset="0"/>
+                <a:cs typeface="Arial" panose="020B0604020202020204" pitchFamily="34" charset="0"/>
+              </a:rPr>
+              <a:t>missing reservations…</a:t>
+            </a:r>
+            <a:endParaRPr lang="en-US" dirty="0">
+              <a:latin typeface="Arial" panose="020B0604020202020204" pitchFamily="34" charset="0"/>
+              <a:cs typeface="Arial" panose="020B0604020202020204" pitchFamily="34" charset="0"/>
+            </a:endParaRPr>
+          </a:p>
+          <a:p>
+            <a:r>
+              <a:rPr lang="en-US" dirty="0">
+                <a:latin typeface="Arial" panose="020B0604020202020204" pitchFamily="34" charset="0"/>
+                <a:cs typeface="Arial" panose="020B0604020202020204" pitchFamily="34" charset="0"/>
+              </a:rPr>
+              <a:t>First real quiz is 9/22 (but we have some time before that arrives)</a:t>
+            </a:r>
+          </a:p>
+          <a:p>
+            <a:r>
+              <a:rPr lang="en-US" dirty="0">
+                <a:latin typeface="Arial" panose="020B0604020202020204" pitchFamily="34" charset="0"/>
+                <a:cs typeface="Arial" panose="020B0604020202020204" pitchFamily="34" charset="0"/>
+              </a:rPr>
+              <a:t>These slides are linked on the course webpage “slides” page.</a:t>
+            </a:r>
+          </a:p>
+          <a:p>
+            <a:r>
+              <a:rPr lang="en-US" dirty="0">
+                <a:latin typeface="Arial" panose="020B0604020202020204" pitchFamily="34" charset="0"/>
+                <a:cs typeface="Arial" panose="020B0604020202020204" pitchFamily="34" charset="0"/>
+              </a:rPr>
+              <a:t>Today we will continue with module 1 on regular languages.</a:t>
+            </a:r>
+          </a:p>
+          <a:p>
+            <a:endParaRPr lang="en-US" dirty="0">
+              <a:latin typeface="Arial" panose="020B0604020202020204" pitchFamily="34" charset="0"/>
+              <a:cs typeface="Arial" panose="020B0604020202020204" pitchFamily="34" charset="0"/>
+            </a:endParaRPr>
+          </a:p>
+        </p:txBody>
+      </p:sp>
+    </p:spTree>
+    <p:extLst>
+      <p:ext uri="{BB962C8B-B14F-4D97-AF65-F5344CB8AC3E}">
+        <p14:creationId xmlns:p14="http://schemas.microsoft.com/office/powerpoint/2010/main" val="3993108104"/>
+      </p:ext>
+    </p:extLst>
+  </p:cSld>
+  <p:clrMapOvr>
+    <a:masterClrMapping/>
+  </p:clrMapOvr>
+</p:sld>
+</file>
+
+<file path=ppt/slides/slide5.xml><?xml version="1.0" encoding="utf-8"?>
+<p:sld xmlns:a="http://schemas.openxmlformats.org/drawingml/2006/main" xmlns:r="http://schemas.openxmlformats.org/officeDocument/2006/relationships" xmlns:p="http://schemas.openxmlformats.org/presentationml/2006/main">
+  <p:cSld>
+    <p:spTree>
+      <p:nvGrpSpPr>
+        <p:cNvPr id="1" name="">
+          <a:extLst>
+            <a:ext uri="{FF2B5EF4-FFF2-40B4-BE49-F238E27FC236}">
+              <a16:creationId xmlns:a16="http://schemas.microsoft.com/office/drawing/2014/main" id="{7EEC5B83-0D05-973D-10B8-618E407513DC}"/>
+            </a:ext>
+          </a:extLst>
+        </p:cNvPr>
+        <p:cNvGrpSpPr/>
+        <p:nvPr/>
+      </p:nvGrpSpPr>
+      <p:grpSpPr>
+        <a:xfrm>
+          <a:off x="0" y="0"/>
+          <a:ext cx="0" cy="0"/>
+          <a:chOff x="0" y="0"/>
+          <a:chExt cx="0" cy="0"/>
+        </a:xfrm>
+      </p:grpSpPr>
+      <p:sp>
+        <p:nvSpPr>
+          <p:cNvPr id="6146" name="Rectangle 2">
+            <a:extLst>
+              <a:ext uri="{FF2B5EF4-FFF2-40B4-BE49-F238E27FC236}">
+                <a16:creationId xmlns:a16="http://schemas.microsoft.com/office/drawing/2014/main" id="{E00A8CCF-6475-47C1-2674-1A77A783997F}"/>
+              </a:ext>
+            </a:extLst>
+          </p:cNvPr>
+          <p:cNvSpPr>
+            <a:spLocks noGrp="1" noChangeArrowheads="1"/>
+          </p:cNvSpPr>
+          <p:nvPr>
+            <p:ph type="title"/>
+            <p:custDataLst>
+              <p:tags r:id="rId1"/>
+            </p:custDataLst>
+          </p:nvPr>
+        </p:nvSpPr>
+        <p:spPr>
+          <a:xfrm>
+            <a:off x="1141413" y="284084"/>
+            <a:ext cx="9905998" cy="620791"/>
+          </a:xfrm>
+        </p:spPr>
+        <p:txBody>
+          <a:bodyPr/>
+          <a:lstStyle/>
+          <a:p>
+            <a:pPr algn="ctr"/>
+            <a:r>
+              <a:rPr lang="en-US" dirty="0"/>
+              <a:t>Lecture 5 - Tuesday, Sep. 8</a:t>
+            </a:r>
+          </a:p>
+        </p:txBody>
+      </p:sp>
+      <p:sp>
+        <p:nvSpPr>
+          <p:cNvPr id="6147" name="Rectangle 3">
+            <a:extLst>
+              <a:ext uri="{FF2B5EF4-FFF2-40B4-BE49-F238E27FC236}">
+                <a16:creationId xmlns:a16="http://schemas.microsoft.com/office/drawing/2014/main" id="{6AD7214A-D852-5E38-8C7E-1CA40550B5C7}"/>
+              </a:ext>
+            </a:extLst>
+          </p:cNvPr>
+          <p:cNvSpPr>
+            <a:spLocks noGrp="1" noChangeArrowheads="1"/>
+          </p:cNvSpPr>
+          <p:nvPr>
+            <p:ph idx="1"/>
+            <p:custDataLst>
+              <p:tags r:id="rId2"/>
+            </p:custDataLst>
+          </p:nvPr>
+        </p:nvSpPr>
+        <p:spPr>
+          <a:xfrm>
+            <a:off x="1294151" y="1098549"/>
+            <a:ext cx="9600522" cy="5149850"/>
+          </a:xfrm>
+        </p:spPr>
+        <p:txBody>
+          <a:bodyPr>
+            <a:normAutofit fontScale="77500" lnSpcReduction="20000"/>
+          </a:bodyPr>
+          <a:lstStyle/>
+          <a:p>
+            <a:r>
+              <a:rPr lang="en-US" dirty="0">
+                <a:latin typeface="Arial" panose="020B0604020202020204" pitchFamily="34" charset="0"/>
+                <a:cs typeface="Arial" panose="020B0604020202020204" pitchFamily="34" charset="0"/>
+              </a:rPr>
+              <a:t>Weather is actually nice today! Hooray!</a:t>
+            </a:r>
+          </a:p>
+          <a:p>
+            <a:r>
+              <a:rPr lang="en-US" dirty="0">
+                <a:latin typeface="Arial" panose="020B0604020202020204" pitchFamily="34" charset="0"/>
+                <a:cs typeface="Arial" panose="020B0604020202020204" pitchFamily="34" charset="0"/>
+              </a:rPr>
+              <a:t>Please remember </a:t>
+            </a:r>
+            <a:r>
+              <a:rPr lang="en-US" b="1" i="1" u="sng" dirty="0">
+                <a:latin typeface="Arial" panose="020B0604020202020204" pitchFamily="34" charset="0"/>
+                <a:cs typeface="Arial" panose="020B0604020202020204" pitchFamily="34" charset="0"/>
+              </a:rPr>
+              <a:t>no laptops / phones</a:t>
+            </a:r>
+            <a:r>
+              <a:rPr lang="en-US" dirty="0">
+                <a:latin typeface="Arial" panose="020B0604020202020204" pitchFamily="34" charset="0"/>
+                <a:cs typeface="Arial" panose="020B0604020202020204" pitchFamily="34" charset="0"/>
+              </a:rPr>
+              <a:t> and </a:t>
+            </a:r>
+            <a:r>
+              <a:rPr lang="en-US" b="1" i="1" u="sng" dirty="0">
+                <a:latin typeface="Arial" panose="020B0604020202020204" pitchFamily="34" charset="0"/>
+                <a:cs typeface="Arial" panose="020B0604020202020204" pitchFamily="34" charset="0"/>
+              </a:rPr>
+              <a:t>attendance policy</a:t>
+            </a:r>
+          </a:p>
+          <a:p>
+            <a:r>
+              <a:rPr lang="en-US" dirty="0">
+                <a:latin typeface="Arial" panose="020B0604020202020204" pitchFamily="34" charset="0"/>
+                <a:cs typeface="Arial" panose="020B0604020202020204" pitchFamily="34" charset="0"/>
+              </a:rPr>
+              <a:t>First homework is past due</a:t>
+            </a:r>
+          </a:p>
+          <a:p>
+            <a:pPr lvl="1"/>
+            <a:r>
+              <a:rPr lang="en-US" dirty="0">
+                <a:latin typeface="Arial" panose="020B0604020202020204" pitchFamily="34" charset="0"/>
+                <a:cs typeface="Arial" panose="020B0604020202020204" pitchFamily="34" charset="0"/>
+              </a:rPr>
+              <a:t>Unless you took extension in which case you have until tonight</a:t>
+            </a:r>
+          </a:p>
+          <a:p>
+            <a:pPr lvl="1"/>
+            <a:r>
+              <a:rPr lang="en-US" dirty="0">
+                <a:latin typeface="Arial" panose="020B0604020202020204" pitchFamily="34" charset="0"/>
+                <a:cs typeface="Arial" panose="020B0604020202020204" pitchFamily="34" charset="0"/>
+              </a:rPr>
+              <a:t>It is currently being graded. We will be spot grading some Qs for correctness.</a:t>
+            </a:r>
+          </a:p>
+          <a:p>
+            <a:r>
+              <a:rPr lang="en-US" dirty="0">
+                <a:latin typeface="Arial" panose="020B0604020202020204" pitchFamily="34" charset="0"/>
+                <a:cs typeface="Arial" panose="020B0604020202020204" pitchFamily="34" charset="0"/>
+              </a:rPr>
+              <a:t>This week:</a:t>
+            </a:r>
+          </a:p>
+          <a:p>
+            <a:pPr lvl="1"/>
+            <a:r>
+              <a:rPr lang="en-US" dirty="0">
+                <a:latin typeface="Arial" panose="020B0604020202020204" pitchFamily="34" charset="0"/>
+                <a:cs typeface="Arial" panose="020B0604020202020204" pitchFamily="34" charset="0"/>
+              </a:rPr>
+              <a:t>No homework, but you can start working on module 1 written assignment!</a:t>
+            </a:r>
+          </a:p>
+          <a:p>
+            <a:r>
+              <a:rPr lang="en-US" dirty="0">
+                <a:latin typeface="Arial" panose="020B0604020202020204" pitchFamily="34" charset="0"/>
+                <a:cs typeface="Arial" panose="020B0604020202020204" pitchFamily="34" charset="0"/>
+              </a:rPr>
+              <a:t>CBTF Practice Quiz</a:t>
+            </a:r>
+          </a:p>
+          <a:p>
+            <a:pPr lvl="1"/>
+            <a:r>
+              <a:rPr lang="en-US" dirty="0">
+                <a:latin typeface="Arial" panose="020B0604020202020204" pitchFamily="34" charset="0"/>
+                <a:cs typeface="Arial" panose="020B0604020202020204" pitchFamily="34" charset="0"/>
+              </a:rPr>
+              <a:t>Please make a </a:t>
+            </a:r>
+            <a:r>
+              <a:rPr lang="en-US" dirty="0" err="1">
+                <a:latin typeface="Arial" panose="020B0604020202020204" pitchFamily="34" charset="0"/>
+                <a:cs typeface="Arial" panose="020B0604020202020204" pitchFamily="34" charset="0"/>
+              </a:rPr>
+              <a:t>PrairieLearn</a:t>
+            </a:r>
+            <a:r>
+              <a:rPr lang="en-US" dirty="0">
+                <a:latin typeface="Arial" panose="020B0604020202020204" pitchFamily="34" charset="0"/>
+                <a:cs typeface="Arial" panose="020B0604020202020204" pitchFamily="34" charset="0"/>
+              </a:rPr>
+              <a:t>/</a:t>
+            </a:r>
+            <a:r>
+              <a:rPr lang="en-US" dirty="0" err="1">
+                <a:latin typeface="Arial" panose="020B0604020202020204" pitchFamily="34" charset="0"/>
+                <a:cs typeface="Arial" panose="020B0604020202020204" pitchFamily="34" charset="0"/>
+              </a:rPr>
+              <a:t>PrairieTest</a:t>
+            </a:r>
+            <a:r>
+              <a:rPr lang="en-US" dirty="0">
+                <a:latin typeface="Arial" panose="020B0604020202020204" pitchFamily="34" charset="0"/>
+                <a:cs typeface="Arial" panose="020B0604020202020204" pitchFamily="34" charset="0"/>
+              </a:rPr>
+              <a:t> account NOW</a:t>
+            </a:r>
+          </a:p>
+          <a:p>
+            <a:pPr lvl="1"/>
+            <a:r>
+              <a:rPr lang="en-US" dirty="0">
+                <a:latin typeface="Arial" panose="020B0604020202020204" pitchFamily="34" charset="0"/>
+                <a:cs typeface="Arial" panose="020B0604020202020204" pitchFamily="34" charset="0"/>
+              </a:rPr>
+              <a:t>Practice Quiz is LIVE now. Make a reservation. You have until 9/11!!!</a:t>
+            </a:r>
+          </a:p>
+          <a:p>
+            <a:pPr lvl="1"/>
+            <a:r>
+              <a:rPr lang="en-US" dirty="0">
+                <a:latin typeface="Arial" panose="020B0604020202020204" pitchFamily="34" charset="0"/>
+                <a:cs typeface="Arial" panose="020B0604020202020204" pitchFamily="34" charset="0"/>
+              </a:rPr>
+              <a:t>I added a CBTF FAQ, contains info about changing reservations (check webpage)</a:t>
+            </a:r>
+          </a:p>
+          <a:p>
+            <a:r>
+              <a:rPr lang="en-US" dirty="0">
+                <a:latin typeface="Arial" panose="020B0604020202020204" pitchFamily="34" charset="0"/>
+                <a:cs typeface="Arial" panose="020B0604020202020204" pitchFamily="34" charset="0"/>
+              </a:rPr>
+              <a:t>First real quiz is 9/22 (but we have some time before that arrives)</a:t>
+            </a:r>
+          </a:p>
+          <a:p>
+            <a:r>
+              <a:rPr lang="en-US" dirty="0">
+                <a:latin typeface="Arial" panose="020B0604020202020204" pitchFamily="34" charset="0"/>
+                <a:cs typeface="Arial" panose="020B0604020202020204" pitchFamily="34" charset="0"/>
+              </a:rPr>
+              <a:t>These slides are linked on the course webpage “slides” page.</a:t>
+            </a:r>
+          </a:p>
+          <a:p>
+            <a:r>
+              <a:rPr lang="en-US" dirty="0">
+                <a:latin typeface="Arial" panose="020B0604020202020204" pitchFamily="34" charset="0"/>
+                <a:cs typeface="Arial" panose="020B0604020202020204" pitchFamily="34" charset="0"/>
+              </a:rPr>
+              <a:t>Today we will continue with module 1 on regular languages.</a:t>
+            </a:r>
+          </a:p>
+          <a:p>
+            <a:endParaRPr lang="en-US" dirty="0">
+              <a:latin typeface="Arial" panose="020B0604020202020204" pitchFamily="34" charset="0"/>
+              <a:cs typeface="Arial" panose="020B0604020202020204" pitchFamily="34" charset="0"/>
+            </a:endParaRPr>
+          </a:p>
+        </p:txBody>
+      </p:sp>
+    </p:spTree>
+    <p:extLst>
+      <p:ext uri="{BB962C8B-B14F-4D97-AF65-F5344CB8AC3E}">
+        <p14:creationId xmlns:p14="http://schemas.microsoft.com/office/powerpoint/2010/main" val="1812451809"/>
+      </p:ext>
+    </p:extLst>
+  </p:cSld>
+  <p:clrMapOvr>
+    <a:masterClrMapping/>
+  </p:clrMapOvr>
+</p:sld>
+</file>
+
+<file path=ppt/slides/slide6.xml><?xml version="1.0" encoding="utf-8"?>
+<p:sld xmlns:a="http://schemas.openxmlformats.org/drawingml/2006/main" xmlns:r="http://schemas.openxmlformats.org/officeDocument/2006/relationships" xmlns:p="http://schemas.openxmlformats.org/presentationml/2006/main">
+  <p:cSld>
+    <p:spTree>
+      <p:nvGrpSpPr>
+        <p:cNvPr id="1" name="">
+          <a:extLst>
+            <a:ext uri="{FF2B5EF4-FFF2-40B4-BE49-F238E27FC236}">
+              <a16:creationId xmlns:a16="http://schemas.microsoft.com/office/drawing/2014/main" id="{DE7F56D7-6C7F-69E1-753E-9EE25F64A713}"/>
+            </a:ext>
+          </a:extLst>
+        </p:cNvPr>
+        <p:cNvGrpSpPr/>
+        <p:nvPr/>
+      </p:nvGrpSpPr>
+      <p:grpSpPr>
+        <a:xfrm>
+          <a:off x="0" y="0"/>
+          <a:ext cx="0" cy="0"/>
+          <a:chOff x="0" y="0"/>
+          <a:chExt cx="0" cy="0"/>
+        </a:xfrm>
+      </p:grpSpPr>
+      <p:sp>
+        <p:nvSpPr>
+          <p:cNvPr id="6146" name="Rectangle 2">
+            <a:extLst>
+              <a:ext uri="{FF2B5EF4-FFF2-40B4-BE49-F238E27FC236}">
+                <a16:creationId xmlns:a16="http://schemas.microsoft.com/office/drawing/2014/main" id="{D65F6D1A-0C39-2701-2A7D-5A983C8D9AA9}"/>
+              </a:ext>
+            </a:extLst>
+          </p:cNvPr>
+          <p:cNvSpPr>
+            <a:spLocks noGrp="1" noChangeArrowheads="1"/>
+          </p:cNvSpPr>
+          <p:nvPr>
+            <p:ph type="title"/>
+            <p:custDataLst>
+              <p:tags r:id="rId1"/>
+            </p:custDataLst>
+          </p:nvPr>
+        </p:nvSpPr>
+        <p:spPr>
+          <a:xfrm>
+            <a:off x="1141413" y="284084"/>
+            <a:ext cx="9905998" cy="620791"/>
+          </a:xfrm>
+        </p:spPr>
+        <p:txBody>
+          <a:bodyPr/>
+          <a:lstStyle/>
+          <a:p>
+            <a:pPr algn="ctr"/>
+            <a:r>
+              <a:rPr lang="en-US" dirty="0"/>
+              <a:t>Lecture 6 - Thursday, Sep. 10</a:t>
+            </a:r>
+          </a:p>
+        </p:txBody>
+      </p:sp>
+      <p:sp>
+        <p:nvSpPr>
+          <p:cNvPr id="6147" name="Rectangle 3">
+            <a:extLst>
+              <a:ext uri="{FF2B5EF4-FFF2-40B4-BE49-F238E27FC236}">
+                <a16:creationId xmlns:a16="http://schemas.microsoft.com/office/drawing/2014/main" id="{1BD10984-63D9-8622-4339-6AC9C6AE47D3}"/>
+              </a:ext>
+            </a:extLst>
+          </p:cNvPr>
+          <p:cNvSpPr>
+            <a:spLocks noGrp="1" noChangeArrowheads="1"/>
+          </p:cNvSpPr>
+          <p:nvPr>
+            <p:ph idx="1"/>
+            <p:custDataLst>
+              <p:tags r:id="rId2"/>
+            </p:custDataLst>
+          </p:nvPr>
+        </p:nvSpPr>
+        <p:spPr>
+          <a:xfrm>
+            <a:off x="1294151" y="1098549"/>
+            <a:ext cx="9600522" cy="5149850"/>
+          </a:xfrm>
+        </p:spPr>
+        <p:txBody>
+          <a:bodyPr>
+            <a:normAutofit fontScale="85000" lnSpcReduction="20000"/>
+          </a:bodyPr>
+          <a:lstStyle/>
+          <a:p>
+            <a:r>
+              <a:rPr lang="en-US" dirty="0">
+                <a:latin typeface="Arial" panose="020B0604020202020204" pitchFamily="34" charset="0"/>
+                <a:cs typeface="Arial" panose="020B0604020202020204" pitchFamily="34" charset="0"/>
+              </a:rPr>
+              <a:t>Please remember </a:t>
+            </a:r>
+            <a:r>
+              <a:rPr lang="en-US" b="1" i="1" u="sng" dirty="0">
+                <a:latin typeface="Arial" panose="020B0604020202020204" pitchFamily="34" charset="0"/>
+                <a:cs typeface="Arial" panose="020B0604020202020204" pitchFamily="34" charset="0"/>
+              </a:rPr>
+              <a:t>no laptops / phones</a:t>
+            </a:r>
+            <a:r>
+              <a:rPr lang="en-US" dirty="0">
+                <a:latin typeface="Arial" panose="020B0604020202020204" pitchFamily="34" charset="0"/>
+                <a:cs typeface="Arial" panose="020B0604020202020204" pitchFamily="34" charset="0"/>
+              </a:rPr>
+              <a:t> and </a:t>
+            </a:r>
+            <a:r>
+              <a:rPr lang="en-US" b="1" i="1" u="sng" dirty="0">
+                <a:latin typeface="Arial" panose="020B0604020202020204" pitchFamily="34" charset="0"/>
+                <a:cs typeface="Arial" panose="020B0604020202020204" pitchFamily="34" charset="0"/>
+              </a:rPr>
+              <a:t>attendance policy</a:t>
+            </a:r>
+          </a:p>
+          <a:p>
+            <a:r>
+              <a:rPr lang="en-US" dirty="0">
+                <a:latin typeface="Arial" panose="020B0604020202020204" pitchFamily="34" charset="0"/>
+                <a:cs typeface="Arial" panose="020B0604020202020204" pitchFamily="34" charset="0"/>
+              </a:rPr>
+              <a:t>Module 0 homework is almost graded. Sit tight.</a:t>
+            </a:r>
+          </a:p>
+          <a:p>
+            <a:r>
+              <a:rPr lang="en-US" dirty="0">
+                <a:latin typeface="Arial" panose="020B0604020202020204" pitchFamily="34" charset="0"/>
+                <a:cs typeface="Arial" panose="020B0604020202020204" pitchFamily="34" charset="0"/>
+              </a:rPr>
+              <a:t>This week:</a:t>
+            </a:r>
+          </a:p>
+          <a:p>
+            <a:pPr lvl="1"/>
+            <a:r>
+              <a:rPr lang="en-US" dirty="0">
+                <a:latin typeface="Arial" panose="020B0604020202020204" pitchFamily="34" charset="0"/>
+                <a:cs typeface="Arial" panose="020B0604020202020204" pitchFamily="34" charset="0"/>
+              </a:rPr>
+              <a:t>No homework, but you can start working on module 1 written assignment!</a:t>
+            </a:r>
+          </a:p>
+          <a:p>
+            <a:r>
+              <a:rPr lang="en-US" dirty="0">
+                <a:latin typeface="Arial" panose="020B0604020202020204" pitchFamily="34" charset="0"/>
+                <a:cs typeface="Arial" panose="020B0604020202020204" pitchFamily="34" charset="0"/>
+              </a:rPr>
+              <a:t>CBTF Practice Quiz</a:t>
+            </a:r>
+          </a:p>
+          <a:p>
+            <a:pPr lvl="1"/>
+            <a:r>
+              <a:rPr lang="en-US" dirty="0">
+                <a:latin typeface="Arial" panose="020B0604020202020204" pitchFamily="34" charset="0"/>
+                <a:cs typeface="Arial" panose="020B0604020202020204" pitchFamily="34" charset="0"/>
+              </a:rPr>
+              <a:t>You have been invited to the Prairie Learn / Test classes now. Please go in and accept the invitation ASAP!</a:t>
+            </a:r>
+          </a:p>
+          <a:p>
+            <a:pPr lvl="1"/>
+            <a:r>
+              <a:rPr lang="en-US" dirty="0">
+                <a:latin typeface="Arial" panose="020B0604020202020204" pitchFamily="34" charset="0"/>
+                <a:cs typeface="Arial" panose="020B0604020202020204" pitchFamily="34" charset="0"/>
+              </a:rPr>
+              <a:t>Practice Quiz extended through 9/15 if you want to do it still.</a:t>
+            </a:r>
+          </a:p>
+          <a:p>
+            <a:r>
+              <a:rPr lang="en-US" dirty="0">
+                <a:latin typeface="Arial" panose="020B0604020202020204" pitchFamily="34" charset="0"/>
+                <a:cs typeface="Arial" panose="020B0604020202020204" pitchFamily="34" charset="0"/>
+              </a:rPr>
+              <a:t>First real quiz is 9/22 (week after next)</a:t>
+            </a:r>
+          </a:p>
+          <a:p>
+            <a:pPr lvl="1"/>
+            <a:r>
+              <a:rPr lang="en-US" dirty="0">
+                <a:latin typeface="Arial" panose="020B0604020202020204" pitchFamily="34" charset="0"/>
+                <a:cs typeface="Arial" panose="020B0604020202020204" pitchFamily="34" charset="0"/>
+              </a:rPr>
+              <a:t>I will release a practice quiz on Prairie Learn. It is for controls / procedure mostly, not really meant to be content rich. Will be released early next week.</a:t>
+            </a:r>
+          </a:p>
+          <a:p>
+            <a:pPr lvl="1"/>
+            <a:r>
+              <a:rPr lang="en-US" dirty="0">
+                <a:latin typeface="Arial" panose="020B0604020202020204" pitchFamily="34" charset="0"/>
+                <a:cs typeface="Arial" panose="020B0604020202020204" pitchFamily="34" charset="0"/>
+              </a:rPr>
+              <a:t>Sign ups for the first real quiz in CBTF should start next week as well.</a:t>
+            </a:r>
+          </a:p>
+          <a:p>
+            <a:r>
+              <a:rPr lang="en-US" dirty="0">
+                <a:latin typeface="Arial" panose="020B0604020202020204" pitchFamily="34" charset="0"/>
+                <a:cs typeface="Arial" panose="020B0604020202020204" pitchFamily="34" charset="0"/>
+              </a:rPr>
+              <a:t>These slides are linked on the course webpage “slides” page.</a:t>
+            </a:r>
+          </a:p>
+          <a:p>
+            <a:r>
+              <a:rPr lang="en-US" dirty="0">
+                <a:latin typeface="Arial" panose="020B0604020202020204" pitchFamily="34" charset="0"/>
+                <a:cs typeface="Arial" panose="020B0604020202020204" pitchFamily="34" charset="0"/>
+              </a:rPr>
+              <a:t>Today we will continue with module 1 on regular languages.</a:t>
+            </a:r>
+          </a:p>
+          <a:p>
+            <a:endParaRPr lang="en-US" dirty="0">
+              <a:latin typeface="Arial" panose="020B0604020202020204" pitchFamily="34" charset="0"/>
+              <a:cs typeface="Arial" panose="020B0604020202020204" pitchFamily="34" charset="0"/>
+            </a:endParaRPr>
+          </a:p>
+        </p:txBody>
+      </p:sp>
+    </p:spTree>
+    <p:extLst>
+      <p:ext uri="{BB962C8B-B14F-4D97-AF65-F5344CB8AC3E}">
+        <p14:creationId xmlns:p14="http://schemas.microsoft.com/office/powerpoint/2010/main" val="1050830353"/>
+      </p:ext>
+    </p:extLst>
+  </p:cSld>
+  <p:clrMapOvr>
+    <a:masterClrMapping/>
+  </p:clrMapOvr>
+</p:sld>
+</file>
+
+<file path=ppt/slides/slide7.xml><?xml version="1.0" encoding="utf-8"?>
+<p:sld xmlns:a="http://schemas.openxmlformats.org/drawingml/2006/main" xmlns:r="http://schemas.openxmlformats.org/officeDocument/2006/relationships" xmlns:p="http://schemas.openxmlformats.org/presentationml/2006/main">
+  <p:cSld>
+    <p:spTree>
+      <p:nvGrpSpPr>
+        <p:cNvPr id="1" name="">
+          <a:extLst>
+            <a:ext uri="{FF2B5EF4-FFF2-40B4-BE49-F238E27FC236}">
+              <a16:creationId xmlns:a16="http://schemas.microsoft.com/office/drawing/2014/main" id="{A6B2F0E4-C58F-C5FB-CF85-889969DC27CF}"/>
+            </a:ext>
+          </a:extLst>
+        </p:cNvPr>
+        <p:cNvGrpSpPr/>
+        <p:nvPr/>
+      </p:nvGrpSpPr>
+      <p:grpSpPr>
+        <a:xfrm>
+          <a:off x="0" y="0"/>
+          <a:ext cx="0" cy="0"/>
+          <a:chOff x="0" y="0"/>
+          <a:chExt cx="0" cy="0"/>
+        </a:xfrm>
+      </p:grpSpPr>
+      <p:sp>
+        <p:nvSpPr>
+          <p:cNvPr id="6146" name="Rectangle 2">
+            <a:extLst>
+              <a:ext uri="{FF2B5EF4-FFF2-40B4-BE49-F238E27FC236}">
+                <a16:creationId xmlns:a16="http://schemas.microsoft.com/office/drawing/2014/main" id="{E20399C6-7F38-7C99-A332-AB14ABCE2E53}"/>
+              </a:ext>
+            </a:extLst>
+          </p:cNvPr>
+          <p:cNvSpPr>
+            <a:spLocks noGrp="1" noChangeArrowheads="1"/>
+          </p:cNvSpPr>
+          <p:nvPr>
+            <p:ph type="title"/>
+            <p:custDataLst>
+              <p:tags r:id="rId1"/>
+            </p:custDataLst>
+          </p:nvPr>
+        </p:nvSpPr>
+        <p:spPr>
+          <a:xfrm>
+            <a:off x="1141413" y="284084"/>
+            <a:ext cx="9905998" cy="620791"/>
+          </a:xfrm>
+        </p:spPr>
+        <p:txBody>
+          <a:bodyPr/>
+          <a:lstStyle/>
+          <a:p>
+            <a:pPr algn="ctr"/>
+            <a:r>
+              <a:rPr lang="en-US" dirty="0"/>
+              <a:t>Lecture 7 - Tuesday, Sep. 15</a:t>
+            </a:r>
+          </a:p>
+        </p:txBody>
+      </p:sp>
+      <p:sp>
+        <p:nvSpPr>
+          <p:cNvPr id="6147" name="Rectangle 3">
+            <a:extLst>
+              <a:ext uri="{FF2B5EF4-FFF2-40B4-BE49-F238E27FC236}">
+                <a16:creationId xmlns:a16="http://schemas.microsoft.com/office/drawing/2014/main" id="{A51177BB-7848-6E8A-D293-654E3D3D78AD}"/>
+              </a:ext>
+            </a:extLst>
+          </p:cNvPr>
+          <p:cNvSpPr>
+            <a:spLocks noGrp="1" noChangeArrowheads="1"/>
+          </p:cNvSpPr>
+          <p:nvPr>
+            <p:ph idx="1"/>
+            <p:custDataLst>
+              <p:tags r:id="rId2"/>
+            </p:custDataLst>
+          </p:nvPr>
+        </p:nvSpPr>
+        <p:spPr>
+          <a:xfrm>
+            <a:off x="1294151" y="1098548"/>
+            <a:ext cx="9600522" cy="5475367"/>
+          </a:xfrm>
+        </p:spPr>
+        <p:txBody>
+          <a:bodyPr>
+            <a:normAutofit fontScale="77500" lnSpcReduction="20000"/>
+          </a:bodyPr>
+          <a:lstStyle/>
+          <a:p>
+            <a:r>
+              <a:rPr lang="en-US" dirty="0">
+                <a:latin typeface="Arial" panose="020B0604020202020204" pitchFamily="34" charset="0"/>
+                <a:cs typeface="Arial" panose="020B0604020202020204" pitchFamily="34" charset="0"/>
+              </a:rPr>
+              <a:t>Please remember </a:t>
+            </a:r>
+            <a:r>
+              <a:rPr lang="en-US" b="1" i="1" u="sng" dirty="0">
+                <a:latin typeface="Arial" panose="020B0604020202020204" pitchFamily="34" charset="0"/>
+                <a:cs typeface="Arial" panose="020B0604020202020204" pitchFamily="34" charset="0"/>
+              </a:rPr>
+              <a:t>no laptops / phones</a:t>
+            </a:r>
+            <a:r>
+              <a:rPr lang="en-US" dirty="0">
+                <a:latin typeface="Arial" panose="020B0604020202020204" pitchFamily="34" charset="0"/>
+                <a:cs typeface="Arial" panose="020B0604020202020204" pitchFamily="34" charset="0"/>
+              </a:rPr>
+              <a:t> and </a:t>
+            </a:r>
+            <a:r>
+              <a:rPr lang="en-US" b="1" i="1" u="sng" dirty="0">
+                <a:latin typeface="Arial" panose="020B0604020202020204" pitchFamily="34" charset="0"/>
+                <a:cs typeface="Arial" panose="020B0604020202020204" pitchFamily="34" charset="0"/>
+              </a:rPr>
+              <a:t>attendance policy</a:t>
+            </a:r>
+          </a:p>
+          <a:p>
+            <a:r>
+              <a:rPr lang="en-US" dirty="0">
+                <a:latin typeface="Arial" panose="020B0604020202020204" pitchFamily="34" charset="0"/>
+                <a:cs typeface="Arial" panose="020B0604020202020204" pitchFamily="34" charset="0"/>
+              </a:rPr>
+              <a:t>Module 0 homework has been returned! Let Thomas know if you have any questions or concerns</a:t>
+            </a:r>
+          </a:p>
+          <a:p>
+            <a:r>
+              <a:rPr lang="en-US" dirty="0">
+                <a:latin typeface="Arial" panose="020B0604020202020204" pitchFamily="34" charset="0"/>
+                <a:cs typeface="Arial" panose="020B0604020202020204" pitchFamily="34" charset="0"/>
+              </a:rPr>
+              <a:t>This week:</a:t>
+            </a:r>
+          </a:p>
+          <a:p>
+            <a:pPr lvl="1"/>
+            <a:r>
+              <a:rPr lang="en-US" dirty="0">
+                <a:latin typeface="Arial" panose="020B0604020202020204" pitchFamily="34" charset="0"/>
+                <a:cs typeface="Arial" panose="020B0604020202020204" pitchFamily="34" charset="0"/>
+              </a:rPr>
+              <a:t>Written Assignment for Module 1 is due on Thursday!!</a:t>
+            </a:r>
+          </a:p>
+          <a:p>
+            <a:pPr lvl="1"/>
+            <a:r>
+              <a:rPr lang="en-US" dirty="0">
+                <a:latin typeface="Arial" panose="020B0604020202020204" pitchFamily="34" charset="0"/>
+                <a:cs typeface="Arial" panose="020B0604020202020204" pitchFamily="34" charset="0"/>
+              </a:rPr>
+              <a:t>Study for the first quiz!</a:t>
+            </a:r>
+          </a:p>
+          <a:p>
+            <a:r>
+              <a:rPr lang="en-US" dirty="0">
+                <a:latin typeface="Arial" panose="020B0604020202020204" pitchFamily="34" charset="0"/>
+                <a:cs typeface="Arial" panose="020B0604020202020204" pitchFamily="34" charset="0"/>
+              </a:rPr>
+              <a:t>Module 1 Practice Quiz</a:t>
+            </a:r>
+          </a:p>
+          <a:p>
+            <a:pPr lvl="1"/>
+            <a:r>
+              <a:rPr lang="en-US" dirty="0">
+                <a:latin typeface="Arial" panose="020B0604020202020204" pitchFamily="34" charset="0"/>
+                <a:cs typeface="Arial" panose="020B0604020202020204" pitchFamily="34" charset="0"/>
+              </a:rPr>
+              <a:t>You have been invited to the Prairie Learn / Test. Please go in and accept the invitation ASAP!</a:t>
+            </a:r>
+          </a:p>
+          <a:p>
+            <a:pPr lvl="1"/>
+            <a:r>
+              <a:rPr lang="en-US" dirty="0">
+                <a:latin typeface="Arial" panose="020B0604020202020204" pitchFamily="34" charset="0"/>
+                <a:cs typeface="Arial" panose="020B0604020202020204" pitchFamily="34" charset="0"/>
+              </a:rPr>
+              <a:t>Prairie Learn now has a practice quiz that you can take to get used to the mechanics of the questions.</a:t>
+            </a:r>
+          </a:p>
+          <a:p>
+            <a:r>
+              <a:rPr lang="en-US" dirty="0">
+                <a:latin typeface="Arial" panose="020B0604020202020204" pitchFamily="34" charset="0"/>
+                <a:cs typeface="Arial" panose="020B0604020202020204" pitchFamily="34" charset="0"/>
+              </a:rPr>
+              <a:t>First real quiz is NEXT week</a:t>
+            </a:r>
+          </a:p>
+          <a:p>
+            <a:pPr lvl="1"/>
+            <a:r>
+              <a:rPr lang="en-US" dirty="0">
+                <a:latin typeface="Arial" panose="020B0604020202020204" pitchFamily="34" charset="0"/>
+                <a:cs typeface="Arial" panose="020B0604020202020204" pitchFamily="34" charset="0"/>
+              </a:rPr>
+              <a:t>Reservations are open NOW on Prairie Test. Please login and make your reservation ASAP!</a:t>
+            </a:r>
+          </a:p>
+          <a:p>
+            <a:pPr lvl="1"/>
+            <a:r>
+              <a:rPr lang="en-US" dirty="0">
+                <a:latin typeface="Arial" panose="020B0604020202020204" pitchFamily="34" charset="0"/>
+                <a:cs typeface="Arial" panose="020B0604020202020204" pitchFamily="34" charset="0"/>
+              </a:rPr>
+              <a:t>Overview of the questions is on the next slide</a:t>
+            </a:r>
+          </a:p>
+          <a:p>
+            <a:r>
+              <a:rPr lang="en-US" dirty="0">
+                <a:latin typeface="Arial" panose="020B0604020202020204" pitchFamily="34" charset="0"/>
+                <a:cs typeface="Arial" panose="020B0604020202020204" pitchFamily="34" charset="0"/>
+              </a:rPr>
+              <a:t>These slides are linked on the course webpage “slides” page.</a:t>
+            </a:r>
+          </a:p>
+          <a:p>
+            <a:r>
+              <a:rPr lang="en-US" dirty="0">
+                <a:latin typeface="Arial" panose="020B0604020202020204" pitchFamily="34" charset="0"/>
+                <a:cs typeface="Arial" panose="020B0604020202020204" pitchFamily="34" charset="0"/>
+              </a:rPr>
+              <a:t>Today we will continue with module 1 on regular languages.</a:t>
+            </a:r>
+          </a:p>
+        </p:txBody>
+      </p:sp>
+    </p:spTree>
+    <p:extLst>
+      <p:ext uri="{BB962C8B-B14F-4D97-AF65-F5344CB8AC3E}">
+        <p14:creationId xmlns:p14="http://schemas.microsoft.com/office/powerpoint/2010/main" val="2166409388"/>
+      </p:ext>
+    </p:extLst>
+  </p:cSld>
+  <p:clrMapOvr>
+    <a:masterClrMapping/>
+  </p:clrMapOvr>
+</p:sld>
+</file>
+
+<file path=ppt/slides/slide8.xml><?xml version="1.0" encoding="utf-8"?>
+<p:sld xmlns:a="http://schemas.openxmlformats.org/drawingml/2006/main" xmlns:r="http://schemas.openxmlformats.org/officeDocument/2006/relationships" xmlns:p="http://schemas.openxmlformats.org/presentationml/2006/main">
+  <p:cSld>
+    <p:spTree>
+      <p:nvGrpSpPr>
+        <p:cNvPr id="1" name="">
+          <a:extLst>
+            <a:ext uri="{FF2B5EF4-FFF2-40B4-BE49-F238E27FC236}">
+              <a16:creationId xmlns:a16="http://schemas.microsoft.com/office/drawing/2014/main" id="{BD983385-6C8F-46CD-2B07-00E8119F8A3B}"/>
+            </a:ext>
+          </a:extLst>
+        </p:cNvPr>
+        <p:cNvGrpSpPr/>
+        <p:nvPr/>
+      </p:nvGrpSpPr>
+      <p:grpSpPr>
+        <a:xfrm>
+          <a:off x="0" y="0"/>
+          <a:ext cx="0" cy="0"/>
+          <a:chOff x="0" y="0"/>
+          <a:chExt cx="0" cy="0"/>
+        </a:xfrm>
+      </p:grpSpPr>
+      <p:sp>
+        <p:nvSpPr>
+          <p:cNvPr id="6146" name="Rectangle 2">
+            <a:extLst>
+              <a:ext uri="{FF2B5EF4-FFF2-40B4-BE49-F238E27FC236}">
+                <a16:creationId xmlns:a16="http://schemas.microsoft.com/office/drawing/2014/main" id="{32A1F65C-6252-AE60-522B-8F061101A2E7}"/>
+              </a:ext>
+            </a:extLst>
+          </p:cNvPr>
+          <p:cNvSpPr>
+            <a:spLocks noGrp="1" noChangeArrowheads="1"/>
+          </p:cNvSpPr>
+          <p:nvPr>
+            <p:ph type="title"/>
+            <p:custDataLst>
+              <p:tags r:id="rId1"/>
+            </p:custDataLst>
+          </p:nvPr>
+        </p:nvSpPr>
+        <p:spPr>
+          <a:xfrm>
+            <a:off x="1141413" y="284084"/>
+            <a:ext cx="9905998" cy="620791"/>
+          </a:xfrm>
+        </p:spPr>
+        <p:txBody>
+          <a:bodyPr/>
+          <a:lstStyle/>
+          <a:p>
+            <a:pPr algn="ctr"/>
+            <a:r>
+              <a:rPr lang="en-US" dirty="0"/>
+              <a:t>Quiz 1 – Question Summary</a:t>
+            </a:r>
+          </a:p>
+        </p:txBody>
+      </p:sp>
+      <p:sp>
+        <p:nvSpPr>
+          <p:cNvPr id="6147" name="Rectangle 3">
+            <a:extLst>
+              <a:ext uri="{FF2B5EF4-FFF2-40B4-BE49-F238E27FC236}">
+                <a16:creationId xmlns:a16="http://schemas.microsoft.com/office/drawing/2014/main" id="{3417B98D-521A-B9E3-4522-F6B1F5050BA4}"/>
+              </a:ext>
+            </a:extLst>
+          </p:cNvPr>
+          <p:cNvSpPr>
+            <a:spLocks noGrp="1" noChangeArrowheads="1"/>
+          </p:cNvSpPr>
+          <p:nvPr>
+            <p:ph idx="1"/>
+            <p:custDataLst>
+              <p:tags r:id="rId2"/>
+            </p:custDataLst>
+          </p:nvPr>
+        </p:nvSpPr>
+        <p:spPr>
+          <a:xfrm>
+            <a:off x="1664842" y="1311217"/>
+            <a:ext cx="8859140" cy="5202315"/>
+          </a:xfrm>
+        </p:spPr>
+        <p:txBody>
+          <a:bodyPr>
+            <a:normAutofit/>
+          </a:bodyPr>
+          <a:lstStyle/>
+          <a:p>
+            <a:r>
+              <a:rPr lang="en-US" dirty="0">
+                <a:latin typeface="Arial" panose="020B0604020202020204" pitchFamily="34" charset="0"/>
+                <a:cs typeface="Arial" panose="020B0604020202020204" pitchFamily="34" charset="0"/>
+              </a:rPr>
+              <a:t>Q1: True / False Questions (10 of them)</a:t>
+            </a:r>
+          </a:p>
+          <a:p>
+            <a:pPr lvl="1"/>
+            <a:r>
+              <a:rPr lang="en-US" dirty="0">
+                <a:latin typeface="Arial" panose="020B0604020202020204" pitchFamily="34" charset="0"/>
+                <a:cs typeface="Arial" panose="020B0604020202020204" pitchFamily="34" charset="0"/>
+              </a:rPr>
+              <a:t>Span the entire module, may reference module 0 material</a:t>
+            </a:r>
+          </a:p>
+          <a:p>
+            <a:r>
+              <a:rPr lang="en-US" dirty="0">
+                <a:latin typeface="Arial" panose="020B0604020202020204" pitchFamily="34" charset="0"/>
+                <a:cs typeface="Arial" panose="020B0604020202020204" pitchFamily="34" charset="0"/>
+              </a:rPr>
+              <a:t>Q2-3: Draw a DFA from description (2 of these)</a:t>
+            </a:r>
+          </a:p>
+          <a:p>
+            <a:pPr lvl="1"/>
+            <a:r>
+              <a:rPr lang="en-US" dirty="0">
+                <a:latin typeface="Arial" panose="020B0604020202020204" pitchFamily="34" charset="0"/>
+                <a:cs typeface="Arial" panose="020B0604020202020204" pitchFamily="34" charset="0"/>
+              </a:rPr>
+              <a:t>Given a language description, draw the DFA for that language</a:t>
+            </a:r>
+          </a:p>
+          <a:p>
+            <a:r>
+              <a:rPr lang="en-US" dirty="0">
+                <a:latin typeface="Arial" panose="020B0604020202020204" pitchFamily="34" charset="0"/>
+                <a:cs typeface="Arial" panose="020B0604020202020204" pitchFamily="34" charset="0"/>
+              </a:rPr>
+              <a:t>Q4-5: Write out regular expression from DFA (2 of these)</a:t>
+            </a:r>
+          </a:p>
+          <a:p>
+            <a:pPr lvl="1"/>
+            <a:r>
+              <a:rPr lang="en-US" dirty="0">
+                <a:latin typeface="Arial" panose="020B0604020202020204" pitchFamily="34" charset="0"/>
+                <a:cs typeface="Arial" panose="020B0604020202020204" pitchFamily="34" charset="0"/>
+              </a:rPr>
+              <a:t>Given an image of a DFA, write the equivalent regular expression for it</a:t>
+            </a:r>
+          </a:p>
+          <a:p>
+            <a:pPr lvl="1"/>
+            <a:r>
+              <a:rPr lang="en-US" dirty="0">
+                <a:latin typeface="Arial" panose="020B0604020202020204" pitchFamily="34" charset="0"/>
+                <a:cs typeface="Arial" panose="020B0604020202020204" pitchFamily="34" charset="0"/>
+              </a:rPr>
+              <a:t>We will study this concept TODAY</a:t>
+            </a:r>
+          </a:p>
+          <a:p>
+            <a:r>
+              <a:rPr lang="en-US" dirty="0">
+                <a:latin typeface="Arial" panose="020B0604020202020204" pitchFamily="34" charset="0"/>
+                <a:cs typeface="Arial" panose="020B0604020202020204" pitchFamily="34" charset="0"/>
+              </a:rPr>
+              <a:t>Q6: Pumping Lemma</a:t>
+            </a:r>
+          </a:p>
+          <a:p>
+            <a:pPr lvl="1"/>
+            <a:r>
+              <a:rPr lang="en-US" dirty="0">
+                <a:latin typeface="Arial" panose="020B0604020202020204" pitchFamily="34" charset="0"/>
+                <a:cs typeface="Arial" panose="020B0604020202020204" pitchFamily="34" charset="0"/>
+              </a:rPr>
+              <a:t>Prove a language is not regular by using the pumping lemma</a:t>
+            </a:r>
+          </a:p>
+          <a:p>
+            <a:pPr lvl="1"/>
+            <a:r>
+              <a:rPr lang="en-US" dirty="0">
+                <a:latin typeface="Arial" panose="020B0604020202020204" pitchFamily="34" charset="0"/>
+                <a:cs typeface="Arial" panose="020B0604020202020204" pitchFamily="34" charset="0"/>
+              </a:rPr>
+              <a:t>We will study this concept on THURSDAY</a:t>
+            </a:r>
+          </a:p>
+        </p:txBody>
+      </p:sp>
+    </p:spTree>
+    <p:extLst>
+      <p:ext uri="{BB962C8B-B14F-4D97-AF65-F5344CB8AC3E}">
+        <p14:creationId xmlns:p14="http://schemas.microsoft.com/office/powerpoint/2010/main" val="2190362403"/>
+      </p:ext>
+    </p:extLst>
+  </p:cSld>
+  <p:clrMapOvr>
+    <a:masterClrMapping/>
+  </p:clrMapOvr>
+</p:sld>
+</file>
+
+<file path=ppt/slides/slide9.xml><?xml version="1.0" encoding="utf-8"?>
+<p:sld xmlns:a="http://schemas.openxmlformats.org/drawingml/2006/main" xmlns:r="http://schemas.openxmlformats.org/officeDocument/2006/relationships" xmlns:p="http://schemas.openxmlformats.org/presentationml/2006/main">
+  <p:cSld>
+    <p:spTree>
+      <p:nvGrpSpPr>
+        <p:cNvPr id="1" name="">
+          <a:extLst>
+            <a:ext uri="{FF2B5EF4-FFF2-40B4-BE49-F238E27FC236}">
+              <a16:creationId xmlns:a16="http://schemas.microsoft.com/office/drawing/2014/main" id="{EA1838D9-B8D7-F507-D47B-1AF6B185D3D1}"/>
+            </a:ext>
+          </a:extLst>
+        </p:cNvPr>
+        <p:cNvGrpSpPr/>
+        <p:nvPr/>
+      </p:nvGrpSpPr>
+      <p:grpSpPr>
+        <a:xfrm>
+          <a:off x="0" y="0"/>
+          <a:ext cx="0" cy="0"/>
+          <a:chOff x="0" y="0"/>
+          <a:chExt cx="0" cy="0"/>
+        </a:xfrm>
+      </p:grpSpPr>
+      <p:sp>
+        <p:nvSpPr>
+          <p:cNvPr id="6146" name="Rectangle 2">
+            <a:extLst>
+              <a:ext uri="{FF2B5EF4-FFF2-40B4-BE49-F238E27FC236}">
+                <a16:creationId xmlns:a16="http://schemas.microsoft.com/office/drawing/2014/main" id="{793D2CD9-D310-A2CA-CA72-21A0F92B43CE}"/>
+              </a:ext>
+            </a:extLst>
+          </p:cNvPr>
+          <p:cNvSpPr>
+            <a:spLocks noGrp="1" noChangeArrowheads="1"/>
+          </p:cNvSpPr>
+          <p:nvPr>
+            <p:ph type="title"/>
+            <p:custDataLst>
+              <p:tags r:id="rId1"/>
+            </p:custDataLst>
+          </p:nvPr>
+        </p:nvSpPr>
+        <p:spPr>
+          <a:xfrm>
+            <a:off x="1141413" y="284084"/>
+            <a:ext cx="9905998" cy="620791"/>
+          </a:xfrm>
+        </p:spPr>
+        <p:txBody>
+          <a:bodyPr/>
+          <a:lstStyle/>
+          <a:p>
+            <a:pPr algn="ctr"/>
+            <a:r>
+              <a:rPr lang="en-US" dirty="0"/>
+              <a:t>Lecture 8 - Thursday, Sep. 17</a:t>
+            </a:r>
+          </a:p>
+        </p:txBody>
+      </p:sp>
+      <p:sp>
+        <p:nvSpPr>
+          <p:cNvPr id="6147" name="Rectangle 3">
+            <a:extLst>
+              <a:ext uri="{FF2B5EF4-FFF2-40B4-BE49-F238E27FC236}">
+                <a16:creationId xmlns:a16="http://schemas.microsoft.com/office/drawing/2014/main" id="{E6CF8E07-0366-E560-1D68-CEDF596389F4}"/>
+              </a:ext>
+            </a:extLst>
+          </p:cNvPr>
+          <p:cNvSpPr>
+            <a:spLocks noGrp="1" noChangeArrowheads="1"/>
+          </p:cNvSpPr>
+          <p:nvPr>
+            <p:ph idx="1"/>
+            <p:custDataLst>
+              <p:tags r:id="rId2"/>
+            </p:custDataLst>
+          </p:nvPr>
+        </p:nvSpPr>
+        <p:spPr>
+          <a:xfrm>
+            <a:off x="1294151" y="1098548"/>
+            <a:ext cx="9600522" cy="5475367"/>
+          </a:xfrm>
+        </p:spPr>
+        <p:txBody>
+          <a:bodyPr>
+            <a:normAutofit fontScale="85000" lnSpcReduction="10000"/>
+          </a:bodyPr>
+          <a:lstStyle/>
+          <a:p>
+            <a:r>
+              <a:rPr lang="en-US" dirty="0">
+                <a:latin typeface="Arial" panose="020B0604020202020204" pitchFamily="34" charset="0"/>
+                <a:cs typeface="Arial" panose="020B0604020202020204" pitchFamily="34" charset="0"/>
+              </a:rPr>
+              <a:t>Please remember </a:t>
+            </a:r>
+            <a:r>
+              <a:rPr lang="en-US" b="1" i="1" u="sng" dirty="0">
+                <a:latin typeface="Arial" panose="020B0604020202020204" pitchFamily="34" charset="0"/>
+                <a:cs typeface="Arial" panose="020B0604020202020204" pitchFamily="34" charset="0"/>
+              </a:rPr>
+              <a:t>no laptops / phones</a:t>
+            </a:r>
+            <a:r>
+              <a:rPr lang="en-US" dirty="0">
+                <a:latin typeface="Arial" panose="020B0604020202020204" pitchFamily="34" charset="0"/>
+                <a:cs typeface="Arial" panose="020B0604020202020204" pitchFamily="34" charset="0"/>
+              </a:rPr>
+              <a:t> and </a:t>
+            </a:r>
+            <a:r>
+              <a:rPr lang="en-US" b="1" i="1" u="sng" dirty="0">
+                <a:latin typeface="Arial" panose="020B0604020202020204" pitchFamily="34" charset="0"/>
+                <a:cs typeface="Arial" panose="020B0604020202020204" pitchFamily="34" charset="0"/>
+              </a:rPr>
+              <a:t>attendance policy</a:t>
+            </a:r>
+            <a:endParaRPr lang="en-US" dirty="0">
+              <a:latin typeface="Arial" panose="020B0604020202020204" pitchFamily="34" charset="0"/>
+              <a:cs typeface="Arial" panose="020B0604020202020204" pitchFamily="34" charset="0"/>
+            </a:endParaRPr>
+          </a:p>
+          <a:p>
+            <a:r>
+              <a:rPr lang="en-US" dirty="0">
+                <a:latin typeface="Arial" panose="020B0604020202020204" pitchFamily="34" charset="0"/>
+                <a:cs typeface="Arial" panose="020B0604020202020204" pitchFamily="34" charset="0"/>
+              </a:rPr>
+              <a:t>This week:</a:t>
+            </a:r>
+          </a:p>
+          <a:p>
+            <a:pPr lvl="1"/>
+            <a:r>
+              <a:rPr lang="en-US" dirty="0">
+                <a:latin typeface="Arial" panose="020B0604020202020204" pitchFamily="34" charset="0"/>
+                <a:cs typeface="Arial" panose="020B0604020202020204" pitchFamily="34" charset="0"/>
+              </a:rPr>
+              <a:t>Written Assignment for Module 1 is due TONIGHT!!</a:t>
+            </a:r>
+          </a:p>
+          <a:p>
+            <a:pPr lvl="1"/>
+            <a:r>
+              <a:rPr lang="en-US" dirty="0">
+                <a:latin typeface="Arial" panose="020B0604020202020204" pitchFamily="34" charset="0"/>
+                <a:cs typeface="Arial" panose="020B0604020202020204" pitchFamily="34" charset="0"/>
+              </a:rPr>
+              <a:t>Study for the first quiz!</a:t>
+            </a:r>
+          </a:p>
+          <a:p>
+            <a:r>
+              <a:rPr lang="en-US" dirty="0">
+                <a:latin typeface="Arial" panose="020B0604020202020204" pitchFamily="34" charset="0"/>
+                <a:cs typeface="Arial" panose="020B0604020202020204" pitchFamily="34" charset="0"/>
+              </a:rPr>
+              <a:t>Module 1 Practice Quiz</a:t>
+            </a:r>
+          </a:p>
+          <a:p>
+            <a:pPr lvl="1"/>
+            <a:r>
+              <a:rPr lang="en-US" dirty="0">
+                <a:latin typeface="Arial" panose="020B0604020202020204" pitchFamily="34" charset="0"/>
+                <a:cs typeface="Arial" panose="020B0604020202020204" pitchFamily="34" charset="0"/>
+              </a:rPr>
+              <a:t>You have been invited to the Prairie Learn / Test. Please accept the invitation ASAP!</a:t>
+            </a:r>
+          </a:p>
+          <a:p>
+            <a:pPr lvl="1"/>
+            <a:r>
+              <a:rPr lang="en-US" dirty="0">
+                <a:latin typeface="Arial" panose="020B0604020202020204" pitchFamily="34" charset="0"/>
+                <a:cs typeface="Arial" panose="020B0604020202020204" pitchFamily="34" charset="0"/>
+              </a:rPr>
+              <a:t>Prairie Learn now has a practice quiz you can take to get used to the mechanics of the questions.</a:t>
+            </a:r>
+          </a:p>
+          <a:p>
+            <a:r>
+              <a:rPr lang="en-US" dirty="0">
+                <a:latin typeface="Arial" panose="020B0604020202020204" pitchFamily="34" charset="0"/>
+                <a:cs typeface="Arial" panose="020B0604020202020204" pitchFamily="34" charset="0"/>
+              </a:rPr>
+              <a:t>First real quiz is NEXT week</a:t>
+            </a:r>
+          </a:p>
+          <a:p>
+            <a:pPr lvl="1"/>
+            <a:r>
+              <a:rPr lang="en-US" dirty="0">
+                <a:latin typeface="Arial" panose="020B0604020202020204" pitchFamily="34" charset="0"/>
+                <a:cs typeface="Arial" panose="020B0604020202020204" pitchFamily="34" charset="0"/>
+              </a:rPr>
+              <a:t>Reservations are open NOW on Prairie Test. Please login and make your reservation!</a:t>
+            </a:r>
+          </a:p>
+          <a:p>
+            <a:pPr lvl="1"/>
+            <a:r>
+              <a:rPr lang="en-US" dirty="0">
+                <a:latin typeface="Arial" panose="020B0604020202020204" pitchFamily="34" charset="0"/>
+                <a:cs typeface="Arial" panose="020B0604020202020204" pitchFamily="34" charset="0"/>
+              </a:rPr>
+              <a:t>Overview of the questions is on the next slide</a:t>
+            </a:r>
+          </a:p>
+          <a:p>
+            <a:r>
+              <a:rPr lang="en-US" dirty="0">
+                <a:latin typeface="Arial" panose="020B0604020202020204" pitchFamily="34" charset="0"/>
+                <a:cs typeface="Arial" panose="020B0604020202020204" pitchFamily="34" charset="0"/>
+              </a:rPr>
+              <a:t>These slides are linked on the course webpage “slides” page.</a:t>
+            </a:r>
+          </a:p>
+          <a:p>
+            <a:r>
+              <a:rPr lang="en-US" dirty="0">
+                <a:latin typeface="Arial" panose="020B0604020202020204" pitchFamily="34" charset="0"/>
+                <a:cs typeface="Arial" panose="020B0604020202020204" pitchFamily="34" charset="0"/>
+              </a:rPr>
+              <a:t>Today we will finish module 1 on regular languages.</a:t>
+            </a:r>
+          </a:p>
+        </p:txBody>
+      </p:sp>
+    </p:spTree>
+    <p:extLst>
+      <p:ext uri="{BB962C8B-B14F-4D97-AF65-F5344CB8AC3E}">
+        <p14:creationId xmlns:p14="http://schemas.microsoft.com/office/powerpoint/2010/main" val="3814814765"/>
       </p:ext>
     </p:extLst>
   </p:cSld>
@@ -16981,6 +17428,30 @@
 </file>
 
 <file path=ppt/tags/tag20.xml><?xml version="1.0" encoding="utf-8"?>
+<p:tagLst xmlns:a="http://schemas.openxmlformats.org/drawingml/2006/main" xmlns:r="http://schemas.openxmlformats.org/officeDocument/2006/relationships" xmlns:p="http://schemas.openxmlformats.org/presentationml/2006/main">
+  <p:tag name="_INSTRUCTOR VIEW19C14C36-AC8E-43BC-9DB6-C2AAF774C7DC|PANE__TAG" val="_"/>
+</p:tagLst>
+</file>
+
+<file path=ppt/tags/tag21.xml><?xml version="1.0" encoding="utf-8"?>
+<p:tagLst xmlns:a="http://schemas.openxmlformats.org/drawingml/2006/main" xmlns:r="http://schemas.openxmlformats.org/officeDocument/2006/relationships" xmlns:p="http://schemas.openxmlformats.org/presentationml/2006/main">
+  <p:tag name="_INSTRUCTOR VIEW19C14C36-AC8E-43BC-9DB6-C2AAF774C7DC|PANE__TAG" val="_"/>
+</p:tagLst>
+</file>
+
+<file path=ppt/tags/tag22.xml><?xml version="1.0" encoding="utf-8"?>
+<p:tagLst xmlns:a="http://schemas.openxmlformats.org/drawingml/2006/main" xmlns:r="http://schemas.openxmlformats.org/officeDocument/2006/relationships" xmlns:p="http://schemas.openxmlformats.org/presentationml/2006/main">
+  <p:tag name="_INSTRUCTOR VIEW19C14C36-AC8E-43BC-9DB6-C2AAF774C7DC|PANE__TAG" val="_"/>
+</p:tagLst>
+</file>
+
+<file path=ppt/tags/tag23.xml><?xml version="1.0" encoding="utf-8"?>
+<p:tagLst xmlns:a="http://schemas.openxmlformats.org/drawingml/2006/main" xmlns:r="http://schemas.openxmlformats.org/officeDocument/2006/relationships" xmlns:p="http://schemas.openxmlformats.org/presentationml/2006/main">
+  <p:tag name="_INSTRUCTOR VIEW19C14C36-AC8E-43BC-9DB6-C2AAF774C7DC|PANE__TAG" val="_"/>
+</p:tagLst>
+</file>
+
+<file path=ppt/tags/tag24.xml><?xml version="1.0" encoding="utf-8"?>
 <p:tagLst xmlns:a="http://schemas.openxmlformats.org/drawingml/2006/main" xmlns:r="http://schemas.openxmlformats.org/officeDocument/2006/relationships" xmlns:p="http://schemas.openxmlformats.org/presentationml/2006/main">
   <p:tag name="_INSTRUCTOR VIEW19C14C36-AC8E-43BC-9DB6-C2AAF774C7DC|PANE__TAG" val="_"/>
 </p:tagLst>

--- a/slides/00-DailyAnnouncements.pptx
+++ b/slides/00-DailyAnnouncements.pptx
@@ -5,7 +5,7 @@
     <p:sldMasterId id="2147484006" r:id="rId1"/>
   </p:sldMasterIdLst>
   <p:notesMasterIdLst>
-    <p:notesMasterId r:id="rId13"/>
+    <p:notesMasterId r:id="rId14"/>
   </p:notesMasterIdLst>
   <p:sldIdLst>
     <p:sldId id="256" r:id="rId2"/>
@@ -18,7 +18,8 @@
     <p:sldId id="521" r:id="rId9"/>
     <p:sldId id="522" r:id="rId10"/>
     <p:sldId id="523" r:id="rId11"/>
-    <p:sldId id="515" r:id="rId12"/>
+    <p:sldId id="524" r:id="rId12"/>
+    <p:sldId id="515" r:id="rId13"/>
   </p:sldIdLst>
   <p:sldSz cx="12192000" cy="6858000"/>
   <p:notesSz cx="6858000" cy="9144000"/>
@@ -207,7 +208,7 @@
           <a:p>
             <a:fld id="{C5B45307-6ED4-B142-BD64-10F739779302}" type="datetimeFigureOut">
               <a:rPr lang="en-US" smtClean="0"/>
-              <a:t>9/15/26</a:t>
+              <a:t>9/21/26</a:t>
             </a:fld>
             <a:endParaRPr lang="en-US"/>
           </a:p>
@@ -615,7 +616,7 @@
           <a:noFill/>
           <a:extLst>
             <a:ext uri="{909E8E84-426E-40dd-AFC4-6F175D3DCCD1}">
-              <a14:hiddenFill xmlns="" xmlns:a14="http://schemas.microsoft.com/office/drawing/2010/main">
+              <a14:hiddenFill xmlns:a14="http://schemas.microsoft.com/office/drawing/2010/main" xmlns="">
                 <a:solidFill>
                   <a:srgbClr val="FFFFFF"/>
                 </a:solidFill>
@@ -674,7 +675,7 @@
             </a:ln>
             <a:extLst>
               <a:ext uri="{91240B29-F687-4f45-9708-019B960494DF}">
-                <a14:hiddenLine xmlns="" xmlns:a14="http://schemas.microsoft.com/office/drawing/2010/main" w="9525">
+                <a14:hiddenLine xmlns:a14="http://schemas.microsoft.com/office/drawing/2010/main" xmlns="" w="9525">
                   <a:solidFill>
                     <a:srgbClr val="000000"/>
                   </a:solidFill>
@@ -764,7 +765,7 @@
             </a:ln>
             <a:extLst>
               <a:ext uri="{91240B29-F687-4f45-9708-019B960494DF}">
-                <a14:hiddenLine xmlns="" xmlns:a14="http://schemas.microsoft.com/office/drawing/2010/main" w="9525">
+                <a14:hiddenLine xmlns:a14="http://schemas.microsoft.com/office/drawing/2010/main" xmlns="" w="9525">
                   <a:solidFill>
                     <a:srgbClr val="000000"/>
                   </a:solidFill>
@@ -854,7 +855,7 @@
             </a:ln>
             <a:extLst>
               <a:ext uri="{91240B29-F687-4f45-9708-019B960494DF}">
-                <a14:hiddenLine xmlns="" xmlns:a14="http://schemas.microsoft.com/office/drawing/2010/main" w="9525">
+                <a14:hiddenLine xmlns:a14="http://schemas.microsoft.com/office/drawing/2010/main" xmlns="" w="9525">
                   <a:solidFill>
                     <a:srgbClr val="000000"/>
                   </a:solidFill>
@@ -888,7 +889,7 @@
             </a:ln>
             <a:extLst>
               <a:ext uri="{91240B29-F687-4f45-9708-019B960494DF}">
-                <a14:hiddenLine xmlns="" xmlns:a14="http://schemas.microsoft.com/office/drawing/2010/main" w="9525">
+                <a14:hiddenLine xmlns:a14="http://schemas.microsoft.com/office/drawing/2010/main" xmlns="" w="9525">
                   <a:solidFill>
                     <a:srgbClr val="000000"/>
                   </a:solidFill>
@@ -978,7 +979,7 @@
             </a:ln>
             <a:extLst>
               <a:ext uri="{91240B29-F687-4f45-9708-019B960494DF}">
-                <a14:hiddenLine xmlns="" xmlns:a14="http://schemas.microsoft.com/office/drawing/2010/main" w="9525">
+                <a14:hiddenLine xmlns:a14="http://schemas.microsoft.com/office/drawing/2010/main" xmlns="" w="9525">
                   <a:solidFill>
                     <a:srgbClr val="000000"/>
                   </a:solidFill>
@@ -1040,7 +1041,7 @@
             </a:ln>
             <a:extLst>
               <a:ext uri="{91240B29-F687-4f45-9708-019B960494DF}">
-                <a14:hiddenLine xmlns="" xmlns:a14="http://schemas.microsoft.com/office/drawing/2010/main" w="9525">
+                <a14:hiddenLine xmlns:a14="http://schemas.microsoft.com/office/drawing/2010/main" xmlns="" w="9525">
                   <a:solidFill>
                     <a:srgbClr val="000000"/>
                   </a:solidFill>
@@ -1102,7 +1103,7 @@
             </a:ln>
             <a:extLst>
               <a:ext uri="{91240B29-F687-4f45-9708-019B960494DF}">
-                <a14:hiddenLine xmlns="" xmlns:a14="http://schemas.microsoft.com/office/drawing/2010/main" w="9525">
+                <a14:hiddenLine xmlns:a14="http://schemas.microsoft.com/office/drawing/2010/main" xmlns="" w="9525">
                   <a:solidFill>
                     <a:srgbClr val="000000"/>
                   </a:solidFill>
@@ -1192,7 +1193,7 @@
             </a:ln>
             <a:extLst>
               <a:ext uri="{91240B29-F687-4f45-9708-019B960494DF}">
-                <a14:hiddenLine xmlns="" xmlns:a14="http://schemas.microsoft.com/office/drawing/2010/main" w="9525">
+                <a14:hiddenLine xmlns:a14="http://schemas.microsoft.com/office/drawing/2010/main" xmlns="" w="9525">
                   <a:solidFill>
                     <a:srgbClr val="000000"/>
                   </a:solidFill>
@@ -1254,7 +1255,7 @@
             </a:ln>
             <a:extLst>
               <a:ext uri="{91240B29-F687-4f45-9708-019B960494DF}">
-                <a14:hiddenLine xmlns="" xmlns:a14="http://schemas.microsoft.com/office/drawing/2010/main" w="9525">
+                <a14:hiddenLine xmlns:a14="http://schemas.microsoft.com/office/drawing/2010/main" xmlns="" w="9525">
                   <a:solidFill>
                     <a:srgbClr val="000000"/>
                   </a:solidFill>
@@ -1316,7 +1317,7 @@
             </a:ln>
             <a:extLst>
               <a:ext uri="{91240B29-F687-4f45-9708-019B960494DF}">
-                <a14:hiddenLine xmlns="" xmlns:a14="http://schemas.microsoft.com/office/drawing/2010/main" w="9525">
+                <a14:hiddenLine xmlns:a14="http://schemas.microsoft.com/office/drawing/2010/main" xmlns="" w="9525">
                   <a:solidFill>
                     <a:srgbClr val="000000"/>
                   </a:solidFill>
@@ -1406,7 +1407,7 @@
             </a:ln>
             <a:extLst>
               <a:ext uri="{91240B29-F687-4f45-9708-019B960494DF}">
-                <a14:hiddenLine xmlns="" xmlns:a14="http://schemas.microsoft.com/office/drawing/2010/main" w="9525">
+                <a14:hiddenLine xmlns:a14="http://schemas.microsoft.com/office/drawing/2010/main" xmlns="" w="9525">
                   <a:solidFill>
                     <a:srgbClr val="000000"/>
                   </a:solidFill>
@@ -1496,7 +1497,7 @@
             </a:ln>
             <a:extLst>
               <a:ext uri="{91240B29-F687-4f45-9708-019B960494DF}">
-                <a14:hiddenLine xmlns="" xmlns:a14="http://schemas.microsoft.com/office/drawing/2010/main" w="9525">
+                <a14:hiddenLine xmlns:a14="http://schemas.microsoft.com/office/drawing/2010/main" xmlns="" w="9525">
                   <a:solidFill>
                     <a:srgbClr val="000000"/>
                   </a:solidFill>
@@ -1558,7 +1559,7 @@
             </a:ln>
             <a:extLst>
               <a:ext uri="{91240B29-F687-4f45-9708-019B960494DF}">
-                <a14:hiddenLine xmlns="" xmlns:a14="http://schemas.microsoft.com/office/drawing/2010/main" w="9525">
+                <a14:hiddenLine xmlns:a14="http://schemas.microsoft.com/office/drawing/2010/main" xmlns="" w="9525">
                   <a:solidFill>
                     <a:srgbClr val="000000"/>
                   </a:solidFill>
@@ -1668,7 +1669,7 @@
             </a:ln>
             <a:extLst>
               <a:ext uri="{91240B29-F687-4f45-9708-019B960494DF}">
-                <a14:hiddenLine xmlns="" xmlns:a14="http://schemas.microsoft.com/office/drawing/2010/main" w="9525">
+                <a14:hiddenLine xmlns:a14="http://schemas.microsoft.com/office/drawing/2010/main" xmlns="" w="9525">
                   <a:solidFill>
                     <a:srgbClr val="000000"/>
                   </a:solidFill>
@@ -1730,7 +1731,7 @@
             </a:ln>
             <a:extLst>
               <a:ext uri="{91240B29-F687-4f45-9708-019B960494DF}">
-                <a14:hiddenLine xmlns="" xmlns:a14="http://schemas.microsoft.com/office/drawing/2010/main" w="9525">
+                <a14:hiddenLine xmlns:a14="http://schemas.microsoft.com/office/drawing/2010/main" xmlns="" w="9525">
                   <a:solidFill>
                     <a:srgbClr val="000000"/>
                   </a:solidFill>
@@ -1820,7 +1821,7 @@
             </a:ln>
             <a:extLst>
               <a:ext uri="{91240B29-F687-4f45-9708-019B960494DF}">
-                <a14:hiddenLine xmlns="" xmlns:a14="http://schemas.microsoft.com/office/drawing/2010/main" w="9525">
+                <a14:hiddenLine xmlns:a14="http://schemas.microsoft.com/office/drawing/2010/main" xmlns="" w="9525">
                   <a:solidFill>
                     <a:srgbClr val="000000"/>
                   </a:solidFill>
@@ -1910,7 +1911,7 @@
             </a:ln>
             <a:extLst>
               <a:ext uri="{91240B29-F687-4f45-9708-019B960494DF}">
-                <a14:hiddenLine xmlns="" xmlns:a14="http://schemas.microsoft.com/office/drawing/2010/main" w="9525">
+                <a14:hiddenLine xmlns:a14="http://schemas.microsoft.com/office/drawing/2010/main" xmlns="" w="9525">
                   <a:solidFill>
                     <a:srgbClr val="000000"/>
                   </a:solidFill>
@@ -1972,7 +1973,7 @@
             </a:ln>
             <a:extLst>
               <a:ext uri="{91240B29-F687-4f45-9708-019B960494DF}">
-                <a14:hiddenLine xmlns="" xmlns:a14="http://schemas.microsoft.com/office/drawing/2010/main" w="9525">
+                <a14:hiddenLine xmlns:a14="http://schemas.microsoft.com/office/drawing/2010/main" xmlns="" w="9525">
                   <a:solidFill>
                     <a:srgbClr val="000000"/>
                   </a:solidFill>
@@ -2062,7 +2063,7 @@
             </a:ln>
             <a:extLst>
               <a:ext uri="{91240B29-F687-4f45-9708-019B960494DF}">
-                <a14:hiddenLine xmlns="" xmlns:a14="http://schemas.microsoft.com/office/drawing/2010/main" w="9525">
+                <a14:hiddenLine xmlns:a14="http://schemas.microsoft.com/office/drawing/2010/main" xmlns="" w="9525">
                   <a:solidFill>
                     <a:srgbClr val="000000"/>
                   </a:solidFill>
@@ -2152,7 +2153,7 @@
             </a:ln>
             <a:extLst>
               <a:ext uri="{91240B29-F687-4f45-9708-019B960494DF}">
-                <a14:hiddenLine xmlns="" xmlns:a14="http://schemas.microsoft.com/office/drawing/2010/main" w="9525">
+                <a14:hiddenLine xmlns:a14="http://schemas.microsoft.com/office/drawing/2010/main" xmlns="" w="9525">
                   <a:solidFill>
                     <a:srgbClr val="000000"/>
                   </a:solidFill>
@@ -2208,7 +2209,7 @@
             </a:ln>
             <a:extLst>
               <a:ext uri="{91240B29-F687-4f45-9708-019B960494DF}">
-                <a14:hiddenLine xmlns="" xmlns:a14="http://schemas.microsoft.com/office/drawing/2010/main" w="9525">
+                <a14:hiddenLine xmlns:a14="http://schemas.microsoft.com/office/drawing/2010/main" xmlns="" w="9525">
                   <a:solidFill>
                     <a:srgbClr val="000000"/>
                   </a:solidFill>
@@ -2298,7 +2299,7 @@
             </a:ln>
             <a:extLst>
               <a:ext uri="{91240B29-F687-4f45-9708-019B960494DF}">
-                <a14:hiddenLine xmlns="" xmlns:a14="http://schemas.microsoft.com/office/drawing/2010/main" w="9525">
+                <a14:hiddenLine xmlns:a14="http://schemas.microsoft.com/office/drawing/2010/main" xmlns="" w="9525">
                   <a:solidFill>
                     <a:srgbClr val="000000"/>
                   </a:solidFill>
@@ -2354,7 +2355,7 @@
             </a:ln>
             <a:extLst>
               <a:ext uri="{91240B29-F687-4f45-9708-019B960494DF}">
-                <a14:hiddenLine xmlns="" xmlns:a14="http://schemas.microsoft.com/office/drawing/2010/main" w="9525">
+                <a14:hiddenLine xmlns:a14="http://schemas.microsoft.com/office/drawing/2010/main" xmlns="" w="9525">
                   <a:solidFill>
                     <a:srgbClr val="000000"/>
                   </a:solidFill>
@@ -2444,7 +2445,7 @@
             </a:ln>
             <a:extLst>
               <a:ext uri="{91240B29-F687-4f45-9708-019B960494DF}">
-                <a14:hiddenLine xmlns="" xmlns:a14="http://schemas.microsoft.com/office/drawing/2010/main" w="9525">
+                <a14:hiddenLine xmlns:a14="http://schemas.microsoft.com/office/drawing/2010/main" xmlns="" w="9525">
                   <a:solidFill>
                     <a:srgbClr val="000000"/>
                   </a:solidFill>
@@ -2512,7 +2513,7 @@
             </a:ln>
             <a:extLst>
               <a:ext uri="{91240B29-F687-4f45-9708-019B960494DF}">
-                <a14:hiddenLine xmlns="" xmlns:a14="http://schemas.microsoft.com/office/drawing/2010/main" w="9525">
+                <a14:hiddenLine xmlns:a14="http://schemas.microsoft.com/office/drawing/2010/main" xmlns="" w="9525">
                   <a:solidFill>
                     <a:srgbClr val="000000"/>
                   </a:solidFill>
@@ -2602,7 +2603,7 @@
             </a:ln>
             <a:extLst>
               <a:ext uri="{91240B29-F687-4f45-9708-019B960494DF}">
-                <a14:hiddenLine xmlns="" xmlns:a14="http://schemas.microsoft.com/office/drawing/2010/main" w="9525">
+                <a14:hiddenLine xmlns:a14="http://schemas.microsoft.com/office/drawing/2010/main" xmlns="" w="9525">
                   <a:solidFill>
                     <a:srgbClr val="000000"/>
                   </a:solidFill>
@@ -2670,7 +2671,7 @@
             </a:ln>
             <a:extLst>
               <a:ext uri="{91240B29-F687-4f45-9708-019B960494DF}">
-                <a14:hiddenLine xmlns="" xmlns:a14="http://schemas.microsoft.com/office/drawing/2010/main" w="9525">
+                <a14:hiddenLine xmlns:a14="http://schemas.microsoft.com/office/drawing/2010/main" xmlns="" w="9525">
                   <a:solidFill>
                     <a:srgbClr val="000000"/>
                   </a:solidFill>
@@ -2760,7 +2761,7 @@
             </a:ln>
             <a:extLst>
               <a:ext uri="{91240B29-F687-4f45-9708-019B960494DF}">
-                <a14:hiddenLine xmlns="" xmlns:a14="http://schemas.microsoft.com/office/drawing/2010/main" w="9525">
+                <a14:hiddenLine xmlns:a14="http://schemas.microsoft.com/office/drawing/2010/main" xmlns="" w="9525">
                   <a:solidFill>
                     <a:srgbClr val="000000"/>
                   </a:solidFill>
@@ -2794,7 +2795,7 @@
             </a:ln>
             <a:extLst>
               <a:ext uri="{91240B29-F687-4f45-9708-019B960494DF}">
-                <a14:hiddenLine xmlns="" xmlns:a14="http://schemas.microsoft.com/office/drawing/2010/main" w="9525">
+                <a14:hiddenLine xmlns:a14="http://schemas.microsoft.com/office/drawing/2010/main" xmlns="" w="9525">
                   <a:solidFill>
                     <a:srgbClr val="000000"/>
                   </a:solidFill>
@@ -2884,7 +2885,7 @@
             </a:ln>
             <a:extLst>
               <a:ext uri="{91240B29-F687-4f45-9708-019B960494DF}">
-                <a14:hiddenLine xmlns="" xmlns:a14="http://schemas.microsoft.com/office/drawing/2010/main" w="9525">
+                <a14:hiddenLine xmlns:a14="http://schemas.microsoft.com/office/drawing/2010/main" xmlns="" w="9525">
                   <a:solidFill>
                     <a:srgbClr val="000000"/>
                   </a:solidFill>
@@ -2946,7 +2947,7 @@
             </a:ln>
             <a:extLst>
               <a:ext uri="{91240B29-F687-4f45-9708-019B960494DF}">
-                <a14:hiddenLine xmlns="" xmlns:a14="http://schemas.microsoft.com/office/drawing/2010/main" w="9525">
+                <a14:hiddenLine xmlns:a14="http://schemas.microsoft.com/office/drawing/2010/main" xmlns="" w="9525">
                   <a:solidFill>
                     <a:srgbClr val="000000"/>
                   </a:solidFill>
@@ -3008,7 +3009,7 @@
             </a:ln>
             <a:extLst>
               <a:ext uri="{91240B29-F687-4f45-9708-019B960494DF}">
-                <a14:hiddenLine xmlns="" xmlns:a14="http://schemas.microsoft.com/office/drawing/2010/main" w="9525">
+                <a14:hiddenLine xmlns:a14="http://schemas.microsoft.com/office/drawing/2010/main" xmlns="" w="9525">
                   <a:solidFill>
                     <a:srgbClr val="000000"/>
                   </a:solidFill>
@@ -3098,7 +3099,7 @@
             </a:ln>
             <a:extLst>
               <a:ext uri="{91240B29-F687-4f45-9708-019B960494DF}">
-                <a14:hiddenLine xmlns="" xmlns:a14="http://schemas.microsoft.com/office/drawing/2010/main" w="9525">
+                <a14:hiddenLine xmlns:a14="http://schemas.microsoft.com/office/drawing/2010/main" xmlns="" w="9525">
                   <a:solidFill>
                     <a:srgbClr val="000000"/>
                   </a:solidFill>
@@ -3166,7 +3167,7 @@
             </a:ln>
             <a:extLst>
               <a:ext uri="{91240B29-F687-4f45-9708-019B960494DF}">
-                <a14:hiddenLine xmlns="" xmlns:a14="http://schemas.microsoft.com/office/drawing/2010/main" w="9525">
+                <a14:hiddenLine xmlns:a14="http://schemas.microsoft.com/office/drawing/2010/main" xmlns="" w="9525">
                   <a:solidFill>
                     <a:srgbClr val="000000"/>
                   </a:solidFill>
@@ -3228,7 +3229,7 @@
             </a:ln>
             <a:extLst>
               <a:ext uri="{91240B29-F687-4f45-9708-019B960494DF}">
-                <a14:hiddenLine xmlns="" xmlns:a14="http://schemas.microsoft.com/office/drawing/2010/main" w="9525">
+                <a14:hiddenLine xmlns:a14="http://schemas.microsoft.com/office/drawing/2010/main" xmlns="" w="9525">
                   <a:solidFill>
                     <a:srgbClr val="000000"/>
                   </a:solidFill>
@@ -3318,7 +3319,7 @@
             </a:ln>
             <a:extLst>
               <a:ext uri="{91240B29-F687-4f45-9708-019B960494DF}">
-                <a14:hiddenLine xmlns="" xmlns:a14="http://schemas.microsoft.com/office/drawing/2010/main" w="9525">
+                <a14:hiddenLine xmlns:a14="http://schemas.microsoft.com/office/drawing/2010/main" xmlns="" w="9525">
                   <a:solidFill>
                     <a:srgbClr val="000000"/>
                   </a:solidFill>
@@ -3380,7 +3381,7 @@
             </a:ln>
             <a:extLst>
               <a:ext uri="{91240B29-F687-4f45-9708-019B960494DF}">
-                <a14:hiddenLine xmlns="" xmlns:a14="http://schemas.microsoft.com/office/drawing/2010/main" w="9525">
+                <a14:hiddenLine xmlns:a14="http://schemas.microsoft.com/office/drawing/2010/main" xmlns="" w="9525">
                   <a:solidFill>
                     <a:srgbClr val="000000"/>
                   </a:solidFill>
@@ -3470,7 +3471,7 @@
             </a:ln>
             <a:extLst>
               <a:ext uri="{91240B29-F687-4f45-9708-019B960494DF}">
-                <a14:hiddenLine xmlns="" xmlns:a14="http://schemas.microsoft.com/office/drawing/2010/main" w="9525">
+                <a14:hiddenLine xmlns:a14="http://schemas.microsoft.com/office/drawing/2010/main" xmlns="" w="9525">
                   <a:solidFill>
                     <a:srgbClr val="000000"/>
                   </a:solidFill>
@@ -3532,7 +3533,7 @@
             </a:ln>
             <a:extLst>
               <a:ext uri="{91240B29-F687-4f45-9708-019B960494DF}">
-                <a14:hiddenLine xmlns="" xmlns:a14="http://schemas.microsoft.com/office/drawing/2010/main" w="9525">
+                <a14:hiddenLine xmlns:a14="http://schemas.microsoft.com/office/drawing/2010/main" xmlns="" w="9525">
                   <a:solidFill>
                     <a:srgbClr val="000000"/>
                   </a:solidFill>
@@ -3622,7 +3623,7 @@
             </a:ln>
             <a:extLst>
               <a:ext uri="{91240B29-F687-4f45-9708-019B960494DF}">
-                <a14:hiddenLine xmlns="" xmlns:a14="http://schemas.microsoft.com/office/drawing/2010/main" w="9525">
+                <a14:hiddenLine xmlns:a14="http://schemas.microsoft.com/office/drawing/2010/main" xmlns="" w="9525">
                   <a:solidFill>
                     <a:srgbClr val="000000"/>
                   </a:solidFill>
@@ -3656,7 +3657,7 @@
             </a:ln>
             <a:extLst>
               <a:ext uri="{91240B29-F687-4f45-9708-019B960494DF}">
-                <a14:hiddenLine xmlns="" xmlns:a14="http://schemas.microsoft.com/office/drawing/2010/main" w="9525">
+                <a14:hiddenLine xmlns:a14="http://schemas.microsoft.com/office/drawing/2010/main" xmlns="" w="9525">
                   <a:solidFill>
                     <a:srgbClr val="000000"/>
                   </a:solidFill>
@@ -3721,7 +3722,7 @@
             </a:ln>
             <a:extLst>
               <a:ext uri="{91240B29-F687-4f45-9708-019B960494DF}">
-                <a14:hiddenLine xmlns="" xmlns:a14="http://schemas.microsoft.com/office/drawing/2010/main" w="9525">
+                <a14:hiddenLine xmlns:a14="http://schemas.microsoft.com/office/drawing/2010/main" xmlns="" w="9525">
                   <a:solidFill>
                     <a:srgbClr val="000000"/>
                   </a:solidFill>
@@ -3811,7 +3812,7 @@
             </a:ln>
             <a:extLst>
               <a:ext uri="{91240B29-F687-4f45-9708-019B960494DF}">
-                <a14:hiddenLine xmlns="" xmlns:a14="http://schemas.microsoft.com/office/drawing/2010/main" w="9525">
+                <a14:hiddenLine xmlns:a14="http://schemas.microsoft.com/office/drawing/2010/main" xmlns="" w="9525">
                   <a:solidFill>
                     <a:srgbClr val="000000"/>
                   </a:solidFill>
@@ -3873,7 +3874,7 @@
             </a:ln>
             <a:extLst>
               <a:ext uri="{91240B29-F687-4f45-9708-019B960494DF}">
-                <a14:hiddenLine xmlns="" xmlns:a14="http://schemas.microsoft.com/office/drawing/2010/main" w="9525">
+                <a14:hiddenLine xmlns:a14="http://schemas.microsoft.com/office/drawing/2010/main" xmlns="" w="9525">
                   <a:solidFill>
                     <a:srgbClr val="000000"/>
                   </a:solidFill>
@@ -3963,7 +3964,7 @@
             </a:ln>
             <a:extLst>
               <a:ext uri="{91240B29-F687-4f45-9708-019B960494DF}">
-                <a14:hiddenLine xmlns="" xmlns:a14="http://schemas.microsoft.com/office/drawing/2010/main" w="9525">
+                <a14:hiddenLine xmlns:a14="http://schemas.microsoft.com/office/drawing/2010/main" xmlns="" w="9525">
                   <a:solidFill>
                     <a:srgbClr val="000000"/>
                   </a:solidFill>
@@ -4053,7 +4054,7 @@
             </a:ln>
             <a:extLst>
               <a:ext uri="{91240B29-F687-4f45-9708-019B960494DF}">
-                <a14:hiddenLine xmlns="" xmlns:a14="http://schemas.microsoft.com/office/drawing/2010/main" w="9525">
+                <a14:hiddenLine xmlns:a14="http://schemas.microsoft.com/office/drawing/2010/main" xmlns="" w="9525">
                   <a:solidFill>
                     <a:srgbClr val="000000"/>
                   </a:solidFill>
@@ -4118,7 +4119,7 @@
             </a:ln>
             <a:extLst>
               <a:ext uri="{91240B29-F687-4f45-9708-019B960494DF}">
-                <a14:hiddenLine xmlns="" xmlns:a14="http://schemas.microsoft.com/office/drawing/2010/main" w="9525">
+                <a14:hiddenLine xmlns:a14="http://schemas.microsoft.com/office/drawing/2010/main" xmlns="" w="9525">
                   <a:solidFill>
                     <a:srgbClr val="000000"/>
                   </a:solidFill>
@@ -4180,7 +4181,7 @@
             </a:ln>
             <a:extLst>
               <a:ext uri="{91240B29-F687-4f45-9708-019B960494DF}">
-                <a14:hiddenLine xmlns="" xmlns:a14="http://schemas.microsoft.com/office/drawing/2010/main" w="9525">
+                <a14:hiddenLine xmlns:a14="http://schemas.microsoft.com/office/drawing/2010/main" xmlns="" w="9525">
                   <a:solidFill>
                     <a:srgbClr val="000000"/>
                   </a:solidFill>
@@ -4270,7 +4271,7 @@
             </a:ln>
             <a:extLst>
               <a:ext uri="{91240B29-F687-4f45-9708-019B960494DF}">
-                <a14:hiddenLine xmlns="" xmlns:a14="http://schemas.microsoft.com/office/drawing/2010/main" w="9525">
+                <a14:hiddenLine xmlns:a14="http://schemas.microsoft.com/office/drawing/2010/main" xmlns="" w="9525">
                   <a:solidFill>
                     <a:srgbClr val="000000"/>
                   </a:solidFill>
@@ -4360,7 +4361,7 @@
             </a:ln>
             <a:extLst>
               <a:ext uri="{91240B29-F687-4f45-9708-019B960494DF}">
-                <a14:hiddenLine xmlns="" xmlns:a14="http://schemas.microsoft.com/office/drawing/2010/main" w="9525">
+                <a14:hiddenLine xmlns:a14="http://schemas.microsoft.com/office/drawing/2010/main" xmlns="" w="9525">
                   <a:solidFill>
                     <a:srgbClr val="000000"/>
                   </a:solidFill>
@@ -4422,7 +4423,7 @@
             </a:ln>
             <a:extLst>
               <a:ext uri="{91240B29-F687-4f45-9708-019B960494DF}">
-                <a14:hiddenLine xmlns="" xmlns:a14="http://schemas.microsoft.com/office/drawing/2010/main" w="9525">
+                <a14:hiddenLine xmlns:a14="http://schemas.microsoft.com/office/drawing/2010/main" xmlns="" w="9525">
                   <a:solidFill>
                     <a:srgbClr val="000000"/>
                   </a:solidFill>
@@ -4542,7 +4543,7 @@
             </a:ln>
             <a:extLst>
               <a:ext uri="{91240B29-F687-4f45-9708-019B960494DF}">
-                <a14:hiddenLine xmlns="" xmlns:a14="http://schemas.microsoft.com/office/drawing/2010/main" w="9525">
+                <a14:hiddenLine xmlns:a14="http://schemas.microsoft.com/office/drawing/2010/main" xmlns="" w="9525">
                   <a:solidFill>
                     <a:srgbClr val="000000"/>
                   </a:solidFill>
@@ -4610,7 +4611,7 @@
             </a:ln>
             <a:extLst>
               <a:ext uri="{91240B29-F687-4f45-9708-019B960494DF}">
-                <a14:hiddenLine xmlns="" xmlns:a14="http://schemas.microsoft.com/office/drawing/2010/main" w="9525">
+                <a14:hiddenLine xmlns:a14="http://schemas.microsoft.com/office/drawing/2010/main" xmlns="" w="9525">
                   <a:solidFill>
                     <a:srgbClr val="000000"/>
                   </a:solidFill>
@@ -4700,7 +4701,7 @@
             </a:ln>
             <a:extLst>
               <a:ext uri="{91240B29-F687-4f45-9708-019B960494DF}">
-                <a14:hiddenLine xmlns="" xmlns:a14="http://schemas.microsoft.com/office/drawing/2010/main" w="9525">
+                <a14:hiddenLine xmlns:a14="http://schemas.microsoft.com/office/drawing/2010/main" xmlns="" w="9525">
                   <a:solidFill>
                     <a:srgbClr val="000000"/>
                   </a:solidFill>
@@ -4840,7 +4841,7 @@
           <a:p>
             <a:fld id="{4313F670-7F9A-774D-B73D-573401E44297}" type="datetime1">
               <a:rPr lang="en-US" smtClean="0"/>
-              <a:t>9/15/26</a:t>
+              <a:t>9/21/26</a:t>
             </a:fld>
             <a:endParaRPr lang="en-US"/>
           </a:p>
@@ -5107,7 +5108,7 @@
           <a:p>
             <a:fld id="{446F9669-A8A7-2D40-9D01-B35FC337AA30}" type="datetime1">
               <a:rPr lang="en-US" smtClean="0"/>
-              <a:t>9/15/26</a:t>
+              <a:t>9/21/26</a:t>
             </a:fld>
             <a:endParaRPr lang="en-US"/>
           </a:p>
@@ -5303,7 +5304,7 @@
           <a:p>
             <a:fld id="{FA76CF18-F41B-6B48-B3E5-599E9795C2C3}" type="datetime1">
               <a:rPr lang="en-US" smtClean="0"/>
-              <a:t>9/15/26</a:t>
+              <a:t>9/21/26</a:t>
             </a:fld>
             <a:endParaRPr lang="en-US"/>
           </a:p>
@@ -5566,7 +5567,7 @@
           <a:p>
             <a:fld id="{B9654854-6457-164F-A077-6B3035079B82}" type="datetime1">
               <a:rPr lang="en-US" smtClean="0"/>
-              <a:t>9/15/26</a:t>
+              <a:t>9/21/26</a:t>
             </a:fld>
             <a:endParaRPr lang="en-US"/>
           </a:p>
@@ -6000,7 +6001,7 @@
           <a:p>
             <a:fld id="{CE3DBFD7-E611-8C40-AC73-0C29FF63F0CD}" type="datetime1">
               <a:rPr lang="en-US" smtClean="0"/>
-              <a:t>9/15/26</a:t>
+              <a:t>9/21/26</a:t>
             </a:fld>
             <a:endParaRPr lang="en-US"/>
           </a:p>
@@ -6546,7 +6547,7 @@
           <a:p>
             <a:fld id="{C8B63B06-0493-2840-9F37-30C9412BBF17}" type="datetime1">
               <a:rPr lang="en-US" smtClean="0"/>
-              <a:t>9/15/26</a:t>
+              <a:t>9/21/26</a:t>
             </a:fld>
             <a:endParaRPr lang="en-US"/>
           </a:p>
@@ -7266,7 +7267,7 @@
           <a:p>
             <a:fld id="{72B5C0FA-8C46-E84D-B6D7-B673F2CA0A0E}" type="datetime1">
               <a:rPr lang="en-US" smtClean="0"/>
-              <a:t>9/15/26</a:t>
+              <a:t>9/21/26</a:t>
             </a:fld>
             <a:endParaRPr lang="en-US"/>
           </a:p>
@@ -7436,7 +7437,7 @@
           <a:p>
             <a:fld id="{60B9CDE1-97B4-BF46-B69C-B86855B18820}" type="datetime1">
               <a:rPr lang="en-US" smtClean="0"/>
-              <a:t>9/15/26</a:t>
+              <a:t>9/21/26</a:t>
             </a:fld>
             <a:endParaRPr lang="en-US"/>
           </a:p>
@@ -7616,7 +7617,7 @@
           <a:p>
             <a:fld id="{BE51D3A4-F9E5-FD49-AA87-B395F50451DC}" type="datetime1">
               <a:rPr lang="en-US" smtClean="0"/>
-              <a:t>9/15/26</a:t>
+              <a:t>9/21/26</a:t>
             </a:fld>
             <a:endParaRPr lang="en-US"/>
           </a:p>
@@ -7786,7 +7787,7 @@
           <a:p>
             <a:fld id="{880DFB37-B0AE-9449-85EC-14F9C83B6084}" type="datetime1">
               <a:rPr lang="en-US" smtClean="0"/>
-              <a:t>9/15/26</a:t>
+              <a:t>9/21/26</a:t>
             </a:fld>
             <a:endParaRPr lang="en-US"/>
           </a:p>
@@ -8036,7 +8037,7 @@
           <a:p>
             <a:fld id="{C939124A-616E-6944-A21A-1839F5DBE7BB}" type="datetime1">
               <a:rPr lang="en-US" smtClean="0"/>
-              <a:t>9/15/26</a:t>
+              <a:t>9/21/26</a:t>
             </a:fld>
             <a:endParaRPr lang="en-US"/>
           </a:p>
@@ -8268,7 +8269,7 @@
           <a:p>
             <a:fld id="{C6E9A026-D48C-FD43-8676-CD625DD5D84B}" type="datetime1">
               <a:rPr lang="en-US" smtClean="0"/>
-              <a:t>9/15/26</a:t>
+              <a:t>9/21/26</a:t>
             </a:fld>
             <a:endParaRPr lang="en-US"/>
           </a:p>
@@ -8654,7 +8655,7 @@
           <a:p>
             <a:fld id="{EA35111E-23A3-1440-99A3-C4C665908E3D}" type="datetime1">
               <a:rPr lang="en-US" smtClean="0"/>
-              <a:t>9/15/26</a:t>
+              <a:t>9/21/26</a:t>
             </a:fld>
             <a:endParaRPr lang="en-US"/>
           </a:p>
@@ -8777,7 +8778,7 @@
           <a:p>
             <a:fld id="{249983B9-88EF-D74B-BA6D-6A3BF17C2B38}" type="datetime1">
               <a:rPr lang="en-US" smtClean="0"/>
-              <a:t>9/15/26</a:t>
+              <a:t>9/21/26</a:t>
             </a:fld>
             <a:endParaRPr lang="en-US"/>
           </a:p>
@@ -8872,7 +8873,7 @@
           <a:p>
             <a:fld id="{E2A00AEF-B4EC-084A-8DB8-A225C7981CBB}" type="datetime1">
               <a:rPr lang="en-US" smtClean="0"/>
-              <a:t>9/15/26</a:t>
+              <a:t>9/21/26</a:t>
             </a:fld>
             <a:endParaRPr lang="en-US"/>
           </a:p>
@@ -9121,7 +9122,7 @@
           <a:p>
             <a:fld id="{97860299-21CD-A94A-A7B0-44E787F8D42C}" type="datetime1">
               <a:rPr lang="en-US" smtClean="0"/>
-              <a:t>9/15/26</a:t>
+              <a:t>9/21/26</a:t>
             </a:fld>
             <a:endParaRPr lang="en-US"/>
           </a:p>
@@ -9406,7 +9407,7 @@
           <a:p>
             <a:fld id="{3DFD19CF-4E62-D246-BA61-7B528271315F}" type="datetime1">
               <a:rPr lang="en-US" smtClean="0"/>
-              <a:t>9/15/26</a:t>
+              <a:t>9/21/26</a:t>
             </a:fld>
             <a:endParaRPr lang="en-US"/>
           </a:p>
@@ -9529,7 +9530,7 @@
           <a:noFill/>
           <a:extLst>
             <a:ext uri="{909E8E84-426E-40dd-AFC4-6F175D3DCCD1}">
-              <a14:hiddenFill xmlns="" xmlns:a14="http://schemas.microsoft.com/office/drawing/2010/main">
+              <a14:hiddenFill xmlns:a14="http://schemas.microsoft.com/office/drawing/2010/main" xmlns="">
                 <a:solidFill>
                   <a:srgbClr val="FFFFFF"/>
                 </a:solidFill>
@@ -9603,7 +9604,7 @@
               </a:ln>
               <a:extLst>
                 <a:ext uri="{91240B29-F687-4f45-9708-019B960494DF}">
-                  <a14:hiddenLine xmlns="" xmlns:a14="http://schemas.microsoft.com/office/drawing/2010/main" w="9525">
+                  <a14:hiddenLine xmlns:a14="http://schemas.microsoft.com/office/drawing/2010/main" xmlns="" w="9525">
                     <a:solidFill>
                       <a:srgbClr val="000000"/>
                     </a:solidFill>
@@ -9693,7 +9694,7 @@
               </a:ln>
               <a:extLst>
                 <a:ext uri="{91240B29-F687-4f45-9708-019B960494DF}">
-                  <a14:hiddenLine xmlns="" xmlns:a14="http://schemas.microsoft.com/office/drawing/2010/main" w="9525">
+                  <a14:hiddenLine xmlns:a14="http://schemas.microsoft.com/office/drawing/2010/main" xmlns="" w="9525">
                     <a:solidFill>
                       <a:srgbClr val="000000"/>
                     </a:solidFill>
@@ -9783,7 +9784,7 @@
               </a:ln>
               <a:extLst>
                 <a:ext uri="{91240B29-F687-4f45-9708-019B960494DF}">
-                  <a14:hiddenLine xmlns="" xmlns:a14="http://schemas.microsoft.com/office/drawing/2010/main" w="9525">
+                  <a14:hiddenLine xmlns:a14="http://schemas.microsoft.com/office/drawing/2010/main" xmlns="" w="9525">
                     <a:solidFill>
                       <a:srgbClr val="000000"/>
                     </a:solidFill>
@@ -9845,7 +9846,7 @@
               </a:ln>
               <a:extLst>
                 <a:ext uri="{91240B29-F687-4f45-9708-019B960494DF}">
-                  <a14:hiddenLine xmlns="" xmlns:a14="http://schemas.microsoft.com/office/drawing/2010/main" w="9525">
+                  <a14:hiddenLine xmlns:a14="http://schemas.microsoft.com/office/drawing/2010/main" xmlns="" w="9525">
                     <a:solidFill>
                       <a:srgbClr val="000000"/>
                     </a:solidFill>
@@ -9935,7 +9936,7 @@
               </a:ln>
               <a:extLst>
                 <a:ext uri="{91240B29-F687-4f45-9708-019B960494DF}">
-                  <a14:hiddenLine xmlns="" xmlns:a14="http://schemas.microsoft.com/office/drawing/2010/main" w="9525">
+                  <a14:hiddenLine xmlns:a14="http://schemas.microsoft.com/office/drawing/2010/main" xmlns="" w="9525">
                     <a:solidFill>
                       <a:srgbClr val="000000"/>
                     </a:solidFill>
@@ -9997,7 +9998,7 @@
               </a:ln>
               <a:extLst>
                 <a:ext uri="{91240B29-F687-4f45-9708-019B960494DF}">
-                  <a14:hiddenLine xmlns="" xmlns:a14="http://schemas.microsoft.com/office/drawing/2010/main" w="9525">
+                  <a14:hiddenLine xmlns:a14="http://schemas.microsoft.com/office/drawing/2010/main" xmlns="" w="9525">
                     <a:solidFill>
                       <a:srgbClr val="000000"/>
                     </a:solidFill>
@@ -10059,7 +10060,7 @@
               </a:ln>
               <a:extLst>
                 <a:ext uri="{91240B29-F687-4f45-9708-019B960494DF}">
-                  <a14:hiddenLine xmlns="" xmlns:a14="http://schemas.microsoft.com/office/drawing/2010/main" w="9525">
+                  <a14:hiddenLine xmlns:a14="http://schemas.microsoft.com/office/drawing/2010/main" xmlns="" w="9525">
                     <a:solidFill>
                       <a:srgbClr val="000000"/>
                     </a:solidFill>
@@ -10149,7 +10150,7 @@
               </a:ln>
               <a:extLst>
                 <a:ext uri="{91240B29-F687-4f45-9708-019B960494DF}">
-                  <a14:hiddenLine xmlns="" xmlns:a14="http://schemas.microsoft.com/office/drawing/2010/main" w="9525">
+                  <a14:hiddenLine xmlns:a14="http://schemas.microsoft.com/office/drawing/2010/main" xmlns="" w="9525">
                     <a:solidFill>
                       <a:srgbClr val="000000"/>
                     </a:solidFill>
@@ -10239,7 +10240,7 @@
               </a:ln>
               <a:extLst>
                 <a:ext uri="{91240B29-F687-4f45-9708-019B960494DF}">
-                  <a14:hiddenLine xmlns="" xmlns:a14="http://schemas.microsoft.com/office/drawing/2010/main" w="9525">
+                  <a14:hiddenLine xmlns:a14="http://schemas.microsoft.com/office/drawing/2010/main" xmlns="" w="9525">
                     <a:solidFill>
                       <a:srgbClr val="000000"/>
                     </a:solidFill>
@@ -10301,7 +10302,7 @@
               </a:ln>
               <a:extLst>
                 <a:ext uri="{91240B29-F687-4f45-9708-019B960494DF}">
-                  <a14:hiddenLine xmlns="" xmlns:a14="http://schemas.microsoft.com/office/drawing/2010/main" w="9525">
+                  <a14:hiddenLine xmlns:a14="http://schemas.microsoft.com/office/drawing/2010/main" xmlns="" w="9525">
                     <a:solidFill>
                       <a:srgbClr val="000000"/>
                     </a:solidFill>
@@ -10411,7 +10412,7 @@
               </a:ln>
               <a:extLst>
                 <a:ext uri="{91240B29-F687-4f45-9708-019B960494DF}">
-                  <a14:hiddenLine xmlns="" xmlns:a14="http://schemas.microsoft.com/office/drawing/2010/main" w="9525">
+                  <a14:hiddenLine xmlns:a14="http://schemas.microsoft.com/office/drawing/2010/main" xmlns="" w="9525">
                     <a:solidFill>
                       <a:srgbClr val="000000"/>
                     </a:solidFill>
@@ -10495,7 +10496,7 @@
               </a:ln>
               <a:extLst>
                 <a:ext uri="{91240B29-F687-4f45-9708-019B960494DF}">
-                  <a14:hiddenLine xmlns="" xmlns:a14="http://schemas.microsoft.com/office/drawing/2010/main" w="9525">
+                  <a14:hiddenLine xmlns:a14="http://schemas.microsoft.com/office/drawing/2010/main" xmlns="" w="9525">
                     <a:solidFill>
                       <a:srgbClr val="000000"/>
                     </a:solidFill>
@@ -10557,7 +10558,7 @@
               </a:ln>
               <a:extLst>
                 <a:ext uri="{91240B29-F687-4f45-9708-019B960494DF}">
-                  <a14:hiddenLine xmlns="" xmlns:a14="http://schemas.microsoft.com/office/drawing/2010/main" w="9525">
+                  <a14:hiddenLine xmlns:a14="http://schemas.microsoft.com/office/drawing/2010/main" xmlns="" w="9525">
                     <a:solidFill>
                       <a:srgbClr val="000000"/>
                     </a:solidFill>
@@ -10619,7 +10620,7 @@
               </a:ln>
               <a:extLst>
                 <a:ext uri="{91240B29-F687-4f45-9708-019B960494DF}">
-                  <a14:hiddenLine xmlns="" xmlns:a14="http://schemas.microsoft.com/office/drawing/2010/main" w="9525">
+                  <a14:hiddenLine xmlns:a14="http://schemas.microsoft.com/office/drawing/2010/main" xmlns="" w="9525">
                     <a:solidFill>
                       <a:srgbClr val="000000"/>
                     </a:solidFill>
@@ -10709,7 +10710,7 @@
               </a:ln>
               <a:extLst>
                 <a:ext uri="{91240B29-F687-4f45-9708-019B960494DF}">
-                  <a14:hiddenLine xmlns="" xmlns:a14="http://schemas.microsoft.com/office/drawing/2010/main" w="9525">
+                  <a14:hiddenLine xmlns:a14="http://schemas.microsoft.com/office/drawing/2010/main" xmlns="" w="9525">
                     <a:solidFill>
                       <a:srgbClr val="000000"/>
                     </a:solidFill>
@@ -10743,7 +10744,7 @@
               </a:ln>
               <a:extLst>
                 <a:ext uri="{91240B29-F687-4f45-9708-019B960494DF}">
-                  <a14:hiddenLine xmlns="" xmlns:a14="http://schemas.microsoft.com/office/drawing/2010/main" w="9525">
+                  <a14:hiddenLine xmlns:a14="http://schemas.microsoft.com/office/drawing/2010/main" xmlns="" w="9525">
                     <a:solidFill>
                       <a:srgbClr val="000000"/>
                     </a:solidFill>
@@ -10808,7 +10809,7 @@
               </a:ln>
               <a:extLst>
                 <a:ext uri="{91240B29-F687-4f45-9708-019B960494DF}">
-                  <a14:hiddenLine xmlns="" xmlns:a14="http://schemas.microsoft.com/office/drawing/2010/main" w="9525">
+                  <a14:hiddenLine xmlns:a14="http://schemas.microsoft.com/office/drawing/2010/main" xmlns="" w="9525">
                     <a:solidFill>
                       <a:srgbClr val="000000"/>
                     </a:solidFill>
@@ -10898,7 +10899,7 @@
               </a:ln>
               <a:extLst>
                 <a:ext uri="{91240B29-F687-4f45-9708-019B960494DF}">
-                  <a14:hiddenLine xmlns="" xmlns:a14="http://schemas.microsoft.com/office/drawing/2010/main" w="9525">
+                  <a14:hiddenLine xmlns:a14="http://schemas.microsoft.com/office/drawing/2010/main" xmlns="" w="9525">
                     <a:solidFill>
                       <a:srgbClr val="000000"/>
                     </a:solidFill>
@@ -10960,7 +10961,7 @@
               </a:ln>
               <a:extLst>
                 <a:ext uri="{91240B29-F687-4f45-9708-019B960494DF}">
-                  <a14:hiddenLine xmlns="" xmlns:a14="http://schemas.microsoft.com/office/drawing/2010/main" w="9525">
+                  <a14:hiddenLine xmlns:a14="http://schemas.microsoft.com/office/drawing/2010/main" xmlns="" w="9525">
                     <a:solidFill>
                       <a:srgbClr val="000000"/>
                     </a:solidFill>
@@ -11050,7 +11051,7 @@
               </a:ln>
               <a:extLst>
                 <a:ext uri="{91240B29-F687-4f45-9708-019B960494DF}">
-                  <a14:hiddenLine xmlns="" xmlns:a14="http://schemas.microsoft.com/office/drawing/2010/main" w="9525">
+                  <a14:hiddenLine xmlns:a14="http://schemas.microsoft.com/office/drawing/2010/main" xmlns="" w="9525">
                     <a:solidFill>
                       <a:srgbClr val="000000"/>
                     </a:solidFill>
@@ -11115,7 +11116,7 @@
               </a:ln>
               <a:extLst>
                 <a:ext uri="{91240B29-F687-4f45-9708-019B960494DF}">
-                  <a14:hiddenLine xmlns="" xmlns:a14="http://schemas.microsoft.com/office/drawing/2010/main" w="9525">
+                  <a14:hiddenLine xmlns:a14="http://schemas.microsoft.com/office/drawing/2010/main" xmlns="" w="9525">
                     <a:solidFill>
                       <a:srgbClr val="000000"/>
                     </a:solidFill>
@@ -11177,7 +11178,7 @@
               </a:ln>
               <a:extLst>
                 <a:ext uri="{91240B29-F687-4f45-9708-019B960494DF}">
-                  <a14:hiddenLine xmlns="" xmlns:a14="http://schemas.microsoft.com/office/drawing/2010/main" w="9525">
+                  <a14:hiddenLine xmlns:a14="http://schemas.microsoft.com/office/drawing/2010/main" xmlns="" w="9525">
                     <a:solidFill>
                       <a:srgbClr val="000000"/>
                     </a:solidFill>
@@ -11267,7 +11268,7 @@
               </a:ln>
               <a:extLst>
                 <a:ext uri="{91240B29-F687-4f45-9708-019B960494DF}">
-                  <a14:hiddenLine xmlns="" xmlns:a14="http://schemas.microsoft.com/office/drawing/2010/main" w="9525">
+                  <a14:hiddenLine xmlns:a14="http://schemas.microsoft.com/office/drawing/2010/main" xmlns="" w="9525">
                     <a:solidFill>
                       <a:srgbClr val="000000"/>
                     </a:solidFill>
@@ -11357,7 +11358,7 @@
               </a:ln>
               <a:extLst>
                 <a:ext uri="{91240B29-F687-4f45-9708-019B960494DF}">
-                  <a14:hiddenLine xmlns="" xmlns:a14="http://schemas.microsoft.com/office/drawing/2010/main" w="9525">
+                  <a14:hiddenLine xmlns:a14="http://schemas.microsoft.com/office/drawing/2010/main" xmlns="" w="9525">
                     <a:solidFill>
                       <a:srgbClr val="000000"/>
                     </a:solidFill>
@@ -11422,7 +11423,7 @@
               </a:ln>
               <a:extLst>
                 <a:ext uri="{91240B29-F687-4f45-9708-019B960494DF}">
-                  <a14:hiddenLine xmlns="" xmlns:a14="http://schemas.microsoft.com/office/drawing/2010/main" w="9525">
+                  <a14:hiddenLine xmlns:a14="http://schemas.microsoft.com/office/drawing/2010/main" xmlns="" w="9525">
                     <a:solidFill>
                       <a:srgbClr val="000000"/>
                     </a:solidFill>
@@ -11542,7 +11543,7 @@
               </a:ln>
               <a:extLst>
                 <a:ext uri="{91240B29-F687-4f45-9708-019B960494DF}">
-                  <a14:hiddenLine xmlns="" xmlns:a14="http://schemas.microsoft.com/office/drawing/2010/main" w="9525">
+                  <a14:hiddenLine xmlns:a14="http://schemas.microsoft.com/office/drawing/2010/main" xmlns="" w="9525">
                     <a:solidFill>
                       <a:srgbClr val="000000"/>
                     </a:solidFill>
@@ -11623,7 +11624,7 @@
               </a:ln>
               <a:extLst>
                 <a:ext uri="{91240B29-F687-4f45-9708-019B960494DF}">
-                  <a14:hiddenLine xmlns="" xmlns:a14="http://schemas.microsoft.com/office/drawing/2010/main" w="9525">
+                  <a14:hiddenLine xmlns:a14="http://schemas.microsoft.com/office/drawing/2010/main" xmlns="" w="9525">
                     <a:solidFill>
                       <a:srgbClr val="000000"/>
                     </a:solidFill>
@@ -11738,7 +11739,7 @@
               </a:ln>
               <a:extLst>
                 <a:ext uri="{91240B29-F687-4f45-9708-019B960494DF}">
-                  <a14:hiddenLine xmlns="" xmlns:a14="http://schemas.microsoft.com/office/drawing/2010/main" w="9525">
+                  <a14:hiddenLine xmlns:a14="http://schemas.microsoft.com/office/drawing/2010/main" xmlns="" w="9525">
                     <a:solidFill>
                       <a:srgbClr val="000000"/>
                     </a:solidFill>
@@ -11828,7 +11829,7 @@
               </a:ln>
               <a:extLst>
                 <a:ext uri="{91240B29-F687-4f45-9708-019B960494DF}">
-                  <a14:hiddenLine xmlns="" xmlns:a14="http://schemas.microsoft.com/office/drawing/2010/main" w="9525">
+                  <a14:hiddenLine xmlns:a14="http://schemas.microsoft.com/office/drawing/2010/main" xmlns="" w="9525">
                     <a:solidFill>
                       <a:srgbClr val="000000"/>
                     </a:solidFill>
@@ -11893,7 +11894,7 @@
               </a:ln>
               <a:extLst>
                 <a:ext uri="{91240B29-F687-4f45-9708-019B960494DF}">
-                  <a14:hiddenLine xmlns="" xmlns:a14="http://schemas.microsoft.com/office/drawing/2010/main" w="9525">
+                  <a14:hiddenLine xmlns:a14="http://schemas.microsoft.com/office/drawing/2010/main" xmlns="" w="9525">
                     <a:solidFill>
                       <a:srgbClr val="000000"/>
                     </a:solidFill>
@@ -11983,7 +11984,7 @@
               </a:ln>
               <a:extLst>
                 <a:ext uri="{91240B29-F687-4f45-9708-019B960494DF}">
-                  <a14:hiddenLine xmlns="" xmlns:a14="http://schemas.microsoft.com/office/drawing/2010/main" w="9525">
+                  <a14:hiddenLine xmlns:a14="http://schemas.microsoft.com/office/drawing/2010/main" xmlns="" w="9525">
                     <a:solidFill>
                       <a:srgbClr val="000000"/>
                     </a:solidFill>
@@ -12051,7 +12052,7 @@
               </a:ln>
               <a:extLst>
                 <a:ext uri="{91240B29-F687-4f45-9708-019B960494DF}">
-                  <a14:hiddenLine xmlns="" xmlns:a14="http://schemas.microsoft.com/office/drawing/2010/main" w="9525">
+                  <a14:hiddenLine xmlns:a14="http://schemas.microsoft.com/office/drawing/2010/main" xmlns="" w="9525">
                     <a:solidFill>
                       <a:srgbClr val="000000"/>
                     </a:solidFill>
@@ -12141,7 +12142,7 @@
               </a:ln>
               <a:extLst>
                 <a:ext uri="{91240B29-F687-4f45-9708-019B960494DF}">
-                  <a14:hiddenLine xmlns="" xmlns:a14="http://schemas.microsoft.com/office/drawing/2010/main" w="9525">
+                  <a14:hiddenLine xmlns:a14="http://schemas.microsoft.com/office/drawing/2010/main" xmlns="" w="9525">
                     <a:solidFill>
                       <a:srgbClr val="000000"/>
                     </a:solidFill>
@@ -12209,7 +12210,7 @@
               </a:ln>
               <a:extLst>
                 <a:ext uri="{91240B29-F687-4f45-9708-019B960494DF}">
-                  <a14:hiddenLine xmlns="" xmlns:a14="http://schemas.microsoft.com/office/drawing/2010/main" w="9525">
+                  <a14:hiddenLine xmlns:a14="http://schemas.microsoft.com/office/drawing/2010/main" xmlns="" w="9525">
                     <a:solidFill>
                       <a:srgbClr val="000000"/>
                     </a:solidFill>
@@ -12299,7 +12300,7 @@
               </a:ln>
               <a:extLst>
                 <a:ext uri="{91240B29-F687-4f45-9708-019B960494DF}">
-                  <a14:hiddenLine xmlns="" xmlns:a14="http://schemas.microsoft.com/office/drawing/2010/main" w="9525">
+                  <a14:hiddenLine xmlns:a14="http://schemas.microsoft.com/office/drawing/2010/main" xmlns="" w="9525">
                     <a:solidFill>
                       <a:srgbClr val="000000"/>
                     </a:solidFill>
@@ -12333,7 +12334,7 @@
               </a:ln>
               <a:extLst>
                 <a:ext uri="{91240B29-F687-4f45-9708-019B960494DF}">
-                  <a14:hiddenLine xmlns="" xmlns:a14="http://schemas.microsoft.com/office/drawing/2010/main" w="9525">
+                  <a14:hiddenLine xmlns:a14="http://schemas.microsoft.com/office/drawing/2010/main" xmlns="" w="9525">
                     <a:solidFill>
                       <a:srgbClr val="000000"/>
                     </a:solidFill>
@@ -12473,7 +12474,7 @@
           <a:p>
             <a:fld id="{92FF8978-FE14-CC4A-93A6-934EB06543C0}" type="datetime1">
               <a:rPr lang="en-US" smtClean="0"/>
-              <a:t>9/15/26</a:t>
+              <a:t>9/21/26</a:t>
             </a:fld>
             <a:endParaRPr lang="en-US"/>
           </a:p>
@@ -13197,6 +13198,293 @@
   <p:cSld>
     <p:spTree>
       <p:nvGrpSpPr>
+        <p:cNvPr id="1" name="">
+          <a:extLst>
+            <a:ext uri="{FF2B5EF4-FFF2-40B4-BE49-F238E27FC236}">
+              <a16:creationId xmlns:a16="http://schemas.microsoft.com/office/drawing/2014/main" id="{9949C366-68C6-B99E-A0D0-678FDE6340E3}"/>
+            </a:ext>
+          </a:extLst>
+        </p:cNvPr>
+        <p:cNvGrpSpPr/>
+        <p:nvPr/>
+      </p:nvGrpSpPr>
+      <p:grpSpPr>
+        <a:xfrm>
+          <a:off x="0" y="0"/>
+          <a:ext cx="0" cy="0"/>
+          <a:chOff x="0" y="0"/>
+          <a:chExt cx="0" cy="0"/>
+        </a:xfrm>
+      </p:grpSpPr>
+      <p:sp>
+        <p:nvSpPr>
+          <p:cNvPr id="6146" name="Rectangle 2">
+            <a:extLst>
+              <a:ext uri="{FF2B5EF4-FFF2-40B4-BE49-F238E27FC236}">
+                <a16:creationId xmlns:a16="http://schemas.microsoft.com/office/drawing/2014/main" id="{C1217C3C-6FB3-06C0-0FD1-3530A32B8CC7}"/>
+              </a:ext>
+            </a:extLst>
+          </p:cNvPr>
+          <p:cNvSpPr>
+            <a:spLocks noGrp="1" noChangeArrowheads="1"/>
+          </p:cNvSpPr>
+          <p:nvPr>
+            <p:ph type="title"/>
+            <p:custDataLst>
+              <p:tags r:id="rId1"/>
+            </p:custDataLst>
+          </p:nvPr>
+        </p:nvSpPr>
+        <p:spPr>
+          <a:xfrm>
+            <a:off x="1141413" y="284084"/>
+            <a:ext cx="9905998" cy="620791"/>
+          </a:xfrm>
+        </p:spPr>
+        <p:txBody>
+          <a:bodyPr/>
+          <a:lstStyle/>
+          <a:p>
+            <a:pPr algn="ctr"/>
+            <a:r>
+              <a:rPr lang="en-US" dirty="0"/>
+              <a:t>Lecture 9 - Tuesday, Sep. 22</a:t>
+            </a:r>
+          </a:p>
+        </p:txBody>
+      </p:sp>
+      <p:sp>
+        <p:nvSpPr>
+          <p:cNvPr id="6147" name="Rectangle 3">
+            <a:extLst>
+              <a:ext uri="{FF2B5EF4-FFF2-40B4-BE49-F238E27FC236}">
+                <a16:creationId xmlns:a16="http://schemas.microsoft.com/office/drawing/2014/main" id="{1B64CE9E-5521-80ED-A7CE-CF16BF5644C9}"/>
+              </a:ext>
+            </a:extLst>
+          </p:cNvPr>
+          <p:cNvSpPr>
+            <a:spLocks noGrp="1" noChangeArrowheads="1"/>
+          </p:cNvSpPr>
+          <p:nvPr>
+            <p:ph idx="1"/>
+            <p:custDataLst>
+              <p:tags r:id="rId2"/>
+            </p:custDataLst>
+          </p:nvPr>
+        </p:nvSpPr>
+        <p:spPr>
+          <a:xfrm>
+            <a:off x="1294151" y="1098548"/>
+            <a:ext cx="9600522" cy="5475367"/>
+          </a:xfrm>
+        </p:spPr>
+        <p:txBody>
+          <a:bodyPr>
+            <a:normAutofit fontScale="70000" lnSpcReduction="20000"/>
+          </a:bodyPr>
+          <a:lstStyle/>
+          <a:p>
+            <a:r>
+              <a:rPr lang="en-US" dirty="0">
+                <a:latin typeface="Arial" panose="020B0604020202020204" pitchFamily="34" charset="0"/>
+                <a:cs typeface="Arial" panose="020B0604020202020204" pitchFamily="34" charset="0"/>
+              </a:rPr>
+              <a:t>Please remember </a:t>
+            </a:r>
+            <a:r>
+              <a:rPr lang="en-US" b="1" i="1" u="sng" dirty="0">
+                <a:latin typeface="Arial" panose="020B0604020202020204" pitchFamily="34" charset="0"/>
+                <a:cs typeface="Arial" panose="020B0604020202020204" pitchFamily="34" charset="0"/>
+              </a:rPr>
+              <a:t>no laptops / phones</a:t>
+            </a:r>
+            <a:r>
+              <a:rPr lang="en-US" dirty="0">
+                <a:latin typeface="Arial" panose="020B0604020202020204" pitchFamily="34" charset="0"/>
+                <a:cs typeface="Arial" panose="020B0604020202020204" pitchFamily="34" charset="0"/>
+              </a:rPr>
+              <a:t> and </a:t>
+            </a:r>
+            <a:r>
+              <a:rPr lang="en-US" b="1" i="1" u="sng" dirty="0">
+                <a:latin typeface="Arial" panose="020B0604020202020204" pitchFamily="34" charset="0"/>
+                <a:cs typeface="Arial" panose="020B0604020202020204" pitchFamily="34" charset="0"/>
+              </a:rPr>
+              <a:t>attendance policy</a:t>
+            </a:r>
+            <a:endParaRPr lang="en-US" dirty="0">
+              <a:latin typeface="Arial" panose="020B0604020202020204" pitchFamily="34" charset="0"/>
+              <a:cs typeface="Arial" panose="020B0604020202020204" pitchFamily="34" charset="0"/>
+            </a:endParaRPr>
+          </a:p>
+          <a:p>
+            <a:r>
+              <a:rPr lang="en-US" dirty="0">
+                <a:latin typeface="Arial" panose="020B0604020202020204" pitchFamily="34" charset="0"/>
+                <a:cs typeface="Arial" panose="020B0604020202020204" pitchFamily="34" charset="0"/>
+              </a:rPr>
+              <a:t>This week:</a:t>
+            </a:r>
+          </a:p>
+          <a:p>
+            <a:pPr lvl="1"/>
+            <a:r>
+              <a:rPr lang="en-US" dirty="0">
+                <a:latin typeface="Arial" panose="020B0604020202020204" pitchFamily="34" charset="0"/>
+                <a:cs typeface="Arial" panose="020B0604020202020204" pitchFamily="34" charset="0"/>
+              </a:rPr>
+              <a:t>Quiz 1 is </a:t>
+            </a:r>
+            <a:r>
+              <a:rPr lang="en-US" dirty="0" err="1">
+                <a:latin typeface="Arial" panose="020B0604020202020204" pitchFamily="34" charset="0"/>
+                <a:cs typeface="Arial" panose="020B0604020202020204" pitchFamily="34" charset="0"/>
+              </a:rPr>
+              <a:t>Mon,Tue,Wed</a:t>
+            </a:r>
+            <a:r>
+              <a:rPr lang="en-US" dirty="0">
+                <a:latin typeface="Arial" panose="020B0604020202020204" pitchFamily="34" charset="0"/>
+                <a:cs typeface="Arial" panose="020B0604020202020204" pitchFamily="34" charset="0"/>
+              </a:rPr>
+              <a:t> at CBTF (good luck!)</a:t>
+            </a:r>
+          </a:p>
+          <a:p>
+            <a:pPr lvl="1"/>
+            <a:r>
+              <a:rPr lang="en-US" dirty="0">
+                <a:latin typeface="Arial" panose="020B0604020202020204" pitchFamily="34" charset="0"/>
+                <a:cs typeface="Arial" panose="020B0604020202020204" pitchFamily="34" charset="0"/>
+              </a:rPr>
+              <a:t>Mod. 1 Programming Assignment is due this Thursday!</a:t>
+            </a:r>
+          </a:p>
+          <a:p>
+            <a:r>
+              <a:rPr lang="en-US" dirty="0">
+                <a:latin typeface="Arial" panose="020B0604020202020204" pitchFamily="34" charset="0"/>
+                <a:cs typeface="Arial" panose="020B0604020202020204" pitchFamily="34" charset="0"/>
+              </a:rPr>
+              <a:t>Module 1 Quiz</a:t>
+            </a:r>
+          </a:p>
+          <a:p>
+            <a:pPr lvl="1"/>
+            <a:r>
+              <a:rPr lang="en-US" dirty="0">
+                <a:latin typeface="Arial" panose="020B0604020202020204" pitchFamily="34" charset="0"/>
+                <a:cs typeface="Arial" panose="020B0604020202020204" pitchFamily="34" charset="0"/>
+              </a:rPr>
+              <a:t>Already completed it? How did it go? Any logistics issues or software bugs?</a:t>
+            </a:r>
+          </a:p>
+          <a:p>
+            <a:pPr lvl="1"/>
+            <a:r>
+              <a:rPr lang="en-US" dirty="0">
+                <a:latin typeface="Arial" panose="020B0604020202020204" pitchFamily="34" charset="0"/>
+                <a:cs typeface="Arial" panose="020B0604020202020204" pitchFamily="34" charset="0"/>
+              </a:rPr>
+              <a:t>Have not already taken it? Good luck! You got this!</a:t>
+            </a:r>
+          </a:p>
+          <a:p>
+            <a:pPr lvl="1"/>
+            <a:r>
+              <a:rPr lang="en-US" dirty="0">
+                <a:latin typeface="Arial" panose="020B0604020202020204" pitchFamily="34" charset="0"/>
+                <a:cs typeface="Arial" panose="020B0604020202020204" pitchFamily="34" charset="0"/>
+              </a:rPr>
+              <a:t>Everybody should have a reservation by now. If you don’t then you need to do that ASAP!</a:t>
+            </a:r>
+          </a:p>
+          <a:p>
+            <a:r>
+              <a:rPr lang="en-US" dirty="0">
+                <a:latin typeface="Arial" panose="020B0604020202020204" pitchFamily="34" charset="0"/>
+                <a:cs typeface="Arial" panose="020B0604020202020204" pitchFamily="34" charset="0"/>
+              </a:rPr>
+              <a:t>Mod. 1 homework is being graded right now. </a:t>
+            </a:r>
+          </a:p>
+          <a:p>
+            <a:pPr lvl="1"/>
+            <a:r>
+              <a:rPr lang="en-US" dirty="0">
+                <a:latin typeface="Arial" panose="020B0604020202020204" pitchFamily="34" charset="0"/>
+                <a:cs typeface="Arial" panose="020B0604020202020204" pitchFamily="34" charset="0"/>
+              </a:rPr>
+              <a:t>Looks like we generally won’t be able to get that back to you in time for quizzes due to the quick turnaround time. </a:t>
+            </a:r>
+          </a:p>
+          <a:p>
+            <a:pPr lvl="1"/>
+            <a:r>
+              <a:rPr lang="en-US" dirty="0">
+                <a:latin typeface="Arial" panose="020B0604020202020204" pitchFamily="34" charset="0"/>
+                <a:cs typeface="Arial" panose="020B0604020202020204" pitchFamily="34" charset="0"/>
+              </a:rPr>
+              <a:t>It is your responsibility to check your answers with others, use AI if necessary, or come to OH to talk to course staff to ensure you understand the concepts.</a:t>
+            </a:r>
+          </a:p>
+          <a:p>
+            <a:r>
+              <a:rPr lang="en-US" dirty="0">
+                <a:latin typeface="Arial" panose="020B0604020202020204" pitchFamily="34" charset="0"/>
+                <a:cs typeface="Arial" panose="020B0604020202020204" pitchFamily="34" charset="0"/>
+              </a:rPr>
+              <a:t>OH Check-Ins</a:t>
+            </a:r>
+          </a:p>
+          <a:p>
+            <a:pPr lvl="1"/>
+            <a:r>
+              <a:rPr lang="en-US" dirty="0">
+                <a:latin typeface="Arial" panose="020B0604020202020204" pitchFamily="34" charset="0"/>
+                <a:cs typeface="Arial" panose="020B0604020202020204" pitchFamily="34" charset="0"/>
+              </a:rPr>
+              <a:t>We have started working on the schedule for this. Stay tuned but be ready for this to begin very soon!</a:t>
+            </a:r>
+          </a:p>
+          <a:p>
+            <a:r>
+              <a:rPr lang="en-US" dirty="0">
+                <a:latin typeface="Arial" panose="020B0604020202020204" pitchFamily="34" charset="0"/>
+                <a:cs typeface="Arial" panose="020B0604020202020204" pitchFamily="34" charset="0"/>
+              </a:rPr>
+              <a:t>These slides are linked on the course webpage “slides” page.</a:t>
+            </a:r>
+          </a:p>
+          <a:p>
+            <a:r>
+              <a:rPr lang="en-US" dirty="0">
+                <a:latin typeface="Arial" panose="020B0604020202020204" pitchFamily="34" charset="0"/>
+                <a:cs typeface="Arial" panose="020B0604020202020204" pitchFamily="34" charset="0"/>
+              </a:rPr>
+              <a:t>Today we will begin Module 2 – Context-Free Grammars.</a:t>
+            </a:r>
+          </a:p>
+        </p:txBody>
+      </p:sp>
+    </p:spTree>
+    <p:extLst>
+      <p:ext uri="{BB962C8B-B14F-4D97-AF65-F5344CB8AC3E}">
+        <p14:creationId xmlns:p14="http://schemas.microsoft.com/office/powerpoint/2010/main" val="714086908"/>
+      </p:ext>
+    </p:extLst>
+  </p:cSld>
+  <p:clrMapOvr>
+    <a:masterClrMapping/>
+  </p:clrMapOvr>
+</p:sld>
+</file>
+
+<file path=ppt/slides/slide12.xml><?xml version="1.0" encoding="utf-8"?>
+<p:sld xmlns:a="http://schemas.openxmlformats.org/drawingml/2006/main" xmlns:r="http://schemas.openxmlformats.org/officeDocument/2006/relationships" xmlns:p="http://schemas.openxmlformats.org/presentationml/2006/main">
+  <p:cSld>
+    <p:spTree>
+      <p:nvGrpSpPr>
         <p:cNvPr id="1" name=""/>
         <p:cNvGrpSpPr/>
         <p:nvPr/>
@@ -13533,7 +13821,7 @@
           <p:nvPr>
             <p:extLst>
               <p:ext uri="{D42A27DB-BD31-4B8C-83A1-F6EECF244321}">
-                <p14:modId xmlns:p14="http://schemas.microsoft.com/office/powerpoint/2010/main" val="1938593800"/>
+                <p14:modId xmlns:p14="http://schemas.microsoft.com/office/powerpoint/2010/main" val="1113002690"/>
               </p:ext>
             </p:extLst>
           </p:nvPr>
@@ -13629,7 +13917,7 @@
                       <a:pPr algn="ctr"/>
                       <a:r>
                         <a:rPr lang="en-US" i="0" dirty="0"/>
-                        <a:t>7</a:t>
+                        <a:t>8</a:t>
                       </a:r>
                     </a:p>
                   </a:txBody>
@@ -13643,7 +13931,7 @@
                       <a:pPr algn="ctr"/>
                       <a:r>
                         <a:rPr lang="en-US" i="0" dirty="0"/>
-                        <a:t>7</a:t>
+                        <a:t>8</a:t>
                       </a:r>
                     </a:p>
                   </a:txBody>
@@ -13688,14 +13976,14 @@
           <p:nvPr>
             <p:extLst>
               <p:ext uri="{D42A27DB-BD31-4B8C-83A1-F6EECF244321}">
-                <p14:modId xmlns:p14="http://schemas.microsoft.com/office/powerpoint/2010/main" val="2003054135"/>
+                <p14:modId xmlns:p14="http://schemas.microsoft.com/office/powerpoint/2010/main" val="3226694611"/>
               </p:ext>
             </p:extLst>
           </p:nvPr>
         </p:nvGraphicFramePr>
         <p:xfrm>
           <a:off x="2548834" y="3478771"/>
-          <a:ext cx="7255124" cy="2595880"/>
+          <a:ext cx="7255124" cy="2966720"/>
         </p:xfrm>
         <a:graphic>
           <a:graphicData uri="http://schemas.openxmlformats.org/drawingml/2006/table">
@@ -13805,7 +14093,7 @@
                       <a:pPr algn="ctr"/>
                       <a:r>
                         <a:rPr lang="en-US" dirty="0"/>
-                        <a:t>Mod 1 Written</a:t>
+                        <a:t>Mod 0 Written</a:t>
                       </a:r>
                     </a:p>
                   </a:txBody>
@@ -13869,7 +14157,7 @@
                       <a:pPr algn="ctr"/>
                       <a:r>
                         <a:rPr lang="en-US" dirty="0"/>
-                        <a:t>Mod 2 Written</a:t>
+                        <a:t>Mod 1 Written</a:t>
                       </a:r>
                     </a:p>
                   </a:txBody>
@@ -13883,7 +14171,7 @@
                       <a:pPr algn="ctr"/>
                       <a:r>
                         <a:rPr lang="en-US" dirty="0"/>
-                        <a:t>10</a:t>
+                        <a:t>78</a:t>
                       </a:r>
                     </a:p>
                   </a:txBody>
@@ -13933,7 +14221,7 @@
                       <a:pPr algn="ctr"/>
                       <a:r>
                         <a:rPr lang="en-US" dirty="0"/>
-                        <a:t>Mod 2: Programming</a:t>
+                        <a:t>Mod 1: Programming</a:t>
                       </a:r>
                     </a:p>
                   </a:txBody>
@@ -13997,7 +14285,7 @@
                       <a:pPr algn="ctr"/>
                       <a:r>
                         <a:rPr lang="en-US" dirty="0"/>
-                        <a:t>Mod 3 Written</a:t>
+                        <a:t>Mod 2 Written</a:t>
                       </a:r>
                     </a:p>
                   </a:txBody>
@@ -14061,7 +14349,7 @@
                       <a:pPr algn="ctr"/>
                       <a:r>
                         <a:rPr lang="en-US" dirty="0"/>
-                        <a:t>Mod 4 Written</a:t>
+                        <a:t>Mod 3 Written</a:t>
                       </a:r>
                     </a:p>
                   </a:txBody>
@@ -14113,6 +14401,69 @@
                 <a:extLst>
                   <a:ext uri="{0D108BD9-81ED-4DB2-BD59-A6C34878D82A}">
                     <a16:rowId xmlns:a16="http://schemas.microsoft.com/office/drawing/2014/main" val="999239085"/>
+                  </a:ext>
+                </a:extLst>
+              </a:tr>
+              <a:tr h="370840">
+                <a:tc>
+                  <a:txBody>
+                    <a:bodyPr/>
+                    <a:lstStyle/>
+                    <a:p>
+                      <a:pPr algn="ctr"/>
+                      <a:r>
+                        <a:rPr lang="en-US" dirty="0"/>
+                        <a:t>Mod 4 Written</a:t>
+                      </a:r>
+                    </a:p>
+                  </a:txBody>
+                  <a:tcPr/>
+                </a:tc>
+                <a:tc>
+                  <a:txBody>
+                    <a:bodyPr/>
+                    <a:lstStyle/>
+                    <a:p>
+                      <a:pPr algn="ctr"/>
+                      <a:r>
+                        <a:rPr lang="en-US" dirty="0"/>
+                        <a:t>-</a:t>
+                      </a:r>
+                    </a:p>
+                  </a:txBody>
+                  <a:tcPr/>
+                </a:tc>
+                <a:tc>
+                  <a:txBody>
+                    <a:bodyPr/>
+                    <a:lstStyle/>
+                    <a:p>
+                      <a:pPr algn="ctr"/>
+                      <a:r>
+                        <a:rPr lang="en-US" dirty="0"/>
+                        <a:t>-</a:t>
+                      </a:r>
+                    </a:p>
+                  </a:txBody>
+                  <a:tcPr/>
+                </a:tc>
+                <a:tc>
+                  <a:txBody>
+                    <a:bodyPr/>
+                    <a:lstStyle/>
+                    <a:p>
+                      <a:pPr algn="ctr"/>
+                      <a:r>
+                        <a:rPr lang="en-US" b="0" dirty="0"/>
+                        <a:t>N/A</a:t>
+                      </a:r>
+                    </a:p>
+                  </a:txBody>
+                  <a:tcPr/>
+                </a:tc>
+                <a:extLst>
+                  <a:ext uri="{0D108BD9-81ED-4DB2-BD59-A6C34878D82A}">
+                    <a16:rowId xmlns:a16="http://schemas.microsoft.com/office/drawing/2014/main" val="1784064154"/>
                   </a:ext>
                 </a:extLst>
               </a:tr>
@@ -14813,7 +15164,7 @@
           <p:nvPr>
             <p:extLst>
               <p:ext uri="{D42A27DB-BD31-4B8C-83A1-F6EECF244321}">
-                <p14:modId xmlns:p14="http://schemas.microsoft.com/office/powerpoint/2010/main" val="1262790351"/>
+                <p14:modId xmlns:p14="http://schemas.microsoft.com/office/powerpoint/2010/main" val="105119426"/>
               </p:ext>
             </p:extLst>
           </p:nvPr>
@@ -14909,7 +15260,7 @@
                       <a:pPr algn="ctr"/>
                       <a:r>
                         <a:rPr lang="en-US" i="0" dirty="0"/>
-                        <a:t>7</a:t>
+                        <a:t>8</a:t>
                       </a:r>
                     </a:p>
                   </a:txBody>
@@ -14923,7 +15274,7 @@
                       <a:pPr algn="ctr"/>
                       <a:r>
                         <a:rPr lang="en-US" i="0" dirty="0"/>
-                        <a:t>7</a:t>
+                        <a:t>8</a:t>
                       </a:r>
                     </a:p>
                   </a:txBody>
@@ -17452,6 +17803,18 @@
 </file>
 
 <file path=ppt/tags/tag24.xml><?xml version="1.0" encoding="utf-8"?>
+<p:tagLst xmlns:a="http://schemas.openxmlformats.org/drawingml/2006/main" xmlns:r="http://schemas.openxmlformats.org/officeDocument/2006/relationships" xmlns:p="http://schemas.openxmlformats.org/presentationml/2006/main">
+  <p:tag name="_INSTRUCTOR VIEW19C14C36-AC8E-43BC-9DB6-C2AAF774C7DC|PANE__TAG" val="_"/>
+</p:tagLst>
+</file>
+
+<file path=ppt/tags/tag25.xml><?xml version="1.0" encoding="utf-8"?>
+<p:tagLst xmlns:a="http://schemas.openxmlformats.org/drawingml/2006/main" xmlns:r="http://schemas.openxmlformats.org/officeDocument/2006/relationships" xmlns:p="http://schemas.openxmlformats.org/presentationml/2006/main">
+  <p:tag name="_INSTRUCTOR VIEW19C14C36-AC8E-43BC-9DB6-C2AAF774C7DC|PANE__TAG" val="_"/>
+</p:tagLst>
+</file>
+
+<file path=ppt/tags/tag26.xml><?xml version="1.0" encoding="utf-8"?>
 <p:tagLst xmlns:a="http://schemas.openxmlformats.org/drawingml/2006/main" xmlns:r="http://schemas.openxmlformats.org/officeDocument/2006/relationships" xmlns:p="http://schemas.openxmlformats.org/presentationml/2006/main">
   <p:tag name="_INSTRUCTOR VIEW19C14C36-AC8E-43BC-9DB6-C2AAF774C7DC|PANE__TAG" val="_"/>
 </p:tagLst>

--- a/slides/00-DailyAnnouncements.pptx
+++ b/slides/00-DailyAnnouncements.pptx
@@ -5,7 +5,7 @@
     <p:sldMasterId id="2147484006" r:id="rId1"/>
   </p:sldMasterIdLst>
   <p:notesMasterIdLst>
-    <p:notesMasterId r:id="rId14"/>
+    <p:notesMasterId r:id="rId15"/>
   </p:notesMasterIdLst>
   <p:sldIdLst>
     <p:sldId id="256" r:id="rId2"/>
@@ -19,7 +19,8 @@
     <p:sldId id="522" r:id="rId10"/>
     <p:sldId id="523" r:id="rId11"/>
     <p:sldId id="524" r:id="rId12"/>
-    <p:sldId id="515" r:id="rId13"/>
+    <p:sldId id="525" r:id="rId13"/>
+    <p:sldId id="515" r:id="rId14"/>
   </p:sldIdLst>
   <p:sldSz cx="12192000" cy="6858000"/>
   <p:notesSz cx="6858000" cy="9144000"/>
@@ -208,7 +209,7 @@
           <a:p>
             <a:fld id="{C5B45307-6ED4-B142-BD64-10F739779302}" type="datetimeFigureOut">
               <a:rPr lang="en-US" smtClean="0"/>
-              <a:t>9/21/26</a:t>
+              <a:t>9/24/26</a:t>
             </a:fld>
             <a:endParaRPr lang="en-US"/>
           </a:p>
@@ -616,7 +617,7 @@
           <a:noFill/>
           <a:extLst>
             <a:ext uri="{909E8E84-426E-40dd-AFC4-6F175D3DCCD1}">
-              <a14:hiddenFill xmlns:a14="http://schemas.microsoft.com/office/drawing/2010/main" xmlns="">
+              <a14:hiddenFill xmlns="" xmlns:a14="http://schemas.microsoft.com/office/drawing/2010/main">
                 <a:solidFill>
                   <a:srgbClr val="FFFFFF"/>
                 </a:solidFill>
@@ -675,7 +676,7 @@
             </a:ln>
             <a:extLst>
               <a:ext uri="{91240B29-F687-4f45-9708-019B960494DF}">
-                <a14:hiddenLine xmlns:a14="http://schemas.microsoft.com/office/drawing/2010/main" xmlns="" w="9525">
+                <a14:hiddenLine xmlns="" xmlns:a14="http://schemas.microsoft.com/office/drawing/2010/main" w="9525">
                   <a:solidFill>
                     <a:srgbClr val="000000"/>
                   </a:solidFill>
@@ -765,7 +766,7 @@
             </a:ln>
             <a:extLst>
               <a:ext uri="{91240B29-F687-4f45-9708-019B960494DF}">
-                <a14:hiddenLine xmlns:a14="http://schemas.microsoft.com/office/drawing/2010/main" xmlns="" w="9525">
+                <a14:hiddenLine xmlns="" xmlns:a14="http://schemas.microsoft.com/office/drawing/2010/main" w="9525">
                   <a:solidFill>
                     <a:srgbClr val="000000"/>
                   </a:solidFill>
@@ -855,7 +856,7 @@
             </a:ln>
             <a:extLst>
               <a:ext uri="{91240B29-F687-4f45-9708-019B960494DF}">
-                <a14:hiddenLine xmlns:a14="http://schemas.microsoft.com/office/drawing/2010/main" xmlns="" w="9525">
+                <a14:hiddenLine xmlns="" xmlns:a14="http://schemas.microsoft.com/office/drawing/2010/main" w="9525">
                   <a:solidFill>
                     <a:srgbClr val="000000"/>
                   </a:solidFill>
@@ -889,7 +890,7 @@
             </a:ln>
             <a:extLst>
               <a:ext uri="{91240B29-F687-4f45-9708-019B960494DF}">
-                <a14:hiddenLine xmlns:a14="http://schemas.microsoft.com/office/drawing/2010/main" xmlns="" w="9525">
+                <a14:hiddenLine xmlns="" xmlns:a14="http://schemas.microsoft.com/office/drawing/2010/main" w="9525">
                   <a:solidFill>
                     <a:srgbClr val="000000"/>
                   </a:solidFill>
@@ -979,7 +980,7 @@
             </a:ln>
             <a:extLst>
               <a:ext uri="{91240B29-F687-4f45-9708-019B960494DF}">
-                <a14:hiddenLine xmlns:a14="http://schemas.microsoft.com/office/drawing/2010/main" xmlns="" w="9525">
+                <a14:hiddenLine xmlns="" xmlns:a14="http://schemas.microsoft.com/office/drawing/2010/main" w="9525">
                   <a:solidFill>
                     <a:srgbClr val="000000"/>
                   </a:solidFill>
@@ -1041,7 +1042,7 @@
             </a:ln>
             <a:extLst>
               <a:ext uri="{91240B29-F687-4f45-9708-019B960494DF}">
-                <a14:hiddenLine xmlns:a14="http://schemas.microsoft.com/office/drawing/2010/main" xmlns="" w="9525">
+                <a14:hiddenLine xmlns="" xmlns:a14="http://schemas.microsoft.com/office/drawing/2010/main" w="9525">
                   <a:solidFill>
                     <a:srgbClr val="000000"/>
                   </a:solidFill>
@@ -1103,7 +1104,7 @@
             </a:ln>
             <a:extLst>
               <a:ext uri="{91240B29-F687-4f45-9708-019B960494DF}">
-                <a14:hiddenLine xmlns:a14="http://schemas.microsoft.com/office/drawing/2010/main" xmlns="" w="9525">
+                <a14:hiddenLine xmlns="" xmlns:a14="http://schemas.microsoft.com/office/drawing/2010/main" w="9525">
                   <a:solidFill>
                     <a:srgbClr val="000000"/>
                   </a:solidFill>
@@ -1193,7 +1194,7 @@
             </a:ln>
             <a:extLst>
               <a:ext uri="{91240B29-F687-4f45-9708-019B960494DF}">
-                <a14:hiddenLine xmlns:a14="http://schemas.microsoft.com/office/drawing/2010/main" xmlns="" w="9525">
+                <a14:hiddenLine xmlns="" xmlns:a14="http://schemas.microsoft.com/office/drawing/2010/main" w="9525">
                   <a:solidFill>
                     <a:srgbClr val="000000"/>
                   </a:solidFill>
@@ -1255,7 +1256,7 @@
             </a:ln>
             <a:extLst>
               <a:ext uri="{91240B29-F687-4f45-9708-019B960494DF}">
-                <a14:hiddenLine xmlns:a14="http://schemas.microsoft.com/office/drawing/2010/main" xmlns="" w="9525">
+                <a14:hiddenLine xmlns="" xmlns:a14="http://schemas.microsoft.com/office/drawing/2010/main" w="9525">
                   <a:solidFill>
                     <a:srgbClr val="000000"/>
                   </a:solidFill>
@@ -1317,7 +1318,7 @@
             </a:ln>
             <a:extLst>
               <a:ext uri="{91240B29-F687-4f45-9708-019B960494DF}">
-                <a14:hiddenLine xmlns:a14="http://schemas.microsoft.com/office/drawing/2010/main" xmlns="" w="9525">
+                <a14:hiddenLine xmlns="" xmlns:a14="http://schemas.microsoft.com/office/drawing/2010/main" w="9525">
                   <a:solidFill>
                     <a:srgbClr val="000000"/>
                   </a:solidFill>
@@ -1407,7 +1408,7 @@
             </a:ln>
             <a:extLst>
               <a:ext uri="{91240B29-F687-4f45-9708-019B960494DF}">
-                <a14:hiddenLine xmlns:a14="http://schemas.microsoft.com/office/drawing/2010/main" xmlns="" w="9525">
+                <a14:hiddenLine xmlns="" xmlns:a14="http://schemas.microsoft.com/office/drawing/2010/main" w="9525">
                   <a:solidFill>
                     <a:srgbClr val="000000"/>
                   </a:solidFill>
@@ -1497,7 +1498,7 @@
             </a:ln>
             <a:extLst>
               <a:ext uri="{91240B29-F687-4f45-9708-019B960494DF}">
-                <a14:hiddenLine xmlns:a14="http://schemas.microsoft.com/office/drawing/2010/main" xmlns="" w="9525">
+                <a14:hiddenLine xmlns="" xmlns:a14="http://schemas.microsoft.com/office/drawing/2010/main" w="9525">
                   <a:solidFill>
                     <a:srgbClr val="000000"/>
                   </a:solidFill>
@@ -1559,7 +1560,7 @@
             </a:ln>
             <a:extLst>
               <a:ext uri="{91240B29-F687-4f45-9708-019B960494DF}">
-                <a14:hiddenLine xmlns:a14="http://schemas.microsoft.com/office/drawing/2010/main" xmlns="" w="9525">
+                <a14:hiddenLine xmlns="" xmlns:a14="http://schemas.microsoft.com/office/drawing/2010/main" w="9525">
                   <a:solidFill>
                     <a:srgbClr val="000000"/>
                   </a:solidFill>
@@ -1669,7 +1670,7 @@
             </a:ln>
             <a:extLst>
               <a:ext uri="{91240B29-F687-4f45-9708-019B960494DF}">
-                <a14:hiddenLine xmlns:a14="http://schemas.microsoft.com/office/drawing/2010/main" xmlns="" w="9525">
+                <a14:hiddenLine xmlns="" xmlns:a14="http://schemas.microsoft.com/office/drawing/2010/main" w="9525">
                   <a:solidFill>
                     <a:srgbClr val="000000"/>
                   </a:solidFill>
@@ -1731,7 +1732,7 @@
             </a:ln>
             <a:extLst>
               <a:ext uri="{91240B29-F687-4f45-9708-019B960494DF}">
-                <a14:hiddenLine xmlns:a14="http://schemas.microsoft.com/office/drawing/2010/main" xmlns="" w="9525">
+                <a14:hiddenLine xmlns="" xmlns:a14="http://schemas.microsoft.com/office/drawing/2010/main" w="9525">
                   <a:solidFill>
                     <a:srgbClr val="000000"/>
                   </a:solidFill>
@@ -1821,7 +1822,7 @@
             </a:ln>
             <a:extLst>
               <a:ext uri="{91240B29-F687-4f45-9708-019B960494DF}">
-                <a14:hiddenLine xmlns:a14="http://schemas.microsoft.com/office/drawing/2010/main" xmlns="" w="9525">
+                <a14:hiddenLine xmlns="" xmlns:a14="http://schemas.microsoft.com/office/drawing/2010/main" w="9525">
                   <a:solidFill>
                     <a:srgbClr val="000000"/>
                   </a:solidFill>
@@ -1911,7 +1912,7 @@
             </a:ln>
             <a:extLst>
               <a:ext uri="{91240B29-F687-4f45-9708-019B960494DF}">
-                <a14:hiddenLine xmlns:a14="http://schemas.microsoft.com/office/drawing/2010/main" xmlns="" w="9525">
+                <a14:hiddenLine xmlns="" xmlns:a14="http://schemas.microsoft.com/office/drawing/2010/main" w="9525">
                   <a:solidFill>
                     <a:srgbClr val="000000"/>
                   </a:solidFill>
@@ -1973,7 +1974,7 @@
             </a:ln>
             <a:extLst>
               <a:ext uri="{91240B29-F687-4f45-9708-019B960494DF}">
-                <a14:hiddenLine xmlns:a14="http://schemas.microsoft.com/office/drawing/2010/main" xmlns="" w="9525">
+                <a14:hiddenLine xmlns="" xmlns:a14="http://schemas.microsoft.com/office/drawing/2010/main" w="9525">
                   <a:solidFill>
                     <a:srgbClr val="000000"/>
                   </a:solidFill>
@@ -2063,7 +2064,7 @@
             </a:ln>
             <a:extLst>
               <a:ext uri="{91240B29-F687-4f45-9708-019B960494DF}">
-                <a14:hiddenLine xmlns:a14="http://schemas.microsoft.com/office/drawing/2010/main" xmlns="" w="9525">
+                <a14:hiddenLine xmlns="" xmlns:a14="http://schemas.microsoft.com/office/drawing/2010/main" w="9525">
                   <a:solidFill>
                     <a:srgbClr val="000000"/>
                   </a:solidFill>
@@ -2153,7 +2154,7 @@
             </a:ln>
             <a:extLst>
               <a:ext uri="{91240B29-F687-4f45-9708-019B960494DF}">
-                <a14:hiddenLine xmlns:a14="http://schemas.microsoft.com/office/drawing/2010/main" xmlns="" w="9525">
+                <a14:hiddenLine xmlns="" xmlns:a14="http://schemas.microsoft.com/office/drawing/2010/main" w="9525">
                   <a:solidFill>
                     <a:srgbClr val="000000"/>
                   </a:solidFill>
@@ -2209,7 +2210,7 @@
             </a:ln>
             <a:extLst>
               <a:ext uri="{91240B29-F687-4f45-9708-019B960494DF}">
-                <a14:hiddenLine xmlns:a14="http://schemas.microsoft.com/office/drawing/2010/main" xmlns="" w="9525">
+                <a14:hiddenLine xmlns="" xmlns:a14="http://schemas.microsoft.com/office/drawing/2010/main" w="9525">
                   <a:solidFill>
                     <a:srgbClr val="000000"/>
                   </a:solidFill>
@@ -2299,7 +2300,7 @@
             </a:ln>
             <a:extLst>
               <a:ext uri="{91240B29-F687-4f45-9708-019B960494DF}">
-                <a14:hiddenLine xmlns:a14="http://schemas.microsoft.com/office/drawing/2010/main" xmlns="" w="9525">
+                <a14:hiddenLine xmlns="" xmlns:a14="http://schemas.microsoft.com/office/drawing/2010/main" w="9525">
                   <a:solidFill>
                     <a:srgbClr val="000000"/>
                   </a:solidFill>
@@ -2355,7 +2356,7 @@
             </a:ln>
             <a:extLst>
               <a:ext uri="{91240B29-F687-4f45-9708-019B960494DF}">
-                <a14:hiddenLine xmlns:a14="http://schemas.microsoft.com/office/drawing/2010/main" xmlns="" w="9525">
+                <a14:hiddenLine xmlns="" xmlns:a14="http://schemas.microsoft.com/office/drawing/2010/main" w="9525">
                   <a:solidFill>
                     <a:srgbClr val="000000"/>
                   </a:solidFill>
@@ -2445,7 +2446,7 @@
             </a:ln>
             <a:extLst>
               <a:ext uri="{91240B29-F687-4f45-9708-019B960494DF}">
-                <a14:hiddenLine xmlns:a14="http://schemas.microsoft.com/office/drawing/2010/main" xmlns="" w="9525">
+                <a14:hiddenLine xmlns="" xmlns:a14="http://schemas.microsoft.com/office/drawing/2010/main" w="9525">
                   <a:solidFill>
                     <a:srgbClr val="000000"/>
                   </a:solidFill>
@@ -2513,7 +2514,7 @@
             </a:ln>
             <a:extLst>
               <a:ext uri="{91240B29-F687-4f45-9708-019B960494DF}">
-                <a14:hiddenLine xmlns:a14="http://schemas.microsoft.com/office/drawing/2010/main" xmlns="" w="9525">
+                <a14:hiddenLine xmlns="" xmlns:a14="http://schemas.microsoft.com/office/drawing/2010/main" w="9525">
                   <a:solidFill>
                     <a:srgbClr val="000000"/>
                   </a:solidFill>
@@ -2603,7 +2604,7 @@
             </a:ln>
             <a:extLst>
               <a:ext uri="{91240B29-F687-4f45-9708-019B960494DF}">
-                <a14:hiddenLine xmlns:a14="http://schemas.microsoft.com/office/drawing/2010/main" xmlns="" w="9525">
+                <a14:hiddenLine xmlns="" xmlns:a14="http://schemas.microsoft.com/office/drawing/2010/main" w="9525">
                   <a:solidFill>
                     <a:srgbClr val="000000"/>
                   </a:solidFill>
@@ -2671,7 +2672,7 @@
             </a:ln>
             <a:extLst>
               <a:ext uri="{91240B29-F687-4f45-9708-019B960494DF}">
-                <a14:hiddenLine xmlns:a14="http://schemas.microsoft.com/office/drawing/2010/main" xmlns="" w="9525">
+                <a14:hiddenLine xmlns="" xmlns:a14="http://schemas.microsoft.com/office/drawing/2010/main" w="9525">
                   <a:solidFill>
                     <a:srgbClr val="000000"/>
                   </a:solidFill>
@@ -2761,7 +2762,7 @@
             </a:ln>
             <a:extLst>
               <a:ext uri="{91240B29-F687-4f45-9708-019B960494DF}">
-                <a14:hiddenLine xmlns:a14="http://schemas.microsoft.com/office/drawing/2010/main" xmlns="" w="9525">
+                <a14:hiddenLine xmlns="" xmlns:a14="http://schemas.microsoft.com/office/drawing/2010/main" w="9525">
                   <a:solidFill>
                     <a:srgbClr val="000000"/>
                   </a:solidFill>
@@ -2795,7 +2796,7 @@
             </a:ln>
             <a:extLst>
               <a:ext uri="{91240B29-F687-4f45-9708-019B960494DF}">
-                <a14:hiddenLine xmlns:a14="http://schemas.microsoft.com/office/drawing/2010/main" xmlns="" w="9525">
+                <a14:hiddenLine xmlns="" xmlns:a14="http://schemas.microsoft.com/office/drawing/2010/main" w="9525">
                   <a:solidFill>
                     <a:srgbClr val="000000"/>
                   </a:solidFill>
@@ -2885,7 +2886,7 @@
             </a:ln>
             <a:extLst>
               <a:ext uri="{91240B29-F687-4f45-9708-019B960494DF}">
-                <a14:hiddenLine xmlns:a14="http://schemas.microsoft.com/office/drawing/2010/main" xmlns="" w="9525">
+                <a14:hiddenLine xmlns="" xmlns:a14="http://schemas.microsoft.com/office/drawing/2010/main" w="9525">
                   <a:solidFill>
                     <a:srgbClr val="000000"/>
                   </a:solidFill>
@@ -2947,7 +2948,7 @@
             </a:ln>
             <a:extLst>
               <a:ext uri="{91240B29-F687-4f45-9708-019B960494DF}">
-                <a14:hiddenLine xmlns:a14="http://schemas.microsoft.com/office/drawing/2010/main" xmlns="" w="9525">
+                <a14:hiddenLine xmlns="" xmlns:a14="http://schemas.microsoft.com/office/drawing/2010/main" w="9525">
                   <a:solidFill>
                     <a:srgbClr val="000000"/>
                   </a:solidFill>
@@ -3009,7 +3010,7 @@
             </a:ln>
             <a:extLst>
               <a:ext uri="{91240B29-F687-4f45-9708-019B960494DF}">
-                <a14:hiddenLine xmlns:a14="http://schemas.microsoft.com/office/drawing/2010/main" xmlns="" w="9525">
+                <a14:hiddenLine xmlns="" xmlns:a14="http://schemas.microsoft.com/office/drawing/2010/main" w="9525">
                   <a:solidFill>
                     <a:srgbClr val="000000"/>
                   </a:solidFill>
@@ -3099,7 +3100,7 @@
             </a:ln>
             <a:extLst>
               <a:ext uri="{91240B29-F687-4f45-9708-019B960494DF}">
-                <a14:hiddenLine xmlns:a14="http://schemas.microsoft.com/office/drawing/2010/main" xmlns="" w="9525">
+                <a14:hiddenLine xmlns="" xmlns:a14="http://schemas.microsoft.com/office/drawing/2010/main" w="9525">
                   <a:solidFill>
                     <a:srgbClr val="000000"/>
                   </a:solidFill>
@@ -3167,7 +3168,7 @@
             </a:ln>
             <a:extLst>
               <a:ext uri="{91240B29-F687-4f45-9708-019B960494DF}">
-                <a14:hiddenLine xmlns:a14="http://schemas.microsoft.com/office/drawing/2010/main" xmlns="" w="9525">
+                <a14:hiddenLine xmlns="" xmlns:a14="http://schemas.microsoft.com/office/drawing/2010/main" w="9525">
                   <a:solidFill>
                     <a:srgbClr val="000000"/>
                   </a:solidFill>
@@ -3229,7 +3230,7 @@
             </a:ln>
             <a:extLst>
               <a:ext uri="{91240B29-F687-4f45-9708-019B960494DF}">
-                <a14:hiddenLine xmlns:a14="http://schemas.microsoft.com/office/drawing/2010/main" xmlns="" w="9525">
+                <a14:hiddenLine xmlns="" xmlns:a14="http://schemas.microsoft.com/office/drawing/2010/main" w="9525">
                   <a:solidFill>
                     <a:srgbClr val="000000"/>
                   </a:solidFill>
@@ -3319,7 +3320,7 @@
             </a:ln>
             <a:extLst>
               <a:ext uri="{91240B29-F687-4f45-9708-019B960494DF}">
-                <a14:hiddenLine xmlns:a14="http://schemas.microsoft.com/office/drawing/2010/main" xmlns="" w="9525">
+                <a14:hiddenLine xmlns="" xmlns:a14="http://schemas.microsoft.com/office/drawing/2010/main" w="9525">
                   <a:solidFill>
                     <a:srgbClr val="000000"/>
                   </a:solidFill>
@@ -3381,7 +3382,7 @@
             </a:ln>
             <a:extLst>
               <a:ext uri="{91240B29-F687-4f45-9708-019B960494DF}">
-                <a14:hiddenLine xmlns:a14="http://schemas.microsoft.com/office/drawing/2010/main" xmlns="" w="9525">
+                <a14:hiddenLine xmlns="" xmlns:a14="http://schemas.microsoft.com/office/drawing/2010/main" w="9525">
                   <a:solidFill>
                     <a:srgbClr val="000000"/>
                   </a:solidFill>
@@ -3471,7 +3472,7 @@
             </a:ln>
             <a:extLst>
               <a:ext uri="{91240B29-F687-4f45-9708-019B960494DF}">
-                <a14:hiddenLine xmlns:a14="http://schemas.microsoft.com/office/drawing/2010/main" xmlns="" w="9525">
+                <a14:hiddenLine xmlns="" xmlns:a14="http://schemas.microsoft.com/office/drawing/2010/main" w="9525">
                   <a:solidFill>
                     <a:srgbClr val="000000"/>
                   </a:solidFill>
@@ -3533,7 +3534,7 @@
             </a:ln>
             <a:extLst>
               <a:ext uri="{91240B29-F687-4f45-9708-019B960494DF}">
-                <a14:hiddenLine xmlns:a14="http://schemas.microsoft.com/office/drawing/2010/main" xmlns="" w="9525">
+                <a14:hiddenLine xmlns="" xmlns:a14="http://schemas.microsoft.com/office/drawing/2010/main" w="9525">
                   <a:solidFill>
                     <a:srgbClr val="000000"/>
                   </a:solidFill>
@@ -3623,7 +3624,7 @@
             </a:ln>
             <a:extLst>
               <a:ext uri="{91240B29-F687-4f45-9708-019B960494DF}">
-                <a14:hiddenLine xmlns:a14="http://schemas.microsoft.com/office/drawing/2010/main" xmlns="" w="9525">
+                <a14:hiddenLine xmlns="" xmlns:a14="http://schemas.microsoft.com/office/drawing/2010/main" w="9525">
                   <a:solidFill>
                     <a:srgbClr val="000000"/>
                   </a:solidFill>
@@ -3657,7 +3658,7 @@
             </a:ln>
             <a:extLst>
               <a:ext uri="{91240B29-F687-4f45-9708-019B960494DF}">
-                <a14:hiddenLine xmlns:a14="http://schemas.microsoft.com/office/drawing/2010/main" xmlns="" w="9525">
+                <a14:hiddenLine xmlns="" xmlns:a14="http://schemas.microsoft.com/office/drawing/2010/main" w="9525">
                   <a:solidFill>
                     <a:srgbClr val="000000"/>
                   </a:solidFill>
@@ -3722,7 +3723,7 @@
             </a:ln>
             <a:extLst>
               <a:ext uri="{91240B29-F687-4f45-9708-019B960494DF}">
-                <a14:hiddenLine xmlns:a14="http://schemas.microsoft.com/office/drawing/2010/main" xmlns="" w="9525">
+                <a14:hiddenLine xmlns="" xmlns:a14="http://schemas.microsoft.com/office/drawing/2010/main" w="9525">
                   <a:solidFill>
                     <a:srgbClr val="000000"/>
                   </a:solidFill>
@@ -3812,7 +3813,7 @@
             </a:ln>
             <a:extLst>
               <a:ext uri="{91240B29-F687-4f45-9708-019B960494DF}">
-                <a14:hiddenLine xmlns:a14="http://schemas.microsoft.com/office/drawing/2010/main" xmlns="" w="9525">
+                <a14:hiddenLine xmlns="" xmlns:a14="http://schemas.microsoft.com/office/drawing/2010/main" w="9525">
                   <a:solidFill>
                     <a:srgbClr val="000000"/>
                   </a:solidFill>
@@ -3874,7 +3875,7 @@
             </a:ln>
             <a:extLst>
               <a:ext uri="{91240B29-F687-4f45-9708-019B960494DF}">
-                <a14:hiddenLine xmlns:a14="http://schemas.microsoft.com/office/drawing/2010/main" xmlns="" w="9525">
+                <a14:hiddenLine xmlns="" xmlns:a14="http://schemas.microsoft.com/office/drawing/2010/main" w="9525">
                   <a:solidFill>
                     <a:srgbClr val="000000"/>
                   </a:solidFill>
@@ -3964,7 +3965,7 @@
             </a:ln>
             <a:extLst>
               <a:ext uri="{91240B29-F687-4f45-9708-019B960494DF}">
-                <a14:hiddenLine xmlns:a14="http://schemas.microsoft.com/office/drawing/2010/main" xmlns="" w="9525">
+                <a14:hiddenLine xmlns="" xmlns:a14="http://schemas.microsoft.com/office/drawing/2010/main" w="9525">
                   <a:solidFill>
                     <a:srgbClr val="000000"/>
                   </a:solidFill>
@@ -4054,7 +4055,7 @@
             </a:ln>
             <a:extLst>
               <a:ext uri="{91240B29-F687-4f45-9708-019B960494DF}">
-                <a14:hiddenLine xmlns:a14="http://schemas.microsoft.com/office/drawing/2010/main" xmlns="" w="9525">
+                <a14:hiddenLine xmlns="" xmlns:a14="http://schemas.microsoft.com/office/drawing/2010/main" w="9525">
                   <a:solidFill>
                     <a:srgbClr val="000000"/>
                   </a:solidFill>
@@ -4119,7 +4120,7 @@
             </a:ln>
             <a:extLst>
               <a:ext uri="{91240B29-F687-4f45-9708-019B960494DF}">
-                <a14:hiddenLine xmlns:a14="http://schemas.microsoft.com/office/drawing/2010/main" xmlns="" w="9525">
+                <a14:hiddenLine xmlns="" xmlns:a14="http://schemas.microsoft.com/office/drawing/2010/main" w="9525">
                   <a:solidFill>
                     <a:srgbClr val="000000"/>
                   </a:solidFill>
@@ -4181,7 +4182,7 @@
             </a:ln>
             <a:extLst>
               <a:ext uri="{91240B29-F687-4f45-9708-019B960494DF}">
-                <a14:hiddenLine xmlns:a14="http://schemas.microsoft.com/office/drawing/2010/main" xmlns="" w="9525">
+                <a14:hiddenLine xmlns="" xmlns:a14="http://schemas.microsoft.com/office/drawing/2010/main" w="9525">
                   <a:solidFill>
                     <a:srgbClr val="000000"/>
                   </a:solidFill>
@@ -4271,7 +4272,7 @@
             </a:ln>
             <a:extLst>
               <a:ext uri="{91240B29-F687-4f45-9708-019B960494DF}">
-                <a14:hiddenLine xmlns:a14="http://schemas.microsoft.com/office/drawing/2010/main" xmlns="" w="9525">
+                <a14:hiddenLine xmlns="" xmlns:a14="http://schemas.microsoft.com/office/drawing/2010/main" w="9525">
                   <a:solidFill>
                     <a:srgbClr val="000000"/>
                   </a:solidFill>
@@ -4361,7 +4362,7 @@
             </a:ln>
             <a:extLst>
               <a:ext uri="{91240B29-F687-4f45-9708-019B960494DF}">
-                <a14:hiddenLine xmlns:a14="http://schemas.microsoft.com/office/drawing/2010/main" xmlns="" w="9525">
+                <a14:hiddenLine xmlns="" xmlns:a14="http://schemas.microsoft.com/office/drawing/2010/main" w="9525">
                   <a:solidFill>
                     <a:srgbClr val="000000"/>
                   </a:solidFill>
@@ -4423,7 +4424,7 @@
             </a:ln>
             <a:extLst>
               <a:ext uri="{91240B29-F687-4f45-9708-019B960494DF}">
-                <a14:hiddenLine xmlns:a14="http://schemas.microsoft.com/office/drawing/2010/main" xmlns="" w="9525">
+                <a14:hiddenLine xmlns="" xmlns:a14="http://schemas.microsoft.com/office/drawing/2010/main" w="9525">
                   <a:solidFill>
                     <a:srgbClr val="000000"/>
                   </a:solidFill>
@@ -4543,7 +4544,7 @@
             </a:ln>
             <a:extLst>
               <a:ext uri="{91240B29-F687-4f45-9708-019B960494DF}">
-                <a14:hiddenLine xmlns:a14="http://schemas.microsoft.com/office/drawing/2010/main" xmlns="" w="9525">
+                <a14:hiddenLine xmlns="" xmlns:a14="http://schemas.microsoft.com/office/drawing/2010/main" w="9525">
                   <a:solidFill>
                     <a:srgbClr val="000000"/>
                   </a:solidFill>
@@ -4611,7 +4612,7 @@
             </a:ln>
             <a:extLst>
               <a:ext uri="{91240B29-F687-4f45-9708-019B960494DF}">
-                <a14:hiddenLine xmlns:a14="http://schemas.microsoft.com/office/drawing/2010/main" xmlns="" w="9525">
+                <a14:hiddenLine xmlns="" xmlns:a14="http://schemas.microsoft.com/office/drawing/2010/main" w="9525">
                   <a:solidFill>
                     <a:srgbClr val="000000"/>
                   </a:solidFill>
@@ -4701,7 +4702,7 @@
             </a:ln>
             <a:extLst>
               <a:ext uri="{91240B29-F687-4f45-9708-019B960494DF}">
-                <a14:hiddenLine xmlns:a14="http://schemas.microsoft.com/office/drawing/2010/main" xmlns="" w="9525">
+                <a14:hiddenLine xmlns="" xmlns:a14="http://schemas.microsoft.com/office/drawing/2010/main" w="9525">
                   <a:solidFill>
                     <a:srgbClr val="000000"/>
                   </a:solidFill>
@@ -4841,7 +4842,7 @@
           <a:p>
             <a:fld id="{4313F670-7F9A-774D-B73D-573401E44297}" type="datetime1">
               <a:rPr lang="en-US" smtClean="0"/>
-              <a:t>9/21/26</a:t>
+              <a:t>9/24/26</a:t>
             </a:fld>
             <a:endParaRPr lang="en-US"/>
           </a:p>
@@ -5108,7 +5109,7 @@
           <a:p>
             <a:fld id="{446F9669-A8A7-2D40-9D01-B35FC337AA30}" type="datetime1">
               <a:rPr lang="en-US" smtClean="0"/>
-              <a:t>9/21/26</a:t>
+              <a:t>9/24/26</a:t>
             </a:fld>
             <a:endParaRPr lang="en-US"/>
           </a:p>
@@ -5304,7 +5305,7 @@
           <a:p>
             <a:fld id="{FA76CF18-F41B-6B48-B3E5-599E9795C2C3}" type="datetime1">
               <a:rPr lang="en-US" smtClean="0"/>
-              <a:t>9/21/26</a:t>
+              <a:t>9/24/26</a:t>
             </a:fld>
             <a:endParaRPr lang="en-US"/>
           </a:p>
@@ -5567,7 +5568,7 @@
           <a:p>
             <a:fld id="{B9654854-6457-164F-A077-6B3035079B82}" type="datetime1">
               <a:rPr lang="en-US" smtClean="0"/>
-              <a:t>9/21/26</a:t>
+              <a:t>9/24/26</a:t>
             </a:fld>
             <a:endParaRPr lang="en-US"/>
           </a:p>
@@ -6001,7 +6002,7 @@
           <a:p>
             <a:fld id="{CE3DBFD7-E611-8C40-AC73-0C29FF63F0CD}" type="datetime1">
               <a:rPr lang="en-US" smtClean="0"/>
-              <a:t>9/21/26</a:t>
+              <a:t>9/24/26</a:t>
             </a:fld>
             <a:endParaRPr lang="en-US"/>
           </a:p>
@@ -6547,7 +6548,7 @@
           <a:p>
             <a:fld id="{C8B63B06-0493-2840-9F37-30C9412BBF17}" type="datetime1">
               <a:rPr lang="en-US" smtClean="0"/>
-              <a:t>9/21/26</a:t>
+              <a:t>9/24/26</a:t>
             </a:fld>
             <a:endParaRPr lang="en-US"/>
           </a:p>
@@ -7267,7 +7268,7 @@
           <a:p>
             <a:fld id="{72B5C0FA-8C46-E84D-B6D7-B673F2CA0A0E}" type="datetime1">
               <a:rPr lang="en-US" smtClean="0"/>
-              <a:t>9/21/26</a:t>
+              <a:t>9/24/26</a:t>
             </a:fld>
             <a:endParaRPr lang="en-US"/>
           </a:p>
@@ -7437,7 +7438,7 @@
           <a:p>
             <a:fld id="{60B9CDE1-97B4-BF46-B69C-B86855B18820}" type="datetime1">
               <a:rPr lang="en-US" smtClean="0"/>
-              <a:t>9/21/26</a:t>
+              <a:t>9/24/26</a:t>
             </a:fld>
             <a:endParaRPr lang="en-US"/>
           </a:p>
@@ -7617,7 +7618,7 @@
           <a:p>
             <a:fld id="{BE51D3A4-F9E5-FD49-AA87-B395F50451DC}" type="datetime1">
               <a:rPr lang="en-US" smtClean="0"/>
-              <a:t>9/21/26</a:t>
+              <a:t>9/24/26</a:t>
             </a:fld>
             <a:endParaRPr lang="en-US"/>
           </a:p>
@@ -7787,7 +7788,7 @@
           <a:p>
             <a:fld id="{880DFB37-B0AE-9449-85EC-14F9C83B6084}" type="datetime1">
               <a:rPr lang="en-US" smtClean="0"/>
-              <a:t>9/21/26</a:t>
+              <a:t>9/24/26</a:t>
             </a:fld>
             <a:endParaRPr lang="en-US"/>
           </a:p>
@@ -8037,7 +8038,7 @@
           <a:p>
             <a:fld id="{C939124A-616E-6944-A21A-1839F5DBE7BB}" type="datetime1">
               <a:rPr lang="en-US" smtClean="0"/>
-              <a:t>9/21/26</a:t>
+              <a:t>9/24/26</a:t>
             </a:fld>
             <a:endParaRPr lang="en-US"/>
           </a:p>
@@ -8269,7 +8270,7 @@
           <a:p>
             <a:fld id="{C6E9A026-D48C-FD43-8676-CD625DD5D84B}" type="datetime1">
               <a:rPr lang="en-US" smtClean="0"/>
-              <a:t>9/21/26</a:t>
+              <a:t>9/24/26</a:t>
             </a:fld>
             <a:endParaRPr lang="en-US"/>
           </a:p>
@@ -8655,7 +8656,7 @@
           <a:p>
             <a:fld id="{EA35111E-23A3-1440-99A3-C4C665908E3D}" type="datetime1">
               <a:rPr lang="en-US" smtClean="0"/>
-              <a:t>9/21/26</a:t>
+              <a:t>9/24/26</a:t>
             </a:fld>
             <a:endParaRPr lang="en-US"/>
           </a:p>
@@ -8778,7 +8779,7 @@
           <a:p>
             <a:fld id="{249983B9-88EF-D74B-BA6D-6A3BF17C2B38}" type="datetime1">
               <a:rPr lang="en-US" smtClean="0"/>
-              <a:t>9/21/26</a:t>
+              <a:t>9/24/26</a:t>
             </a:fld>
             <a:endParaRPr lang="en-US"/>
           </a:p>
@@ -8873,7 +8874,7 @@
           <a:p>
             <a:fld id="{E2A00AEF-B4EC-084A-8DB8-A225C7981CBB}" type="datetime1">
               <a:rPr lang="en-US" smtClean="0"/>
-              <a:t>9/21/26</a:t>
+              <a:t>9/24/26</a:t>
             </a:fld>
             <a:endParaRPr lang="en-US"/>
           </a:p>
@@ -9122,7 +9123,7 @@
           <a:p>
             <a:fld id="{97860299-21CD-A94A-A7B0-44E787F8D42C}" type="datetime1">
               <a:rPr lang="en-US" smtClean="0"/>
-              <a:t>9/21/26</a:t>
+              <a:t>9/24/26</a:t>
             </a:fld>
             <a:endParaRPr lang="en-US"/>
           </a:p>
@@ -9407,7 +9408,7 @@
           <a:p>
             <a:fld id="{3DFD19CF-4E62-D246-BA61-7B528271315F}" type="datetime1">
               <a:rPr lang="en-US" smtClean="0"/>
-              <a:t>9/21/26</a:t>
+              <a:t>9/24/26</a:t>
             </a:fld>
             <a:endParaRPr lang="en-US"/>
           </a:p>
@@ -9530,7 +9531,7 @@
           <a:noFill/>
           <a:extLst>
             <a:ext uri="{909E8E84-426E-40dd-AFC4-6F175D3DCCD1}">
-              <a14:hiddenFill xmlns:a14="http://schemas.microsoft.com/office/drawing/2010/main" xmlns="">
+              <a14:hiddenFill xmlns="" xmlns:a14="http://schemas.microsoft.com/office/drawing/2010/main">
                 <a:solidFill>
                   <a:srgbClr val="FFFFFF"/>
                 </a:solidFill>
@@ -9604,7 +9605,7 @@
               </a:ln>
               <a:extLst>
                 <a:ext uri="{91240B29-F687-4f45-9708-019B960494DF}">
-                  <a14:hiddenLine xmlns:a14="http://schemas.microsoft.com/office/drawing/2010/main" xmlns="" w="9525">
+                  <a14:hiddenLine xmlns="" xmlns:a14="http://schemas.microsoft.com/office/drawing/2010/main" w="9525">
                     <a:solidFill>
                       <a:srgbClr val="000000"/>
                     </a:solidFill>
@@ -9694,7 +9695,7 @@
               </a:ln>
               <a:extLst>
                 <a:ext uri="{91240B29-F687-4f45-9708-019B960494DF}">
-                  <a14:hiddenLine xmlns:a14="http://schemas.microsoft.com/office/drawing/2010/main" xmlns="" w="9525">
+                  <a14:hiddenLine xmlns="" xmlns:a14="http://schemas.microsoft.com/office/drawing/2010/main" w="9525">
                     <a:solidFill>
                       <a:srgbClr val="000000"/>
                     </a:solidFill>
@@ -9784,7 +9785,7 @@
               </a:ln>
               <a:extLst>
                 <a:ext uri="{91240B29-F687-4f45-9708-019B960494DF}">
-                  <a14:hiddenLine xmlns:a14="http://schemas.microsoft.com/office/drawing/2010/main" xmlns="" w="9525">
+                  <a14:hiddenLine xmlns="" xmlns:a14="http://schemas.microsoft.com/office/drawing/2010/main" w="9525">
                     <a:solidFill>
                       <a:srgbClr val="000000"/>
                     </a:solidFill>
@@ -9846,7 +9847,7 @@
               </a:ln>
               <a:extLst>
                 <a:ext uri="{91240B29-F687-4f45-9708-019B960494DF}">
-                  <a14:hiddenLine xmlns:a14="http://schemas.microsoft.com/office/drawing/2010/main" xmlns="" w="9525">
+                  <a14:hiddenLine xmlns="" xmlns:a14="http://schemas.microsoft.com/office/drawing/2010/main" w="9525">
                     <a:solidFill>
                       <a:srgbClr val="000000"/>
                     </a:solidFill>
@@ -9936,7 +9937,7 @@
               </a:ln>
               <a:extLst>
                 <a:ext uri="{91240B29-F687-4f45-9708-019B960494DF}">
-                  <a14:hiddenLine xmlns:a14="http://schemas.microsoft.com/office/drawing/2010/main" xmlns="" w="9525">
+                  <a14:hiddenLine xmlns="" xmlns:a14="http://schemas.microsoft.com/office/drawing/2010/main" w="9525">
                     <a:solidFill>
                       <a:srgbClr val="000000"/>
                     </a:solidFill>
@@ -9998,7 +9999,7 @@
               </a:ln>
               <a:extLst>
                 <a:ext uri="{91240B29-F687-4f45-9708-019B960494DF}">
-                  <a14:hiddenLine xmlns:a14="http://schemas.microsoft.com/office/drawing/2010/main" xmlns="" w="9525">
+                  <a14:hiddenLine xmlns="" xmlns:a14="http://schemas.microsoft.com/office/drawing/2010/main" w="9525">
                     <a:solidFill>
                       <a:srgbClr val="000000"/>
                     </a:solidFill>
@@ -10060,7 +10061,7 @@
               </a:ln>
               <a:extLst>
                 <a:ext uri="{91240B29-F687-4f45-9708-019B960494DF}">
-                  <a14:hiddenLine xmlns:a14="http://schemas.microsoft.com/office/drawing/2010/main" xmlns="" w="9525">
+                  <a14:hiddenLine xmlns="" xmlns:a14="http://schemas.microsoft.com/office/drawing/2010/main" w="9525">
                     <a:solidFill>
                       <a:srgbClr val="000000"/>
                     </a:solidFill>
@@ -10150,7 +10151,7 @@
               </a:ln>
               <a:extLst>
                 <a:ext uri="{91240B29-F687-4f45-9708-019B960494DF}">
-                  <a14:hiddenLine xmlns:a14="http://schemas.microsoft.com/office/drawing/2010/main" xmlns="" w="9525">
+                  <a14:hiddenLine xmlns="" xmlns:a14="http://schemas.microsoft.com/office/drawing/2010/main" w="9525">
                     <a:solidFill>
                       <a:srgbClr val="000000"/>
                     </a:solidFill>
@@ -10240,7 +10241,7 @@
               </a:ln>
               <a:extLst>
                 <a:ext uri="{91240B29-F687-4f45-9708-019B960494DF}">
-                  <a14:hiddenLine xmlns:a14="http://schemas.microsoft.com/office/drawing/2010/main" xmlns="" w="9525">
+                  <a14:hiddenLine xmlns="" xmlns:a14="http://schemas.microsoft.com/office/drawing/2010/main" w="9525">
                     <a:solidFill>
                       <a:srgbClr val="000000"/>
                     </a:solidFill>
@@ -10302,7 +10303,7 @@
               </a:ln>
               <a:extLst>
                 <a:ext uri="{91240B29-F687-4f45-9708-019B960494DF}">
-                  <a14:hiddenLine xmlns:a14="http://schemas.microsoft.com/office/drawing/2010/main" xmlns="" w="9525">
+                  <a14:hiddenLine xmlns="" xmlns:a14="http://schemas.microsoft.com/office/drawing/2010/main" w="9525">
                     <a:solidFill>
                       <a:srgbClr val="000000"/>
                     </a:solidFill>
@@ -10412,7 +10413,7 @@
               </a:ln>
               <a:extLst>
                 <a:ext uri="{91240B29-F687-4f45-9708-019B960494DF}">
-                  <a14:hiddenLine xmlns:a14="http://schemas.microsoft.com/office/drawing/2010/main" xmlns="" w="9525">
+                  <a14:hiddenLine xmlns="" xmlns:a14="http://schemas.microsoft.com/office/drawing/2010/main" w="9525">
                     <a:solidFill>
                       <a:srgbClr val="000000"/>
                     </a:solidFill>
@@ -10496,7 +10497,7 @@
               </a:ln>
               <a:extLst>
                 <a:ext uri="{91240B29-F687-4f45-9708-019B960494DF}">
-                  <a14:hiddenLine xmlns:a14="http://schemas.microsoft.com/office/drawing/2010/main" xmlns="" w="9525">
+                  <a14:hiddenLine xmlns="" xmlns:a14="http://schemas.microsoft.com/office/drawing/2010/main" w="9525">
                     <a:solidFill>
                       <a:srgbClr val="000000"/>
                     </a:solidFill>
@@ -10558,7 +10559,7 @@
               </a:ln>
               <a:extLst>
                 <a:ext uri="{91240B29-F687-4f45-9708-019B960494DF}">
-                  <a14:hiddenLine xmlns:a14="http://schemas.microsoft.com/office/drawing/2010/main" xmlns="" w="9525">
+                  <a14:hiddenLine xmlns="" xmlns:a14="http://schemas.microsoft.com/office/drawing/2010/main" w="9525">
                     <a:solidFill>
                       <a:srgbClr val="000000"/>
                     </a:solidFill>
@@ -10620,7 +10621,7 @@
               </a:ln>
               <a:extLst>
                 <a:ext uri="{91240B29-F687-4f45-9708-019B960494DF}">
-                  <a14:hiddenLine xmlns:a14="http://schemas.microsoft.com/office/drawing/2010/main" xmlns="" w="9525">
+                  <a14:hiddenLine xmlns="" xmlns:a14="http://schemas.microsoft.com/office/drawing/2010/main" w="9525">
                     <a:solidFill>
                       <a:srgbClr val="000000"/>
                     </a:solidFill>
@@ -10710,7 +10711,7 @@
               </a:ln>
               <a:extLst>
                 <a:ext uri="{91240B29-F687-4f45-9708-019B960494DF}">
-                  <a14:hiddenLine xmlns:a14="http://schemas.microsoft.com/office/drawing/2010/main" xmlns="" w="9525">
+                  <a14:hiddenLine xmlns="" xmlns:a14="http://schemas.microsoft.com/office/drawing/2010/main" w="9525">
                     <a:solidFill>
                       <a:srgbClr val="000000"/>
                     </a:solidFill>
@@ -10744,7 +10745,7 @@
               </a:ln>
               <a:extLst>
                 <a:ext uri="{91240B29-F687-4f45-9708-019B960494DF}">
-                  <a14:hiddenLine xmlns:a14="http://schemas.microsoft.com/office/drawing/2010/main" xmlns="" w="9525">
+                  <a14:hiddenLine xmlns="" xmlns:a14="http://schemas.microsoft.com/office/drawing/2010/main" w="9525">
                     <a:solidFill>
                       <a:srgbClr val="000000"/>
                     </a:solidFill>
@@ -10809,7 +10810,7 @@
               </a:ln>
               <a:extLst>
                 <a:ext uri="{91240B29-F687-4f45-9708-019B960494DF}">
-                  <a14:hiddenLine xmlns:a14="http://schemas.microsoft.com/office/drawing/2010/main" xmlns="" w="9525">
+                  <a14:hiddenLine xmlns="" xmlns:a14="http://schemas.microsoft.com/office/drawing/2010/main" w="9525">
                     <a:solidFill>
                       <a:srgbClr val="000000"/>
                     </a:solidFill>
@@ -10899,7 +10900,7 @@
               </a:ln>
               <a:extLst>
                 <a:ext uri="{91240B29-F687-4f45-9708-019B960494DF}">
-                  <a14:hiddenLine xmlns:a14="http://schemas.microsoft.com/office/drawing/2010/main" xmlns="" w="9525">
+                  <a14:hiddenLine xmlns="" xmlns:a14="http://schemas.microsoft.com/office/drawing/2010/main" w="9525">
                     <a:solidFill>
                       <a:srgbClr val="000000"/>
                     </a:solidFill>
@@ -10961,7 +10962,7 @@
               </a:ln>
               <a:extLst>
                 <a:ext uri="{91240B29-F687-4f45-9708-019B960494DF}">
-                  <a14:hiddenLine xmlns:a14="http://schemas.microsoft.com/office/drawing/2010/main" xmlns="" w="9525">
+                  <a14:hiddenLine xmlns="" xmlns:a14="http://schemas.microsoft.com/office/drawing/2010/main" w="9525">
                     <a:solidFill>
                       <a:srgbClr val="000000"/>
                     </a:solidFill>
@@ -11051,7 +11052,7 @@
               </a:ln>
               <a:extLst>
                 <a:ext uri="{91240B29-F687-4f45-9708-019B960494DF}">
-                  <a14:hiddenLine xmlns:a14="http://schemas.microsoft.com/office/drawing/2010/main" xmlns="" w="9525">
+                  <a14:hiddenLine xmlns="" xmlns:a14="http://schemas.microsoft.com/office/drawing/2010/main" w="9525">
                     <a:solidFill>
                       <a:srgbClr val="000000"/>
                     </a:solidFill>
@@ -11116,7 +11117,7 @@
               </a:ln>
               <a:extLst>
                 <a:ext uri="{91240B29-F687-4f45-9708-019B960494DF}">
-                  <a14:hiddenLine xmlns:a14="http://schemas.microsoft.com/office/drawing/2010/main" xmlns="" w="9525">
+                  <a14:hiddenLine xmlns="" xmlns:a14="http://schemas.microsoft.com/office/drawing/2010/main" w="9525">
                     <a:solidFill>
                       <a:srgbClr val="000000"/>
                     </a:solidFill>
@@ -11178,7 +11179,7 @@
               </a:ln>
               <a:extLst>
                 <a:ext uri="{91240B29-F687-4f45-9708-019B960494DF}">
-                  <a14:hiddenLine xmlns:a14="http://schemas.microsoft.com/office/drawing/2010/main" xmlns="" w="9525">
+                  <a14:hiddenLine xmlns="" xmlns:a14="http://schemas.microsoft.com/office/drawing/2010/main" w="9525">
                     <a:solidFill>
                       <a:srgbClr val="000000"/>
                     </a:solidFill>
@@ -11268,7 +11269,7 @@
               </a:ln>
               <a:extLst>
                 <a:ext uri="{91240B29-F687-4f45-9708-019B960494DF}">
-                  <a14:hiddenLine xmlns:a14="http://schemas.microsoft.com/office/drawing/2010/main" xmlns="" w="9525">
+                  <a14:hiddenLine xmlns="" xmlns:a14="http://schemas.microsoft.com/office/drawing/2010/main" w="9525">
                     <a:solidFill>
                       <a:srgbClr val="000000"/>
                     </a:solidFill>
@@ -11358,7 +11359,7 @@
               </a:ln>
               <a:extLst>
                 <a:ext uri="{91240B29-F687-4f45-9708-019B960494DF}">
-                  <a14:hiddenLine xmlns:a14="http://schemas.microsoft.com/office/drawing/2010/main" xmlns="" w="9525">
+                  <a14:hiddenLine xmlns="" xmlns:a14="http://schemas.microsoft.com/office/drawing/2010/main" w="9525">
                     <a:solidFill>
                       <a:srgbClr val="000000"/>
                     </a:solidFill>
@@ -11423,7 +11424,7 @@
               </a:ln>
               <a:extLst>
                 <a:ext uri="{91240B29-F687-4f45-9708-019B960494DF}">
-                  <a14:hiddenLine xmlns:a14="http://schemas.microsoft.com/office/drawing/2010/main" xmlns="" w="9525">
+                  <a14:hiddenLine xmlns="" xmlns:a14="http://schemas.microsoft.com/office/drawing/2010/main" w="9525">
                     <a:solidFill>
                       <a:srgbClr val="000000"/>
                     </a:solidFill>
@@ -11543,7 +11544,7 @@
               </a:ln>
               <a:extLst>
                 <a:ext uri="{91240B29-F687-4f45-9708-019B960494DF}">
-                  <a14:hiddenLine xmlns:a14="http://schemas.microsoft.com/office/drawing/2010/main" xmlns="" w="9525">
+                  <a14:hiddenLine xmlns="" xmlns:a14="http://schemas.microsoft.com/office/drawing/2010/main" w="9525">
                     <a:solidFill>
                       <a:srgbClr val="000000"/>
                     </a:solidFill>
@@ -11624,7 +11625,7 @@
               </a:ln>
               <a:extLst>
                 <a:ext uri="{91240B29-F687-4f45-9708-019B960494DF}">
-                  <a14:hiddenLine xmlns:a14="http://schemas.microsoft.com/office/drawing/2010/main" xmlns="" w="9525">
+                  <a14:hiddenLine xmlns="" xmlns:a14="http://schemas.microsoft.com/office/drawing/2010/main" w="9525">
                     <a:solidFill>
                       <a:srgbClr val="000000"/>
                     </a:solidFill>
@@ -11739,7 +11740,7 @@
               </a:ln>
               <a:extLst>
                 <a:ext uri="{91240B29-F687-4f45-9708-019B960494DF}">
-                  <a14:hiddenLine xmlns:a14="http://schemas.microsoft.com/office/drawing/2010/main" xmlns="" w="9525">
+                  <a14:hiddenLine xmlns="" xmlns:a14="http://schemas.microsoft.com/office/drawing/2010/main" w="9525">
                     <a:solidFill>
                       <a:srgbClr val="000000"/>
                     </a:solidFill>
@@ -11829,7 +11830,7 @@
               </a:ln>
               <a:extLst>
                 <a:ext uri="{91240B29-F687-4f45-9708-019B960494DF}">
-                  <a14:hiddenLine xmlns:a14="http://schemas.microsoft.com/office/drawing/2010/main" xmlns="" w="9525">
+                  <a14:hiddenLine xmlns="" xmlns:a14="http://schemas.microsoft.com/office/drawing/2010/main" w="9525">
                     <a:solidFill>
                       <a:srgbClr val="000000"/>
                     </a:solidFill>
@@ -11894,7 +11895,7 @@
               </a:ln>
               <a:extLst>
                 <a:ext uri="{91240B29-F687-4f45-9708-019B960494DF}">
-                  <a14:hiddenLine xmlns:a14="http://schemas.microsoft.com/office/drawing/2010/main" xmlns="" w="9525">
+                  <a14:hiddenLine xmlns="" xmlns:a14="http://schemas.microsoft.com/office/drawing/2010/main" w="9525">
                     <a:solidFill>
                       <a:srgbClr val="000000"/>
                     </a:solidFill>
@@ -11984,7 +11985,7 @@
               </a:ln>
               <a:extLst>
                 <a:ext uri="{91240B29-F687-4f45-9708-019B960494DF}">
-                  <a14:hiddenLine xmlns:a14="http://schemas.microsoft.com/office/drawing/2010/main" xmlns="" w="9525">
+                  <a14:hiddenLine xmlns="" xmlns:a14="http://schemas.microsoft.com/office/drawing/2010/main" w="9525">
                     <a:solidFill>
                       <a:srgbClr val="000000"/>
                     </a:solidFill>
@@ -12052,7 +12053,7 @@
               </a:ln>
               <a:extLst>
                 <a:ext uri="{91240B29-F687-4f45-9708-019B960494DF}">
-                  <a14:hiddenLine xmlns:a14="http://schemas.microsoft.com/office/drawing/2010/main" xmlns="" w="9525">
+                  <a14:hiddenLine xmlns="" xmlns:a14="http://schemas.microsoft.com/office/drawing/2010/main" w="9525">
                     <a:solidFill>
                       <a:srgbClr val="000000"/>
                     </a:solidFill>
@@ -12142,7 +12143,7 @@
               </a:ln>
               <a:extLst>
                 <a:ext uri="{91240B29-F687-4f45-9708-019B960494DF}">
-                  <a14:hiddenLine xmlns:a14="http://schemas.microsoft.com/office/drawing/2010/main" xmlns="" w="9525">
+                  <a14:hiddenLine xmlns="" xmlns:a14="http://schemas.microsoft.com/office/drawing/2010/main" w="9525">
                     <a:solidFill>
                       <a:srgbClr val="000000"/>
                     </a:solidFill>
@@ -12210,7 +12211,7 @@
               </a:ln>
               <a:extLst>
                 <a:ext uri="{91240B29-F687-4f45-9708-019B960494DF}">
-                  <a14:hiddenLine xmlns:a14="http://schemas.microsoft.com/office/drawing/2010/main" xmlns="" w="9525">
+                  <a14:hiddenLine xmlns="" xmlns:a14="http://schemas.microsoft.com/office/drawing/2010/main" w="9525">
                     <a:solidFill>
                       <a:srgbClr val="000000"/>
                     </a:solidFill>
@@ -12300,7 +12301,7 @@
               </a:ln>
               <a:extLst>
                 <a:ext uri="{91240B29-F687-4f45-9708-019B960494DF}">
-                  <a14:hiddenLine xmlns:a14="http://schemas.microsoft.com/office/drawing/2010/main" xmlns="" w="9525">
+                  <a14:hiddenLine xmlns="" xmlns:a14="http://schemas.microsoft.com/office/drawing/2010/main" w="9525">
                     <a:solidFill>
                       <a:srgbClr val="000000"/>
                     </a:solidFill>
@@ -12334,7 +12335,7 @@
               </a:ln>
               <a:extLst>
                 <a:ext uri="{91240B29-F687-4f45-9708-019B960494DF}">
-                  <a14:hiddenLine xmlns:a14="http://schemas.microsoft.com/office/drawing/2010/main" xmlns="" w="9525">
+                  <a14:hiddenLine xmlns="" xmlns:a14="http://schemas.microsoft.com/office/drawing/2010/main" w="9525">
                     <a:solidFill>
                       <a:srgbClr val="000000"/>
                     </a:solidFill>
@@ -12474,7 +12475,7 @@
           <a:p>
             <a:fld id="{92FF8978-FE14-CC4A-93A6-934EB06543C0}" type="datetime1">
               <a:rPr lang="en-US" smtClean="0"/>
-              <a:t>9/21/26</a:t>
+              <a:t>9/24/26</a:t>
             </a:fld>
             <a:endParaRPr lang="en-US"/>
           </a:p>
@@ -13485,6 +13486,293 @@
   <p:cSld>
     <p:spTree>
       <p:nvGrpSpPr>
+        <p:cNvPr id="1" name="">
+          <a:extLst>
+            <a:ext uri="{FF2B5EF4-FFF2-40B4-BE49-F238E27FC236}">
+              <a16:creationId xmlns:a16="http://schemas.microsoft.com/office/drawing/2014/main" id="{81F345D5-A940-D9D4-B5C4-5763246CE786}"/>
+            </a:ext>
+          </a:extLst>
+        </p:cNvPr>
+        <p:cNvGrpSpPr/>
+        <p:nvPr/>
+      </p:nvGrpSpPr>
+      <p:grpSpPr>
+        <a:xfrm>
+          <a:off x="0" y="0"/>
+          <a:ext cx="0" cy="0"/>
+          <a:chOff x="0" y="0"/>
+          <a:chExt cx="0" cy="0"/>
+        </a:xfrm>
+      </p:grpSpPr>
+      <p:sp>
+        <p:nvSpPr>
+          <p:cNvPr id="6146" name="Rectangle 2">
+            <a:extLst>
+              <a:ext uri="{FF2B5EF4-FFF2-40B4-BE49-F238E27FC236}">
+                <a16:creationId xmlns:a16="http://schemas.microsoft.com/office/drawing/2014/main" id="{B768AEF2-414F-377F-6BA6-07B3ACC80F4B}"/>
+              </a:ext>
+            </a:extLst>
+          </p:cNvPr>
+          <p:cNvSpPr>
+            <a:spLocks noGrp="1" noChangeArrowheads="1"/>
+          </p:cNvSpPr>
+          <p:nvPr>
+            <p:ph type="title"/>
+            <p:custDataLst>
+              <p:tags r:id="rId1"/>
+            </p:custDataLst>
+          </p:nvPr>
+        </p:nvSpPr>
+        <p:spPr>
+          <a:xfrm>
+            <a:off x="1141413" y="284084"/>
+            <a:ext cx="9905998" cy="620791"/>
+          </a:xfrm>
+        </p:spPr>
+        <p:txBody>
+          <a:bodyPr/>
+          <a:lstStyle/>
+          <a:p>
+            <a:pPr algn="ctr"/>
+            <a:r>
+              <a:rPr lang="en-US" dirty="0"/>
+              <a:t>Lecture 10 - Thursday, Sep. 24</a:t>
+            </a:r>
+          </a:p>
+        </p:txBody>
+      </p:sp>
+      <p:sp>
+        <p:nvSpPr>
+          <p:cNvPr id="6147" name="Rectangle 3">
+            <a:extLst>
+              <a:ext uri="{FF2B5EF4-FFF2-40B4-BE49-F238E27FC236}">
+                <a16:creationId xmlns:a16="http://schemas.microsoft.com/office/drawing/2014/main" id="{2EF9F8FD-27B6-A362-EADF-4FC308C3CDCC}"/>
+              </a:ext>
+            </a:extLst>
+          </p:cNvPr>
+          <p:cNvSpPr>
+            <a:spLocks noGrp="1" noChangeArrowheads="1"/>
+          </p:cNvSpPr>
+          <p:nvPr>
+            <p:ph idx="1"/>
+            <p:custDataLst>
+              <p:tags r:id="rId2"/>
+            </p:custDataLst>
+          </p:nvPr>
+        </p:nvSpPr>
+        <p:spPr>
+          <a:xfrm>
+            <a:off x="1294151" y="1098548"/>
+            <a:ext cx="9600522" cy="5475367"/>
+          </a:xfrm>
+        </p:spPr>
+        <p:txBody>
+          <a:bodyPr>
+            <a:normAutofit fontScale="70000" lnSpcReduction="20000"/>
+          </a:bodyPr>
+          <a:lstStyle/>
+          <a:p>
+            <a:r>
+              <a:rPr lang="en-US" dirty="0">
+                <a:latin typeface="Arial" panose="020B0604020202020204" pitchFamily="34" charset="0"/>
+                <a:cs typeface="Arial" panose="020B0604020202020204" pitchFamily="34" charset="0"/>
+              </a:rPr>
+              <a:t>Please remember </a:t>
+            </a:r>
+            <a:r>
+              <a:rPr lang="en-US" b="1" i="1" u="sng" dirty="0">
+                <a:latin typeface="Arial" panose="020B0604020202020204" pitchFamily="34" charset="0"/>
+                <a:cs typeface="Arial" panose="020B0604020202020204" pitchFamily="34" charset="0"/>
+              </a:rPr>
+              <a:t>no laptops / phones</a:t>
+            </a:r>
+            <a:r>
+              <a:rPr lang="en-US" dirty="0">
+                <a:latin typeface="Arial" panose="020B0604020202020204" pitchFamily="34" charset="0"/>
+                <a:cs typeface="Arial" panose="020B0604020202020204" pitchFamily="34" charset="0"/>
+              </a:rPr>
+              <a:t> and </a:t>
+            </a:r>
+            <a:r>
+              <a:rPr lang="en-US" b="1" i="1" u="sng" dirty="0">
+                <a:latin typeface="Arial" panose="020B0604020202020204" pitchFamily="34" charset="0"/>
+                <a:cs typeface="Arial" panose="020B0604020202020204" pitchFamily="34" charset="0"/>
+              </a:rPr>
+              <a:t>attendance policy</a:t>
+            </a:r>
+            <a:endParaRPr lang="en-US" dirty="0">
+              <a:latin typeface="Arial" panose="020B0604020202020204" pitchFamily="34" charset="0"/>
+              <a:cs typeface="Arial" panose="020B0604020202020204" pitchFamily="34" charset="0"/>
+            </a:endParaRPr>
+          </a:p>
+          <a:p>
+            <a:r>
+              <a:rPr lang="en-US" dirty="0">
+                <a:latin typeface="Arial" panose="020B0604020202020204" pitchFamily="34" charset="0"/>
+                <a:cs typeface="Arial" panose="020B0604020202020204" pitchFamily="34" charset="0"/>
+              </a:rPr>
+              <a:t>This week:</a:t>
+            </a:r>
+          </a:p>
+          <a:p>
+            <a:pPr lvl="1"/>
+            <a:r>
+              <a:rPr lang="en-US" dirty="0">
+                <a:latin typeface="Arial" panose="020B0604020202020204" pitchFamily="34" charset="0"/>
+                <a:cs typeface="Arial" panose="020B0604020202020204" pitchFamily="34" charset="0"/>
+              </a:rPr>
+              <a:t>Quiz 1 is </a:t>
+            </a:r>
+            <a:r>
+              <a:rPr lang="en-US" dirty="0" err="1">
+                <a:latin typeface="Arial" panose="020B0604020202020204" pitchFamily="34" charset="0"/>
+                <a:cs typeface="Arial" panose="020B0604020202020204" pitchFamily="34" charset="0"/>
+              </a:rPr>
+              <a:t>Mon,Tue,Wed</a:t>
+            </a:r>
+            <a:r>
+              <a:rPr lang="en-US" dirty="0">
+                <a:latin typeface="Arial" panose="020B0604020202020204" pitchFamily="34" charset="0"/>
+                <a:cs typeface="Arial" panose="020B0604020202020204" pitchFamily="34" charset="0"/>
+              </a:rPr>
+              <a:t> at CBTF (good luck!)</a:t>
+            </a:r>
+          </a:p>
+          <a:p>
+            <a:pPr lvl="1"/>
+            <a:r>
+              <a:rPr lang="en-US" dirty="0">
+                <a:latin typeface="Arial" panose="020B0604020202020204" pitchFamily="34" charset="0"/>
+                <a:cs typeface="Arial" panose="020B0604020202020204" pitchFamily="34" charset="0"/>
+              </a:rPr>
+              <a:t>Mod. 1 Programming Assignment is due TONIGHT!</a:t>
+            </a:r>
+          </a:p>
+          <a:p>
+            <a:r>
+              <a:rPr lang="en-US" dirty="0">
+                <a:latin typeface="Arial" panose="020B0604020202020204" pitchFamily="34" charset="0"/>
+                <a:cs typeface="Arial" panose="020B0604020202020204" pitchFamily="34" charset="0"/>
+              </a:rPr>
+              <a:t>Module 1 Quiz</a:t>
+            </a:r>
+          </a:p>
+          <a:p>
+            <a:pPr lvl="1"/>
+            <a:r>
+              <a:rPr lang="en-US" dirty="0">
+                <a:latin typeface="Arial" panose="020B0604020202020204" pitchFamily="34" charset="0"/>
+                <a:cs typeface="Arial" panose="020B0604020202020204" pitchFamily="34" charset="0"/>
+              </a:rPr>
+              <a:t>Is done! How did it go?</a:t>
+            </a:r>
+          </a:p>
+          <a:p>
+            <a:pPr lvl="1"/>
+            <a:r>
+              <a:rPr lang="en-US" dirty="0">
+                <a:latin typeface="Arial" panose="020B0604020202020204" pitchFamily="34" charset="0"/>
+                <a:cs typeface="Arial" panose="020B0604020202020204" pitchFamily="34" charset="0"/>
+              </a:rPr>
+              <a:t>We need to grade one question manually. Grades will be returned next Thursday.</a:t>
+            </a:r>
+          </a:p>
+          <a:p>
+            <a:pPr lvl="1"/>
+            <a:r>
+              <a:rPr lang="en-US" dirty="0">
+                <a:latin typeface="Arial" panose="020B0604020202020204" pitchFamily="34" charset="0"/>
+                <a:cs typeface="Arial" panose="020B0604020202020204" pitchFamily="34" charset="0"/>
+              </a:rPr>
+              <a:t>Need to brainstorm a regrades process which I will notify you about eventually</a:t>
+            </a:r>
+          </a:p>
+          <a:p>
+            <a:pPr lvl="1"/>
+            <a:r>
+              <a:rPr lang="en-US" dirty="0">
+                <a:latin typeface="Arial" panose="020B0604020202020204" pitchFamily="34" charset="0"/>
+                <a:cs typeface="Arial" panose="020B0604020202020204" pitchFamily="34" charset="0"/>
+              </a:rPr>
+              <a:t>You may have seen signups open for a makeup tomorrow. That is for students with prior permission only!</a:t>
+            </a:r>
+          </a:p>
+          <a:p>
+            <a:r>
+              <a:rPr lang="en-US" dirty="0">
+                <a:latin typeface="Arial" panose="020B0604020202020204" pitchFamily="34" charset="0"/>
+                <a:cs typeface="Arial" panose="020B0604020202020204" pitchFamily="34" charset="0"/>
+              </a:rPr>
+              <a:t>Mod. 1 homework is being graded right now. </a:t>
+            </a:r>
+          </a:p>
+          <a:p>
+            <a:pPr lvl="1"/>
+            <a:r>
+              <a:rPr lang="en-US" dirty="0">
+                <a:latin typeface="Arial" panose="020B0604020202020204" pitchFamily="34" charset="0"/>
+                <a:cs typeface="Arial" panose="020B0604020202020204" pitchFamily="34" charset="0"/>
+              </a:rPr>
+              <a:t>Should be able to get that back to you shortly…</a:t>
+            </a:r>
+          </a:p>
+          <a:p>
+            <a:r>
+              <a:rPr lang="en-US" dirty="0">
+                <a:latin typeface="Arial" panose="020B0604020202020204" pitchFamily="34" charset="0"/>
+                <a:cs typeface="Arial" panose="020B0604020202020204" pitchFamily="34" charset="0"/>
+              </a:rPr>
+              <a:t>OH Check-Ins</a:t>
+            </a:r>
+          </a:p>
+          <a:p>
+            <a:pPr lvl="1"/>
+            <a:r>
+              <a:rPr lang="en-US" dirty="0">
+                <a:latin typeface="Arial" panose="020B0604020202020204" pitchFamily="34" charset="0"/>
+                <a:cs typeface="Arial" panose="020B0604020202020204" pitchFamily="34" charset="0"/>
+              </a:rPr>
+              <a:t>We have started working on the schedule for this. Stay tuned but be ready for this to begin very soon!</a:t>
+            </a:r>
+          </a:p>
+          <a:p>
+            <a:r>
+              <a:rPr lang="en-US" dirty="0">
+                <a:latin typeface="Arial" panose="020B0604020202020204" pitchFamily="34" charset="0"/>
+                <a:cs typeface="Arial" panose="020B0604020202020204" pitchFamily="34" charset="0"/>
+              </a:rPr>
+              <a:t>These slides are linked on the course webpage “slides” page.</a:t>
+            </a:r>
+          </a:p>
+          <a:p>
+            <a:r>
+              <a:rPr lang="en-US" dirty="0">
+                <a:latin typeface="Arial" panose="020B0604020202020204" pitchFamily="34" charset="0"/>
+                <a:cs typeface="Arial" panose="020B0604020202020204" pitchFamily="34" charset="0"/>
+              </a:rPr>
+              <a:t>Today we will continue with Module 2 – Context-Free Grammars.</a:t>
+            </a:r>
+          </a:p>
+        </p:txBody>
+      </p:sp>
+    </p:spTree>
+    <p:extLst>
+      <p:ext uri="{BB962C8B-B14F-4D97-AF65-F5344CB8AC3E}">
+        <p14:creationId xmlns:p14="http://schemas.microsoft.com/office/powerpoint/2010/main" val="2034906325"/>
+      </p:ext>
+    </p:extLst>
+  </p:cSld>
+  <p:clrMapOvr>
+    <a:masterClrMapping/>
+  </p:clrMapOvr>
+</p:sld>
+</file>
+
+<file path=ppt/slides/slide13.xml><?xml version="1.0" encoding="utf-8"?>
+<p:sld xmlns:a="http://schemas.openxmlformats.org/drawingml/2006/main" xmlns:r="http://schemas.openxmlformats.org/officeDocument/2006/relationships" xmlns:p="http://schemas.openxmlformats.org/presentationml/2006/main">
+  <p:cSld>
+    <p:spTree>
+      <p:nvGrpSpPr>
         <p:cNvPr id="1" name=""/>
         <p:cNvGrpSpPr/>
         <p:nvPr/>
@@ -13821,7 +14109,7 @@
           <p:nvPr>
             <p:extLst>
               <p:ext uri="{D42A27DB-BD31-4B8C-83A1-F6EECF244321}">
-                <p14:modId xmlns:p14="http://schemas.microsoft.com/office/powerpoint/2010/main" val="1113002690"/>
+                <p14:modId xmlns:p14="http://schemas.microsoft.com/office/powerpoint/2010/main" val="1470152519"/>
               </p:ext>
             </p:extLst>
           </p:nvPr>
@@ -13917,7 +14205,7 @@
                       <a:pPr algn="ctr"/>
                       <a:r>
                         <a:rPr lang="en-US" i="0" dirty="0"/>
-                        <a:t>8</a:t>
+                        <a:t>9</a:t>
                       </a:r>
                     </a:p>
                   </a:txBody>
@@ -13931,7 +14219,7 @@
                       <a:pPr algn="ctr"/>
                       <a:r>
                         <a:rPr lang="en-US" i="0" dirty="0"/>
-                        <a:t>8</a:t>
+                        <a:t>9</a:t>
                       </a:r>
                     </a:p>
                   </a:txBody>
@@ -13976,7 +14264,7 @@
           <p:nvPr>
             <p:extLst>
               <p:ext uri="{D42A27DB-BD31-4B8C-83A1-F6EECF244321}">
-                <p14:modId xmlns:p14="http://schemas.microsoft.com/office/powerpoint/2010/main" val="3226694611"/>
+                <p14:modId xmlns:p14="http://schemas.microsoft.com/office/powerpoint/2010/main" val="287354998"/>
               </p:ext>
             </p:extLst>
           </p:nvPr>
@@ -14185,7 +14473,7 @@
                       <a:pPr algn="ctr"/>
                       <a:r>
                         <a:rPr lang="en-US" dirty="0"/>
-                        <a:t>-</a:t>
+                        <a:t>195</a:t>
                       </a:r>
                     </a:p>
                   </a:txBody>
@@ -14199,7 +14487,7 @@
                       <a:pPr algn="ctr"/>
                       <a:r>
                         <a:rPr lang="en-US" b="0" i="0" dirty="0"/>
-                        <a:t>N/A</a:t>
+                        <a:t>40.00%</a:t>
                       </a:r>
                       <a:endParaRPr lang="en-US" b="0" dirty="0"/>
                     </a:p>
@@ -14490,7 +14778,7 @@
                       <a:pPr algn="ctr"/>
                       <a:r>
                         <a:rPr lang="en-US" b="1" dirty="0"/>
-                        <a:t>142</a:t>
+                        <a:t>220</a:t>
                       </a:r>
                     </a:p>
                   </a:txBody>
@@ -14504,7 +14792,7 @@
                       <a:pPr algn="ctr"/>
                       <a:r>
                         <a:rPr lang="en-US" b="1" dirty="0"/>
-                        <a:t>201</a:t>
+                        <a:t>396</a:t>
                       </a:r>
                     </a:p>
                   </a:txBody>
@@ -14518,7 +14806,7 @@
                       <a:pPr algn="ctr"/>
                       <a:r>
                         <a:rPr lang="en-US" b="1" i="0" dirty="0"/>
-                        <a:t>70.65%</a:t>
+                        <a:t>55.55%</a:t>
                       </a:r>
                       <a:endParaRPr lang="en-US" b="1" dirty="0"/>
                     </a:p>
@@ -15164,7 +15452,7 @@
           <p:nvPr>
             <p:extLst>
               <p:ext uri="{D42A27DB-BD31-4B8C-83A1-F6EECF244321}">
-                <p14:modId xmlns:p14="http://schemas.microsoft.com/office/powerpoint/2010/main" val="105119426"/>
+                <p14:modId xmlns:p14="http://schemas.microsoft.com/office/powerpoint/2010/main" val="2330738710"/>
               </p:ext>
             </p:extLst>
           </p:nvPr>
@@ -15260,7 +15548,7 @@
                       <a:pPr algn="ctr"/>
                       <a:r>
                         <a:rPr lang="en-US" i="0" dirty="0"/>
-                        <a:t>8</a:t>
+                        <a:t>9</a:t>
                       </a:r>
                     </a:p>
                   </a:txBody>
@@ -15274,7 +15562,7 @@
                       <a:pPr algn="ctr"/>
                       <a:r>
                         <a:rPr lang="en-US" i="0" dirty="0"/>
-                        <a:t>8</a:t>
+                        <a:t>9</a:t>
                       </a:r>
                     </a:p>
                   </a:txBody>
@@ -17815,6 +18103,18 @@
 </file>
 
 <file path=ppt/tags/tag26.xml><?xml version="1.0" encoding="utf-8"?>
+<p:tagLst xmlns:a="http://schemas.openxmlformats.org/drawingml/2006/main" xmlns:r="http://schemas.openxmlformats.org/officeDocument/2006/relationships" xmlns:p="http://schemas.openxmlformats.org/presentationml/2006/main">
+  <p:tag name="_INSTRUCTOR VIEW19C14C36-AC8E-43BC-9DB6-C2AAF774C7DC|PANE__TAG" val="_"/>
+</p:tagLst>
+</file>
+
+<file path=ppt/tags/tag27.xml><?xml version="1.0" encoding="utf-8"?>
+<p:tagLst xmlns:a="http://schemas.openxmlformats.org/drawingml/2006/main" xmlns:r="http://schemas.openxmlformats.org/officeDocument/2006/relationships" xmlns:p="http://schemas.openxmlformats.org/presentationml/2006/main">
+  <p:tag name="_INSTRUCTOR VIEW19C14C36-AC8E-43BC-9DB6-C2AAF774C7DC|PANE__TAG" val="_"/>
+</p:tagLst>
+</file>
+
+<file path=ppt/tags/tag28.xml><?xml version="1.0" encoding="utf-8"?>
 <p:tagLst xmlns:a="http://schemas.openxmlformats.org/drawingml/2006/main" xmlns:r="http://schemas.openxmlformats.org/officeDocument/2006/relationships" xmlns:p="http://schemas.openxmlformats.org/presentationml/2006/main">
   <p:tag name="_INSTRUCTOR VIEW19C14C36-AC8E-43BC-9DB6-C2AAF774C7DC|PANE__TAG" val="_"/>
 </p:tagLst>

--- a/slides/00-DailyAnnouncements.pptx
+++ b/slides/00-DailyAnnouncements.pptx
@@ -5,7 +5,7 @@
     <p:sldMasterId id="2147484006" r:id="rId1"/>
   </p:sldMasterIdLst>
   <p:notesMasterIdLst>
-    <p:notesMasterId r:id="rId15"/>
+    <p:notesMasterId r:id="rId16"/>
   </p:notesMasterIdLst>
   <p:sldIdLst>
     <p:sldId id="256" r:id="rId2"/>
@@ -20,7 +20,8 @@
     <p:sldId id="523" r:id="rId11"/>
     <p:sldId id="524" r:id="rId12"/>
     <p:sldId id="525" r:id="rId13"/>
-    <p:sldId id="515" r:id="rId14"/>
+    <p:sldId id="526" r:id="rId14"/>
+    <p:sldId id="515" r:id="rId15"/>
   </p:sldIdLst>
   <p:sldSz cx="12192000" cy="6858000"/>
   <p:notesSz cx="6858000" cy="9144000"/>
@@ -209,7 +210,7 @@
           <a:p>
             <a:fld id="{C5B45307-6ED4-B142-BD64-10F739779302}" type="datetimeFigureOut">
               <a:rPr lang="en-US" smtClean="0"/>
-              <a:t>9/24/26</a:t>
+              <a:t>9/28/26</a:t>
             </a:fld>
             <a:endParaRPr lang="en-US"/>
           </a:p>
@@ -617,7 +618,7 @@
           <a:noFill/>
           <a:extLst>
             <a:ext uri="{909E8E84-426E-40dd-AFC4-6F175D3DCCD1}">
-              <a14:hiddenFill xmlns="" xmlns:a14="http://schemas.microsoft.com/office/drawing/2010/main">
+              <a14:hiddenFill xmlns:a14="http://schemas.microsoft.com/office/drawing/2010/main" xmlns="">
                 <a:solidFill>
                   <a:srgbClr val="FFFFFF"/>
                 </a:solidFill>
@@ -676,7 +677,7 @@
             </a:ln>
             <a:extLst>
               <a:ext uri="{91240B29-F687-4f45-9708-019B960494DF}">
-                <a14:hiddenLine xmlns="" xmlns:a14="http://schemas.microsoft.com/office/drawing/2010/main" w="9525">
+                <a14:hiddenLine xmlns:a14="http://schemas.microsoft.com/office/drawing/2010/main" xmlns="" w="9525">
                   <a:solidFill>
                     <a:srgbClr val="000000"/>
                   </a:solidFill>
@@ -766,7 +767,7 @@
             </a:ln>
             <a:extLst>
               <a:ext uri="{91240B29-F687-4f45-9708-019B960494DF}">
-                <a14:hiddenLine xmlns="" xmlns:a14="http://schemas.microsoft.com/office/drawing/2010/main" w="9525">
+                <a14:hiddenLine xmlns:a14="http://schemas.microsoft.com/office/drawing/2010/main" xmlns="" w="9525">
                   <a:solidFill>
                     <a:srgbClr val="000000"/>
                   </a:solidFill>
@@ -856,7 +857,7 @@
             </a:ln>
             <a:extLst>
               <a:ext uri="{91240B29-F687-4f45-9708-019B960494DF}">
-                <a14:hiddenLine xmlns="" xmlns:a14="http://schemas.microsoft.com/office/drawing/2010/main" w="9525">
+                <a14:hiddenLine xmlns:a14="http://schemas.microsoft.com/office/drawing/2010/main" xmlns="" w="9525">
                   <a:solidFill>
                     <a:srgbClr val="000000"/>
                   </a:solidFill>
@@ -890,7 +891,7 @@
             </a:ln>
             <a:extLst>
               <a:ext uri="{91240B29-F687-4f45-9708-019B960494DF}">
-                <a14:hiddenLine xmlns="" xmlns:a14="http://schemas.microsoft.com/office/drawing/2010/main" w="9525">
+                <a14:hiddenLine xmlns:a14="http://schemas.microsoft.com/office/drawing/2010/main" xmlns="" w="9525">
                   <a:solidFill>
                     <a:srgbClr val="000000"/>
                   </a:solidFill>
@@ -980,7 +981,7 @@
             </a:ln>
             <a:extLst>
               <a:ext uri="{91240B29-F687-4f45-9708-019B960494DF}">
-                <a14:hiddenLine xmlns="" xmlns:a14="http://schemas.microsoft.com/office/drawing/2010/main" w="9525">
+                <a14:hiddenLine xmlns:a14="http://schemas.microsoft.com/office/drawing/2010/main" xmlns="" w="9525">
                   <a:solidFill>
                     <a:srgbClr val="000000"/>
                   </a:solidFill>
@@ -1042,7 +1043,7 @@
             </a:ln>
             <a:extLst>
               <a:ext uri="{91240B29-F687-4f45-9708-019B960494DF}">
-                <a14:hiddenLine xmlns="" xmlns:a14="http://schemas.microsoft.com/office/drawing/2010/main" w="9525">
+                <a14:hiddenLine xmlns:a14="http://schemas.microsoft.com/office/drawing/2010/main" xmlns="" w="9525">
                   <a:solidFill>
                     <a:srgbClr val="000000"/>
                   </a:solidFill>
@@ -1104,7 +1105,7 @@
             </a:ln>
             <a:extLst>
               <a:ext uri="{91240B29-F687-4f45-9708-019B960494DF}">
-                <a14:hiddenLine xmlns="" xmlns:a14="http://schemas.microsoft.com/office/drawing/2010/main" w="9525">
+                <a14:hiddenLine xmlns:a14="http://schemas.microsoft.com/office/drawing/2010/main" xmlns="" w="9525">
                   <a:solidFill>
                     <a:srgbClr val="000000"/>
                   </a:solidFill>
@@ -1194,7 +1195,7 @@
             </a:ln>
             <a:extLst>
               <a:ext uri="{91240B29-F687-4f45-9708-019B960494DF}">
-                <a14:hiddenLine xmlns="" xmlns:a14="http://schemas.microsoft.com/office/drawing/2010/main" w="9525">
+                <a14:hiddenLine xmlns:a14="http://schemas.microsoft.com/office/drawing/2010/main" xmlns="" w="9525">
                   <a:solidFill>
                     <a:srgbClr val="000000"/>
                   </a:solidFill>
@@ -1256,7 +1257,7 @@
             </a:ln>
             <a:extLst>
               <a:ext uri="{91240B29-F687-4f45-9708-019B960494DF}">
-                <a14:hiddenLine xmlns="" xmlns:a14="http://schemas.microsoft.com/office/drawing/2010/main" w="9525">
+                <a14:hiddenLine xmlns:a14="http://schemas.microsoft.com/office/drawing/2010/main" xmlns="" w="9525">
                   <a:solidFill>
                     <a:srgbClr val="000000"/>
                   </a:solidFill>
@@ -1318,7 +1319,7 @@
             </a:ln>
             <a:extLst>
               <a:ext uri="{91240B29-F687-4f45-9708-019B960494DF}">
-                <a14:hiddenLine xmlns="" xmlns:a14="http://schemas.microsoft.com/office/drawing/2010/main" w="9525">
+                <a14:hiddenLine xmlns:a14="http://schemas.microsoft.com/office/drawing/2010/main" xmlns="" w="9525">
                   <a:solidFill>
                     <a:srgbClr val="000000"/>
                   </a:solidFill>
@@ -1408,7 +1409,7 @@
             </a:ln>
             <a:extLst>
               <a:ext uri="{91240B29-F687-4f45-9708-019B960494DF}">
-                <a14:hiddenLine xmlns="" xmlns:a14="http://schemas.microsoft.com/office/drawing/2010/main" w="9525">
+                <a14:hiddenLine xmlns:a14="http://schemas.microsoft.com/office/drawing/2010/main" xmlns="" w="9525">
                   <a:solidFill>
                     <a:srgbClr val="000000"/>
                   </a:solidFill>
@@ -1498,7 +1499,7 @@
             </a:ln>
             <a:extLst>
               <a:ext uri="{91240B29-F687-4f45-9708-019B960494DF}">
-                <a14:hiddenLine xmlns="" xmlns:a14="http://schemas.microsoft.com/office/drawing/2010/main" w="9525">
+                <a14:hiddenLine xmlns:a14="http://schemas.microsoft.com/office/drawing/2010/main" xmlns="" w="9525">
                   <a:solidFill>
                     <a:srgbClr val="000000"/>
                   </a:solidFill>
@@ -1560,7 +1561,7 @@
             </a:ln>
             <a:extLst>
               <a:ext uri="{91240B29-F687-4f45-9708-019B960494DF}">
-                <a14:hiddenLine xmlns="" xmlns:a14="http://schemas.microsoft.com/office/drawing/2010/main" w="9525">
+                <a14:hiddenLine xmlns:a14="http://schemas.microsoft.com/office/drawing/2010/main" xmlns="" w="9525">
                   <a:solidFill>
                     <a:srgbClr val="000000"/>
                   </a:solidFill>
@@ -1670,7 +1671,7 @@
             </a:ln>
             <a:extLst>
               <a:ext uri="{91240B29-F687-4f45-9708-019B960494DF}">
-                <a14:hiddenLine xmlns="" xmlns:a14="http://schemas.microsoft.com/office/drawing/2010/main" w="9525">
+                <a14:hiddenLine xmlns:a14="http://schemas.microsoft.com/office/drawing/2010/main" xmlns="" w="9525">
                   <a:solidFill>
                     <a:srgbClr val="000000"/>
                   </a:solidFill>
@@ -1732,7 +1733,7 @@
             </a:ln>
             <a:extLst>
               <a:ext uri="{91240B29-F687-4f45-9708-019B960494DF}">
-                <a14:hiddenLine xmlns="" xmlns:a14="http://schemas.microsoft.com/office/drawing/2010/main" w="9525">
+                <a14:hiddenLine xmlns:a14="http://schemas.microsoft.com/office/drawing/2010/main" xmlns="" w="9525">
                   <a:solidFill>
                     <a:srgbClr val="000000"/>
                   </a:solidFill>
@@ -1822,7 +1823,7 @@
             </a:ln>
             <a:extLst>
               <a:ext uri="{91240B29-F687-4f45-9708-019B960494DF}">
-                <a14:hiddenLine xmlns="" xmlns:a14="http://schemas.microsoft.com/office/drawing/2010/main" w="9525">
+                <a14:hiddenLine xmlns:a14="http://schemas.microsoft.com/office/drawing/2010/main" xmlns="" w="9525">
                   <a:solidFill>
                     <a:srgbClr val="000000"/>
                   </a:solidFill>
@@ -1912,7 +1913,7 @@
             </a:ln>
             <a:extLst>
               <a:ext uri="{91240B29-F687-4f45-9708-019B960494DF}">
-                <a14:hiddenLine xmlns="" xmlns:a14="http://schemas.microsoft.com/office/drawing/2010/main" w="9525">
+                <a14:hiddenLine xmlns:a14="http://schemas.microsoft.com/office/drawing/2010/main" xmlns="" w="9525">
                   <a:solidFill>
                     <a:srgbClr val="000000"/>
                   </a:solidFill>
@@ -1974,7 +1975,7 @@
             </a:ln>
             <a:extLst>
               <a:ext uri="{91240B29-F687-4f45-9708-019B960494DF}">
-                <a14:hiddenLine xmlns="" xmlns:a14="http://schemas.microsoft.com/office/drawing/2010/main" w="9525">
+                <a14:hiddenLine xmlns:a14="http://schemas.microsoft.com/office/drawing/2010/main" xmlns="" w="9525">
                   <a:solidFill>
                     <a:srgbClr val="000000"/>
                   </a:solidFill>
@@ -2064,7 +2065,7 @@
             </a:ln>
             <a:extLst>
               <a:ext uri="{91240B29-F687-4f45-9708-019B960494DF}">
-                <a14:hiddenLine xmlns="" xmlns:a14="http://schemas.microsoft.com/office/drawing/2010/main" w="9525">
+                <a14:hiddenLine xmlns:a14="http://schemas.microsoft.com/office/drawing/2010/main" xmlns="" w="9525">
                   <a:solidFill>
                     <a:srgbClr val="000000"/>
                   </a:solidFill>
@@ -2154,7 +2155,7 @@
             </a:ln>
             <a:extLst>
               <a:ext uri="{91240B29-F687-4f45-9708-019B960494DF}">
-                <a14:hiddenLine xmlns="" xmlns:a14="http://schemas.microsoft.com/office/drawing/2010/main" w="9525">
+                <a14:hiddenLine xmlns:a14="http://schemas.microsoft.com/office/drawing/2010/main" xmlns="" w="9525">
                   <a:solidFill>
                     <a:srgbClr val="000000"/>
                   </a:solidFill>
@@ -2210,7 +2211,7 @@
             </a:ln>
             <a:extLst>
               <a:ext uri="{91240B29-F687-4f45-9708-019B960494DF}">
-                <a14:hiddenLine xmlns="" xmlns:a14="http://schemas.microsoft.com/office/drawing/2010/main" w="9525">
+                <a14:hiddenLine xmlns:a14="http://schemas.microsoft.com/office/drawing/2010/main" xmlns="" w="9525">
                   <a:solidFill>
                     <a:srgbClr val="000000"/>
                   </a:solidFill>
@@ -2300,7 +2301,7 @@
             </a:ln>
             <a:extLst>
               <a:ext uri="{91240B29-F687-4f45-9708-019B960494DF}">
-                <a14:hiddenLine xmlns="" xmlns:a14="http://schemas.microsoft.com/office/drawing/2010/main" w="9525">
+                <a14:hiddenLine xmlns:a14="http://schemas.microsoft.com/office/drawing/2010/main" xmlns="" w="9525">
                   <a:solidFill>
                     <a:srgbClr val="000000"/>
                   </a:solidFill>
@@ -2356,7 +2357,7 @@
             </a:ln>
             <a:extLst>
               <a:ext uri="{91240B29-F687-4f45-9708-019B960494DF}">
-                <a14:hiddenLine xmlns="" xmlns:a14="http://schemas.microsoft.com/office/drawing/2010/main" w="9525">
+                <a14:hiddenLine xmlns:a14="http://schemas.microsoft.com/office/drawing/2010/main" xmlns="" w="9525">
                   <a:solidFill>
                     <a:srgbClr val="000000"/>
                   </a:solidFill>
@@ -2446,7 +2447,7 @@
             </a:ln>
             <a:extLst>
               <a:ext uri="{91240B29-F687-4f45-9708-019B960494DF}">
-                <a14:hiddenLine xmlns="" xmlns:a14="http://schemas.microsoft.com/office/drawing/2010/main" w="9525">
+                <a14:hiddenLine xmlns:a14="http://schemas.microsoft.com/office/drawing/2010/main" xmlns="" w="9525">
                   <a:solidFill>
                     <a:srgbClr val="000000"/>
                   </a:solidFill>
@@ -2514,7 +2515,7 @@
             </a:ln>
             <a:extLst>
               <a:ext uri="{91240B29-F687-4f45-9708-019B960494DF}">
-                <a14:hiddenLine xmlns="" xmlns:a14="http://schemas.microsoft.com/office/drawing/2010/main" w="9525">
+                <a14:hiddenLine xmlns:a14="http://schemas.microsoft.com/office/drawing/2010/main" xmlns="" w="9525">
                   <a:solidFill>
                     <a:srgbClr val="000000"/>
                   </a:solidFill>
@@ -2604,7 +2605,7 @@
             </a:ln>
             <a:extLst>
               <a:ext uri="{91240B29-F687-4f45-9708-019B960494DF}">
-                <a14:hiddenLine xmlns="" xmlns:a14="http://schemas.microsoft.com/office/drawing/2010/main" w="9525">
+                <a14:hiddenLine xmlns:a14="http://schemas.microsoft.com/office/drawing/2010/main" xmlns="" w="9525">
                   <a:solidFill>
                     <a:srgbClr val="000000"/>
                   </a:solidFill>
@@ -2672,7 +2673,7 @@
             </a:ln>
             <a:extLst>
               <a:ext uri="{91240B29-F687-4f45-9708-019B960494DF}">
-                <a14:hiddenLine xmlns="" xmlns:a14="http://schemas.microsoft.com/office/drawing/2010/main" w="9525">
+                <a14:hiddenLine xmlns:a14="http://schemas.microsoft.com/office/drawing/2010/main" xmlns="" w="9525">
                   <a:solidFill>
                     <a:srgbClr val="000000"/>
                   </a:solidFill>
@@ -2762,7 +2763,7 @@
             </a:ln>
             <a:extLst>
               <a:ext uri="{91240B29-F687-4f45-9708-019B960494DF}">
-                <a14:hiddenLine xmlns="" xmlns:a14="http://schemas.microsoft.com/office/drawing/2010/main" w="9525">
+                <a14:hiddenLine xmlns:a14="http://schemas.microsoft.com/office/drawing/2010/main" xmlns="" w="9525">
                   <a:solidFill>
                     <a:srgbClr val="000000"/>
                   </a:solidFill>
@@ -2796,7 +2797,7 @@
             </a:ln>
             <a:extLst>
               <a:ext uri="{91240B29-F687-4f45-9708-019B960494DF}">
-                <a14:hiddenLine xmlns="" xmlns:a14="http://schemas.microsoft.com/office/drawing/2010/main" w="9525">
+                <a14:hiddenLine xmlns:a14="http://schemas.microsoft.com/office/drawing/2010/main" xmlns="" w="9525">
                   <a:solidFill>
                     <a:srgbClr val="000000"/>
                   </a:solidFill>
@@ -2886,7 +2887,7 @@
             </a:ln>
             <a:extLst>
               <a:ext uri="{91240B29-F687-4f45-9708-019B960494DF}">
-                <a14:hiddenLine xmlns="" xmlns:a14="http://schemas.microsoft.com/office/drawing/2010/main" w="9525">
+                <a14:hiddenLine xmlns:a14="http://schemas.microsoft.com/office/drawing/2010/main" xmlns="" w="9525">
                   <a:solidFill>
                     <a:srgbClr val="000000"/>
                   </a:solidFill>
@@ -2948,7 +2949,7 @@
             </a:ln>
             <a:extLst>
               <a:ext uri="{91240B29-F687-4f45-9708-019B960494DF}">
-                <a14:hiddenLine xmlns="" xmlns:a14="http://schemas.microsoft.com/office/drawing/2010/main" w="9525">
+                <a14:hiddenLine xmlns:a14="http://schemas.microsoft.com/office/drawing/2010/main" xmlns="" w="9525">
                   <a:solidFill>
                     <a:srgbClr val="000000"/>
                   </a:solidFill>
@@ -3010,7 +3011,7 @@
             </a:ln>
             <a:extLst>
               <a:ext uri="{91240B29-F687-4f45-9708-019B960494DF}">
-                <a14:hiddenLine xmlns="" xmlns:a14="http://schemas.microsoft.com/office/drawing/2010/main" w="9525">
+                <a14:hiddenLine xmlns:a14="http://schemas.microsoft.com/office/drawing/2010/main" xmlns="" w="9525">
                   <a:solidFill>
                     <a:srgbClr val="000000"/>
                   </a:solidFill>
@@ -3100,7 +3101,7 @@
             </a:ln>
             <a:extLst>
               <a:ext uri="{91240B29-F687-4f45-9708-019B960494DF}">
-                <a14:hiddenLine xmlns="" xmlns:a14="http://schemas.microsoft.com/office/drawing/2010/main" w="9525">
+                <a14:hiddenLine xmlns:a14="http://schemas.microsoft.com/office/drawing/2010/main" xmlns="" w="9525">
                   <a:solidFill>
                     <a:srgbClr val="000000"/>
                   </a:solidFill>
@@ -3168,7 +3169,7 @@
             </a:ln>
             <a:extLst>
               <a:ext uri="{91240B29-F687-4f45-9708-019B960494DF}">
-                <a14:hiddenLine xmlns="" xmlns:a14="http://schemas.microsoft.com/office/drawing/2010/main" w="9525">
+                <a14:hiddenLine xmlns:a14="http://schemas.microsoft.com/office/drawing/2010/main" xmlns="" w="9525">
                   <a:solidFill>
                     <a:srgbClr val="000000"/>
                   </a:solidFill>
@@ -3230,7 +3231,7 @@
             </a:ln>
             <a:extLst>
               <a:ext uri="{91240B29-F687-4f45-9708-019B960494DF}">
-                <a14:hiddenLine xmlns="" xmlns:a14="http://schemas.microsoft.com/office/drawing/2010/main" w="9525">
+                <a14:hiddenLine xmlns:a14="http://schemas.microsoft.com/office/drawing/2010/main" xmlns="" w="9525">
                   <a:solidFill>
                     <a:srgbClr val="000000"/>
                   </a:solidFill>
@@ -3320,7 +3321,7 @@
             </a:ln>
             <a:extLst>
               <a:ext uri="{91240B29-F687-4f45-9708-019B960494DF}">
-                <a14:hiddenLine xmlns="" xmlns:a14="http://schemas.microsoft.com/office/drawing/2010/main" w="9525">
+                <a14:hiddenLine xmlns:a14="http://schemas.microsoft.com/office/drawing/2010/main" xmlns="" w="9525">
                   <a:solidFill>
                     <a:srgbClr val="000000"/>
                   </a:solidFill>
@@ -3382,7 +3383,7 @@
             </a:ln>
             <a:extLst>
               <a:ext uri="{91240B29-F687-4f45-9708-019B960494DF}">
-                <a14:hiddenLine xmlns="" xmlns:a14="http://schemas.microsoft.com/office/drawing/2010/main" w="9525">
+                <a14:hiddenLine xmlns:a14="http://schemas.microsoft.com/office/drawing/2010/main" xmlns="" w="9525">
                   <a:solidFill>
                     <a:srgbClr val="000000"/>
                   </a:solidFill>
@@ -3472,7 +3473,7 @@
             </a:ln>
             <a:extLst>
               <a:ext uri="{91240B29-F687-4f45-9708-019B960494DF}">
-                <a14:hiddenLine xmlns="" xmlns:a14="http://schemas.microsoft.com/office/drawing/2010/main" w="9525">
+                <a14:hiddenLine xmlns:a14="http://schemas.microsoft.com/office/drawing/2010/main" xmlns="" w="9525">
                   <a:solidFill>
                     <a:srgbClr val="000000"/>
                   </a:solidFill>
@@ -3534,7 +3535,7 @@
             </a:ln>
             <a:extLst>
               <a:ext uri="{91240B29-F687-4f45-9708-019B960494DF}">
-                <a14:hiddenLine xmlns="" xmlns:a14="http://schemas.microsoft.com/office/drawing/2010/main" w="9525">
+                <a14:hiddenLine xmlns:a14="http://schemas.microsoft.com/office/drawing/2010/main" xmlns="" w="9525">
                   <a:solidFill>
                     <a:srgbClr val="000000"/>
                   </a:solidFill>
@@ -3624,7 +3625,7 @@
             </a:ln>
             <a:extLst>
               <a:ext uri="{91240B29-F687-4f45-9708-019B960494DF}">
-                <a14:hiddenLine xmlns="" xmlns:a14="http://schemas.microsoft.com/office/drawing/2010/main" w="9525">
+                <a14:hiddenLine xmlns:a14="http://schemas.microsoft.com/office/drawing/2010/main" xmlns="" w="9525">
                   <a:solidFill>
                     <a:srgbClr val="000000"/>
                   </a:solidFill>
@@ -3658,7 +3659,7 @@
             </a:ln>
             <a:extLst>
               <a:ext uri="{91240B29-F687-4f45-9708-019B960494DF}">
-                <a14:hiddenLine xmlns="" xmlns:a14="http://schemas.microsoft.com/office/drawing/2010/main" w="9525">
+                <a14:hiddenLine xmlns:a14="http://schemas.microsoft.com/office/drawing/2010/main" xmlns="" w="9525">
                   <a:solidFill>
                     <a:srgbClr val="000000"/>
                   </a:solidFill>
@@ -3723,7 +3724,7 @@
             </a:ln>
             <a:extLst>
               <a:ext uri="{91240B29-F687-4f45-9708-019B960494DF}">
-                <a14:hiddenLine xmlns="" xmlns:a14="http://schemas.microsoft.com/office/drawing/2010/main" w="9525">
+                <a14:hiddenLine xmlns:a14="http://schemas.microsoft.com/office/drawing/2010/main" xmlns="" w="9525">
                   <a:solidFill>
                     <a:srgbClr val="000000"/>
                   </a:solidFill>
@@ -3813,7 +3814,7 @@
             </a:ln>
             <a:extLst>
               <a:ext uri="{91240B29-F687-4f45-9708-019B960494DF}">
-                <a14:hiddenLine xmlns="" xmlns:a14="http://schemas.microsoft.com/office/drawing/2010/main" w="9525">
+                <a14:hiddenLine xmlns:a14="http://schemas.microsoft.com/office/drawing/2010/main" xmlns="" w="9525">
                   <a:solidFill>
                     <a:srgbClr val="000000"/>
                   </a:solidFill>
@@ -3875,7 +3876,7 @@
             </a:ln>
             <a:extLst>
               <a:ext uri="{91240B29-F687-4f45-9708-019B960494DF}">
-                <a14:hiddenLine xmlns="" xmlns:a14="http://schemas.microsoft.com/office/drawing/2010/main" w="9525">
+                <a14:hiddenLine xmlns:a14="http://schemas.microsoft.com/office/drawing/2010/main" xmlns="" w="9525">
                   <a:solidFill>
                     <a:srgbClr val="000000"/>
                   </a:solidFill>
@@ -3965,7 +3966,7 @@
             </a:ln>
             <a:extLst>
               <a:ext uri="{91240B29-F687-4f45-9708-019B960494DF}">
-                <a14:hiddenLine xmlns="" xmlns:a14="http://schemas.microsoft.com/office/drawing/2010/main" w="9525">
+                <a14:hiddenLine xmlns:a14="http://schemas.microsoft.com/office/drawing/2010/main" xmlns="" w="9525">
                   <a:solidFill>
                     <a:srgbClr val="000000"/>
                   </a:solidFill>
@@ -4055,7 +4056,7 @@
             </a:ln>
             <a:extLst>
               <a:ext uri="{91240B29-F687-4f45-9708-019B960494DF}">
-                <a14:hiddenLine xmlns="" xmlns:a14="http://schemas.microsoft.com/office/drawing/2010/main" w="9525">
+                <a14:hiddenLine xmlns:a14="http://schemas.microsoft.com/office/drawing/2010/main" xmlns="" w="9525">
                   <a:solidFill>
                     <a:srgbClr val="000000"/>
                   </a:solidFill>
@@ -4120,7 +4121,7 @@
             </a:ln>
             <a:extLst>
               <a:ext uri="{91240B29-F687-4f45-9708-019B960494DF}">
-                <a14:hiddenLine xmlns="" xmlns:a14="http://schemas.microsoft.com/office/drawing/2010/main" w="9525">
+                <a14:hiddenLine xmlns:a14="http://schemas.microsoft.com/office/drawing/2010/main" xmlns="" w="9525">
                   <a:solidFill>
                     <a:srgbClr val="000000"/>
                   </a:solidFill>
@@ -4182,7 +4183,7 @@
             </a:ln>
             <a:extLst>
               <a:ext uri="{91240B29-F687-4f45-9708-019B960494DF}">
-                <a14:hiddenLine xmlns="" xmlns:a14="http://schemas.microsoft.com/office/drawing/2010/main" w="9525">
+                <a14:hiddenLine xmlns:a14="http://schemas.microsoft.com/office/drawing/2010/main" xmlns="" w="9525">
                   <a:solidFill>
                     <a:srgbClr val="000000"/>
                   </a:solidFill>
@@ -4272,7 +4273,7 @@
             </a:ln>
             <a:extLst>
               <a:ext uri="{91240B29-F687-4f45-9708-019B960494DF}">
-                <a14:hiddenLine xmlns="" xmlns:a14="http://schemas.microsoft.com/office/drawing/2010/main" w="9525">
+                <a14:hiddenLine xmlns:a14="http://schemas.microsoft.com/office/drawing/2010/main" xmlns="" w="9525">
                   <a:solidFill>
                     <a:srgbClr val="000000"/>
                   </a:solidFill>
@@ -4362,7 +4363,7 @@
             </a:ln>
             <a:extLst>
               <a:ext uri="{91240B29-F687-4f45-9708-019B960494DF}">
-                <a14:hiddenLine xmlns="" xmlns:a14="http://schemas.microsoft.com/office/drawing/2010/main" w="9525">
+                <a14:hiddenLine xmlns:a14="http://schemas.microsoft.com/office/drawing/2010/main" xmlns="" w="9525">
                   <a:solidFill>
                     <a:srgbClr val="000000"/>
                   </a:solidFill>
@@ -4424,7 +4425,7 @@
             </a:ln>
             <a:extLst>
               <a:ext uri="{91240B29-F687-4f45-9708-019B960494DF}">
-                <a14:hiddenLine xmlns="" xmlns:a14="http://schemas.microsoft.com/office/drawing/2010/main" w="9525">
+                <a14:hiddenLine xmlns:a14="http://schemas.microsoft.com/office/drawing/2010/main" xmlns="" w="9525">
                   <a:solidFill>
                     <a:srgbClr val="000000"/>
                   </a:solidFill>
@@ -4544,7 +4545,7 @@
             </a:ln>
             <a:extLst>
               <a:ext uri="{91240B29-F687-4f45-9708-019B960494DF}">
-                <a14:hiddenLine xmlns="" xmlns:a14="http://schemas.microsoft.com/office/drawing/2010/main" w="9525">
+                <a14:hiddenLine xmlns:a14="http://schemas.microsoft.com/office/drawing/2010/main" xmlns="" w="9525">
                   <a:solidFill>
                     <a:srgbClr val="000000"/>
                   </a:solidFill>
@@ -4612,7 +4613,7 @@
             </a:ln>
             <a:extLst>
               <a:ext uri="{91240B29-F687-4f45-9708-019B960494DF}">
-                <a14:hiddenLine xmlns="" xmlns:a14="http://schemas.microsoft.com/office/drawing/2010/main" w="9525">
+                <a14:hiddenLine xmlns:a14="http://schemas.microsoft.com/office/drawing/2010/main" xmlns="" w="9525">
                   <a:solidFill>
                     <a:srgbClr val="000000"/>
                   </a:solidFill>
@@ -4702,7 +4703,7 @@
             </a:ln>
             <a:extLst>
               <a:ext uri="{91240B29-F687-4f45-9708-019B960494DF}">
-                <a14:hiddenLine xmlns="" xmlns:a14="http://schemas.microsoft.com/office/drawing/2010/main" w="9525">
+                <a14:hiddenLine xmlns:a14="http://schemas.microsoft.com/office/drawing/2010/main" xmlns="" w="9525">
                   <a:solidFill>
                     <a:srgbClr val="000000"/>
                   </a:solidFill>
@@ -4842,7 +4843,7 @@
           <a:p>
             <a:fld id="{4313F670-7F9A-774D-B73D-573401E44297}" type="datetime1">
               <a:rPr lang="en-US" smtClean="0"/>
-              <a:t>9/24/26</a:t>
+              <a:t>9/28/26</a:t>
             </a:fld>
             <a:endParaRPr lang="en-US"/>
           </a:p>
@@ -5109,7 +5110,7 @@
           <a:p>
             <a:fld id="{446F9669-A8A7-2D40-9D01-B35FC337AA30}" type="datetime1">
               <a:rPr lang="en-US" smtClean="0"/>
-              <a:t>9/24/26</a:t>
+              <a:t>9/28/26</a:t>
             </a:fld>
             <a:endParaRPr lang="en-US"/>
           </a:p>
@@ -5305,7 +5306,7 @@
           <a:p>
             <a:fld id="{FA76CF18-F41B-6B48-B3E5-599E9795C2C3}" type="datetime1">
               <a:rPr lang="en-US" smtClean="0"/>
-              <a:t>9/24/26</a:t>
+              <a:t>9/28/26</a:t>
             </a:fld>
             <a:endParaRPr lang="en-US"/>
           </a:p>
@@ -5568,7 +5569,7 @@
           <a:p>
             <a:fld id="{B9654854-6457-164F-A077-6B3035079B82}" type="datetime1">
               <a:rPr lang="en-US" smtClean="0"/>
-              <a:t>9/24/26</a:t>
+              <a:t>9/28/26</a:t>
             </a:fld>
             <a:endParaRPr lang="en-US"/>
           </a:p>
@@ -6002,7 +6003,7 @@
           <a:p>
             <a:fld id="{CE3DBFD7-E611-8C40-AC73-0C29FF63F0CD}" type="datetime1">
               <a:rPr lang="en-US" smtClean="0"/>
-              <a:t>9/24/26</a:t>
+              <a:t>9/28/26</a:t>
             </a:fld>
             <a:endParaRPr lang="en-US"/>
           </a:p>
@@ -6548,7 +6549,7 @@
           <a:p>
             <a:fld id="{C8B63B06-0493-2840-9F37-30C9412BBF17}" type="datetime1">
               <a:rPr lang="en-US" smtClean="0"/>
-              <a:t>9/24/26</a:t>
+              <a:t>9/28/26</a:t>
             </a:fld>
             <a:endParaRPr lang="en-US"/>
           </a:p>
@@ -7268,7 +7269,7 @@
           <a:p>
             <a:fld id="{72B5C0FA-8C46-E84D-B6D7-B673F2CA0A0E}" type="datetime1">
               <a:rPr lang="en-US" smtClean="0"/>
-              <a:t>9/24/26</a:t>
+              <a:t>9/28/26</a:t>
             </a:fld>
             <a:endParaRPr lang="en-US"/>
           </a:p>
@@ -7438,7 +7439,7 @@
           <a:p>
             <a:fld id="{60B9CDE1-97B4-BF46-B69C-B86855B18820}" type="datetime1">
               <a:rPr lang="en-US" smtClean="0"/>
-              <a:t>9/24/26</a:t>
+              <a:t>9/28/26</a:t>
             </a:fld>
             <a:endParaRPr lang="en-US"/>
           </a:p>
@@ -7618,7 +7619,7 @@
           <a:p>
             <a:fld id="{BE51D3A4-F9E5-FD49-AA87-B395F50451DC}" type="datetime1">
               <a:rPr lang="en-US" smtClean="0"/>
-              <a:t>9/24/26</a:t>
+              <a:t>9/28/26</a:t>
             </a:fld>
             <a:endParaRPr lang="en-US"/>
           </a:p>
@@ -7788,7 +7789,7 @@
           <a:p>
             <a:fld id="{880DFB37-B0AE-9449-85EC-14F9C83B6084}" type="datetime1">
               <a:rPr lang="en-US" smtClean="0"/>
-              <a:t>9/24/26</a:t>
+              <a:t>9/28/26</a:t>
             </a:fld>
             <a:endParaRPr lang="en-US"/>
           </a:p>
@@ -8038,7 +8039,7 @@
           <a:p>
             <a:fld id="{C939124A-616E-6944-A21A-1839F5DBE7BB}" type="datetime1">
               <a:rPr lang="en-US" smtClean="0"/>
-              <a:t>9/24/26</a:t>
+              <a:t>9/28/26</a:t>
             </a:fld>
             <a:endParaRPr lang="en-US"/>
           </a:p>
@@ -8270,7 +8271,7 @@
           <a:p>
             <a:fld id="{C6E9A026-D48C-FD43-8676-CD625DD5D84B}" type="datetime1">
               <a:rPr lang="en-US" smtClean="0"/>
-              <a:t>9/24/26</a:t>
+              <a:t>9/28/26</a:t>
             </a:fld>
             <a:endParaRPr lang="en-US"/>
           </a:p>
@@ -8656,7 +8657,7 @@
           <a:p>
             <a:fld id="{EA35111E-23A3-1440-99A3-C4C665908E3D}" type="datetime1">
               <a:rPr lang="en-US" smtClean="0"/>
-              <a:t>9/24/26</a:t>
+              <a:t>9/28/26</a:t>
             </a:fld>
             <a:endParaRPr lang="en-US"/>
           </a:p>
@@ -8779,7 +8780,7 @@
           <a:p>
             <a:fld id="{249983B9-88EF-D74B-BA6D-6A3BF17C2B38}" type="datetime1">
               <a:rPr lang="en-US" smtClean="0"/>
-              <a:t>9/24/26</a:t>
+              <a:t>9/28/26</a:t>
             </a:fld>
             <a:endParaRPr lang="en-US"/>
           </a:p>
@@ -8874,7 +8875,7 @@
           <a:p>
             <a:fld id="{E2A00AEF-B4EC-084A-8DB8-A225C7981CBB}" type="datetime1">
               <a:rPr lang="en-US" smtClean="0"/>
-              <a:t>9/24/26</a:t>
+              <a:t>9/28/26</a:t>
             </a:fld>
             <a:endParaRPr lang="en-US"/>
           </a:p>
@@ -9123,7 +9124,7 @@
           <a:p>
             <a:fld id="{97860299-21CD-A94A-A7B0-44E787F8D42C}" type="datetime1">
               <a:rPr lang="en-US" smtClean="0"/>
-              <a:t>9/24/26</a:t>
+              <a:t>9/28/26</a:t>
             </a:fld>
             <a:endParaRPr lang="en-US"/>
           </a:p>
@@ -9408,7 +9409,7 @@
           <a:p>
             <a:fld id="{3DFD19CF-4E62-D246-BA61-7B528271315F}" type="datetime1">
               <a:rPr lang="en-US" smtClean="0"/>
-              <a:t>9/24/26</a:t>
+              <a:t>9/28/26</a:t>
             </a:fld>
             <a:endParaRPr lang="en-US"/>
           </a:p>
@@ -9531,7 +9532,7 @@
           <a:noFill/>
           <a:extLst>
             <a:ext uri="{909E8E84-426E-40dd-AFC4-6F175D3DCCD1}">
-              <a14:hiddenFill xmlns="" xmlns:a14="http://schemas.microsoft.com/office/drawing/2010/main">
+              <a14:hiddenFill xmlns:a14="http://schemas.microsoft.com/office/drawing/2010/main" xmlns="">
                 <a:solidFill>
                   <a:srgbClr val="FFFFFF"/>
                 </a:solidFill>
@@ -9605,7 +9606,7 @@
               </a:ln>
               <a:extLst>
                 <a:ext uri="{91240B29-F687-4f45-9708-019B960494DF}">
-                  <a14:hiddenLine xmlns="" xmlns:a14="http://schemas.microsoft.com/office/drawing/2010/main" w="9525">
+                  <a14:hiddenLine xmlns:a14="http://schemas.microsoft.com/office/drawing/2010/main" xmlns="" w="9525">
                     <a:solidFill>
                       <a:srgbClr val="000000"/>
                     </a:solidFill>
@@ -9695,7 +9696,7 @@
               </a:ln>
               <a:extLst>
                 <a:ext uri="{91240B29-F687-4f45-9708-019B960494DF}">
-                  <a14:hiddenLine xmlns="" xmlns:a14="http://schemas.microsoft.com/office/drawing/2010/main" w="9525">
+                  <a14:hiddenLine xmlns:a14="http://schemas.microsoft.com/office/drawing/2010/main" xmlns="" w="9525">
                     <a:solidFill>
                       <a:srgbClr val="000000"/>
                     </a:solidFill>
@@ -9785,7 +9786,7 @@
               </a:ln>
               <a:extLst>
                 <a:ext uri="{91240B29-F687-4f45-9708-019B960494DF}">
-                  <a14:hiddenLine xmlns="" xmlns:a14="http://schemas.microsoft.com/office/drawing/2010/main" w="9525">
+                  <a14:hiddenLine xmlns:a14="http://schemas.microsoft.com/office/drawing/2010/main" xmlns="" w="9525">
                     <a:solidFill>
                       <a:srgbClr val="000000"/>
                     </a:solidFill>
@@ -9847,7 +9848,7 @@
               </a:ln>
               <a:extLst>
                 <a:ext uri="{91240B29-F687-4f45-9708-019B960494DF}">
-                  <a14:hiddenLine xmlns="" xmlns:a14="http://schemas.microsoft.com/office/drawing/2010/main" w="9525">
+                  <a14:hiddenLine xmlns:a14="http://schemas.microsoft.com/office/drawing/2010/main" xmlns="" w="9525">
                     <a:solidFill>
                       <a:srgbClr val="000000"/>
                     </a:solidFill>
@@ -9937,7 +9938,7 @@
               </a:ln>
               <a:extLst>
                 <a:ext uri="{91240B29-F687-4f45-9708-019B960494DF}">
-                  <a14:hiddenLine xmlns="" xmlns:a14="http://schemas.microsoft.com/office/drawing/2010/main" w="9525">
+                  <a14:hiddenLine xmlns:a14="http://schemas.microsoft.com/office/drawing/2010/main" xmlns="" w="9525">
                     <a:solidFill>
                       <a:srgbClr val="000000"/>
                     </a:solidFill>
@@ -9999,7 +10000,7 @@
               </a:ln>
               <a:extLst>
                 <a:ext uri="{91240B29-F687-4f45-9708-019B960494DF}">
-                  <a14:hiddenLine xmlns="" xmlns:a14="http://schemas.microsoft.com/office/drawing/2010/main" w="9525">
+                  <a14:hiddenLine xmlns:a14="http://schemas.microsoft.com/office/drawing/2010/main" xmlns="" w="9525">
                     <a:solidFill>
                       <a:srgbClr val="000000"/>
                     </a:solidFill>
@@ -10061,7 +10062,7 @@
               </a:ln>
               <a:extLst>
                 <a:ext uri="{91240B29-F687-4f45-9708-019B960494DF}">
-                  <a14:hiddenLine xmlns="" xmlns:a14="http://schemas.microsoft.com/office/drawing/2010/main" w="9525">
+                  <a14:hiddenLine xmlns:a14="http://schemas.microsoft.com/office/drawing/2010/main" xmlns="" w="9525">
                     <a:solidFill>
                       <a:srgbClr val="000000"/>
                     </a:solidFill>
@@ -10151,7 +10152,7 @@
               </a:ln>
               <a:extLst>
                 <a:ext uri="{91240B29-F687-4f45-9708-019B960494DF}">
-                  <a14:hiddenLine xmlns="" xmlns:a14="http://schemas.microsoft.com/office/drawing/2010/main" w="9525">
+                  <a14:hiddenLine xmlns:a14="http://schemas.microsoft.com/office/drawing/2010/main" xmlns="" w="9525">
                     <a:solidFill>
                       <a:srgbClr val="000000"/>
                     </a:solidFill>
@@ -10241,7 +10242,7 @@
               </a:ln>
               <a:extLst>
                 <a:ext uri="{91240B29-F687-4f45-9708-019B960494DF}">
-                  <a14:hiddenLine xmlns="" xmlns:a14="http://schemas.microsoft.com/office/drawing/2010/main" w="9525">
+                  <a14:hiddenLine xmlns:a14="http://schemas.microsoft.com/office/drawing/2010/main" xmlns="" w="9525">
                     <a:solidFill>
                       <a:srgbClr val="000000"/>
                     </a:solidFill>
@@ -10303,7 +10304,7 @@
               </a:ln>
               <a:extLst>
                 <a:ext uri="{91240B29-F687-4f45-9708-019B960494DF}">
-                  <a14:hiddenLine xmlns="" xmlns:a14="http://schemas.microsoft.com/office/drawing/2010/main" w="9525">
+                  <a14:hiddenLine xmlns:a14="http://schemas.microsoft.com/office/drawing/2010/main" xmlns="" w="9525">
                     <a:solidFill>
                       <a:srgbClr val="000000"/>
                     </a:solidFill>
@@ -10413,7 +10414,7 @@
               </a:ln>
               <a:extLst>
                 <a:ext uri="{91240B29-F687-4f45-9708-019B960494DF}">
-                  <a14:hiddenLine xmlns="" xmlns:a14="http://schemas.microsoft.com/office/drawing/2010/main" w="9525">
+                  <a14:hiddenLine xmlns:a14="http://schemas.microsoft.com/office/drawing/2010/main" xmlns="" w="9525">
                     <a:solidFill>
                       <a:srgbClr val="000000"/>
                     </a:solidFill>
@@ -10497,7 +10498,7 @@
               </a:ln>
               <a:extLst>
                 <a:ext uri="{91240B29-F687-4f45-9708-019B960494DF}">
-                  <a14:hiddenLine xmlns="" xmlns:a14="http://schemas.microsoft.com/office/drawing/2010/main" w="9525">
+                  <a14:hiddenLine xmlns:a14="http://schemas.microsoft.com/office/drawing/2010/main" xmlns="" w="9525">
                     <a:solidFill>
                       <a:srgbClr val="000000"/>
                     </a:solidFill>
@@ -10559,7 +10560,7 @@
               </a:ln>
               <a:extLst>
                 <a:ext uri="{91240B29-F687-4f45-9708-019B960494DF}">
-                  <a14:hiddenLine xmlns="" xmlns:a14="http://schemas.microsoft.com/office/drawing/2010/main" w="9525">
+                  <a14:hiddenLine xmlns:a14="http://schemas.microsoft.com/office/drawing/2010/main" xmlns="" w="9525">
                     <a:solidFill>
                       <a:srgbClr val="000000"/>
                     </a:solidFill>
@@ -10621,7 +10622,7 @@
               </a:ln>
               <a:extLst>
                 <a:ext uri="{91240B29-F687-4f45-9708-019B960494DF}">
-                  <a14:hiddenLine xmlns="" xmlns:a14="http://schemas.microsoft.com/office/drawing/2010/main" w="9525">
+                  <a14:hiddenLine xmlns:a14="http://schemas.microsoft.com/office/drawing/2010/main" xmlns="" w="9525">
                     <a:solidFill>
                       <a:srgbClr val="000000"/>
                     </a:solidFill>
@@ -10711,7 +10712,7 @@
               </a:ln>
               <a:extLst>
                 <a:ext uri="{91240B29-F687-4f45-9708-019B960494DF}">
-                  <a14:hiddenLine xmlns="" xmlns:a14="http://schemas.microsoft.com/office/drawing/2010/main" w="9525">
+                  <a14:hiddenLine xmlns:a14="http://schemas.microsoft.com/office/drawing/2010/main" xmlns="" w="9525">
                     <a:solidFill>
                       <a:srgbClr val="000000"/>
                     </a:solidFill>
@@ -10745,7 +10746,7 @@
               </a:ln>
               <a:extLst>
                 <a:ext uri="{91240B29-F687-4f45-9708-019B960494DF}">
-                  <a14:hiddenLine xmlns="" xmlns:a14="http://schemas.microsoft.com/office/drawing/2010/main" w="9525">
+                  <a14:hiddenLine xmlns:a14="http://schemas.microsoft.com/office/drawing/2010/main" xmlns="" w="9525">
                     <a:solidFill>
                       <a:srgbClr val="000000"/>
                     </a:solidFill>
@@ -10810,7 +10811,7 @@
               </a:ln>
               <a:extLst>
                 <a:ext uri="{91240B29-F687-4f45-9708-019B960494DF}">
-                  <a14:hiddenLine xmlns="" xmlns:a14="http://schemas.microsoft.com/office/drawing/2010/main" w="9525">
+                  <a14:hiddenLine xmlns:a14="http://schemas.microsoft.com/office/drawing/2010/main" xmlns="" w="9525">
                     <a:solidFill>
                       <a:srgbClr val="000000"/>
                     </a:solidFill>
@@ -10900,7 +10901,7 @@
               </a:ln>
               <a:extLst>
                 <a:ext uri="{91240B29-F687-4f45-9708-019B960494DF}">
-                  <a14:hiddenLine xmlns="" xmlns:a14="http://schemas.microsoft.com/office/drawing/2010/main" w="9525">
+                  <a14:hiddenLine xmlns:a14="http://schemas.microsoft.com/office/drawing/2010/main" xmlns="" w="9525">
                     <a:solidFill>
                       <a:srgbClr val="000000"/>
                     </a:solidFill>
@@ -10962,7 +10963,7 @@
               </a:ln>
               <a:extLst>
                 <a:ext uri="{91240B29-F687-4f45-9708-019B960494DF}">
-                  <a14:hiddenLine xmlns="" xmlns:a14="http://schemas.microsoft.com/office/drawing/2010/main" w="9525">
+                  <a14:hiddenLine xmlns:a14="http://schemas.microsoft.com/office/drawing/2010/main" xmlns="" w="9525">
                     <a:solidFill>
                       <a:srgbClr val="000000"/>
                     </a:solidFill>
@@ -11052,7 +11053,7 @@
               </a:ln>
               <a:extLst>
                 <a:ext uri="{91240B29-F687-4f45-9708-019B960494DF}">
-                  <a14:hiddenLine xmlns="" xmlns:a14="http://schemas.microsoft.com/office/drawing/2010/main" w="9525">
+                  <a14:hiddenLine xmlns:a14="http://schemas.microsoft.com/office/drawing/2010/main" xmlns="" w="9525">
                     <a:solidFill>
                       <a:srgbClr val="000000"/>
                     </a:solidFill>
@@ -11117,7 +11118,7 @@
               </a:ln>
               <a:extLst>
                 <a:ext uri="{91240B29-F687-4f45-9708-019B960494DF}">
-                  <a14:hiddenLine xmlns="" xmlns:a14="http://schemas.microsoft.com/office/drawing/2010/main" w="9525">
+                  <a14:hiddenLine xmlns:a14="http://schemas.microsoft.com/office/drawing/2010/main" xmlns="" w="9525">
                     <a:solidFill>
                       <a:srgbClr val="000000"/>
                     </a:solidFill>
@@ -11179,7 +11180,7 @@
               </a:ln>
               <a:extLst>
                 <a:ext uri="{91240B29-F687-4f45-9708-019B960494DF}">
-                  <a14:hiddenLine xmlns="" xmlns:a14="http://schemas.microsoft.com/office/drawing/2010/main" w="9525">
+                  <a14:hiddenLine xmlns:a14="http://schemas.microsoft.com/office/drawing/2010/main" xmlns="" w="9525">
                     <a:solidFill>
                       <a:srgbClr val="000000"/>
                     </a:solidFill>
@@ -11269,7 +11270,7 @@
               </a:ln>
               <a:extLst>
                 <a:ext uri="{91240B29-F687-4f45-9708-019B960494DF}">
-                  <a14:hiddenLine xmlns="" xmlns:a14="http://schemas.microsoft.com/office/drawing/2010/main" w="9525">
+                  <a14:hiddenLine xmlns:a14="http://schemas.microsoft.com/office/drawing/2010/main" xmlns="" w="9525">
                     <a:solidFill>
                       <a:srgbClr val="000000"/>
                     </a:solidFill>
@@ -11359,7 +11360,7 @@
               </a:ln>
               <a:extLst>
                 <a:ext uri="{91240B29-F687-4f45-9708-019B960494DF}">
-                  <a14:hiddenLine xmlns="" xmlns:a14="http://schemas.microsoft.com/office/drawing/2010/main" w="9525">
+                  <a14:hiddenLine xmlns:a14="http://schemas.microsoft.com/office/drawing/2010/main" xmlns="" w="9525">
                     <a:solidFill>
                       <a:srgbClr val="000000"/>
                     </a:solidFill>
@@ -11424,7 +11425,7 @@
               </a:ln>
               <a:extLst>
                 <a:ext uri="{91240B29-F687-4f45-9708-019B960494DF}">
-                  <a14:hiddenLine xmlns="" xmlns:a14="http://schemas.microsoft.com/office/drawing/2010/main" w="9525">
+                  <a14:hiddenLine xmlns:a14="http://schemas.microsoft.com/office/drawing/2010/main" xmlns="" w="9525">
                     <a:solidFill>
                       <a:srgbClr val="000000"/>
                     </a:solidFill>
@@ -11544,7 +11545,7 @@
               </a:ln>
               <a:extLst>
                 <a:ext uri="{91240B29-F687-4f45-9708-019B960494DF}">
-                  <a14:hiddenLine xmlns="" xmlns:a14="http://schemas.microsoft.com/office/drawing/2010/main" w="9525">
+                  <a14:hiddenLine xmlns:a14="http://schemas.microsoft.com/office/drawing/2010/main" xmlns="" w="9525">
                     <a:solidFill>
                       <a:srgbClr val="000000"/>
                     </a:solidFill>
@@ -11625,7 +11626,7 @@
               </a:ln>
               <a:extLst>
                 <a:ext uri="{91240B29-F687-4f45-9708-019B960494DF}">
-                  <a14:hiddenLine xmlns="" xmlns:a14="http://schemas.microsoft.com/office/drawing/2010/main" w="9525">
+                  <a14:hiddenLine xmlns:a14="http://schemas.microsoft.com/office/drawing/2010/main" xmlns="" w="9525">
                     <a:solidFill>
                       <a:srgbClr val="000000"/>
                     </a:solidFill>
@@ -11740,7 +11741,7 @@
               </a:ln>
               <a:extLst>
                 <a:ext uri="{91240B29-F687-4f45-9708-019B960494DF}">
-                  <a14:hiddenLine xmlns="" xmlns:a14="http://schemas.microsoft.com/office/drawing/2010/main" w="9525">
+                  <a14:hiddenLine xmlns:a14="http://schemas.microsoft.com/office/drawing/2010/main" xmlns="" w="9525">
                     <a:solidFill>
                       <a:srgbClr val="000000"/>
                     </a:solidFill>
@@ -11830,7 +11831,7 @@
               </a:ln>
               <a:extLst>
                 <a:ext uri="{91240B29-F687-4f45-9708-019B960494DF}">
-                  <a14:hiddenLine xmlns="" xmlns:a14="http://schemas.microsoft.com/office/drawing/2010/main" w="9525">
+                  <a14:hiddenLine xmlns:a14="http://schemas.microsoft.com/office/drawing/2010/main" xmlns="" w="9525">
                     <a:solidFill>
                       <a:srgbClr val="000000"/>
                     </a:solidFill>
@@ -11895,7 +11896,7 @@
               </a:ln>
               <a:extLst>
                 <a:ext uri="{91240B29-F687-4f45-9708-019B960494DF}">
-                  <a14:hiddenLine xmlns="" xmlns:a14="http://schemas.microsoft.com/office/drawing/2010/main" w="9525">
+                  <a14:hiddenLine xmlns:a14="http://schemas.microsoft.com/office/drawing/2010/main" xmlns="" w="9525">
                     <a:solidFill>
                       <a:srgbClr val="000000"/>
                     </a:solidFill>
@@ -11985,7 +11986,7 @@
               </a:ln>
               <a:extLst>
                 <a:ext uri="{91240B29-F687-4f45-9708-019B960494DF}">
-                  <a14:hiddenLine xmlns="" xmlns:a14="http://schemas.microsoft.com/office/drawing/2010/main" w="9525">
+                  <a14:hiddenLine xmlns:a14="http://schemas.microsoft.com/office/drawing/2010/main" xmlns="" w="9525">
                     <a:solidFill>
                       <a:srgbClr val="000000"/>
                     </a:solidFill>
@@ -12053,7 +12054,7 @@
               </a:ln>
               <a:extLst>
                 <a:ext uri="{91240B29-F687-4f45-9708-019B960494DF}">
-                  <a14:hiddenLine xmlns="" xmlns:a14="http://schemas.microsoft.com/office/drawing/2010/main" w="9525">
+                  <a14:hiddenLine xmlns:a14="http://schemas.microsoft.com/office/drawing/2010/main" xmlns="" w="9525">
                     <a:solidFill>
                       <a:srgbClr val="000000"/>
                     </a:solidFill>
@@ -12143,7 +12144,7 @@
               </a:ln>
               <a:extLst>
                 <a:ext uri="{91240B29-F687-4f45-9708-019B960494DF}">
-                  <a14:hiddenLine xmlns="" xmlns:a14="http://schemas.microsoft.com/office/drawing/2010/main" w="9525">
+                  <a14:hiddenLine xmlns:a14="http://schemas.microsoft.com/office/drawing/2010/main" xmlns="" w="9525">
                     <a:solidFill>
                       <a:srgbClr val="000000"/>
                     </a:solidFill>
@@ -12211,7 +12212,7 @@
               </a:ln>
               <a:extLst>
                 <a:ext uri="{91240B29-F687-4f45-9708-019B960494DF}">
-                  <a14:hiddenLine xmlns="" xmlns:a14="http://schemas.microsoft.com/office/drawing/2010/main" w="9525">
+                  <a14:hiddenLine xmlns:a14="http://schemas.microsoft.com/office/drawing/2010/main" xmlns="" w="9525">
                     <a:solidFill>
                       <a:srgbClr val="000000"/>
                     </a:solidFill>
@@ -12301,7 +12302,7 @@
               </a:ln>
               <a:extLst>
                 <a:ext uri="{91240B29-F687-4f45-9708-019B960494DF}">
-                  <a14:hiddenLine xmlns="" xmlns:a14="http://schemas.microsoft.com/office/drawing/2010/main" w="9525">
+                  <a14:hiddenLine xmlns:a14="http://schemas.microsoft.com/office/drawing/2010/main" xmlns="" w="9525">
                     <a:solidFill>
                       <a:srgbClr val="000000"/>
                     </a:solidFill>
@@ -12335,7 +12336,7 @@
               </a:ln>
               <a:extLst>
                 <a:ext uri="{91240B29-F687-4f45-9708-019B960494DF}">
-                  <a14:hiddenLine xmlns="" xmlns:a14="http://schemas.microsoft.com/office/drawing/2010/main" w="9525">
+                  <a14:hiddenLine xmlns:a14="http://schemas.microsoft.com/office/drawing/2010/main" xmlns="" w="9525">
                     <a:solidFill>
                       <a:srgbClr val="000000"/>
                     </a:solidFill>
@@ -12475,7 +12476,7 @@
           <a:p>
             <a:fld id="{92FF8978-FE14-CC4A-93A6-934EB06543C0}" type="datetime1">
               <a:rPr lang="en-US" smtClean="0"/>
-              <a:t>9/24/26</a:t>
+              <a:t>9/28/26</a:t>
             </a:fld>
             <a:endParaRPr lang="en-US"/>
           </a:p>
@@ -13773,6 +13774,288 @@
   <p:cSld>
     <p:spTree>
       <p:nvGrpSpPr>
+        <p:cNvPr id="1" name="">
+          <a:extLst>
+            <a:ext uri="{FF2B5EF4-FFF2-40B4-BE49-F238E27FC236}">
+              <a16:creationId xmlns:a16="http://schemas.microsoft.com/office/drawing/2014/main" id="{7827E86E-46F1-D49E-DD52-52080C80B0BB}"/>
+            </a:ext>
+          </a:extLst>
+        </p:cNvPr>
+        <p:cNvGrpSpPr/>
+        <p:nvPr/>
+      </p:nvGrpSpPr>
+      <p:grpSpPr>
+        <a:xfrm>
+          <a:off x="0" y="0"/>
+          <a:ext cx="0" cy="0"/>
+          <a:chOff x="0" y="0"/>
+          <a:chExt cx="0" cy="0"/>
+        </a:xfrm>
+      </p:grpSpPr>
+      <p:sp>
+        <p:nvSpPr>
+          <p:cNvPr id="6146" name="Rectangle 2">
+            <a:extLst>
+              <a:ext uri="{FF2B5EF4-FFF2-40B4-BE49-F238E27FC236}">
+                <a16:creationId xmlns:a16="http://schemas.microsoft.com/office/drawing/2014/main" id="{B59EEE50-39CE-F54C-CEF6-D1A30575F7A4}"/>
+              </a:ext>
+            </a:extLst>
+          </p:cNvPr>
+          <p:cNvSpPr>
+            <a:spLocks noGrp="1" noChangeArrowheads="1"/>
+          </p:cNvSpPr>
+          <p:nvPr>
+            <p:ph type="title"/>
+            <p:custDataLst>
+              <p:tags r:id="rId1"/>
+            </p:custDataLst>
+          </p:nvPr>
+        </p:nvSpPr>
+        <p:spPr>
+          <a:xfrm>
+            <a:off x="1141413" y="284084"/>
+            <a:ext cx="9905998" cy="620791"/>
+          </a:xfrm>
+        </p:spPr>
+        <p:txBody>
+          <a:bodyPr/>
+          <a:lstStyle/>
+          <a:p>
+            <a:pPr algn="ctr"/>
+            <a:r>
+              <a:rPr lang="en-US" dirty="0"/>
+              <a:t>Lecture 11 - Tuesday, Sep. 28</a:t>
+            </a:r>
+          </a:p>
+        </p:txBody>
+      </p:sp>
+      <p:sp>
+        <p:nvSpPr>
+          <p:cNvPr id="6147" name="Rectangle 3">
+            <a:extLst>
+              <a:ext uri="{FF2B5EF4-FFF2-40B4-BE49-F238E27FC236}">
+                <a16:creationId xmlns:a16="http://schemas.microsoft.com/office/drawing/2014/main" id="{5212EBB3-5733-042E-DCB3-686852125871}"/>
+              </a:ext>
+            </a:extLst>
+          </p:cNvPr>
+          <p:cNvSpPr>
+            <a:spLocks noGrp="1" noChangeArrowheads="1"/>
+          </p:cNvSpPr>
+          <p:nvPr>
+            <p:ph idx="1"/>
+            <p:custDataLst>
+              <p:tags r:id="rId2"/>
+            </p:custDataLst>
+          </p:nvPr>
+        </p:nvSpPr>
+        <p:spPr>
+          <a:xfrm>
+            <a:off x="1294151" y="1098548"/>
+            <a:ext cx="9600522" cy="5475367"/>
+          </a:xfrm>
+        </p:spPr>
+        <p:txBody>
+          <a:bodyPr>
+            <a:normAutofit fontScale="70000" lnSpcReduction="20000"/>
+          </a:bodyPr>
+          <a:lstStyle/>
+          <a:p>
+            <a:r>
+              <a:rPr lang="en-US" dirty="0">
+                <a:latin typeface="Arial" panose="020B0604020202020204" pitchFamily="34" charset="0"/>
+                <a:cs typeface="Arial" panose="020B0604020202020204" pitchFamily="34" charset="0"/>
+              </a:rPr>
+              <a:t>Please remember </a:t>
+            </a:r>
+            <a:r>
+              <a:rPr lang="en-US" b="1" i="1" u="sng" dirty="0">
+                <a:latin typeface="Arial" panose="020B0604020202020204" pitchFamily="34" charset="0"/>
+                <a:cs typeface="Arial" panose="020B0604020202020204" pitchFamily="34" charset="0"/>
+              </a:rPr>
+              <a:t>no laptops / phones</a:t>
+            </a:r>
+            <a:r>
+              <a:rPr lang="en-US" dirty="0">
+                <a:latin typeface="Arial" panose="020B0604020202020204" pitchFamily="34" charset="0"/>
+                <a:cs typeface="Arial" panose="020B0604020202020204" pitchFamily="34" charset="0"/>
+              </a:rPr>
+              <a:t> and </a:t>
+            </a:r>
+            <a:r>
+              <a:rPr lang="en-US" b="1" i="1" u="sng" dirty="0">
+                <a:latin typeface="Arial" panose="020B0604020202020204" pitchFamily="34" charset="0"/>
+                <a:cs typeface="Arial" panose="020B0604020202020204" pitchFamily="34" charset="0"/>
+              </a:rPr>
+              <a:t>attendance policy</a:t>
+            </a:r>
+            <a:endParaRPr lang="en-US" dirty="0">
+              <a:latin typeface="Arial" panose="020B0604020202020204" pitchFamily="34" charset="0"/>
+              <a:cs typeface="Arial" panose="020B0604020202020204" pitchFamily="34" charset="0"/>
+            </a:endParaRPr>
+          </a:p>
+          <a:p>
+            <a:r>
+              <a:rPr lang="en-US" dirty="0">
+                <a:latin typeface="Arial" panose="020B0604020202020204" pitchFamily="34" charset="0"/>
+                <a:cs typeface="Arial" panose="020B0604020202020204" pitchFamily="34" charset="0"/>
+              </a:rPr>
+              <a:t>This week:</a:t>
+            </a:r>
+          </a:p>
+          <a:p>
+            <a:pPr lvl="1"/>
+            <a:r>
+              <a:rPr lang="en-US" dirty="0">
+                <a:latin typeface="Arial" panose="020B0604020202020204" pitchFamily="34" charset="0"/>
+                <a:cs typeface="Arial" panose="020B0604020202020204" pitchFamily="34" charset="0"/>
+              </a:rPr>
+              <a:t>Mod 2 written assignment is due on Thursday!</a:t>
+            </a:r>
+          </a:p>
+          <a:p>
+            <a:pPr lvl="1"/>
+            <a:r>
+              <a:rPr lang="en-US" dirty="0">
+                <a:latin typeface="Arial" panose="020B0604020202020204" pitchFamily="34" charset="0"/>
+                <a:cs typeface="Arial" panose="020B0604020202020204" pitchFamily="34" charset="0"/>
+              </a:rPr>
+              <a:t>Fall break is next week (woohoo!)</a:t>
+            </a:r>
+          </a:p>
+          <a:p>
+            <a:r>
+              <a:rPr lang="en-US" dirty="0">
+                <a:latin typeface="Arial" panose="020B0604020202020204" pitchFamily="34" charset="0"/>
+                <a:cs typeface="Arial" panose="020B0604020202020204" pitchFamily="34" charset="0"/>
+              </a:rPr>
+              <a:t>Module 1 Quiz</a:t>
+            </a:r>
+          </a:p>
+          <a:p>
+            <a:pPr lvl="1"/>
+            <a:r>
+              <a:rPr lang="en-US" dirty="0">
+                <a:latin typeface="Arial" panose="020B0604020202020204" pitchFamily="34" charset="0"/>
+                <a:cs typeface="Arial" panose="020B0604020202020204" pitchFamily="34" charset="0"/>
+              </a:rPr>
+              <a:t>Being graded right now. Will release on Thursday.</a:t>
+            </a:r>
+          </a:p>
+          <a:p>
+            <a:pPr lvl="1"/>
+            <a:r>
+              <a:rPr lang="en-US" dirty="0">
+                <a:latin typeface="Arial" panose="020B0604020202020204" pitchFamily="34" charset="0"/>
+                <a:cs typeface="Arial" panose="020B0604020202020204" pitchFamily="34" charset="0"/>
+              </a:rPr>
+              <a:t>I’m making an adjustment to the DFA question grades due to the “delete” issue</a:t>
+            </a:r>
+          </a:p>
+          <a:p>
+            <a:pPr lvl="2"/>
+            <a:r>
+              <a:rPr lang="en-US" dirty="0">
+                <a:latin typeface="Arial" panose="020B0604020202020204" pitchFamily="34" charset="0"/>
+                <a:cs typeface="Arial" panose="020B0604020202020204" pitchFamily="34" charset="0"/>
+              </a:rPr>
+              <a:t>Both of your DFA scores will be set to the max of your DFA scores.</a:t>
+            </a:r>
+          </a:p>
+          <a:p>
+            <a:r>
+              <a:rPr lang="en-US" dirty="0">
+                <a:latin typeface="Arial" panose="020B0604020202020204" pitchFamily="34" charset="0"/>
+                <a:cs typeface="Arial" panose="020B0604020202020204" pitchFamily="34" charset="0"/>
+              </a:rPr>
+              <a:t>Mod. 1 homework is being graded right now. </a:t>
+            </a:r>
+          </a:p>
+          <a:p>
+            <a:pPr lvl="1"/>
+            <a:r>
+              <a:rPr lang="en-US" dirty="0">
+                <a:latin typeface="Arial" panose="020B0604020202020204" pitchFamily="34" charset="0"/>
+                <a:cs typeface="Arial" panose="020B0604020202020204" pitchFamily="34" charset="0"/>
+              </a:rPr>
+              <a:t>Should be able to get that back to you shortly…</a:t>
+            </a:r>
+          </a:p>
+          <a:p>
+            <a:r>
+              <a:rPr lang="en-US" dirty="0">
+                <a:latin typeface="Arial" panose="020B0604020202020204" pitchFamily="34" charset="0"/>
+                <a:cs typeface="Arial" panose="020B0604020202020204" pitchFamily="34" charset="0"/>
+              </a:rPr>
+              <a:t>Quiz 2</a:t>
+            </a:r>
+          </a:p>
+          <a:p>
+            <a:pPr lvl="1"/>
+            <a:r>
+              <a:rPr lang="en-US" dirty="0">
+                <a:latin typeface="Arial" panose="020B0604020202020204" pitchFamily="34" charset="0"/>
+                <a:cs typeface="Arial" panose="020B0604020202020204" pitchFamily="34" charset="0"/>
+              </a:rPr>
+              <a:t>Is in two weeks! You will start signing up for your reservations for this NEXT week.</a:t>
+            </a:r>
+          </a:p>
+          <a:p>
+            <a:r>
+              <a:rPr lang="en-US" dirty="0">
+                <a:latin typeface="Arial" panose="020B0604020202020204" pitchFamily="34" charset="0"/>
+                <a:cs typeface="Arial" panose="020B0604020202020204" pitchFamily="34" charset="0"/>
+              </a:rPr>
+              <a:t>OH Check-Ins</a:t>
+            </a:r>
+          </a:p>
+          <a:p>
+            <a:pPr lvl="1"/>
+            <a:r>
+              <a:rPr lang="en-US" dirty="0">
+                <a:latin typeface="Arial" panose="020B0604020202020204" pitchFamily="34" charset="0"/>
+                <a:cs typeface="Arial" panose="020B0604020202020204" pitchFamily="34" charset="0"/>
+              </a:rPr>
+              <a:t>This is shaping up but I won’t have more concrete information until next week!</a:t>
+            </a:r>
+          </a:p>
+          <a:p>
+            <a:r>
+              <a:rPr lang="en-US" dirty="0">
+                <a:latin typeface="Arial" panose="020B0604020202020204" pitchFamily="34" charset="0"/>
+                <a:cs typeface="Arial" panose="020B0604020202020204" pitchFamily="34" charset="0"/>
+              </a:rPr>
+              <a:t>These slides are linked on the course webpage “slides” page.</a:t>
+            </a:r>
+          </a:p>
+          <a:p>
+            <a:r>
+              <a:rPr lang="en-US" dirty="0">
+                <a:latin typeface="Arial" panose="020B0604020202020204" pitchFamily="34" charset="0"/>
+                <a:cs typeface="Arial" panose="020B0604020202020204" pitchFamily="34" charset="0"/>
+              </a:rPr>
+              <a:t>Today we will continue with Module 2 – Context-Free Grammars.</a:t>
+            </a:r>
+          </a:p>
+        </p:txBody>
+      </p:sp>
+    </p:spTree>
+    <p:extLst>
+      <p:ext uri="{BB962C8B-B14F-4D97-AF65-F5344CB8AC3E}">
+        <p14:creationId xmlns:p14="http://schemas.microsoft.com/office/powerpoint/2010/main" val="3257908011"/>
+      </p:ext>
+    </p:extLst>
+  </p:cSld>
+  <p:clrMapOvr>
+    <a:masterClrMapping/>
+  </p:clrMapOvr>
+</p:sld>
+</file>
+
+<file path=ppt/slides/slide14.xml><?xml version="1.0" encoding="utf-8"?>
+<p:sld xmlns:a="http://schemas.openxmlformats.org/drawingml/2006/main" xmlns:r="http://schemas.openxmlformats.org/officeDocument/2006/relationships" xmlns:p="http://schemas.openxmlformats.org/presentationml/2006/main">
+  <p:cSld>
+    <p:spTree>
+      <p:nvGrpSpPr>
         <p:cNvPr id="1" name=""/>
         <p:cNvGrpSpPr/>
         <p:nvPr/>
@@ -14109,7 +14392,7 @@
           <p:nvPr>
             <p:extLst>
               <p:ext uri="{D42A27DB-BD31-4B8C-83A1-F6EECF244321}">
-                <p14:modId xmlns:p14="http://schemas.microsoft.com/office/powerpoint/2010/main" val="1470152519"/>
+                <p14:modId xmlns:p14="http://schemas.microsoft.com/office/powerpoint/2010/main" val="1641075703"/>
               </p:ext>
             </p:extLst>
           </p:nvPr>
@@ -14205,7 +14488,7 @@
                       <a:pPr algn="ctr"/>
                       <a:r>
                         <a:rPr lang="en-US" i="0" dirty="0"/>
-                        <a:t>9</a:t>
+                        <a:t>10</a:t>
                       </a:r>
                     </a:p>
                   </a:txBody>
@@ -14219,7 +14502,7 @@
                       <a:pPr algn="ctr"/>
                       <a:r>
                         <a:rPr lang="en-US" i="0" dirty="0"/>
-                        <a:t>9</a:t>
+                        <a:t>10</a:t>
                       </a:r>
                     </a:p>
                   </a:txBody>
@@ -14264,7 +14547,7 @@
           <p:nvPr>
             <p:extLst>
               <p:ext uri="{D42A27DB-BD31-4B8C-83A1-F6EECF244321}">
-                <p14:modId xmlns:p14="http://schemas.microsoft.com/office/powerpoint/2010/main" val="287354998"/>
+                <p14:modId xmlns:p14="http://schemas.microsoft.com/office/powerpoint/2010/main" val="1942536635"/>
               </p:ext>
             </p:extLst>
           </p:nvPr>
@@ -14523,7 +14806,7 @@
                       <a:pPr algn="ctr"/>
                       <a:r>
                         <a:rPr lang="en-US" dirty="0"/>
-                        <a:t>-</a:t>
+                        <a:t>116</a:t>
                       </a:r>
                     </a:p>
                   </a:txBody>
@@ -15064,7 +15347,7 @@
           <p:nvPr>
             <p:extLst>
               <p:ext uri="{D42A27DB-BD31-4B8C-83A1-F6EECF244321}">
-                <p14:modId xmlns:p14="http://schemas.microsoft.com/office/powerpoint/2010/main" val="3741389918"/>
+                <p14:modId xmlns:p14="http://schemas.microsoft.com/office/powerpoint/2010/main" val="2441303257"/>
               </p:ext>
             </p:extLst>
           </p:nvPr>
@@ -15160,7 +15443,7 @@
                       <a:pPr algn="ctr"/>
                       <a:r>
                         <a:rPr lang="en-US" i="0" dirty="0"/>
-                        <a:t>4</a:t>
+                        <a:t>5</a:t>
                       </a:r>
                     </a:p>
                   </a:txBody>
@@ -15174,7 +15457,7 @@
                       <a:pPr algn="ctr"/>
                       <a:r>
                         <a:rPr lang="en-US" i="0" dirty="0"/>
-                        <a:t>4</a:t>
+                        <a:t>5</a:t>
                       </a:r>
                     </a:p>
                   </a:txBody>
@@ -15452,7 +15735,7 @@
           <p:nvPr>
             <p:extLst>
               <p:ext uri="{D42A27DB-BD31-4B8C-83A1-F6EECF244321}">
-                <p14:modId xmlns:p14="http://schemas.microsoft.com/office/powerpoint/2010/main" val="2330738710"/>
+                <p14:modId xmlns:p14="http://schemas.microsoft.com/office/powerpoint/2010/main" val="2711374298"/>
               </p:ext>
             </p:extLst>
           </p:nvPr>
@@ -15548,7 +15831,7 @@
                       <a:pPr algn="ctr"/>
                       <a:r>
                         <a:rPr lang="en-US" i="0" dirty="0"/>
-                        <a:t>9</a:t>
+                        <a:t>10</a:t>
                       </a:r>
                     </a:p>
                   </a:txBody>
@@ -15562,7 +15845,7 @@
                       <a:pPr algn="ctr"/>
                       <a:r>
                         <a:rPr lang="en-US" i="0" dirty="0"/>
-                        <a:t>9</a:t>
+                        <a:t>10</a:t>
                       </a:r>
                     </a:p>
                   </a:txBody>
@@ -15833,7 +16116,7 @@
           <p:nvPr>
             <p:extLst>
               <p:ext uri="{D42A27DB-BD31-4B8C-83A1-F6EECF244321}">
-                <p14:modId xmlns:p14="http://schemas.microsoft.com/office/powerpoint/2010/main" val="2995271694"/>
+                <p14:modId xmlns:p14="http://schemas.microsoft.com/office/powerpoint/2010/main" val="2214872950"/>
               </p:ext>
             </p:extLst>
           </p:nvPr>
@@ -15929,7 +16212,7 @@
                       <a:pPr algn="ctr"/>
                       <a:r>
                         <a:rPr lang="en-US" i="0" dirty="0"/>
-                        <a:t>4</a:t>
+                        <a:t>5</a:t>
                       </a:r>
                     </a:p>
                   </a:txBody>
@@ -15943,7 +16226,7 @@
                       <a:pPr algn="ctr"/>
                       <a:r>
                         <a:rPr lang="en-US" i="0" dirty="0"/>
-                        <a:t>4</a:t>
+                        <a:t>5</a:t>
                       </a:r>
                     </a:p>
                   </a:txBody>
@@ -18120,7 +18403,19 @@
 </p:tagLst>
 </file>
 
+<file path=ppt/tags/tag29.xml><?xml version="1.0" encoding="utf-8"?>
+<p:tagLst xmlns:a="http://schemas.openxmlformats.org/drawingml/2006/main" xmlns:r="http://schemas.openxmlformats.org/officeDocument/2006/relationships" xmlns:p="http://schemas.openxmlformats.org/presentationml/2006/main">
+  <p:tag name="_INSTRUCTOR VIEW19C14C36-AC8E-43BC-9DB6-C2AAF774C7DC|PANE__TAG" val="_"/>
+</p:tagLst>
+</file>
+
 <file path=ppt/tags/tag3.xml><?xml version="1.0" encoding="utf-8"?>
+<p:tagLst xmlns:a="http://schemas.openxmlformats.org/drawingml/2006/main" xmlns:r="http://schemas.openxmlformats.org/officeDocument/2006/relationships" xmlns:p="http://schemas.openxmlformats.org/presentationml/2006/main">
+  <p:tag name="_INSTRUCTOR VIEW19C14C36-AC8E-43BC-9DB6-C2AAF774C7DC|PANE__TAG" val="_"/>
+</p:tagLst>
+</file>
+
+<file path=ppt/tags/tag30.xml><?xml version="1.0" encoding="utf-8"?>
 <p:tagLst xmlns:a="http://schemas.openxmlformats.org/drawingml/2006/main" xmlns:r="http://schemas.openxmlformats.org/officeDocument/2006/relationships" xmlns:p="http://schemas.openxmlformats.org/presentationml/2006/main">
   <p:tag name="_INSTRUCTOR VIEW19C14C36-AC8E-43BC-9DB6-C2AAF774C7DC|PANE__TAG" val="_"/>
 </p:tagLst>

--- a/slides/00-DailyAnnouncements.pptx
+++ b/slides/00-DailyAnnouncements.pptx
@@ -5,7 +5,7 @@
     <p:sldMasterId id="2147484006" r:id="rId1"/>
   </p:sldMasterIdLst>
   <p:notesMasterIdLst>
-    <p:notesMasterId r:id="rId16"/>
+    <p:notesMasterId r:id="rId17"/>
   </p:notesMasterIdLst>
   <p:sldIdLst>
     <p:sldId id="256" r:id="rId2"/>
@@ -21,7 +21,8 @@
     <p:sldId id="524" r:id="rId12"/>
     <p:sldId id="525" r:id="rId13"/>
     <p:sldId id="526" r:id="rId14"/>
-    <p:sldId id="515" r:id="rId15"/>
+    <p:sldId id="527" r:id="rId15"/>
+    <p:sldId id="515" r:id="rId16"/>
   </p:sldIdLst>
   <p:sldSz cx="12192000" cy="6858000"/>
   <p:notesSz cx="6858000" cy="9144000"/>
@@ -210,7 +211,7 @@
           <a:p>
             <a:fld id="{C5B45307-6ED4-B142-BD64-10F739779302}" type="datetimeFigureOut">
               <a:rPr lang="en-US" smtClean="0"/>
-              <a:t>9/28/26</a:t>
+              <a:t>10/1/26</a:t>
             </a:fld>
             <a:endParaRPr lang="en-US"/>
           </a:p>
@@ -618,7 +619,7 @@
           <a:noFill/>
           <a:extLst>
             <a:ext uri="{909E8E84-426E-40dd-AFC4-6F175D3DCCD1}">
-              <a14:hiddenFill xmlns:a14="http://schemas.microsoft.com/office/drawing/2010/main" xmlns="">
+              <a14:hiddenFill xmlns="" xmlns:a14="http://schemas.microsoft.com/office/drawing/2010/main">
                 <a:solidFill>
                   <a:srgbClr val="FFFFFF"/>
                 </a:solidFill>
@@ -677,7 +678,7 @@
             </a:ln>
             <a:extLst>
               <a:ext uri="{91240B29-F687-4f45-9708-019B960494DF}">
-                <a14:hiddenLine xmlns:a14="http://schemas.microsoft.com/office/drawing/2010/main" xmlns="" w="9525">
+                <a14:hiddenLine xmlns="" xmlns:a14="http://schemas.microsoft.com/office/drawing/2010/main" w="9525">
                   <a:solidFill>
                     <a:srgbClr val="000000"/>
                   </a:solidFill>
@@ -767,7 +768,7 @@
             </a:ln>
             <a:extLst>
               <a:ext uri="{91240B29-F687-4f45-9708-019B960494DF}">
-                <a14:hiddenLine xmlns:a14="http://schemas.microsoft.com/office/drawing/2010/main" xmlns="" w="9525">
+                <a14:hiddenLine xmlns="" xmlns:a14="http://schemas.microsoft.com/office/drawing/2010/main" w="9525">
                   <a:solidFill>
                     <a:srgbClr val="000000"/>
                   </a:solidFill>
@@ -857,7 +858,7 @@
             </a:ln>
             <a:extLst>
               <a:ext uri="{91240B29-F687-4f45-9708-019B960494DF}">
-                <a14:hiddenLine xmlns:a14="http://schemas.microsoft.com/office/drawing/2010/main" xmlns="" w="9525">
+                <a14:hiddenLine xmlns="" xmlns:a14="http://schemas.microsoft.com/office/drawing/2010/main" w="9525">
                   <a:solidFill>
                     <a:srgbClr val="000000"/>
                   </a:solidFill>
@@ -891,7 +892,7 @@
             </a:ln>
             <a:extLst>
               <a:ext uri="{91240B29-F687-4f45-9708-019B960494DF}">
-                <a14:hiddenLine xmlns:a14="http://schemas.microsoft.com/office/drawing/2010/main" xmlns="" w="9525">
+                <a14:hiddenLine xmlns="" xmlns:a14="http://schemas.microsoft.com/office/drawing/2010/main" w="9525">
                   <a:solidFill>
                     <a:srgbClr val="000000"/>
                   </a:solidFill>
@@ -981,7 +982,7 @@
             </a:ln>
             <a:extLst>
               <a:ext uri="{91240B29-F687-4f45-9708-019B960494DF}">
-                <a14:hiddenLine xmlns:a14="http://schemas.microsoft.com/office/drawing/2010/main" xmlns="" w="9525">
+                <a14:hiddenLine xmlns="" xmlns:a14="http://schemas.microsoft.com/office/drawing/2010/main" w="9525">
                   <a:solidFill>
                     <a:srgbClr val="000000"/>
                   </a:solidFill>
@@ -1043,7 +1044,7 @@
             </a:ln>
             <a:extLst>
               <a:ext uri="{91240B29-F687-4f45-9708-019B960494DF}">
-                <a14:hiddenLine xmlns:a14="http://schemas.microsoft.com/office/drawing/2010/main" xmlns="" w="9525">
+                <a14:hiddenLine xmlns="" xmlns:a14="http://schemas.microsoft.com/office/drawing/2010/main" w="9525">
                   <a:solidFill>
                     <a:srgbClr val="000000"/>
                   </a:solidFill>
@@ -1105,7 +1106,7 @@
             </a:ln>
             <a:extLst>
               <a:ext uri="{91240B29-F687-4f45-9708-019B960494DF}">
-                <a14:hiddenLine xmlns:a14="http://schemas.microsoft.com/office/drawing/2010/main" xmlns="" w="9525">
+                <a14:hiddenLine xmlns="" xmlns:a14="http://schemas.microsoft.com/office/drawing/2010/main" w="9525">
                   <a:solidFill>
                     <a:srgbClr val="000000"/>
                   </a:solidFill>
@@ -1195,7 +1196,7 @@
             </a:ln>
             <a:extLst>
               <a:ext uri="{91240B29-F687-4f45-9708-019B960494DF}">
-                <a14:hiddenLine xmlns:a14="http://schemas.microsoft.com/office/drawing/2010/main" xmlns="" w="9525">
+                <a14:hiddenLine xmlns="" xmlns:a14="http://schemas.microsoft.com/office/drawing/2010/main" w="9525">
                   <a:solidFill>
                     <a:srgbClr val="000000"/>
                   </a:solidFill>
@@ -1257,7 +1258,7 @@
             </a:ln>
             <a:extLst>
               <a:ext uri="{91240B29-F687-4f45-9708-019B960494DF}">
-                <a14:hiddenLine xmlns:a14="http://schemas.microsoft.com/office/drawing/2010/main" xmlns="" w="9525">
+                <a14:hiddenLine xmlns="" xmlns:a14="http://schemas.microsoft.com/office/drawing/2010/main" w="9525">
                   <a:solidFill>
                     <a:srgbClr val="000000"/>
                   </a:solidFill>
@@ -1319,7 +1320,7 @@
             </a:ln>
             <a:extLst>
               <a:ext uri="{91240B29-F687-4f45-9708-019B960494DF}">
-                <a14:hiddenLine xmlns:a14="http://schemas.microsoft.com/office/drawing/2010/main" xmlns="" w="9525">
+                <a14:hiddenLine xmlns="" xmlns:a14="http://schemas.microsoft.com/office/drawing/2010/main" w="9525">
                   <a:solidFill>
                     <a:srgbClr val="000000"/>
                   </a:solidFill>
@@ -1409,7 +1410,7 @@
             </a:ln>
             <a:extLst>
               <a:ext uri="{91240B29-F687-4f45-9708-019B960494DF}">
-                <a14:hiddenLine xmlns:a14="http://schemas.microsoft.com/office/drawing/2010/main" xmlns="" w="9525">
+                <a14:hiddenLine xmlns="" xmlns:a14="http://schemas.microsoft.com/office/drawing/2010/main" w="9525">
                   <a:solidFill>
                     <a:srgbClr val="000000"/>
                   </a:solidFill>
@@ -1499,7 +1500,7 @@
             </a:ln>
             <a:extLst>
               <a:ext uri="{91240B29-F687-4f45-9708-019B960494DF}">
-                <a14:hiddenLine xmlns:a14="http://schemas.microsoft.com/office/drawing/2010/main" xmlns="" w="9525">
+                <a14:hiddenLine xmlns="" xmlns:a14="http://schemas.microsoft.com/office/drawing/2010/main" w="9525">
                   <a:solidFill>
                     <a:srgbClr val="000000"/>
                   </a:solidFill>
@@ -1561,7 +1562,7 @@
             </a:ln>
             <a:extLst>
               <a:ext uri="{91240B29-F687-4f45-9708-019B960494DF}">
-                <a14:hiddenLine xmlns:a14="http://schemas.microsoft.com/office/drawing/2010/main" xmlns="" w="9525">
+                <a14:hiddenLine xmlns="" xmlns:a14="http://schemas.microsoft.com/office/drawing/2010/main" w="9525">
                   <a:solidFill>
                     <a:srgbClr val="000000"/>
                   </a:solidFill>
@@ -1671,7 +1672,7 @@
             </a:ln>
             <a:extLst>
               <a:ext uri="{91240B29-F687-4f45-9708-019B960494DF}">
-                <a14:hiddenLine xmlns:a14="http://schemas.microsoft.com/office/drawing/2010/main" xmlns="" w="9525">
+                <a14:hiddenLine xmlns="" xmlns:a14="http://schemas.microsoft.com/office/drawing/2010/main" w="9525">
                   <a:solidFill>
                     <a:srgbClr val="000000"/>
                   </a:solidFill>
@@ -1733,7 +1734,7 @@
             </a:ln>
             <a:extLst>
               <a:ext uri="{91240B29-F687-4f45-9708-019B960494DF}">
-                <a14:hiddenLine xmlns:a14="http://schemas.microsoft.com/office/drawing/2010/main" xmlns="" w="9525">
+                <a14:hiddenLine xmlns="" xmlns:a14="http://schemas.microsoft.com/office/drawing/2010/main" w="9525">
                   <a:solidFill>
                     <a:srgbClr val="000000"/>
                   </a:solidFill>
@@ -1823,7 +1824,7 @@
             </a:ln>
             <a:extLst>
               <a:ext uri="{91240B29-F687-4f45-9708-019B960494DF}">
-                <a14:hiddenLine xmlns:a14="http://schemas.microsoft.com/office/drawing/2010/main" xmlns="" w="9525">
+                <a14:hiddenLine xmlns="" xmlns:a14="http://schemas.microsoft.com/office/drawing/2010/main" w="9525">
                   <a:solidFill>
                     <a:srgbClr val="000000"/>
                   </a:solidFill>
@@ -1913,7 +1914,7 @@
             </a:ln>
             <a:extLst>
               <a:ext uri="{91240B29-F687-4f45-9708-019B960494DF}">
-                <a14:hiddenLine xmlns:a14="http://schemas.microsoft.com/office/drawing/2010/main" xmlns="" w="9525">
+                <a14:hiddenLine xmlns="" xmlns:a14="http://schemas.microsoft.com/office/drawing/2010/main" w="9525">
                   <a:solidFill>
                     <a:srgbClr val="000000"/>
                   </a:solidFill>
@@ -1975,7 +1976,7 @@
             </a:ln>
             <a:extLst>
               <a:ext uri="{91240B29-F687-4f45-9708-019B960494DF}">
-                <a14:hiddenLine xmlns:a14="http://schemas.microsoft.com/office/drawing/2010/main" xmlns="" w="9525">
+                <a14:hiddenLine xmlns="" xmlns:a14="http://schemas.microsoft.com/office/drawing/2010/main" w="9525">
                   <a:solidFill>
                     <a:srgbClr val="000000"/>
                   </a:solidFill>
@@ -2065,7 +2066,7 @@
             </a:ln>
             <a:extLst>
               <a:ext uri="{91240B29-F687-4f45-9708-019B960494DF}">
-                <a14:hiddenLine xmlns:a14="http://schemas.microsoft.com/office/drawing/2010/main" xmlns="" w="9525">
+                <a14:hiddenLine xmlns="" xmlns:a14="http://schemas.microsoft.com/office/drawing/2010/main" w="9525">
                   <a:solidFill>
                     <a:srgbClr val="000000"/>
                   </a:solidFill>
@@ -2155,7 +2156,7 @@
             </a:ln>
             <a:extLst>
               <a:ext uri="{91240B29-F687-4f45-9708-019B960494DF}">
-                <a14:hiddenLine xmlns:a14="http://schemas.microsoft.com/office/drawing/2010/main" xmlns="" w="9525">
+                <a14:hiddenLine xmlns="" xmlns:a14="http://schemas.microsoft.com/office/drawing/2010/main" w="9525">
                   <a:solidFill>
                     <a:srgbClr val="000000"/>
                   </a:solidFill>
@@ -2211,7 +2212,7 @@
             </a:ln>
             <a:extLst>
               <a:ext uri="{91240B29-F687-4f45-9708-019B960494DF}">
-                <a14:hiddenLine xmlns:a14="http://schemas.microsoft.com/office/drawing/2010/main" xmlns="" w="9525">
+                <a14:hiddenLine xmlns="" xmlns:a14="http://schemas.microsoft.com/office/drawing/2010/main" w="9525">
                   <a:solidFill>
                     <a:srgbClr val="000000"/>
                   </a:solidFill>
@@ -2301,7 +2302,7 @@
             </a:ln>
             <a:extLst>
               <a:ext uri="{91240B29-F687-4f45-9708-019B960494DF}">
-                <a14:hiddenLine xmlns:a14="http://schemas.microsoft.com/office/drawing/2010/main" xmlns="" w="9525">
+                <a14:hiddenLine xmlns="" xmlns:a14="http://schemas.microsoft.com/office/drawing/2010/main" w="9525">
                   <a:solidFill>
                     <a:srgbClr val="000000"/>
                   </a:solidFill>
@@ -2357,7 +2358,7 @@
             </a:ln>
             <a:extLst>
               <a:ext uri="{91240B29-F687-4f45-9708-019B960494DF}">
-                <a14:hiddenLine xmlns:a14="http://schemas.microsoft.com/office/drawing/2010/main" xmlns="" w="9525">
+                <a14:hiddenLine xmlns="" xmlns:a14="http://schemas.microsoft.com/office/drawing/2010/main" w="9525">
                   <a:solidFill>
                     <a:srgbClr val="000000"/>
                   </a:solidFill>
@@ -2447,7 +2448,7 @@
             </a:ln>
             <a:extLst>
               <a:ext uri="{91240B29-F687-4f45-9708-019B960494DF}">
-                <a14:hiddenLine xmlns:a14="http://schemas.microsoft.com/office/drawing/2010/main" xmlns="" w="9525">
+                <a14:hiddenLine xmlns="" xmlns:a14="http://schemas.microsoft.com/office/drawing/2010/main" w="9525">
                   <a:solidFill>
                     <a:srgbClr val="000000"/>
                   </a:solidFill>
@@ -2515,7 +2516,7 @@
             </a:ln>
             <a:extLst>
               <a:ext uri="{91240B29-F687-4f45-9708-019B960494DF}">
-                <a14:hiddenLine xmlns:a14="http://schemas.microsoft.com/office/drawing/2010/main" xmlns="" w="9525">
+                <a14:hiddenLine xmlns="" xmlns:a14="http://schemas.microsoft.com/office/drawing/2010/main" w="9525">
                   <a:solidFill>
                     <a:srgbClr val="000000"/>
                   </a:solidFill>
@@ -2605,7 +2606,7 @@
             </a:ln>
             <a:extLst>
               <a:ext uri="{91240B29-F687-4f45-9708-019B960494DF}">
-                <a14:hiddenLine xmlns:a14="http://schemas.microsoft.com/office/drawing/2010/main" xmlns="" w="9525">
+                <a14:hiddenLine xmlns="" xmlns:a14="http://schemas.microsoft.com/office/drawing/2010/main" w="9525">
                   <a:solidFill>
                     <a:srgbClr val="000000"/>
                   </a:solidFill>
@@ -2673,7 +2674,7 @@
             </a:ln>
             <a:extLst>
               <a:ext uri="{91240B29-F687-4f45-9708-019B960494DF}">
-                <a14:hiddenLine xmlns:a14="http://schemas.microsoft.com/office/drawing/2010/main" xmlns="" w="9525">
+                <a14:hiddenLine xmlns="" xmlns:a14="http://schemas.microsoft.com/office/drawing/2010/main" w="9525">
                   <a:solidFill>
                     <a:srgbClr val="000000"/>
                   </a:solidFill>
@@ -2763,7 +2764,7 @@
             </a:ln>
             <a:extLst>
               <a:ext uri="{91240B29-F687-4f45-9708-019B960494DF}">
-                <a14:hiddenLine xmlns:a14="http://schemas.microsoft.com/office/drawing/2010/main" xmlns="" w="9525">
+                <a14:hiddenLine xmlns="" xmlns:a14="http://schemas.microsoft.com/office/drawing/2010/main" w="9525">
                   <a:solidFill>
                     <a:srgbClr val="000000"/>
                   </a:solidFill>
@@ -2797,7 +2798,7 @@
             </a:ln>
             <a:extLst>
               <a:ext uri="{91240B29-F687-4f45-9708-019B960494DF}">
-                <a14:hiddenLine xmlns:a14="http://schemas.microsoft.com/office/drawing/2010/main" xmlns="" w="9525">
+                <a14:hiddenLine xmlns="" xmlns:a14="http://schemas.microsoft.com/office/drawing/2010/main" w="9525">
                   <a:solidFill>
                     <a:srgbClr val="000000"/>
                   </a:solidFill>
@@ -2887,7 +2888,7 @@
             </a:ln>
             <a:extLst>
               <a:ext uri="{91240B29-F687-4f45-9708-019B960494DF}">
-                <a14:hiddenLine xmlns:a14="http://schemas.microsoft.com/office/drawing/2010/main" xmlns="" w="9525">
+                <a14:hiddenLine xmlns="" xmlns:a14="http://schemas.microsoft.com/office/drawing/2010/main" w="9525">
                   <a:solidFill>
                     <a:srgbClr val="000000"/>
                   </a:solidFill>
@@ -2949,7 +2950,7 @@
             </a:ln>
             <a:extLst>
               <a:ext uri="{91240B29-F687-4f45-9708-019B960494DF}">
-                <a14:hiddenLine xmlns:a14="http://schemas.microsoft.com/office/drawing/2010/main" xmlns="" w="9525">
+                <a14:hiddenLine xmlns="" xmlns:a14="http://schemas.microsoft.com/office/drawing/2010/main" w="9525">
                   <a:solidFill>
                     <a:srgbClr val="000000"/>
                   </a:solidFill>
@@ -3011,7 +3012,7 @@
             </a:ln>
             <a:extLst>
               <a:ext uri="{91240B29-F687-4f45-9708-019B960494DF}">
-                <a14:hiddenLine xmlns:a14="http://schemas.microsoft.com/office/drawing/2010/main" xmlns="" w="9525">
+                <a14:hiddenLine xmlns="" xmlns:a14="http://schemas.microsoft.com/office/drawing/2010/main" w="9525">
                   <a:solidFill>
                     <a:srgbClr val="000000"/>
                   </a:solidFill>
@@ -3101,7 +3102,7 @@
             </a:ln>
             <a:extLst>
               <a:ext uri="{91240B29-F687-4f45-9708-019B960494DF}">
-                <a14:hiddenLine xmlns:a14="http://schemas.microsoft.com/office/drawing/2010/main" xmlns="" w="9525">
+                <a14:hiddenLine xmlns="" xmlns:a14="http://schemas.microsoft.com/office/drawing/2010/main" w="9525">
                   <a:solidFill>
                     <a:srgbClr val="000000"/>
                   </a:solidFill>
@@ -3169,7 +3170,7 @@
             </a:ln>
             <a:extLst>
               <a:ext uri="{91240B29-F687-4f45-9708-019B960494DF}">
-                <a14:hiddenLine xmlns:a14="http://schemas.microsoft.com/office/drawing/2010/main" xmlns="" w="9525">
+                <a14:hiddenLine xmlns="" xmlns:a14="http://schemas.microsoft.com/office/drawing/2010/main" w="9525">
                   <a:solidFill>
                     <a:srgbClr val="000000"/>
                   </a:solidFill>
@@ -3231,7 +3232,7 @@
             </a:ln>
             <a:extLst>
               <a:ext uri="{91240B29-F687-4f45-9708-019B960494DF}">
-                <a14:hiddenLine xmlns:a14="http://schemas.microsoft.com/office/drawing/2010/main" xmlns="" w="9525">
+                <a14:hiddenLine xmlns="" xmlns:a14="http://schemas.microsoft.com/office/drawing/2010/main" w="9525">
                   <a:solidFill>
                     <a:srgbClr val="000000"/>
                   </a:solidFill>
@@ -3321,7 +3322,7 @@
             </a:ln>
             <a:extLst>
               <a:ext uri="{91240B29-F687-4f45-9708-019B960494DF}">
-                <a14:hiddenLine xmlns:a14="http://schemas.microsoft.com/office/drawing/2010/main" xmlns="" w="9525">
+                <a14:hiddenLine xmlns="" xmlns:a14="http://schemas.microsoft.com/office/drawing/2010/main" w="9525">
                   <a:solidFill>
                     <a:srgbClr val="000000"/>
                   </a:solidFill>
@@ -3383,7 +3384,7 @@
             </a:ln>
             <a:extLst>
               <a:ext uri="{91240B29-F687-4f45-9708-019B960494DF}">
-                <a14:hiddenLine xmlns:a14="http://schemas.microsoft.com/office/drawing/2010/main" xmlns="" w="9525">
+                <a14:hiddenLine xmlns="" xmlns:a14="http://schemas.microsoft.com/office/drawing/2010/main" w="9525">
                   <a:solidFill>
                     <a:srgbClr val="000000"/>
                   </a:solidFill>
@@ -3473,7 +3474,7 @@
             </a:ln>
             <a:extLst>
               <a:ext uri="{91240B29-F687-4f45-9708-019B960494DF}">
-                <a14:hiddenLine xmlns:a14="http://schemas.microsoft.com/office/drawing/2010/main" xmlns="" w="9525">
+                <a14:hiddenLine xmlns="" xmlns:a14="http://schemas.microsoft.com/office/drawing/2010/main" w="9525">
                   <a:solidFill>
                     <a:srgbClr val="000000"/>
                   </a:solidFill>
@@ -3535,7 +3536,7 @@
             </a:ln>
             <a:extLst>
               <a:ext uri="{91240B29-F687-4f45-9708-019B960494DF}">
-                <a14:hiddenLine xmlns:a14="http://schemas.microsoft.com/office/drawing/2010/main" xmlns="" w="9525">
+                <a14:hiddenLine xmlns="" xmlns:a14="http://schemas.microsoft.com/office/drawing/2010/main" w="9525">
                   <a:solidFill>
                     <a:srgbClr val="000000"/>
                   </a:solidFill>
@@ -3625,7 +3626,7 @@
             </a:ln>
             <a:extLst>
               <a:ext uri="{91240B29-F687-4f45-9708-019B960494DF}">
-                <a14:hiddenLine xmlns:a14="http://schemas.microsoft.com/office/drawing/2010/main" xmlns="" w="9525">
+                <a14:hiddenLine xmlns="" xmlns:a14="http://schemas.microsoft.com/office/drawing/2010/main" w="9525">
                   <a:solidFill>
                     <a:srgbClr val="000000"/>
                   </a:solidFill>
@@ -3659,7 +3660,7 @@
             </a:ln>
             <a:extLst>
               <a:ext uri="{91240B29-F687-4f45-9708-019B960494DF}">
-                <a14:hiddenLine xmlns:a14="http://schemas.microsoft.com/office/drawing/2010/main" xmlns="" w="9525">
+                <a14:hiddenLine xmlns="" xmlns:a14="http://schemas.microsoft.com/office/drawing/2010/main" w="9525">
                   <a:solidFill>
                     <a:srgbClr val="000000"/>
                   </a:solidFill>
@@ -3724,7 +3725,7 @@
             </a:ln>
             <a:extLst>
               <a:ext uri="{91240B29-F687-4f45-9708-019B960494DF}">
-                <a14:hiddenLine xmlns:a14="http://schemas.microsoft.com/office/drawing/2010/main" xmlns="" w="9525">
+                <a14:hiddenLine xmlns="" xmlns:a14="http://schemas.microsoft.com/office/drawing/2010/main" w="9525">
                   <a:solidFill>
                     <a:srgbClr val="000000"/>
                   </a:solidFill>
@@ -3814,7 +3815,7 @@
             </a:ln>
             <a:extLst>
               <a:ext uri="{91240B29-F687-4f45-9708-019B960494DF}">
-                <a14:hiddenLine xmlns:a14="http://schemas.microsoft.com/office/drawing/2010/main" xmlns="" w="9525">
+                <a14:hiddenLine xmlns="" xmlns:a14="http://schemas.microsoft.com/office/drawing/2010/main" w="9525">
                   <a:solidFill>
                     <a:srgbClr val="000000"/>
                   </a:solidFill>
@@ -3876,7 +3877,7 @@
             </a:ln>
             <a:extLst>
               <a:ext uri="{91240B29-F687-4f45-9708-019B960494DF}">
-                <a14:hiddenLine xmlns:a14="http://schemas.microsoft.com/office/drawing/2010/main" xmlns="" w="9525">
+                <a14:hiddenLine xmlns="" xmlns:a14="http://schemas.microsoft.com/office/drawing/2010/main" w="9525">
                   <a:solidFill>
                     <a:srgbClr val="000000"/>
                   </a:solidFill>
@@ -3966,7 +3967,7 @@
             </a:ln>
             <a:extLst>
               <a:ext uri="{91240B29-F687-4f45-9708-019B960494DF}">
-                <a14:hiddenLine xmlns:a14="http://schemas.microsoft.com/office/drawing/2010/main" xmlns="" w="9525">
+                <a14:hiddenLine xmlns="" xmlns:a14="http://schemas.microsoft.com/office/drawing/2010/main" w="9525">
                   <a:solidFill>
                     <a:srgbClr val="000000"/>
                   </a:solidFill>
@@ -4056,7 +4057,7 @@
             </a:ln>
             <a:extLst>
               <a:ext uri="{91240B29-F687-4f45-9708-019B960494DF}">
-                <a14:hiddenLine xmlns:a14="http://schemas.microsoft.com/office/drawing/2010/main" xmlns="" w="9525">
+                <a14:hiddenLine xmlns="" xmlns:a14="http://schemas.microsoft.com/office/drawing/2010/main" w="9525">
                   <a:solidFill>
                     <a:srgbClr val="000000"/>
                   </a:solidFill>
@@ -4121,7 +4122,7 @@
             </a:ln>
             <a:extLst>
               <a:ext uri="{91240B29-F687-4f45-9708-019B960494DF}">
-                <a14:hiddenLine xmlns:a14="http://schemas.microsoft.com/office/drawing/2010/main" xmlns="" w="9525">
+                <a14:hiddenLine xmlns="" xmlns:a14="http://schemas.microsoft.com/office/drawing/2010/main" w="9525">
                   <a:solidFill>
                     <a:srgbClr val="000000"/>
                   </a:solidFill>
@@ -4183,7 +4184,7 @@
             </a:ln>
             <a:extLst>
               <a:ext uri="{91240B29-F687-4f45-9708-019B960494DF}">
-                <a14:hiddenLine xmlns:a14="http://schemas.microsoft.com/office/drawing/2010/main" xmlns="" w="9525">
+                <a14:hiddenLine xmlns="" xmlns:a14="http://schemas.microsoft.com/office/drawing/2010/main" w="9525">
                   <a:solidFill>
                     <a:srgbClr val="000000"/>
                   </a:solidFill>
@@ -4273,7 +4274,7 @@
             </a:ln>
             <a:extLst>
               <a:ext uri="{91240B29-F687-4f45-9708-019B960494DF}">
-                <a14:hiddenLine xmlns:a14="http://schemas.microsoft.com/office/drawing/2010/main" xmlns="" w="9525">
+                <a14:hiddenLine xmlns="" xmlns:a14="http://schemas.microsoft.com/office/drawing/2010/main" w="9525">
                   <a:solidFill>
                     <a:srgbClr val="000000"/>
                   </a:solidFill>
@@ -4363,7 +4364,7 @@
             </a:ln>
             <a:extLst>
               <a:ext uri="{91240B29-F687-4f45-9708-019B960494DF}">
-                <a14:hiddenLine xmlns:a14="http://schemas.microsoft.com/office/drawing/2010/main" xmlns="" w="9525">
+                <a14:hiddenLine xmlns="" xmlns:a14="http://schemas.microsoft.com/office/drawing/2010/main" w="9525">
                   <a:solidFill>
                     <a:srgbClr val="000000"/>
                   </a:solidFill>
@@ -4425,7 +4426,7 @@
             </a:ln>
             <a:extLst>
               <a:ext uri="{91240B29-F687-4f45-9708-019B960494DF}">
-                <a14:hiddenLine xmlns:a14="http://schemas.microsoft.com/office/drawing/2010/main" xmlns="" w="9525">
+                <a14:hiddenLine xmlns="" xmlns:a14="http://schemas.microsoft.com/office/drawing/2010/main" w="9525">
                   <a:solidFill>
                     <a:srgbClr val="000000"/>
                   </a:solidFill>
@@ -4545,7 +4546,7 @@
             </a:ln>
             <a:extLst>
               <a:ext uri="{91240B29-F687-4f45-9708-019B960494DF}">
-                <a14:hiddenLine xmlns:a14="http://schemas.microsoft.com/office/drawing/2010/main" xmlns="" w="9525">
+                <a14:hiddenLine xmlns="" xmlns:a14="http://schemas.microsoft.com/office/drawing/2010/main" w="9525">
                   <a:solidFill>
                     <a:srgbClr val="000000"/>
                   </a:solidFill>
@@ -4613,7 +4614,7 @@
             </a:ln>
             <a:extLst>
               <a:ext uri="{91240B29-F687-4f45-9708-019B960494DF}">
-                <a14:hiddenLine xmlns:a14="http://schemas.microsoft.com/office/drawing/2010/main" xmlns="" w="9525">
+                <a14:hiddenLine xmlns="" xmlns:a14="http://schemas.microsoft.com/office/drawing/2010/main" w="9525">
                   <a:solidFill>
                     <a:srgbClr val="000000"/>
                   </a:solidFill>
@@ -4703,7 +4704,7 @@
             </a:ln>
             <a:extLst>
               <a:ext uri="{91240B29-F687-4f45-9708-019B960494DF}">
-                <a14:hiddenLine xmlns:a14="http://schemas.microsoft.com/office/drawing/2010/main" xmlns="" w="9525">
+                <a14:hiddenLine xmlns="" xmlns:a14="http://schemas.microsoft.com/office/drawing/2010/main" w="9525">
                   <a:solidFill>
                     <a:srgbClr val="000000"/>
                   </a:solidFill>
@@ -4843,7 +4844,7 @@
           <a:p>
             <a:fld id="{4313F670-7F9A-774D-B73D-573401E44297}" type="datetime1">
               <a:rPr lang="en-US" smtClean="0"/>
-              <a:t>9/28/26</a:t>
+              <a:t>10/1/26</a:t>
             </a:fld>
             <a:endParaRPr lang="en-US"/>
           </a:p>
@@ -5110,7 +5111,7 @@
           <a:p>
             <a:fld id="{446F9669-A8A7-2D40-9D01-B35FC337AA30}" type="datetime1">
               <a:rPr lang="en-US" smtClean="0"/>
-              <a:t>9/28/26</a:t>
+              <a:t>10/1/26</a:t>
             </a:fld>
             <a:endParaRPr lang="en-US"/>
           </a:p>
@@ -5306,7 +5307,7 @@
           <a:p>
             <a:fld id="{FA76CF18-F41B-6B48-B3E5-599E9795C2C3}" type="datetime1">
               <a:rPr lang="en-US" smtClean="0"/>
-              <a:t>9/28/26</a:t>
+              <a:t>10/1/26</a:t>
             </a:fld>
             <a:endParaRPr lang="en-US"/>
           </a:p>
@@ -5569,7 +5570,7 @@
           <a:p>
             <a:fld id="{B9654854-6457-164F-A077-6B3035079B82}" type="datetime1">
               <a:rPr lang="en-US" smtClean="0"/>
-              <a:t>9/28/26</a:t>
+              <a:t>10/1/26</a:t>
             </a:fld>
             <a:endParaRPr lang="en-US"/>
           </a:p>
@@ -6003,7 +6004,7 @@
           <a:p>
             <a:fld id="{CE3DBFD7-E611-8C40-AC73-0C29FF63F0CD}" type="datetime1">
               <a:rPr lang="en-US" smtClean="0"/>
-              <a:t>9/28/26</a:t>
+              <a:t>10/1/26</a:t>
             </a:fld>
             <a:endParaRPr lang="en-US"/>
           </a:p>
@@ -6549,7 +6550,7 @@
           <a:p>
             <a:fld id="{C8B63B06-0493-2840-9F37-30C9412BBF17}" type="datetime1">
               <a:rPr lang="en-US" smtClean="0"/>
-              <a:t>9/28/26</a:t>
+              <a:t>10/1/26</a:t>
             </a:fld>
             <a:endParaRPr lang="en-US"/>
           </a:p>
@@ -7269,7 +7270,7 @@
           <a:p>
             <a:fld id="{72B5C0FA-8C46-E84D-B6D7-B673F2CA0A0E}" type="datetime1">
               <a:rPr lang="en-US" smtClean="0"/>
-              <a:t>9/28/26</a:t>
+              <a:t>10/1/26</a:t>
             </a:fld>
             <a:endParaRPr lang="en-US"/>
           </a:p>
@@ -7439,7 +7440,7 @@
           <a:p>
             <a:fld id="{60B9CDE1-97B4-BF46-B69C-B86855B18820}" type="datetime1">
               <a:rPr lang="en-US" smtClean="0"/>
-              <a:t>9/28/26</a:t>
+              <a:t>10/1/26</a:t>
             </a:fld>
             <a:endParaRPr lang="en-US"/>
           </a:p>
@@ -7619,7 +7620,7 @@
           <a:p>
             <a:fld id="{BE51D3A4-F9E5-FD49-AA87-B395F50451DC}" type="datetime1">
               <a:rPr lang="en-US" smtClean="0"/>
-              <a:t>9/28/26</a:t>
+              <a:t>10/1/26</a:t>
             </a:fld>
             <a:endParaRPr lang="en-US"/>
           </a:p>
@@ -7789,7 +7790,7 @@
           <a:p>
             <a:fld id="{880DFB37-B0AE-9449-85EC-14F9C83B6084}" type="datetime1">
               <a:rPr lang="en-US" smtClean="0"/>
-              <a:t>9/28/26</a:t>
+              <a:t>10/1/26</a:t>
             </a:fld>
             <a:endParaRPr lang="en-US"/>
           </a:p>
@@ -8039,7 +8040,7 @@
           <a:p>
             <a:fld id="{C939124A-616E-6944-A21A-1839F5DBE7BB}" type="datetime1">
               <a:rPr lang="en-US" smtClean="0"/>
-              <a:t>9/28/26</a:t>
+              <a:t>10/1/26</a:t>
             </a:fld>
             <a:endParaRPr lang="en-US"/>
           </a:p>
@@ -8271,7 +8272,7 @@
           <a:p>
             <a:fld id="{C6E9A026-D48C-FD43-8676-CD625DD5D84B}" type="datetime1">
               <a:rPr lang="en-US" smtClean="0"/>
-              <a:t>9/28/26</a:t>
+              <a:t>10/1/26</a:t>
             </a:fld>
             <a:endParaRPr lang="en-US"/>
           </a:p>
@@ -8657,7 +8658,7 @@
           <a:p>
             <a:fld id="{EA35111E-23A3-1440-99A3-C4C665908E3D}" type="datetime1">
               <a:rPr lang="en-US" smtClean="0"/>
-              <a:t>9/28/26</a:t>
+              <a:t>10/1/26</a:t>
             </a:fld>
             <a:endParaRPr lang="en-US"/>
           </a:p>
@@ -8780,7 +8781,7 @@
           <a:p>
             <a:fld id="{249983B9-88EF-D74B-BA6D-6A3BF17C2B38}" type="datetime1">
               <a:rPr lang="en-US" smtClean="0"/>
-              <a:t>9/28/26</a:t>
+              <a:t>10/1/26</a:t>
             </a:fld>
             <a:endParaRPr lang="en-US"/>
           </a:p>
@@ -8875,7 +8876,7 @@
           <a:p>
             <a:fld id="{E2A00AEF-B4EC-084A-8DB8-A225C7981CBB}" type="datetime1">
               <a:rPr lang="en-US" smtClean="0"/>
-              <a:t>9/28/26</a:t>
+              <a:t>10/1/26</a:t>
             </a:fld>
             <a:endParaRPr lang="en-US"/>
           </a:p>
@@ -9124,7 +9125,7 @@
           <a:p>
             <a:fld id="{97860299-21CD-A94A-A7B0-44E787F8D42C}" type="datetime1">
               <a:rPr lang="en-US" smtClean="0"/>
-              <a:t>9/28/26</a:t>
+              <a:t>10/1/26</a:t>
             </a:fld>
             <a:endParaRPr lang="en-US"/>
           </a:p>
@@ -9409,7 +9410,7 @@
           <a:p>
             <a:fld id="{3DFD19CF-4E62-D246-BA61-7B528271315F}" type="datetime1">
               <a:rPr lang="en-US" smtClean="0"/>
-              <a:t>9/28/26</a:t>
+              <a:t>10/1/26</a:t>
             </a:fld>
             <a:endParaRPr lang="en-US"/>
           </a:p>
@@ -9532,7 +9533,7 @@
           <a:noFill/>
           <a:extLst>
             <a:ext uri="{909E8E84-426E-40dd-AFC4-6F175D3DCCD1}">
-              <a14:hiddenFill xmlns:a14="http://schemas.microsoft.com/office/drawing/2010/main" xmlns="">
+              <a14:hiddenFill xmlns="" xmlns:a14="http://schemas.microsoft.com/office/drawing/2010/main">
                 <a:solidFill>
                   <a:srgbClr val="FFFFFF"/>
                 </a:solidFill>
@@ -9606,7 +9607,7 @@
               </a:ln>
               <a:extLst>
                 <a:ext uri="{91240B29-F687-4f45-9708-019B960494DF}">
-                  <a14:hiddenLine xmlns:a14="http://schemas.microsoft.com/office/drawing/2010/main" xmlns="" w="9525">
+                  <a14:hiddenLine xmlns="" xmlns:a14="http://schemas.microsoft.com/office/drawing/2010/main" w="9525">
                     <a:solidFill>
                       <a:srgbClr val="000000"/>
                     </a:solidFill>
@@ -9696,7 +9697,7 @@
               </a:ln>
               <a:extLst>
                 <a:ext uri="{91240B29-F687-4f45-9708-019B960494DF}">
-                  <a14:hiddenLine xmlns:a14="http://schemas.microsoft.com/office/drawing/2010/main" xmlns="" w="9525">
+                  <a14:hiddenLine xmlns="" xmlns:a14="http://schemas.microsoft.com/office/drawing/2010/main" w="9525">
                     <a:solidFill>
                       <a:srgbClr val="000000"/>
                     </a:solidFill>
@@ -9786,7 +9787,7 @@
               </a:ln>
               <a:extLst>
                 <a:ext uri="{91240B29-F687-4f45-9708-019B960494DF}">
-                  <a14:hiddenLine xmlns:a14="http://schemas.microsoft.com/office/drawing/2010/main" xmlns="" w="9525">
+                  <a14:hiddenLine xmlns="" xmlns:a14="http://schemas.microsoft.com/office/drawing/2010/main" w="9525">
                     <a:solidFill>
                       <a:srgbClr val="000000"/>
                     </a:solidFill>
@@ -9848,7 +9849,7 @@
               </a:ln>
               <a:extLst>
                 <a:ext uri="{91240B29-F687-4f45-9708-019B960494DF}">
-                  <a14:hiddenLine xmlns:a14="http://schemas.microsoft.com/office/drawing/2010/main" xmlns="" w="9525">
+                  <a14:hiddenLine xmlns="" xmlns:a14="http://schemas.microsoft.com/office/drawing/2010/main" w="9525">
                     <a:solidFill>
                       <a:srgbClr val="000000"/>
                     </a:solidFill>
@@ -9938,7 +9939,7 @@
               </a:ln>
               <a:extLst>
                 <a:ext uri="{91240B29-F687-4f45-9708-019B960494DF}">
-                  <a14:hiddenLine xmlns:a14="http://schemas.microsoft.com/office/drawing/2010/main" xmlns="" w="9525">
+                  <a14:hiddenLine xmlns="" xmlns:a14="http://schemas.microsoft.com/office/drawing/2010/main" w="9525">
                     <a:solidFill>
                       <a:srgbClr val="000000"/>
                     </a:solidFill>
@@ -10000,7 +10001,7 @@
               </a:ln>
               <a:extLst>
                 <a:ext uri="{91240B29-F687-4f45-9708-019B960494DF}">
-                  <a14:hiddenLine xmlns:a14="http://schemas.microsoft.com/office/drawing/2010/main" xmlns="" w="9525">
+                  <a14:hiddenLine xmlns="" xmlns:a14="http://schemas.microsoft.com/office/drawing/2010/main" w="9525">
                     <a:solidFill>
                       <a:srgbClr val="000000"/>
                     </a:solidFill>
@@ -10062,7 +10063,7 @@
               </a:ln>
               <a:extLst>
                 <a:ext uri="{91240B29-F687-4f45-9708-019B960494DF}">
-                  <a14:hiddenLine xmlns:a14="http://schemas.microsoft.com/office/drawing/2010/main" xmlns="" w="9525">
+                  <a14:hiddenLine xmlns="" xmlns:a14="http://schemas.microsoft.com/office/drawing/2010/main" w="9525">
                     <a:solidFill>
                       <a:srgbClr val="000000"/>
                     </a:solidFill>
@@ -10152,7 +10153,7 @@
               </a:ln>
               <a:extLst>
                 <a:ext uri="{91240B29-F687-4f45-9708-019B960494DF}">
-                  <a14:hiddenLine xmlns:a14="http://schemas.microsoft.com/office/drawing/2010/main" xmlns="" w="9525">
+                  <a14:hiddenLine xmlns="" xmlns:a14="http://schemas.microsoft.com/office/drawing/2010/main" w="9525">
                     <a:solidFill>
                       <a:srgbClr val="000000"/>
                     </a:solidFill>
@@ -10242,7 +10243,7 @@
               </a:ln>
               <a:extLst>
                 <a:ext uri="{91240B29-F687-4f45-9708-019B960494DF}">
-                  <a14:hiddenLine xmlns:a14="http://schemas.microsoft.com/office/drawing/2010/main" xmlns="" w="9525">
+                  <a14:hiddenLine xmlns="" xmlns:a14="http://schemas.microsoft.com/office/drawing/2010/main" w="9525">
                     <a:solidFill>
                       <a:srgbClr val="000000"/>
                     </a:solidFill>
@@ -10304,7 +10305,7 @@
               </a:ln>
               <a:extLst>
                 <a:ext uri="{91240B29-F687-4f45-9708-019B960494DF}">
-                  <a14:hiddenLine xmlns:a14="http://schemas.microsoft.com/office/drawing/2010/main" xmlns="" w="9525">
+                  <a14:hiddenLine xmlns="" xmlns:a14="http://schemas.microsoft.com/office/drawing/2010/main" w="9525">
                     <a:solidFill>
                       <a:srgbClr val="000000"/>
                     </a:solidFill>
@@ -10414,7 +10415,7 @@
               </a:ln>
               <a:extLst>
                 <a:ext uri="{91240B29-F687-4f45-9708-019B960494DF}">
-                  <a14:hiddenLine xmlns:a14="http://schemas.microsoft.com/office/drawing/2010/main" xmlns="" w="9525">
+                  <a14:hiddenLine xmlns="" xmlns:a14="http://schemas.microsoft.com/office/drawing/2010/main" w="9525">
                     <a:solidFill>
                       <a:srgbClr val="000000"/>
                     </a:solidFill>
@@ -10498,7 +10499,7 @@
               </a:ln>
               <a:extLst>
                 <a:ext uri="{91240B29-F687-4f45-9708-019B960494DF}">
-                  <a14:hiddenLine xmlns:a14="http://schemas.microsoft.com/office/drawing/2010/main" xmlns="" w="9525">
+                  <a14:hiddenLine xmlns="" xmlns:a14="http://schemas.microsoft.com/office/drawing/2010/main" w="9525">
                     <a:solidFill>
                       <a:srgbClr val="000000"/>
                     </a:solidFill>
@@ -10560,7 +10561,7 @@
               </a:ln>
               <a:extLst>
                 <a:ext uri="{91240B29-F687-4f45-9708-019B960494DF}">
-                  <a14:hiddenLine xmlns:a14="http://schemas.microsoft.com/office/drawing/2010/main" xmlns="" w="9525">
+                  <a14:hiddenLine xmlns="" xmlns:a14="http://schemas.microsoft.com/office/drawing/2010/main" w="9525">
                     <a:solidFill>
                       <a:srgbClr val="000000"/>
                     </a:solidFill>
@@ -10622,7 +10623,7 @@
               </a:ln>
               <a:extLst>
                 <a:ext uri="{91240B29-F687-4f45-9708-019B960494DF}">
-                  <a14:hiddenLine xmlns:a14="http://schemas.microsoft.com/office/drawing/2010/main" xmlns="" w="9525">
+                  <a14:hiddenLine xmlns="" xmlns:a14="http://schemas.microsoft.com/office/drawing/2010/main" w="9525">
                     <a:solidFill>
                       <a:srgbClr val="000000"/>
                     </a:solidFill>
@@ -10712,7 +10713,7 @@
               </a:ln>
               <a:extLst>
                 <a:ext uri="{91240B29-F687-4f45-9708-019B960494DF}">
-                  <a14:hiddenLine xmlns:a14="http://schemas.microsoft.com/office/drawing/2010/main" xmlns="" w="9525">
+                  <a14:hiddenLine xmlns="" xmlns:a14="http://schemas.microsoft.com/office/drawing/2010/main" w="9525">
                     <a:solidFill>
                       <a:srgbClr val="000000"/>
                     </a:solidFill>
@@ -10746,7 +10747,7 @@
               </a:ln>
               <a:extLst>
                 <a:ext uri="{91240B29-F687-4f45-9708-019B960494DF}">
-                  <a14:hiddenLine xmlns:a14="http://schemas.microsoft.com/office/drawing/2010/main" xmlns="" w="9525">
+                  <a14:hiddenLine xmlns="" xmlns:a14="http://schemas.microsoft.com/office/drawing/2010/main" w="9525">
                     <a:solidFill>
                       <a:srgbClr val="000000"/>
                     </a:solidFill>
@@ -10811,7 +10812,7 @@
               </a:ln>
               <a:extLst>
                 <a:ext uri="{91240B29-F687-4f45-9708-019B960494DF}">
-                  <a14:hiddenLine xmlns:a14="http://schemas.microsoft.com/office/drawing/2010/main" xmlns="" w="9525">
+                  <a14:hiddenLine xmlns="" xmlns:a14="http://schemas.microsoft.com/office/drawing/2010/main" w="9525">
                     <a:solidFill>
                       <a:srgbClr val="000000"/>
                     </a:solidFill>
@@ -10901,7 +10902,7 @@
               </a:ln>
               <a:extLst>
                 <a:ext uri="{91240B29-F687-4f45-9708-019B960494DF}">
-                  <a14:hiddenLine xmlns:a14="http://schemas.microsoft.com/office/drawing/2010/main" xmlns="" w="9525">
+                  <a14:hiddenLine xmlns="" xmlns:a14="http://schemas.microsoft.com/office/drawing/2010/main" w="9525">
                     <a:solidFill>
                       <a:srgbClr val="000000"/>
                     </a:solidFill>
@@ -10963,7 +10964,7 @@
               </a:ln>
               <a:extLst>
                 <a:ext uri="{91240B29-F687-4f45-9708-019B960494DF}">
-                  <a14:hiddenLine xmlns:a14="http://schemas.microsoft.com/office/drawing/2010/main" xmlns="" w="9525">
+                  <a14:hiddenLine xmlns="" xmlns:a14="http://schemas.microsoft.com/office/drawing/2010/main" w="9525">
                     <a:solidFill>
                       <a:srgbClr val="000000"/>
                     </a:solidFill>
@@ -11053,7 +11054,7 @@
               </a:ln>
               <a:extLst>
                 <a:ext uri="{91240B29-F687-4f45-9708-019B960494DF}">
-                  <a14:hiddenLine xmlns:a14="http://schemas.microsoft.com/office/drawing/2010/main" xmlns="" w="9525">
+                  <a14:hiddenLine xmlns="" xmlns:a14="http://schemas.microsoft.com/office/drawing/2010/main" w="9525">
                     <a:solidFill>
                       <a:srgbClr val="000000"/>
                     </a:solidFill>
@@ -11118,7 +11119,7 @@
               </a:ln>
               <a:extLst>
                 <a:ext uri="{91240B29-F687-4f45-9708-019B960494DF}">
-                  <a14:hiddenLine xmlns:a14="http://schemas.microsoft.com/office/drawing/2010/main" xmlns="" w="9525">
+                  <a14:hiddenLine xmlns="" xmlns:a14="http://schemas.microsoft.com/office/drawing/2010/main" w="9525">
                     <a:solidFill>
                       <a:srgbClr val="000000"/>
                     </a:solidFill>
@@ -11180,7 +11181,7 @@
               </a:ln>
               <a:extLst>
                 <a:ext uri="{91240B29-F687-4f45-9708-019B960494DF}">
-                  <a14:hiddenLine xmlns:a14="http://schemas.microsoft.com/office/drawing/2010/main" xmlns="" w="9525">
+                  <a14:hiddenLine xmlns="" xmlns:a14="http://schemas.microsoft.com/office/drawing/2010/main" w="9525">
                     <a:solidFill>
                       <a:srgbClr val="000000"/>
                     </a:solidFill>
@@ -11270,7 +11271,7 @@
               </a:ln>
               <a:extLst>
                 <a:ext uri="{91240B29-F687-4f45-9708-019B960494DF}">
-                  <a14:hiddenLine xmlns:a14="http://schemas.microsoft.com/office/drawing/2010/main" xmlns="" w="9525">
+                  <a14:hiddenLine xmlns="" xmlns:a14="http://schemas.microsoft.com/office/drawing/2010/main" w="9525">
                     <a:solidFill>
                       <a:srgbClr val="000000"/>
                     </a:solidFill>
@@ -11360,7 +11361,7 @@
               </a:ln>
               <a:extLst>
                 <a:ext uri="{91240B29-F687-4f45-9708-019B960494DF}">
-                  <a14:hiddenLine xmlns:a14="http://schemas.microsoft.com/office/drawing/2010/main" xmlns="" w="9525">
+                  <a14:hiddenLine xmlns="" xmlns:a14="http://schemas.microsoft.com/office/drawing/2010/main" w="9525">
                     <a:solidFill>
                       <a:srgbClr val="000000"/>
                     </a:solidFill>
@@ -11425,7 +11426,7 @@
               </a:ln>
               <a:extLst>
                 <a:ext uri="{91240B29-F687-4f45-9708-019B960494DF}">
-                  <a14:hiddenLine xmlns:a14="http://schemas.microsoft.com/office/drawing/2010/main" xmlns="" w="9525">
+                  <a14:hiddenLine xmlns="" xmlns:a14="http://schemas.microsoft.com/office/drawing/2010/main" w="9525">
                     <a:solidFill>
                       <a:srgbClr val="000000"/>
                     </a:solidFill>
@@ -11545,7 +11546,7 @@
               </a:ln>
               <a:extLst>
                 <a:ext uri="{91240B29-F687-4f45-9708-019B960494DF}">
-                  <a14:hiddenLine xmlns:a14="http://schemas.microsoft.com/office/drawing/2010/main" xmlns="" w="9525">
+                  <a14:hiddenLine xmlns="" xmlns:a14="http://schemas.microsoft.com/office/drawing/2010/main" w="9525">
                     <a:solidFill>
                       <a:srgbClr val="000000"/>
                     </a:solidFill>
@@ -11626,7 +11627,7 @@
               </a:ln>
               <a:extLst>
                 <a:ext uri="{91240B29-F687-4f45-9708-019B960494DF}">
-                  <a14:hiddenLine xmlns:a14="http://schemas.microsoft.com/office/drawing/2010/main" xmlns="" w="9525">
+                  <a14:hiddenLine xmlns="" xmlns:a14="http://schemas.microsoft.com/office/drawing/2010/main" w="9525">
                     <a:solidFill>
                       <a:srgbClr val="000000"/>
                     </a:solidFill>
@@ -11741,7 +11742,7 @@
               </a:ln>
               <a:extLst>
                 <a:ext uri="{91240B29-F687-4f45-9708-019B960494DF}">
-                  <a14:hiddenLine xmlns:a14="http://schemas.microsoft.com/office/drawing/2010/main" xmlns="" w="9525">
+                  <a14:hiddenLine xmlns="" xmlns:a14="http://schemas.microsoft.com/office/drawing/2010/main" w="9525">
                     <a:solidFill>
                       <a:srgbClr val="000000"/>
                     </a:solidFill>
@@ -11831,7 +11832,7 @@
               </a:ln>
               <a:extLst>
                 <a:ext uri="{91240B29-F687-4f45-9708-019B960494DF}">
-                  <a14:hiddenLine xmlns:a14="http://schemas.microsoft.com/office/drawing/2010/main" xmlns="" w="9525">
+                  <a14:hiddenLine xmlns="" xmlns:a14="http://schemas.microsoft.com/office/drawing/2010/main" w="9525">
                     <a:solidFill>
                       <a:srgbClr val="000000"/>
                     </a:solidFill>
@@ -11896,7 +11897,7 @@
               </a:ln>
               <a:extLst>
                 <a:ext uri="{91240B29-F687-4f45-9708-019B960494DF}">
-                  <a14:hiddenLine xmlns:a14="http://schemas.microsoft.com/office/drawing/2010/main" xmlns="" w="9525">
+                  <a14:hiddenLine xmlns="" xmlns:a14="http://schemas.microsoft.com/office/drawing/2010/main" w="9525">
                     <a:solidFill>
                       <a:srgbClr val="000000"/>
                     </a:solidFill>
@@ -11986,7 +11987,7 @@
               </a:ln>
               <a:extLst>
                 <a:ext uri="{91240B29-F687-4f45-9708-019B960494DF}">
-                  <a14:hiddenLine xmlns:a14="http://schemas.microsoft.com/office/drawing/2010/main" xmlns="" w="9525">
+                  <a14:hiddenLine xmlns="" xmlns:a14="http://schemas.microsoft.com/office/drawing/2010/main" w="9525">
                     <a:solidFill>
                       <a:srgbClr val="000000"/>
                     </a:solidFill>
@@ -12054,7 +12055,7 @@
               </a:ln>
               <a:extLst>
                 <a:ext uri="{91240B29-F687-4f45-9708-019B960494DF}">
-                  <a14:hiddenLine xmlns:a14="http://schemas.microsoft.com/office/drawing/2010/main" xmlns="" w="9525">
+                  <a14:hiddenLine xmlns="" xmlns:a14="http://schemas.microsoft.com/office/drawing/2010/main" w="9525">
                     <a:solidFill>
                       <a:srgbClr val="000000"/>
                     </a:solidFill>
@@ -12144,7 +12145,7 @@
               </a:ln>
               <a:extLst>
                 <a:ext uri="{91240B29-F687-4f45-9708-019B960494DF}">
-                  <a14:hiddenLine xmlns:a14="http://schemas.microsoft.com/office/drawing/2010/main" xmlns="" w="9525">
+                  <a14:hiddenLine xmlns="" xmlns:a14="http://schemas.microsoft.com/office/drawing/2010/main" w="9525">
                     <a:solidFill>
                       <a:srgbClr val="000000"/>
                     </a:solidFill>
@@ -12212,7 +12213,7 @@
               </a:ln>
               <a:extLst>
                 <a:ext uri="{91240B29-F687-4f45-9708-019B960494DF}">
-                  <a14:hiddenLine xmlns:a14="http://schemas.microsoft.com/office/drawing/2010/main" xmlns="" w="9525">
+                  <a14:hiddenLine xmlns="" xmlns:a14="http://schemas.microsoft.com/office/drawing/2010/main" w="9525">
                     <a:solidFill>
                       <a:srgbClr val="000000"/>
                     </a:solidFill>
@@ -12302,7 +12303,7 @@
               </a:ln>
               <a:extLst>
                 <a:ext uri="{91240B29-F687-4f45-9708-019B960494DF}">
-                  <a14:hiddenLine xmlns:a14="http://schemas.microsoft.com/office/drawing/2010/main" xmlns="" w="9525">
+                  <a14:hiddenLine xmlns="" xmlns:a14="http://schemas.microsoft.com/office/drawing/2010/main" w="9525">
                     <a:solidFill>
                       <a:srgbClr val="000000"/>
                     </a:solidFill>
@@ -12336,7 +12337,7 @@
               </a:ln>
               <a:extLst>
                 <a:ext uri="{91240B29-F687-4f45-9708-019B960494DF}">
-                  <a14:hiddenLine xmlns:a14="http://schemas.microsoft.com/office/drawing/2010/main" xmlns="" w="9525">
+                  <a14:hiddenLine xmlns="" xmlns:a14="http://schemas.microsoft.com/office/drawing/2010/main" w="9525">
                     <a:solidFill>
                       <a:srgbClr val="000000"/>
                     </a:solidFill>
@@ -12476,7 +12477,7 @@
           <a:p>
             <a:fld id="{92FF8978-FE14-CC4A-93A6-934EB06543C0}" type="datetime1">
               <a:rPr lang="en-US" smtClean="0"/>
-              <a:t>9/28/26</a:t>
+              <a:t>10/1/26</a:t>
             </a:fld>
             <a:endParaRPr lang="en-US"/>
           </a:p>
@@ -14052,6 +14053,355 @@
 </file>
 
 <file path=ppt/slides/slide14.xml><?xml version="1.0" encoding="utf-8"?>
+<p:sld xmlns:a="http://schemas.openxmlformats.org/drawingml/2006/main" xmlns:r="http://schemas.openxmlformats.org/officeDocument/2006/relationships" xmlns:p="http://schemas.openxmlformats.org/presentationml/2006/main">
+  <p:cSld>
+    <p:spTree>
+      <p:nvGrpSpPr>
+        <p:cNvPr id="1" name="">
+          <a:extLst>
+            <a:ext uri="{FF2B5EF4-FFF2-40B4-BE49-F238E27FC236}">
+              <a16:creationId xmlns:a16="http://schemas.microsoft.com/office/drawing/2014/main" id="{7A303C0C-304D-B99E-1C1F-EC74554DFDD2}"/>
+            </a:ext>
+          </a:extLst>
+        </p:cNvPr>
+        <p:cNvGrpSpPr/>
+        <p:nvPr/>
+      </p:nvGrpSpPr>
+      <p:grpSpPr>
+        <a:xfrm>
+          <a:off x="0" y="0"/>
+          <a:ext cx="0" cy="0"/>
+          <a:chOff x="0" y="0"/>
+          <a:chExt cx="0" cy="0"/>
+        </a:xfrm>
+      </p:grpSpPr>
+      <p:sp>
+        <p:nvSpPr>
+          <p:cNvPr id="6146" name="Rectangle 2">
+            <a:extLst>
+              <a:ext uri="{FF2B5EF4-FFF2-40B4-BE49-F238E27FC236}">
+                <a16:creationId xmlns:a16="http://schemas.microsoft.com/office/drawing/2014/main" id="{3802D250-089E-6EED-6DCD-A9305CA473F7}"/>
+              </a:ext>
+            </a:extLst>
+          </p:cNvPr>
+          <p:cNvSpPr>
+            <a:spLocks noGrp="1" noChangeArrowheads="1"/>
+          </p:cNvSpPr>
+          <p:nvPr>
+            <p:ph type="title"/>
+            <p:custDataLst>
+              <p:tags r:id="rId1"/>
+            </p:custDataLst>
+          </p:nvPr>
+        </p:nvSpPr>
+        <p:spPr>
+          <a:xfrm>
+            <a:off x="1141413" y="284084"/>
+            <a:ext cx="9905998" cy="620791"/>
+          </a:xfrm>
+        </p:spPr>
+        <p:txBody>
+          <a:bodyPr/>
+          <a:lstStyle/>
+          <a:p>
+            <a:pPr algn="ctr"/>
+            <a:r>
+              <a:rPr lang="en-US" dirty="0"/>
+              <a:t>Lecture 12 - Thursday, Oct. 1</a:t>
+            </a:r>
+          </a:p>
+        </p:txBody>
+      </p:sp>
+      <p:sp>
+        <p:nvSpPr>
+          <p:cNvPr id="6147" name="Rectangle 3">
+            <a:extLst>
+              <a:ext uri="{FF2B5EF4-FFF2-40B4-BE49-F238E27FC236}">
+                <a16:creationId xmlns:a16="http://schemas.microsoft.com/office/drawing/2014/main" id="{D2E55A73-4B71-D946-0490-88B2C052B654}"/>
+              </a:ext>
+            </a:extLst>
+          </p:cNvPr>
+          <p:cNvSpPr>
+            <a:spLocks noGrp="1" noChangeArrowheads="1"/>
+          </p:cNvSpPr>
+          <p:nvPr>
+            <p:ph idx="1"/>
+            <p:custDataLst>
+              <p:tags r:id="rId2"/>
+            </p:custDataLst>
+          </p:nvPr>
+        </p:nvSpPr>
+        <p:spPr>
+          <a:xfrm>
+            <a:off x="1294151" y="1098548"/>
+            <a:ext cx="9600522" cy="5475367"/>
+          </a:xfrm>
+        </p:spPr>
+        <p:txBody>
+          <a:bodyPr>
+            <a:normAutofit fontScale="55000" lnSpcReduction="20000"/>
+          </a:bodyPr>
+          <a:lstStyle/>
+          <a:p>
+            <a:r>
+              <a:rPr lang="en-US" dirty="0">
+                <a:latin typeface="Arial" panose="020B0604020202020204" pitchFamily="34" charset="0"/>
+                <a:cs typeface="Arial" panose="020B0604020202020204" pitchFamily="34" charset="0"/>
+              </a:rPr>
+              <a:t>Please remember </a:t>
+            </a:r>
+            <a:r>
+              <a:rPr lang="en-US" b="1" i="1" u="sng" dirty="0">
+                <a:latin typeface="Arial" panose="020B0604020202020204" pitchFamily="34" charset="0"/>
+                <a:cs typeface="Arial" panose="020B0604020202020204" pitchFamily="34" charset="0"/>
+              </a:rPr>
+              <a:t>no laptops / phones</a:t>
+            </a:r>
+            <a:r>
+              <a:rPr lang="en-US" dirty="0">
+                <a:latin typeface="Arial" panose="020B0604020202020204" pitchFamily="34" charset="0"/>
+                <a:cs typeface="Arial" panose="020B0604020202020204" pitchFamily="34" charset="0"/>
+              </a:rPr>
+              <a:t> and </a:t>
+            </a:r>
+            <a:r>
+              <a:rPr lang="en-US" b="1" i="1" u="sng" dirty="0">
+                <a:latin typeface="Arial" panose="020B0604020202020204" pitchFamily="34" charset="0"/>
+                <a:cs typeface="Arial" panose="020B0604020202020204" pitchFamily="34" charset="0"/>
+              </a:rPr>
+              <a:t>attendance policy</a:t>
+            </a:r>
+            <a:endParaRPr lang="en-US" dirty="0">
+              <a:latin typeface="Arial" panose="020B0604020202020204" pitchFamily="34" charset="0"/>
+              <a:cs typeface="Arial" panose="020B0604020202020204" pitchFamily="34" charset="0"/>
+            </a:endParaRPr>
+          </a:p>
+          <a:p>
+            <a:r>
+              <a:rPr lang="en-US" dirty="0">
+                <a:latin typeface="Arial" panose="020B0604020202020204" pitchFamily="34" charset="0"/>
+                <a:cs typeface="Arial" panose="020B0604020202020204" pitchFamily="34" charset="0"/>
+              </a:rPr>
+              <a:t>October! Best month of the year! Woo!</a:t>
+            </a:r>
+          </a:p>
+          <a:p>
+            <a:r>
+              <a:rPr lang="en-US" dirty="0">
+                <a:latin typeface="Arial" panose="020B0604020202020204" pitchFamily="34" charset="0"/>
+                <a:cs typeface="Arial" panose="020B0604020202020204" pitchFamily="34" charset="0"/>
+              </a:rPr>
+              <a:t>This week:</a:t>
+            </a:r>
+          </a:p>
+          <a:p>
+            <a:pPr lvl="1"/>
+            <a:r>
+              <a:rPr lang="en-US" dirty="0">
+                <a:latin typeface="Arial" panose="020B0604020202020204" pitchFamily="34" charset="0"/>
+                <a:cs typeface="Arial" panose="020B0604020202020204" pitchFamily="34" charset="0"/>
+              </a:rPr>
+              <a:t>Mod 2 written assignment is due TONIGHT!</a:t>
+            </a:r>
+          </a:p>
+          <a:p>
+            <a:pPr lvl="1"/>
+            <a:r>
+              <a:rPr lang="en-US" dirty="0">
+                <a:latin typeface="Arial" panose="020B0604020202020204" pitchFamily="34" charset="0"/>
+                <a:cs typeface="Arial" panose="020B0604020202020204" pitchFamily="34" charset="0"/>
+              </a:rPr>
+              <a:t>Fall break is next week (woohoo!)</a:t>
+            </a:r>
+          </a:p>
+          <a:p>
+            <a:r>
+              <a:rPr lang="en-US" dirty="0">
+                <a:latin typeface="Arial" panose="020B0604020202020204" pitchFamily="34" charset="0"/>
+                <a:cs typeface="Arial" panose="020B0604020202020204" pitchFamily="34" charset="0"/>
+              </a:rPr>
+              <a:t>Grading</a:t>
+            </a:r>
+          </a:p>
+          <a:p>
+            <a:pPr lvl="1"/>
+            <a:r>
+              <a:rPr lang="en-US" dirty="0">
+                <a:latin typeface="Arial" panose="020B0604020202020204" pitchFamily="34" charset="0"/>
+                <a:cs typeface="Arial" panose="020B0604020202020204" pitchFamily="34" charset="0"/>
+              </a:rPr>
+              <a:t>Quiz module 1 is graded! You will get it back automatically at noon today. Questions available until next Tue.</a:t>
+            </a:r>
+          </a:p>
+          <a:p>
+            <a:pPr lvl="1"/>
+            <a:r>
+              <a:rPr lang="en-US" dirty="0">
+                <a:latin typeface="Arial" panose="020B0604020202020204" pitchFamily="34" charset="0"/>
+                <a:cs typeface="Arial" panose="020B0604020202020204" pitchFamily="34" charset="0"/>
+              </a:rPr>
+              <a:t>Module 1 homework is graded! Regrades open if you need it.</a:t>
+            </a:r>
+          </a:p>
+          <a:p>
+            <a:pPr lvl="1"/>
+            <a:r>
+              <a:rPr lang="en-US" dirty="0">
+                <a:latin typeface="Arial" panose="020B0604020202020204" pitchFamily="34" charset="0"/>
+                <a:cs typeface="Arial" panose="020B0604020202020204" pitchFamily="34" charset="0"/>
+              </a:rPr>
+              <a:t>Module 0 homework has been graded, but regrades are opened up as well if you need it</a:t>
+            </a:r>
+          </a:p>
+          <a:p>
+            <a:r>
+              <a:rPr lang="en-US" dirty="0">
+                <a:latin typeface="Arial" panose="020B0604020202020204" pitchFamily="34" charset="0"/>
+                <a:cs typeface="Arial" panose="020B0604020202020204" pitchFamily="34" charset="0"/>
+              </a:rPr>
+              <a:t>Module 1 Quiz Details</a:t>
+            </a:r>
+          </a:p>
+          <a:p>
+            <a:pPr lvl="1"/>
+            <a:r>
+              <a:rPr lang="en-US" dirty="0">
+                <a:latin typeface="Arial" panose="020B0604020202020204" pitchFamily="34" charset="0"/>
+                <a:cs typeface="Arial" panose="020B0604020202020204" pitchFamily="34" charset="0"/>
+              </a:rPr>
+              <a:t>Remember that your DFA scores should be equal. If not let Gustavo know.</a:t>
+            </a:r>
+          </a:p>
+          <a:p>
+            <a:pPr lvl="1"/>
+            <a:r>
+              <a:rPr lang="en-US" dirty="0">
+                <a:latin typeface="Arial" panose="020B0604020202020204" pitchFamily="34" charset="0"/>
+                <a:cs typeface="Arial" panose="020B0604020202020204" pitchFamily="34" charset="0"/>
+              </a:rPr>
+              <a:t>Average was a 78% (so pretty good. Not bad, not amazing…nothing to worry about I think). Remember you have a retake during final</a:t>
+            </a:r>
+          </a:p>
+          <a:p>
+            <a:r>
+              <a:rPr lang="en-US" dirty="0">
+                <a:latin typeface="Arial" panose="020B0604020202020204" pitchFamily="34" charset="0"/>
+                <a:cs typeface="Arial" panose="020B0604020202020204" pitchFamily="34" charset="0"/>
+              </a:rPr>
+              <a:t>Quiz 2</a:t>
+            </a:r>
+          </a:p>
+          <a:p>
+            <a:pPr lvl="1"/>
+            <a:r>
+              <a:rPr lang="en-US" dirty="0">
+                <a:latin typeface="Arial" panose="020B0604020202020204" pitchFamily="34" charset="0"/>
+                <a:cs typeface="Arial" panose="020B0604020202020204" pitchFamily="34" charset="0"/>
+              </a:rPr>
+              <a:t>Reservations are available now. Please sign up on </a:t>
+            </a:r>
+            <a:r>
+              <a:rPr lang="en-US" dirty="0" err="1">
+                <a:latin typeface="Arial" panose="020B0604020202020204" pitchFamily="34" charset="0"/>
+                <a:cs typeface="Arial" panose="020B0604020202020204" pitchFamily="34" charset="0"/>
+              </a:rPr>
+              <a:t>PrairieTest</a:t>
+            </a:r>
+            <a:r>
+              <a:rPr lang="en-US" dirty="0">
+                <a:latin typeface="Arial" panose="020B0604020202020204" pitchFamily="34" charset="0"/>
+                <a:cs typeface="Arial" panose="020B0604020202020204" pitchFamily="34" charset="0"/>
+              </a:rPr>
+              <a:t> ASAP!</a:t>
+            </a:r>
+          </a:p>
+          <a:p>
+            <a:pPr lvl="1"/>
+            <a:r>
+              <a:rPr lang="en-US" dirty="0">
+                <a:latin typeface="Arial" panose="020B0604020202020204" pitchFamily="34" charset="0"/>
+                <a:cs typeface="Arial" panose="020B0604020202020204" pitchFamily="34" charset="0"/>
+              </a:rPr>
+              <a:t>There will be practice test again so you can become familiar with question format (not for question content…just format)</a:t>
+            </a:r>
+          </a:p>
+          <a:p>
+            <a:pPr lvl="1"/>
+            <a:r>
+              <a:rPr lang="en-US" dirty="0">
+                <a:latin typeface="Arial" panose="020B0604020202020204" pitchFamily="34" charset="0"/>
+                <a:cs typeface="Arial" panose="020B0604020202020204" pitchFamily="34" charset="0"/>
+              </a:rPr>
+              <a:t>Question summary is on the next slide</a:t>
+            </a:r>
+          </a:p>
+          <a:p>
+            <a:r>
+              <a:rPr lang="en-US" dirty="0">
+                <a:latin typeface="Arial" panose="020B0604020202020204" pitchFamily="34" charset="0"/>
+                <a:cs typeface="Arial" panose="020B0604020202020204" pitchFamily="34" charset="0"/>
+              </a:rPr>
+              <a:t>OH Check-Ins</a:t>
+            </a:r>
+          </a:p>
+          <a:p>
+            <a:pPr lvl="1"/>
+            <a:r>
+              <a:rPr lang="en-US" dirty="0">
+                <a:latin typeface="Arial" panose="020B0604020202020204" pitchFamily="34" charset="0"/>
+                <a:cs typeface="Arial" panose="020B0604020202020204" pitchFamily="34" charset="0"/>
+              </a:rPr>
+              <a:t>This is shaping up but I won’t have more concrete information until next week!</a:t>
+            </a:r>
+          </a:p>
+          <a:p>
+            <a:r>
+              <a:rPr lang="en-US" dirty="0">
+                <a:latin typeface="Arial" panose="020B0604020202020204" pitchFamily="34" charset="0"/>
+                <a:cs typeface="Arial" panose="020B0604020202020204" pitchFamily="34" charset="0"/>
+              </a:rPr>
+              <a:t>These slides are linked on the course webpage “slides” page.</a:t>
+            </a:r>
+          </a:p>
+          <a:p>
+            <a:r>
+              <a:rPr lang="en-US" dirty="0">
+                <a:latin typeface="Arial" panose="020B0604020202020204" pitchFamily="34" charset="0"/>
+                <a:cs typeface="Arial" panose="020B0604020202020204" pitchFamily="34" charset="0"/>
+              </a:rPr>
+              <a:t>Today we </a:t>
+            </a:r>
+            <a:r>
+              <a:rPr lang="en-US">
+                <a:latin typeface="Arial" panose="020B0604020202020204" pitchFamily="34" charset="0"/>
+                <a:cs typeface="Arial" panose="020B0604020202020204" pitchFamily="34" charset="0"/>
+              </a:rPr>
+              <a:t>will finish </a:t>
+            </a:r>
+            <a:r>
+              <a:rPr lang="en-US" dirty="0">
+                <a:latin typeface="Arial" panose="020B0604020202020204" pitchFamily="34" charset="0"/>
+                <a:cs typeface="Arial" panose="020B0604020202020204" pitchFamily="34" charset="0"/>
+              </a:rPr>
+              <a:t>Module 2 – Context-Free Grammars.</a:t>
+            </a:r>
+          </a:p>
+        </p:txBody>
+      </p:sp>
+    </p:spTree>
+    <p:extLst>
+      <p:ext uri="{BB962C8B-B14F-4D97-AF65-F5344CB8AC3E}">
+        <p14:creationId xmlns:p14="http://schemas.microsoft.com/office/powerpoint/2010/main" val="1393696115"/>
+      </p:ext>
+    </p:extLst>
+  </p:cSld>
+  <p:clrMapOvr>
+    <a:masterClrMapping/>
+  </p:clrMapOvr>
+</p:sld>
+</file>
+
+<file path=ppt/slides/slide15.xml><?xml version="1.0" encoding="utf-8"?>
 <p:sld xmlns:a="http://schemas.openxmlformats.org/drawingml/2006/main" xmlns:r="http://schemas.openxmlformats.org/officeDocument/2006/relationships" xmlns:p="http://schemas.openxmlformats.org/presentationml/2006/main">
   <p:cSld>
     <p:spTree>
@@ -18421,6 +18771,18 @@
 </p:tagLst>
 </file>
 
+<file path=ppt/tags/tag31.xml><?xml version="1.0" encoding="utf-8"?>
+<p:tagLst xmlns:a="http://schemas.openxmlformats.org/drawingml/2006/main" xmlns:r="http://schemas.openxmlformats.org/officeDocument/2006/relationships" xmlns:p="http://schemas.openxmlformats.org/presentationml/2006/main">
+  <p:tag name="_INSTRUCTOR VIEW19C14C36-AC8E-43BC-9DB6-C2AAF774C7DC|PANE__TAG" val="_"/>
+</p:tagLst>
+</file>
+
+<file path=ppt/tags/tag32.xml><?xml version="1.0" encoding="utf-8"?>
+<p:tagLst xmlns:a="http://schemas.openxmlformats.org/drawingml/2006/main" xmlns:r="http://schemas.openxmlformats.org/officeDocument/2006/relationships" xmlns:p="http://schemas.openxmlformats.org/presentationml/2006/main">
+  <p:tag name="_INSTRUCTOR VIEW19C14C36-AC8E-43BC-9DB6-C2AAF774C7DC|PANE__TAG" val="_"/>
+</p:tagLst>
+</file>
+
 <file path=ppt/tags/tag4.xml><?xml version="1.0" encoding="utf-8"?>
 <p:tagLst xmlns:a="http://schemas.openxmlformats.org/drawingml/2006/main" xmlns:r="http://schemas.openxmlformats.org/officeDocument/2006/relationships" xmlns:p="http://schemas.openxmlformats.org/presentationml/2006/main">
   <p:tag name="_INSTRUCTOR VIEW19C14C36-AC8E-43BC-9DB6-C2AAF774C7DC|PANE__TAG" val="_"/>

--- a/slides/00-DailyAnnouncements.pptx
+++ b/slides/00-DailyAnnouncements.pptx
@@ -5,7 +5,7 @@
     <p:sldMasterId id="2147484006" r:id="rId1"/>
   </p:sldMasterIdLst>
   <p:notesMasterIdLst>
-    <p:notesMasterId r:id="rId17"/>
+    <p:notesMasterId r:id="rId18"/>
   </p:notesMasterIdLst>
   <p:sldIdLst>
     <p:sldId id="256" r:id="rId2"/>
@@ -22,7 +22,8 @@
     <p:sldId id="525" r:id="rId13"/>
     <p:sldId id="526" r:id="rId14"/>
     <p:sldId id="527" r:id="rId15"/>
-    <p:sldId id="515" r:id="rId16"/>
+    <p:sldId id="528" r:id="rId16"/>
+    <p:sldId id="515" r:id="rId17"/>
   </p:sldIdLst>
   <p:sldSz cx="12192000" cy="6858000"/>
   <p:notesSz cx="6858000" cy="9144000"/>
@@ -619,7 +620,7 @@
           <a:noFill/>
           <a:extLst>
             <a:ext uri="{909E8E84-426E-40dd-AFC4-6F175D3DCCD1}">
-              <a14:hiddenFill xmlns="" xmlns:a14="http://schemas.microsoft.com/office/drawing/2010/main">
+              <a14:hiddenFill xmlns:a14="http://schemas.microsoft.com/office/drawing/2010/main" xmlns="">
                 <a:solidFill>
                   <a:srgbClr val="FFFFFF"/>
                 </a:solidFill>
@@ -678,7 +679,7 @@
             </a:ln>
             <a:extLst>
               <a:ext uri="{91240B29-F687-4f45-9708-019B960494DF}">
-                <a14:hiddenLine xmlns="" xmlns:a14="http://schemas.microsoft.com/office/drawing/2010/main" w="9525">
+                <a14:hiddenLine xmlns:a14="http://schemas.microsoft.com/office/drawing/2010/main" xmlns="" w="9525">
                   <a:solidFill>
                     <a:srgbClr val="000000"/>
                   </a:solidFill>
@@ -768,7 +769,7 @@
             </a:ln>
             <a:extLst>
               <a:ext uri="{91240B29-F687-4f45-9708-019B960494DF}">
-                <a14:hiddenLine xmlns="" xmlns:a14="http://schemas.microsoft.com/office/drawing/2010/main" w="9525">
+                <a14:hiddenLine xmlns:a14="http://schemas.microsoft.com/office/drawing/2010/main" xmlns="" w="9525">
                   <a:solidFill>
                     <a:srgbClr val="000000"/>
                   </a:solidFill>
@@ -858,7 +859,7 @@
             </a:ln>
             <a:extLst>
               <a:ext uri="{91240B29-F687-4f45-9708-019B960494DF}">
-                <a14:hiddenLine xmlns="" xmlns:a14="http://schemas.microsoft.com/office/drawing/2010/main" w="9525">
+                <a14:hiddenLine xmlns:a14="http://schemas.microsoft.com/office/drawing/2010/main" xmlns="" w="9525">
                   <a:solidFill>
                     <a:srgbClr val="000000"/>
                   </a:solidFill>
@@ -892,7 +893,7 @@
             </a:ln>
             <a:extLst>
               <a:ext uri="{91240B29-F687-4f45-9708-019B960494DF}">
-                <a14:hiddenLine xmlns="" xmlns:a14="http://schemas.microsoft.com/office/drawing/2010/main" w="9525">
+                <a14:hiddenLine xmlns:a14="http://schemas.microsoft.com/office/drawing/2010/main" xmlns="" w="9525">
                   <a:solidFill>
                     <a:srgbClr val="000000"/>
                   </a:solidFill>
@@ -982,7 +983,7 @@
             </a:ln>
             <a:extLst>
               <a:ext uri="{91240B29-F687-4f45-9708-019B960494DF}">
-                <a14:hiddenLine xmlns="" xmlns:a14="http://schemas.microsoft.com/office/drawing/2010/main" w="9525">
+                <a14:hiddenLine xmlns:a14="http://schemas.microsoft.com/office/drawing/2010/main" xmlns="" w="9525">
                   <a:solidFill>
                     <a:srgbClr val="000000"/>
                   </a:solidFill>
@@ -1044,7 +1045,7 @@
             </a:ln>
             <a:extLst>
               <a:ext uri="{91240B29-F687-4f45-9708-019B960494DF}">
-                <a14:hiddenLine xmlns="" xmlns:a14="http://schemas.microsoft.com/office/drawing/2010/main" w="9525">
+                <a14:hiddenLine xmlns:a14="http://schemas.microsoft.com/office/drawing/2010/main" xmlns="" w="9525">
                   <a:solidFill>
                     <a:srgbClr val="000000"/>
                   </a:solidFill>
@@ -1106,7 +1107,7 @@
             </a:ln>
             <a:extLst>
               <a:ext uri="{91240B29-F687-4f45-9708-019B960494DF}">
-                <a14:hiddenLine xmlns="" xmlns:a14="http://schemas.microsoft.com/office/drawing/2010/main" w="9525">
+                <a14:hiddenLine xmlns:a14="http://schemas.microsoft.com/office/drawing/2010/main" xmlns="" w="9525">
                   <a:solidFill>
                     <a:srgbClr val="000000"/>
                   </a:solidFill>
@@ -1196,7 +1197,7 @@
             </a:ln>
             <a:extLst>
               <a:ext uri="{91240B29-F687-4f45-9708-019B960494DF}">
-                <a14:hiddenLine xmlns="" xmlns:a14="http://schemas.microsoft.com/office/drawing/2010/main" w="9525">
+                <a14:hiddenLine xmlns:a14="http://schemas.microsoft.com/office/drawing/2010/main" xmlns="" w="9525">
                   <a:solidFill>
                     <a:srgbClr val="000000"/>
                   </a:solidFill>
@@ -1258,7 +1259,7 @@
             </a:ln>
             <a:extLst>
               <a:ext uri="{91240B29-F687-4f45-9708-019B960494DF}">
-                <a14:hiddenLine xmlns="" xmlns:a14="http://schemas.microsoft.com/office/drawing/2010/main" w="9525">
+                <a14:hiddenLine xmlns:a14="http://schemas.microsoft.com/office/drawing/2010/main" xmlns="" w="9525">
                   <a:solidFill>
                     <a:srgbClr val="000000"/>
                   </a:solidFill>
@@ -1320,7 +1321,7 @@
             </a:ln>
             <a:extLst>
               <a:ext uri="{91240B29-F687-4f45-9708-019B960494DF}">
-                <a14:hiddenLine xmlns="" xmlns:a14="http://schemas.microsoft.com/office/drawing/2010/main" w="9525">
+                <a14:hiddenLine xmlns:a14="http://schemas.microsoft.com/office/drawing/2010/main" xmlns="" w="9525">
                   <a:solidFill>
                     <a:srgbClr val="000000"/>
                   </a:solidFill>
@@ -1410,7 +1411,7 @@
             </a:ln>
             <a:extLst>
               <a:ext uri="{91240B29-F687-4f45-9708-019B960494DF}">
-                <a14:hiddenLine xmlns="" xmlns:a14="http://schemas.microsoft.com/office/drawing/2010/main" w="9525">
+                <a14:hiddenLine xmlns:a14="http://schemas.microsoft.com/office/drawing/2010/main" xmlns="" w="9525">
                   <a:solidFill>
                     <a:srgbClr val="000000"/>
                   </a:solidFill>
@@ -1500,7 +1501,7 @@
             </a:ln>
             <a:extLst>
               <a:ext uri="{91240B29-F687-4f45-9708-019B960494DF}">
-                <a14:hiddenLine xmlns="" xmlns:a14="http://schemas.microsoft.com/office/drawing/2010/main" w="9525">
+                <a14:hiddenLine xmlns:a14="http://schemas.microsoft.com/office/drawing/2010/main" xmlns="" w="9525">
                   <a:solidFill>
                     <a:srgbClr val="000000"/>
                   </a:solidFill>
@@ -1562,7 +1563,7 @@
             </a:ln>
             <a:extLst>
               <a:ext uri="{91240B29-F687-4f45-9708-019B960494DF}">
-                <a14:hiddenLine xmlns="" xmlns:a14="http://schemas.microsoft.com/office/drawing/2010/main" w="9525">
+                <a14:hiddenLine xmlns:a14="http://schemas.microsoft.com/office/drawing/2010/main" xmlns="" w="9525">
                   <a:solidFill>
                     <a:srgbClr val="000000"/>
                   </a:solidFill>
@@ -1672,7 +1673,7 @@
             </a:ln>
             <a:extLst>
               <a:ext uri="{91240B29-F687-4f45-9708-019B960494DF}">
-                <a14:hiddenLine xmlns="" xmlns:a14="http://schemas.microsoft.com/office/drawing/2010/main" w="9525">
+                <a14:hiddenLine xmlns:a14="http://schemas.microsoft.com/office/drawing/2010/main" xmlns="" w="9525">
                   <a:solidFill>
                     <a:srgbClr val="000000"/>
                   </a:solidFill>
@@ -1734,7 +1735,7 @@
             </a:ln>
             <a:extLst>
               <a:ext uri="{91240B29-F687-4f45-9708-019B960494DF}">
-                <a14:hiddenLine xmlns="" xmlns:a14="http://schemas.microsoft.com/office/drawing/2010/main" w="9525">
+                <a14:hiddenLine xmlns:a14="http://schemas.microsoft.com/office/drawing/2010/main" xmlns="" w="9525">
                   <a:solidFill>
                     <a:srgbClr val="000000"/>
                   </a:solidFill>
@@ -1824,7 +1825,7 @@
             </a:ln>
             <a:extLst>
               <a:ext uri="{91240B29-F687-4f45-9708-019B960494DF}">
-                <a14:hiddenLine xmlns="" xmlns:a14="http://schemas.microsoft.com/office/drawing/2010/main" w="9525">
+                <a14:hiddenLine xmlns:a14="http://schemas.microsoft.com/office/drawing/2010/main" xmlns="" w="9525">
                   <a:solidFill>
                     <a:srgbClr val="000000"/>
                   </a:solidFill>
@@ -1914,7 +1915,7 @@
             </a:ln>
             <a:extLst>
               <a:ext uri="{91240B29-F687-4f45-9708-019B960494DF}">
-                <a14:hiddenLine xmlns="" xmlns:a14="http://schemas.microsoft.com/office/drawing/2010/main" w="9525">
+                <a14:hiddenLine xmlns:a14="http://schemas.microsoft.com/office/drawing/2010/main" xmlns="" w="9525">
                   <a:solidFill>
                     <a:srgbClr val="000000"/>
                   </a:solidFill>
@@ -1976,7 +1977,7 @@
             </a:ln>
             <a:extLst>
               <a:ext uri="{91240B29-F687-4f45-9708-019B960494DF}">
-                <a14:hiddenLine xmlns="" xmlns:a14="http://schemas.microsoft.com/office/drawing/2010/main" w="9525">
+                <a14:hiddenLine xmlns:a14="http://schemas.microsoft.com/office/drawing/2010/main" xmlns="" w="9525">
                   <a:solidFill>
                     <a:srgbClr val="000000"/>
                   </a:solidFill>
@@ -2066,7 +2067,7 @@
             </a:ln>
             <a:extLst>
               <a:ext uri="{91240B29-F687-4f45-9708-019B960494DF}">
-                <a14:hiddenLine xmlns="" xmlns:a14="http://schemas.microsoft.com/office/drawing/2010/main" w="9525">
+                <a14:hiddenLine xmlns:a14="http://schemas.microsoft.com/office/drawing/2010/main" xmlns="" w="9525">
                   <a:solidFill>
                     <a:srgbClr val="000000"/>
                   </a:solidFill>
@@ -2156,7 +2157,7 @@
             </a:ln>
             <a:extLst>
               <a:ext uri="{91240B29-F687-4f45-9708-019B960494DF}">
-                <a14:hiddenLine xmlns="" xmlns:a14="http://schemas.microsoft.com/office/drawing/2010/main" w="9525">
+                <a14:hiddenLine xmlns:a14="http://schemas.microsoft.com/office/drawing/2010/main" xmlns="" w="9525">
                   <a:solidFill>
                     <a:srgbClr val="000000"/>
                   </a:solidFill>
@@ -2212,7 +2213,7 @@
             </a:ln>
             <a:extLst>
               <a:ext uri="{91240B29-F687-4f45-9708-019B960494DF}">
-                <a14:hiddenLine xmlns="" xmlns:a14="http://schemas.microsoft.com/office/drawing/2010/main" w="9525">
+                <a14:hiddenLine xmlns:a14="http://schemas.microsoft.com/office/drawing/2010/main" xmlns="" w="9525">
                   <a:solidFill>
                     <a:srgbClr val="000000"/>
                   </a:solidFill>
@@ -2302,7 +2303,7 @@
             </a:ln>
             <a:extLst>
               <a:ext uri="{91240B29-F687-4f45-9708-019B960494DF}">
-                <a14:hiddenLine xmlns="" xmlns:a14="http://schemas.microsoft.com/office/drawing/2010/main" w="9525">
+                <a14:hiddenLine xmlns:a14="http://schemas.microsoft.com/office/drawing/2010/main" xmlns="" w="9525">
                   <a:solidFill>
                     <a:srgbClr val="000000"/>
                   </a:solidFill>
@@ -2358,7 +2359,7 @@
             </a:ln>
             <a:extLst>
               <a:ext uri="{91240B29-F687-4f45-9708-019B960494DF}">
-                <a14:hiddenLine xmlns="" xmlns:a14="http://schemas.microsoft.com/office/drawing/2010/main" w="9525">
+                <a14:hiddenLine xmlns:a14="http://schemas.microsoft.com/office/drawing/2010/main" xmlns="" w="9525">
                   <a:solidFill>
                     <a:srgbClr val="000000"/>
                   </a:solidFill>
@@ -2448,7 +2449,7 @@
             </a:ln>
             <a:extLst>
               <a:ext uri="{91240B29-F687-4f45-9708-019B960494DF}">
-                <a14:hiddenLine xmlns="" xmlns:a14="http://schemas.microsoft.com/office/drawing/2010/main" w="9525">
+                <a14:hiddenLine xmlns:a14="http://schemas.microsoft.com/office/drawing/2010/main" xmlns="" w="9525">
                   <a:solidFill>
                     <a:srgbClr val="000000"/>
                   </a:solidFill>
@@ -2516,7 +2517,7 @@
             </a:ln>
             <a:extLst>
               <a:ext uri="{91240B29-F687-4f45-9708-019B960494DF}">
-                <a14:hiddenLine xmlns="" xmlns:a14="http://schemas.microsoft.com/office/drawing/2010/main" w="9525">
+                <a14:hiddenLine xmlns:a14="http://schemas.microsoft.com/office/drawing/2010/main" xmlns="" w="9525">
                   <a:solidFill>
                     <a:srgbClr val="000000"/>
                   </a:solidFill>
@@ -2606,7 +2607,7 @@
             </a:ln>
             <a:extLst>
               <a:ext uri="{91240B29-F687-4f45-9708-019B960494DF}">
-                <a14:hiddenLine xmlns="" xmlns:a14="http://schemas.microsoft.com/office/drawing/2010/main" w="9525">
+                <a14:hiddenLine xmlns:a14="http://schemas.microsoft.com/office/drawing/2010/main" xmlns="" w="9525">
                   <a:solidFill>
                     <a:srgbClr val="000000"/>
                   </a:solidFill>
@@ -2674,7 +2675,7 @@
             </a:ln>
             <a:extLst>
               <a:ext uri="{91240B29-F687-4f45-9708-019B960494DF}">
-                <a14:hiddenLine xmlns="" xmlns:a14="http://schemas.microsoft.com/office/drawing/2010/main" w="9525">
+                <a14:hiddenLine xmlns:a14="http://schemas.microsoft.com/office/drawing/2010/main" xmlns="" w="9525">
                   <a:solidFill>
                     <a:srgbClr val="000000"/>
                   </a:solidFill>
@@ -2764,7 +2765,7 @@
             </a:ln>
             <a:extLst>
               <a:ext uri="{91240B29-F687-4f45-9708-019B960494DF}">
-                <a14:hiddenLine xmlns="" xmlns:a14="http://schemas.microsoft.com/office/drawing/2010/main" w="9525">
+                <a14:hiddenLine xmlns:a14="http://schemas.microsoft.com/office/drawing/2010/main" xmlns="" w="9525">
                   <a:solidFill>
                     <a:srgbClr val="000000"/>
                   </a:solidFill>
@@ -2798,7 +2799,7 @@
             </a:ln>
             <a:extLst>
               <a:ext uri="{91240B29-F687-4f45-9708-019B960494DF}">
-                <a14:hiddenLine xmlns="" xmlns:a14="http://schemas.microsoft.com/office/drawing/2010/main" w="9525">
+                <a14:hiddenLine xmlns:a14="http://schemas.microsoft.com/office/drawing/2010/main" xmlns="" w="9525">
                   <a:solidFill>
                     <a:srgbClr val="000000"/>
                   </a:solidFill>
@@ -2888,7 +2889,7 @@
             </a:ln>
             <a:extLst>
               <a:ext uri="{91240B29-F687-4f45-9708-019B960494DF}">
-                <a14:hiddenLine xmlns="" xmlns:a14="http://schemas.microsoft.com/office/drawing/2010/main" w="9525">
+                <a14:hiddenLine xmlns:a14="http://schemas.microsoft.com/office/drawing/2010/main" xmlns="" w="9525">
                   <a:solidFill>
                     <a:srgbClr val="000000"/>
                   </a:solidFill>
@@ -2950,7 +2951,7 @@
             </a:ln>
             <a:extLst>
               <a:ext uri="{91240B29-F687-4f45-9708-019B960494DF}">
-                <a14:hiddenLine xmlns="" xmlns:a14="http://schemas.microsoft.com/office/drawing/2010/main" w="9525">
+                <a14:hiddenLine xmlns:a14="http://schemas.microsoft.com/office/drawing/2010/main" xmlns="" w="9525">
                   <a:solidFill>
                     <a:srgbClr val="000000"/>
                   </a:solidFill>
@@ -3012,7 +3013,7 @@
             </a:ln>
             <a:extLst>
               <a:ext uri="{91240B29-F687-4f45-9708-019B960494DF}">
-                <a14:hiddenLine xmlns="" xmlns:a14="http://schemas.microsoft.com/office/drawing/2010/main" w="9525">
+                <a14:hiddenLine xmlns:a14="http://schemas.microsoft.com/office/drawing/2010/main" xmlns="" w="9525">
                   <a:solidFill>
                     <a:srgbClr val="000000"/>
                   </a:solidFill>
@@ -3102,7 +3103,7 @@
             </a:ln>
             <a:extLst>
               <a:ext uri="{91240B29-F687-4f45-9708-019B960494DF}">
-                <a14:hiddenLine xmlns="" xmlns:a14="http://schemas.microsoft.com/office/drawing/2010/main" w="9525">
+                <a14:hiddenLine xmlns:a14="http://schemas.microsoft.com/office/drawing/2010/main" xmlns="" w="9525">
                   <a:solidFill>
                     <a:srgbClr val="000000"/>
                   </a:solidFill>
@@ -3170,7 +3171,7 @@
             </a:ln>
             <a:extLst>
               <a:ext uri="{91240B29-F687-4f45-9708-019B960494DF}">
-                <a14:hiddenLine xmlns="" xmlns:a14="http://schemas.microsoft.com/office/drawing/2010/main" w="9525">
+                <a14:hiddenLine xmlns:a14="http://schemas.microsoft.com/office/drawing/2010/main" xmlns="" w="9525">
                   <a:solidFill>
                     <a:srgbClr val="000000"/>
                   </a:solidFill>
@@ -3232,7 +3233,7 @@
             </a:ln>
             <a:extLst>
               <a:ext uri="{91240B29-F687-4f45-9708-019B960494DF}">
-                <a14:hiddenLine xmlns="" xmlns:a14="http://schemas.microsoft.com/office/drawing/2010/main" w="9525">
+                <a14:hiddenLine xmlns:a14="http://schemas.microsoft.com/office/drawing/2010/main" xmlns="" w="9525">
                   <a:solidFill>
                     <a:srgbClr val="000000"/>
                   </a:solidFill>
@@ -3322,7 +3323,7 @@
             </a:ln>
             <a:extLst>
               <a:ext uri="{91240B29-F687-4f45-9708-019B960494DF}">
-                <a14:hiddenLine xmlns="" xmlns:a14="http://schemas.microsoft.com/office/drawing/2010/main" w="9525">
+                <a14:hiddenLine xmlns:a14="http://schemas.microsoft.com/office/drawing/2010/main" xmlns="" w="9525">
                   <a:solidFill>
                     <a:srgbClr val="000000"/>
                   </a:solidFill>
@@ -3384,7 +3385,7 @@
             </a:ln>
             <a:extLst>
               <a:ext uri="{91240B29-F687-4f45-9708-019B960494DF}">
-                <a14:hiddenLine xmlns="" xmlns:a14="http://schemas.microsoft.com/office/drawing/2010/main" w="9525">
+                <a14:hiddenLine xmlns:a14="http://schemas.microsoft.com/office/drawing/2010/main" xmlns="" w="9525">
                   <a:solidFill>
                     <a:srgbClr val="000000"/>
                   </a:solidFill>
@@ -3474,7 +3475,7 @@
             </a:ln>
             <a:extLst>
               <a:ext uri="{91240B29-F687-4f45-9708-019B960494DF}">
-                <a14:hiddenLine xmlns="" xmlns:a14="http://schemas.microsoft.com/office/drawing/2010/main" w="9525">
+                <a14:hiddenLine xmlns:a14="http://schemas.microsoft.com/office/drawing/2010/main" xmlns="" w="9525">
                   <a:solidFill>
                     <a:srgbClr val="000000"/>
                   </a:solidFill>
@@ -3536,7 +3537,7 @@
             </a:ln>
             <a:extLst>
               <a:ext uri="{91240B29-F687-4f45-9708-019B960494DF}">
-                <a14:hiddenLine xmlns="" xmlns:a14="http://schemas.microsoft.com/office/drawing/2010/main" w="9525">
+                <a14:hiddenLine xmlns:a14="http://schemas.microsoft.com/office/drawing/2010/main" xmlns="" w="9525">
                   <a:solidFill>
                     <a:srgbClr val="000000"/>
                   </a:solidFill>
@@ -3626,7 +3627,7 @@
             </a:ln>
             <a:extLst>
               <a:ext uri="{91240B29-F687-4f45-9708-019B960494DF}">
-                <a14:hiddenLine xmlns="" xmlns:a14="http://schemas.microsoft.com/office/drawing/2010/main" w="9525">
+                <a14:hiddenLine xmlns:a14="http://schemas.microsoft.com/office/drawing/2010/main" xmlns="" w="9525">
                   <a:solidFill>
                     <a:srgbClr val="000000"/>
                   </a:solidFill>
@@ -3660,7 +3661,7 @@
             </a:ln>
             <a:extLst>
               <a:ext uri="{91240B29-F687-4f45-9708-019B960494DF}">
-                <a14:hiddenLine xmlns="" xmlns:a14="http://schemas.microsoft.com/office/drawing/2010/main" w="9525">
+                <a14:hiddenLine xmlns:a14="http://schemas.microsoft.com/office/drawing/2010/main" xmlns="" w="9525">
                   <a:solidFill>
                     <a:srgbClr val="000000"/>
                   </a:solidFill>
@@ -3725,7 +3726,7 @@
             </a:ln>
             <a:extLst>
               <a:ext uri="{91240B29-F687-4f45-9708-019B960494DF}">
-                <a14:hiddenLine xmlns="" xmlns:a14="http://schemas.microsoft.com/office/drawing/2010/main" w="9525">
+                <a14:hiddenLine xmlns:a14="http://schemas.microsoft.com/office/drawing/2010/main" xmlns="" w="9525">
                   <a:solidFill>
                     <a:srgbClr val="000000"/>
                   </a:solidFill>
@@ -3815,7 +3816,7 @@
             </a:ln>
             <a:extLst>
               <a:ext uri="{91240B29-F687-4f45-9708-019B960494DF}">
-                <a14:hiddenLine xmlns="" xmlns:a14="http://schemas.microsoft.com/office/drawing/2010/main" w="9525">
+                <a14:hiddenLine xmlns:a14="http://schemas.microsoft.com/office/drawing/2010/main" xmlns="" w="9525">
                   <a:solidFill>
                     <a:srgbClr val="000000"/>
                   </a:solidFill>
@@ -3877,7 +3878,7 @@
             </a:ln>
             <a:extLst>
               <a:ext uri="{91240B29-F687-4f45-9708-019B960494DF}">
-                <a14:hiddenLine xmlns="" xmlns:a14="http://schemas.microsoft.com/office/drawing/2010/main" w="9525">
+                <a14:hiddenLine xmlns:a14="http://schemas.microsoft.com/office/drawing/2010/main" xmlns="" w="9525">
                   <a:solidFill>
                     <a:srgbClr val="000000"/>
                   </a:solidFill>
@@ -3967,7 +3968,7 @@
             </a:ln>
             <a:extLst>
               <a:ext uri="{91240B29-F687-4f45-9708-019B960494DF}">
-                <a14:hiddenLine xmlns="" xmlns:a14="http://schemas.microsoft.com/office/drawing/2010/main" w="9525">
+                <a14:hiddenLine xmlns:a14="http://schemas.microsoft.com/office/drawing/2010/main" xmlns="" w="9525">
                   <a:solidFill>
                     <a:srgbClr val="000000"/>
                   </a:solidFill>
@@ -4057,7 +4058,7 @@
             </a:ln>
             <a:extLst>
               <a:ext uri="{91240B29-F687-4f45-9708-019B960494DF}">
-                <a14:hiddenLine xmlns="" xmlns:a14="http://schemas.microsoft.com/office/drawing/2010/main" w="9525">
+                <a14:hiddenLine xmlns:a14="http://schemas.microsoft.com/office/drawing/2010/main" xmlns="" w="9525">
                   <a:solidFill>
                     <a:srgbClr val="000000"/>
                   </a:solidFill>
@@ -4122,7 +4123,7 @@
             </a:ln>
             <a:extLst>
               <a:ext uri="{91240B29-F687-4f45-9708-019B960494DF}">
-                <a14:hiddenLine xmlns="" xmlns:a14="http://schemas.microsoft.com/office/drawing/2010/main" w="9525">
+                <a14:hiddenLine xmlns:a14="http://schemas.microsoft.com/office/drawing/2010/main" xmlns="" w="9525">
                   <a:solidFill>
                     <a:srgbClr val="000000"/>
                   </a:solidFill>
@@ -4184,7 +4185,7 @@
             </a:ln>
             <a:extLst>
               <a:ext uri="{91240B29-F687-4f45-9708-019B960494DF}">
-                <a14:hiddenLine xmlns="" xmlns:a14="http://schemas.microsoft.com/office/drawing/2010/main" w="9525">
+                <a14:hiddenLine xmlns:a14="http://schemas.microsoft.com/office/drawing/2010/main" xmlns="" w="9525">
                   <a:solidFill>
                     <a:srgbClr val="000000"/>
                   </a:solidFill>
@@ -4274,7 +4275,7 @@
             </a:ln>
             <a:extLst>
               <a:ext uri="{91240B29-F687-4f45-9708-019B960494DF}">
-                <a14:hiddenLine xmlns="" xmlns:a14="http://schemas.microsoft.com/office/drawing/2010/main" w="9525">
+                <a14:hiddenLine xmlns:a14="http://schemas.microsoft.com/office/drawing/2010/main" xmlns="" w="9525">
                   <a:solidFill>
                     <a:srgbClr val="000000"/>
                   </a:solidFill>
@@ -4364,7 +4365,7 @@
             </a:ln>
             <a:extLst>
               <a:ext uri="{91240B29-F687-4f45-9708-019B960494DF}">
-                <a14:hiddenLine xmlns="" xmlns:a14="http://schemas.microsoft.com/office/drawing/2010/main" w="9525">
+                <a14:hiddenLine xmlns:a14="http://schemas.microsoft.com/office/drawing/2010/main" xmlns="" w="9525">
                   <a:solidFill>
                     <a:srgbClr val="000000"/>
                   </a:solidFill>
@@ -4426,7 +4427,7 @@
             </a:ln>
             <a:extLst>
               <a:ext uri="{91240B29-F687-4f45-9708-019B960494DF}">
-                <a14:hiddenLine xmlns="" xmlns:a14="http://schemas.microsoft.com/office/drawing/2010/main" w="9525">
+                <a14:hiddenLine xmlns:a14="http://schemas.microsoft.com/office/drawing/2010/main" xmlns="" w="9525">
                   <a:solidFill>
                     <a:srgbClr val="000000"/>
                   </a:solidFill>
@@ -4546,7 +4547,7 @@
             </a:ln>
             <a:extLst>
               <a:ext uri="{91240B29-F687-4f45-9708-019B960494DF}">
-                <a14:hiddenLine xmlns="" xmlns:a14="http://schemas.microsoft.com/office/drawing/2010/main" w="9525">
+                <a14:hiddenLine xmlns:a14="http://schemas.microsoft.com/office/drawing/2010/main" xmlns="" w="9525">
                   <a:solidFill>
                     <a:srgbClr val="000000"/>
                   </a:solidFill>
@@ -4614,7 +4615,7 @@
             </a:ln>
             <a:extLst>
               <a:ext uri="{91240B29-F687-4f45-9708-019B960494DF}">
-                <a14:hiddenLine xmlns="" xmlns:a14="http://schemas.microsoft.com/office/drawing/2010/main" w="9525">
+                <a14:hiddenLine xmlns:a14="http://schemas.microsoft.com/office/drawing/2010/main" xmlns="" w="9525">
                   <a:solidFill>
                     <a:srgbClr val="000000"/>
                   </a:solidFill>
@@ -4704,7 +4705,7 @@
             </a:ln>
             <a:extLst>
               <a:ext uri="{91240B29-F687-4f45-9708-019B960494DF}">
-                <a14:hiddenLine xmlns="" xmlns:a14="http://schemas.microsoft.com/office/drawing/2010/main" w="9525">
+                <a14:hiddenLine xmlns:a14="http://schemas.microsoft.com/office/drawing/2010/main" xmlns="" w="9525">
                   <a:solidFill>
                     <a:srgbClr val="000000"/>
                   </a:solidFill>
@@ -9533,7 +9534,7 @@
           <a:noFill/>
           <a:extLst>
             <a:ext uri="{909E8E84-426E-40dd-AFC4-6F175D3DCCD1}">
-              <a14:hiddenFill xmlns="" xmlns:a14="http://schemas.microsoft.com/office/drawing/2010/main">
+              <a14:hiddenFill xmlns:a14="http://schemas.microsoft.com/office/drawing/2010/main" xmlns="">
                 <a:solidFill>
                   <a:srgbClr val="FFFFFF"/>
                 </a:solidFill>
@@ -9607,7 +9608,7 @@
               </a:ln>
               <a:extLst>
                 <a:ext uri="{91240B29-F687-4f45-9708-019B960494DF}">
-                  <a14:hiddenLine xmlns="" xmlns:a14="http://schemas.microsoft.com/office/drawing/2010/main" w="9525">
+                  <a14:hiddenLine xmlns:a14="http://schemas.microsoft.com/office/drawing/2010/main" xmlns="" w="9525">
                     <a:solidFill>
                       <a:srgbClr val="000000"/>
                     </a:solidFill>
@@ -9697,7 +9698,7 @@
               </a:ln>
               <a:extLst>
                 <a:ext uri="{91240B29-F687-4f45-9708-019B960494DF}">
-                  <a14:hiddenLine xmlns="" xmlns:a14="http://schemas.microsoft.com/office/drawing/2010/main" w="9525">
+                  <a14:hiddenLine xmlns:a14="http://schemas.microsoft.com/office/drawing/2010/main" xmlns="" w="9525">
                     <a:solidFill>
                       <a:srgbClr val="000000"/>
                     </a:solidFill>
@@ -9787,7 +9788,7 @@
               </a:ln>
               <a:extLst>
                 <a:ext uri="{91240B29-F687-4f45-9708-019B960494DF}">
-                  <a14:hiddenLine xmlns="" xmlns:a14="http://schemas.microsoft.com/office/drawing/2010/main" w="9525">
+                  <a14:hiddenLine xmlns:a14="http://schemas.microsoft.com/office/drawing/2010/main" xmlns="" w="9525">
                     <a:solidFill>
                       <a:srgbClr val="000000"/>
                     </a:solidFill>
@@ -9849,7 +9850,7 @@
               </a:ln>
               <a:extLst>
                 <a:ext uri="{91240B29-F687-4f45-9708-019B960494DF}">
-                  <a14:hiddenLine xmlns="" xmlns:a14="http://schemas.microsoft.com/office/drawing/2010/main" w="9525">
+                  <a14:hiddenLine xmlns:a14="http://schemas.microsoft.com/office/drawing/2010/main" xmlns="" w="9525">
                     <a:solidFill>
                       <a:srgbClr val="000000"/>
                     </a:solidFill>
@@ -9939,7 +9940,7 @@
               </a:ln>
               <a:extLst>
                 <a:ext uri="{91240B29-F687-4f45-9708-019B960494DF}">
-                  <a14:hiddenLine xmlns="" xmlns:a14="http://schemas.microsoft.com/office/drawing/2010/main" w="9525">
+                  <a14:hiddenLine xmlns:a14="http://schemas.microsoft.com/office/drawing/2010/main" xmlns="" w="9525">
                     <a:solidFill>
                       <a:srgbClr val="000000"/>
                     </a:solidFill>
@@ -10001,7 +10002,7 @@
               </a:ln>
               <a:extLst>
                 <a:ext uri="{91240B29-F687-4f45-9708-019B960494DF}">
-                  <a14:hiddenLine xmlns="" xmlns:a14="http://schemas.microsoft.com/office/drawing/2010/main" w="9525">
+                  <a14:hiddenLine xmlns:a14="http://schemas.microsoft.com/office/drawing/2010/main" xmlns="" w="9525">
                     <a:solidFill>
                       <a:srgbClr val="000000"/>
                     </a:solidFill>
@@ -10063,7 +10064,7 @@
               </a:ln>
               <a:extLst>
                 <a:ext uri="{91240B29-F687-4f45-9708-019B960494DF}">
-                  <a14:hiddenLine xmlns="" xmlns:a14="http://schemas.microsoft.com/office/drawing/2010/main" w="9525">
+                  <a14:hiddenLine xmlns:a14="http://schemas.microsoft.com/office/drawing/2010/main" xmlns="" w="9525">
                     <a:solidFill>
                       <a:srgbClr val="000000"/>
                     </a:solidFill>
@@ -10153,7 +10154,7 @@
               </a:ln>
               <a:extLst>
                 <a:ext uri="{91240B29-F687-4f45-9708-019B960494DF}">
-                  <a14:hiddenLine xmlns="" xmlns:a14="http://schemas.microsoft.com/office/drawing/2010/main" w="9525">
+                  <a14:hiddenLine xmlns:a14="http://schemas.microsoft.com/office/drawing/2010/main" xmlns="" w="9525">
                     <a:solidFill>
                       <a:srgbClr val="000000"/>
                     </a:solidFill>
@@ -10243,7 +10244,7 @@
               </a:ln>
               <a:extLst>
                 <a:ext uri="{91240B29-F687-4f45-9708-019B960494DF}">
-                  <a14:hiddenLine xmlns="" xmlns:a14="http://schemas.microsoft.com/office/drawing/2010/main" w="9525">
+                  <a14:hiddenLine xmlns:a14="http://schemas.microsoft.com/office/drawing/2010/main" xmlns="" w="9525">
                     <a:solidFill>
                       <a:srgbClr val="000000"/>
                     </a:solidFill>
@@ -10305,7 +10306,7 @@
               </a:ln>
               <a:extLst>
                 <a:ext uri="{91240B29-F687-4f45-9708-019B960494DF}">
-                  <a14:hiddenLine xmlns="" xmlns:a14="http://schemas.microsoft.com/office/drawing/2010/main" w="9525">
+                  <a14:hiddenLine xmlns:a14="http://schemas.microsoft.com/office/drawing/2010/main" xmlns="" w="9525">
                     <a:solidFill>
                       <a:srgbClr val="000000"/>
                     </a:solidFill>
@@ -10415,7 +10416,7 @@
               </a:ln>
               <a:extLst>
                 <a:ext uri="{91240B29-F687-4f45-9708-019B960494DF}">
-                  <a14:hiddenLine xmlns="" xmlns:a14="http://schemas.microsoft.com/office/drawing/2010/main" w="9525">
+                  <a14:hiddenLine xmlns:a14="http://schemas.microsoft.com/office/drawing/2010/main" xmlns="" w="9525">
                     <a:solidFill>
                       <a:srgbClr val="000000"/>
                     </a:solidFill>
@@ -10499,7 +10500,7 @@
               </a:ln>
               <a:extLst>
                 <a:ext uri="{91240B29-F687-4f45-9708-019B960494DF}">
-                  <a14:hiddenLine xmlns="" xmlns:a14="http://schemas.microsoft.com/office/drawing/2010/main" w="9525">
+                  <a14:hiddenLine xmlns:a14="http://schemas.microsoft.com/office/drawing/2010/main" xmlns="" w="9525">
                     <a:solidFill>
                       <a:srgbClr val="000000"/>
                     </a:solidFill>
@@ -10561,7 +10562,7 @@
               </a:ln>
               <a:extLst>
                 <a:ext uri="{91240B29-F687-4f45-9708-019B960494DF}">
-                  <a14:hiddenLine xmlns="" xmlns:a14="http://schemas.microsoft.com/office/drawing/2010/main" w="9525">
+                  <a14:hiddenLine xmlns:a14="http://schemas.microsoft.com/office/drawing/2010/main" xmlns="" w="9525">
                     <a:solidFill>
                       <a:srgbClr val="000000"/>
                     </a:solidFill>
@@ -10623,7 +10624,7 @@
               </a:ln>
               <a:extLst>
                 <a:ext uri="{91240B29-F687-4f45-9708-019B960494DF}">
-                  <a14:hiddenLine xmlns="" xmlns:a14="http://schemas.microsoft.com/office/drawing/2010/main" w="9525">
+                  <a14:hiddenLine xmlns:a14="http://schemas.microsoft.com/office/drawing/2010/main" xmlns="" w="9525">
                     <a:solidFill>
                       <a:srgbClr val="000000"/>
                     </a:solidFill>
@@ -10713,7 +10714,7 @@
               </a:ln>
               <a:extLst>
                 <a:ext uri="{91240B29-F687-4f45-9708-019B960494DF}">
-                  <a14:hiddenLine xmlns="" xmlns:a14="http://schemas.microsoft.com/office/drawing/2010/main" w="9525">
+                  <a14:hiddenLine xmlns:a14="http://schemas.microsoft.com/office/drawing/2010/main" xmlns="" w="9525">
                     <a:solidFill>
                       <a:srgbClr val="000000"/>
                     </a:solidFill>
@@ -10747,7 +10748,7 @@
               </a:ln>
               <a:extLst>
                 <a:ext uri="{91240B29-F687-4f45-9708-019B960494DF}">
-                  <a14:hiddenLine xmlns="" xmlns:a14="http://schemas.microsoft.com/office/drawing/2010/main" w="9525">
+                  <a14:hiddenLine xmlns:a14="http://schemas.microsoft.com/office/drawing/2010/main" xmlns="" w="9525">
                     <a:solidFill>
                       <a:srgbClr val="000000"/>
                     </a:solidFill>
@@ -10812,7 +10813,7 @@
               </a:ln>
               <a:extLst>
                 <a:ext uri="{91240B29-F687-4f45-9708-019B960494DF}">
-                  <a14:hiddenLine xmlns="" xmlns:a14="http://schemas.microsoft.com/office/drawing/2010/main" w="9525">
+                  <a14:hiddenLine xmlns:a14="http://schemas.microsoft.com/office/drawing/2010/main" xmlns="" w="9525">
                     <a:solidFill>
                       <a:srgbClr val="000000"/>
                     </a:solidFill>
@@ -10902,7 +10903,7 @@
               </a:ln>
               <a:extLst>
                 <a:ext uri="{91240B29-F687-4f45-9708-019B960494DF}">
-                  <a14:hiddenLine xmlns="" xmlns:a14="http://schemas.microsoft.com/office/drawing/2010/main" w="9525">
+                  <a14:hiddenLine xmlns:a14="http://schemas.microsoft.com/office/drawing/2010/main" xmlns="" w="9525">
                     <a:solidFill>
                       <a:srgbClr val="000000"/>
                     </a:solidFill>
@@ -10964,7 +10965,7 @@
               </a:ln>
               <a:extLst>
                 <a:ext uri="{91240B29-F687-4f45-9708-019B960494DF}">
-                  <a14:hiddenLine xmlns="" xmlns:a14="http://schemas.microsoft.com/office/drawing/2010/main" w="9525">
+                  <a14:hiddenLine xmlns:a14="http://schemas.microsoft.com/office/drawing/2010/main" xmlns="" w="9525">
                     <a:solidFill>
                       <a:srgbClr val="000000"/>
                     </a:solidFill>
@@ -11054,7 +11055,7 @@
               </a:ln>
               <a:extLst>
                 <a:ext uri="{91240B29-F687-4f45-9708-019B960494DF}">
-                  <a14:hiddenLine xmlns="" xmlns:a14="http://schemas.microsoft.com/office/drawing/2010/main" w="9525">
+                  <a14:hiddenLine xmlns:a14="http://schemas.microsoft.com/office/drawing/2010/main" xmlns="" w="9525">
                     <a:solidFill>
                       <a:srgbClr val="000000"/>
                     </a:solidFill>
@@ -11119,7 +11120,7 @@
               </a:ln>
               <a:extLst>
                 <a:ext uri="{91240B29-F687-4f45-9708-019B960494DF}">
-                  <a14:hiddenLine xmlns="" xmlns:a14="http://schemas.microsoft.com/office/drawing/2010/main" w="9525">
+                  <a14:hiddenLine xmlns:a14="http://schemas.microsoft.com/office/drawing/2010/main" xmlns="" w="9525">
                     <a:solidFill>
                       <a:srgbClr val="000000"/>
                     </a:solidFill>
@@ -11181,7 +11182,7 @@
               </a:ln>
               <a:extLst>
                 <a:ext uri="{91240B29-F687-4f45-9708-019B960494DF}">
-                  <a14:hiddenLine xmlns="" xmlns:a14="http://schemas.microsoft.com/office/drawing/2010/main" w="9525">
+                  <a14:hiddenLine xmlns:a14="http://schemas.microsoft.com/office/drawing/2010/main" xmlns="" w="9525">
                     <a:solidFill>
                       <a:srgbClr val="000000"/>
                     </a:solidFill>
@@ -11271,7 +11272,7 @@
               </a:ln>
               <a:extLst>
                 <a:ext uri="{91240B29-F687-4f45-9708-019B960494DF}">
-                  <a14:hiddenLine xmlns="" xmlns:a14="http://schemas.microsoft.com/office/drawing/2010/main" w="9525">
+                  <a14:hiddenLine xmlns:a14="http://schemas.microsoft.com/office/drawing/2010/main" xmlns="" w="9525">
                     <a:solidFill>
                       <a:srgbClr val="000000"/>
                     </a:solidFill>
@@ -11361,7 +11362,7 @@
               </a:ln>
               <a:extLst>
                 <a:ext uri="{91240B29-F687-4f45-9708-019B960494DF}">
-                  <a14:hiddenLine xmlns="" xmlns:a14="http://schemas.microsoft.com/office/drawing/2010/main" w="9525">
+                  <a14:hiddenLine xmlns:a14="http://schemas.microsoft.com/office/drawing/2010/main" xmlns="" w="9525">
                     <a:solidFill>
                       <a:srgbClr val="000000"/>
                     </a:solidFill>
@@ -11426,7 +11427,7 @@
               </a:ln>
               <a:extLst>
                 <a:ext uri="{91240B29-F687-4f45-9708-019B960494DF}">
-                  <a14:hiddenLine xmlns="" xmlns:a14="http://schemas.microsoft.com/office/drawing/2010/main" w="9525">
+                  <a14:hiddenLine xmlns:a14="http://schemas.microsoft.com/office/drawing/2010/main" xmlns="" w="9525">
                     <a:solidFill>
                       <a:srgbClr val="000000"/>
                     </a:solidFill>
@@ -11546,7 +11547,7 @@
               </a:ln>
               <a:extLst>
                 <a:ext uri="{91240B29-F687-4f45-9708-019B960494DF}">
-                  <a14:hiddenLine xmlns="" xmlns:a14="http://schemas.microsoft.com/office/drawing/2010/main" w="9525">
+                  <a14:hiddenLine xmlns:a14="http://schemas.microsoft.com/office/drawing/2010/main" xmlns="" w="9525">
                     <a:solidFill>
                       <a:srgbClr val="000000"/>
                     </a:solidFill>
@@ -11627,7 +11628,7 @@
               </a:ln>
               <a:extLst>
                 <a:ext uri="{91240B29-F687-4f45-9708-019B960494DF}">
-                  <a14:hiddenLine xmlns="" xmlns:a14="http://schemas.microsoft.com/office/drawing/2010/main" w="9525">
+                  <a14:hiddenLine xmlns:a14="http://schemas.microsoft.com/office/drawing/2010/main" xmlns="" w="9525">
                     <a:solidFill>
                       <a:srgbClr val="000000"/>
                     </a:solidFill>
@@ -11742,7 +11743,7 @@
               </a:ln>
               <a:extLst>
                 <a:ext uri="{91240B29-F687-4f45-9708-019B960494DF}">
-                  <a14:hiddenLine xmlns="" xmlns:a14="http://schemas.microsoft.com/office/drawing/2010/main" w="9525">
+                  <a14:hiddenLine xmlns:a14="http://schemas.microsoft.com/office/drawing/2010/main" xmlns="" w="9525">
                     <a:solidFill>
                       <a:srgbClr val="000000"/>
                     </a:solidFill>
@@ -11832,7 +11833,7 @@
               </a:ln>
               <a:extLst>
                 <a:ext uri="{91240B29-F687-4f45-9708-019B960494DF}">
-                  <a14:hiddenLine xmlns="" xmlns:a14="http://schemas.microsoft.com/office/drawing/2010/main" w="9525">
+                  <a14:hiddenLine xmlns:a14="http://schemas.microsoft.com/office/drawing/2010/main" xmlns="" w="9525">
                     <a:solidFill>
                       <a:srgbClr val="000000"/>
                     </a:solidFill>
@@ -11897,7 +11898,7 @@
               </a:ln>
               <a:extLst>
                 <a:ext uri="{91240B29-F687-4f45-9708-019B960494DF}">
-                  <a14:hiddenLine xmlns="" xmlns:a14="http://schemas.microsoft.com/office/drawing/2010/main" w="9525">
+                  <a14:hiddenLine xmlns:a14="http://schemas.microsoft.com/office/drawing/2010/main" xmlns="" w="9525">
                     <a:solidFill>
                       <a:srgbClr val="000000"/>
                     </a:solidFill>
@@ -11987,7 +11988,7 @@
               </a:ln>
               <a:extLst>
                 <a:ext uri="{91240B29-F687-4f45-9708-019B960494DF}">
-                  <a14:hiddenLine xmlns="" xmlns:a14="http://schemas.microsoft.com/office/drawing/2010/main" w="9525">
+                  <a14:hiddenLine xmlns:a14="http://schemas.microsoft.com/office/drawing/2010/main" xmlns="" w="9525">
                     <a:solidFill>
                       <a:srgbClr val="000000"/>
                     </a:solidFill>
@@ -12055,7 +12056,7 @@
               </a:ln>
               <a:extLst>
                 <a:ext uri="{91240B29-F687-4f45-9708-019B960494DF}">
-                  <a14:hiddenLine xmlns="" xmlns:a14="http://schemas.microsoft.com/office/drawing/2010/main" w="9525">
+                  <a14:hiddenLine xmlns:a14="http://schemas.microsoft.com/office/drawing/2010/main" xmlns="" w="9525">
                     <a:solidFill>
                       <a:srgbClr val="000000"/>
                     </a:solidFill>
@@ -12145,7 +12146,7 @@
               </a:ln>
               <a:extLst>
                 <a:ext uri="{91240B29-F687-4f45-9708-019B960494DF}">
-                  <a14:hiddenLine xmlns="" xmlns:a14="http://schemas.microsoft.com/office/drawing/2010/main" w="9525">
+                  <a14:hiddenLine xmlns:a14="http://schemas.microsoft.com/office/drawing/2010/main" xmlns="" w="9525">
                     <a:solidFill>
                       <a:srgbClr val="000000"/>
                     </a:solidFill>
@@ -12213,7 +12214,7 @@
               </a:ln>
               <a:extLst>
                 <a:ext uri="{91240B29-F687-4f45-9708-019B960494DF}">
-                  <a14:hiddenLine xmlns="" xmlns:a14="http://schemas.microsoft.com/office/drawing/2010/main" w="9525">
+                  <a14:hiddenLine xmlns:a14="http://schemas.microsoft.com/office/drawing/2010/main" xmlns="" w="9525">
                     <a:solidFill>
                       <a:srgbClr val="000000"/>
                     </a:solidFill>
@@ -12303,7 +12304,7 @@
               </a:ln>
               <a:extLst>
                 <a:ext uri="{91240B29-F687-4f45-9708-019B960494DF}">
-                  <a14:hiddenLine xmlns="" xmlns:a14="http://schemas.microsoft.com/office/drawing/2010/main" w="9525">
+                  <a14:hiddenLine xmlns:a14="http://schemas.microsoft.com/office/drawing/2010/main" xmlns="" w="9525">
                     <a:solidFill>
                       <a:srgbClr val="000000"/>
                     </a:solidFill>
@@ -12337,7 +12338,7 @@
               </a:ln>
               <a:extLst>
                 <a:ext uri="{91240B29-F687-4f45-9708-019B960494DF}">
-                  <a14:hiddenLine xmlns="" xmlns:a14="http://schemas.microsoft.com/office/drawing/2010/main" w="9525">
+                  <a14:hiddenLine xmlns:a14="http://schemas.microsoft.com/office/drawing/2010/main" xmlns="" w="9525">
                     <a:solidFill>
                       <a:srgbClr val="000000"/>
                     </a:solidFill>
@@ -14406,6 +14407,206 @@
   <p:cSld>
     <p:spTree>
       <p:nvGrpSpPr>
+        <p:cNvPr id="1" name="">
+          <a:extLst>
+            <a:ext uri="{FF2B5EF4-FFF2-40B4-BE49-F238E27FC236}">
+              <a16:creationId xmlns:a16="http://schemas.microsoft.com/office/drawing/2014/main" id="{D05AF98F-5D4C-C155-02CF-379A3F22AE3C}"/>
+            </a:ext>
+          </a:extLst>
+        </p:cNvPr>
+        <p:cNvGrpSpPr/>
+        <p:nvPr/>
+      </p:nvGrpSpPr>
+      <p:grpSpPr>
+        <a:xfrm>
+          <a:off x="0" y="0"/>
+          <a:ext cx="0" cy="0"/>
+          <a:chOff x="0" y="0"/>
+          <a:chExt cx="0" cy="0"/>
+        </a:xfrm>
+      </p:grpSpPr>
+      <p:sp>
+        <p:nvSpPr>
+          <p:cNvPr id="6146" name="Rectangle 2">
+            <a:extLst>
+              <a:ext uri="{FF2B5EF4-FFF2-40B4-BE49-F238E27FC236}">
+                <a16:creationId xmlns:a16="http://schemas.microsoft.com/office/drawing/2014/main" id="{DBCC9806-9A4D-06A7-D9B6-6564A6C3C253}"/>
+              </a:ext>
+            </a:extLst>
+          </p:cNvPr>
+          <p:cNvSpPr>
+            <a:spLocks noGrp="1" noChangeArrowheads="1"/>
+          </p:cNvSpPr>
+          <p:nvPr>
+            <p:ph type="title"/>
+            <p:custDataLst>
+              <p:tags r:id="rId1"/>
+            </p:custDataLst>
+          </p:nvPr>
+        </p:nvSpPr>
+        <p:spPr>
+          <a:xfrm>
+            <a:off x="1141413" y="284084"/>
+            <a:ext cx="9905998" cy="620791"/>
+          </a:xfrm>
+        </p:spPr>
+        <p:txBody>
+          <a:bodyPr/>
+          <a:lstStyle/>
+          <a:p>
+            <a:pPr algn="ctr"/>
+            <a:r>
+              <a:rPr lang="en-US" dirty="0"/>
+              <a:t>Quiz 2 – Question Summary</a:t>
+            </a:r>
+          </a:p>
+        </p:txBody>
+      </p:sp>
+      <p:sp>
+        <p:nvSpPr>
+          <p:cNvPr id="6147" name="Rectangle 3">
+            <a:extLst>
+              <a:ext uri="{FF2B5EF4-FFF2-40B4-BE49-F238E27FC236}">
+                <a16:creationId xmlns:a16="http://schemas.microsoft.com/office/drawing/2014/main" id="{56968B68-3646-056B-2418-C9C325B57086}"/>
+              </a:ext>
+            </a:extLst>
+          </p:cNvPr>
+          <p:cNvSpPr>
+            <a:spLocks noGrp="1" noChangeArrowheads="1"/>
+          </p:cNvSpPr>
+          <p:nvPr>
+            <p:ph idx="1"/>
+            <p:custDataLst>
+              <p:tags r:id="rId2"/>
+            </p:custDataLst>
+          </p:nvPr>
+        </p:nvSpPr>
+        <p:spPr>
+          <a:xfrm>
+            <a:off x="1664842" y="1311217"/>
+            <a:ext cx="8859140" cy="5202315"/>
+          </a:xfrm>
+        </p:spPr>
+        <p:txBody>
+          <a:bodyPr>
+            <a:normAutofit/>
+          </a:bodyPr>
+          <a:lstStyle/>
+          <a:p>
+            <a:r>
+              <a:rPr lang="en-US" dirty="0">
+                <a:latin typeface="Arial" panose="020B0604020202020204" pitchFamily="34" charset="0"/>
+                <a:cs typeface="Arial" panose="020B0604020202020204" pitchFamily="34" charset="0"/>
+              </a:rPr>
+              <a:t>Q1: True / False Questions (10 of them)</a:t>
+            </a:r>
+          </a:p>
+          <a:p>
+            <a:pPr lvl="1"/>
+            <a:r>
+              <a:rPr lang="en-US" dirty="0">
+                <a:latin typeface="Arial" panose="020B0604020202020204" pitchFamily="34" charset="0"/>
+                <a:cs typeface="Arial" panose="020B0604020202020204" pitchFamily="34" charset="0"/>
+              </a:rPr>
+              <a:t>Span the entire module, may reference module 0 material</a:t>
+            </a:r>
+          </a:p>
+          <a:p>
+            <a:r>
+              <a:rPr lang="en-US" dirty="0">
+                <a:latin typeface="Arial" panose="020B0604020202020204" pitchFamily="34" charset="0"/>
+                <a:cs typeface="Arial" panose="020B0604020202020204" pitchFamily="34" charset="0"/>
+              </a:rPr>
+              <a:t>Q2-3: Grammar Derivation</a:t>
+            </a:r>
+          </a:p>
+          <a:p>
+            <a:pPr lvl="1"/>
+            <a:r>
+              <a:rPr lang="en-US" dirty="0">
+                <a:latin typeface="Arial" panose="020B0604020202020204" pitchFamily="34" charset="0"/>
+                <a:cs typeface="Arial" panose="020B0604020202020204" pitchFamily="34" charset="0"/>
+              </a:rPr>
+              <a:t>Given a grammar and string to derive, show the full derivation</a:t>
+            </a:r>
+          </a:p>
+          <a:p>
+            <a:r>
+              <a:rPr lang="en-US" dirty="0">
+                <a:latin typeface="Arial" panose="020B0604020202020204" pitchFamily="34" charset="0"/>
+                <a:cs typeface="Arial" panose="020B0604020202020204" pitchFamily="34" charset="0"/>
+              </a:rPr>
+              <a:t>Q4-5: Grammar Creation</a:t>
+            </a:r>
+          </a:p>
+          <a:p>
+            <a:pPr lvl="1"/>
+            <a:r>
+              <a:rPr lang="en-US" dirty="0">
+                <a:latin typeface="Arial" panose="020B0604020202020204" pitchFamily="34" charset="0"/>
+                <a:cs typeface="Arial" panose="020B0604020202020204" pitchFamily="34" charset="0"/>
+              </a:rPr>
+              <a:t>Given a language, construct a context-free grammar for it</a:t>
+            </a:r>
+          </a:p>
+          <a:p>
+            <a:r>
+              <a:rPr lang="en-US" dirty="0">
+                <a:latin typeface="Arial" panose="020B0604020202020204" pitchFamily="34" charset="0"/>
+                <a:cs typeface="Arial" panose="020B0604020202020204" pitchFamily="34" charset="0"/>
+              </a:rPr>
+              <a:t>Q6: PDA</a:t>
+            </a:r>
+          </a:p>
+          <a:p>
+            <a:pPr lvl="1"/>
+            <a:r>
+              <a:rPr lang="en-US" dirty="0">
+                <a:latin typeface="Arial" panose="020B0604020202020204" pitchFamily="34" charset="0"/>
+                <a:cs typeface="Arial" panose="020B0604020202020204" pitchFamily="34" charset="0"/>
+              </a:rPr>
+              <a:t>Given a language, draw a working PDA for it </a:t>
+            </a:r>
+          </a:p>
+          <a:p>
+            <a:r>
+              <a:rPr lang="en-US" dirty="0">
+                <a:latin typeface="Arial" panose="020B0604020202020204" pitchFamily="34" charset="0"/>
+                <a:cs typeface="Arial" panose="020B0604020202020204" pitchFamily="34" charset="0"/>
+              </a:rPr>
+              <a:t>Q7: Closure Question (T/F style)</a:t>
+            </a:r>
+          </a:p>
+          <a:p>
+            <a:pPr lvl="1"/>
+            <a:r>
+              <a:rPr lang="en-US" dirty="0">
+                <a:latin typeface="Arial" panose="020B0604020202020204" pitchFamily="34" charset="0"/>
+                <a:cs typeface="Arial" panose="020B0604020202020204" pitchFamily="34" charset="0"/>
+              </a:rPr>
+              <a:t>Given set X and Y and operation O. Does (X O Y) result in set Z</a:t>
+            </a:r>
+          </a:p>
+        </p:txBody>
+      </p:sp>
+    </p:spTree>
+    <p:extLst>
+      <p:ext uri="{BB962C8B-B14F-4D97-AF65-F5344CB8AC3E}">
+        <p14:creationId xmlns:p14="http://schemas.microsoft.com/office/powerpoint/2010/main" val="3631093413"/>
+      </p:ext>
+    </p:extLst>
+  </p:cSld>
+  <p:clrMapOvr>
+    <a:masterClrMapping/>
+  </p:clrMapOvr>
+</p:sld>
+</file>
+
+<file path=ppt/slides/slide16.xml><?xml version="1.0" encoding="utf-8"?>
+<p:sld xmlns:a="http://schemas.openxmlformats.org/drawingml/2006/main" xmlns:r="http://schemas.openxmlformats.org/officeDocument/2006/relationships" xmlns:p="http://schemas.openxmlformats.org/presentationml/2006/main">
+  <p:cSld>
+    <p:spTree>
+      <p:nvGrpSpPr>
         <p:cNvPr id="1" name=""/>
         <p:cNvGrpSpPr/>
         <p:nvPr/>
@@ -14742,7 +14943,7 @@
           <p:nvPr>
             <p:extLst>
               <p:ext uri="{D42A27DB-BD31-4B8C-83A1-F6EECF244321}">
-                <p14:modId xmlns:p14="http://schemas.microsoft.com/office/powerpoint/2010/main" val="1641075703"/>
+                <p14:modId xmlns:p14="http://schemas.microsoft.com/office/powerpoint/2010/main" val="733064255"/>
               </p:ext>
             </p:extLst>
           </p:nvPr>
@@ -14838,7 +15039,7 @@
                       <a:pPr algn="ctr"/>
                       <a:r>
                         <a:rPr lang="en-US" i="0" dirty="0"/>
-                        <a:t>10</a:t>
+                        <a:t>11</a:t>
                       </a:r>
                     </a:p>
                   </a:txBody>
@@ -14852,7 +15053,7 @@
                       <a:pPr algn="ctr"/>
                       <a:r>
                         <a:rPr lang="en-US" i="0" dirty="0"/>
-                        <a:t>10</a:t>
+                        <a:t>11</a:t>
                       </a:r>
                     </a:p>
                   </a:txBody>
@@ -14897,7 +15098,7 @@
           <p:nvPr>
             <p:extLst>
               <p:ext uri="{D42A27DB-BD31-4B8C-83A1-F6EECF244321}">
-                <p14:modId xmlns:p14="http://schemas.microsoft.com/office/powerpoint/2010/main" val="1942536635"/>
+                <p14:modId xmlns:p14="http://schemas.microsoft.com/office/powerpoint/2010/main" val="74422403"/>
               </p:ext>
             </p:extLst>
           </p:nvPr>
@@ -15170,7 +15371,7 @@
                       <a:pPr algn="ctr"/>
                       <a:r>
                         <a:rPr lang="en-US" dirty="0"/>
-                        <a:t>-</a:t>
+                        <a:t>233</a:t>
                       </a:r>
                     </a:p>
                   </a:txBody>
@@ -15184,7 +15385,7 @@
                       <a:pPr algn="ctr"/>
                       <a:r>
                         <a:rPr lang="en-US" b="0" i="0" dirty="0"/>
-                        <a:t>N/A</a:t>
+                        <a:t>49.78%</a:t>
                       </a:r>
                       <a:endParaRPr lang="en-US" b="0" dirty="0"/>
                     </a:p>
@@ -15411,7 +15612,7 @@
                       <a:pPr algn="ctr"/>
                       <a:r>
                         <a:rPr lang="en-US" b="1" dirty="0"/>
-                        <a:t>220</a:t>
+                        <a:t>336</a:t>
                       </a:r>
                     </a:p>
                   </a:txBody>
@@ -15425,7 +15626,7 @@
                       <a:pPr algn="ctr"/>
                       <a:r>
                         <a:rPr lang="en-US" b="1" dirty="0"/>
-                        <a:t>396</a:t>
+                        <a:t>629</a:t>
                       </a:r>
                     </a:p>
                   </a:txBody>
@@ -15439,7 +15640,7 @@
                       <a:pPr algn="ctr"/>
                       <a:r>
                         <a:rPr lang="en-US" b="1" i="0" dirty="0"/>
-                        <a:t>55.55%</a:t>
+                        <a:t>53.41%</a:t>
                       </a:r>
                       <a:endParaRPr lang="en-US" b="1" dirty="0"/>
                     </a:p>
@@ -15697,7 +15898,7 @@
           <p:nvPr>
             <p:extLst>
               <p:ext uri="{D42A27DB-BD31-4B8C-83A1-F6EECF244321}">
-                <p14:modId xmlns:p14="http://schemas.microsoft.com/office/powerpoint/2010/main" val="2441303257"/>
+                <p14:modId xmlns:p14="http://schemas.microsoft.com/office/powerpoint/2010/main" val="2324289945"/>
               </p:ext>
             </p:extLst>
           </p:nvPr>
@@ -15793,7 +15994,7 @@
                       <a:pPr algn="ctr"/>
                       <a:r>
                         <a:rPr lang="en-US" i="0" dirty="0"/>
-                        <a:t>5</a:t>
+                        <a:t>6</a:t>
                       </a:r>
                     </a:p>
                   </a:txBody>
@@ -15807,7 +16008,7 @@
                       <a:pPr algn="ctr"/>
                       <a:r>
                         <a:rPr lang="en-US" i="0" dirty="0"/>
-                        <a:t>5</a:t>
+                        <a:t>6</a:t>
                       </a:r>
                     </a:p>
                   </a:txBody>
@@ -16085,7 +16286,7 @@
           <p:nvPr>
             <p:extLst>
               <p:ext uri="{D42A27DB-BD31-4B8C-83A1-F6EECF244321}">
-                <p14:modId xmlns:p14="http://schemas.microsoft.com/office/powerpoint/2010/main" val="2711374298"/>
+                <p14:modId xmlns:p14="http://schemas.microsoft.com/office/powerpoint/2010/main" val="1737672941"/>
               </p:ext>
             </p:extLst>
           </p:nvPr>
@@ -16181,7 +16382,7 @@
                       <a:pPr algn="ctr"/>
                       <a:r>
                         <a:rPr lang="en-US" i="0" dirty="0"/>
-                        <a:t>10</a:t>
+                        <a:t>11</a:t>
                       </a:r>
                     </a:p>
                   </a:txBody>
@@ -16195,7 +16396,7 @@
                       <a:pPr algn="ctr"/>
                       <a:r>
                         <a:rPr lang="en-US" i="0" dirty="0"/>
-                        <a:t>10</a:t>
+                        <a:t>11</a:t>
                       </a:r>
                     </a:p>
                   </a:txBody>
@@ -16466,7 +16667,7 @@
           <p:nvPr>
             <p:extLst>
               <p:ext uri="{D42A27DB-BD31-4B8C-83A1-F6EECF244321}">
-                <p14:modId xmlns:p14="http://schemas.microsoft.com/office/powerpoint/2010/main" val="2214872950"/>
+                <p14:modId xmlns:p14="http://schemas.microsoft.com/office/powerpoint/2010/main" val="1950064502"/>
               </p:ext>
             </p:extLst>
           </p:nvPr>
@@ -16562,7 +16763,7 @@
                       <a:pPr algn="ctr"/>
                       <a:r>
                         <a:rPr lang="en-US" i="0" dirty="0"/>
-                        <a:t>5</a:t>
+                        <a:t>6</a:t>
                       </a:r>
                     </a:p>
                   </a:txBody>
@@ -16576,7 +16777,7 @@
                       <a:pPr algn="ctr"/>
                       <a:r>
                         <a:rPr lang="en-US" i="0" dirty="0"/>
-                        <a:t>5</a:t>
+                        <a:t>6</a:t>
                       </a:r>
                     </a:p>
                   </a:txBody>
@@ -18778,6 +18979,18 @@
 </file>
 
 <file path=ppt/tags/tag32.xml><?xml version="1.0" encoding="utf-8"?>
+<p:tagLst xmlns:a="http://schemas.openxmlformats.org/drawingml/2006/main" xmlns:r="http://schemas.openxmlformats.org/officeDocument/2006/relationships" xmlns:p="http://schemas.openxmlformats.org/presentationml/2006/main">
+  <p:tag name="_INSTRUCTOR VIEW19C14C36-AC8E-43BC-9DB6-C2AAF774C7DC|PANE__TAG" val="_"/>
+</p:tagLst>
+</file>
+
+<file path=ppt/tags/tag33.xml><?xml version="1.0" encoding="utf-8"?>
+<p:tagLst xmlns:a="http://schemas.openxmlformats.org/drawingml/2006/main" xmlns:r="http://schemas.openxmlformats.org/officeDocument/2006/relationships" xmlns:p="http://schemas.openxmlformats.org/presentationml/2006/main">
+  <p:tag name="_INSTRUCTOR VIEW19C14C36-AC8E-43BC-9DB6-C2AAF774C7DC|PANE__TAG" val="_"/>
+</p:tagLst>
+</file>
+
+<file path=ppt/tags/tag34.xml><?xml version="1.0" encoding="utf-8"?>
 <p:tagLst xmlns:a="http://schemas.openxmlformats.org/drawingml/2006/main" xmlns:r="http://schemas.openxmlformats.org/officeDocument/2006/relationships" xmlns:p="http://schemas.openxmlformats.org/presentationml/2006/main">
   <p:tag name="_INSTRUCTOR VIEW19C14C36-AC8E-43BC-9DB6-C2AAF774C7DC|PANE__TAG" val="_"/>
 </p:tagLst>

--- a/slides/00-DailyAnnouncements.pptx
+++ b/slides/00-DailyAnnouncements.pptx
@@ -5,7 +5,7 @@
     <p:sldMasterId id="2147484006" r:id="rId1"/>
   </p:sldMasterIdLst>
   <p:notesMasterIdLst>
-    <p:notesMasterId r:id="rId18"/>
+    <p:notesMasterId r:id="rId20"/>
   </p:notesMasterIdLst>
   <p:sldIdLst>
     <p:sldId id="256" r:id="rId2"/>
@@ -23,7 +23,9 @@
     <p:sldId id="526" r:id="rId14"/>
     <p:sldId id="527" r:id="rId15"/>
     <p:sldId id="528" r:id="rId16"/>
-    <p:sldId id="515" r:id="rId17"/>
+    <p:sldId id="529" r:id="rId17"/>
+    <p:sldId id="530" r:id="rId18"/>
+    <p:sldId id="515" r:id="rId19"/>
   </p:sldIdLst>
   <p:sldSz cx="12192000" cy="6858000"/>
   <p:notesSz cx="6858000" cy="9144000"/>
@@ -212,7 +214,7 @@
           <a:p>
             <a:fld id="{C5B45307-6ED4-B142-BD64-10F739779302}" type="datetimeFigureOut">
               <a:rPr lang="en-US" smtClean="0"/>
-              <a:t>10/1/26</a:t>
+              <a:t>10/7/26</a:t>
             </a:fld>
             <a:endParaRPr lang="en-US"/>
           </a:p>
@@ -620,7 +622,7 @@
           <a:noFill/>
           <a:extLst>
             <a:ext uri="{909E8E84-426E-40dd-AFC4-6F175D3DCCD1}">
-              <a14:hiddenFill xmlns:a14="http://schemas.microsoft.com/office/drawing/2010/main" xmlns="">
+              <a14:hiddenFill xmlns="" xmlns:a14="http://schemas.microsoft.com/office/drawing/2010/main">
                 <a:solidFill>
                   <a:srgbClr val="FFFFFF"/>
                 </a:solidFill>
@@ -679,7 +681,7 @@
             </a:ln>
             <a:extLst>
               <a:ext uri="{91240B29-F687-4f45-9708-019B960494DF}">
-                <a14:hiddenLine xmlns:a14="http://schemas.microsoft.com/office/drawing/2010/main" xmlns="" w="9525">
+                <a14:hiddenLine xmlns="" xmlns:a14="http://schemas.microsoft.com/office/drawing/2010/main" w="9525">
                   <a:solidFill>
                     <a:srgbClr val="000000"/>
                   </a:solidFill>
@@ -769,7 +771,7 @@
             </a:ln>
             <a:extLst>
               <a:ext uri="{91240B29-F687-4f45-9708-019B960494DF}">
-                <a14:hiddenLine xmlns:a14="http://schemas.microsoft.com/office/drawing/2010/main" xmlns="" w="9525">
+                <a14:hiddenLine xmlns="" xmlns:a14="http://schemas.microsoft.com/office/drawing/2010/main" w="9525">
                   <a:solidFill>
                     <a:srgbClr val="000000"/>
                   </a:solidFill>
@@ -859,7 +861,7 @@
             </a:ln>
             <a:extLst>
               <a:ext uri="{91240B29-F687-4f45-9708-019B960494DF}">
-                <a14:hiddenLine xmlns:a14="http://schemas.microsoft.com/office/drawing/2010/main" xmlns="" w="9525">
+                <a14:hiddenLine xmlns="" xmlns:a14="http://schemas.microsoft.com/office/drawing/2010/main" w="9525">
                   <a:solidFill>
                     <a:srgbClr val="000000"/>
                   </a:solidFill>
@@ -893,7 +895,7 @@
             </a:ln>
             <a:extLst>
               <a:ext uri="{91240B29-F687-4f45-9708-019B960494DF}">
-                <a14:hiddenLine xmlns:a14="http://schemas.microsoft.com/office/drawing/2010/main" xmlns="" w="9525">
+                <a14:hiddenLine xmlns="" xmlns:a14="http://schemas.microsoft.com/office/drawing/2010/main" w="9525">
                   <a:solidFill>
                     <a:srgbClr val="000000"/>
                   </a:solidFill>
@@ -983,7 +985,7 @@
             </a:ln>
             <a:extLst>
               <a:ext uri="{91240B29-F687-4f45-9708-019B960494DF}">
-                <a14:hiddenLine xmlns:a14="http://schemas.microsoft.com/office/drawing/2010/main" xmlns="" w="9525">
+                <a14:hiddenLine xmlns="" xmlns:a14="http://schemas.microsoft.com/office/drawing/2010/main" w="9525">
                   <a:solidFill>
                     <a:srgbClr val="000000"/>
                   </a:solidFill>
@@ -1045,7 +1047,7 @@
             </a:ln>
             <a:extLst>
               <a:ext uri="{91240B29-F687-4f45-9708-019B960494DF}">
-                <a14:hiddenLine xmlns:a14="http://schemas.microsoft.com/office/drawing/2010/main" xmlns="" w="9525">
+                <a14:hiddenLine xmlns="" xmlns:a14="http://schemas.microsoft.com/office/drawing/2010/main" w="9525">
                   <a:solidFill>
                     <a:srgbClr val="000000"/>
                   </a:solidFill>
@@ -1107,7 +1109,7 @@
             </a:ln>
             <a:extLst>
               <a:ext uri="{91240B29-F687-4f45-9708-019B960494DF}">
-                <a14:hiddenLine xmlns:a14="http://schemas.microsoft.com/office/drawing/2010/main" xmlns="" w="9525">
+                <a14:hiddenLine xmlns="" xmlns:a14="http://schemas.microsoft.com/office/drawing/2010/main" w="9525">
                   <a:solidFill>
                     <a:srgbClr val="000000"/>
                   </a:solidFill>
@@ -1197,7 +1199,7 @@
             </a:ln>
             <a:extLst>
               <a:ext uri="{91240B29-F687-4f45-9708-019B960494DF}">
-                <a14:hiddenLine xmlns:a14="http://schemas.microsoft.com/office/drawing/2010/main" xmlns="" w="9525">
+                <a14:hiddenLine xmlns="" xmlns:a14="http://schemas.microsoft.com/office/drawing/2010/main" w="9525">
                   <a:solidFill>
                     <a:srgbClr val="000000"/>
                   </a:solidFill>
@@ -1259,7 +1261,7 @@
             </a:ln>
             <a:extLst>
               <a:ext uri="{91240B29-F687-4f45-9708-019B960494DF}">
-                <a14:hiddenLine xmlns:a14="http://schemas.microsoft.com/office/drawing/2010/main" xmlns="" w="9525">
+                <a14:hiddenLine xmlns="" xmlns:a14="http://schemas.microsoft.com/office/drawing/2010/main" w="9525">
                   <a:solidFill>
                     <a:srgbClr val="000000"/>
                   </a:solidFill>
@@ -1321,7 +1323,7 @@
             </a:ln>
             <a:extLst>
               <a:ext uri="{91240B29-F687-4f45-9708-019B960494DF}">
-                <a14:hiddenLine xmlns:a14="http://schemas.microsoft.com/office/drawing/2010/main" xmlns="" w="9525">
+                <a14:hiddenLine xmlns="" xmlns:a14="http://schemas.microsoft.com/office/drawing/2010/main" w="9525">
                   <a:solidFill>
                     <a:srgbClr val="000000"/>
                   </a:solidFill>
@@ -1411,7 +1413,7 @@
             </a:ln>
             <a:extLst>
               <a:ext uri="{91240B29-F687-4f45-9708-019B960494DF}">
-                <a14:hiddenLine xmlns:a14="http://schemas.microsoft.com/office/drawing/2010/main" xmlns="" w="9525">
+                <a14:hiddenLine xmlns="" xmlns:a14="http://schemas.microsoft.com/office/drawing/2010/main" w="9525">
                   <a:solidFill>
                     <a:srgbClr val="000000"/>
                   </a:solidFill>
@@ -1501,7 +1503,7 @@
             </a:ln>
             <a:extLst>
               <a:ext uri="{91240B29-F687-4f45-9708-019B960494DF}">
-                <a14:hiddenLine xmlns:a14="http://schemas.microsoft.com/office/drawing/2010/main" xmlns="" w="9525">
+                <a14:hiddenLine xmlns="" xmlns:a14="http://schemas.microsoft.com/office/drawing/2010/main" w="9525">
                   <a:solidFill>
                     <a:srgbClr val="000000"/>
                   </a:solidFill>
@@ -1563,7 +1565,7 @@
             </a:ln>
             <a:extLst>
               <a:ext uri="{91240B29-F687-4f45-9708-019B960494DF}">
-                <a14:hiddenLine xmlns:a14="http://schemas.microsoft.com/office/drawing/2010/main" xmlns="" w="9525">
+                <a14:hiddenLine xmlns="" xmlns:a14="http://schemas.microsoft.com/office/drawing/2010/main" w="9525">
                   <a:solidFill>
                     <a:srgbClr val="000000"/>
                   </a:solidFill>
@@ -1673,7 +1675,7 @@
             </a:ln>
             <a:extLst>
               <a:ext uri="{91240B29-F687-4f45-9708-019B960494DF}">
-                <a14:hiddenLine xmlns:a14="http://schemas.microsoft.com/office/drawing/2010/main" xmlns="" w="9525">
+                <a14:hiddenLine xmlns="" xmlns:a14="http://schemas.microsoft.com/office/drawing/2010/main" w="9525">
                   <a:solidFill>
                     <a:srgbClr val="000000"/>
                   </a:solidFill>
@@ -1735,7 +1737,7 @@
             </a:ln>
             <a:extLst>
               <a:ext uri="{91240B29-F687-4f45-9708-019B960494DF}">
-                <a14:hiddenLine xmlns:a14="http://schemas.microsoft.com/office/drawing/2010/main" xmlns="" w="9525">
+                <a14:hiddenLine xmlns="" xmlns:a14="http://schemas.microsoft.com/office/drawing/2010/main" w="9525">
                   <a:solidFill>
                     <a:srgbClr val="000000"/>
                   </a:solidFill>
@@ -1825,7 +1827,7 @@
             </a:ln>
             <a:extLst>
               <a:ext uri="{91240B29-F687-4f45-9708-019B960494DF}">
-                <a14:hiddenLine xmlns:a14="http://schemas.microsoft.com/office/drawing/2010/main" xmlns="" w="9525">
+                <a14:hiddenLine xmlns="" xmlns:a14="http://schemas.microsoft.com/office/drawing/2010/main" w="9525">
                   <a:solidFill>
                     <a:srgbClr val="000000"/>
                   </a:solidFill>
@@ -1915,7 +1917,7 @@
             </a:ln>
             <a:extLst>
               <a:ext uri="{91240B29-F687-4f45-9708-019B960494DF}">
-                <a14:hiddenLine xmlns:a14="http://schemas.microsoft.com/office/drawing/2010/main" xmlns="" w="9525">
+                <a14:hiddenLine xmlns="" xmlns:a14="http://schemas.microsoft.com/office/drawing/2010/main" w="9525">
                   <a:solidFill>
                     <a:srgbClr val="000000"/>
                   </a:solidFill>
@@ -1977,7 +1979,7 @@
             </a:ln>
             <a:extLst>
               <a:ext uri="{91240B29-F687-4f45-9708-019B960494DF}">
-                <a14:hiddenLine xmlns:a14="http://schemas.microsoft.com/office/drawing/2010/main" xmlns="" w="9525">
+                <a14:hiddenLine xmlns="" xmlns:a14="http://schemas.microsoft.com/office/drawing/2010/main" w="9525">
                   <a:solidFill>
                     <a:srgbClr val="000000"/>
                   </a:solidFill>
@@ -2067,7 +2069,7 @@
             </a:ln>
             <a:extLst>
               <a:ext uri="{91240B29-F687-4f45-9708-019B960494DF}">
-                <a14:hiddenLine xmlns:a14="http://schemas.microsoft.com/office/drawing/2010/main" xmlns="" w="9525">
+                <a14:hiddenLine xmlns="" xmlns:a14="http://schemas.microsoft.com/office/drawing/2010/main" w="9525">
                   <a:solidFill>
                     <a:srgbClr val="000000"/>
                   </a:solidFill>
@@ -2157,7 +2159,7 @@
             </a:ln>
             <a:extLst>
               <a:ext uri="{91240B29-F687-4f45-9708-019B960494DF}">
-                <a14:hiddenLine xmlns:a14="http://schemas.microsoft.com/office/drawing/2010/main" xmlns="" w="9525">
+                <a14:hiddenLine xmlns="" xmlns:a14="http://schemas.microsoft.com/office/drawing/2010/main" w="9525">
                   <a:solidFill>
                     <a:srgbClr val="000000"/>
                   </a:solidFill>
@@ -2213,7 +2215,7 @@
             </a:ln>
             <a:extLst>
               <a:ext uri="{91240B29-F687-4f45-9708-019B960494DF}">
-                <a14:hiddenLine xmlns:a14="http://schemas.microsoft.com/office/drawing/2010/main" xmlns="" w="9525">
+                <a14:hiddenLine xmlns="" xmlns:a14="http://schemas.microsoft.com/office/drawing/2010/main" w="9525">
                   <a:solidFill>
                     <a:srgbClr val="000000"/>
                   </a:solidFill>
@@ -2303,7 +2305,7 @@
             </a:ln>
             <a:extLst>
               <a:ext uri="{91240B29-F687-4f45-9708-019B960494DF}">
-                <a14:hiddenLine xmlns:a14="http://schemas.microsoft.com/office/drawing/2010/main" xmlns="" w="9525">
+                <a14:hiddenLine xmlns="" xmlns:a14="http://schemas.microsoft.com/office/drawing/2010/main" w="9525">
                   <a:solidFill>
                     <a:srgbClr val="000000"/>
                   </a:solidFill>
@@ -2359,7 +2361,7 @@
             </a:ln>
             <a:extLst>
               <a:ext uri="{91240B29-F687-4f45-9708-019B960494DF}">
-                <a14:hiddenLine xmlns:a14="http://schemas.microsoft.com/office/drawing/2010/main" xmlns="" w="9525">
+                <a14:hiddenLine xmlns="" xmlns:a14="http://schemas.microsoft.com/office/drawing/2010/main" w="9525">
                   <a:solidFill>
                     <a:srgbClr val="000000"/>
                   </a:solidFill>
@@ -2449,7 +2451,7 @@
             </a:ln>
             <a:extLst>
               <a:ext uri="{91240B29-F687-4f45-9708-019B960494DF}">
-                <a14:hiddenLine xmlns:a14="http://schemas.microsoft.com/office/drawing/2010/main" xmlns="" w="9525">
+                <a14:hiddenLine xmlns="" xmlns:a14="http://schemas.microsoft.com/office/drawing/2010/main" w="9525">
                   <a:solidFill>
                     <a:srgbClr val="000000"/>
                   </a:solidFill>
@@ -2517,7 +2519,7 @@
             </a:ln>
             <a:extLst>
               <a:ext uri="{91240B29-F687-4f45-9708-019B960494DF}">
-                <a14:hiddenLine xmlns:a14="http://schemas.microsoft.com/office/drawing/2010/main" xmlns="" w="9525">
+                <a14:hiddenLine xmlns="" xmlns:a14="http://schemas.microsoft.com/office/drawing/2010/main" w="9525">
                   <a:solidFill>
                     <a:srgbClr val="000000"/>
                   </a:solidFill>
@@ -2607,7 +2609,7 @@
             </a:ln>
             <a:extLst>
               <a:ext uri="{91240B29-F687-4f45-9708-019B960494DF}">
-                <a14:hiddenLine xmlns:a14="http://schemas.microsoft.com/office/drawing/2010/main" xmlns="" w="9525">
+                <a14:hiddenLine xmlns="" xmlns:a14="http://schemas.microsoft.com/office/drawing/2010/main" w="9525">
                   <a:solidFill>
                     <a:srgbClr val="000000"/>
                   </a:solidFill>
@@ -2675,7 +2677,7 @@
             </a:ln>
             <a:extLst>
               <a:ext uri="{91240B29-F687-4f45-9708-019B960494DF}">
-                <a14:hiddenLine xmlns:a14="http://schemas.microsoft.com/office/drawing/2010/main" xmlns="" w="9525">
+                <a14:hiddenLine xmlns="" xmlns:a14="http://schemas.microsoft.com/office/drawing/2010/main" w="9525">
                   <a:solidFill>
                     <a:srgbClr val="000000"/>
                   </a:solidFill>
@@ -2765,7 +2767,7 @@
             </a:ln>
             <a:extLst>
               <a:ext uri="{91240B29-F687-4f45-9708-019B960494DF}">
-                <a14:hiddenLine xmlns:a14="http://schemas.microsoft.com/office/drawing/2010/main" xmlns="" w="9525">
+                <a14:hiddenLine xmlns="" xmlns:a14="http://schemas.microsoft.com/office/drawing/2010/main" w="9525">
                   <a:solidFill>
                     <a:srgbClr val="000000"/>
                   </a:solidFill>
@@ -2799,7 +2801,7 @@
             </a:ln>
             <a:extLst>
               <a:ext uri="{91240B29-F687-4f45-9708-019B960494DF}">
-                <a14:hiddenLine xmlns:a14="http://schemas.microsoft.com/office/drawing/2010/main" xmlns="" w="9525">
+                <a14:hiddenLine xmlns="" xmlns:a14="http://schemas.microsoft.com/office/drawing/2010/main" w="9525">
                   <a:solidFill>
                     <a:srgbClr val="000000"/>
                   </a:solidFill>
@@ -2889,7 +2891,7 @@
             </a:ln>
             <a:extLst>
               <a:ext uri="{91240B29-F687-4f45-9708-019B960494DF}">
-                <a14:hiddenLine xmlns:a14="http://schemas.microsoft.com/office/drawing/2010/main" xmlns="" w="9525">
+                <a14:hiddenLine xmlns="" xmlns:a14="http://schemas.microsoft.com/office/drawing/2010/main" w="9525">
                   <a:solidFill>
                     <a:srgbClr val="000000"/>
                   </a:solidFill>
@@ -2951,7 +2953,7 @@
             </a:ln>
             <a:extLst>
               <a:ext uri="{91240B29-F687-4f45-9708-019B960494DF}">
-                <a14:hiddenLine xmlns:a14="http://schemas.microsoft.com/office/drawing/2010/main" xmlns="" w="9525">
+                <a14:hiddenLine xmlns="" xmlns:a14="http://schemas.microsoft.com/office/drawing/2010/main" w="9525">
                   <a:solidFill>
                     <a:srgbClr val="000000"/>
                   </a:solidFill>
@@ -3013,7 +3015,7 @@
             </a:ln>
             <a:extLst>
               <a:ext uri="{91240B29-F687-4f45-9708-019B960494DF}">
-                <a14:hiddenLine xmlns:a14="http://schemas.microsoft.com/office/drawing/2010/main" xmlns="" w="9525">
+                <a14:hiddenLine xmlns="" xmlns:a14="http://schemas.microsoft.com/office/drawing/2010/main" w="9525">
                   <a:solidFill>
                     <a:srgbClr val="000000"/>
                   </a:solidFill>
@@ -3103,7 +3105,7 @@
             </a:ln>
             <a:extLst>
               <a:ext uri="{91240B29-F687-4f45-9708-019B960494DF}">
-                <a14:hiddenLine xmlns:a14="http://schemas.microsoft.com/office/drawing/2010/main" xmlns="" w="9525">
+                <a14:hiddenLine xmlns="" xmlns:a14="http://schemas.microsoft.com/office/drawing/2010/main" w="9525">
                   <a:solidFill>
                     <a:srgbClr val="000000"/>
                   </a:solidFill>
@@ -3171,7 +3173,7 @@
             </a:ln>
             <a:extLst>
               <a:ext uri="{91240B29-F687-4f45-9708-019B960494DF}">
-                <a14:hiddenLine xmlns:a14="http://schemas.microsoft.com/office/drawing/2010/main" xmlns="" w="9525">
+                <a14:hiddenLine xmlns="" xmlns:a14="http://schemas.microsoft.com/office/drawing/2010/main" w="9525">
                   <a:solidFill>
                     <a:srgbClr val="000000"/>
                   </a:solidFill>
@@ -3233,7 +3235,7 @@
             </a:ln>
             <a:extLst>
               <a:ext uri="{91240B29-F687-4f45-9708-019B960494DF}">
-                <a14:hiddenLine xmlns:a14="http://schemas.microsoft.com/office/drawing/2010/main" xmlns="" w="9525">
+                <a14:hiddenLine xmlns="" xmlns:a14="http://schemas.microsoft.com/office/drawing/2010/main" w="9525">
                   <a:solidFill>
                     <a:srgbClr val="000000"/>
                   </a:solidFill>
@@ -3323,7 +3325,7 @@
             </a:ln>
             <a:extLst>
               <a:ext uri="{91240B29-F687-4f45-9708-019B960494DF}">
-                <a14:hiddenLine xmlns:a14="http://schemas.microsoft.com/office/drawing/2010/main" xmlns="" w="9525">
+                <a14:hiddenLine xmlns="" xmlns:a14="http://schemas.microsoft.com/office/drawing/2010/main" w="9525">
                   <a:solidFill>
                     <a:srgbClr val="000000"/>
                   </a:solidFill>
@@ -3385,7 +3387,7 @@
             </a:ln>
             <a:extLst>
               <a:ext uri="{91240B29-F687-4f45-9708-019B960494DF}">
-                <a14:hiddenLine xmlns:a14="http://schemas.microsoft.com/office/drawing/2010/main" xmlns="" w="9525">
+                <a14:hiddenLine xmlns="" xmlns:a14="http://schemas.microsoft.com/office/drawing/2010/main" w="9525">
                   <a:solidFill>
                     <a:srgbClr val="000000"/>
                   </a:solidFill>
@@ -3475,7 +3477,7 @@
             </a:ln>
             <a:extLst>
               <a:ext uri="{91240B29-F687-4f45-9708-019B960494DF}">
-                <a14:hiddenLine xmlns:a14="http://schemas.microsoft.com/office/drawing/2010/main" xmlns="" w="9525">
+                <a14:hiddenLine xmlns="" xmlns:a14="http://schemas.microsoft.com/office/drawing/2010/main" w="9525">
                   <a:solidFill>
                     <a:srgbClr val="000000"/>
                   </a:solidFill>
@@ -3537,7 +3539,7 @@
             </a:ln>
             <a:extLst>
               <a:ext uri="{91240B29-F687-4f45-9708-019B960494DF}">
-                <a14:hiddenLine xmlns:a14="http://schemas.microsoft.com/office/drawing/2010/main" xmlns="" w="9525">
+                <a14:hiddenLine xmlns="" xmlns:a14="http://schemas.microsoft.com/office/drawing/2010/main" w="9525">
                   <a:solidFill>
                     <a:srgbClr val="000000"/>
                   </a:solidFill>
@@ -3627,7 +3629,7 @@
             </a:ln>
             <a:extLst>
               <a:ext uri="{91240B29-F687-4f45-9708-019B960494DF}">
-                <a14:hiddenLine xmlns:a14="http://schemas.microsoft.com/office/drawing/2010/main" xmlns="" w="9525">
+                <a14:hiddenLine xmlns="" xmlns:a14="http://schemas.microsoft.com/office/drawing/2010/main" w="9525">
                   <a:solidFill>
                     <a:srgbClr val="000000"/>
                   </a:solidFill>
@@ -3661,7 +3663,7 @@
             </a:ln>
             <a:extLst>
               <a:ext uri="{91240B29-F687-4f45-9708-019B960494DF}">
-                <a14:hiddenLine xmlns:a14="http://schemas.microsoft.com/office/drawing/2010/main" xmlns="" w="9525">
+                <a14:hiddenLine xmlns="" xmlns:a14="http://schemas.microsoft.com/office/drawing/2010/main" w="9525">
                   <a:solidFill>
                     <a:srgbClr val="000000"/>
                   </a:solidFill>
@@ -3726,7 +3728,7 @@
             </a:ln>
             <a:extLst>
               <a:ext uri="{91240B29-F687-4f45-9708-019B960494DF}">
-                <a14:hiddenLine xmlns:a14="http://schemas.microsoft.com/office/drawing/2010/main" xmlns="" w="9525">
+                <a14:hiddenLine xmlns="" xmlns:a14="http://schemas.microsoft.com/office/drawing/2010/main" w="9525">
                   <a:solidFill>
                     <a:srgbClr val="000000"/>
                   </a:solidFill>
@@ -3816,7 +3818,7 @@
             </a:ln>
             <a:extLst>
               <a:ext uri="{91240B29-F687-4f45-9708-019B960494DF}">
-                <a14:hiddenLine xmlns:a14="http://schemas.microsoft.com/office/drawing/2010/main" xmlns="" w="9525">
+                <a14:hiddenLine xmlns="" xmlns:a14="http://schemas.microsoft.com/office/drawing/2010/main" w="9525">
                   <a:solidFill>
                     <a:srgbClr val="000000"/>
                   </a:solidFill>
@@ -3878,7 +3880,7 @@
             </a:ln>
             <a:extLst>
               <a:ext uri="{91240B29-F687-4f45-9708-019B960494DF}">
-                <a14:hiddenLine xmlns:a14="http://schemas.microsoft.com/office/drawing/2010/main" xmlns="" w="9525">
+                <a14:hiddenLine xmlns="" xmlns:a14="http://schemas.microsoft.com/office/drawing/2010/main" w="9525">
                   <a:solidFill>
                     <a:srgbClr val="000000"/>
                   </a:solidFill>
@@ -3968,7 +3970,7 @@
             </a:ln>
             <a:extLst>
               <a:ext uri="{91240B29-F687-4f45-9708-019B960494DF}">
-                <a14:hiddenLine xmlns:a14="http://schemas.microsoft.com/office/drawing/2010/main" xmlns="" w="9525">
+                <a14:hiddenLine xmlns="" xmlns:a14="http://schemas.microsoft.com/office/drawing/2010/main" w="9525">
                   <a:solidFill>
                     <a:srgbClr val="000000"/>
                   </a:solidFill>
@@ -4058,7 +4060,7 @@
             </a:ln>
             <a:extLst>
               <a:ext uri="{91240B29-F687-4f45-9708-019B960494DF}">
-                <a14:hiddenLine xmlns:a14="http://schemas.microsoft.com/office/drawing/2010/main" xmlns="" w="9525">
+                <a14:hiddenLine xmlns="" xmlns:a14="http://schemas.microsoft.com/office/drawing/2010/main" w="9525">
                   <a:solidFill>
                     <a:srgbClr val="000000"/>
                   </a:solidFill>
@@ -4123,7 +4125,7 @@
             </a:ln>
             <a:extLst>
               <a:ext uri="{91240B29-F687-4f45-9708-019B960494DF}">
-                <a14:hiddenLine xmlns:a14="http://schemas.microsoft.com/office/drawing/2010/main" xmlns="" w="9525">
+                <a14:hiddenLine xmlns="" xmlns:a14="http://schemas.microsoft.com/office/drawing/2010/main" w="9525">
                   <a:solidFill>
                     <a:srgbClr val="000000"/>
                   </a:solidFill>
@@ -4185,7 +4187,7 @@
             </a:ln>
             <a:extLst>
               <a:ext uri="{91240B29-F687-4f45-9708-019B960494DF}">
-                <a14:hiddenLine xmlns:a14="http://schemas.microsoft.com/office/drawing/2010/main" xmlns="" w="9525">
+                <a14:hiddenLine xmlns="" xmlns:a14="http://schemas.microsoft.com/office/drawing/2010/main" w="9525">
                   <a:solidFill>
                     <a:srgbClr val="000000"/>
                   </a:solidFill>
@@ -4275,7 +4277,7 @@
             </a:ln>
             <a:extLst>
               <a:ext uri="{91240B29-F687-4f45-9708-019B960494DF}">
-                <a14:hiddenLine xmlns:a14="http://schemas.microsoft.com/office/drawing/2010/main" xmlns="" w="9525">
+                <a14:hiddenLine xmlns="" xmlns:a14="http://schemas.microsoft.com/office/drawing/2010/main" w="9525">
                   <a:solidFill>
                     <a:srgbClr val="000000"/>
                   </a:solidFill>
@@ -4365,7 +4367,7 @@
             </a:ln>
             <a:extLst>
               <a:ext uri="{91240B29-F687-4f45-9708-019B960494DF}">
-                <a14:hiddenLine xmlns:a14="http://schemas.microsoft.com/office/drawing/2010/main" xmlns="" w="9525">
+                <a14:hiddenLine xmlns="" xmlns:a14="http://schemas.microsoft.com/office/drawing/2010/main" w="9525">
                   <a:solidFill>
                     <a:srgbClr val="000000"/>
                   </a:solidFill>
@@ -4427,7 +4429,7 @@
             </a:ln>
             <a:extLst>
               <a:ext uri="{91240B29-F687-4f45-9708-019B960494DF}">
-                <a14:hiddenLine xmlns:a14="http://schemas.microsoft.com/office/drawing/2010/main" xmlns="" w="9525">
+                <a14:hiddenLine xmlns="" xmlns:a14="http://schemas.microsoft.com/office/drawing/2010/main" w="9525">
                   <a:solidFill>
                     <a:srgbClr val="000000"/>
                   </a:solidFill>
@@ -4547,7 +4549,7 @@
             </a:ln>
             <a:extLst>
               <a:ext uri="{91240B29-F687-4f45-9708-019B960494DF}">
-                <a14:hiddenLine xmlns:a14="http://schemas.microsoft.com/office/drawing/2010/main" xmlns="" w="9525">
+                <a14:hiddenLine xmlns="" xmlns:a14="http://schemas.microsoft.com/office/drawing/2010/main" w="9525">
                   <a:solidFill>
                     <a:srgbClr val="000000"/>
                   </a:solidFill>
@@ -4615,7 +4617,7 @@
             </a:ln>
             <a:extLst>
               <a:ext uri="{91240B29-F687-4f45-9708-019B960494DF}">
-                <a14:hiddenLine xmlns:a14="http://schemas.microsoft.com/office/drawing/2010/main" xmlns="" w="9525">
+                <a14:hiddenLine xmlns="" xmlns:a14="http://schemas.microsoft.com/office/drawing/2010/main" w="9525">
                   <a:solidFill>
                     <a:srgbClr val="000000"/>
                   </a:solidFill>
@@ -4705,7 +4707,7 @@
             </a:ln>
             <a:extLst>
               <a:ext uri="{91240B29-F687-4f45-9708-019B960494DF}">
-                <a14:hiddenLine xmlns:a14="http://schemas.microsoft.com/office/drawing/2010/main" xmlns="" w="9525">
+                <a14:hiddenLine xmlns="" xmlns:a14="http://schemas.microsoft.com/office/drawing/2010/main" w="9525">
                   <a:solidFill>
                     <a:srgbClr val="000000"/>
                   </a:solidFill>
@@ -4845,7 +4847,7 @@
           <a:p>
             <a:fld id="{4313F670-7F9A-774D-B73D-573401E44297}" type="datetime1">
               <a:rPr lang="en-US" smtClean="0"/>
-              <a:t>10/1/26</a:t>
+              <a:t>10/7/26</a:t>
             </a:fld>
             <a:endParaRPr lang="en-US"/>
           </a:p>
@@ -5112,7 +5114,7 @@
           <a:p>
             <a:fld id="{446F9669-A8A7-2D40-9D01-B35FC337AA30}" type="datetime1">
               <a:rPr lang="en-US" smtClean="0"/>
-              <a:t>10/1/26</a:t>
+              <a:t>10/7/26</a:t>
             </a:fld>
             <a:endParaRPr lang="en-US"/>
           </a:p>
@@ -5308,7 +5310,7 @@
           <a:p>
             <a:fld id="{FA76CF18-F41B-6B48-B3E5-599E9795C2C3}" type="datetime1">
               <a:rPr lang="en-US" smtClean="0"/>
-              <a:t>10/1/26</a:t>
+              <a:t>10/7/26</a:t>
             </a:fld>
             <a:endParaRPr lang="en-US"/>
           </a:p>
@@ -5571,7 +5573,7 @@
           <a:p>
             <a:fld id="{B9654854-6457-164F-A077-6B3035079B82}" type="datetime1">
               <a:rPr lang="en-US" smtClean="0"/>
-              <a:t>10/1/26</a:t>
+              <a:t>10/7/26</a:t>
             </a:fld>
             <a:endParaRPr lang="en-US"/>
           </a:p>
@@ -6005,7 +6007,7 @@
           <a:p>
             <a:fld id="{CE3DBFD7-E611-8C40-AC73-0C29FF63F0CD}" type="datetime1">
               <a:rPr lang="en-US" smtClean="0"/>
-              <a:t>10/1/26</a:t>
+              <a:t>10/7/26</a:t>
             </a:fld>
             <a:endParaRPr lang="en-US"/>
           </a:p>
@@ -6551,7 +6553,7 @@
           <a:p>
             <a:fld id="{C8B63B06-0493-2840-9F37-30C9412BBF17}" type="datetime1">
               <a:rPr lang="en-US" smtClean="0"/>
-              <a:t>10/1/26</a:t>
+              <a:t>10/7/26</a:t>
             </a:fld>
             <a:endParaRPr lang="en-US"/>
           </a:p>
@@ -7271,7 +7273,7 @@
           <a:p>
             <a:fld id="{72B5C0FA-8C46-E84D-B6D7-B673F2CA0A0E}" type="datetime1">
               <a:rPr lang="en-US" smtClean="0"/>
-              <a:t>10/1/26</a:t>
+              <a:t>10/7/26</a:t>
             </a:fld>
             <a:endParaRPr lang="en-US"/>
           </a:p>
@@ -7441,7 +7443,7 @@
           <a:p>
             <a:fld id="{60B9CDE1-97B4-BF46-B69C-B86855B18820}" type="datetime1">
               <a:rPr lang="en-US" smtClean="0"/>
-              <a:t>10/1/26</a:t>
+              <a:t>10/7/26</a:t>
             </a:fld>
             <a:endParaRPr lang="en-US"/>
           </a:p>
@@ -7621,7 +7623,7 @@
           <a:p>
             <a:fld id="{BE51D3A4-F9E5-FD49-AA87-B395F50451DC}" type="datetime1">
               <a:rPr lang="en-US" smtClean="0"/>
-              <a:t>10/1/26</a:t>
+              <a:t>10/7/26</a:t>
             </a:fld>
             <a:endParaRPr lang="en-US"/>
           </a:p>
@@ -7791,7 +7793,7 @@
           <a:p>
             <a:fld id="{880DFB37-B0AE-9449-85EC-14F9C83B6084}" type="datetime1">
               <a:rPr lang="en-US" smtClean="0"/>
-              <a:t>10/1/26</a:t>
+              <a:t>10/7/26</a:t>
             </a:fld>
             <a:endParaRPr lang="en-US"/>
           </a:p>
@@ -8041,7 +8043,7 @@
           <a:p>
             <a:fld id="{C939124A-616E-6944-A21A-1839F5DBE7BB}" type="datetime1">
               <a:rPr lang="en-US" smtClean="0"/>
-              <a:t>10/1/26</a:t>
+              <a:t>10/7/26</a:t>
             </a:fld>
             <a:endParaRPr lang="en-US"/>
           </a:p>
@@ -8273,7 +8275,7 @@
           <a:p>
             <a:fld id="{C6E9A026-D48C-FD43-8676-CD625DD5D84B}" type="datetime1">
               <a:rPr lang="en-US" smtClean="0"/>
-              <a:t>10/1/26</a:t>
+              <a:t>10/7/26</a:t>
             </a:fld>
             <a:endParaRPr lang="en-US"/>
           </a:p>
@@ -8659,7 +8661,7 @@
           <a:p>
             <a:fld id="{EA35111E-23A3-1440-99A3-C4C665908E3D}" type="datetime1">
               <a:rPr lang="en-US" smtClean="0"/>
-              <a:t>10/1/26</a:t>
+              <a:t>10/7/26</a:t>
             </a:fld>
             <a:endParaRPr lang="en-US"/>
           </a:p>
@@ -8782,7 +8784,7 @@
           <a:p>
             <a:fld id="{249983B9-88EF-D74B-BA6D-6A3BF17C2B38}" type="datetime1">
               <a:rPr lang="en-US" smtClean="0"/>
-              <a:t>10/1/26</a:t>
+              <a:t>10/7/26</a:t>
             </a:fld>
             <a:endParaRPr lang="en-US"/>
           </a:p>
@@ -8877,7 +8879,7 @@
           <a:p>
             <a:fld id="{E2A00AEF-B4EC-084A-8DB8-A225C7981CBB}" type="datetime1">
               <a:rPr lang="en-US" smtClean="0"/>
-              <a:t>10/1/26</a:t>
+              <a:t>10/7/26</a:t>
             </a:fld>
             <a:endParaRPr lang="en-US"/>
           </a:p>
@@ -9126,7 +9128,7 @@
           <a:p>
             <a:fld id="{97860299-21CD-A94A-A7B0-44E787F8D42C}" type="datetime1">
               <a:rPr lang="en-US" smtClean="0"/>
-              <a:t>10/1/26</a:t>
+              <a:t>10/7/26</a:t>
             </a:fld>
             <a:endParaRPr lang="en-US"/>
           </a:p>
@@ -9411,7 +9413,7 @@
           <a:p>
             <a:fld id="{3DFD19CF-4E62-D246-BA61-7B528271315F}" type="datetime1">
               <a:rPr lang="en-US" smtClean="0"/>
-              <a:t>10/1/26</a:t>
+              <a:t>10/7/26</a:t>
             </a:fld>
             <a:endParaRPr lang="en-US"/>
           </a:p>
@@ -9534,7 +9536,7 @@
           <a:noFill/>
           <a:extLst>
             <a:ext uri="{909E8E84-426E-40dd-AFC4-6F175D3DCCD1}">
-              <a14:hiddenFill xmlns:a14="http://schemas.microsoft.com/office/drawing/2010/main" xmlns="">
+              <a14:hiddenFill xmlns="" xmlns:a14="http://schemas.microsoft.com/office/drawing/2010/main">
                 <a:solidFill>
                   <a:srgbClr val="FFFFFF"/>
                 </a:solidFill>
@@ -9608,7 +9610,7 @@
               </a:ln>
               <a:extLst>
                 <a:ext uri="{91240B29-F687-4f45-9708-019B960494DF}">
-                  <a14:hiddenLine xmlns:a14="http://schemas.microsoft.com/office/drawing/2010/main" xmlns="" w="9525">
+                  <a14:hiddenLine xmlns="" xmlns:a14="http://schemas.microsoft.com/office/drawing/2010/main" w="9525">
                     <a:solidFill>
                       <a:srgbClr val="000000"/>
                     </a:solidFill>
@@ -9698,7 +9700,7 @@
               </a:ln>
               <a:extLst>
                 <a:ext uri="{91240B29-F687-4f45-9708-019B960494DF}">
-                  <a14:hiddenLine xmlns:a14="http://schemas.microsoft.com/office/drawing/2010/main" xmlns="" w="9525">
+                  <a14:hiddenLine xmlns="" xmlns:a14="http://schemas.microsoft.com/office/drawing/2010/main" w="9525">
                     <a:solidFill>
                       <a:srgbClr val="000000"/>
                     </a:solidFill>
@@ -9788,7 +9790,7 @@
               </a:ln>
               <a:extLst>
                 <a:ext uri="{91240B29-F687-4f45-9708-019B960494DF}">
-                  <a14:hiddenLine xmlns:a14="http://schemas.microsoft.com/office/drawing/2010/main" xmlns="" w="9525">
+                  <a14:hiddenLine xmlns="" xmlns:a14="http://schemas.microsoft.com/office/drawing/2010/main" w="9525">
                     <a:solidFill>
                       <a:srgbClr val="000000"/>
                     </a:solidFill>
@@ -9850,7 +9852,7 @@
               </a:ln>
               <a:extLst>
                 <a:ext uri="{91240B29-F687-4f45-9708-019B960494DF}">
-                  <a14:hiddenLine xmlns:a14="http://schemas.microsoft.com/office/drawing/2010/main" xmlns="" w="9525">
+                  <a14:hiddenLine xmlns="" xmlns:a14="http://schemas.microsoft.com/office/drawing/2010/main" w="9525">
                     <a:solidFill>
                       <a:srgbClr val="000000"/>
                     </a:solidFill>
@@ -9940,7 +9942,7 @@
               </a:ln>
               <a:extLst>
                 <a:ext uri="{91240B29-F687-4f45-9708-019B960494DF}">
-                  <a14:hiddenLine xmlns:a14="http://schemas.microsoft.com/office/drawing/2010/main" xmlns="" w="9525">
+                  <a14:hiddenLine xmlns="" xmlns:a14="http://schemas.microsoft.com/office/drawing/2010/main" w="9525">
                     <a:solidFill>
                       <a:srgbClr val="000000"/>
                     </a:solidFill>
@@ -10002,7 +10004,7 @@
               </a:ln>
               <a:extLst>
                 <a:ext uri="{91240B29-F687-4f45-9708-019B960494DF}">
-                  <a14:hiddenLine xmlns:a14="http://schemas.microsoft.com/office/drawing/2010/main" xmlns="" w="9525">
+                  <a14:hiddenLine xmlns="" xmlns:a14="http://schemas.microsoft.com/office/drawing/2010/main" w="9525">
                     <a:solidFill>
                       <a:srgbClr val="000000"/>
                     </a:solidFill>
@@ -10064,7 +10066,7 @@
               </a:ln>
               <a:extLst>
                 <a:ext uri="{91240B29-F687-4f45-9708-019B960494DF}">
-                  <a14:hiddenLine xmlns:a14="http://schemas.microsoft.com/office/drawing/2010/main" xmlns="" w="9525">
+                  <a14:hiddenLine xmlns="" xmlns:a14="http://schemas.microsoft.com/office/drawing/2010/main" w="9525">
                     <a:solidFill>
                       <a:srgbClr val="000000"/>
                     </a:solidFill>
@@ -10154,7 +10156,7 @@
               </a:ln>
               <a:extLst>
                 <a:ext uri="{91240B29-F687-4f45-9708-019B960494DF}">
-                  <a14:hiddenLine xmlns:a14="http://schemas.microsoft.com/office/drawing/2010/main" xmlns="" w="9525">
+                  <a14:hiddenLine xmlns="" xmlns:a14="http://schemas.microsoft.com/office/drawing/2010/main" w="9525">
                     <a:solidFill>
                       <a:srgbClr val="000000"/>
                     </a:solidFill>
@@ -10244,7 +10246,7 @@
               </a:ln>
               <a:extLst>
                 <a:ext uri="{91240B29-F687-4f45-9708-019B960494DF}">
-                  <a14:hiddenLine xmlns:a14="http://schemas.microsoft.com/office/drawing/2010/main" xmlns="" w="9525">
+                  <a14:hiddenLine xmlns="" xmlns:a14="http://schemas.microsoft.com/office/drawing/2010/main" w="9525">
                     <a:solidFill>
                       <a:srgbClr val="000000"/>
                     </a:solidFill>
@@ -10306,7 +10308,7 @@
               </a:ln>
               <a:extLst>
                 <a:ext uri="{91240B29-F687-4f45-9708-019B960494DF}">
-                  <a14:hiddenLine xmlns:a14="http://schemas.microsoft.com/office/drawing/2010/main" xmlns="" w="9525">
+                  <a14:hiddenLine xmlns="" xmlns:a14="http://schemas.microsoft.com/office/drawing/2010/main" w="9525">
                     <a:solidFill>
                       <a:srgbClr val="000000"/>
                     </a:solidFill>
@@ -10416,7 +10418,7 @@
               </a:ln>
               <a:extLst>
                 <a:ext uri="{91240B29-F687-4f45-9708-019B960494DF}">
-                  <a14:hiddenLine xmlns:a14="http://schemas.microsoft.com/office/drawing/2010/main" xmlns="" w="9525">
+                  <a14:hiddenLine xmlns="" xmlns:a14="http://schemas.microsoft.com/office/drawing/2010/main" w="9525">
                     <a:solidFill>
                       <a:srgbClr val="000000"/>
                     </a:solidFill>
@@ -10500,7 +10502,7 @@
               </a:ln>
               <a:extLst>
                 <a:ext uri="{91240B29-F687-4f45-9708-019B960494DF}">
-                  <a14:hiddenLine xmlns:a14="http://schemas.microsoft.com/office/drawing/2010/main" xmlns="" w="9525">
+                  <a14:hiddenLine xmlns="" xmlns:a14="http://schemas.microsoft.com/office/drawing/2010/main" w="9525">
                     <a:solidFill>
                       <a:srgbClr val="000000"/>
                     </a:solidFill>
@@ -10562,7 +10564,7 @@
               </a:ln>
               <a:extLst>
                 <a:ext uri="{91240B29-F687-4f45-9708-019B960494DF}">
-                  <a14:hiddenLine xmlns:a14="http://schemas.microsoft.com/office/drawing/2010/main" xmlns="" w="9525">
+                  <a14:hiddenLine xmlns="" xmlns:a14="http://schemas.microsoft.com/office/drawing/2010/main" w="9525">
                     <a:solidFill>
                       <a:srgbClr val="000000"/>
                     </a:solidFill>
@@ -10624,7 +10626,7 @@
               </a:ln>
               <a:extLst>
                 <a:ext uri="{91240B29-F687-4f45-9708-019B960494DF}">
-                  <a14:hiddenLine xmlns:a14="http://schemas.microsoft.com/office/drawing/2010/main" xmlns="" w="9525">
+                  <a14:hiddenLine xmlns="" xmlns:a14="http://schemas.microsoft.com/office/drawing/2010/main" w="9525">
                     <a:solidFill>
                       <a:srgbClr val="000000"/>
                     </a:solidFill>
@@ -10714,7 +10716,7 @@
               </a:ln>
               <a:extLst>
                 <a:ext uri="{91240B29-F687-4f45-9708-019B960494DF}">
-                  <a14:hiddenLine xmlns:a14="http://schemas.microsoft.com/office/drawing/2010/main" xmlns="" w="9525">
+                  <a14:hiddenLine xmlns="" xmlns:a14="http://schemas.microsoft.com/office/drawing/2010/main" w="9525">
                     <a:solidFill>
                       <a:srgbClr val="000000"/>
                     </a:solidFill>
@@ -10748,7 +10750,7 @@
               </a:ln>
               <a:extLst>
                 <a:ext uri="{91240B29-F687-4f45-9708-019B960494DF}">
-                  <a14:hiddenLine xmlns:a14="http://schemas.microsoft.com/office/drawing/2010/main" xmlns="" w="9525">
+                  <a14:hiddenLine xmlns="" xmlns:a14="http://schemas.microsoft.com/office/drawing/2010/main" w="9525">
                     <a:solidFill>
                       <a:srgbClr val="000000"/>
                     </a:solidFill>
@@ -10813,7 +10815,7 @@
               </a:ln>
               <a:extLst>
                 <a:ext uri="{91240B29-F687-4f45-9708-019B960494DF}">
-                  <a14:hiddenLine xmlns:a14="http://schemas.microsoft.com/office/drawing/2010/main" xmlns="" w="9525">
+                  <a14:hiddenLine xmlns="" xmlns:a14="http://schemas.microsoft.com/office/drawing/2010/main" w="9525">
                     <a:solidFill>
                       <a:srgbClr val="000000"/>
                     </a:solidFill>
@@ -10903,7 +10905,7 @@
               </a:ln>
               <a:extLst>
                 <a:ext uri="{91240B29-F687-4f45-9708-019B960494DF}">
-                  <a14:hiddenLine xmlns:a14="http://schemas.microsoft.com/office/drawing/2010/main" xmlns="" w="9525">
+                  <a14:hiddenLine xmlns="" xmlns:a14="http://schemas.microsoft.com/office/drawing/2010/main" w="9525">
                     <a:solidFill>
                       <a:srgbClr val="000000"/>
                     </a:solidFill>
@@ -10965,7 +10967,7 @@
               </a:ln>
               <a:extLst>
                 <a:ext uri="{91240B29-F687-4f45-9708-019B960494DF}">
-                  <a14:hiddenLine xmlns:a14="http://schemas.microsoft.com/office/drawing/2010/main" xmlns="" w="9525">
+                  <a14:hiddenLine xmlns="" xmlns:a14="http://schemas.microsoft.com/office/drawing/2010/main" w="9525">
                     <a:solidFill>
                       <a:srgbClr val="000000"/>
                     </a:solidFill>
@@ -11055,7 +11057,7 @@
               </a:ln>
               <a:extLst>
                 <a:ext uri="{91240B29-F687-4f45-9708-019B960494DF}">
-                  <a14:hiddenLine xmlns:a14="http://schemas.microsoft.com/office/drawing/2010/main" xmlns="" w="9525">
+                  <a14:hiddenLine xmlns="" xmlns:a14="http://schemas.microsoft.com/office/drawing/2010/main" w="9525">
                     <a:solidFill>
                       <a:srgbClr val="000000"/>
                     </a:solidFill>
@@ -11120,7 +11122,7 @@
               </a:ln>
               <a:extLst>
                 <a:ext uri="{91240B29-F687-4f45-9708-019B960494DF}">
-                  <a14:hiddenLine xmlns:a14="http://schemas.microsoft.com/office/drawing/2010/main" xmlns="" w="9525">
+                  <a14:hiddenLine xmlns="" xmlns:a14="http://schemas.microsoft.com/office/drawing/2010/main" w="9525">
                     <a:solidFill>
                       <a:srgbClr val="000000"/>
                     </a:solidFill>
@@ -11182,7 +11184,7 @@
               </a:ln>
               <a:extLst>
                 <a:ext uri="{91240B29-F687-4f45-9708-019B960494DF}">
-                  <a14:hiddenLine xmlns:a14="http://schemas.microsoft.com/office/drawing/2010/main" xmlns="" w="9525">
+                  <a14:hiddenLine xmlns="" xmlns:a14="http://schemas.microsoft.com/office/drawing/2010/main" w="9525">
                     <a:solidFill>
                       <a:srgbClr val="000000"/>
                     </a:solidFill>
@@ -11272,7 +11274,7 @@
               </a:ln>
               <a:extLst>
                 <a:ext uri="{91240B29-F687-4f45-9708-019B960494DF}">
-                  <a14:hiddenLine xmlns:a14="http://schemas.microsoft.com/office/drawing/2010/main" xmlns="" w="9525">
+                  <a14:hiddenLine xmlns="" xmlns:a14="http://schemas.microsoft.com/office/drawing/2010/main" w="9525">
                     <a:solidFill>
                       <a:srgbClr val="000000"/>
                     </a:solidFill>
@@ -11362,7 +11364,7 @@
               </a:ln>
               <a:extLst>
                 <a:ext uri="{91240B29-F687-4f45-9708-019B960494DF}">
-                  <a14:hiddenLine xmlns:a14="http://schemas.microsoft.com/office/drawing/2010/main" xmlns="" w="9525">
+                  <a14:hiddenLine xmlns="" xmlns:a14="http://schemas.microsoft.com/office/drawing/2010/main" w="9525">
                     <a:solidFill>
                       <a:srgbClr val="000000"/>
                     </a:solidFill>
@@ -11427,7 +11429,7 @@
               </a:ln>
               <a:extLst>
                 <a:ext uri="{91240B29-F687-4f45-9708-019B960494DF}">
-                  <a14:hiddenLine xmlns:a14="http://schemas.microsoft.com/office/drawing/2010/main" xmlns="" w="9525">
+                  <a14:hiddenLine xmlns="" xmlns:a14="http://schemas.microsoft.com/office/drawing/2010/main" w="9525">
                     <a:solidFill>
                       <a:srgbClr val="000000"/>
                     </a:solidFill>
@@ -11547,7 +11549,7 @@
               </a:ln>
               <a:extLst>
                 <a:ext uri="{91240B29-F687-4f45-9708-019B960494DF}">
-                  <a14:hiddenLine xmlns:a14="http://schemas.microsoft.com/office/drawing/2010/main" xmlns="" w="9525">
+                  <a14:hiddenLine xmlns="" xmlns:a14="http://schemas.microsoft.com/office/drawing/2010/main" w="9525">
                     <a:solidFill>
                       <a:srgbClr val="000000"/>
                     </a:solidFill>
@@ -11628,7 +11630,7 @@
               </a:ln>
               <a:extLst>
                 <a:ext uri="{91240B29-F687-4f45-9708-019B960494DF}">
-                  <a14:hiddenLine xmlns:a14="http://schemas.microsoft.com/office/drawing/2010/main" xmlns="" w="9525">
+                  <a14:hiddenLine xmlns="" xmlns:a14="http://schemas.microsoft.com/office/drawing/2010/main" w="9525">
                     <a:solidFill>
                       <a:srgbClr val="000000"/>
                     </a:solidFill>
@@ -11743,7 +11745,7 @@
               </a:ln>
               <a:extLst>
                 <a:ext uri="{91240B29-F687-4f45-9708-019B960494DF}">
-                  <a14:hiddenLine xmlns:a14="http://schemas.microsoft.com/office/drawing/2010/main" xmlns="" w="9525">
+                  <a14:hiddenLine xmlns="" xmlns:a14="http://schemas.microsoft.com/office/drawing/2010/main" w="9525">
                     <a:solidFill>
                       <a:srgbClr val="000000"/>
                     </a:solidFill>
@@ -11833,7 +11835,7 @@
               </a:ln>
               <a:extLst>
                 <a:ext uri="{91240B29-F687-4f45-9708-019B960494DF}">
-                  <a14:hiddenLine xmlns:a14="http://schemas.microsoft.com/office/drawing/2010/main" xmlns="" w="9525">
+                  <a14:hiddenLine xmlns="" xmlns:a14="http://schemas.microsoft.com/office/drawing/2010/main" w="9525">
                     <a:solidFill>
                       <a:srgbClr val="000000"/>
                     </a:solidFill>
@@ -11898,7 +11900,7 @@
               </a:ln>
               <a:extLst>
                 <a:ext uri="{91240B29-F687-4f45-9708-019B960494DF}">
-                  <a14:hiddenLine xmlns:a14="http://schemas.microsoft.com/office/drawing/2010/main" xmlns="" w="9525">
+                  <a14:hiddenLine xmlns="" xmlns:a14="http://schemas.microsoft.com/office/drawing/2010/main" w="9525">
                     <a:solidFill>
                       <a:srgbClr val="000000"/>
                     </a:solidFill>
@@ -11988,7 +11990,7 @@
               </a:ln>
               <a:extLst>
                 <a:ext uri="{91240B29-F687-4f45-9708-019B960494DF}">
-                  <a14:hiddenLine xmlns:a14="http://schemas.microsoft.com/office/drawing/2010/main" xmlns="" w="9525">
+                  <a14:hiddenLine xmlns="" xmlns:a14="http://schemas.microsoft.com/office/drawing/2010/main" w="9525">
                     <a:solidFill>
                       <a:srgbClr val="000000"/>
                     </a:solidFill>
@@ -12056,7 +12058,7 @@
               </a:ln>
               <a:extLst>
                 <a:ext uri="{91240B29-F687-4f45-9708-019B960494DF}">
-                  <a14:hiddenLine xmlns:a14="http://schemas.microsoft.com/office/drawing/2010/main" xmlns="" w="9525">
+                  <a14:hiddenLine xmlns="" xmlns:a14="http://schemas.microsoft.com/office/drawing/2010/main" w="9525">
                     <a:solidFill>
                       <a:srgbClr val="000000"/>
                     </a:solidFill>
@@ -12146,7 +12148,7 @@
               </a:ln>
               <a:extLst>
                 <a:ext uri="{91240B29-F687-4f45-9708-019B960494DF}">
-                  <a14:hiddenLine xmlns:a14="http://schemas.microsoft.com/office/drawing/2010/main" xmlns="" w="9525">
+                  <a14:hiddenLine xmlns="" xmlns:a14="http://schemas.microsoft.com/office/drawing/2010/main" w="9525">
                     <a:solidFill>
                       <a:srgbClr val="000000"/>
                     </a:solidFill>
@@ -12214,7 +12216,7 @@
               </a:ln>
               <a:extLst>
                 <a:ext uri="{91240B29-F687-4f45-9708-019B960494DF}">
-                  <a14:hiddenLine xmlns:a14="http://schemas.microsoft.com/office/drawing/2010/main" xmlns="" w="9525">
+                  <a14:hiddenLine xmlns="" xmlns:a14="http://schemas.microsoft.com/office/drawing/2010/main" w="9525">
                     <a:solidFill>
                       <a:srgbClr val="000000"/>
                     </a:solidFill>
@@ -12304,7 +12306,7 @@
               </a:ln>
               <a:extLst>
                 <a:ext uri="{91240B29-F687-4f45-9708-019B960494DF}">
-                  <a14:hiddenLine xmlns:a14="http://schemas.microsoft.com/office/drawing/2010/main" xmlns="" w="9525">
+                  <a14:hiddenLine xmlns="" xmlns:a14="http://schemas.microsoft.com/office/drawing/2010/main" w="9525">
                     <a:solidFill>
                       <a:srgbClr val="000000"/>
                     </a:solidFill>
@@ -12338,7 +12340,7 @@
               </a:ln>
               <a:extLst>
                 <a:ext uri="{91240B29-F687-4f45-9708-019B960494DF}">
-                  <a14:hiddenLine xmlns:a14="http://schemas.microsoft.com/office/drawing/2010/main" xmlns="" w="9525">
+                  <a14:hiddenLine xmlns="" xmlns:a14="http://schemas.microsoft.com/office/drawing/2010/main" w="9525">
                     <a:solidFill>
                       <a:srgbClr val="000000"/>
                     </a:solidFill>
@@ -12478,7 +12480,7 @@
           <a:p>
             <a:fld id="{92FF8978-FE14-CC4A-93A6-934EB06543C0}" type="datetime1">
               <a:rPr lang="en-US" smtClean="0"/>
-              <a:t>10/1/26</a:t>
+              <a:t>10/7/26</a:t>
             </a:fld>
             <a:endParaRPr lang="en-US"/>
           </a:p>
@@ -14607,6 +14609,531 @@
   <p:cSld>
     <p:spTree>
       <p:nvGrpSpPr>
+        <p:cNvPr id="1" name="">
+          <a:extLst>
+            <a:ext uri="{FF2B5EF4-FFF2-40B4-BE49-F238E27FC236}">
+              <a16:creationId xmlns:a16="http://schemas.microsoft.com/office/drawing/2014/main" id="{339F154A-AF40-1B7F-5FF2-FD761E0530C1}"/>
+            </a:ext>
+          </a:extLst>
+        </p:cNvPr>
+        <p:cNvGrpSpPr/>
+        <p:nvPr/>
+      </p:nvGrpSpPr>
+      <p:grpSpPr>
+        <a:xfrm>
+          <a:off x="0" y="0"/>
+          <a:ext cx="0" cy="0"/>
+          <a:chOff x="0" y="0"/>
+          <a:chExt cx="0" cy="0"/>
+        </a:xfrm>
+      </p:grpSpPr>
+      <p:sp>
+        <p:nvSpPr>
+          <p:cNvPr id="6146" name="Rectangle 2">
+            <a:extLst>
+              <a:ext uri="{FF2B5EF4-FFF2-40B4-BE49-F238E27FC236}">
+                <a16:creationId xmlns:a16="http://schemas.microsoft.com/office/drawing/2014/main" id="{5B811BF6-01C9-2DEA-B252-3B0D0A562D41}"/>
+              </a:ext>
+            </a:extLst>
+          </p:cNvPr>
+          <p:cNvSpPr>
+            <a:spLocks noGrp="1" noChangeArrowheads="1"/>
+          </p:cNvSpPr>
+          <p:nvPr>
+            <p:ph type="title"/>
+            <p:custDataLst>
+              <p:tags r:id="rId1"/>
+            </p:custDataLst>
+          </p:nvPr>
+        </p:nvSpPr>
+        <p:spPr>
+          <a:xfrm>
+            <a:off x="1141413" y="284084"/>
+            <a:ext cx="9905998" cy="620791"/>
+          </a:xfrm>
+        </p:spPr>
+        <p:txBody>
+          <a:bodyPr/>
+          <a:lstStyle/>
+          <a:p>
+            <a:pPr algn="ctr"/>
+            <a:r>
+              <a:rPr lang="en-US" dirty="0"/>
+              <a:t>Lecture 13 - Thursday, Oct. 7</a:t>
+            </a:r>
+          </a:p>
+        </p:txBody>
+      </p:sp>
+      <p:sp>
+        <p:nvSpPr>
+          <p:cNvPr id="6147" name="Rectangle 3">
+            <a:extLst>
+              <a:ext uri="{FF2B5EF4-FFF2-40B4-BE49-F238E27FC236}">
+                <a16:creationId xmlns:a16="http://schemas.microsoft.com/office/drawing/2014/main" id="{F57FAE94-CA45-881D-F502-2BB27E98AC87}"/>
+              </a:ext>
+            </a:extLst>
+          </p:cNvPr>
+          <p:cNvSpPr>
+            <a:spLocks noGrp="1" noChangeArrowheads="1"/>
+          </p:cNvSpPr>
+          <p:nvPr>
+            <p:ph idx="1"/>
+            <p:custDataLst>
+              <p:tags r:id="rId2"/>
+            </p:custDataLst>
+          </p:nvPr>
+        </p:nvSpPr>
+        <p:spPr>
+          <a:xfrm>
+            <a:off x="1294151" y="904876"/>
+            <a:ext cx="9600522" cy="5953124"/>
+          </a:xfrm>
+        </p:spPr>
+        <p:txBody>
+          <a:bodyPr>
+            <a:normAutofit fontScale="62500" lnSpcReduction="20000"/>
+          </a:bodyPr>
+          <a:lstStyle/>
+          <a:p>
+            <a:r>
+              <a:rPr lang="en-US" dirty="0">
+                <a:latin typeface="Arial" panose="020B0604020202020204" pitchFamily="34" charset="0"/>
+                <a:cs typeface="Arial" panose="020B0604020202020204" pitchFamily="34" charset="0"/>
+              </a:rPr>
+              <a:t>Please remember </a:t>
+            </a:r>
+            <a:r>
+              <a:rPr lang="en-US" b="1" i="1" u="sng" dirty="0">
+                <a:latin typeface="Arial" panose="020B0604020202020204" pitchFamily="34" charset="0"/>
+                <a:cs typeface="Arial" panose="020B0604020202020204" pitchFamily="34" charset="0"/>
+              </a:rPr>
+              <a:t>no laptops / phones</a:t>
+            </a:r>
+            <a:r>
+              <a:rPr lang="en-US" dirty="0">
+                <a:latin typeface="Arial" panose="020B0604020202020204" pitchFamily="34" charset="0"/>
+                <a:cs typeface="Arial" panose="020B0604020202020204" pitchFamily="34" charset="0"/>
+              </a:rPr>
+              <a:t> and </a:t>
+            </a:r>
+            <a:r>
+              <a:rPr lang="en-US" b="1" i="1" u="sng" dirty="0">
+                <a:latin typeface="Arial" panose="020B0604020202020204" pitchFamily="34" charset="0"/>
+                <a:cs typeface="Arial" panose="020B0604020202020204" pitchFamily="34" charset="0"/>
+              </a:rPr>
+              <a:t>attendance policy</a:t>
+            </a:r>
+            <a:endParaRPr lang="en-US" dirty="0">
+              <a:latin typeface="Arial" panose="020B0604020202020204" pitchFamily="34" charset="0"/>
+              <a:cs typeface="Arial" panose="020B0604020202020204" pitchFamily="34" charset="0"/>
+            </a:endParaRPr>
+          </a:p>
+          <a:p>
+            <a:r>
+              <a:rPr lang="en-US" dirty="0">
+                <a:latin typeface="Arial" panose="020B0604020202020204" pitchFamily="34" charset="0"/>
+                <a:cs typeface="Arial" panose="020B0604020202020204" pitchFamily="34" charset="0"/>
+              </a:rPr>
+              <a:t>October! Best month of the year! Woo!</a:t>
+            </a:r>
+          </a:p>
+          <a:p>
+            <a:r>
+              <a:rPr lang="en-US" dirty="0">
+                <a:latin typeface="Arial" panose="020B0604020202020204" pitchFamily="34" charset="0"/>
+                <a:cs typeface="Arial" panose="020B0604020202020204" pitchFamily="34" charset="0"/>
+              </a:rPr>
+              <a:t>This week:</a:t>
+            </a:r>
+          </a:p>
+          <a:p>
+            <a:pPr lvl="1"/>
+            <a:r>
+              <a:rPr lang="en-US" dirty="0">
+                <a:latin typeface="Arial" panose="020B0604020202020204" pitchFamily="34" charset="0"/>
+                <a:cs typeface="Arial" panose="020B0604020202020204" pitchFamily="34" charset="0"/>
+              </a:rPr>
+              <a:t>Nothing due. Study for your quiz!</a:t>
+            </a:r>
+          </a:p>
+          <a:p>
+            <a:r>
+              <a:rPr lang="en-US" dirty="0">
+                <a:latin typeface="Arial" panose="020B0604020202020204" pitchFamily="34" charset="0"/>
+                <a:cs typeface="Arial" panose="020B0604020202020204" pitchFamily="34" charset="0"/>
+              </a:rPr>
+              <a:t>Grading</a:t>
+            </a:r>
+          </a:p>
+          <a:p>
+            <a:pPr lvl="1"/>
+            <a:r>
+              <a:rPr lang="en-US" dirty="0">
+                <a:latin typeface="Arial" panose="020B0604020202020204" pitchFamily="34" charset="0"/>
+                <a:cs typeface="Arial" panose="020B0604020202020204" pitchFamily="34" charset="0"/>
+              </a:rPr>
+              <a:t>Module 2 homework is being graded right now.</a:t>
+            </a:r>
+          </a:p>
+          <a:p>
+            <a:pPr lvl="1"/>
+            <a:r>
+              <a:rPr lang="en-US" dirty="0">
+                <a:latin typeface="Arial" panose="020B0604020202020204" pitchFamily="34" charset="0"/>
+                <a:cs typeface="Arial" panose="020B0604020202020204" pitchFamily="34" charset="0"/>
+              </a:rPr>
+              <a:t>Extensions given through today due to Fall Break, so many will come in tonight too.</a:t>
+            </a:r>
+          </a:p>
+          <a:p>
+            <a:r>
+              <a:rPr lang="en-US" dirty="0">
+                <a:latin typeface="Arial" panose="020B0604020202020204" pitchFamily="34" charset="0"/>
+                <a:cs typeface="Arial" panose="020B0604020202020204" pitchFamily="34" charset="0"/>
+              </a:rPr>
+              <a:t>Module 1 Quiz Regrades</a:t>
+            </a:r>
+          </a:p>
+          <a:p>
+            <a:pPr lvl="1"/>
+            <a:r>
+              <a:rPr lang="en-US" dirty="0">
+                <a:latin typeface="Arial" panose="020B0604020202020204" pitchFamily="34" charset="0"/>
+                <a:cs typeface="Arial" panose="020B0604020202020204" pitchFamily="34" charset="0"/>
+              </a:rPr>
+              <a:t>Contact Gustavo (or visit his OH) if you want something looked at on your quiz. You can come to my OH too but please do not email me.</a:t>
+            </a:r>
+          </a:p>
+          <a:p>
+            <a:r>
+              <a:rPr lang="en-US" dirty="0">
+                <a:latin typeface="Arial" panose="020B0604020202020204" pitchFamily="34" charset="0"/>
+                <a:cs typeface="Arial" panose="020B0604020202020204" pitchFamily="34" charset="0"/>
+              </a:rPr>
+              <a:t>Quiz 2</a:t>
+            </a:r>
+          </a:p>
+          <a:p>
+            <a:pPr lvl="1"/>
+            <a:r>
+              <a:rPr lang="en-US" dirty="0">
+                <a:latin typeface="Arial" panose="020B0604020202020204" pitchFamily="34" charset="0"/>
+                <a:cs typeface="Arial" panose="020B0604020202020204" pitchFamily="34" charset="0"/>
+              </a:rPr>
+              <a:t>Reservations are available now. Please sign up on </a:t>
+            </a:r>
+            <a:r>
+              <a:rPr lang="en-US" dirty="0" err="1">
+                <a:latin typeface="Arial" panose="020B0604020202020204" pitchFamily="34" charset="0"/>
+                <a:cs typeface="Arial" panose="020B0604020202020204" pitchFamily="34" charset="0"/>
+              </a:rPr>
+              <a:t>PrairieTest</a:t>
+            </a:r>
+            <a:r>
+              <a:rPr lang="en-US" dirty="0">
+                <a:latin typeface="Arial" panose="020B0604020202020204" pitchFamily="34" charset="0"/>
+                <a:cs typeface="Arial" panose="020B0604020202020204" pitchFamily="34" charset="0"/>
+              </a:rPr>
+              <a:t> ASAP if you haven’t already!</a:t>
+            </a:r>
+          </a:p>
+          <a:p>
+            <a:pPr lvl="1"/>
+            <a:r>
+              <a:rPr lang="en-US" dirty="0">
+                <a:latin typeface="Arial" panose="020B0604020202020204" pitchFamily="34" charset="0"/>
+                <a:cs typeface="Arial" panose="020B0604020202020204" pitchFamily="34" charset="0"/>
+              </a:rPr>
+              <a:t>There is a practice test live now so you can become familiar with question format (not for question content…just format)</a:t>
+            </a:r>
+          </a:p>
+          <a:p>
+            <a:pPr lvl="1"/>
+            <a:r>
+              <a:rPr lang="en-US" dirty="0">
+                <a:latin typeface="Arial" panose="020B0604020202020204" pitchFamily="34" charset="0"/>
+                <a:cs typeface="Arial" panose="020B0604020202020204" pitchFamily="34" charset="0"/>
+              </a:rPr>
+              <a:t>Question summary is on the next slide</a:t>
+            </a:r>
+          </a:p>
+          <a:p>
+            <a:r>
+              <a:rPr lang="en-US" dirty="0">
+                <a:latin typeface="Arial" panose="020B0604020202020204" pitchFamily="34" charset="0"/>
+                <a:cs typeface="Arial" panose="020B0604020202020204" pitchFamily="34" charset="0"/>
+              </a:rPr>
+              <a:t>OH Check-Ins</a:t>
+            </a:r>
+          </a:p>
+          <a:p>
+            <a:pPr lvl="1"/>
+            <a:r>
+              <a:rPr lang="en-US" dirty="0">
+                <a:latin typeface="Arial" panose="020B0604020202020204" pitchFamily="34" charset="0"/>
+                <a:cs typeface="Arial" panose="020B0604020202020204" pitchFamily="34" charset="0"/>
+              </a:rPr>
+              <a:t>This is going to start NEXT week. If you are in the first group you will receive an email to sign up today.</a:t>
+            </a:r>
+          </a:p>
+          <a:p>
+            <a:pPr lvl="1"/>
+            <a:r>
+              <a:rPr lang="en-US" dirty="0">
+                <a:latin typeface="Arial" panose="020B0604020202020204" pitchFamily="34" charset="0"/>
+                <a:cs typeface="Arial" panose="020B0604020202020204" pitchFamily="34" charset="0"/>
+              </a:rPr>
+              <a:t>…and every week moving forward.</a:t>
+            </a:r>
+          </a:p>
+          <a:p>
+            <a:r>
+              <a:rPr lang="en-US" dirty="0">
+                <a:latin typeface="Arial" panose="020B0604020202020204" pitchFamily="34" charset="0"/>
+                <a:cs typeface="Arial" panose="020B0604020202020204" pitchFamily="34" charset="0"/>
+              </a:rPr>
+              <a:t>These slides are linked on the course webpage “slides” page.</a:t>
+            </a:r>
+          </a:p>
+          <a:p>
+            <a:r>
+              <a:rPr lang="en-US" dirty="0">
+                <a:latin typeface="Arial" panose="020B0604020202020204" pitchFamily="34" charset="0"/>
+                <a:cs typeface="Arial" panose="020B0604020202020204" pitchFamily="34" charset="0"/>
+              </a:rPr>
+              <a:t>Today we will begin Module 3 – Turing Machines.</a:t>
+            </a:r>
+          </a:p>
+        </p:txBody>
+      </p:sp>
+    </p:spTree>
+    <p:extLst>
+      <p:ext uri="{BB962C8B-B14F-4D97-AF65-F5344CB8AC3E}">
+        <p14:creationId xmlns:p14="http://schemas.microsoft.com/office/powerpoint/2010/main" val="4271825892"/>
+      </p:ext>
+    </p:extLst>
+  </p:cSld>
+  <p:clrMapOvr>
+    <a:masterClrMapping/>
+  </p:clrMapOvr>
+</p:sld>
+</file>
+
+<file path=ppt/slides/slide17.xml><?xml version="1.0" encoding="utf-8"?>
+<p:sld xmlns:a="http://schemas.openxmlformats.org/drawingml/2006/main" xmlns:r="http://schemas.openxmlformats.org/officeDocument/2006/relationships" xmlns:p="http://schemas.openxmlformats.org/presentationml/2006/main">
+  <p:cSld>
+    <p:spTree>
+      <p:nvGrpSpPr>
+        <p:cNvPr id="1" name="">
+          <a:extLst>
+            <a:ext uri="{FF2B5EF4-FFF2-40B4-BE49-F238E27FC236}">
+              <a16:creationId xmlns:a16="http://schemas.microsoft.com/office/drawing/2014/main" id="{AC90C10B-929E-07F4-E925-2FB913C57E22}"/>
+            </a:ext>
+          </a:extLst>
+        </p:cNvPr>
+        <p:cNvGrpSpPr/>
+        <p:nvPr/>
+      </p:nvGrpSpPr>
+      <p:grpSpPr>
+        <a:xfrm>
+          <a:off x="0" y="0"/>
+          <a:ext cx="0" cy="0"/>
+          <a:chOff x="0" y="0"/>
+          <a:chExt cx="0" cy="0"/>
+        </a:xfrm>
+      </p:grpSpPr>
+      <p:sp>
+        <p:nvSpPr>
+          <p:cNvPr id="6146" name="Rectangle 2">
+            <a:extLst>
+              <a:ext uri="{FF2B5EF4-FFF2-40B4-BE49-F238E27FC236}">
+                <a16:creationId xmlns:a16="http://schemas.microsoft.com/office/drawing/2014/main" id="{73F996A0-D807-66FC-065A-2E1FAE17996A}"/>
+              </a:ext>
+            </a:extLst>
+          </p:cNvPr>
+          <p:cNvSpPr>
+            <a:spLocks noGrp="1" noChangeArrowheads="1"/>
+          </p:cNvSpPr>
+          <p:nvPr>
+            <p:ph type="title"/>
+            <p:custDataLst>
+              <p:tags r:id="rId1"/>
+            </p:custDataLst>
+          </p:nvPr>
+        </p:nvSpPr>
+        <p:spPr>
+          <a:xfrm>
+            <a:off x="1141413" y="284084"/>
+            <a:ext cx="9905998" cy="620791"/>
+          </a:xfrm>
+        </p:spPr>
+        <p:txBody>
+          <a:bodyPr/>
+          <a:lstStyle/>
+          <a:p>
+            <a:pPr algn="ctr"/>
+            <a:r>
+              <a:rPr lang="en-US" dirty="0"/>
+              <a:t>Quiz 2 – Question Summary</a:t>
+            </a:r>
+          </a:p>
+        </p:txBody>
+      </p:sp>
+      <p:sp>
+        <p:nvSpPr>
+          <p:cNvPr id="6147" name="Rectangle 3">
+            <a:extLst>
+              <a:ext uri="{FF2B5EF4-FFF2-40B4-BE49-F238E27FC236}">
+                <a16:creationId xmlns:a16="http://schemas.microsoft.com/office/drawing/2014/main" id="{8CFF7C8A-7558-7C4A-E331-036DAB13627D}"/>
+              </a:ext>
+            </a:extLst>
+          </p:cNvPr>
+          <p:cNvSpPr>
+            <a:spLocks noGrp="1" noChangeArrowheads="1"/>
+          </p:cNvSpPr>
+          <p:nvPr>
+            <p:ph idx="1"/>
+            <p:custDataLst>
+              <p:tags r:id="rId2"/>
+            </p:custDataLst>
+          </p:nvPr>
+        </p:nvSpPr>
+        <p:spPr>
+          <a:xfrm>
+            <a:off x="1664842" y="1311217"/>
+            <a:ext cx="8859140" cy="5202315"/>
+          </a:xfrm>
+        </p:spPr>
+        <p:txBody>
+          <a:bodyPr>
+            <a:normAutofit lnSpcReduction="10000"/>
+          </a:bodyPr>
+          <a:lstStyle/>
+          <a:p>
+            <a:r>
+              <a:rPr lang="en-US" dirty="0">
+                <a:latin typeface="Arial" panose="020B0604020202020204" pitchFamily="34" charset="0"/>
+                <a:cs typeface="Arial" panose="020B0604020202020204" pitchFamily="34" charset="0"/>
+              </a:rPr>
+              <a:t>Q1: True / False Questions (10 of them)</a:t>
+            </a:r>
+          </a:p>
+          <a:p>
+            <a:pPr lvl="1"/>
+            <a:r>
+              <a:rPr lang="en-US" dirty="0">
+                <a:latin typeface="Arial" panose="020B0604020202020204" pitchFamily="34" charset="0"/>
+                <a:cs typeface="Arial" panose="020B0604020202020204" pitchFamily="34" charset="0"/>
+              </a:rPr>
+              <a:t>Span the entire module, may reference module 0 material</a:t>
+            </a:r>
+          </a:p>
+          <a:p>
+            <a:r>
+              <a:rPr lang="en-US" dirty="0">
+                <a:latin typeface="Arial" panose="020B0604020202020204" pitchFamily="34" charset="0"/>
+                <a:cs typeface="Arial" panose="020B0604020202020204" pitchFamily="34" charset="0"/>
+              </a:rPr>
+              <a:t>Q2-3: Grammar Derivation</a:t>
+            </a:r>
+          </a:p>
+          <a:p>
+            <a:pPr lvl="1"/>
+            <a:r>
+              <a:rPr lang="en-US" dirty="0">
+                <a:latin typeface="Arial" panose="020B0604020202020204" pitchFamily="34" charset="0"/>
+                <a:cs typeface="Arial" panose="020B0604020202020204" pitchFamily="34" charset="0"/>
+              </a:rPr>
+              <a:t>Given a grammar and string to derive, show the full derivation</a:t>
+            </a:r>
+          </a:p>
+          <a:p>
+            <a:r>
+              <a:rPr lang="en-US" dirty="0">
+                <a:latin typeface="Arial" panose="020B0604020202020204" pitchFamily="34" charset="0"/>
+                <a:cs typeface="Arial" panose="020B0604020202020204" pitchFamily="34" charset="0"/>
+              </a:rPr>
+              <a:t>Q4-5: Grammar Creation</a:t>
+            </a:r>
+          </a:p>
+          <a:p>
+            <a:pPr lvl="1"/>
+            <a:r>
+              <a:rPr lang="en-US" dirty="0">
+                <a:latin typeface="Arial" panose="020B0604020202020204" pitchFamily="34" charset="0"/>
+                <a:cs typeface="Arial" panose="020B0604020202020204" pitchFamily="34" charset="0"/>
+              </a:rPr>
+              <a:t>Given a language, construct a context-free grammar for it</a:t>
+            </a:r>
+          </a:p>
+          <a:p>
+            <a:r>
+              <a:rPr lang="en-US" dirty="0">
+                <a:latin typeface="Arial" panose="020B0604020202020204" pitchFamily="34" charset="0"/>
+                <a:cs typeface="Arial" panose="020B0604020202020204" pitchFamily="34" charset="0"/>
+              </a:rPr>
+              <a:t>Q6: PDA</a:t>
+            </a:r>
+          </a:p>
+          <a:p>
+            <a:pPr lvl="1"/>
+            <a:r>
+              <a:rPr lang="en-US" dirty="0">
+                <a:latin typeface="Arial" panose="020B0604020202020204" pitchFamily="34" charset="0"/>
+                <a:cs typeface="Arial" panose="020B0604020202020204" pitchFamily="34" charset="0"/>
+              </a:rPr>
+              <a:t>Given a language, draw a working PDA for it </a:t>
+            </a:r>
+          </a:p>
+          <a:p>
+            <a:pPr lvl="1"/>
+            <a:r>
+              <a:rPr lang="en-US" dirty="0">
+                <a:latin typeface="Arial" panose="020B0604020202020204" pitchFamily="34" charset="0"/>
+                <a:cs typeface="Arial" panose="020B0604020202020204" pitchFamily="34" charset="0"/>
+              </a:rPr>
+              <a:t>Note there are new delete options (delete key, escape, right click)</a:t>
+            </a:r>
+          </a:p>
+          <a:p>
+            <a:r>
+              <a:rPr lang="en-US" dirty="0">
+                <a:latin typeface="Arial" panose="020B0604020202020204" pitchFamily="34" charset="0"/>
+                <a:cs typeface="Arial" panose="020B0604020202020204" pitchFamily="34" charset="0"/>
+              </a:rPr>
+              <a:t>Q7: Closure Question (T/F style)</a:t>
+            </a:r>
+          </a:p>
+          <a:p>
+            <a:pPr lvl="1"/>
+            <a:r>
+              <a:rPr lang="en-US" dirty="0">
+                <a:latin typeface="Arial" panose="020B0604020202020204" pitchFamily="34" charset="0"/>
+                <a:cs typeface="Arial" panose="020B0604020202020204" pitchFamily="34" charset="0"/>
+              </a:rPr>
+              <a:t>Given set X and Y and operation O. Does (X O Y) result in set Z</a:t>
+            </a:r>
+          </a:p>
+        </p:txBody>
+      </p:sp>
+    </p:spTree>
+    <p:extLst>
+      <p:ext uri="{BB962C8B-B14F-4D97-AF65-F5344CB8AC3E}">
+        <p14:creationId xmlns:p14="http://schemas.microsoft.com/office/powerpoint/2010/main" val="2002638986"/>
+      </p:ext>
+    </p:extLst>
+  </p:cSld>
+  <p:clrMapOvr>
+    <a:masterClrMapping/>
+  </p:clrMapOvr>
+</p:sld>
+</file>
+
+<file path=ppt/slides/slide18.xml><?xml version="1.0" encoding="utf-8"?>
+<p:sld xmlns:a="http://schemas.openxmlformats.org/drawingml/2006/main" xmlns:r="http://schemas.openxmlformats.org/officeDocument/2006/relationships" xmlns:p="http://schemas.openxmlformats.org/presentationml/2006/main">
+  <p:cSld>
+    <p:spTree>
+      <p:nvGrpSpPr>
         <p:cNvPr id="1" name=""/>
         <p:cNvGrpSpPr/>
         <p:nvPr/>
@@ -14943,7 +15470,7 @@
           <p:nvPr>
             <p:extLst>
               <p:ext uri="{D42A27DB-BD31-4B8C-83A1-F6EECF244321}">
-                <p14:modId xmlns:p14="http://schemas.microsoft.com/office/powerpoint/2010/main" val="733064255"/>
+                <p14:modId xmlns:p14="http://schemas.microsoft.com/office/powerpoint/2010/main" val="3984857604"/>
               </p:ext>
             </p:extLst>
           </p:nvPr>
@@ -15053,7 +15580,7 @@
                       <a:pPr algn="ctr"/>
                       <a:r>
                         <a:rPr lang="en-US" i="0" dirty="0"/>
-                        <a:t>11</a:t>
+                        <a:t>12</a:t>
                       </a:r>
                     </a:p>
                   </a:txBody>
@@ -15067,7 +15594,7 @@
                       <a:pPr algn="ctr"/>
                       <a:r>
                         <a:rPr lang="en-US" b="1" i="0" dirty="0"/>
-                        <a:t>100%</a:t>
+                        <a:t>91.7%</a:t>
                       </a:r>
                     </a:p>
                   </a:txBody>
@@ -15098,7 +15625,7 @@
           <p:nvPr>
             <p:extLst>
               <p:ext uri="{D42A27DB-BD31-4B8C-83A1-F6EECF244321}">
-                <p14:modId xmlns:p14="http://schemas.microsoft.com/office/powerpoint/2010/main" val="74422403"/>
+                <p14:modId xmlns:p14="http://schemas.microsoft.com/office/powerpoint/2010/main" val="3871930671"/>
               </p:ext>
             </p:extLst>
           </p:nvPr>
@@ -15421,7 +15948,7 @@
                       <a:pPr algn="ctr"/>
                       <a:r>
                         <a:rPr lang="en-US" dirty="0"/>
-                        <a:t>-</a:t>
+                        <a:t>56</a:t>
                       </a:r>
                     </a:p>
                   </a:txBody>
@@ -15435,7 +15962,7 @@
                       <a:pPr algn="ctr"/>
                       <a:r>
                         <a:rPr lang="en-US" dirty="0"/>
-                        <a:t>-</a:t>
+                        <a:t>137</a:t>
                       </a:r>
                     </a:p>
                   </a:txBody>
@@ -15449,7 +15976,7 @@
                       <a:pPr algn="ctr"/>
                       <a:r>
                         <a:rPr lang="en-US" b="0" i="0" dirty="0"/>
-                        <a:t>N/A</a:t>
+                        <a:t>40.87%</a:t>
                       </a:r>
                       <a:endParaRPr lang="en-US" b="0" dirty="0"/>
                     </a:p>
@@ -15612,7 +16139,7 @@
                       <a:pPr algn="ctr"/>
                       <a:r>
                         <a:rPr lang="en-US" b="1" dirty="0"/>
-                        <a:t>336</a:t>
+                        <a:t>392</a:t>
                       </a:r>
                     </a:p>
                   </a:txBody>
@@ -15626,7 +16153,7 @@
                       <a:pPr algn="ctr"/>
                       <a:r>
                         <a:rPr lang="en-US" b="1" dirty="0"/>
-                        <a:t>629</a:t>
+                        <a:t>766</a:t>
                       </a:r>
                     </a:p>
                   </a:txBody>
@@ -15640,7 +16167,7 @@
                       <a:pPr algn="ctr"/>
                       <a:r>
                         <a:rPr lang="en-US" b="1" i="0" dirty="0"/>
-                        <a:t>53.41%</a:t>
+                        <a:t>51.17%</a:t>
                       </a:r>
                       <a:endParaRPr lang="en-US" b="1" dirty="0"/>
                     </a:p>
@@ -16286,7 +16813,7 @@
           <p:nvPr>
             <p:extLst>
               <p:ext uri="{D42A27DB-BD31-4B8C-83A1-F6EECF244321}">
-                <p14:modId xmlns:p14="http://schemas.microsoft.com/office/powerpoint/2010/main" val="1737672941"/>
+                <p14:modId xmlns:p14="http://schemas.microsoft.com/office/powerpoint/2010/main" val="1975063589"/>
               </p:ext>
             </p:extLst>
           </p:nvPr>
@@ -16382,7 +16909,7 @@
                       <a:pPr algn="ctr"/>
                       <a:r>
                         <a:rPr lang="en-US" i="0" dirty="0"/>
-                        <a:t>11</a:t>
+                        <a:t>12</a:t>
                       </a:r>
                     </a:p>
                   </a:txBody>
@@ -16396,7 +16923,7 @@
                       <a:pPr algn="ctr"/>
                       <a:r>
                         <a:rPr lang="en-US" i="0" dirty="0"/>
-                        <a:t>11</a:t>
+                        <a:t>12</a:t>
                       </a:r>
                     </a:p>
                   </a:txBody>
@@ -18991,6 +19518,30 @@
 </file>
 
 <file path=ppt/tags/tag34.xml><?xml version="1.0" encoding="utf-8"?>
+<p:tagLst xmlns:a="http://schemas.openxmlformats.org/drawingml/2006/main" xmlns:r="http://schemas.openxmlformats.org/officeDocument/2006/relationships" xmlns:p="http://schemas.openxmlformats.org/presentationml/2006/main">
+  <p:tag name="_INSTRUCTOR VIEW19C14C36-AC8E-43BC-9DB6-C2AAF774C7DC|PANE__TAG" val="_"/>
+</p:tagLst>
+</file>
+
+<file path=ppt/tags/tag35.xml><?xml version="1.0" encoding="utf-8"?>
+<p:tagLst xmlns:a="http://schemas.openxmlformats.org/drawingml/2006/main" xmlns:r="http://schemas.openxmlformats.org/officeDocument/2006/relationships" xmlns:p="http://schemas.openxmlformats.org/presentationml/2006/main">
+  <p:tag name="_INSTRUCTOR VIEW19C14C36-AC8E-43BC-9DB6-C2AAF774C7DC|PANE__TAG" val="_"/>
+</p:tagLst>
+</file>
+
+<file path=ppt/tags/tag36.xml><?xml version="1.0" encoding="utf-8"?>
+<p:tagLst xmlns:a="http://schemas.openxmlformats.org/drawingml/2006/main" xmlns:r="http://schemas.openxmlformats.org/officeDocument/2006/relationships" xmlns:p="http://schemas.openxmlformats.org/presentationml/2006/main">
+  <p:tag name="_INSTRUCTOR VIEW19C14C36-AC8E-43BC-9DB6-C2AAF774C7DC|PANE__TAG" val="_"/>
+</p:tagLst>
+</file>
+
+<file path=ppt/tags/tag37.xml><?xml version="1.0" encoding="utf-8"?>
+<p:tagLst xmlns:a="http://schemas.openxmlformats.org/drawingml/2006/main" xmlns:r="http://schemas.openxmlformats.org/officeDocument/2006/relationships" xmlns:p="http://schemas.openxmlformats.org/presentationml/2006/main">
+  <p:tag name="_INSTRUCTOR VIEW19C14C36-AC8E-43BC-9DB6-C2AAF774C7DC|PANE__TAG" val="_"/>
+</p:tagLst>
+</file>
+
+<file path=ppt/tags/tag38.xml><?xml version="1.0" encoding="utf-8"?>
 <p:tagLst xmlns:a="http://schemas.openxmlformats.org/drawingml/2006/main" xmlns:r="http://schemas.openxmlformats.org/officeDocument/2006/relationships" xmlns:p="http://schemas.openxmlformats.org/presentationml/2006/main">
   <p:tag name="_INSTRUCTOR VIEW19C14C36-AC8E-43BC-9DB6-C2AAF774C7DC|PANE__TAG" val="_"/>
 </p:tagLst>

--- a/slides/00-DailyAnnouncements.pptx
+++ b/slides/00-DailyAnnouncements.pptx
@@ -5,7 +5,7 @@
     <p:sldMasterId id="2147484006" r:id="rId1"/>
   </p:sldMasterIdLst>
   <p:notesMasterIdLst>
-    <p:notesMasterId r:id="rId20"/>
+    <p:notesMasterId r:id="rId21"/>
   </p:notesMasterIdLst>
   <p:sldIdLst>
     <p:sldId id="256" r:id="rId2"/>
@@ -25,7 +25,8 @@
     <p:sldId id="528" r:id="rId16"/>
     <p:sldId id="529" r:id="rId17"/>
     <p:sldId id="530" r:id="rId18"/>
-    <p:sldId id="515" r:id="rId19"/>
+    <p:sldId id="531" r:id="rId19"/>
+    <p:sldId id="515" r:id="rId20"/>
   </p:sldIdLst>
   <p:sldSz cx="12192000" cy="6858000"/>
   <p:notesSz cx="6858000" cy="9144000"/>
@@ -214,7 +215,7 @@
           <a:p>
             <a:fld id="{C5B45307-6ED4-B142-BD64-10F739779302}" type="datetimeFigureOut">
               <a:rPr lang="en-US" smtClean="0"/>
-              <a:t>10/7/26</a:t>
+              <a:t>10/13/26</a:t>
             </a:fld>
             <a:endParaRPr lang="en-US"/>
           </a:p>
@@ -622,7 +623,7 @@
           <a:noFill/>
           <a:extLst>
             <a:ext uri="{909E8E84-426E-40dd-AFC4-6F175D3DCCD1}">
-              <a14:hiddenFill xmlns="" xmlns:a14="http://schemas.microsoft.com/office/drawing/2010/main">
+              <a14:hiddenFill xmlns:a14="http://schemas.microsoft.com/office/drawing/2010/main" xmlns="">
                 <a:solidFill>
                   <a:srgbClr val="FFFFFF"/>
                 </a:solidFill>
@@ -681,7 +682,7 @@
             </a:ln>
             <a:extLst>
               <a:ext uri="{91240B29-F687-4f45-9708-019B960494DF}">
-                <a14:hiddenLine xmlns="" xmlns:a14="http://schemas.microsoft.com/office/drawing/2010/main" w="9525">
+                <a14:hiddenLine xmlns:a14="http://schemas.microsoft.com/office/drawing/2010/main" xmlns="" w="9525">
                   <a:solidFill>
                     <a:srgbClr val="000000"/>
                   </a:solidFill>
@@ -771,7 +772,7 @@
             </a:ln>
             <a:extLst>
               <a:ext uri="{91240B29-F687-4f45-9708-019B960494DF}">
-                <a14:hiddenLine xmlns="" xmlns:a14="http://schemas.microsoft.com/office/drawing/2010/main" w="9525">
+                <a14:hiddenLine xmlns:a14="http://schemas.microsoft.com/office/drawing/2010/main" xmlns="" w="9525">
                   <a:solidFill>
                     <a:srgbClr val="000000"/>
                   </a:solidFill>
@@ -861,7 +862,7 @@
             </a:ln>
             <a:extLst>
               <a:ext uri="{91240B29-F687-4f45-9708-019B960494DF}">
-                <a14:hiddenLine xmlns="" xmlns:a14="http://schemas.microsoft.com/office/drawing/2010/main" w="9525">
+                <a14:hiddenLine xmlns:a14="http://schemas.microsoft.com/office/drawing/2010/main" xmlns="" w="9525">
                   <a:solidFill>
                     <a:srgbClr val="000000"/>
                   </a:solidFill>
@@ -895,7 +896,7 @@
             </a:ln>
             <a:extLst>
               <a:ext uri="{91240B29-F687-4f45-9708-019B960494DF}">
-                <a14:hiddenLine xmlns="" xmlns:a14="http://schemas.microsoft.com/office/drawing/2010/main" w="9525">
+                <a14:hiddenLine xmlns:a14="http://schemas.microsoft.com/office/drawing/2010/main" xmlns="" w="9525">
                   <a:solidFill>
                     <a:srgbClr val="000000"/>
                   </a:solidFill>
@@ -985,7 +986,7 @@
             </a:ln>
             <a:extLst>
               <a:ext uri="{91240B29-F687-4f45-9708-019B960494DF}">
-                <a14:hiddenLine xmlns="" xmlns:a14="http://schemas.microsoft.com/office/drawing/2010/main" w="9525">
+                <a14:hiddenLine xmlns:a14="http://schemas.microsoft.com/office/drawing/2010/main" xmlns="" w="9525">
                   <a:solidFill>
                     <a:srgbClr val="000000"/>
                   </a:solidFill>
@@ -1047,7 +1048,7 @@
             </a:ln>
             <a:extLst>
               <a:ext uri="{91240B29-F687-4f45-9708-019B960494DF}">
-                <a14:hiddenLine xmlns="" xmlns:a14="http://schemas.microsoft.com/office/drawing/2010/main" w="9525">
+                <a14:hiddenLine xmlns:a14="http://schemas.microsoft.com/office/drawing/2010/main" xmlns="" w="9525">
                   <a:solidFill>
                     <a:srgbClr val="000000"/>
                   </a:solidFill>
@@ -1109,7 +1110,7 @@
             </a:ln>
             <a:extLst>
               <a:ext uri="{91240B29-F687-4f45-9708-019B960494DF}">
-                <a14:hiddenLine xmlns="" xmlns:a14="http://schemas.microsoft.com/office/drawing/2010/main" w="9525">
+                <a14:hiddenLine xmlns:a14="http://schemas.microsoft.com/office/drawing/2010/main" xmlns="" w="9525">
                   <a:solidFill>
                     <a:srgbClr val="000000"/>
                   </a:solidFill>
@@ -1199,7 +1200,7 @@
             </a:ln>
             <a:extLst>
               <a:ext uri="{91240B29-F687-4f45-9708-019B960494DF}">
-                <a14:hiddenLine xmlns="" xmlns:a14="http://schemas.microsoft.com/office/drawing/2010/main" w="9525">
+                <a14:hiddenLine xmlns:a14="http://schemas.microsoft.com/office/drawing/2010/main" xmlns="" w="9525">
                   <a:solidFill>
                     <a:srgbClr val="000000"/>
                   </a:solidFill>
@@ -1261,7 +1262,7 @@
             </a:ln>
             <a:extLst>
               <a:ext uri="{91240B29-F687-4f45-9708-019B960494DF}">
-                <a14:hiddenLine xmlns="" xmlns:a14="http://schemas.microsoft.com/office/drawing/2010/main" w="9525">
+                <a14:hiddenLine xmlns:a14="http://schemas.microsoft.com/office/drawing/2010/main" xmlns="" w="9525">
                   <a:solidFill>
                     <a:srgbClr val="000000"/>
                   </a:solidFill>
@@ -1323,7 +1324,7 @@
             </a:ln>
             <a:extLst>
               <a:ext uri="{91240B29-F687-4f45-9708-019B960494DF}">
-                <a14:hiddenLine xmlns="" xmlns:a14="http://schemas.microsoft.com/office/drawing/2010/main" w="9525">
+                <a14:hiddenLine xmlns:a14="http://schemas.microsoft.com/office/drawing/2010/main" xmlns="" w="9525">
                   <a:solidFill>
                     <a:srgbClr val="000000"/>
                   </a:solidFill>
@@ -1413,7 +1414,7 @@
             </a:ln>
             <a:extLst>
               <a:ext uri="{91240B29-F687-4f45-9708-019B960494DF}">
-                <a14:hiddenLine xmlns="" xmlns:a14="http://schemas.microsoft.com/office/drawing/2010/main" w="9525">
+                <a14:hiddenLine xmlns:a14="http://schemas.microsoft.com/office/drawing/2010/main" xmlns="" w="9525">
                   <a:solidFill>
                     <a:srgbClr val="000000"/>
                   </a:solidFill>
@@ -1503,7 +1504,7 @@
             </a:ln>
             <a:extLst>
               <a:ext uri="{91240B29-F687-4f45-9708-019B960494DF}">
-                <a14:hiddenLine xmlns="" xmlns:a14="http://schemas.microsoft.com/office/drawing/2010/main" w="9525">
+                <a14:hiddenLine xmlns:a14="http://schemas.microsoft.com/office/drawing/2010/main" xmlns="" w="9525">
                   <a:solidFill>
                     <a:srgbClr val="000000"/>
                   </a:solidFill>
@@ -1565,7 +1566,7 @@
             </a:ln>
             <a:extLst>
               <a:ext uri="{91240B29-F687-4f45-9708-019B960494DF}">
-                <a14:hiddenLine xmlns="" xmlns:a14="http://schemas.microsoft.com/office/drawing/2010/main" w="9525">
+                <a14:hiddenLine xmlns:a14="http://schemas.microsoft.com/office/drawing/2010/main" xmlns="" w="9525">
                   <a:solidFill>
                     <a:srgbClr val="000000"/>
                   </a:solidFill>
@@ -1675,7 +1676,7 @@
             </a:ln>
             <a:extLst>
               <a:ext uri="{91240B29-F687-4f45-9708-019B960494DF}">
-                <a14:hiddenLine xmlns="" xmlns:a14="http://schemas.microsoft.com/office/drawing/2010/main" w="9525">
+                <a14:hiddenLine xmlns:a14="http://schemas.microsoft.com/office/drawing/2010/main" xmlns="" w="9525">
                   <a:solidFill>
                     <a:srgbClr val="000000"/>
                   </a:solidFill>
@@ -1737,7 +1738,7 @@
             </a:ln>
             <a:extLst>
               <a:ext uri="{91240B29-F687-4f45-9708-019B960494DF}">
-                <a14:hiddenLine xmlns="" xmlns:a14="http://schemas.microsoft.com/office/drawing/2010/main" w="9525">
+                <a14:hiddenLine xmlns:a14="http://schemas.microsoft.com/office/drawing/2010/main" xmlns="" w="9525">
                   <a:solidFill>
                     <a:srgbClr val="000000"/>
                   </a:solidFill>
@@ -1827,7 +1828,7 @@
             </a:ln>
             <a:extLst>
               <a:ext uri="{91240B29-F687-4f45-9708-019B960494DF}">
-                <a14:hiddenLine xmlns="" xmlns:a14="http://schemas.microsoft.com/office/drawing/2010/main" w="9525">
+                <a14:hiddenLine xmlns:a14="http://schemas.microsoft.com/office/drawing/2010/main" xmlns="" w="9525">
                   <a:solidFill>
                     <a:srgbClr val="000000"/>
                   </a:solidFill>
@@ -1917,7 +1918,7 @@
             </a:ln>
             <a:extLst>
               <a:ext uri="{91240B29-F687-4f45-9708-019B960494DF}">
-                <a14:hiddenLine xmlns="" xmlns:a14="http://schemas.microsoft.com/office/drawing/2010/main" w="9525">
+                <a14:hiddenLine xmlns:a14="http://schemas.microsoft.com/office/drawing/2010/main" xmlns="" w="9525">
                   <a:solidFill>
                     <a:srgbClr val="000000"/>
                   </a:solidFill>
@@ -1979,7 +1980,7 @@
             </a:ln>
             <a:extLst>
               <a:ext uri="{91240B29-F687-4f45-9708-019B960494DF}">
-                <a14:hiddenLine xmlns="" xmlns:a14="http://schemas.microsoft.com/office/drawing/2010/main" w="9525">
+                <a14:hiddenLine xmlns:a14="http://schemas.microsoft.com/office/drawing/2010/main" xmlns="" w="9525">
                   <a:solidFill>
                     <a:srgbClr val="000000"/>
                   </a:solidFill>
@@ -2069,7 +2070,7 @@
             </a:ln>
             <a:extLst>
               <a:ext uri="{91240B29-F687-4f45-9708-019B960494DF}">
-                <a14:hiddenLine xmlns="" xmlns:a14="http://schemas.microsoft.com/office/drawing/2010/main" w="9525">
+                <a14:hiddenLine xmlns:a14="http://schemas.microsoft.com/office/drawing/2010/main" xmlns="" w="9525">
                   <a:solidFill>
                     <a:srgbClr val="000000"/>
                   </a:solidFill>
@@ -2159,7 +2160,7 @@
             </a:ln>
             <a:extLst>
               <a:ext uri="{91240B29-F687-4f45-9708-019B960494DF}">
-                <a14:hiddenLine xmlns="" xmlns:a14="http://schemas.microsoft.com/office/drawing/2010/main" w="9525">
+                <a14:hiddenLine xmlns:a14="http://schemas.microsoft.com/office/drawing/2010/main" xmlns="" w="9525">
                   <a:solidFill>
                     <a:srgbClr val="000000"/>
                   </a:solidFill>
@@ -2215,7 +2216,7 @@
             </a:ln>
             <a:extLst>
               <a:ext uri="{91240B29-F687-4f45-9708-019B960494DF}">
-                <a14:hiddenLine xmlns="" xmlns:a14="http://schemas.microsoft.com/office/drawing/2010/main" w="9525">
+                <a14:hiddenLine xmlns:a14="http://schemas.microsoft.com/office/drawing/2010/main" xmlns="" w="9525">
                   <a:solidFill>
                     <a:srgbClr val="000000"/>
                   </a:solidFill>
@@ -2305,7 +2306,7 @@
             </a:ln>
             <a:extLst>
               <a:ext uri="{91240B29-F687-4f45-9708-019B960494DF}">
-                <a14:hiddenLine xmlns="" xmlns:a14="http://schemas.microsoft.com/office/drawing/2010/main" w="9525">
+                <a14:hiddenLine xmlns:a14="http://schemas.microsoft.com/office/drawing/2010/main" xmlns="" w="9525">
                   <a:solidFill>
                     <a:srgbClr val="000000"/>
                   </a:solidFill>
@@ -2361,7 +2362,7 @@
             </a:ln>
             <a:extLst>
               <a:ext uri="{91240B29-F687-4f45-9708-019B960494DF}">
-                <a14:hiddenLine xmlns="" xmlns:a14="http://schemas.microsoft.com/office/drawing/2010/main" w="9525">
+                <a14:hiddenLine xmlns:a14="http://schemas.microsoft.com/office/drawing/2010/main" xmlns="" w="9525">
                   <a:solidFill>
                     <a:srgbClr val="000000"/>
                   </a:solidFill>
@@ -2451,7 +2452,7 @@
             </a:ln>
             <a:extLst>
               <a:ext uri="{91240B29-F687-4f45-9708-019B960494DF}">
-                <a14:hiddenLine xmlns="" xmlns:a14="http://schemas.microsoft.com/office/drawing/2010/main" w="9525">
+                <a14:hiddenLine xmlns:a14="http://schemas.microsoft.com/office/drawing/2010/main" xmlns="" w="9525">
                   <a:solidFill>
                     <a:srgbClr val="000000"/>
                   </a:solidFill>
@@ -2519,7 +2520,7 @@
             </a:ln>
             <a:extLst>
               <a:ext uri="{91240B29-F687-4f45-9708-019B960494DF}">
-                <a14:hiddenLine xmlns="" xmlns:a14="http://schemas.microsoft.com/office/drawing/2010/main" w="9525">
+                <a14:hiddenLine xmlns:a14="http://schemas.microsoft.com/office/drawing/2010/main" xmlns="" w="9525">
                   <a:solidFill>
                     <a:srgbClr val="000000"/>
                   </a:solidFill>
@@ -2609,7 +2610,7 @@
             </a:ln>
             <a:extLst>
               <a:ext uri="{91240B29-F687-4f45-9708-019B960494DF}">
-                <a14:hiddenLine xmlns="" xmlns:a14="http://schemas.microsoft.com/office/drawing/2010/main" w="9525">
+                <a14:hiddenLine xmlns:a14="http://schemas.microsoft.com/office/drawing/2010/main" xmlns="" w="9525">
                   <a:solidFill>
                     <a:srgbClr val="000000"/>
                   </a:solidFill>
@@ -2677,7 +2678,7 @@
             </a:ln>
             <a:extLst>
               <a:ext uri="{91240B29-F687-4f45-9708-019B960494DF}">
-                <a14:hiddenLine xmlns="" xmlns:a14="http://schemas.microsoft.com/office/drawing/2010/main" w="9525">
+                <a14:hiddenLine xmlns:a14="http://schemas.microsoft.com/office/drawing/2010/main" xmlns="" w="9525">
                   <a:solidFill>
                     <a:srgbClr val="000000"/>
                   </a:solidFill>
@@ -2767,7 +2768,7 @@
             </a:ln>
             <a:extLst>
               <a:ext uri="{91240B29-F687-4f45-9708-019B960494DF}">
-                <a14:hiddenLine xmlns="" xmlns:a14="http://schemas.microsoft.com/office/drawing/2010/main" w="9525">
+                <a14:hiddenLine xmlns:a14="http://schemas.microsoft.com/office/drawing/2010/main" xmlns="" w="9525">
                   <a:solidFill>
                     <a:srgbClr val="000000"/>
                   </a:solidFill>
@@ -2801,7 +2802,7 @@
             </a:ln>
             <a:extLst>
               <a:ext uri="{91240B29-F687-4f45-9708-019B960494DF}">
-                <a14:hiddenLine xmlns="" xmlns:a14="http://schemas.microsoft.com/office/drawing/2010/main" w="9525">
+                <a14:hiddenLine xmlns:a14="http://schemas.microsoft.com/office/drawing/2010/main" xmlns="" w="9525">
                   <a:solidFill>
                     <a:srgbClr val="000000"/>
                   </a:solidFill>
@@ -2891,7 +2892,7 @@
             </a:ln>
             <a:extLst>
               <a:ext uri="{91240B29-F687-4f45-9708-019B960494DF}">
-                <a14:hiddenLine xmlns="" xmlns:a14="http://schemas.microsoft.com/office/drawing/2010/main" w="9525">
+                <a14:hiddenLine xmlns:a14="http://schemas.microsoft.com/office/drawing/2010/main" xmlns="" w="9525">
                   <a:solidFill>
                     <a:srgbClr val="000000"/>
                   </a:solidFill>
@@ -2953,7 +2954,7 @@
             </a:ln>
             <a:extLst>
               <a:ext uri="{91240B29-F687-4f45-9708-019B960494DF}">
-                <a14:hiddenLine xmlns="" xmlns:a14="http://schemas.microsoft.com/office/drawing/2010/main" w="9525">
+                <a14:hiddenLine xmlns:a14="http://schemas.microsoft.com/office/drawing/2010/main" xmlns="" w="9525">
                   <a:solidFill>
                     <a:srgbClr val="000000"/>
                   </a:solidFill>
@@ -3015,7 +3016,7 @@
             </a:ln>
             <a:extLst>
               <a:ext uri="{91240B29-F687-4f45-9708-019B960494DF}">
-                <a14:hiddenLine xmlns="" xmlns:a14="http://schemas.microsoft.com/office/drawing/2010/main" w="9525">
+                <a14:hiddenLine xmlns:a14="http://schemas.microsoft.com/office/drawing/2010/main" xmlns="" w="9525">
                   <a:solidFill>
                     <a:srgbClr val="000000"/>
                   </a:solidFill>
@@ -3105,7 +3106,7 @@
             </a:ln>
             <a:extLst>
               <a:ext uri="{91240B29-F687-4f45-9708-019B960494DF}">
-                <a14:hiddenLine xmlns="" xmlns:a14="http://schemas.microsoft.com/office/drawing/2010/main" w="9525">
+                <a14:hiddenLine xmlns:a14="http://schemas.microsoft.com/office/drawing/2010/main" xmlns="" w="9525">
                   <a:solidFill>
                     <a:srgbClr val="000000"/>
                   </a:solidFill>
@@ -3173,7 +3174,7 @@
             </a:ln>
             <a:extLst>
               <a:ext uri="{91240B29-F687-4f45-9708-019B960494DF}">
-                <a14:hiddenLine xmlns="" xmlns:a14="http://schemas.microsoft.com/office/drawing/2010/main" w="9525">
+                <a14:hiddenLine xmlns:a14="http://schemas.microsoft.com/office/drawing/2010/main" xmlns="" w="9525">
                   <a:solidFill>
                     <a:srgbClr val="000000"/>
                   </a:solidFill>
@@ -3235,7 +3236,7 @@
             </a:ln>
             <a:extLst>
               <a:ext uri="{91240B29-F687-4f45-9708-019B960494DF}">
-                <a14:hiddenLine xmlns="" xmlns:a14="http://schemas.microsoft.com/office/drawing/2010/main" w="9525">
+                <a14:hiddenLine xmlns:a14="http://schemas.microsoft.com/office/drawing/2010/main" xmlns="" w="9525">
                   <a:solidFill>
                     <a:srgbClr val="000000"/>
                   </a:solidFill>
@@ -3325,7 +3326,7 @@
             </a:ln>
             <a:extLst>
               <a:ext uri="{91240B29-F687-4f45-9708-019B960494DF}">
-                <a14:hiddenLine xmlns="" xmlns:a14="http://schemas.microsoft.com/office/drawing/2010/main" w="9525">
+                <a14:hiddenLine xmlns:a14="http://schemas.microsoft.com/office/drawing/2010/main" xmlns="" w="9525">
                   <a:solidFill>
                     <a:srgbClr val="000000"/>
                   </a:solidFill>
@@ -3387,7 +3388,7 @@
             </a:ln>
             <a:extLst>
               <a:ext uri="{91240B29-F687-4f45-9708-019B960494DF}">
-                <a14:hiddenLine xmlns="" xmlns:a14="http://schemas.microsoft.com/office/drawing/2010/main" w="9525">
+                <a14:hiddenLine xmlns:a14="http://schemas.microsoft.com/office/drawing/2010/main" xmlns="" w="9525">
                   <a:solidFill>
                     <a:srgbClr val="000000"/>
                   </a:solidFill>
@@ -3477,7 +3478,7 @@
             </a:ln>
             <a:extLst>
               <a:ext uri="{91240B29-F687-4f45-9708-019B960494DF}">
-                <a14:hiddenLine xmlns="" xmlns:a14="http://schemas.microsoft.com/office/drawing/2010/main" w="9525">
+                <a14:hiddenLine xmlns:a14="http://schemas.microsoft.com/office/drawing/2010/main" xmlns="" w="9525">
                   <a:solidFill>
                     <a:srgbClr val="000000"/>
                   </a:solidFill>
@@ -3539,7 +3540,7 @@
             </a:ln>
             <a:extLst>
               <a:ext uri="{91240B29-F687-4f45-9708-019B960494DF}">
-                <a14:hiddenLine xmlns="" xmlns:a14="http://schemas.microsoft.com/office/drawing/2010/main" w="9525">
+                <a14:hiddenLine xmlns:a14="http://schemas.microsoft.com/office/drawing/2010/main" xmlns="" w="9525">
                   <a:solidFill>
                     <a:srgbClr val="000000"/>
                   </a:solidFill>
@@ -3629,7 +3630,7 @@
             </a:ln>
             <a:extLst>
               <a:ext uri="{91240B29-F687-4f45-9708-019B960494DF}">
-                <a14:hiddenLine xmlns="" xmlns:a14="http://schemas.microsoft.com/office/drawing/2010/main" w="9525">
+                <a14:hiddenLine xmlns:a14="http://schemas.microsoft.com/office/drawing/2010/main" xmlns="" w="9525">
                   <a:solidFill>
                     <a:srgbClr val="000000"/>
                   </a:solidFill>
@@ -3663,7 +3664,7 @@
             </a:ln>
             <a:extLst>
               <a:ext uri="{91240B29-F687-4f45-9708-019B960494DF}">
-                <a14:hiddenLine xmlns="" xmlns:a14="http://schemas.microsoft.com/office/drawing/2010/main" w="9525">
+                <a14:hiddenLine xmlns:a14="http://schemas.microsoft.com/office/drawing/2010/main" xmlns="" w="9525">
                   <a:solidFill>
                     <a:srgbClr val="000000"/>
                   </a:solidFill>
@@ -3728,7 +3729,7 @@
             </a:ln>
             <a:extLst>
               <a:ext uri="{91240B29-F687-4f45-9708-019B960494DF}">
-                <a14:hiddenLine xmlns="" xmlns:a14="http://schemas.microsoft.com/office/drawing/2010/main" w="9525">
+                <a14:hiddenLine xmlns:a14="http://schemas.microsoft.com/office/drawing/2010/main" xmlns="" w="9525">
                   <a:solidFill>
                     <a:srgbClr val="000000"/>
                   </a:solidFill>
@@ -3818,7 +3819,7 @@
             </a:ln>
             <a:extLst>
               <a:ext uri="{91240B29-F687-4f45-9708-019B960494DF}">
-                <a14:hiddenLine xmlns="" xmlns:a14="http://schemas.microsoft.com/office/drawing/2010/main" w="9525">
+                <a14:hiddenLine xmlns:a14="http://schemas.microsoft.com/office/drawing/2010/main" xmlns="" w="9525">
                   <a:solidFill>
                     <a:srgbClr val="000000"/>
                   </a:solidFill>
@@ -3880,7 +3881,7 @@
             </a:ln>
             <a:extLst>
               <a:ext uri="{91240B29-F687-4f45-9708-019B960494DF}">
-                <a14:hiddenLine xmlns="" xmlns:a14="http://schemas.microsoft.com/office/drawing/2010/main" w="9525">
+                <a14:hiddenLine xmlns:a14="http://schemas.microsoft.com/office/drawing/2010/main" xmlns="" w="9525">
                   <a:solidFill>
                     <a:srgbClr val="000000"/>
                   </a:solidFill>
@@ -3970,7 +3971,7 @@
             </a:ln>
             <a:extLst>
               <a:ext uri="{91240B29-F687-4f45-9708-019B960494DF}">
-                <a14:hiddenLine xmlns="" xmlns:a14="http://schemas.microsoft.com/office/drawing/2010/main" w="9525">
+                <a14:hiddenLine xmlns:a14="http://schemas.microsoft.com/office/drawing/2010/main" xmlns="" w="9525">
                   <a:solidFill>
                     <a:srgbClr val="000000"/>
                   </a:solidFill>
@@ -4060,7 +4061,7 @@
             </a:ln>
             <a:extLst>
               <a:ext uri="{91240B29-F687-4f45-9708-019B960494DF}">
-                <a14:hiddenLine xmlns="" xmlns:a14="http://schemas.microsoft.com/office/drawing/2010/main" w="9525">
+                <a14:hiddenLine xmlns:a14="http://schemas.microsoft.com/office/drawing/2010/main" xmlns="" w="9525">
                   <a:solidFill>
                     <a:srgbClr val="000000"/>
                   </a:solidFill>
@@ -4125,7 +4126,7 @@
             </a:ln>
             <a:extLst>
               <a:ext uri="{91240B29-F687-4f45-9708-019B960494DF}">
-                <a14:hiddenLine xmlns="" xmlns:a14="http://schemas.microsoft.com/office/drawing/2010/main" w="9525">
+                <a14:hiddenLine xmlns:a14="http://schemas.microsoft.com/office/drawing/2010/main" xmlns="" w="9525">
                   <a:solidFill>
                     <a:srgbClr val="000000"/>
                   </a:solidFill>
@@ -4187,7 +4188,7 @@
             </a:ln>
             <a:extLst>
               <a:ext uri="{91240B29-F687-4f45-9708-019B960494DF}">
-                <a14:hiddenLine xmlns="" xmlns:a14="http://schemas.microsoft.com/office/drawing/2010/main" w="9525">
+                <a14:hiddenLine xmlns:a14="http://schemas.microsoft.com/office/drawing/2010/main" xmlns="" w="9525">
                   <a:solidFill>
                     <a:srgbClr val="000000"/>
                   </a:solidFill>
@@ -4277,7 +4278,7 @@
             </a:ln>
             <a:extLst>
               <a:ext uri="{91240B29-F687-4f45-9708-019B960494DF}">
-                <a14:hiddenLine xmlns="" xmlns:a14="http://schemas.microsoft.com/office/drawing/2010/main" w="9525">
+                <a14:hiddenLine xmlns:a14="http://schemas.microsoft.com/office/drawing/2010/main" xmlns="" w="9525">
                   <a:solidFill>
                     <a:srgbClr val="000000"/>
                   </a:solidFill>
@@ -4367,7 +4368,7 @@
             </a:ln>
             <a:extLst>
               <a:ext uri="{91240B29-F687-4f45-9708-019B960494DF}">
-                <a14:hiddenLine xmlns="" xmlns:a14="http://schemas.microsoft.com/office/drawing/2010/main" w="9525">
+                <a14:hiddenLine xmlns:a14="http://schemas.microsoft.com/office/drawing/2010/main" xmlns="" w="9525">
                   <a:solidFill>
                     <a:srgbClr val="000000"/>
                   </a:solidFill>
@@ -4429,7 +4430,7 @@
             </a:ln>
             <a:extLst>
               <a:ext uri="{91240B29-F687-4f45-9708-019B960494DF}">
-                <a14:hiddenLine xmlns="" xmlns:a14="http://schemas.microsoft.com/office/drawing/2010/main" w="9525">
+                <a14:hiddenLine xmlns:a14="http://schemas.microsoft.com/office/drawing/2010/main" xmlns="" w="9525">
                   <a:solidFill>
                     <a:srgbClr val="000000"/>
                   </a:solidFill>
@@ -4549,7 +4550,7 @@
             </a:ln>
             <a:extLst>
               <a:ext uri="{91240B29-F687-4f45-9708-019B960494DF}">
-                <a14:hiddenLine xmlns="" xmlns:a14="http://schemas.microsoft.com/office/drawing/2010/main" w="9525">
+                <a14:hiddenLine xmlns:a14="http://schemas.microsoft.com/office/drawing/2010/main" xmlns="" w="9525">
                   <a:solidFill>
                     <a:srgbClr val="000000"/>
                   </a:solidFill>
@@ -4617,7 +4618,7 @@
             </a:ln>
             <a:extLst>
               <a:ext uri="{91240B29-F687-4f45-9708-019B960494DF}">
-                <a14:hiddenLine xmlns="" xmlns:a14="http://schemas.microsoft.com/office/drawing/2010/main" w="9525">
+                <a14:hiddenLine xmlns:a14="http://schemas.microsoft.com/office/drawing/2010/main" xmlns="" w="9525">
                   <a:solidFill>
                     <a:srgbClr val="000000"/>
                   </a:solidFill>
@@ -4707,7 +4708,7 @@
             </a:ln>
             <a:extLst>
               <a:ext uri="{91240B29-F687-4f45-9708-019B960494DF}">
-                <a14:hiddenLine xmlns="" xmlns:a14="http://schemas.microsoft.com/office/drawing/2010/main" w="9525">
+                <a14:hiddenLine xmlns:a14="http://schemas.microsoft.com/office/drawing/2010/main" xmlns="" w="9525">
                   <a:solidFill>
                     <a:srgbClr val="000000"/>
                   </a:solidFill>
@@ -4847,7 +4848,7 @@
           <a:p>
             <a:fld id="{4313F670-7F9A-774D-B73D-573401E44297}" type="datetime1">
               <a:rPr lang="en-US" smtClean="0"/>
-              <a:t>10/7/26</a:t>
+              <a:t>10/13/26</a:t>
             </a:fld>
             <a:endParaRPr lang="en-US"/>
           </a:p>
@@ -5114,7 +5115,7 @@
           <a:p>
             <a:fld id="{446F9669-A8A7-2D40-9D01-B35FC337AA30}" type="datetime1">
               <a:rPr lang="en-US" smtClean="0"/>
-              <a:t>10/7/26</a:t>
+              <a:t>10/13/26</a:t>
             </a:fld>
             <a:endParaRPr lang="en-US"/>
           </a:p>
@@ -5310,7 +5311,7 @@
           <a:p>
             <a:fld id="{FA76CF18-F41B-6B48-B3E5-599E9795C2C3}" type="datetime1">
               <a:rPr lang="en-US" smtClean="0"/>
-              <a:t>10/7/26</a:t>
+              <a:t>10/13/26</a:t>
             </a:fld>
             <a:endParaRPr lang="en-US"/>
           </a:p>
@@ -5573,7 +5574,7 @@
           <a:p>
             <a:fld id="{B9654854-6457-164F-A077-6B3035079B82}" type="datetime1">
               <a:rPr lang="en-US" smtClean="0"/>
-              <a:t>10/7/26</a:t>
+              <a:t>10/13/26</a:t>
             </a:fld>
             <a:endParaRPr lang="en-US"/>
           </a:p>
@@ -6007,7 +6008,7 @@
           <a:p>
             <a:fld id="{CE3DBFD7-E611-8C40-AC73-0C29FF63F0CD}" type="datetime1">
               <a:rPr lang="en-US" smtClean="0"/>
-              <a:t>10/7/26</a:t>
+              <a:t>10/13/26</a:t>
             </a:fld>
             <a:endParaRPr lang="en-US"/>
           </a:p>
@@ -6553,7 +6554,7 @@
           <a:p>
             <a:fld id="{C8B63B06-0493-2840-9F37-30C9412BBF17}" type="datetime1">
               <a:rPr lang="en-US" smtClean="0"/>
-              <a:t>10/7/26</a:t>
+              <a:t>10/13/26</a:t>
             </a:fld>
             <a:endParaRPr lang="en-US"/>
           </a:p>
@@ -7273,7 +7274,7 @@
           <a:p>
             <a:fld id="{72B5C0FA-8C46-E84D-B6D7-B673F2CA0A0E}" type="datetime1">
               <a:rPr lang="en-US" smtClean="0"/>
-              <a:t>10/7/26</a:t>
+              <a:t>10/13/26</a:t>
             </a:fld>
             <a:endParaRPr lang="en-US"/>
           </a:p>
@@ -7443,7 +7444,7 @@
           <a:p>
             <a:fld id="{60B9CDE1-97B4-BF46-B69C-B86855B18820}" type="datetime1">
               <a:rPr lang="en-US" smtClean="0"/>
-              <a:t>10/7/26</a:t>
+              <a:t>10/13/26</a:t>
             </a:fld>
             <a:endParaRPr lang="en-US"/>
           </a:p>
@@ -7623,7 +7624,7 @@
           <a:p>
             <a:fld id="{BE51D3A4-F9E5-FD49-AA87-B395F50451DC}" type="datetime1">
               <a:rPr lang="en-US" smtClean="0"/>
-              <a:t>10/7/26</a:t>
+              <a:t>10/13/26</a:t>
             </a:fld>
             <a:endParaRPr lang="en-US"/>
           </a:p>
@@ -7793,7 +7794,7 @@
           <a:p>
             <a:fld id="{880DFB37-B0AE-9449-85EC-14F9C83B6084}" type="datetime1">
               <a:rPr lang="en-US" smtClean="0"/>
-              <a:t>10/7/26</a:t>
+              <a:t>10/13/26</a:t>
             </a:fld>
             <a:endParaRPr lang="en-US"/>
           </a:p>
@@ -8043,7 +8044,7 @@
           <a:p>
             <a:fld id="{C939124A-616E-6944-A21A-1839F5DBE7BB}" type="datetime1">
               <a:rPr lang="en-US" smtClean="0"/>
-              <a:t>10/7/26</a:t>
+              <a:t>10/13/26</a:t>
             </a:fld>
             <a:endParaRPr lang="en-US"/>
           </a:p>
@@ -8275,7 +8276,7 @@
           <a:p>
             <a:fld id="{C6E9A026-D48C-FD43-8676-CD625DD5D84B}" type="datetime1">
               <a:rPr lang="en-US" smtClean="0"/>
-              <a:t>10/7/26</a:t>
+              <a:t>10/13/26</a:t>
             </a:fld>
             <a:endParaRPr lang="en-US"/>
           </a:p>
@@ -8661,7 +8662,7 @@
           <a:p>
             <a:fld id="{EA35111E-23A3-1440-99A3-C4C665908E3D}" type="datetime1">
               <a:rPr lang="en-US" smtClean="0"/>
-              <a:t>10/7/26</a:t>
+              <a:t>10/13/26</a:t>
             </a:fld>
             <a:endParaRPr lang="en-US"/>
           </a:p>
@@ -8784,7 +8785,7 @@
           <a:p>
             <a:fld id="{249983B9-88EF-D74B-BA6D-6A3BF17C2B38}" type="datetime1">
               <a:rPr lang="en-US" smtClean="0"/>
-              <a:t>10/7/26</a:t>
+              <a:t>10/13/26</a:t>
             </a:fld>
             <a:endParaRPr lang="en-US"/>
           </a:p>
@@ -8879,7 +8880,7 @@
           <a:p>
             <a:fld id="{E2A00AEF-B4EC-084A-8DB8-A225C7981CBB}" type="datetime1">
               <a:rPr lang="en-US" smtClean="0"/>
-              <a:t>10/7/26</a:t>
+              <a:t>10/13/26</a:t>
             </a:fld>
             <a:endParaRPr lang="en-US"/>
           </a:p>
@@ -9128,7 +9129,7 @@
           <a:p>
             <a:fld id="{97860299-21CD-A94A-A7B0-44E787F8D42C}" type="datetime1">
               <a:rPr lang="en-US" smtClean="0"/>
-              <a:t>10/7/26</a:t>
+              <a:t>10/13/26</a:t>
             </a:fld>
             <a:endParaRPr lang="en-US"/>
           </a:p>
@@ -9413,7 +9414,7 @@
           <a:p>
             <a:fld id="{3DFD19CF-4E62-D246-BA61-7B528271315F}" type="datetime1">
               <a:rPr lang="en-US" smtClean="0"/>
-              <a:t>10/7/26</a:t>
+              <a:t>10/13/26</a:t>
             </a:fld>
             <a:endParaRPr lang="en-US"/>
           </a:p>
@@ -9536,7 +9537,7 @@
           <a:noFill/>
           <a:extLst>
             <a:ext uri="{909E8E84-426E-40dd-AFC4-6F175D3DCCD1}">
-              <a14:hiddenFill xmlns="" xmlns:a14="http://schemas.microsoft.com/office/drawing/2010/main">
+              <a14:hiddenFill xmlns:a14="http://schemas.microsoft.com/office/drawing/2010/main" xmlns="">
                 <a:solidFill>
                   <a:srgbClr val="FFFFFF"/>
                 </a:solidFill>
@@ -9610,7 +9611,7 @@
               </a:ln>
               <a:extLst>
                 <a:ext uri="{91240B29-F687-4f45-9708-019B960494DF}">
-                  <a14:hiddenLine xmlns="" xmlns:a14="http://schemas.microsoft.com/office/drawing/2010/main" w="9525">
+                  <a14:hiddenLine xmlns:a14="http://schemas.microsoft.com/office/drawing/2010/main" xmlns="" w="9525">
                     <a:solidFill>
                       <a:srgbClr val="000000"/>
                     </a:solidFill>
@@ -9700,7 +9701,7 @@
               </a:ln>
               <a:extLst>
                 <a:ext uri="{91240B29-F687-4f45-9708-019B960494DF}">
-                  <a14:hiddenLine xmlns="" xmlns:a14="http://schemas.microsoft.com/office/drawing/2010/main" w="9525">
+                  <a14:hiddenLine xmlns:a14="http://schemas.microsoft.com/office/drawing/2010/main" xmlns="" w="9525">
                     <a:solidFill>
                       <a:srgbClr val="000000"/>
                     </a:solidFill>
@@ -9790,7 +9791,7 @@
               </a:ln>
               <a:extLst>
                 <a:ext uri="{91240B29-F687-4f45-9708-019B960494DF}">
-                  <a14:hiddenLine xmlns="" xmlns:a14="http://schemas.microsoft.com/office/drawing/2010/main" w="9525">
+                  <a14:hiddenLine xmlns:a14="http://schemas.microsoft.com/office/drawing/2010/main" xmlns="" w="9525">
                     <a:solidFill>
                       <a:srgbClr val="000000"/>
                     </a:solidFill>
@@ -9852,7 +9853,7 @@
               </a:ln>
               <a:extLst>
                 <a:ext uri="{91240B29-F687-4f45-9708-019B960494DF}">
-                  <a14:hiddenLine xmlns="" xmlns:a14="http://schemas.microsoft.com/office/drawing/2010/main" w="9525">
+                  <a14:hiddenLine xmlns:a14="http://schemas.microsoft.com/office/drawing/2010/main" xmlns="" w="9525">
                     <a:solidFill>
                       <a:srgbClr val="000000"/>
                     </a:solidFill>
@@ -9942,7 +9943,7 @@
               </a:ln>
               <a:extLst>
                 <a:ext uri="{91240B29-F687-4f45-9708-019B960494DF}">
-                  <a14:hiddenLine xmlns="" xmlns:a14="http://schemas.microsoft.com/office/drawing/2010/main" w="9525">
+                  <a14:hiddenLine xmlns:a14="http://schemas.microsoft.com/office/drawing/2010/main" xmlns="" w="9525">
                     <a:solidFill>
                       <a:srgbClr val="000000"/>
                     </a:solidFill>
@@ -10004,7 +10005,7 @@
               </a:ln>
               <a:extLst>
                 <a:ext uri="{91240B29-F687-4f45-9708-019B960494DF}">
-                  <a14:hiddenLine xmlns="" xmlns:a14="http://schemas.microsoft.com/office/drawing/2010/main" w="9525">
+                  <a14:hiddenLine xmlns:a14="http://schemas.microsoft.com/office/drawing/2010/main" xmlns="" w="9525">
                     <a:solidFill>
                       <a:srgbClr val="000000"/>
                     </a:solidFill>
@@ -10066,7 +10067,7 @@
               </a:ln>
               <a:extLst>
                 <a:ext uri="{91240B29-F687-4f45-9708-019B960494DF}">
-                  <a14:hiddenLine xmlns="" xmlns:a14="http://schemas.microsoft.com/office/drawing/2010/main" w="9525">
+                  <a14:hiddenLine xmlns:a14="http://schemas.microsoft.com/office/drawing/2010/main" xmlns="" w="9525">
                     <a:solidFill>
                       <a:srgbClr val="000000"/>
                     </a:solidFill>
@@ -10156,7 +10157,7 @@
               </a:ln>
               <a:extLst>
                 <a:ext uri="{91240B29-F687-4f45-9708-019B960494DF}">
-                  <a14:hiddenLine xmlns="" xmlns:a14="http://schemas.microsoft.com/office/drawing/2010/main" w="9525">
+                  <a14:hiddenLine xmlns:a14="http://schemas.microsoft.com/office/drawing/2010/main" xmlns="" w="9525">
                     <a:solidFill>
                       <a:srgbClr val="000000"/>
                     </a:solidFill>
@@ -10246,7 +10247,7 @@
               </a:ln>
               <a:extLst>
                 <a:ext uri="{91240B29-F687-4f45-9708-019B960494DF}">
-                  <a14:hiddenLine xmlns="" xmlns:a14="http://schemas.microsoft.com/office/drawing/2010/main" w="9525">
+                  <a14:hiddenLine xmlns:a14="http://schemas.microsoft.com/office/drawing/2010/main" xmlns="" w="9525">
                     <a:solidFill>
                       <a:srgbClr val="000000"/>
                     </a:solidFill>
@@ -10308,7 +10309,7 @@
               </a:ln>
               <a:extLst>
                 <a:ext uri="{91240B29-F687-4f45-9708-019B960494DF}">
-                  <a14:hiddenLine xmlns="" xmlns:a14="http://schemas.microsoft.com/office/drawing/2010/main" w="9525">
+                  <a14:hiddenLine xmlns:a14="http://schemas.microsoft.com/office/drawing/2010/main" xmlns="" w="9525">
                     <a:solidFill>
                       <a:srgbClr val="000000"/>
                     </a:solidFill>
@@ -10418,7 +10419,7 @@
               </a:ln>
               <a:extLst>
                 <a:ext uri="{91240B29-F687-4f45-9708-019B960494DF}">
-                  <a14:hiddenLine xmlns="" xmlns:a14="http://schemas.microsoft.com/office/drawing/2010/main" w="9525">
+                  <a14:hiddenLine xmlns:a14="http://schemas.microsoft.com/office/drawing/2010/main" xmlns="" w="9525">
                     <a:solidFill>
                       <a:srgbClr val="000000"/>
                     </a:solidFill>
@@ -10502,7 +10503,7 @@
               </a:ln>
               <a:extLst>
                 <a:ext uri="{91240B29-F687-4f45-9708-019B960494DF}">
-                  <a14:hiddenLine xmlns="" xmlns:a14="http://schemas.microsoft.com/office/drawing/2010/main" w="9525">
+                  <a14:hiddenLine xmlns:a14="http://schemas.microsoft.com/office/drawing/2010/main" xmlns="" w="9525">
                     <a:solidFill>
                       <a:srgbClr val="000000"/>
                     </a:solidFill>
@@ -10564,7 +10565,7 @@
               </a:ln>
               <a:extLst>
                 <a:ext uri="{91240B29-F687-4f45-9708-019B960494DF}">
-                  <a14:hiddenLine xmlns="" xmlns:a14="http://schemas.microsoft.com/office/drawing/2010/main" w="9525">
+                  <a14:hiddenLine xmlns:a14="http://schemas.microsoft.com/office/drawing/2010/main" xmlns="" w="9525">
                     <a:solidFill>
                       <a:srgbClr val="000000"/>
                     </a:solidFill>
@@ -10626,7 +10627,7 @@
               </a:ln>
               <a:extLst>
                 <a:ext uri="{91240B29-F687-4f45-9708-019B960494DF}">
-                  <a14:hiddenLine xmlns="" xmlns:a14="http://schemas.microsoft.com/office/drawing/2010/main" w="9525">
+                  <a14:hiddenLine xmlns:a14="http://schemas.microsoft.com/office/drawing/2010/main" xmlns="" w="9525">
                     <a:solidFill>
                       <a:srgbClr val="000000"/>
                     </a:solidFill>
@@ -10716,7 +10717,7 @@
               </a:ln>
               <a:extLst>
                 <a:ext uri="{91240B29-F687-4f45-9708-019B960494DF}">
-                  <a14:hiddenLine xmlns="" xmlns:a14="http://schemas.microsoft.com/office/drawing/2010/main" w="9525">
+                  <a14:hiddenLine xmlns:a14="http://schemas.microsoft.com/office/drawing/2010/main" xmlns="" w="9525">
                     <a:solidFill>
                       <a:srgbClr val="000000"/>
                     </a:solidFill>
@@ -10750,7 +10751,7 @@
               </a:ln>
               <a:extLst>
                 <a:ext uri="{91240B29-F687-4f45-9708-019B960494DF}">
-                  <a14:hiddenLine xmlns="" xmlns:a14="http://schemas.microsoft.com/office/drawing/2010/main" w="9525">
+                  <a14:hiddenLine xmlns:a14="http://schemas.microsoft.com/office/drawing/2010/main" xmlns="" w="9525">
                     <a:solidFill>
                       <a:srgbClr val="000000"/>
                     </a:solidFill>
@@ -10815,7 +10816,7 @@
               </a:ln>
               <a:extLst>
                 <a:ext uri="{91240B29-F687-4f45-9708-019B960494DF}">
-                  <a14:hiddenLine xmlns="" xmlns:a14="http://schemas.microsoft.com/office/drawing/2010/main" w="9525">
+                  <a14:hiddenLine xmlns:a14="http://schemas.microsoft.com/office/drawing/2010/main" xmlns="" w="9525">
                     <a:solidFill>
                       <a:srgbClr val="000000"/>
                     </a:solidFill>
@@ -10905,7 +10906,7 @@
               </a:ln>
               <a:extLst>
                 <a:ext uri="{91240B29-F687-4f45-9708-019B960494DF}">
-                  <a14:hiddenLine xmlns="" xmlns:a14="http://schemas.microsoft.com/office/drawing/2010/main" w="9525">
+                  <a14:hiddenLine xmlns:a14="http://schemas.microsoft.com/office/drawing/2010/main" xmlns="" w="9525">
                     <a:solidFill>
                       <a:srgbClr val="000000"/>
                     </a:solidFill>
@@ -10967,7 +10968,7 @@
               </a:ln>
               <a:extLst>
                 <a:ext uri="{91240B29-F687-4f45-9708-019B960494DF}">
-                  <a14:hiddenLine xmlns="" xmlns:a14="http://schemas.microsoft.com/office/drawing/2010/main" w="9525">
+                  <a14:hiddenLine xmlns:a14="http://schemas.microsoft.com/office/drawing/2010/main" xmlns="" w="9525">
                     <a:solidFill>
                       <a:srgbClr val="000000"/>
                     </a:solidFill>
@@ -11057,7 +11058,7 @@
               </a:ln>
               <a:extLst>
                 <a:ext uri="{91240B29-F687-4f45-9708-019B960494DF}">
-                  <a14:hiddenLine xmlns="" xmlns:a14="http://schemas.microsoft.com/office/drawing/2010/main" w="9525">
+                  <a14:hiddenLine xmlns:a14="http://schemas.microsoft.com/office/drawing/2010/main" xmlns="" w="9525">
                     <a:solidFill>
                       <a:srgbClr val="000000"/>
                     </a:solidFill>
@@ -11122,7 +11123,7 @@
               </a:ln>
               <a:extLst>
                 <a:ext uri="{91240B29-F687-4f45-9708-019B960494DF}">
-                  <a14:hiddenLine xmlns="" xmlns:a14="http://schemas.microsoft.com/office/drawing/2010/main" w="9525">
+                  <a14:hiddenLine xmlns:a14="http://schemas.microsoft.com/office/drawing/2010/main" xmlns="" w="9525">
                     <a:solidFill>
                       <a:srgbClr val="000000"/>
                     </a:solidFill>
@@ -11184,7 +11185,7 @@
               </a:ln>
               <a:extLst>
                 <a:ext uri="{91240B29-F687-4f45-9708-019B960494DF}">
-                  <a14:hiddenLine xmlns="" xmlns:a14="http://schemas.microsoft.com/office/drawing/2010/main" w="9525">
+                  <a14:hiddenLine xmlns:a14="http://schemas.microsoft.com/office/drawing/2010/main" xmlns="" w="9525">
                     <a:solidFill>
                       <a:srgbClr val="000000"/>
                     </a:solidFill>
@@ -11274,7 +11275,7 @@
               </a:ln>
               <a:extLst>
                 <a:ext uri="{91240B29-F687-4f45-9708-019B960494DF}">
-                  <a14:hiddenLine xmlns="" xmlns:a14="http://schemas.microsoft.com/office/drawing/2010/main" w="9525">
+                  <a14:hiddenLine xmlns:a14="http://schemas.microsoft.com/office/drawing/2010/main" xmlns="" w="9525">
                     <a:solidFill>
                       <a:srgbClr val="000000"/>
                     </a:solidFill>
@@ -11364,7 +11365,7 @@
               </a:ln>
               <a:extLst>
                 <a:ext uri="{91240B29-F687-4f45-9708-019B960494DF}">
-                  <a14:hiddenLine xmlns="" xmlns:a14="http://schemas.microsoft.com/office/drawing/2010/main" w="9525">
+                  <a14:hiddenLine xmlns:a14="http://schemas.microsoft.com/office/drawing/2010/main" xmlns="" w="9525">
                     <a:solidFill>
                       <a:srgbClr val="000000"/>
                     </a:solidFill>
@@ -11429,7 +11430,7 @@
               </a:ln>
               <a:extLst>
                 <a:ext uri="{91240B29-F687-4f45-9708-019B960494DF}">
-                  <a14:hiddenLine xmlns="" xmlns:a14="http://schemas.microsoft.com/office/drawing/2010/main" w="9525">
+                  <a14:hiddenLine xmlns:a14="http://schemas.microsoft.com/office/drawing/2010/main" xmlns="" w="9525">
                     <a:solidFill>
                       <a:srgbClr val="000000"/>
                     </a:solidFill>
@@ -11549,7 +11550,7 @@
               </a:ln>
               <a:extLst>
                 <a:ext uri="{91240B29-F687-4f45-9708-019B960494DF}">
-                  <a14:hiddenLine xmlns="" xmlns:a14="http://schemas.microsoft.com/office/drawing/2010/main" w="9525">
+                  <a14:hiddenLine xmlns:a14="http://schemas.microsoft.com/office/drawing/2010/main" xmlns="" w="9525">
                     <a:solidFill>
                       <a:srgbClr val="000000"/>
                     </a:solidFill>
@@ -11630,7 +11631,7 @@
               </a:ln>
               <a:extLst>
                 <a:ext uri="{91240B29-F687-4f45-9708-019B960494DF}">
-                  <a14:hiddenLine xmlns="" xmlns:a14="http://schemas.microsoft.com/office/drawing/2010/main" w="9525">
+                  <a14:hiddenLine xmlns:a14="http://schemas.microsoft.com/office/drawing/2010/main" xmlns="" w="9525">
                     <a:solidFill>
                       <a:srgbClr val="000000"/>
                     </a:solidFill>
@@ -11745,7 +11746,7 @@
               </a:ln>
               <a:extLst>
                 <a:ext uri="{91240B29-F687-4f45-9708-019B960494DF}">
-                  <a14:hiddenLine xmlns="" xmlns:a14="http://schemas.microsoft.com/office/drawing/2010/main" w="9525">
+                  <a14:hiddenLine xmlns:a14="http://schemas.microsoft.com/office/drawing/2010/main" xmlns="" w="9525">
                     <a:solidFill>
                       <a:srgbClr val="000000"/>
                     </a:solidFill>
@@ -11835,7 +11836,7 @@
               </a:ln>
               <a:extLst>
                 <a:ext uri="{91240B29-F687-4f45-9708-019B960494DF}">
-                  <a14:hiddenLine xmlns="" xmlns:a14="http://schemas.microsoft.com/office/drawing/2010/main" w="9525">
+                  <a14:hiddenLine xmlns:a14="http://schemas.microsoft.com/office/drawing/2010/main" xmlns="" w="9525">
                     <a:solidFill>
                       <a:srgbClr val="000000"/>
                     </a:solidFill>
@@ -11900,7 +11901,7 @@
               </a:ln>
               <a:extLst>
                 <a:ext uri="{91240B29-F687-4f45-9708-019B960494DF}">
-                  <a14:hiddenLine xmlns="" xmlns:a14="http://schemas.microsoft.com/office/drawing/2010/main" w="9525">
+                  <a14:hiddenLine xmlns:a14="http://schemas.microsoft.com/office/drawing/2010/main" xmlns="" w="9525">
                     <a:solidFill>
                       <a:srgbClr val="000000"/>
                     </a:solidFill>
@@ -11990,7 +11991,7 @@
               </a:ln>
               <a:extLst>
                 <a:ext uri="{91240B29-F687-4f45-9708-019B960494DF}">
-                  <a14:hiddenLine xmlns="" xmlns:a14="http://schemas.microsoft.com/office/drawing/2010/main" w="9525">
+                  <a14:hiddenLine xmlns:a14="http://schemas.microsoft.com/office/drawing/2010/main" xmlns="" w="9525">
                     <a:solidFill>
                       <a:srgbClr val="000000"/>
                     </a:solidFill>
@@ -12058,7 +12059,7 @@
               </a:ln>
               <a:extLst>
                 <a:ext uri="{91240B29-F687-4f45-9708-019B960494DF}">
-                  <a14:hiddenLine xmlns="" xmlns:a14="http://schemas.microsoft.com/office/drawing/2010/main" w="9525">
+                  <a14:hiddenLine xmlns:a14="http://schemas.microsoft.com/office/drawing/2010/main" xmlns="" w="9525">
                     <a:solidFill>
                       <a:srgbClr val="000000"/>
                     </a:solidFill>
@@ -12148,7 +12149,7 @@
               </a:ln>
               <a:extLst>
                 <a:ext uri="{91240B29-F687-4f45-9708-019B960494DF}">
-                  <a14:hiddenLine xmlns="" xmlns:a14="http://schemas.microsoft.com/office/drawing/2010/main" w="9525">
+                  <a14:hiddenLine xmlns:a14="http://schemas.microsoft.com/office/drawing/2010/main" xmlns="" w="9525">
                     <a:solidFill>
                       <a:srgbClr val="000000"/>
                     </a:solidFill>
@@ -12216,7 +12217,7 @@
               </a:ln>
               <a:extLst>
                 <a:ext uri="{91240B29-F687-4f45-9708-019B960494DF}">
-                  <a14:hiddenLine xmlns="" xmlns:a14="http://schemas.microsoft.com/office/drawing/2010/main" w="9525">
+                  <a14:hiddenLine xmlns:a14="http://schemas.microsoft.com/office/drawing/2010/main" xmlns="" w="9525">
                     <a:solidFill>
                       <a:srgbClr val="000000"/>
                     </a:solidFill>
@@ -12306,7 +12307,7 @@
               </a:ln>
               <a:extLst>
                 <a:ext uri="{91240B29-F687-4f45-9708-019B960494DF}">
-                  <a14:hiddenLine xmlns="" xmlns:a14="http://schemas.microsoft.com/office/drawing/2010/main" w="9525">
+                  <a14:hiddenLine xmlns:a14="http://schemas.microsoft.com/office/drawing/2010/main" xmlns="" w="9525">
                     <a:solidFill>
                       <a:srgbClr val="000000"/>
                     </a:solidFill>
@@ -12340,7 +12341,7 @@
               </a:ln>
               <a:extLst>
                 <a:ext uri="{91240B29-F687-4f45-9708-019B960494DF}">
-                  <a14:hiddenLine xmlns="" xmlns:a14="http://schemas.microsoft.com/office/drawing/2010/main" w="9525">
+                  <a14:hiddenLine xmlns:a14="http://schemas.microsoft.com/office/drawing/2010/main" xmlns="" w="9525">
                     <a:solidFill>
                       <a:srgbClr val="000000"/>
                     </a:solidFill>
@@ -12480,7 +12481,7 @@
           <a:p>
             <a:fld id="{92FF8978-FE14-CC4A-93A6-934EB06543C0}" type="datetime1">
               <a:rPr lang="en-US" smtClean="0"/>
-              <a:t>10/7/26</a:t>
+              <a:t>10/13/26</a:t>
             </a:fld>
             <a:endParaRPr lang="en-US"/>
           </a:p>
@@ -15134,6 +15135,307 @@
   <p:cSld>
     <p:spTree>
       <p:nvGrpSpPr>
+        <p:cNvPr id="1" name="">
+          <a:extLst>
+            <a:ext uri="{FF2B5EF4-FFF2-40B4-BE49-F238E27FC236}">
+              <a16:creationId xmlns:a16="http://schemas.microsoft.com/office/drawing/2014/main" id="{6B856FAB-5D2E-4D8E-B411-7E285EE6CED0}"/>
+            </a:ext>
+          </a:extLst>
+        </p:cNvPr>
+        <p:cNvGrpSpPr/>
+        <p:nvPr/>
+      </p:nvGrpSpPr>
+      <p:grpSpPr>
+        <a:xfrm>
+          <a:off x="0" y="0"/>
+          <a:ext cx="0" cy="0"/>
+          <a:chOff x="0" y="0"/>
+          <a:chExt cx="0" cy="0"/>
+        </a:xfrm>
+      </p:grpSpPr>
+      <p:sp>
+        <p:nvSpPr>
+          <p:cNvPr id="6146" name="Rectangle 2">
+            <a:extLst>
+              <a:ext uri="{FF2B5EF4-FFF2-40B4-BE49-F238E27FC236}">
+                <a16:creationId xmlns:a16="http://schemas.microsoft.com/office/drawing/2014/main" id="{F5C926FF-CDDE-AC42-17E7-D298616E844A}"/>
+              </a:ext>
+            </a:extLst>
+          </p:cNvPr>
+          <p:cNvSpPr>
+            <a:spLocks noGrp="1" noChangeArrowheads="1"/>
+          </p:cNvSpPr>
+          <p:nvPr>
+            <p:ph type="title"/>
+            <p:custDataLst>
+              <p:tags r:id="rId1"/>
+            </p:custDataLst>
+          </p:nvPr>
+        </p:nvSpPr>
+        <p:spPr>
+          <a:xfrm>
+            <a:off x="1141413" y="284084"/>
+            <a:ext cx="9905998" cy="620791"/>
+          </a:xfrm>
+        </p:spPr>
+        <p:txBody>
+          <a:bodyPr/>
+          <a:lstStyle/>
+          <a:p>
+            <a:pPr algn="ctr"/>
+            <a:r>
+              <a:rPr lang="en-US" dirty="0"/>
+              <a:t>Lecture 14 - Tuesday, Oct. 13</a:t>
+            </a:r>
+          </a:p>
+        </p:txBody>
+      </p:sp>
+      <p:sp>
+        <p:nvSpPr>
+          <p:cNvPr id="6147" name="Rectangle 3">
+            <a:extLst>
+              <a:ext uri="{FF2B5EF4-FFF2-40B4-BE49-F238E27FC236}">
+                <a16:creationId xmlns:a16="http://schemas.microsoft.com/office/drawing/2014/main" id="{80BFC038-0D0C-4D31-F0FC-8BE9D80053DF}"/>
+              </a:ext>
+            </a:extLst>
+          </p:cNvPr>
+          <p:cNvSpPr>
+            <a:spLocks noGrp="1" noChangeArrowheads="1"/>
+          </p:cNvSpPr>
+          <p:nvPr>
+            <p:ph idx="1"/>
+            <p:custDataLst>
+              <p:tags r:id="rId2"/>
+            </p:custDataLst>
+          </p:nvPr>
+        </p:nvSpPr>
+        <p:spPr>
+          <a:xfrm>
+            <a:off x="1294151" y="904876"/>
+            <a:ext cx="9600522" cy="5953124"/>
+          </a:xfrm>
+        </p:spPr>
+        <p:txBody>
+          <a:bodyPr>
+            <a:normAutofit fontScale="62500" lnSpcReduction="20000"/>
+          </a:bodyPr>
+          <a:lstStyle/>
+          <a:p>
+            <a:r>
+              <a:rPr lang="en-US" dirty="0">
+                <a:latin typeface="Arial" panose="020B0604020202020204" pitchFamily="34" charset="0"/>
+                <a:cs typeface="Arial" panose="020B0604020202020204" pitchFamily="34" charset="0"/>
+              </a:rPr>
+              <a:t>Please remember </a:t>
+            </a:r>
+            <a:r>
+              <a:rPr lang="en-US" b="1" i="1" u="sng" dirty="0">
+                <a:latin typeface="Arial" panose="020B0604020202020204" pitchFamily="34" charset="0"/>
+                <a:cs typeface="Arial" panose="020B0604020202020204" pitchFamily="34" charset="0"/>
+              </a:rPr>
+              <a:t>no laptops / phones</a:t>
+            </a:r>
+            <a:r>
+              <a:rPr lang="en-US" dirty="0">
+                <a:latin typeface="Arial" panose="020B0604020202020204" pitchFamily="34" charset="0"/>
+                <a:cs typeface="Arial" panose="020B0604020202020204" pitchFamily="34" charset="0"/>
+              </a:rPr>
+              <a:t> and </a:t>
+            </a:r>
+            <a:r>
+              <a:rPr lang="en-US" b="1" i="1" u="sng" dirty="0">
+                <a:latin typeface="Arial" panose="020B0604020202020204" pitchFamily="34" charset="0"/>
+                <a:cs typeface="Arial" panose="020B0604020202020204" pitchFamily="34" charset="0"/>
+              </a:rPr>
+              <a:t>attendance policy</a:t>
+            </a:r>
+            <a:endParaRPr lang="en-US" dirty="0">
+              <a:latin typeface="Arial" panose="020B0604020202020204" pitchFamily="34" charset="0"/>
+              <a:cs typeface="Arial" panose="020B0604020202020204" pitchFamily="34" charset="0"/>
+            </a:endParaRPr>
+          </a:p>
+          <a:p>
+            <a:r>
+              <a:rPr lang="en-US" dirty="0">
+                <a:latin typeface="Arial" panose="020B0604020202020204" pitchFamily="34" charset="0"/>
+                <a:cs typeface="Arial" panose="020B0604020202020204" pitchFamily="34" charset="0"/>
+              </a:rPr>
+              <a:t>October! Best month of the year! Woo!</a:t>
+            </a:r>
+          </a:p>
+          <a:p>
+            <a:r>
+              <a:rPr lang="en-US" dirty="0">
+                <a:latin typeface="Arial" panose="020B0604020202020204" pitchFamily="34" charset="0"/>
+                <a:cs typeface="Arial" panose="020B0604020202020204" pitchFamily="34" charset="0"/>
+              </a:rPr>
+              <a:t>This week:</a:t>
+            </a:r>
+          </a:p>
+          <a:p>
+            <a:pPr lvl="1"/>
+            <a:r>
+              <a:rPr lang="en-US" dirty="0">
+                <a:latin typeface="Arial" panose="020B0604020202020204" pitchFamily="34" charset="0"/>
+                <a:cs typeface="Arial" panose="020B0604020202020204" pitchFamily="34" charset="0"/>
+              </a:rPr>
+              <a:t>Take your quiz! Good luck!</a:t>
+            </a:r>
+          </a:p>
+          <a:p>
+            <a:r>
+              <a:rPr lang="en-US" dirty="0">
+                <a:latin typeface="Arial" panose="020B0604020202020204" pitchFamily="34" charset="0"/>
+                <a:cs typeface="Arial" panose="020B0604020202020204" pitchFamily="34" charset="0"/>
+              </a:rPr>
+              <a:t>Grading</a:t>
+            </a:r>
+          </a:p>
+          <a:p>
+            <a:pPr lvl="1"/>
+            <a:r>
+              <a:rPr lang="en-US" dirty="0">
+                <a:latin typeface="Arial" panose="020B0604020202020204" pitchFamily="34" charset="0"/>
+                <a:cs typeface="Arial" panose="020B0604020202020204" pitchFamily="34" charset="0"/>
+              </a:rPr>
+              <a:t>Module 2 homework is being graded right now.</a:t>
+            </a:r>
+          </a:p>
+          <a:p>
+            <a:r>
+              <a:rPr lang="en-US" dirty="0">
+                <a:latin typeface="Arial" panose="020B0604020202020204" pitchFamily="34" charset="0"/>
+                <a:cs typeface="Arial" panose="020B0604020202020204" pitchFamily="34" charset="0"/>
+              </a:rPr>
+              <a:t>Module 1 Quiz Regrades</a:t>
+            </a:r>
+          </a:p>
+          <a:p>
+            <a:pPr lvl="1"/>
+            <a:r>
+              <a:rPr lang="en-US" dirty="0">
+                <a:latin typeface="Arial" panose="020B0604020202020204" pitchFamily="34" charset="0"/>
+                <a:cs typeface="Arial" panose="020B0604020202020204" pitchFamily="34" charset="0"/>
+              </a:rPr>
+              <a:t>Contact Gustavo (or visit his OH) if you want something looked at on your quiz. You can come to my OH too but please do not email me.</a:t>
+            </a:r>
+          </a:p>
+          <a:p>
+            <a:r>
+              <a:rPr lang="en-US" dirty="0">
+                <a:latin typeface="Arial" panose="020B0604020202020204" pitchFamily="34" charset="0"/>
+                <a:cs typeface="Arial" panose="020B0604020202020204" pitchFamily="34" charset="0"/>
+              </a:rPr>
+              <a:t>Quiz 2</a:t>
+            </a:r>
+          </a:p>
+          <a:p>
+            <a:pPr lvl="1"/>
+            <a:r>
+              <a:rPr lang="en-US" dirty="0">
+                <a:latin typeface="Arial" panose="020B0604020202020204" pitchFamily="34" charset="0"/>
+                <a:cs typeface="Arial" panose="020B0604020202020204" pitchFamily="34" charset="0"/>
+              </a:rPr>
+              <a:t>…is happening this week. Some have already taken it but most will today and tomorrow.</a:t>
+            </a:r>
+          </a:p>
+          <a:p>
+            <a:pPr lvl="1"/>
+            <a:r>
+              <a:rPr lang="en-US" dirty="0">
+                <a:latin typeface="Arial" panose="020B0604020202020204" pitchFamily="34" charset="0"/>
+                <a:cs typeface="Arial" panose="020B0604020202020204" pitchFamily="34" charset="0"/>
+              </a:rPr>
+              <a:t>There is a practice test live now so you can become familiar with question format (not for question content…just format)</a:t>
+            </a:r>
+          </a:p>
+          <a:p>
+            <a:pPr lvl="1"/>
+            <a:r>
+              <a:rPr lang="en-US" dirty="0">
+                <a:latin typeface="Arial" panose="020B0604020202020204" pitchFamily="34" charset="0"/>
+                <a:cs typeface="Arial" panose="020B0604020202020204" pitchFamily="34" charset="0"/>
+              </a:rPr>
+              <a:t>Question summary is on previous slide if you still need it</a:t>
+            </a:r>
+          </a:p>
+          <a:p>
+            <a:r>
+              <a:rPr lang="en-US" dirty="0">
+                <a:latin typeface="Arial" panose="020B0604020202020204" pitchFamily="34" charset="0"/>
+                <a:cs typeface="Arial" panose="020B0604020202020204" pitchFamily="34" charset="0"/>
+              </a:rPr>
+              <a:t>OH Check-Ins</a:t>
+            </a:r>
+          </a:p>
+          <a:p>
+            <a:pPr lvl="1"/>
+            <a:r>
+              <a:rPr lang="en-US" dirty="0">
+                <a:latin typeface="Arial" panose="020B0604020202020204" pitchFamily="34" charset="0"/>
+                <a:cs typeface="Arial" panose="020B0604020202020204" pitchFamily="34" charset="0"/>
+              </a:rPr>
+              <a:t>This is going to start THIS week. Did everybody receive the information about this? Any questions?</a:t>
+            </a:r>
+          </a:p>
+          <a:p>
+            <a:pPr lvl="1"/>
+            <a:r>
+              <a:rPr lang="en-US" dirty="0">
+                <a:latin typeface="Arial" panose="020B0604020202020204" pitchFamily="34" charset="0"/>
+                <a:cs typeface="Arial" panose="020B0604020202020204" pitchFamily="34" charset="0"/>
+              </a:rPr>
+              <a:t>If you need to change weeks for a legitimate reason, email Elina (our OH head TA)</a:t>
+            </a:r>
+          </a:p>
+          <a:p>
+            <a:pPr lvl="1"/>
+            <a:r>
+              <a:rPr lang="en-US" dirty="0">
+                <a:latin typeface="Arial" panose="020B0604020202020204" pitchFamily="34" charset="0"/>
+                <a:cs typeface="Arial" panose="020B0604020202020204" pitchFamily="34" charset="0"/>
+              </a:rPr>
+              <a:t>One change from what I told you: You will NOT be allowed to glance at your submission. Sorry.</a:t>
+            </a:r>
+          </a:p>
+          <a:p>
+            <a:r>
+              <a:rPr lang="en-US" dirty="0">
+                <a:latin typeface="Arial" panose="020B0604020202020204" pitchFamily="34" charset="0"/>
+                <a:cs typeface="Arial" panose="020B0604020202020204" pitchFamily="34" charset="0"/>
+              </a:rPr>
+              <a:t>These slides are linked on the course webpage “slides” page.</a:t>
+            </a:r>
+          </a:p>
+          <a:p>
+            <a:r>
+              <a:rPr lang="en-US" dirty="0">
+                <a:latin typeface="Arial" panose="020B0604020202020204" pitchFamily="34" charset="0"/>
+                <a:cs typeface="Arial" panose="020B0604020202020204" pitchFamily="34" charset="0"/>
+              </a:rPr>
+              <a:t>Today we will continue Module 3 – Turing Machines.</a:t>
+            </a:r>
+          </a:p>
+        </p:txBody>
+      </p:sp>
+    </p:spTree>
+    <p:extLst>
+      <p:ext uri="{BB962C8B-B14F-4D97-AF65-F5344CB8AC3E}">
+        <p14:creationId xmlns:p14="http://schemas.microsoft.com/office/powerpoint/2010/main" val="3939114034"/>
+      </p:ext>
+    </p:extLst>
+  </p:cSld>
+  <p:clrMapOvr>
+    <a:masterClrMapping/>
+  </p:clrMapOvr>
+</p:sld>
+</file>
+
+<file path=ppt/slides/slide19.xml><?xml version="1.0" encoding="utf-8"?>
+<p:sld xmlns:a="http://schemas.openxmlformats.org/drawingml/2006/main" xmlns:r="http://schemas.openxmlformats.org/officeDocument/2006/relationships" xmlns:p="http://schemas.openxmlformats.org/presentationml/2006/main">
+  <p:cSld>
+    <p:spTree>
+      <p:nvGrpSpPr>
         <p:cNvPr id="1" name=""/>
         <p:cNvGrpSpPr/>
         <p:nvPr/>
@@ -15470,7 +15772,7 @@
           <p:nvPr>
             <p:extLst>
               <p:ext uri="{D42A27DB-BD31-4B8C-83A1-F6EECF244321}">
-                <p14:modId xmlns:p14="http://schemas.microsoft.com/office/powerpoint/2010/main" val="3984857604"/>
+                <p14:modId xmlns:p14="http://schemas.microsoft.com/office/powerpoint/2010/main" val="447766819"/>
               </p:ext>
             </p:extLst>
           </p:nvPr>
@@ -15566,7 +15868,7 @@
                       <a:pPr algn="ctr"/>
                       <a:r>
                         <a:rPr lang="en-US" i="0" dirty="0"/>
-                        <a:t>11</a:t>
+                        <a:t>12</a:t>
                       </a:r>
                     </a:p>
                   </a:txBody>
@@ -15580,7 +15882,7 @@
                       <a:pPr algn="ctr"/>
                       <a:r>
                         <a:rPr lang="en-US" i="0" dirty="0"/>
-                        <a:t>12</a:t>
+                        <a:t>13</a:t>
                       </a:r>
                     </a:p>
                   </a:txBody>
@@ -15594,7 +15896,7 @@
                       <a:pPr algn="ctr"/>
                       <a:r>
                         <a:rPr lang="en-US" b="1" i="0" dirty="0"/>
-                        <a:t>91.7%</a:t>
+                        <a:t>92.3%</a:t>
                       </a:r>
                     </a:p>
                   </a:txBody>
@@ -15625,7 +15927,7 @@
           <p:nvPr>
             <p:extLst>
               <p:ext uri="{D42A27DB-BD31-4B8C-83A1-F6EECF244321}">
-                <p14:modId xmlns:p14="http://schemas.microsoft.com/office/powerpoint/2010/main" val="3871930671"/>
+                <p14:modId xmlns:p14="http://schemas.microsoft.com/office/powerpoint/2010/main" val="1350943963"/>
               </p:ext>
             </p:extLst>
           </p:nvPr>
@@ -15962,7 +16264,7 @@
                       <a:pPr algn="ctr"/>
                       <a:r>
                         <a:rPr lang="en-US" dirty="0"/>
-                        <a:t>137</a:t>
+                        <a:t>194</a:t>
                       </a:r>
                     </a:p>
                   </a:txBody>
@@ -15976,7 +16278,7 @@
                       <a:pPr algn="ctr"/>
                       <a:r>
                         <a:rPr lang="en-US" b="0" i="0" dirty="0"/>
-                        <a:t>40.87%</a:t>
+                        <a:t>28.87%</a:t>
                       </a:r>
                       <a:endParaRPr lang="en-US" b="0" dirty="0"/>
                     </a:p>
@@ -16153,7 +16455,7 @@
                       <a:pPr algn="ctr"/>
                       <a:r>
                         <a:rPr lang="en-US" b="1" dirty="0"/>
-                        <a:t>766</a:t>
+                        <a:t>823</a:t>
                       </a:r>
                     </a:p>
                   </a:txBody>
@@ -16167,7 +16469,7 @@
                       <a:pPr algn="ctr"/>
                       <a:r>
                         <a:rPr lang="en-US" b="1" i="0" dirty="0"/>
-                        <a:t>51.17%</a:t>
+                        <a:t>47.63%</a:t>
                       </a:r>
                       <a:endParaRPr lang="en-US" b="1" dirty="0"/>
                     </a:p>
@@ -16813,7 +17115,7 @@
           <p:nvPr>
             <p:extLst>
               <p:ext uri="{D42A27DB-BD31-4B8C-83A1-F6EECF244321}">
-                <p14:modId xmlns:p14="http://schemas.microsoft.com/office/powerpoint/2010/main" val="1975063589"/>
+                <p14:modId xmlns:p14="http://schemas.microsoft.com/office/powerpoint/2010/main" val="3411547853"/>
               </p:ext>
             </p:extLst>
           </p:nvPr>
@@ -16909,7 +17211,7 @@
                       <a:pPr algn="ctr"/>
                       <a:r>
                         <a:rPr lang="en-US" i="0" dirty="0"/>
-                        <a:t>12</a:t>
+                        <a:t>13</a:t>
                       </a:r>
                     </a:p>
                   </a:txBody>
@@ -16923,7 +17225,7 @@
                       <a:pPr algn="ctr"/>
                       <a:r>
                         <a:rPr lang="en-US" i="0" dirty="0"/>
-                        <a:t>12</a:t>
+                        <a:t>13</a:t>
                       </a:r>
                     </a:p>
                   </a:txBody>
@@ -19547,7 +19849,19 @@
 </p:tagLst>
 </file>
 
+<file path=ppt/tags/tag39.xml><?xml version="1.0" encoding="utf-8"?>
+<p:tagLst xmlns:a="http://schemas.openxmlformats.org/drawingml/2006/main" xmlns:r="http://schemas.openxmlformats.org/officeDocument/2006/relationships" xmlns:p="http://schemas.openxmlformats.org/presentationml/2006/main">
+  <p:tag name="_INSTRUCTOR VIEW19C14C36-AC8E-43BC-9DB6-C2AAF774C7DC|PANE__TAG" val="_"/>
+</p:tagLst>
+</file>
+
 <file path=ppt/tags/tag4.xml><?xml version="1.0" encoding="utf-8"?>
+<p:tagLst xmlns:a="http://schemas.openxmlformats.org/drawingml/2006/main" xmlns:r="http://schemas.openxmlformats.org/officeDocument/2006/relationships" xmlns:p="http://schemas.openxmlformats.org/presentationml/2006/main">
+  <p:tag name="_INSTRUCTOR VIEW19C14C36-AC8E-43BC-9DB6-C2AAF774C7DC|PANE__TAG" val="_"/>
+</p:tagLst>
+</file>
+
+<file path=ppt/tags/tag40.xml><?xml version="1.0" encoding="utf-8"?>
 <p:tagLst xmlns:a="http://schemas.openxmlformats.org/drawingml/2006/main" xmlns:r="http://schemas.openxmlformats.org/officeDocument/2006/relationships" xmlns:p="http://schemas.openxmlformats.org/presentationml/2006/main">
   <p:tag name="_INSTRUCTOR VIEW19C14C36-AC8E-43BC-9DB6-C2AAF774C7DC|PANE__TAG" val="_"/>
 </p:tagLst>

--- a/slides/00-DailyAnnouncements.pptx
+++ b/slides/00-DailyAnnouncements.pptx
@@ -5,7 +5,7 @@
     <p:sldMasterId id="2147484006" r:id="rId1"/>
   </p:sldMasterIdLst>
   <p:notesMasterIdLst>
-    <p:notesMasterId r:id="rId21"/>
+    <p:notesMasterId r:id="rId22"/>
   </p:notesMasterIdLst>
   <p:sldIdLst>
     <p:sldId id="256" r:id="rId2"/>
@@ -26,7 +26,8 @@
     <p:sldId id="529" r:id="rId17"/>
     <p:sldId id="530" r:id="rId18"/>
     <p:sldId id="531" r:id="rId19"/>
-    <p:sldId id="515" r:id="rId20"/>
+    <p:sldId id="532" r:id="rId20"/>
+    <p:sldId id="515" r:id="rId21"/>
   </p:sldIdLst>
   <p:sldSz cx="12192000" cy="6858000"/>
   <p:notesSz cx="6858000" cy="9144000"/>
@@ -215,7 +216,7 @@
           <a:p>
             <a:fld id="{C5B45307-6ED4-B142-BD64-10F739779302}" type="datetimeFigureOut">
               <a:rPr lang="en-US" smtClean="0"/>
-              <a:t>10/13/26</a:t>
+              <a:t>10/15/26</a:t>
             </a:fld>
             <a:endParaRPr lang="en-US"/>
           </a:p>
@@ -623,7 +624,7 @@
           <a:noFill/>
           <a:extLst>
             <a:ext uri="{909E8E84-426E-40dd-AFC4-6F175D3DCCD1}">
-              <a14:hiddenFill xmlns:a14="http://schemas.microsoft.com/office/drawing/2010/main" xmlns="">
+              <a14:hiddenFill xmlns="" xmlns:a14="http://schemas.microsoft.com/office/drawing/2010/main">
                 <a:solidFill>
                   <a:srgbClr val="FFFFFF"/>
                 </a:solidFill>
@@ -682,7 +683,7 @@
             </a:ln>
             <a:extLst>
               <a:ext uri="{91240B29-F687-4f45-9708-019B960494DF}">
-                <a14:hiddenLine xmlns:a14="http://schemas.microsoft.com/office/drawing/2010/main" xmlns="" w="9525">
+                <a14:hiddenLine xmlns="" xmlns:a14="http://schemas.microsoft.com/office/drawing/2010/main" w="9525">
                   <a:solidFill>
                     <a:srgbClr val="000000"/>
                   </a:solidFill>
@@ -772,7 +773,7 @@
             </a:ln>
             <a:extLst>
               <a:ext uri="{91240B29-F687-4f45-9708-019B960494DF}">
-                <a14:hiddenLine xmlns:a14="http://schemas.microsoft.com/office/drawing/2010/main" xmlns="" w="9525">
+                <a14:hiddenLine xmlns="" xmlns:a14="http://schemas.microsoft.com/office/drawing/2010/main" w="9525">
                   <a:solidFill>
                     <a:srgbClr val="000000"/>
                   </a:solidFill>
@@ -862,7 +863,7 @@
             </a:ln>
             <a:extLst>
               <a:ext uri="{91240B29-F687-4f45-9708-019B960494DF}">
-                <a14:hiddenLine xmlns:a14="http://schemas.microsoft.com/office/drawing/2010/main" xmlns="" w="9525">
+                <a14:hiddenLine xmlns="" xmlns:a14="http://schemas.microsoft.com/office/drawing/2010/main" w="9525">
                   <a:solidFill>
                     <a:srgbClr val="000000"/>
                   </a:solidFill>
@@ -896,7 +897,7 @@
             </a:ln>
             <a:extLst>
               <a:ext uri="{91240B29-F687-4f45-9708-019B960494DF}">
-                <a14:hiddenLine xmlns:a14="http://schemas.microsoft.com/office/drawing/2010/main" xmlns="" w="9525">
+                <a14:hiddenLine xmlns="" xmlns:a14="http://schemas.microsoft.com/office/drawing/2010/main" w="9525">
                   <a:solidFill>
                     <a:srgbClr val="000000"/>
                   </a:solidFill>
@@ -986,7 +987,7 @@
             </a:ln>
             <a:extLst>
               <a:ext uri="{91240B29-F687-4f45-9708-019B960494DF}">
-                <a14:hiddenLine xmlns:a14="http://schemas.microsoft.com/office/drawing/2010/main" xmlns="" w="9525">
+                <a14:hiddenLine xmlns="" xmlns:a14="http://schemas.microsoft.com/office/drawing/2010/main" w="9525">
                   <a:solidFill>
                     <a:srgbClr val="000000"/>
                   </a:solidFill>
@@ -1048,7 +1049,7 @@
             </a:ln>
             <a:extLst>
               <a:ext uri="{91240B29-F687-4f45-9708-019B960494DF}">
-                <a14:hiddenLine xmlns:a14="http://schemas.microsoft.com/office/drawing/2010/main" xmlns="" w="9525">
+                <a14:hiddenLine xmlns="" xmlns:a14="http://schemas.microsoft.com/office/drawing/2010/main" w="9525">
                   <a:solidFill>
                     <a:srgbClr val="000000"/>
                   </a:solidFill>
@@ -1110,7 +1111,7 @@
             </a:ln>
             <a:extLst>
               <a:ext uri="{91240B29-F687-4f45-9708-019B960494DF}">
-                <a14:hiddenLine xmlns:a14="http://schemas.microsoft.com/office/drawing/2010/main" xmlns="" w="9525">
+                <a14:hiddenLine xmlns="" xmlns:a14="http://schemas.microsoft.com/office/drawing/2010/main" w="9525">
                   <a:solidFill>
                     <a:srgbClr val="000000"/>
                   </a:solidFill>
@@ -1200,7 +1201,7 @@
             </a:ln>
             <a:extLst>
               <a:ext uri="{91240B29-F687-4f45-9708-019B960494DF}">
-                <a14:hiddenLine xmlns:a14="http://schemas.microsoft.com/office/drawing/2010/main" xmlns="" w="9525">
+                <a14:hiddenLine xmlns="" xmlns:a14="http://schemas.microsoft.com/office/drawing/2010/main" w="9525">
                   <a:solidFill>
                     <a:srgbClr val="000000"/>
                   </a:solidFill>
@@ -1262,7 +1263,7 @@
             </a:ln>
             <a:extLst>
               <a:ext uri="{91240B29-F687-4f45-9708-019B960494DF}">
-                <a14:hiddenLine xmlns:a14="http://schemas.microsoft.com/office/drawing/2010/main" xmlns="" w="9525">
+                <a14:hiddenLine xmlns="" xmlns:a14="http://schemas.microsoft.com/office/drawing/2010/main" w="9525">
                   <a:solidFill>
                     <a:srgbClr val="000000"/>
                   </a:solidFill>
@@ -1324,7 +1325,7 @@
             </a:ln>
             <a:extLst>
               <a:ext uri="{91240B29-F687-4f45-9708-019B960494DF}">
-                <a14:hiddenLine xmlns:a14="http://schemas.microsoft.com/office/drawing/2010/main" xmlns="" w="9525">
+                <a14:hiddenLine xmlns="" xmlns:a14="http://schemas.microsoft.com/office/drawing/2010/main" w="9525">
                   <a:solidFill>
                     <a:srgbClr val="000000"/>
                   </a:solidFill>
@@ -1414,7 +1415,7 @@
             </a:ln>
             <a:extLst>
               <a:ext uri="{91240B29-F687-4f45-9708-019B960494DF}">
-                <a14:hiddenLine xmlns:a14="http://schemas.microsoft.com/office/drawing/2010/main" xmlns="" w="9525">
+                <a14:hiddenLine xmlns="" xmlns:a14="http://schemas.microsoft.com/office/drawing/2010/main" w="9525">
                   <a:solidFill>
                     <a:srgbClr val="000000"/>
                   </a:solidFill>
@@ -1504,7 +1505,7 @@
             </a:ln>
             <a:extLst>
               <a:ext uri="{91240B29-F687-4f45-9708-019B960494DF}">
-                <a14:hiddenLine xmlns:a14="http://schemas.microsoft.com/office/drawing/2010/main" xmlns="" w="9525">
+                <a14:hiddenLine xmlns="" xmlns:a14="http://schemas.microsoft.com/office/drawing/2010/main" w="9525">
                   <a:solidFill>
                     <a:srgbClr val="000000"/>
                   </a:solidFill>
@@ -1566,7 +1567,7 @@
             </a:ln>
             <a:extLst>
               <a:ext uri="{91240B29-F687-4f45-9708-019B960494DF}">
-                <a14:hiddenLine xmlns:a14="http://schemas.microsoft.com/office/drawing/2010/main" xmlns="" w="9525">
+                <a14:hiddenLine xmlns="" xmlns:a14="http://schemas.microsoft.com/office/drawing/2010/main" w="9525">
                   <a:solidFill>
                     <a:srgbClr val="000000"/>
                   </a:solidFill>
@@ -1676,7 +1677,7 @@
             </a:ln>
             <a:extLst>
               <a:ext uri="{91240B29-F687-4f45-9708-019B960494DF}">
-                <a14:hiddenLine xmlns:a14="http://schemas.microsoft.com/office/drawing/2010/main" xmlns="" w="9525">
+                <a14:hiddenLine xmlns="" xmlns:a14="http://schemas.microsoft.com/office/drawing/2010/main" w="9525">
                   <a:solidFill>
                     <a:srgbClr val="000000"/>
                   </a:solidFill>
@@ -1738,7 +1739,7 @@
             </a:ln>
             <a:extLst>
               <a:ext uri="{91240B29-F687-4f45-9708-019B960494DF}">
-                <a14:hiddenLine xmlns:a14="http://schemas.microsoft.com/office/drawing/2010/main" xmlns="" w="9525">
+                <a14:hiddenLine xmlns="" xmlns:a14="http://schemas.microsoft.com/office/drawing/2010/main" w="9525">
                   <a:solidFill>
                     <a:srgbClr val="000000"/>
                   </a:solidFill>
@@ -1828,7 +1829,7 @@
             </a:ln>
             <a:extLst>
               <a:ext uri="{91240B29-F687-4f45-9708-019B960494DF}">
-                <a14:hiddenLine xmlns:a14="http://schemas.microsoft.com/office/drawing/2010/main" xmlns="" w="9525">
+                <a14:hiddenLine xmlns="" xmlns:a14="http://schemas.microsoft.com/office/drawing/2010/main" w="9525">
                   <a:solidFill>
                     <a:srgbClr val="000000"/>
                   </a:solidFill>
@@ -1918,7 +1919,7 @@
             </a:ln>
             <a:extLst>
               <a:ext uri="{91240B29-F687-4f45-9708-019B960494DF}">
-                <a14:hiddenLine xmlns:a14="http://schemas.microsoft.com/office/drawing/2010/main" xmlns="" w="9525">
+                <a14:hiddenLine xmlns="" xmlns:a14="http://schemas.microsoft.com/office/drawing/2010/main" w="9525">
                   <a:solidFill>
                     <a:srgbClr val="000000"/>
                   </a:solidFill>
@@ -1980,7 +1981,7 @@
             </a:ln>
             <a:extLst>
               <a:ext uri="{91240B29-F687-4f45-9708-019B960494DF}">
-                <a14:hiddenLine xmlns:a14="http://schemas.microsoft.com/office/drawing/2010/main" xmlns="" w="9525">
+                <a14:hiddenLine xmlns="" xmlns:a14="http://schemas.microsoft.com/office/drawing/2010/main" w="9525">
                   <a:solidFill>
                     <a:srgbClr val="000000"/>
                   </a:solidFill>
@@ -2070,7 +2071,7 @@
             </a:ln>
             <a:extLst>
               <a:ext uri="{91240B29-F687-4f45-9708-019B960494DF}">
-                <a14:hiddenLine xmlns:a14="http://schemas.microsoft.com/office/drawing/2010/main" xmlns="" w="9525">
+                <a14:hiddenLine xmlns="" xmlns:a14="http://schemas.microsoft.com/office/drawing/2010/main" w="9525">
                   <a:solidFill>
                     <a:srgbClr val="000000"/>
                   </a:solidFill>
@@ -2160,7 +2161,7 @@
             </a:ln>
             <a:extLst>
               <a:ext uri="{91240B29-F687-4f45-9708-019B960494DF}">
-                <a14:hiddenLine xmlns:a14="http://schemas.microsoft.com/office/drawing/2010/main" xmlns="" w="9525">
+                <a14:hiddenLine xmlns="" xmlns:a14="http://schemas.microsoft.com/office/drawing/2010/main" w="9525">
                   <a:solidFill>
                     <a:srgbClr val="000000"/>
                   </a:solidFill>
@@ -2216,7 +2217,7 @@
             </a:ln>
             <a:extLst>
               <a:ext uri="{91240B29-F687-4f45-9708-019B960494DF}">
-                <a14:hiddenLine xmlns:a14="http://schemas.microsoft.com/office/drawing/2010/main" xmlns="" w="9525">
+                <a14:hiddenLine xmlns="" xmlns:a14="http://schemas.microsoft.com/office/drawing/2010/main" w="9525">
                   <a:solidFill>
                     <a:srgbClr val="000000"/>
                   </a:solidFill>
@@ -2306,7 +2307,7 @@
             </a:ln>
             <a:extLst>
               <a:ext uri="{91240B29-F687-4f45-9708-019B960494DF}">
-                <a14:hiddenLine xmlns:a14="http://schemas.microsoft.com/office/drawing/2010/main" xmlns="" w="9525">
+                <a14:hiddenLine xmlns="" xmlns:a14="http://schemas.microsoft.com/office/drawing/2010/main" w="9525">
                   <a:solidFill>
                     <a:srgbClr val="000000"/>
                   </a:solidFill>
@@ -2362,7 +2363,7 @@
             </a:ln>
             <a:extLst>
               <a:ext uri="{91240B29-F687-4f45-9708-019B960494DF}">
-                <a14:hiddenLine xmlns:a14="http://schemas.microsoft.com/office/drawing/2010/main" xmlns="" w="9525">
+                <a14:hiddenLine xmlns="" xmlns:a14="http://schemas.microsoft.com/office/drawing/2010/main" w="9525">
                   <a:solidFill>
                     <a:srgbClr val="000000"/>
                   </a:solidFill>
@@ -2452,7 +2453,7 @@
             </a:ln>
             <a:extLst>
               <a:ext uri="{91240B29-F687-4f45-9708-019B960494DF}">
-                <a14:hiddenLine xmlns:a14="http://schemas.microsoft.com/office/drawing/2010/main" xmlns="" w="9525">
+                <a14:hiddenLine xmlns="" xmlns:a14="http://schemas.microsoft.com/office/drawing/2010/main" w="9525">
                   <a:solidFill>
                     <a:srgbClr val="000000"/>
                   </a:solidFill>
@@ -2520,7 +2521,7 @@
             </a:ln>
             <a:extLst>
               <a:ext uri="{91240B29-F687-4f45-9708-019B960494DF}">
-                <a14:hiddenLine xmlns:a14="http://schemas.microsoft.com/office/drawing/2010/main" xmlns="" w="9525">
+                <a14:hiddenLine xmlns="" xmlns:a14="http://schemas.microsoft.com/office/drawing/2010/main" w="9525">
                   <a:solidFill>
                     <a:srgbClr val="000000"/>
                   </a:solidFill>
@@ -2610,7 +2611,7 @@
             </a:ln>
             <a:extLst>
               <a:ext uri="{91240B29-F687-4f45-9708-019B960494DF}">
-                <a14:hiddenLine xmlns:a14="http://schemas.microsoft.com/office/drawing/2010/main" xmlns="" w="9525">
+                <a14:hiddenLine xmlns="" xmlns:a14="http://schemas.microsoft.com/office/drawing/2010/main" w="9525">
                   <a:solidFill>
                     <a:srgbClr val="000000"/>
                   </a:solidFill>
@@ -2678,7 +2679,7 @@
             </a:ln>
             <a:extLst>
               <a:ext uri="{91240B29-F687-4f45-9708-019B960494DF}">
-                <a14:hiddenLine xmlns:a14="http://schemas.microsoft.com/office/drawing/2010/main" xmlns="" w="9525">
+                <a14:hiddenLine xmlns="" xmlns:a14="http://schemas.microsoft.com/office/drawing/2010/main" w="9525">
                   <a:solidFill>
                     <a:srgbClr val="000000"/>
                   </a:solidFill>
@@ -2768,7 +2769,7 @@
             </a:ln>
             <a:extLst>
               <a:ext uri="{91240B29-F687-4f45-9708-019B960494DF}">
-                <a14:hiddenLine xmlns:a14="http://schemas.microsoft.com/office/drawing/2010/main" xmlns="" w="9525">
+                <a14:hiddenLine xmlns="" xmlns:a14="http://schemas.microsoft.com/office/drawing/2010/main" w="9525">
                   <a:solidFill>
                     <a:srgbClr val="000000"/>
                   </a:solidFill>
@@ -2802,7 +2803,7 @@
             </a:ln>
             <a:extLst>
               <a:ext uri="{91240B29-F687-4f45-9708-019B960494DF}">
-                <a14:hiddenLine xmlns:a14="http://schemas.microsoft.com/office/drawing/2010/main" xmlns="" w="9525">
+                <a14:hiddenLine xmlns="" xmlns:a14="http://schemas.microsoft.com/office/drawing/2010/main" w="9525">
                   <a:solidFill>
                     <a:srgbClr val="000000"/>
                   </a:solidFill>
@@ -2892,7 +2893,7 @@
             </a:ln>
             <a:extLst>
               <a:ext uri="{91240B29-F687-4f45-9708-019B960494DF}">
-                <a14:hiddenLine xmlns:a14="http://schemas.microsoft.com/office/drawing/2010/main" xmlns="" w="9525">
+                <a14:hiddenLine xmlns="" xmlns:a14="http://schemas.microsoft.com/office/drawing/2010/main" w="9525">
                   <a:solidFill>
                     <a:srgbClr val="000000"/>
                   </a:solidFill>
@@ -2954,7 +2955,7 @@
             </a:ln>
             <a:extLst>
               <a:ext uri="{91240B29-F687-4f45-9708-019B960494DF}">
-                <a14:hiddenLine xmlns:a14="http://schemas.microsoft.com/office/drawing/2010/main" xmlns="" w="9525">
+                <a14:hiddenLine xmlns="" xmlns:a14="http://schemas.microsoft.com/office/drawing/2010/main" w="9525">
                   <a:solidFill>
                     <a:srgbClr val="000000"/>
                   </a:solidFill>
@@ -3016,7 +3017,7 @@
             </a:ln>
             <a:extLst>
               <a:ext uri="{91240B29-F687-4f45-9708-019B960494DF}">
-                <a14:hiddenLine xmlns:a14="http://schemas.microsoft.com/office/drawing/2010/main" xmlns="" w="9525">
+                <a14:hiddenLine xmlns="" xmlns:a14="http://schemas.microsoft.com/office/drawing/2010/main" w="9525">
                   <a:solidFill>
                     <a:srgbClr val="000000"/>
                   </a:solidFill>
@@ -3106,7 +3107,7 @@
             </a:ln>
             <a:extLst>
               <a:ext uri="{91240B29-F687-4f45-9708-019B960494DF}">
-                <a14:hiddenLine xmlns:a14="http://schemas.microsoft.com/office/drawing/2010/main" xmlns="" w="9525">
+                <a14:hiddenLine xmlns="" xmlns:a14="http://schemas.microsoft.com/office/drawing/2010/main" w="9525">
                   <a:solidFill>
                     <a:srgbClr val="000000"/>
                   </a:solidFill>
@@ -3174,7 +3175,7 @@
             </a:ln>
             <a:extLst>
               <a:ext uri="{91240B29-F687-4f45-9708-019B960494DF}">
-                <a14:hiddenLine xmlns:a14="http://schemas.microsoft.com/office/drawing/2010/main" xmlns="" w="9525">
+                <a14:hiddenLine xmlns="" xmlns:a14="http://schemas.microsoft.com/office/drawing/2010/main" w="9525">
                   <a:solidFill>
                     <a:srgbClr val="000000"/>
                   </a:solidFill>
@@ -3236,7 +3237,7 @@
             </a:ln>
             <a:extLst>
               <a:ext uri="{91240B29-F687-4f45-9708-019B960494DF}">
-                <a14:hiddenLine xmlns:a14="http://schemas.microsoft.com/office/drawing/2010/main" xmlns="" w="9525">
+                <a14:hiddenLine xmlns="" xmlns:a14="http://schemas.microsoft.com/office/drawing/2010/main" w="9525">
                   <a:solidFill>
                     <a:srgbClr val="000000"/>
                   </a:solidFill>
@@ -3326,7 +3327,7 @@
             </a:ln>
             <a:extLst>
               <a:ext uri="{91240B29-F687-4f45-9708-019B960494DF}">
-                <a14:hiddenLine xmlns:a14="http://schemas.microsoft.com/office/drawing/2010/main" xmlns="" w="9525">
+                <a14:hiddenLine xmlns="" xmlns:a14="http://schemas.microsoft.com/office/drawing/2010/main" w="9525">
                   <a:solidFill>
                     <a:srgbClr val="000000"/>
                   </a:solidFill>
@@ -3388,7 +3389,7 @@
             </a:ln>
             <a:extLst>
               <a:ext uri="{91240B29-F687-4f45-9708-019B960494DF}">
-                <a14:hiddenLine xmlns:a14="http://schemas.microsoft.com/office/drawing/2010/main" xmlns="" w="9525">
+                <a14:hiddenLine xmlns="" xmlns:a14="http://schemas.microsoft.com/office/drawing/2010/main" w="9525">
                   <a:solidFill>
                     <a:srgbClr val="000000"/>
                   </a:solidFill>
@@ -3478,7 +3479,7 @@
             </a:ln>
             <a:extLst>
               <a:ext uri="{91240B29-F687-4f45-9708-019B960494DF}">
-                <a14:hiddenLine xmlns:a14="http://schemas.microsoft.com/office/drawing/2010/main" xmlns="" w="9525">
+                <a14:hiddenLine xmlns="" xmlns:a14="http://schemas.microsoft.com/office/drawing/2010/main" w="9525">
                   <a:solidFill>
                     <a:srgbClr val="000000"/>
                   </a:solidFill>
@@ -3540,7 +3541,7 @@
             </a:ln>
             <a:extLst>
               <a:ext uri="{91240B29-F687-4f45-9708-019B960494DF}">
-                <a14:hiddenLine xmlns:a14="http://schemas.microsoft.com/office/drawing/2010/main" xmlns="" w="9525">
+                <a14:hiddenLine xmlns="" xmlns:a14="http://schemas.microsoft.com/office/drawing/2010/main" w="9525">
                   <a:solidFill>
                     <a:srgbClr val="000000"/>
                   </a:solidFill>
@@ -3630,7 +3631,7 @@
             </a:ln>
             <a:extLst>
               <a:ext uri="{91240B29-F687-4f45-9708-019B960494DF}">
-                <a14:hiddenLine xmlns:a14="http://schemas.microsoft.com/office/drawing/2010/main" xmlns="" w="9525">
+                <a14:hiddenLine xmlns="" xmlns:a14="http://schemas.microsoft.com/office/drawing/2010/main" w="9525">
                   <a:solidFill>
                     <a:srgbClr val="000000"/>
                   </a:solidFill>
@@ -3664,7 +3665,7 @@
             </a:ln>
             <a:extLst>
               <a:ext uri="{91240B29-F687-4f45-9708-019B960494DF}">
-                <a14:hiddenLine xmlns:a14="http://schemas.microsoft.com/office/drawing/2010/main" xmlns="" w="9525">
+                <a14:hiddenLine xmlns="" xmlns:a14="http://schemas.microsoft.com/office/drawing/2010/main" w="9525">
                   <a:solidFill>
                     <a:srgbClr val="000000"/>
                   </a:solidFill>
@@ -3729,7 +3730,7 @@
             </a:ln>
             <a:extLst>
               <a:ext uri="{91240B29-F687-4f45-9708-019B960494DF}">
-                <a14:hiddenLine xmlns:a14="http://schemas.microsoft.com/office/drawing/2010/main" xmlns="" w="9525">
+                <a14:hiddenLine xmlns="" xmlns:a14="http://schemas.microsoft.com/office/drawing/2010/main" w="9525">
                   <a:solidFill>
                     <a:srgbClr val="000000"/>
                   </a:solidFill>
@@ -3819,7 +3820,7 @@
             </a:ln>
             <a:extLst>
               <a:ext uri="{91240B29-F687-4f45-9708-019B960494DF}">
-                <a14:hiddenLine xmlns:a14="http://schemas.microsoft.com/office/drawing/2010/main" xmlns="" w="9525">
+                <a14:hiddenLine xmlns="" xmlns:a14="http://schemas.microsoft.com/office/drawing/2010/main" w="9525">
                   <a:solidFill>
                     <a:srgbClr val="000000"/>
                   </a:solidFill>
@@ -3881,7 +3882,7 @@
             </a:ln>
             <a:extLst>
               <a:ext uri="{91240B29-F687-4f45-9708-019B960494DF}">
-                <a14:hiddenLine xmlns:a14="http://schemas.microsoft.com/office/drawing/2010/main" xmlns="" w="9525">
+                <a14:hiddenLine xmlns="" xmlns:a14="http://schemas.microsoft.com/office/drawing/2010/main" w="9525">
                   <a:solidFill>
                     <a:srgbClr val="000000"/>
                   </a:solidFill>
@@ -3971,7 +3972,7 @@
             </a:ln>
             <a:extLst>
               <a:ext uri="{91240B29-F687-4f45-9708-019B960494DF}">
-                <a14:hiddenLine xmlns:a14="http://schemas.microsoft.com/office/drawing/2010/main" xmlns="" w="9525">
+                <a14:hiddenLine xmlns="" xmlns:a14="http://schemas.microsoft.com/office/drawing/2010/main" w="9525">
                   <a:solidFill>
                     <a:srgbClr val="000000"/>
                   </a:solidFill>
@@ -4061,7 +4062,7 @@
             </a:ln>
             <a:extLst>
               <a:ext uri="{91240B29-F687-4f45-9708-019B960494DF}">
-                <a14:hiddenLine xmlns:a14="http://schemas.microsoft.com/office/drawing/2010/main" xmlns="" w="9525">
+                <a14:hiddenLine xmlns="" xmlns:a14="http://schemas.microsoft.com/office/drawing/2010/main" w="9525">
                   <a:solidFill>
                     <a:srgbClr val="000000"/>
                   </a:solidFill>
@@ -4126,7 +4127,7 @@
             </a:ln>
             <a:extLst>
               <a:ext uri="{91240B29-F687-4f45-9708-019B960494DF}">
-                <a14:hiddenLine xmlns:a14="http://schemas.microsoft.com/office/drawing/2010/main" xmlns="" w="9525">
+                <a14:hiddenLine xmlns="" xmlns:a14="http://schemas.microsoft.com/office/drawing/2010/main" w="9525">
                   <a:solidFill>
                     <a:srgbClr val="000000"/>
                   </a:solidFill>
@@ -4188,7 +4189,7 @@
             </a:ln>
             <a:extLst>
               <a:ext uri="{91240B29-F687-4f45-9708-019B960494DF}">
-                <a14:hiddenLine xmlns:a14="http://schemas.microsoft.com/office/drawing/2010/main" xmlns="" w="9525">
+                <a14:hiddenLine xmlns="" xmlns:a14="http://schemas.microsoft.com/office/drawing/2010/main" w="9525">
                   <a:solidFill>
                     <a:srgbClr val="000000"/>
                   </a:solidFill>
@@ -4278,7 +4279,7 @@
             </a:ln>
             <a:extLst>
               <a:ext uri="{91240B29-F687-4f45-9708-019B960494DF}">
-                <a14:hiddenLine xmlns:a14="http://schemas.microsoft.com/office/drawing/2010/main" xmlns="" w="9525">
+                <a14:hiddenLine xmlns="" xmlns:a14="http://schemas.microsoft.com/office/drawing/2010/main" w="9525">
                   <a:solidFill>
                     <a:srgbClr val="000000"/>
                   </a:solidFill>
@@ -4368,7 +4369,7 @@
             </a:ln>
             <a:extLst>
               <a:ext uri="{91240B29-F687-4f45-9708-019B960494DF}">
-                <a14:hiddenLine xmlns:a14="http://schemas.microsoft.com/office/drawing/2010/main" xmlns="" w="9525">
+                <a14:hiddenLine xmlns="" xmlns:a14="http://schemas.microsoft.com/office/drawing/2010/main" w="9525">
                   <a:solidFill>
                     <a:srgbClr val="000000"/>
                   </a:solidFill>
@@ -4430,7 +4431,7 @@
             </a:ln>
             <a:extLst>
               <a:ext uri="{91240B29-F687-4f45-9708-019B960494DF}">
-                <a14:hiddenLine xmlns:a14="http://schemas.microsoft.com/office/drawing/2010/main" xmlns="" w="9525">
+                <a14:hiddenLine xmlns="" xmlns:a14="http://schemas.microsoft.com/office/drawing/2010/main" w="9525">
                   <a:solidFill>
                     <a:srgbClr val="000000"/>
                   </a:solidFill>
@@ -4550,7 +4551,7 @@
             </a:ln>
             <a:extLst>
               <a:ext uri="{91240B29-F687-4f45-9708-019B960494DF}">
-                <a14:hiddenLine xmlns:a14="http://schemas.microsoft.com/office/drawing/2010/main" xmlns="" w="9525">
+                <a14:hiddenLine xmlns="" xmlns:a14="http://schemas.microsoft.com/office/drawing/2010/main" w="9525">
                   <a:solidFill>
                     <a:srgbClr val="000000"/>
                   </a:solidFill>
@@ -4618,7 +4619,7 @@
             </a:ln>
             <a:extLst>
               <a:ext uri="{91240B29-F687-4f45-9708-019B960494DF}">
-                <a14:hiddenLine xmlns:a14="http://schemas.microsoft.com/office/drawing/2010/main" xmlns="" w="9525">
+                <a14:hiddenLine xmlns="" xmlns:a14="http://schemas.microsoft.com/office/drawing/2010/main" w="9525">
                   <a:solidFill>
                     <a:srgbClr val="000000"/>
                   </a:solidFill>
@@ -4708,7 +4709,7 @@
             </a:ln>
             <a:extLst>
               <a:ext uri="{91240B29-F687-4f45-9708-019B960494DF}">
-                <a14:hiddenLine xmlns:a14="http://schemas.microsoft.com/office/drawing/2010/main" xmlns="" w="9525">
+                <a14:hiddenLine xmlns="" xmlns:a14="http://schemas.microsoft.com/office/drawing/2010/main" w="9525">
                   <a:solidFill>
                     <a:srgbClr val="000000"/>
                   </a:solidFill>
@@ -4848,7 +4849,7 @@
           <a:p>
             <a:fld id="{4313F670-7F9A-774D-B73D-573401E44297}" type="datetime1">
               <a:rPr lang="en-US" smtClean="0"/>
-              <a:t>10/13/26</a:t>
+              <a:t>10/15/26</a:t>
             </a:fld>
             <a:endParaRPr lang="en-US"/>
           </a:p>
@@ -5115,7 +5116,7 @@
           <a:p>
             <a:fld id="{446F9669-A8A7-2D40-9D01-B35FC337AA30}" type="datetime1">
               <a:rPr lang="en-US" smtClean="0"/>
-              <a:t>10/13/26</a:t>
+              <a:t>10/15/26</a:t>
             </a:fld>
             <a:endParaRPr lang="en-US"/>
           </a:p>
@@ -5311,7 +5312,7 @@
           <a:p>
             <a:fld id="{FA76CF18-F41B-6B48-B3E5-599E9795C2C3}" type="datetime1">
               <a:rPr lang="en-US" smtClean="0"/>
-              <a:t>10/13/26</a:t>
+              <a:t>10/15/26</a:t>
             </a:fld>
             <a:endParaRPr lang="en-US"/>
           </a:p>
@@ -5574,7 +5575,7 @@
           <a:p>
             <a:fld id="{B9654854-6457-164F-A077-6B3035079B82}" type="datetime1">
               <a:rPr lang="en-US" smtClean="0"/>
-              <a:t>10/13/26</a:t>
+              <a:t>10/15/26</a:t>
             </a:fld>
             <a:endParaRPr lang="en-US"/>
           </a:p>
@@ -6008,7 +6009,7 @@
           <a:p>
             <a:fld id="{CE3DBFD7-E611-8C40-AC73-0C29FF63F0CD}" type="datetime1">
               <a:rPr lang="en-US" smtClean="0"/>
-              <a:t>10/13/26</a:t>
+              <a:t>10/15/26</a:t>
             </a:fld>
             <a:endParaRPr lang="en-US"/>
           </a:p>
@@ -6554,7 +6555,7 @@
           <a:p>
             <a:fld id="{C8B63B06-0493-2840-9F37-30C9412BBF17}" type="datetime1">
               <a:rPr lang="en-US" smtClean="0"/>
-              <a:t>10/13/26</a:t>
+              <a:t>10/15/26</a:t>
             </a:fld>
             <a:endParaRPr lang="en-US"/>
           </a:p>
@@ -7274,7 +7275,7 @@
           <a:p>
             <a:fld id="{72B5C0FA-8C46-E84D-B6D7-B673F2CA0A0E}" type="datetime1">
               <a:rPr lang="en-US" smtClean="0"/>
-              <a:t>10/13/26</a:t>
+              <a:t>10/15/26</a:t>
             </a:fld>
             <a:endParaRPr lang="en-US"/>
           </a:p>
@@ -7444,7 +7445,7 @@
           <a:p>
             <a:fld id="{60B9CDE1-97B4-BF46-B69C-B86855B18820}" type="datetime1">
               <a:rPr lang="en-US" smtClean="0"/>
-              <a:t>10/13/26</a:t>
+              <a:t>10/15/26</a:t>
             </a:fld>
             <a:endParaRPr lang="en-US"/>
           </a:p>
@@ -7624,7 +7625,7 @@
           <a:p>
             <a:fld id="{BE51D3A4-F9E5-FD49-AA87-B395F50451DC}" type="datetime1">
               <a:rPr lang="en-US" smtClean="0"/>
-              <a:t>10/13/26</a:t>
+              <a:t>10/15/26</a:t>
             </a:fld>
             <a:endParaRPr lang="en-US"/>
           </a:p>
@@ -7794,7 +7795,7 @@
           <a:p>
             <a:fld id="{880DFB37-B0AE-9449-85EC-14F9C83B6084}" type="datetime1">
               <a:rPr lang="en-US" smtClean="0"/>
-              <a:t>10/13/26</a:t>
+              <a:t>10/15/26</a:t>
             </a:fld>
             <a:endParaRPr lang="en-US"/>
           </a:p>
@@ -8044,7 +8045,7 @@
           <a:p>
             <a:fld id="{C939124A-616E-6944-A21A-1839F5DBE7BB}" type="datetime1">
               <a:rPr lang="en-US" smtClean="0"/>
-              <a:t>10/13/26</a:t>
+              <a:t>10/15/26</a:t>
             </a:fld>
             <a:endParaRPr lang="en-US"/>
           </a:p>
@@ -8276,7 +8277,7 @@
           <a:p>
             <a:fld id="{C6E9A026-D48C-FD43-8676-CD625DD5D84B}" type="datetime1">
               <a:rPr lang="en-US" smtClean="0"/>
-              <a:t>10/13/26</a:t>
+              <a:t>10/15/26</a:t>
             </a:fld>
             <a:endParaRPr lang="en-US"/>
           </a:p>
@@ -8662,7 +8663,7 @@
           <a:p>
             <a:fld id="{EA35111E-23A3-1440-99A3-C4C665908E3D}" type="datetime1">
               <a:rPr lang="en-US" smtClean="0"/>
-              <a:t>10/13/26</a:t>
+              <a:t>10/15/26</a:t>
             </a:fld>
             <a:endParaRPr lang="en-US"/>
           </a:p>
@@ -8785,7 +8786,7 @@
           <a:p>
             <a:fld id="{249983B9-88EF-D74B-BA6D-6A3BF17C2B38}" type="datetime1">
               <a:rPr lang="en-US" smtClean="0"/>
-              <a:t>10/13/26</a:t>
+              <a:t>10/15/26</a:t>
             </a:fld>
             <a:endParaRPr lang="en-US"/>
           </a:p>
@@ -8880,7 +8881,7 @@
           <a:p>
             <a:fld id="{E2A00AEF-B4EC-084A-8DB8-A225C7981CBB}" type="datetime1">
               <a:rPr lang="en-US" smtClean="0"/>
-              <a:t>10/13/26</a:t>
+              <a:t>10/15/26</a:t>
             </a:fld>
             <a:endParaRPr lang="en-US"/>
           </a:p>
@@ -9129,7 +9130,7 @@
           <a:p>
             <a:fld id="{97860299-21CD-A94A-A7B0-44E787F8D42C}" type="datetime1">
               <a:rPr lang="en-US" smtClean="0"/>
-              <a:t>10/13/26</a:t>
+              <a:t>10/15/26</a:t>
             </a:fld>
             <a:endParaRPr lang="en-US"/>
           </a:p>
@@ -9414,7 +9415,7 @@
           <a:p>
             <a:fld id="{3DFD19CF-4E62-D246-BA61-7B528271315F}" type="datetime1">
               <a:rPr lang="en-US" smtClean="0"/>
-              <a:t>10/13/26</a:t>
+              <a:t>10/15/26</a:t>
             </a:fld>
             <a:endParaRPr lang="en-US"/>
           </a:p>
@@ -9537,7 +9538,7 @@
           <a:noFill/>
           <a:extLst>
             <a:ext uri="{909E8E84-426E-40dd-AFC4-6F175D3DCCD1}">
-              <a14:hiddenFill xmlns:a14="http://schemas.microsoft.com/office/drawing/2010/main" xmlns="">
+              <a14:hiddenFill xmlns="" xmlns:a14="http://schemas.microsoft.com/office/drawing/2010/main">
                 <a:solidFill>
                   <a:srgbClr val="FFFFFF"/>
                 </a:solidFill>
@@ -9611,7 +9612,7 @@
               </a:ln>
               <a:extLst>
                 <a:ext uri="{91240B29-F687-4f45-9708-019B960494DF}">
-                  <a14:hiddenLine xmlns:a14="http://schemas.microsoft.com/office/drawing/2010/main" xmlns="" w="9525">
+                  <a14:hiddenLine xmlns="" xmlns:a14="http://schemas.microsoft.com/office/drawing/2010/main" w="9525">
                     <a:solidFill>
                       <a:srgbClr val="000000"/>
                     </a:solidFill>
@@ -9701,7 +9702,7 @@
               </a:ln>
               <a:extLst>
                 <a:ext uri="{91240B29-F687-4f45-9708-019B960494DF}">
-                  <a14:hiddenLine xmlns:a14="http://schemas.microsoft.com/office/drawing/2010/main" xmlns="" w="9525">
+                  <a14:hiddenLine xmlns="" xmlns:a14="http://schemas.microsoft.com/office/drawing/2010/main" w="9525">
                     <a:solidFill>
                       <a:srgbClr val="000000"/>
                     </a:solidFill>
@@ -9791,7 +9792,7 @@
               </a:ln>
               <a:extLst>
                 <a:ext uri="{91240B29-F687-4f45-9708-019B960494DF}">
-                  <a14:hiddenLine xmlns:a14="http://schemas.microsoft.com/office/drawing/2010/main" xmlns="" w="9525">
+                  <a14:hiddenLine xmlns="" xmlns:a14="http://schemas.microsoft.com/office/drawing/2010/main" w="9525">
                     <a:solidFill>
                       <a:srgbClr val="000000"/>
                     </a:solidFill>
@@ -9853,7 +9854,7 @@
               </a:ln>
               <a:extLst>
                 <a:ext uri="{91240B29-F687-4f45-9708-019B960494DF}">
-                  <a14:hiddenLine xmlns:a14="http://schemas.microsoft.com/office/drawing/2010/main" xmlns="" w="9525">
+                  <a14:hiddenLine xmlns="" xmlns:a14="http://schemas.microsoft.com/office/drawing/2010/main" w="9525">
                     <a:solidFill>
                       <a:srgbClr val="000000"/>
                     </a:solidFill>
@@ -9943,7 +9944,7 @@
               </a:ln>
               <a:extLst>
                 <a:ext uri="{91240B29-F687-4f45-9708-019B960494DF}">
-                  <a14:hiddenLine xmlns:a14="http://schemas.microsoft.com/office/drawing/2010/main" xmlns="" w="9525">
+                  <a14:hiddenLine xmlns="" xmlns:a14="http://schemas.microsoft.com/office/drawing/2010/main" w="9525">
                     <a:solidFill>
                       <a:srgbClr val="000000"/>
                     </a:solidFill>
@@ -10005,7 +10006,7 @@
               </a:ln>
               <a:extLst>
                 <a:ext uri="{91240B29-F687-4f45-9708-019B960494DF}">
-                  <a14:hiddenLine xmlns:a14="http://schemas.microsoft.com/office/drawing/2010/main" xmlns="" w="9525">
+                  <a14:hiddenLine xmlns="" xmlns:a14="http://schemas.microsoft.com/office/drawing/2010/main" w="9525">
                     <a:solidFill>
                       <a:srgbClr val="000000"/>
                     </a:solidFill>
@@ -10067,7 +10068,7 @@
               </a:ln>
               <a:extLst>
                 <a:ext uri="{91240B29-F687-4f45-9708-019B960494DF}">
-                  <a14:hiddenLine xmlns:a14="http://schemas.microsoft.com/office/drawing/2010/main" xmlns="" w="9525">
+                  <a14:hiddenLine xmlns="" xmlns:a14="http://schemas.microsoft.com/office/drawing/2010/main" w="9525">
                     <a:solidFill>
                       <a:srgbClr val="000000"/>
                     </a:solidFill>
@@ -10157,7 +10158,7 @@
               </a:ln>
               <a:extLst>
                 <a:ext uri="{91240B29-F687-4f45-9708-019B960494DF}">
-                  <a14:hiddenLine xmlns:a14="http://schemas.microsoft.com/office/drawing/2010/main" xmlns="" w="9525">
+                  <a14:hiddenLine xmlns="" xmlns:a14="http://schemas.microsoft.com/office/drawing/2010/main" w="9525">
                     <a:solidFill>
                       <a:srgbClr val="000000"/>
                     </a:solidFill>
@@ -10247,7 +10248,7 @@
               </a:ln>
               <a:extLst>
                 <a:ext uri="{91240B29-F687-4f45-9708-019B960494DF}">
-                  <a14:hiddenLine xmlns:a14="http://schemas.microsoft.com/office/drawing/2010/main" xmlns="" w="9525">
+                  <a14:hiddenLine xmlns="" xmlns:a14="http://schemas.microsoft.com/office/drawing/2010/main" w="9525">
                     <a:solidFill>
                       <a:srgbClr val="000000"/>
                     </a:solidFill>
@@ -10309,7 +10310,7 @@
               </a:ln>
               <a:extLst>
                 <a:ext uri="{91240B29-F687-4f45-9708-019B960494DF}">
-                  <a14:hiddenLine xmlns:a14="http://schemas.microsoft.com/office/drawing/2010/main" xmlns="" w="9525">
+                  <a14:hiddenLine xmlns="" xmlns:a14="http://schemas.microsoft.com/office/drawing/2010/main" w="9525">
                     <a:solidFill>
                       <a:srgbClr val="000000"/>
                     </a:solidFill>
@@ -10419,7 +10420,7 @@
               </a:ln>
               <a:extLst>
                 <a:ext uri="{91240B29-F687-4f45-9708-019B960494DF}">
-                  <a14:hiddenLine xmlns:a14="http://schemas.microsoft.com/office/drawing/2010/main" xmlns="" w="9525">
+                  <a14:hiddenLine xmlns="" xmlns:a14="http://schemas.microsoft.com/office/drawing/2010/main" w="9525">
                     <a:solidFill>
                       <a:srgbClr val="000000"/>
                     </a:solidFill>
@@ -10503,7 +10504,7 @@
               </a:ln>
               <a:extLst>
                 <a:ext uri="{91240B29-F687-4f45-9708-019B960494DF}">
-                  <a14:hiddenLine xmlns:a14="http://schemas.microsoft.com/office/drawing/2010/main" xmlns="" w="9525">
+                  <a14:hiddenLine xmlns="" xmlns:a14="http://schemas.microsoft.com/office/drawing/2010/main" w="9525">
                     <a:solidFill>
                       <a:srgbClr val="000000"/>
                     </a:solidFill>
@@ -10565,7 +10566,7 @@
               </a:ln>
               <a:extLst>
                 <a:ext uri="{91240B29-F687-4f45-9708-019B960494DF}">
-                  <a14:hiddenLine xmlns:a14="http://schemas.microsoft.com/office/drawing/2010/main" xmlns="" w="9525">
+                  <a14:hiddenLine xmlns="" xmlns:a14="http://schemas.microsoft.com/office/drawing/2010/main" w="9525">
                     <a:solidFill>
                       <a:srgbClr val="000000"/>
                     </a:solidFill>
@@ -10627,7 +10628,7 @@
               </a:ln>
               <a:extLst>
                 <a:ext uri="{91240B29-F687-4f45-9708-019B960494DF}">
-                  <a14:hiddenLine xmlns:a14="http://schemas.microsoft.com/office/drawing/2010/main" xmlns="" w="9525">
+                  <a14:hiddenLine xmlns="" xmlns:a14="http://schemas.microsoft.com/office/drawing/2010/main" w="9525">
                     <a:solidFill>
                       <a:srgbClr val="000000"/>
                     </a:solidFill>
@@ -10717,7 +10718,7 @@
               </a:ln>
               <a:extLst>
                 <a:ext uri="{91240B29-F687-4f45-9708-019B960494DF}">
-                  <a14:hiddenLine xmlns:a14="http://schemas.microsoft.com/office/drawing/2010/main" xmlns="" w="9525">
+                  <a14:hiddenLine xmlns="" xmlns:a14="http://schemas.microsoft.com/office/drawing/2010/main" w="9525">
                     <a:solidFill>
                       <a:srgbClr val="000000"/>
                     </a:solidFill>
@@ -10751,7 +10752,7 @@
               </a:ln>
               <a:extLst>
                 <a:ext uri="{91240B29-F687-4f45-9708-019B960494DF}">
-                  <a14:hiddenLine xmlns:a14="http://schemas.microsoft.com/office/drawing/2010/main" xmlns="" w="9525">
+                  <a14:hiddenLine xmlns="" xmlns:a14="http://schemas.microsoft.com/office/drawing/2010/main" w="9525">
                     <a:solidFill>
                       <a:srgbClr val="000000"/>
                     </a:solidFill>
@@ -10816,7 +10817,7 @@
               </a:ln>
               <a:extLst>
                 <a:ext uri="{91240B29-F687-4f45-9708-019B960494DF}">
-                  <a14:hiddenLine xmlns:a14="http://schemas.microsoft.com/office/drawing/2010/main" xmlns="" w="9525">
+                  <a14:hiddenLine xmlns="" xmlns:a14="http://schemas.microsoft.com/office/drawing/2010/main" w="9525">
                     <a:solidFill>
                       <a:srgbClr val="000000"/>
                     </a:solidFill>
@@ -10906,7 +10907,7 @@
               </a:ln>
               <a:extLst>
                 <a:ext uri="{91240B29-F687-4f45-9708-019B960494DF}">
-                  <a14:hiddenLine xmlns:a14="http://schemas.microsoft.com/office/drawing/2010/main" xmlns="" w="9525">
+                  <a14:hiddenLine xmlns="" xmlns:a14="http://schemas.microsoft.com/office/drawing/2010/main" w="9525">
                     <a:solidFill>
                       <a:srgbClr val="000000"/>
                     </a:solidFill>
@@ -10968,7 +10969,7 @@
               </a:ln>
               <a:extLst>
                 <a:ext uri="{91240B29-F687-4f45-9708-019B960494DF}">
-                  <a14:hiddenLine xmlns:a14="http://schemas.microsoft.com/office/drawing/2010/main" xmlns="" w="9525">
+                  <a14:hiddenLine xmlns="" xmlns:a14="http://schemas.microsoft.com/office/drawing/2010/main" w="9525">
                     <a:solidFill>
                       <a:srgbClr val="000000"/>
                     </a:solidFill>
@@ -11058,7 +11059,7 @@
               </a:ln>
               <a:extLst>
                 <a:ext uri="{91240B29-F687-4f45-9708-019B960494DF}">
-                  <a14:hiddenLine xmlns:a14="http://schemas.microsoft.com/office/drawing/2010/main" xmlns="" w="9525">
+                  <a14:hiddenLine xmlns="" xmlns:a14="http://schemas.microsoft.com/office/drawing/2010/main" w="9525">
                     <a:solidFill>
                       <a:srgbClr val="000000"/>
                     </a:solidFill>
@@ -11123,7 +11124,7 @@
               </a:ln>
               <a:extLst>
                 <a:ext uri="{91240B29-F687-4f45-9708-019B960494DF}">
-                  <a14:hiddenLine xmlns:a14="http://schemas.microsoft.com/office/drawing/2010/main" xmlns="" w="9525">
+                  <a14:hiddenLine xmlns="" xmlns:a14="http://schemas.microsoft.com/office/drawing/2010/main" w="9525">
                     <a:solidFill>
                       <a:srgbClr val="000000"/>
                     </a:solidFill>
@@ -11185,7 +11186,7 @@
               </a:ln>
               <a:extLst>
                 <a:ext uri="{91240B29-F687-4f45-9708-019B960494DF}">
-                  <a14:hiddenLine xmlns:a14="http://schemas.microsoft.com/office/drawing/2010/main" xmlns="" w="9525">
+                  <a14:hiddenLine xmlns="" xmlns:a14="http://schemas.microsoft.com/office/drawing/2010/main" w="9525">
                     <a:solidFill>
                       <a:srgbClr val="000000"/>
                     </a:solidFill>
@@ -11275,7 +11276,7 @@
               </a:ln>
               <a:extLst>
                 <a:ext uri="{91240B29-F687-4f45-9708-019B960494DF}">
-                  <a14:hiddenLine xmlns:a14="http://schemas.microsoft.com/office/drawing/2010/main" xmlns="" w="9525">
+                  <a14:hiddenLine xmlns="" xmlns:a14="http://schemas.microsoft.com/office/drawing/2010/main" w="9525">
                     <a:solidFill>
                       <a:srgbClr val="000000"/>
                     </a:solidFill>
@@ -11365,7 +11366,7 @@
               </a:ln>
               <a:extLst>
                 <a:ext uri="{91240B29-F687-4f45-9708-019B960494DF}">
-                  <a14:hiddenLine xmlns:a14="http://schemas.microsoft.com/office/drawing/2010/main" xmlns="" w="9525">
+                  <a14:hiddenLine xmlns="" xmlns:a14="http://schemas.microsoft.com/office/drawing/2010/main" w="9525">
                     <a:solidFill>
                       <a:srgbClr val="000000"/>
                     </a:solidFill>
@@ -11430,7 +11431,7 @@
               </a:ln>
               <a:extLst>
                 <a:ext uri="{91240B29-F687-4f45-9708-019B960494DF}">
-                  <a14:hiddenLine xmlns:a14="http://schemas.microsoft.com/office/drawing/2010/main" xmlns="" w="9525">
+                  <a14:hiddenLine xmlns="" xmlns:a14="http://schemas.microsoft.com/office/drawing/2010/main" w="9525">
                     <a:solidFill>
                       <a:srgbClr val="000000"/>
                     </a:solidFill>
@@ -11550,7 +11551,7 @@
               </a:ln>
               <a:extLst>
                 <a:ext uri="{91240B29-F687-4f45-9708-019B960494DF}">
-                  <a14:hiddenLine xmlns:a14="http://schemas.microsoft.com/office/drawing/2010/main" xmlns="" w="9525">
+                  <a14:hiddenLine xmlns="" xmlns:a14="http://schemas.microsoft.com/office/drawing/2010/main" w="9525">
                     <a:solidFill>
                       <a:srgbClr val="000000"/>
                     </a:solidFill>
@@ -11631,7 +11632,7 @@
               </a:ln>
               <a:extLst>
                 <a:ext uri="{91240B29-F687-4f45-9708-019B960494DF}">
-                  <a14:hiddenLine xmlns:a14="http://schemas.microsoft.com/office/drawing/2010/main" xmlns="" w="9525">
+                  <a14:hiddenLine xmlns="" xmlns:a14="http://schemas.microsoft.com/office/drawing/2010/main" w="9525">
                     <a:solidFill>
                       <a:srgbClr val="000000"/>
                     </a:solidFill>
@@ -11746,7 +11747,7 @@
               </a:ln>
               <a:extLst>
                 <a:ext uri="{91240B29-F687-4f45-9708-019B960494DF}">
-                  <a14:hiddenLine xmlns:a14="http://schemas.microsoft.com/office/drawing/2010/main" xmlns="" w="9525">
+                  <a14:hiddenLine xmlns="" xmlns:a14="http://schemas.microsoft.com/office/drawing/2010/main" w="9525">
                     <a:solidFill>
                       <a:srgbClr val="000000"/>
                     </a:solidFill>
@@ -11836,7 +11837,7 @@
               </a:ln>
               <a:extLst>
                 <a:ext uri="{91240B29-F687-4f45-9708-019B960494DF}">
-                  <a14:hiddenLine xmlns:a14="http://schemas.microsoft.com/office/drawing/2010/main" xmlns="" w="9525">
+                  <a14:hiddenLine xmlns="" xmlns:a14="http://schemas.microsoft.com/office/drawing/2010/main" w="9525">
                     <a:solidFill>
                       <a:srgbClr val="000000"/>
                     </a:solidFill>
@@ -11901,7 +11902,7 @@
               </a:ln>
               <a:extLst>
                 <a:ext uri="{91240B29-F687-4f45-9708-019B960494DF}">
-                  <a14:hiddenLine xmlns:a14="http://schemas.microsoft.com/office/drawing/2010/main" xmlns="" w="9525">
+                  <a14:hiddenLine xmlns="" xmlns:a14="http://schemas.microsoft.com/office/drawing/2010/main" w="9525">
                     <a:solidFill>
                       <a:srgbClr val="000000"/>
                     </a:solidFill>
@@ -11991,7 +11992,7 @@
               </a:ln>
               <a:extLst>
                 <a:ext uri="{91240B29-F687-4f45-9708-019B960494DF}">
-                  <a14:hiddenLine xmlns:a14="http://schemas.microsoft.com/office/drawing/2010/main" xmlns="" w="9525">
+                  <a14:hiddenLine xmlns="" xmlns:a14="http://schemas.microsoft.com/office/drawing/2010/main" w="9525">
                     <a:solidFill>
                       <a:srgbClr val="000000"/>
                     </a:solidFill>
@@ -12059,7 +12060,7 @@
               </a:ln>
               <a:extLst>
                 <a:ext uri="{91240B29-F687-4f45-9708-019B960494DF}">
-                  <a14:hiddenLine xmlns:a14="http://schemas.microsoft.com/office/drawing/2010/main" xmlns="" w="9525">
+                  <a14:hiddenLine xmlns="" xmlns:a14="http://schemas.microsoft.com/office/drawing/2010/main" w="9525">
                     <a:solidFill>
                       <a:srgbClr val="000000"/>
                     </a:solidFill>
@@ -12149,7 +12150,7 @@
               </a:ln>
               <a:extLst>
                 <a:ext uri="{91240B29-F687-4f45-9708-019B960494DF}">
-                  <a14:hiddenLine xmlns:a14="http://schemas.microsoft.com/office/drawing/2010/main" xmlns="" w="9525">
+                  <a14:hiddenLine xmlns="" xmlns:a14="http://schemas.microsoft.com/office/drawing/2010/main" w="9525">
                     <a:solidFill>
                       <a:srgbClr val="000000"/>
                     </a:solidFill>
@@ -12217,7 +12218,7 @@
               </a:ln>
               <a:extLst>
                 <a:ext uri="{91240B29-F687-4f45-9708-019B960494DF}">
-                  <a14:hiddenLine xmlns:a14="http://schemas.microsoft.com/office/drawing/2010/main" xmlns="" w="9525">
+                  <a14:hiddenLine xmlns="" xmlns:a14="http://schemas.microsoft.com/office/drawing/2010/main" w="9525">
                     <a:solidFill>
                       <a:srgbClr val="000000"/>
                     </a:solidFill>
@@ -12307,7 +12308,7 @@
               </a:ln>
               <a:extLst>
                 <a:ext uri="{91240B29-F687-4f45-9708-019B960494DF}">
-                  <a14:hiddenLine xmlns:a14="http://schemas.microsoft.com/office/drawing/2010/main" xmlns="" w="9525">
+                  <a14:hiddenLine xmlns="" xmlns:a14="http://schemas.microsoft.com/office/drawing/2010/main" w="9525">
                     <a:solidFill>
                       <a:srgbClr val="000000"/>
                     </a:solidFill>
@@ -12341,7 +12342,7 @@
               </a:ln>
               <a:extLst>
                 <a:ext uri="{91240B29-F687-4f45-9708-019B960494DF}">
-                  <a14:hiddenLine xmlns:a14="http://schemas.microsoft.com/office/drawing/2010/main" xmlns="" w="9525">
+                  <a14:hiddenLine xmlns="" xmlns:a14="http://schemas.microsoft.com/office/drawing/2010/main" w="9525">
                     <a:solidFill>
                       <a:srgbClr val="000000"/>
                     </a:solidFill>
@@ -12481,7 +12482,7 @@
           <a:p>
             <a:fld id="{92FF8978-FE14-CC4A-93A6-934EB06543C0}" type="datetime1">
               <a:rPr lang="en-US" smtClean="0"/>
-              <a:t>10/13/26</a:t>
+              <a:t>10/15/26</a:t>
             </a:fld>
             <a:endParaRPr lang="en-US"/>
           </a:p>
@@ -15436,6 +15437,485 @@
   <p:cSld>
     <p:spTree>
       <p:nvGrpSpPr>
+        <p:cNvPr id="1" name="">
+          <a:extLst>
+            <a:ext uri="{FF2B5EF4-FFF2-40B4-BE49-F238E27FC236}">
+              <a16:creationId xmlns:a16="http://schemas.microsoft.com/office/drawing/2014/main" id="{493B3724-0C9F-9E3E-9AB4-BDB001948D78}"/>
+            </a:ext>
+          </a:extLst>
+        </p:cNvPr>
+        <p:cNvGrpSpPr/>
+        <p:nvPr/>
+      </p:nvGrpSpPr>
+      <p:grpSpPr>
+        <a:xfrm>
+          <a:off x="0" y="0"/>
+          <a:ext cx="0" cy="0"/>
+          <a:chOff x="0" y="0"/>
+          <a:chExt cx="0" cy="0"/>
+        </a:xfrm>
+      </p:grpSpPr>
+      <p:sp>
+        <p:nvSpPr>
+          <p:cNvPr id="6146" name="Rectangle 2">
+            <a:extLst>
+              <a:ext uri="{FF2B5EF4-FFF2-40B4-BE49-F238E27FC236}">
+                <a16:creationId xmlns:a16="http://schemas.microsoft.com/office/drawing/2014/main" id="{9D58DADC-48F3-23A8-6519-646245E548EA}"/>
+              </a:ext>
+            </a:extLst>
+          </p:cNvPr>
+          <p:cNvSpPr>
+            <a:spLocks noGrp="1" noChangeArrowheads="1"/>
+          </p:cNvSpPr>
+          <p:nvPr>
+            <p:ph type="title"/>
+            <p:custDataLst>
+              <p:tags r:id="rId1"/>
+            </p:custDataLst>
+          </p:nvPr>
+        </p:nvSpPr>
+        <p:spPr>
+          <a:xfrm>
+            <a:off x="1141413" y="284084"/>
+            <a:ext cx="9905998" cy="620791"/>
+          </a:xfrm>
+        </p:spPr>
+        <p:txBody>
+          <a:bodyPr/>
+          <a:lstStyle/>
+          <a:p>
+            <a:pPr algn="ctr"/>
+            <a:r>
+              <a:rPr lang="en-US" dirty="0"/>
+              <a:t>Lecture 15 - Thursday, Oct. 15</a:t>
+            </a:r>
+          </a:p>
+        </p:txBody>
+      </p:sp>
+      <p:sp>
+        <p:nvSpPr>
+          <p:cNvPr id="6147" name="Rectangle 3">
+            <a:extLst>
+              <a:ext uri="{FF2B5EF4-FFF2-40B4-BE49-F238E27FC236}">
+                <a16:creationId xmlns:a16="http://schemas.microsoft.com/office/drawing/2014/main" id="{8E23B269-3FD5-28F1-6537-E9AA7A5DC1AB}"/>
+              </a:ext>
+            </a:extLst>
+          </p:cNvPr>
+          <p:cNvSpPr>
+            <a:spLocks noGrp="1" noChangeArrowheads="1"/>
+          </p:cNvSpPr>
+          <p:nvPr>
+            <p:ph idx="1"/>
+            <p:custDataLst>
+              <p:tags r:id="rId2"/>
+            </p:custDataLst>
+          </p:nvPr>
+        </p:nvSpPr>
+        <p:spPr>
+          <a:xfrm>
+            <a:off x="1294151" y="904876"/>
+            <a:ext cx="9600522" cy="5953124"/>
+          </a:xfrm>
+        </p:spPr>
+        <p:txBody>
+          <a:bodyPr>
+            <a:normAutofit fontScale="70000" lnSpcReduction="20000"/>
+          </a:bodyPr>
+          <a:lstStyle/>
+          <a:p>
+            <a:r>
+              <a:rPr lang="en-US" dirty="0">
+                <a:latin typeface="Arial" panose="020B0604020202020204" pitchFamily="34" charset="0"/>
+                <a:cs typeface="Arial" panose="020B0604020202020204" pitchFamily="34" charset="0"/>
+              </a:rPr>
+              <a:t>Please remember </a:t>
+            </a:r>
+            <a:r>
+              <a:rPr lang="en-US" b="1" i="1" u="sng" dirty="0">
+                <a:latin typeface="Arial" panose="020B0604020202020204" pitchFamily="34" charset="0"/>
+                <a:cs typeface="Arial" panose="020B0604020202020204" pitchFamily="34" charset="0"/>
+              </a:rPr>
+              <a:t>no laptops / phones</a:t>
+            </a:r>
+            <a:r>
+              <a:rPr lang="en-US" dirty="0">
+                <a:latin typeface="Arial" panose="020B0604020202020204" pitchFamily="34" charset="0"/>
+                <a:cs typeface="Arial" panose="020B0604020202020204" pitchFamily="34" charset="0"/>
+              </a:rPr>
+              <a:t> and </a:t>
+            </a:r>
+            <a:r>
+              <a:rPr lang="en-US" b="1" i="1" u="sng" dirty="0">
+                <a:latin typeface="Arial" panose="020B0604020202020204" pitchFamily="34" charset="0"/>
+                <a:cs typeface="Arial" panose="020B0604020202020204" pitchFamily="34" charset="0"/>
+              </a:rPr>
+              <a:t>attendance policy</a:t>
+            </a:r>
+            <a:endParaRPr lang="en-US" dirty="0">
+              <a:latin typeface="Arial" panose="020B0604020202020204" pitchFamily="34" charset="0"/>
+              <a:cs typeface="Arial" panose="020B0604020202020204" pitchFamily="34" charset="0"/>
+            </a:endParaRPr>
+          </a:p>
+          <a:p>
+            <a:r>
+              <a:rPr lang="en-US" dirty="0">
+                <a:latin typeface="Arial" panose="020B0604020202020204" pitchFamily="34" charset="0"/>
+                <a:cs typeface="Arial" panose="020B0604020202020204" pitchFamily="34" charset="0"/>
+              </a:rPr>
+              <a:t>October! Best month of the year! Woo!</a:t>
+            </a:r>
+          </a:p>
+          <a:p>
+            <a:r>
+              <a:rPr lang="en-US" dirty="0">
+                <a:latin typeface="Arial" panose="020B0604020202020204" pitchFamily="34" charset="0"/>
+                <a:cs typeface="Arial" panose="020B0604020202020204" pitchFamily="34" charset="0"/>
+              </a:rPr>
+              <a:t>This week:</a:t>
+            </a:r>
+          </a:p>
+          <a:p>
+            <a:pPr lvl="1"/>
+            <a:r>
+              <a:rPr lang="en-US" dirty="0">
+                <a:latin typeface="Arial" panose="020B0604020202020204" pitchFamily="34" charset="0"/>
+                <a:cs typeface="Arial" panose="020B0604020202020204" pitchFamily="34" charset="0"/>
+              </a:rPr>
+              <a:t>Take (took) your quiz! How did it go?!</a:t>
+            </a:r>
+          </a:p>
+          <a:p>
+            <a:r>
+              <a:rPr lang="en-US" dirty="0">
+                <a:latin typeface="Arial" panose="020B0604020202020204" pitchFamily="34" charset="0"/>
+                <a:cs typeface="Arial" panose="020B0604020202020204" pitchFamily="34" charset="0"/>
+              </a:rPr>
+              <a:t>Next week:</a:t>
+            </a:r>
+          </a:p>
+          <a:p>
+            <a:pPr lvl="1"/>
+            <a:r>
+              <a:rPr lang="en-US" dirty="0">
+                <a:latin typeface="Arial" panose="020B0604020202020204" pitchFamily="34" charset="0"/>
+                <a:cs typeface="Arial" panose="020B0604020202020204" pitchFamily="34" charset="0"/>
+              </a:rPr>
+              <a:t>Nothing! No quiz or assignments. Enjoy a little break (but keep coming to lecture!).</a:t>
+            </a:r>
+          </a:p>
+          <a:p>
+            <a:pPr lvl="1"/>
+            <a:r>
+              <a:rPr lang="en-US" dirty="0">
+                <a:latin typeface="Arial" panose="020B0604020202020204" pitchFamily="34" charset="0"/>
+                <a:cs typeface="Arial" panose="020B0604020202020204" pitchFamily="34" charset="0"/>
+              </a:rPr>
+              <a:t>You are able to begin your assignment for the following week, so why not get ahead of it!!</a:t>
+            </a:r>
+          </a:p>
+          <a:p>
+            <a:r>
+              <a:rPr lang="en-US" dirty="0">
+                <a:latin typeface="Arial" panose="020B0604020202020204" pitchFamily="34" charset="0"/>
+                <a:cs typeface="Arial" panose="020B0604020202020204" pitchFamily="34" charset="0"/>
+              </a:rPr>
+              <a:t>Grading</a:t>
+            </a:r>
+          </a:p>
+          <a:p>
+            <a:pPr lvl="1"/>
+            <a:r>
+              <a:rPr lang="en-US" dirty="0">
+                <a:latin typeface="Arial" panose="020B0604020202020204" pitchFamily="34" charset="0"/>
+                <a:cs typeface="Arial" panose="020B0604020202020204" pitchFamily="34" charset="0"/>
+              </a:rPr>
+              <a:t>Module 2 homework has been returned</a:t>
+            </a:r>
+          </a:p>
+          <a:p>
+            <a:r>
+              <a:rPr lang="en-US" dirty="0">
+                <a:latin typeface="Arial" panose="020B0604020202020204" pitchFamily="34" charset="0"/>
+                <a:cs typeface="Arial" panose="020B0604020202020204" pitchFamily="34" charset="0"/>
+              </a:rPr>
+              <a:t>Quiz 2</a:t>
+            </a:r>
+          </a:p>
+          <a:p>
+            <a:pPr lvl="1"/>
+            <a:r>
+              <a:rPr lang="en-US" dirty="0">
+                <a:latin typeface="Arial" panose="020B0604020202020204" pitchFamily="34" charset="0"/>
+                <a:cs typeface="Arial" panose="020B0604020202020204" pitchFamily="34" charset="0"/>
+              </a:rPr>
+              <a:t>…is happening this week. Most of you have already taken it. Any issues?</a:t>
+            </a:r>
+          </a:p>
+          <a:p>
+            <a:r>
+              <a:rPr lang="en-US" dirty="0">
+                <a:latin typeface="Arial" panose="020B0604020202020204" pitchFamily="34" charset="0"/>
+                <a:cs typeface="Arial" panose="020B0604020202020204" pitchFamily="34" charset="0"/>
+              </a:rPr>
+              <a:t>OH Check-Ins</a:t>
+            </a:r>
+          </a:p>
+          <a:p>
+            <a:pPr lvl="1"/>
+            <a:r>
+              <a:rPr lang="en-US" dirty="0">
+                <a:latin typeface="Arial" panose="020B0604020202020204" pitchFamily="34" charset="0"/>
+                <a:cs typeface="Arial" panose="020B0604020202020204" pitchFamily="34" charset="0"/>
+              </a:rPr>
+              <a:t>Have started THIS week. Any issues so far?</a:t>
+            </a:r>
+          </a:p>
+          <a:p>
+            <a:pPr lvl="1"/>
+            <a:r>
+              <a:rPr lang="en-US" dirty="0">
+                <a:latin typeface="Arial" panose="020B0604020202020204" pitchFamily="34" charset="0"/>
+                <a:cs typeface="Arial" panose="020B0604020202020204" pitchFamily="34" charset="0"/>
+              </a:rPr>
+              <a:t>If you need to change weeks for a legitimate reason, email Elina (our OH head TA)</a:t>
+            </a:r>
+          </a:p>
+          <a:p>
+            <a:pPr lvl="1"/>
+            <a:r>
+              <a:rPr lang="en-US" dirty="0">
+                <a:latin typeface="Arial" panose="020B0604020202020204" pitchFamily="34" charset="0"/>
+                <a:cs typeface="Arial" panose="020B0604020202020204" pitchFamily="34" charset="0"/>
+              </a:rPr>
+              <a:t>One change from what I told you: You will NOT be allowed to glance at your submission. Sorry.</a:t>
+            </a:r>
+          </a:p>
+          <a:p>
+            <a:r>
+              <a:rPr lang="en-US" dirty="0">
+                <a:latin typeface="Arial" panose="020B0604020202020204" pitchFamily="34" charset="0"/>
+                <a:cs typeface="Arial" panose="020B0604020202020204" pitchFamily="34" charset="0"/>
+              </a:rPr>
+              <a:t>These slides are linked on the course webpage “slides” page.</a:t>
+            </a:r>
+          </a:p>
+          <a:p>
+            <a:r>
+              <a:rPr lang="en-US" dirty="0">
+                <a:latin typeface="Arial" panose="020B0604020202020204" pitchFamily="34" charset="0"/>
+                <a:cs typeface="Arial" panose="020B0604020202020204" pitchFamily="34" charset="0"/>
+              </a:rPr>
+              <a:t>Today we will continue Module 3 – Turing Machines.</a:t>
+            </a:r>
+          </a:p>
+        </p:txBody>
+      </p:sp>
+    </p:spTree>
+    <p:extLst>
+      <p:ext uri="{BB962C8B-B14F-4D97-AF65-F5344CB8AC3E}">
+        <p14:creationId xmlns:p14="http://schemas.microsoft.com/office/powerpoint/2010/main" val="233690679"/>
+      </p:ext>
+    </p:extLst>
+  </p:cSld>
+  <p:clrMapOvr>
+    <a:masterClrMapping/>
+  </p:clrMapOvr>
+</p:sld>
+</file>
+
+<file path=ppt/slides/slide2.xml><?xml version="1.0" encoding="utf-8"?>
+<p:sld xmlns:a="http://schemas.openxmlformats.org/drawingml/2006/main" xmlns:r="http://schemas.openxmlformats.org/officeDocument/2006/relationships" xmlns:p="http://schemas.openxmlformats.org/presentationml/2006/main">
+  <p:cSld>
+    <p:spTree>
+      <p:nvGrpSpPr>
+        <p:cNvPr id="1" name=""/>
+        <p:cNvGrpSpPr/>
+        <p:nvPr/>
+      </p:nvGrpSpPr>
+      <p:grpSpPr>
+        <a:xfrm>
+          <a:off x="0" y="0"/>
+          <a:ext cx="0" cy="0"/>
+          <a:chOff x="0" y="0"/>
+          <a:chExt cx="0" cy="0"/>
+        </a:xfrm>
+      </p:grpSpPr>
+      <p:sp>
+        <p:nvSpPr>
+          <p:cNvPr id="6146" name="Rectangle 2"/>
+          <p:cNvSpPr>
+            <a:spLocks noGrp="1" noChangeArrowheads="1"/>
+          </p:cNvSpPr>
+          <p:nvPr>
+            <p:ph type="title"/>
+            <p:custDataLst>
+              <p:tags r:id="rId1"/>
+            </p:custDataLst>
+          </p:nvPr>
+        </p:nvSpPr>
+        <p:spPr>
+          <a:xfrm>
+            <a:off x="1141413" y="284084"/>
+            <a:ext cx="9905998" cy="620791"/>
+          </a:xfrm>
+        </p:spPr>
+        <p:txBody>
+          <a:bodyPr/>
+          <a:lstStyle/>
+          <a:p>
+            <a:pPr algn="ctr"/>
+            <a:r>
+              <a:rPr lang="en-US" dirty="0"/>
+              <a:t>Lecture 2 - Thursday, Aug. 27</a:t>
+            </a:r>
+          </a:p>
+        </p:txBody>
+      </p:sp>
+      <p:sp>
+        <p:nvSpPr>
+          <p:cNvPr id="6147" name="Rectangle 3"/>
+          <p:cNvSpPr>
+            <a:spLocks noGrp="1" noChangeArrowheads="1"/>
+          </p:cNvSpPr>
+          <p:nvPr>
+            <p:ph idx="1"/>
+            <p:custDataLst>
+              <p:tags r:id="rId2"/>
+            </p:custDataLst>
+          </p:nvPr>
+        </p:nvSpPr>
+        <p:spPr>
+          <a:xfrm>
+            <a:off x="1294151" y="1098549"/>
+            <a:ext cx="9600522" cy="5149850"/>
+          </a:xfrm>
+        </p:spPr>
+        <p:txBody>
+          <a:bodyPr>
+            <a:normAutofit/>
+          </a:bodyPr>
+          <a:lstStyle/>
+          <a:p>
+            <a:r>
+              <a:rPr lang="en-US" dirty="0">
+                <a:latin typeface="Arial" panose="020B0604020202020204" pitchFamily="34" charset="0"/>
+                <a:cs typeface="Arial" panose="020B0604020202020204" pitchFamily="34" charset="0"/>
+              </a:rPr>
+              <a:t>Any questions about course policies from last time?</a:t>
+            </a:r>
+          </a:p>
+          <a:p>
+            <a:r>
+              <a:rPr lang="en-US" dirty="0">
+                <a:latin typeface="Arial" panose="020B0604020202020204" pitchFamily="34" charset="0"/>
+                <a:cs typeface="Arial" panose="020B0604020202020204" pitchFamily="34" charset="0"/>
+              </a:rPr>
+              <a:t>Please remember </a:t>
+            </a:r>
+            <a:r>
+              <a:rPr lang="en-US" b="1" i="1" u="sng" dirty="0">
+                <a:latin typeface="Arial" panose="020B0604020202020204" pitchFamily="34" charset="0"/>
+                <a:cs typeface="Arial" panose="020B0604020202020204" pitchFamily="34" charset="0"/>
+              </a:rPr>
+              <a:t>no laptops / phones</a:t>
+            </a:r>
+            <a:r>
+              <a:rPr lang="en-US" dirty="0">
+                <a:latin typeface="Arial" panose="020B0604020202020204" pitchFamily="34" charset="0"/>
+                <a:cs typeface="Arial" panose="020B0604020202020204" pitchFamily="34" charset="0"/>
+              </a:rPr>
+              <a:t> and </a:t>
+            </a:r>
+            <a:r>
+              <a:rPr lang="en-US" b="1" i="1" u="sng" dirty="0">
+                <a:latin typeface="Arial" panose="020B0604020202020204" pitchFamily="34" charset="0"/>
+                <a:cs typeface="Arial" panose="020B0604020202020204" pitchFamily="34" charset="0"/>
+              </a:rPr>
+              <a:t>attendance policy</a:t>
+            </a:r>
+          </a:p>
+          <a:p>
+            <a:r>
+              <a:rPr lang="en-US" dirty="0">
+                <a:latin typeface="Arial" panose="020B0604020202020204" pitchFamily="34" charset="0"/>
+                <a:cs typeface="Arial" panose="020B0604020202020204" pitchFamily="34" charset="0"/>
+              </a:rPr>
+              <a:t>First homework  is due one week from today (Thursday)</a:t>
+            </a:r>
+          </a:p>
+          <a:p>
+            <a:pPr lvl="1"/>
+            <a:r>
+              <a:rPr lang="en-US" dirty="0">
+                <a:latin typeface="Arial" panose="020B0604020202020204" pitchFamily="34" charset="0"/>
+                <a:cs typeface="Arial" panose="020B0604020202020204" pitchFamily="34" charset="0"/>
+              </a:rPr>
+              <a:t>Remember you can get an extension by filling out form linked on HW page</a:t>
+            </a:r>
+          </a:p>
+          <a:p>
+            <a:pPr lvl="1"/>
+            <a:r>
+              <a:rPr lang="en-US" dirty="0">
+                <a:latin typeface="Arial" panose="020B0604020202020204" pitchFamily="34" charset="0"/>
+                <a:cs typeface="Arial" panose="020B0604020202020204" pitchFamily="34" charset="0"/>
+              </a:rPr>
+              <a:t>Hopefully we get through enough material. Might be tight.</a:t>
+            </a:r>
+          </a:p>
+          <a:p>
+            <a:r>
+              <a:rPr lang="en-US" dirty="0">
+                <a:latin typeface="Arial" panose="020B0604020202020204" pitchFamily="34" charset="0"/>
+                <a:cs typeface="Arial" panose="020B0604020202020204" pitchFamily="34" charset="0"/>
+              </a:rPr>
+              <a:t>First quiz is 9/22 (but we have some time before that arrives)</a:t>
+            </a:r>
+          </a:p>
+          <a:p>
+            <a:r>
+              <a:rPr lang="en-US" dirty="0">
+                <a:latin typeface="Arial" panose="020B0604020202020204" pitchFamily="34" charset="0"/>
+                <a:cs typeface="Arial" panose="020B0604020202020204" pitchFamily="34" charset="0"/>
+              </a:rPr>
+              <a:t>These slides are linked on the course webpage “slides” page.</a:t>
+            </a:r>
+          </a:p>
+          <a:p>
+            <a:r>
+              <a:rPr lang="en-US" dirty="0">
+                <a:latin typeface="Arial" panose="020B0604020202020204" pitchFamily="34" charset="0"/>
+                <a:cs typeface="Arial" panose="020B0604020202020204" pitchFamily="34" charset="0"/>
+              </a:rPr>
+              <a:t>Today we will start module 0 which is a half review, half overview of what to expect in the course.</a:t>
+            </a:r>
+          </a:p>
+          <a:p>
+            <a:endParaRPr lang="en-US" dirty="0">
+              <a:latin typeface="Arial" panose="020B0604020202020204" pitchFamily="34" charset="0"/>
+              <a:cs typeface="Arial" panose="020B0604020202020204" pitchFamily="34" charset="0"/>
+            </a:endParaRPr>
+          </a:p>
+        </p:txBody>
+      </p:sp>
+    </p:spTree>
+    <p:extLst>
+      <p:ext uri="{BB962C8B-B14F-4D97-AF65-F5344CB8AC3E}">
+        <p14:creationId xmlns:p14="http://schemas.microsoft.com/office/powerpoint/2010/main" val="2431754002"/>
+      </p:ext>
+    </p:extLst>
+  </p:cSld>
+  <p:clrMapOvr>
+    <a:masterClrMapping/>
+  </p:clrMapOvr>
+</p:sld>
+</file>
+
+<file path=ppt/slides/slide20.xml><?xml version="1.0" encoding="utf-8"?>
+<p:sld xmlns:a="http://schemas.openxmlformats.org/drawingml/2006/main" xmlns:r="http://schemas.openxmlformats.org/officeDocument/2006/relationships" xmlns:p="http://schemas.openxmlformats.org/presentationml/2006/main">
+  <p:cSld>
+    <p:spTree>
+      <p:nvGrpSpPr>
         <p:cNvPr id="1" name=""/>
         <p:cNvGrpSpPr/>
         <p:nvPr/>
@@ -15772,7 +16252,7 @@
           <p:nvPr>
             <p:extLst>
               <p:ext uri="{D42A27DB-BD31-4B8C-83A1-F6EECF244321}">
-                <p14:modId xmlns:p14="http://schemas.microsoft.com/office/powerpoint/2010/main" val="447766819"/>
+                <p14:modId xmlns:p14="http://schemas.microsoft.com/office/powerpoint/2010/main" val="4182000880"/>
               </p:ext>
             </p:extLst>
           </p:nvPr>
@@ -15868,7 +16348,7 @@
                       <a:pPr algn="ctr"/>
                       <a:r>
                         <a:rPr lang="en-US" i="0" dirty="0"/>
-                        <a:t>12</a:t>
+                        <a:t>13</a:t>
                       </a:r>
                     </a:p>
                   </a:txBody>
@@ -15882,7 +16362,7 @@
                       <a:pPr algn="ctr"/>
                       <a:r>
                         <a:rPr lang="en-US" i="0" dirty="0"/>
-                        <a:t>13</a:t>
+                        <a:t>14</a:t>
                       </a:r>
                     </a:p>
                   </a:txBody>
@@ -15896,7 +16376,7 @@
                       <a:pPr algn="ctr"/>
                       <a:r>
                         <a:rPr lang="en-US" b="1" i="0" dirty="0"/>
-                        <a:t>92.3%</a:t>
+                        <a:t>92.9%</a:t>
                       </a:r>
                     </a:p>
                   </a:txBody>
@@ -16727,7 +17207,7 @@
           <p:nvPr>
             <p:extLst>
               <p:ext uri="{D42A27DB-BD31-4B8C-83A1-F6EECF244321}">
-                <p14:modId xmlns:p14="http://schemas.microsoft.com/office/powerpoint/2010/main" val="2324289945"/>
+                <p14:modId xmlns:p14="http://schemas.microsoft.com/office/powerpoint/2010/main" val="1695938706"/>
               </p:ext>
             </p:extLst>
           </p:nvPr>
@@ -16823,7 +17303,7 @@
                       <a:pPr algn="ctr"/>
                       <a:r>
                         <a:rPr lang="en-US" i="0" dirty="0"/>
-                        <a:t>6</a:t>
+                        <a:t>7</a:t>
                       </a:r>
                     </a:p>
                   </a:txBody>
@@ -16837,7 +17317,7 @@
                       <a:pPr algn="ctr"/>
                       <a:r>
                         <a:rPr lang="en-US" i="0" dirty="0"/>
-                        <a:t>6</a:t>
+                        <a:t>7</a:t>
                       </a:r>
                     </a:p>
                   </a:txBody>
@@ -17115,7 +17595,7 @@
           <p:nvPr>
             <p:extLst>
               <p:ext uri="{D42A27DB-BD31-4B8C-83A1-F6EECF244321}">
-                <p14:modId xmlns:p14="http://schemas.microsoft.com/office/powerpoint/2010/main" val="3411547853"/>
+                <p14:modId xmlns:p14="http://schemas.microsoft.com/office/powerpoint/2010/main" val="1867092156"/>
               </p:ext>
             </p:extLst>
           </p:nvPr>
@@ -17211,7 +17691,7 @@
                       <a:pPr algn="ctr"/>
                       <a:r>
                         <a:rPr lang="en-US" i="0" dirty="0"/>
-                        <a:t>13</a:t>
+                        <a:t>14</a:t>
                       </a:r>
                     </a:p>
                   </a:txBody>
@@ -17225,7 +17705,7 @@
                       <a:pPr algn="ctr"/>
                       <a:r>
                         <a:rPr lang="en-US" i="0" dirty="0"/>
-                        <a:t>13</a:t>
+                        <a:t>14</a:t>
                       </a:r>
                     </a:p>
                   </a:txBody>
@@ -17496,7 +17976,7 @@
           <p:nvPr>
             <p:extLst>
               <p:ext uri="{D42A27DB-BD31-4B8C-83A1-F6EECF244321}">
-                <p14:modId xmlns:p14="http://schemas.microsoft.com/office/powerpoint/2010/main" val="1950064502"/>
+                <p14:modId xmlns:p14="http://schemas.microsoft.com/office/powerpoint/2010/main" val="3873041530"/>
               </p:ext>
             </p:extLst>
           </p:nvPr>
@@ -17592,7 +18072,7 @@
                       <a:pPr algn="ctr"/>
                       <a:r>
                         <a:rPr lang="en-US" i="0" dirty="0"/>
-                        <a:t>6</a:t>
+                        <a:t>7</a:t>
                       </a:r>
                     </a:p>
                   </a:txBody>
@@ -17606,7 +18086,7 @@
                       <a:pPr algn="ctr"/>
                       <a:r>
                         <a:rPr lang="en-US" i="0" dirty="0"/>
-                        <a:t>6</a:t>
+                        <a:t>7</a:t>
                       </a:r>
                     </a:p>
                   </a:txBody>
@@ -17640,194 +18120,6 @@
     <p:extLst>
       <p:ext uri="{BB962C8B-B14F-4D97-AF65-F5344CB8AC3E}">
         <p14:creationId xmlns:p14="http://schemas.microsoft.com/office/powerpoint/2010/main" val="748716362"/>
-      </p:ext>
-    </p:extLst>
-  </p:cSld>
-  <p:clrMapOvr>
-    <a:masterClrMapping/>
-  </p:clrMapOvr>
-</p:sld>
-</file>
-
-<file path=ppt/slides/slide2.xml><?xml version="1.0" encoding="utf-8"?>
-<p:sld xmlns:a="http://schemas.openxmlformats.org/drawingml/2006/main" xmlns:r="http://schemas.openxmlformats.org/officeDocument/2006/relationships" xmlns:p="http://schemas.openxmlformats.org/presentationml/2006/main">
-  <p:cSld>
-    <p:spTree>
-      <p:nvGrpSpPr>
-        <p:cNvPr id="1" name=""/>
-        <p:cNvGrpSpPr/>
-        <p:nvPr/>
-      </p:nvGrpSpPr>
-      <p:grpSpPr>
-        <a:xfrm>
-          <a:off x="0" y="0"/>
-          <a:ext cx="0" cy="0"/>
-          <a:chOff x="0" y="0"/>
-          <a:chExt cx="0" cy="0"/>
-        </a:xfrm>
-      </p:grpSpPr>
-      <p:sp>
-        <p:nvSpPr>
-          <p:cNvPr id="6146" name="Rectangle 2"/>
-          <p:cNvSpPr>
-            <a:spLocks noGrp="1" noChangeArrowheads="1"/>
-          </p:cNvSpPr>
-          <p:nvPr>
-            <p:ph type="title"/>
-            <p:custDataLst>
-              <p:tags r:id="rId1"/>
-            </p:custDataLst>
-          </p:nvPr>
-        </p:nvSpPr>
-        <p:spPr>
-          <a:xfrm>
-            <a:off x="1141413" y="284084"/>
-            <a:ext cx="9905998" cy="620791"/>
-          </a:xfrm>
-        </p:spPr>
-        <p:txBody>
-          <a:bodyPr/>
-          <a:lstStyle/>
-          <a:p>
-            <a:pPr algn="ctr"/>
-            <a:r>
-              <a:rPr lang="en-US" dirty="0"/>
-              <a:t>Lecture 2 - Thursday, Aug. 27</a:t>
-            </a:r>
-          </a:p>
-        </p:txBody>
-      </p:sp>
-      <p:sp>
-        <p:nvSpPr>
-          <p:cNvPr id="6147" name="Rectangle 3"/>
-          <p:cNvSpPr>
-            <a:spLocks noGrp="1" noChangeArrowheads="1"/>
-          </p:cNvSpPr>
-          <p:nvPr>
-            <p:ph idx="1"/>
-            <p:custDataLst>
-              <p:tags r:id="rId2"/>
-            </p:custDataLst>
-          </p:nvPr>
-        </p:nvSpPr>
-        <p:spPr>
-          <a:xfrm>
-            <a:off x="1294151" y="1098549"/>
-            <a:ext cx="9600522" cy="5149850"/>
-          </a:xfrm>
-        </p:spPr>
-        <p:txBody>
-          <a:bodyPr>
-            <a:normAutofit/>
-          </a:bodyPr>
-          <a:lstStyle/>
-          <a:p>
-            <a:r>
-              <a:rPr lang="en-US" dirty="0">
-                <a:latin typeface="Arial" panose="020B0604020202020204" pitchFamily="34" charset="0"/>
-                <a:cs typeface="Arial" panose="020B0604020202020204" pitchFamily="34" charset="0"/>
-              </a:rPr>
-              <a:t>Any questions about course policies from last time?</a:t>
-            </a:r>
-          </a:p>
-          <a:p>
-            <a:r>
-              <a:rPr lang="en-US" dirty="0">
-                <a:latin typeface="Arial" panose="020B0604020202020204" pitchFamily="34" charset="0"/>
-                <a:cs typeface="Arial" panose="020B0604020202020204" pitchFamily="34" charset="0"/>
-              </a:rPr>
-              <a:t>Please remember </a:t>
-            </a:r>
-            <a:r>
-              <a:rPr lang="en-US" b="1" i="1" u="sng" dirty="0">
-                <a:latin typeface="Arial" panose="020B0604020202020204" pitchFamily="34" charset="0"/>
-                <a:cs typeface="Arial" panose="020B0604020202020204" pitchFamily="34" charset="0"/>
-              </a:rPr>
-              <a:t>no laptops / phones</a:t>
-            </a:r>
-            <a:r>
-              <a:rPr lang="en-US" dirty="0">
-                <a:latin typeface="Arial" panose="020B0604020202020204" pitchFamily="34" charset="0"/>
-                <a:cs typeface="Arial" panose="020B0604020202020204" pitchFamily="34" charset="0"/>
-              </a:rPr>
-              <a:t> and </a:t>
-            </a:r>
-            <a:r>
-              <a:rPr lang="en-US" b="1" i="1" u="sng" dirty="0">
-                <a:latin typeface="Arial" panose="020B0604020202020204" pitchFamily="34" charset="0"/>
-                <a:cs typeface="Arial" panose="020B0604020202020204" pitchFamily="34" charset="0"/>
-              </a:rPr>
-              <a:t>attendance policy</a:t>
-            </a:r>
-          </a:p>
-          <a:p>
-            <a:r>
-              <a:rPr lang="en-US" dirty="0">
-                <a:latin typeface="Arial" panose="020B0604020202020204" pitchFamily="34" charset="0"/>
-                <a:cs typeface="Arial" panose="020B0604020202020204" pitchFamily="34" charset="0"/>
-              </a:rPr>
-              <a:t>First homework  is due one week from today (Thursday)</a:t>
-            </a:r>
-          </a:p>
-          <a:p>
-            <a:pPr lvl="1"/>
-            <a:r>
-              <a:rPr lang="en-US" dirty="0">
-                <a:latin typeface="Arial" panose="020B0604020202020204" pitchFamily="34" charset="0"/>
-                <a:cs typeface="Arial" panose="020B0604020202020204" pitchFamily="34" charset="0"/>
-              </a:rPr>
-              <a:t>Remember you can get an extension by filling out form linked on HW page</a:t>
-            </a:r>
-          </a:p>
-          <a:p>
-            <a:pPr lvl="1"/>
-            <a:r>
-              <a:rPr lang="en-US" dirty="0">
-                <a:latin typeface="Arial" panose="020B0604020202020204" pitchFamily="34" charset="0"/>
-                <a:cs typeface="Arial" panose="020B0604020202020204" pitchFamily="34" charset="0"/>
-              </a:rPr>
-              <a:t>Hopefully we get through enough material. Might be tight.</a:t>
-            </a:r>
-          </a:p>
-          <a:p>
-            <a:r>
-              <a:rPr lang="en-US" dirty="0">
-                <a:latin typeface="Arial" panose="020B0604020202020204" pitchFamily="34" charset="0"/>
-                <a:cs typeface="Arial" panose="020B0604020202020204" pitchFamily="34" charset="0"/>
-              </a:rPr>
-              <a:t>First quiz is 9/22 (but we have some time before that arrives)</a:t>
-            </a:r>
-          </a:p>
-          <a:p>
-            <a:r>
-              <a:rPr lang="en-US" dirty="0">
-                <a:latin typeface="Arial" panose="020B0604020202020204" pitchFamily="34" charset="0"/>
-                <a:cs typeface="Arial" panose="020B0604020202020204" pitchFamily="34" charset="0"/>
-              </a:rPr>
-              <a:t>These slides are linked on the course webpage “slides” page.</a:t>
-            </a:r>
-          </a:p>
-          <a:p>
-            <a:r>
-              <a:rPr lang="en-US" dirty="0">
-                <a:latin typeface="Arial" panose="020B0604020202020204" pitchFamily="34" charset="0"/>
-                <a:cs typeface="Arial" panose="020B0604020202020204" pitchFamily="34" charset="0"/>
-              </a:rPr>
-              <a:t>Today we will start module 0 which is a half review, half overview of what to expect in the course.</a:t>
-            </a:r>
-          </a:p>
-          <a:p>
-            <a:endParaRPr lang="en-US" dirty="0">
-              <a:latin typeface="Arial" panose="020B0604020202020204" pitchFamily="34" charset="0"/>
-              <a:cs typeface="Arial" panose="020B0604020202020204" pitchFamily="34" charset="0"/>
-            </a:endParaRPr>
-          </a:p>
-        </p:txBody>
-      </p:sp>
-    </p:spTree>
-    <p:extLst>
-      <p:ext uri="{BB962C8B-B14F-4D97-AF65-F5344CB8AC3E}">
-        <p14:creationId xmlns:p14="http://schemas.microsoft.com/office/powerpoint/2010/main" val="2431754002"/>
       </p:ext>
     </p:extLst>
   </p:cSld>
@@ -19862,6 +20154,18 @@
 </file>
 
 <file path=ppt/tags/tag40.xml><?xml version="1.0" encoding="utf-8"?>
+<p:tagLst xmlns:a="http://schemas.openxmlformats.org/drawingml/2006/main" xmlns:r="http://schemas.openxmlformats.org/officeDocument/2006/relationships" xmlns:p="http://schemas.openxmlformats.org/presentationml/2006/main">
+  <p:tag name="_INSTRUCTOR VIEW19C14C36-AC8E-43BC-9DB6-C2AAF774C7DC|PANE__TAG" val="_"/>
+</p:tagLst>
+</file>
+
+<file path=ppt/tags/tag41.xml><?xml version="1.0" encoding="utf-8"?>
+<p:tagLst xmlns:a="http://schemas.openxmlformats.org/drawingml/2006/main" xmlns:r="http://schemas.openxmlformats.org/officeDocument/2006/relationships" xmlns:p="http://schemas.openxmlformats.org/presentationml/2006/main">
+  <p:tag name="_INSTRUCTOR VIEW19C14C36-AC8E-43BC-9DB6-C2AAF774C7DC|PANE__TAG" val="_"/>
+</p:tagLst>
+</file>
+
+<file path=ppt/tags/tag42.xml><?xml version="1.0" encoding="utf-8"?>
 <p:tagLst xmlns:a="http://schemas.openxmlformats.org/drawingml/2006/main" xmlns:r="http://schemas.openxmlformats.org/officeDocument/2006/relationships" xmlns:p="http://schemas.openxmlformats.org/presentationml/2006/main">
   <p:tag name="_INSTRUCTOR VIEW19C14C36-AC8E-43BC-9DB6-C2AAF774C7DC|PANE__TAG" val="_"/>
 </p:tagLst>

--- a/slides/00-DailyAnnouncements.pptx
+++ b/slides/00-DailyAnnouncements.pptx
@@ -5,7 +5,7 @@
     <p:sldMasterId id="2147484006" r:id="rId1"/>
   </p:sldMasterIdLst>
   <p:notesMasterIdLst>
-    <p:notesMasterId r:id="rId22"/>
+    <p:notesMasterId r:id="rId23"/>
   </p:notesMasterIdLst>
   <p:sldIdLst>
     <p:sldId id="256" r:id="rId2"/>
@@ -27,7 +27,8 @@
     <p:sldId id="530" r:id="rId18"/>
     <p:sldId id="531" r:id="rId19"/>
     <p:sldId id="532" r:id="rId20"/>
-    <p:sldId id="515" r:id="rId21"/>
+    <p:sldId id="533" r:id="rId21"/>
+    <p:sldId id="515" r:id="rId22"/>
   </p:sldIdLst>
   <p:sldSz cx="12192000" cy="6858000"/>
   <p:notesSz cx="6858000" cy="9144000"/>
@@ -216,7 +217,7 @@
           <a:p>
             <a:fld id="{C5B45307-6ED4-B142-BD64-10F739779302}" type="datetimeFigureOut">
               <a:rPr lang="en-US" smtClean="0"/>
-              <a:t>10/15/26</a:t>
+              <a:t>10/20/26</a:t>
             </a:fld>
             <a:endParaRPr lang="en-US"/>
           </a:p>
@@ -624,7 +625,7 @@
           <a:noFill/>
           <a:extLst>
             <a:ext uri="{909E8E84-426E-40dd-AFC4-6F175D3DCCD1}">
-              <a14:hiddenFill xmlns="" xmlns:a14="http://schemas.microsoft.com/office/drawing/2010/main">
+              <a14:hiddenFill xmlns:a14="http://schemas.microsoft.com/office/drawing/2010/main" xmlns="">
                 <a:solidFill>
                   <a:srgbClr val="FFFFFF"/>
                 </a:solidFill>
@@ -683,7 +684,7 @@
             </a:ln>
             <a:extLst>
               <a:ext uri="{91240B29-F687-4f45-9708-019B960494DF}">
-                <a14:hiddenLine xmlns="" xmlns:a14="http://schemas.microsoft.com/office/drawing/2010/main" w="9525">
+                <a14:hiddenLine xmlns:a14="http://schemas.microsoft.com/office/drawing/2010/main" xmlns="" w="9525">
                   <a:solidFill>
                     <a:srgbClr val="000000"/>
                   </a:solidFill>
@@ -773,7 +774,7 @@
             </a:ln>
             <a:extLst>
               <a:ext uri="{91240B29-F687-4f45-9708-019B960494DF}">
-                <a14:hiddenLine xmlns="" xmlns:a14="http://schemas.microsoft.com/office/drawing/2010/main" w="9525">
+                <a14:hiddenLine xmlns:a14="http://schemas.microsoft.com/office/drawing/2010/main" xmlns="" w="9525">
                   <a:solidFill>
                     <a:srgbClr val="000000"/>
                   </a:solidFill>
@@ -863,7 +864,7 @@
             </a:ln>
             <a:extLst>
               <a:ext uri="{91240B29-F687-4f45-9708-019B960494DF}">
-                <a14:hiddenLine xmlns="" xmlns:a14="http://schemas.microsoft.com/office/drawing/2010/main" w="9525">
+                <a14:hiddenLine xmlns:a14="http://schemas.microsoft.com/office/drawing/2010/main" xmlns="" w="9525">
                   <a:solidFill>
                     <a:srgbClr val="000000"/>
                   </a:solidFill>
@@ -897,7 +898,7 @@
             </a:ln>
             <a:extLst>
               <a:ext uri="{91240B29-F687-4f45-9708-019B960494DF}">
-                <a14:hiddenLine xmlns="" xmlns:a14="http://schemas.microsoft.com/office/drawing/2010/main" w="9525">
+                <a14:hiddenLine xmlns:a14="http://schemas.microsoft.com/office/drawing/2010/main" xmlns="" w="9525">
                   <a:solidFill>
                     <a:srgbClr val="000000"/>
                   </a:solidFill>
@@ -987,7 +988,7 @@
             </a:ln>
             <a:extLst>
               <a:ext uri="{91240B29-F687-4f45-9708-019B960494DF}">
-                <a14:hiddenLine xmlns="" xmlns:a14="http://schemas.microsoft.com/office/drawing/2010/main" w="9525">
+                <a14:hiddenLine xmlns:a14="http://schemas.microsoft.com/office/drawing/2010/main" xmlns="" w="9525">
                   <a:solidFill>
                     <a:srgbClr val="000000"/>
                   </a:solidFill>
@@ -1049,7 +1050,7 @@
             </a:ln>
             <a:extLst>
               <a:ext uri="{91240B29-F687-4f45-9708-019B960494DF}">
-                <a14:hiddenLine xmlns="" xmlns:a14="http://schemas.microsoft.com/office/drawing/2010/main" w="9525">
+                <a14:hiddenLine xmlns:a14="http://schemas.microsoft.com/office/drawing/2010/main" xmlns="" w="9525">
                   <a:solidFill>
                     <a:srgbClr val="000000"/>
                   </a:solidFill>
@@ -1111,7 +1112,7 @@
             </a:ln>
             <a:extLst>
               <a:ext uri="{91240B29-F687-4f45-9708-019B960494DF}">
-                <a14:hiddenLine xmlns="" xmlns:a14="http://schemas.microsoft.com/office/drawing/2010/main" w="9525">
+                <a14:hiddenLine xmlns:a14="http://schemas.microsoft.com/office/drawing/2010/main" xmlns="" w="9525">
                   <a:solidFill>
                     <a:srgbClr val="000000"/>
                   </a:solidFill>
@@ -1201,7 +1202,7 @@
             </a:ln>
             <a:extLst>
               <a:ext uri="{91240B29-F687-4f45-9708-019B960494DF}">
-                <a14:hiddenLine xmlns="" xmlns:a14="http://schemas.microsoft.com/office/drawing/2010/main" w="9525">
+                <a14:hiddenLine xmlns:a14="http://schemas.microsoft.com/office/drawing/2010/main" xmlns="" w="9525">
                   <a:solidFill>
                     <a:srgbClr val="000000"/>
                   </a:solidFill>
@@ -1263,7 +1264,7 @@
             </a:ln>
             <a:extLst>
               <a:ext uri="{91240B29-F687-4f45-9708-019B960494DF}">
-                <a14:hiddenLine xmlns="" xmlns:a14="http://schemas.microsoft.com/office/drawing/2010/main" w="9525">
+                <a14:hiddenLine xmlns:a14="http://schemas.microsoft.com/office/drawing/2010/main" xmlns="" w="9525">
                   <a:solidFill>
                     <a:srgbClr val="000000"/>
                   </a:solidFill>
@@ -1325,7 +1326,7 @@
             </a:ln>
             <a:extLst>
               <a:ext uri="{91240B29-F687-4f45-9708-019B960494DF}">
-                <a14:hiddenLine xmlns="" xmlns:a14="http://schemas.microsoft.com/office/drawing/2010/main" w="9525">
+                <a14:hiddenLine xmlns:a14="http://schemas.microsoft.com/office/drawing/2010/main" xmlns="" w="9525">
                   <a:solidFill>
                     <a:srgbClr val="000000"/>
                   </a:solidFill>
@@ -1415,7 +1416,7 @@
             </a:ln>
             <a:extLst>
               <a:ext uri="{91240B29-F687-4f45-9708-019B960494DF}">
-                <a14:hiddenLine xmlns="" xmlns:a14="http://schemas.microsoft.com/office/drawing/2010/main" w="9525">
+                <a14:hiddenLine xmlns:a14="http://schemas.microsoft.com/office/drawing/2010/main" xmlns="" w="9525">
                   <a:solidFill>
                     <a:srgbClr val="000000"/>
                   </a:solidFill>
@@ -1505,7 +1506,7 @@
             </a:ln>
             <a:extLst>
               <a:ext uri="{91240B29-F687-4f45-9708-019B960494DF}">
-                <a14:hiddenLine xmlns="" xmlns:a14="http://schemas.microsoft.com/office/drawing/2010/main" w="9525">
+                <a14:hiddenLine xmlns:a14="http://schemas.microsoft.com/office/drawing/2010/main" xmlns="" w="9525">
                   <a:solidFill>
                     <a:srgbClr val="000000"/>
                   </a:solidFill>
@@ -1567,7 +1568,7 @@
             </a:ln>
             <a:extLst>
               <a:ext uri="{91240B29-F687-4f45-9708-019B960494DF}">
-                <a14:hiddenLine xmlns="" xmlns:a14="http://schemas.microsoft.com/office/drawing/2010/main" w="9525">
+                <a14:hiddenLine xmlns:a14="http://schemas.microsoft.com/office/drawing/2010/main" xmlns="" w="9525">
                   <a:solidFill>
                     <a:srgbClr val="000000"/>
                   </a:solidFill>
@@ -1677,7 +1678,7 @@
             </a:ln>
             <a:extLst>
               <a:ext uri="{91240B29-F687-4f45-9708-019B960494DF}">
-                <a14:hiddenLine xmlns="" xmlns:a14="http://schemas.microsoft.com/office/drawing/2010/main" w="9525">
+                <a14:hiddenLine xmlns:a14="http://schemas.microsoft.com/office/drawing/2010/main" xmlns="" w="9525">
                   <a:solidFill>
                     <a:srgbClr val="000000"/>
                   </a:solidFill>
@@ -1739,7 +1740,7 @@
             </a:ln>
             <a:extLst>
               <a:ext uri="{91240B29-F687-4f45-9708-019B960494DF}">
-                <a14:hiddenLine xmlns="" xmlns:a14="http://schemas.microsoft.com/office/drawing/2010/main" w="9525">
+                <a14:hiddenLine xmlns:a14="http://schemas.microsoft.com/office/drawing/2010/main" xmlns="" w="9525">
                   <a:solidFill>
                     <a:srgbClr val="000000"/>
                   </a:solidFill>
@@ -1829,7 +1830,7 @@
             </a:ln>
             <a:extLst>
               <a:ext uri="{91240B29-F687-4f45-9708-019B960494DF}">
-                <a14:hiddenLine xmlns="" xmlns:a14="http://schemas.microsoft.com/office/drawing/2010/main" w="9525">
+                <a14:hiddenLine xmlns:a14="http://schemas.microsoft.com/office/drawing/2010/main" xmlns="" w="9525">
                   <a:solidFill>
                     <a:srgbClr val="000000"/>
                   </a:solidFill>
@@ -1919,7 +1920,7 @@
             </a:ln>
             <a:extLst>
               <a:ext uri="{91240B29-F687-4f45-9708-019B960494DF}">
-                <a14:hiddenLine xmlns="" xmlns:a14="http://schemas.microsoft.com/office/drawing/2010/main" w="9525">
+                <a14:hiddenLine xmlns:a14="http://schemas.microsoft.com/office/drawing/2010/main" xmlns="" w="9525">
                   <a:solidFill>
                     <a:srgbClr val="000000"/>
                   </a:solidFill>
@@ -1981,7 +1982,7 @@
             </a:ln>
             <a:extLst>
               <a:ext uri="{91240B29-F687-4f45-9708-019B960494DF}">
-                <a14:hiddenLine xmlns="" xmlns:a14="http://schemas.microsoft.com/office/drawing/2010/main" w="9525">
+                <a14:hiddenLine xmlns:a14="http://schemas.microsoft.com/office/drawing/2010/main" xmlns="" w="9525">
                   <a:solidFill>
                     <a:srgbClr val="000000"/>
                   </a:solidFill>
@@ -2071,7 +2072,7 @@
             </a:ln>
             <a:extLst>
               <a:ext uri="{91240B29-F687-4f45-9708-019B960494DF}">
-                <a14:hiddenLine xmlns="" xmlns:a14="http://schemas.microsoft.com/office/drawing/2010/main" w="9525">
+                <a14:hiddenLine xmlns:a14="http://schemas.microsoft.com/office/drawing/2010/main" xmlns="" w="9525">
                   <a:solidFill>
                     <a:srgbClr val="000000"/>
                   </a:solidFill>
@@ -2161,7 +2162,7 @@
             </a:ln>
             <a:extLst>
               <a:ext uri="{91240B29-F687-4f45-9708-019B960494DF}">
-                <a14:hiddenLine xmlns="" xmlns:a14="http://schemas.microsoft.com/office/drawing/2010/main" w="9525">
+                <a14:hiddenLine xmlns:a14="http://schemas.microsoft.com/office/drawing/2010/main" xmlns="" w="9525">
                   <a:solidFill>
                     <a:srgbClr val="000000"/>
                   </a:solidFill>
@@ -2217,7 +2218,7 @@
             </a:ln>
             <a:extLst>
               <a:ext uri="{91240B29-F687-4f45-9708-019B960494DF}">
-                <a14:hiddenLine xmlns="" xmlns:a14="http://schemas.microsoft.com/office/drawing/2010/main" w="9525">
+                <a14:hiddenLine xmlns:a14="http://schemas.microsoft.com/office/drawing/2010/main" xmlns="" w="9525">
                   <a:solidFill>
                     <a:srgbClr val="000000"/>
                   </a:solidFill>
@@ -2307,7 +2308,7 @@
             </a:ln>
             <a:extLst>
               <a:ext uri="{91240B29-F687-4f45-9708-019B960494DF}">
-                <a14:hiddenLine xmlns="" xmlns:a14="http://schemas.microsoft.com/office/drawing/2010/main" w="9525">
+                <a14:hiddenLine xmlns:a14="http://schemas.microsoft.com/office/drawing/2010/main" xmlns="" w="9525">
                   <a:solidFill>
                     <a:srgbClr val="000000"/>
                   </a:solidFill>
@@ -2363,7 +2364,7 @@
             </a:ln>
             <a:extLst>
               <a:ext uri="{91240B29-F687-4f45-9708-019B960494DF}">
-                <a14:hiddenLine xmlns="" xmlns:a14="http://schemas.microsoft.com/office/drawing/2010/main" w="9525">
+                <a14:hiddenLine xmlns:a14="http://schemas.microsoft.com/office/drawing/2010/main" xmlns="" w="9525">
                   <a:solidFill>
                     <a:srgbClr val="000000"/>
                   </a:solidFill>
@@ -2453,7 +2454,7 @@
             </a:ln>
             <a:extLst>
               <a:ext uri="{91240B29-F687-4f45-9708-019B960494DF}">
-                <a14:hiddenLine xmlns="" xmlns:a14="http://schemas.microsoft.com/office/drawing/2010/main" w="9525">
+                <a14:hiddenLine xmlns:a14="http://schemas.microsoft.com/office/drawing/2010/main" xmlns="" w="9525">
                   <a:solidFill>
                     <a:srgbClr val="000000"/>
                   </a:solidFill>
@@ -2521,7 +2522,7 @@
             </a:ln>
             <a:extLst>
               <a:ext uri="{91240B29-F687-4f45-9708-019B960494DF}">
-                <a14:hiddenLine xmlns="" xmlns:a14="http://schemas.microsoft.com/office/drawing/2010/main" w="9525">
+                <a14:hiddenLine xmlns:a14="http://schemas.microsoft.com/office/drawing/2010/main" xmlns="" w="9525">
                   <a:solidFill>
                     <a:srgbClr val="000000"/>
                   </a:solidFill>
@@ -2611,7 +2612,7 @@
             </a:ln>
             <a:extLst>
               <a:ext uri="{91240B29-F687-4f45-9708-019B960494DF}">
-                <a14:hiddenLine xmlns="" xmlns:a14="http://schemas.microsoft.com/office/drawing/2010/main" w="9525">
+                <a14:hiddenLine xmlns:a14="http://schemas.microsoft.com/office/drawing/2010/main" xmlns="" w="9525">
                   <a:solidFill>
                     <a:srgbClr val="000000"/>
                   </a:solidFill>
@@ -2679,7 +2680,7 @@
             </a:ln>
             <a:extLst>
               <a:ext uri="{91240B29-F687-4f45-9708-019B960494DF}">
-                <a14:hiddenLine xmlns="" xmlns:a14="http://schemas.microsoft.com/office/drawing/2010/main" w="9525">
+                <a14:hiddenLine xmlns:a14="http://schemas.microsoft.com/office/drawing/2010/main" xmlns="" w="9525">
                   <a:solidFill>
                     <a:srgbClr val="000000"/>
                   </a:solidFill>
@@ -2769,7 +2770,7 @@
             </a:ln>
             <a:extLst>
               <a:ext uri="{91240B29-F687-4f45-9708-019B960494DF}">
-                <a14:hiddenLine xmlns="" xmlns:a14="http://schemas.microsoft.com/office/drawing/2010/main" w="9525">
+                <a14:hiddenLine xmlns:a14="http://schemas.microsoft.com/office/drawing/2010/main" xmlns="" w="9525">
                   <a:solidFill>
                     <a:srgbClr val="000000"/>
                   </a:solidFill>
@@ -2803,7 +2804,7 @@
             </a:ln>
             <a:extLst>
               <a:ext uri="{91240B29-F687-4f45-9708-019B960494DF}">
-                <a14:hiddenLine xmlns="" xmlns:a14="http://schemas.microsoft.com/office/drawing/2010/main" w="9525">
+                <a14:hiddenLine xmlns:a14="http://schemas.microsoft.com/office/drawing/2010/main" xmlns="" w="9525">
                   <a:solidFill>
                     <a:srgbClr val="000000"/>
                   </a:solidFill>
@@ -2893,7 +2894,7 @@
             </a:ln>
             <a:extLst>
               <a:ext uri="{91240B29-F687-4f45-9708-019B960494DF}">
-                <a14:hiddenLine xmlns="" xmlns:a14="http://schemas.microsoft.com/office/drawing/2010/main" w="9525">
+                <a14:hiddenLine xmlns:a14="http://schemas.microsoft.com/office/drawing/2010/main" xmlns="" w="9525">
                   <a:solidFill>
                     <a:srgbClr val="000000"/>
                   </a:solidFill>
@@ -2955,7 +2956,7 @@
             </a:ln>
             <a:extLst>
               <a:ext uri="{91240B29-F687-4f45-9708-019B960494DF}">
-                <a14:hiddenLine xmlns="" xmlns:a14="http://schemas.microsoft.com/office/drawing/2010/main" w="9525">
+                <a14:hiddenLine xmlns:a14="http://schemas.microsoft.com/office/drawing/2010/main" xmlns="" w="9525">
                   <a:solidFill>
                     <a:srgbClr val="000000"/>
                   </a:solidFill>
@@ -3017,7 +3018,7 @@
             </a:ln>
             <a:extLst>
               <a:ext uri="{91240B29-F687-4f45-9708-019B960494DF}">
-                <a14:hiddenLine xmlns="" xmlns:a14="http://schemas.microsoft.com/office/drawing/2010/main" w="9525">
+                <a14:hiddenLine xmlns:a14="http://schemas.microsoft.com/office/drawing/2010/main" xmlns="" w="9525">
                   <a:solidFill>
                     <a:srgbClr val="000000"/>
                   </a:solidFill>
@@ -3107,7 +3108,7 @@
             </a:ln>
             <a:extLst>
               <a:ext uri="{91240B29-F687-4f45-9708-019B960494DF}">
-                <a14:hiddenLine xmlns="" xmlns:a14="http://schemas.microsoft.com/office/drawing/2010/main" w="9525">
+                <a14:hiddenLine xmlns:a14="http://schemas.microsoft.com/office/drawing/2010/main" xmlns="" w="9525">
                   <a:solidFill>
                     <a:srgbClr val="000000"/>
                   </a:solidFill>
@@ -3175,7 +3176,7 @@
             </a:ln>
             <a:extLst>
               <a:ext uri="{91240B29-F687-4f45-9708-019B960494DF}">
-                <a14:hiddenLine xmlns="" xmlns:a14="http://schemas.microsoft.com/office/drawing/2010/main" w="9525">
+                <a14:hiddenLine xmlns:a14="http://schemas.microsoft.com/office/drawing/2010/main" xmlns="" w="9525">
                   <a:solidFill>
                     <a:srgbClr val="000000"/>
                   </a:solidFill>
@@ -3237,7 +3238,7 @@
             </a:ln>
             <a:extLst>
               <a:ext uri="{91240B29-F687-4f45-9708-019B960494DF}">
-                <a14:hiddenLine xmlns="" xmlns:a14="http://schemas.microsoft.com/office/drawing/2010/main" w="9525">
+                <a14:hiddenLine xmlns:a14="http://schemas.microsoft.com/office/drawing/2010/main" xmlns="" w="9525">
                   <a:solidFill>
                     <a:srgbClr val="000000"/>
                   </a:solidFill>
@@ -3327,7 +3328,7 @@
             </a:ln>
             <a:extLst>
               <a:ext uri="{91240B29-F687-4f45-9708-019B960494DF}">
-                <a14:hiddenLine xmlns="" xmlns:a14="http://schemas.microsoft.com/office/drawing/2010/main" w="9525">
+                <a14:hiddenLine xmlns:a14="http://schemas.microsoft.com/office/drawing/2010/main" xmlns="" w="9525">
                   <a:solidFill>
                     <a:srgbClr val="000000"/>
                   </a:solidFill>
@@ -3389,7 +3390,7 @@
             </a:ln>
             <a:extLst>
               <a:ext uri="{91240B29-F687-4f45-9708-019B960494DF}">
-                <a14:hiddenLine xmlns="" xmlns:a14="http://schemas.microsoft.com/office/drawing/2010/main" w="9525">
+                <a14:hiddenLine xmlns:a14="http://schemas.microsoft.com/office/drawing/2010/main" xmlns="" w="9525">
                   <a:solidFill>
                     <a:srgbClr val="000000"/>
                   </a:solidFill>
@@ -3479,7 +3480,7 @@
             </a:ln>
             <a:extLst>
               <a:ext uri="{91240B29-F687-4f45-9708-019B960494DF}">
-                <a14:hiddenLine xmlns="" xmlns:a14="http://schemas.microsoft.com/office/drawing/2010/main" w="9525">
+                <a14:hiddenLine xmlns:a14="http://schemas.microsoft.com/office/drawing/2010/main" xmlns="" w="9525">
                   <a:solidFill>
                     <a:srgbClr val="000000"/>
                   </a:solidFill>
@@ -3541,7 +3542,7 @@
             </a:ln>
             <a:extLst>
               <a:ext uri="{91240B29-F687-4f45-9708-019B960494DF}">
-                <a14:hiddenLine xmlns="" xmlns:a14="http://schemas.microsoft.com/office/drawing/2010/main" w="9525">
+                <a14:hiddenLine xmlns:a14="http://schemas.microsoft.com/office/drawing/2010/main" xmlns="" w="9525">
                   <a:solidFill>
                     <a:srgbClr val="000000"/>
                   </a:solidFill>
@@ -3631,7 +3632,7 @@
             </a:ln>
             <a:extLst>
               <a:ext uri="{91240B29-F687-4f45-9708-019B960494DF}">
-                <a14:hiddenLine xmlns="" xmlns:a14="http://schemas.microsoft.com/office/drawing/2010/main" w="9525">
+                <a14:hiddenLine xmlns:a14="http://schemas.microsoft.com/office/drawing/2010/main" xmlns="" w="9525">
                   <a:solidFill>
                     <a:srgbClr val="000000"/>
                   </a:solidFill>
@@ -3665,7 +3666,7 @@
             </a:ln>
             <a:extLst>
               <a:ext uri="{91240B29-F687-4f45-9708-019B960494DF}">
-                <a14:hiddenLine xmlns="" xmlns:a14="http://schemas.microsoft.com/office/drawing/2010/main" w="9525">
+                <a14:hiddenLine xmlns:a14="http://schemas.microsoft.com/office/drawing/2010/main" xmlns="" w="9525">
                   <a:solidFill>
                     <a:srgbClr val="000000"/>
                   </a:solidFill>
@@ -3730,7 +3731,7 @@
             </a:ln>
             <a:extLst>
               <a:ext uri="{91240B29-F687-4f45-9708-019B960494DF}">
-                <a14:hiddenLine xmlns="" xmlns:a14="http://schemas.microsoft.com/office/drawing/2010/main" w="9525">
+                <a14:hiddenLine xmlns:a14="http://schemas.microsoft.com/office/drawing/2010/main" xmlns="" w="9525">
                   <a:solidFill>
                     <a:srgbClr val="000000"/>
                   </a:solidFill>
@@ -3820,7 +3821,7 @@
             </a:ln>
             <a:extLst>
               <a:ext uri="{91240B29-F687-4f45-9708-019B960494DF}">
-                <a14:hiddenLine xmlns="" xmlns:a14="http://schemas.microsoft.com/office/drawing/2010/main" w="9525">
+                <a14:hiddenLine xmlns:a14="http://schemas.microsoft.com/office/drawing/2010/main" xmlns="" w="9525">
                   <a:solidFill>
                     <a:srgbClr val="000000"/>
                   </a:solidFill>
@@ -3882,7 +3883,7 @@
             </a:ln>
             <a:extLst>
               <a:ext uri="{91240B29-F687-4f45-9708-019B960494DF}">
-                <a14:hiddenLine xmlns="" xmlns:a14="http://schemas.microsoft.com/office/drawing/2010/main" w="9525">
+                <a14:hiddenLine xmlns:a14="http://schemas.microsoft.com/office/drawing/2010/main" xmlns="" w="9525">
                   <a:solidFill>
                     <a:srgbClr val="000000"/>
                   </a:solidFill>
@@ -3972,7 +3973,7 @@
             </a:ln>
             <a:extLst>
               <a:ext uri="{91240B29-F687-4f45-9708-019B960494DF}">
-                <a14:hiddenLine xmlns="" xmlns:a14="http://schemas.microsoft.com/office/drawing/2010/main" w="9525">
+                <a14:hiddenLine xmlns:a14="http://schemas.microsoft.com/office/drawing/2010/main" xmlns="" w="9525">
                   <a:solidFill>
                     <a:srgbClr val="000000"/>
                   </a:solidFill>
@@ -4062,7 +4063,7 @@
             </a:ln>
             <a:extLst>
               <a:ext uri="{91240B29-F687-4f45-9708-019B960494DF}">
-                <a14:hiddenLine xmlns="" xmlns:a14="http://schemas.microsoft.com/office/drawing/2010/main" w="9525">
+                <a14:hiddenLine xmlns:a14="http://schemas.microsoft.com/office/drawing/2010/main" xmlns="" w="9525">
                   <a:solidFill>
                     <a:srgbClr val="000000"/>
                   </a:solidFill>
@@ -4127,7 +4128,7 @@
             </a:ln>
             <a:extLst>
               <a:ext uri="{91240B29-F687-4f45-9708-019B960494DF}">
-                <a14:hiddenLine xmlns="" xmlns:a14="http://schemas.microsoft.com/office/drawing/2010/main" w="9525">
+                <a14:hiddenLine xmlns:a14="http://schemas.microsoft.com/office/drawing/2010/main" xmlns="" w="9525">
                   <a:solidFill>
                     <a:srgbClr val="000000"/>
                   </a:solidFill>
@@ -4189,7 +4190,7 @@
             </a:ln>
             <a:extLst>
               <a:ext uri="{91240B29-F687-4f45-9708-019B960494DF}">
-                <a14:hiddenLine xmlns="" xmlns:a14="http://schemas.microsoft.com/office/drawing/2010/main" w="9525">
+                <a14:hiddenLine xmlns:a14="http://schemas.microsoft.com/office/drawing/2010/main" xmlns="" w="9525">
                   <a:solidFill>
                     <a:srgbClr val="000000"/>
                   </a:solidFill>
@@ -4279,7 +4280,7 @@
             </a:ln>
             <a:extLst>
               <a:ext uri="{91240B29-F687-4f45-9708-019B960494DF}">
-                <a14:hiddenLine xmlns="" xmlns:a14="http://schemas.microsoft.com/office/drawing/2010/main" w="9525">
+                <a14:hiddenLine xmlns:a14="http://schemas.microsoft.com/office/drawing/2010/main" xmlns="" w="9525">
                   <a:solidFill>
                     <a:srgbClr val="000000"/>
                   </a:solidFill>
@@ -4369,7 +4370,7 @@
             </a:ln>
             <a:extLst>
               <a:ext uri="{91240B29-F687-4f45-9708-019B960494DF}">
-                <a14:hiddenLine xmlns="" xmlns:a14="http://schemas.microsoft.com/office/drawing/2010/main" w="9525">
+                <a14:hiddenLine xmlns:a14="http://schemas.microsoft.com/office/drawing/2010/main" xmlns="" w="9525">
                   <a:solidFill>
                     <a:srgbClr val="000000"/>
                   </a:solidFill>
@@ -4431,7 +4432,7 @@
             </a:ln>
             <a:extLst>
               <a:ext uri="{91240B29-F687-4f45-9708-019B960494DF}">
-                <a14:hiddenLine xmlns="" xmlns:a14="http://schemas.microsoft.com/office/drawing/2010/main" w="9525">
+                <a14:hiddenLine xmlns:a14="http://schemas.microsoft.com/office/drawing/2010/main" xmlns="" w="9525">
                   <a:solidFill>
                     <a:srgbClr val="000000"/>
                   </a:solidFill>
@@ -4551,7 +4552,7 @@
             </a:ln>
             <a:extLst>
               <a:ext uri="{91240B29-F687-4f45-9708-019B960494DF}">
-                <a14:hiddenLine xmlns="" xmlns:a14="http://schemas.microsoft.com/office/drawing/2010/main" w="9525">
+                <a14:hiddenLine xmlns:a14="http://schemas.microsoft.com/office/drawing/2010/main" xmlns="" w="9525">
                   <a:solidFill>
                     <a:srgbClr val="000000"/>
                   </a:solidFill>
@@ -4619,7 +4620,7 @@
             </a:ln>
             <a:extLst>
               <a:ext uri="{91240B29-F687-4f45-9708-019B960494DF}">
-                <a14:hiddenLine xmlns="" xmlns:a14="http://schemas.microsoft.com/office/drawing/2010/main" w="9525">
+                <a14:hiddenLine xmlns:a14="http://schemas.microsoft.com/office/drawing/2010/main" xmlns="" w="9525">
                   <a:solidFill>
                     <a:srgbClr val="000000"/>
                   </a:solidFill>
@@ -4709,7 +4710,7 @@
             </a:ln>
             <a:extLst>
               <a:ext uri="{91240B29-F687-4f45-9708-019B960494DF}">
-                <a14:hiddenLine xmlns="" xmlns:a14="http://schemas.microsoft.com/office/drawing/2010/main" w="9525">
+                <a14:hiddenLine xmlns:a14="http://schemas.microsoft.com/office/drawing/2010/main" xmlns="" w="9525">
                   <a:solidFill>
                     <a:srgbClr val="000000"/>
                   </a:solidFill>
@@ -4849,7 +4850,7 @@
           <a:p>
             <a:fld id="{4313F670-7F9A-774D-B73D-573401E44297}" type="datetime1">
               <a:rPr lang="en-US" smtClean="0"/>
-              <a:t>10/15/26</a:t>
+              <a:t>10/20/26</a:t>
             </a:fld>
             <a:endParaRPr lang="en-US"/>
           </a:p>
@@ -5116,7 +5117,7 @@
           <a:p>
             <a:fld id="{446F9669-A8A7-2D40-9D01-B35FC337AA30}" type="datetime1">
               <a:rPr lang="en-US" smtClean="0"/>
-              <a:t>10/15/26</a:t>
+              <a:t>10/20/26</a:t>
             </a:fld>
             <a:endParaRPr lang="en-US"/>
           </a:p>
@@ -5312,7 +5313,7 @@
           <a:p>
             <a:fld id="{FA76CF18-F41B-6B48-B3E5-599E9795C2C3}" type="datetime1">
               <a:rPr lang="en-US" smtClean="0"/>
-              <a:t>10/15/26</a:t>
+              <a:t>10/20/26</a:t>
             </a:fld>
             <a:endParaRPr lang="en-US"/>
           </a:p>
@@ -5575,7 +5576,7 @@
           <a:p>
             <a:fld id="{B9654854-6457-164F-A077-6B3035079B82}" type="datetime1">
               <a:rPr lang="en-US" smtClean="0"/>
-              <a:t>10/15/26</a:t>
+              <a:t>10/20/26</a:t>
             </a:fld>
             <a:endParaRPr lang="en-US"/>
           </a:p>
@@ -6009,7 +6010,7 @@
           <a:p>
             <a:fld id="{CE3DBFD7-E611-8C40-AC73-0C29FF63F0CD}" type="datetime1">
               <a:rPr lang="en-US" smtClean="0"/>
-              <a:t>10/15/26</a:t>
+              <a:t>10/20/26</a:t>
             </a:fld>
             <a:endParaRPr lang="en-US"/>
           </a:p>
@@ -6555,7 +6556,7 @@
           <a:p>
             <a:fld id="{C8B63B06-0493-2840-9F37-30C9412BBF17}" type="datetime1">
               <a:rPr lang="en-US" smtClean="0"/>
-              <a:t>10/15/26</a:t>
+              <a:t>10/20/26</a:t>
             </a:fld>
             <a:endParaRPr lang="en-US"/>
           </a:p>
@@ -7275,7 +7276,7 @@
           <a:p>
             <a:fld id="{72B5C0FA-8C46-E84D-B6D7-B673F2CA0A0E}" type="datetime1">
               <a:rPr lang="en-US" smtClean="0"/>
-              <a:t>10/15/26</a:t>
+              <a:t>10/20/26</a:t>
             </a:fld>
             <a:endParaRPr lang="en-US"/>
           </a:p>
@@ -7445,7 +7446,7 @@
           <a:p>
             <a:fld id="{60B9CDE1-97B4-BF46-B69C-B86855B18820}" type="datetime1">
               <a:rPr lang="en-US" smtClean="0"/>
-              <a:t>10/15/26</a:t>
+              <a:t>10/20/26</a:t>
             </a:fld>
             <a:endParaRPr lang="en-US"/>
           </a:p>
@@ -7625,7 +7626,7 @@
           <a:p>
             <a:fld id="{BE51D3A4-F9E5-FD49-AA87-B395F50451DC}" type="datetime1">
               <a:rPr lang="en-US" smtClean="0"/>
-              <a:t>10/15/26</a:t>
+              <a:t>10/20/26</a:t>
             </a:fld>
             <a:endParaRPr lang="en-US"/>
           </a:p>
@@ -7795,7 +7796,7 @@
           <a:p>
             <a:fld id="{880DFB37-B0AE-9449-85EC-14F9C83B6084}" type="datetime1">
               <a:rPr lang="en-US" smtClean="0"/>
-              <a:t>10/15/26</a:t>
+              <a:t>10/20/26</a:t>
             </a:fld>
             <a:endParaRPr lang="en-US"/>
           </a:p>
@@ -8045,7 +8046,7 @@
           <a:p>
             <a:fld id="{C939124A-616E-6944-A21A-1839F5DBE7BB}" type="datetime1">
               <a:rPr lang="en-US" smtClean="0"/>
-              <a:t>10/15/26</a:t>
+              <a:t>10/20/26</a:t>
             </a:fld>
             <a:endParaRPr lang="en-US"/>
           </a:p>
@@ -8277,7 +8278,7 @@
           <a:p>
             <a:fld id="{C6E9A026-D48C-FD43-8676-CD625DD5D84B}" type="datetime1">
               <a:rPr lang="en-US" smtClean="0"/>
-              <a:t>10/15/26</a:t>
+              <a:t>10/20/26</a:t>
             </a:fld>
             <a:endParaRPr lang="en-US"/>
           </a:p>
@@ -8663,7 +8664,7 @@
           <a:p>
             <a:fld id="{EA35111E-23A3-1440-99A3-C4C665908E3D}" type="datetime1">
               <a:rPr lang="en-US" smtClean="0"/>
-              <a:t>10/15/26</a:t>
+              <a:t>10/20/26</a:t>
             </a:fld>
             <a:endParaRPr lang="en-US"/>
           </a:p>
@@ -8786,7 +8787,7 @@
           <a:p>
             <a:fld id="{249983B9-88EF-D74B-BA6D-6A3BF17C2B38}" type="datetime1">
               <a:rPr lang="en-US" smtClean="0"/>
-              <a:t>10/15/26</a:t>
+              <a:t>10/20/26</a:t>
             </a:fld>
             <a:endParaRPr lang="en-US"/>
           </a:p>
@@ -8881,7 +8882,7 @@
           <a:p>
             <a:fld id="{E2A00AEF-B4EC-084A-8DB8-A225C7981CBB}" type="datetime1">
               <a:rPr lang="en-US" smtClean="0"/>
-              <a:t>10/15/26</a:t>
+              <a:t>10/20/26</a:t>
             </a:fld>
             <a:endParaRPr lang="en-US"/>
           </a:p>
@@ -9130,7 +9131,7 @@
           <a:p>
             <a:fld id="{97860299-21CD-A94A-A7B0-44E787F8D42C}" type="datetime1">
               <a:rPr lang="en-US" smtClean="0"/>
-              <a:t>10/15/26</a:t>
+              <a:t>10/20/26</a:t>
             </a:fld>
             <a:endParaRPr lang="en-US"/>
           </a:p>
@@ -9415,7 +9416,7 @@
           <a:p>
             <a:fld id="{3DFD19CF-4E62-D246-BA61-7B528271315F}" type="datetime1">
               <a:rPr lang="en-US" smtClean="0"/>
-              <a:t>10/15/26</a:t>
+              <a:t>10/20/26</a:t>
             </a:fld>
             <a:endParaRPr lang="en-US"/>
           </a:p>
@@ -9538,7 +9539,7 @@
           <a:noFill/>
           <a:extLst>
             <a:ext uri="{909E8E84-426E-40dd-AFC4-6F175D3DCCD1}">
-              <a14:hiddenFill xmlns="" xmlns:a14="http://schemas.microsoft.com/office/drawing/2010/main">
+              <a14:hiddenFill xmlns:a14="http://schemas.microsoft.com/office/drawing/2010/main" xmlns="">
                 <a:solidFill>
                   <a:srgbClr val="FFFFFF"/>
                 </a:solidFill>
@@ -9612,7 +9613,7 @@
               </a:ln>
               <a:extLst>
                 <a:ext uri="{91240B29-F687-4f45-9708-019B960494DF}">
-                  <a14:hiddenLine xmlns="" xmlns:a14="http://schemas.microsoft.com/office/drawing/2010/main" w="9525">
+                  <a14:hiddenLine xmlns:a14="http://schemas.microsoft.com/office/drawing/2010/main" xmlns="" w="9525">
                     <a:solidFill>
                       <a:srgbClr val="000000"/>
                     </a:solidFill>
@@ -9702,7 +9703,7 @@
               </a:ln>
               <a:extLst>
                 <a:ext uri="{91240B29-F687-4f45-9708-019B960494DF}">
-                  <a14:hiddenLine xmlns="" xmlns:a14="http://schemas.microsoft.com/office/drawing/2010/main" w="9525">
+                  <a14:hiddenLine xmlns:a14="http://schemas.microsoft.com/office/drawing/2010/main" xmlns="" w="9525">
                     <a:solidFill>
                       <a:srgbClr val="000000"/>
                     </a:solidFill>
@@ -9792,7 +9793,7 @@
               </a:ln>
               <a:extLst>
                 <a:ext uri="{91240B29-F687-4f45-9708-019B960494DF}">
-                  <a14:hiddenLine xmlns="" xmlns:a14="http://schemas.microsoft.com/office/drawing/2010/main" w="9525">
+                  <a14:hiddenLine xmlns:a14="http://schemas.microsoft.com/office/drawing/2010/main" xmlns="" w="9525">
                     <a:solidFill>
                       <a:srgbClr val="000000"/>
                     </a:solidFill>
@@ -9854,7 +9855,7 @@
               </a:ln>
               <a:extLst>
                 <a:ext uri="{91240B29-F687-4f45-9708-019B960494DF}">
-                  <a14:hiddenLine xmlns="" xmlns:a14="http://schemas.microsoft.com/office/drawing/2010/main" w="9525">
+                  <a14:hiddenLine xmlns:a14="http://schemas.microsoft.com/office/drawing/2010/main" xmlns="" w="9525">
                     <a:solidFill>
                       <a:srgbClr val="000000"/>
                     </a:solidFill>
@@ -9944,7 +9945,7 @@
               </a:ln>
               <a:extLst>
                 <a:ext uri="{91240B29-F687-4f45-9708-019B960494DF}">
-                  <a14:hiddenLine xmlns="" xmlns:a14="http://schemas.microsoft.com/office/drawing/2010/main" w="9525">
+                  <a14:hiddenLine xmlns:a14="http://schemas.microsoft.com/office/drawing/2010/main" xmlns="" w="9525">
                     <a:solidFill>
                       <a:srgbClr val="000000"/>
                     </a:solidFill>
@@ -10006,7 +10007,7 @@
               </a:ln>
               <a:extLst>
                 <a:ext uri="{91240B29-F687-4f45-9708-019B960494DF}">
-                  <a14:hiddenLine xmlns="" xmlns:a14="http://schemas.microsoft.com/office/drawing/2010/main" w="9525">
+                  <a14:hiddenLine xmlns:a14="http://schemas.microsoft.com/office/drawing/2010/main" xmlns="" w="9525">
                     <a:solidFill>
                       <a:srgbClr val="000000"/>
                     </a:solidFill>
@@ -10068,7 +10069,7 @@
               </a:ln>
               <a:extLst>
                 <a:ext uri="{91240B29-F687-4f45-9708-019B960494DF}">
-                  <a14:hiddenLine xmlns="" xmlns:a14="http://schemas.microsoft.com/office/drawing/2010/main" w="9525">
+                  <a14:hiddenLine xmlns:a14="http://schemas.microsoft.com/office/drawing/2010/main" xmlns="" w="9525">
                     <a:solidFill>
                       <a:srgbClr val="000000"/>
                     </a:solidFill>
@@ -10158,7 +10159,7 @@
               </a:ln>
               <a:extLst>
                 <a:ext uri="{91240B29-F687-4f45-9708-019B960494DF}">
-                  <a14:hiddenLine xmlns="" xmlns:a14="http://schemas.microsoft.com/office/drawing/2010/main" w="9525">
+                  <a14:hiddenLine xmlns:a14="http://schemas.microsoft.com/office/drawing/2010/main" xmlns="" w="9525">
                     <a:solidFill>
                       <a:srgbClr val="000000"/>
                     </a:solidFill>
@@ -10248,7 +10249,7 @@
               </a:ln>
               <a:extLst>
                 <a:ext uri="{91240B29-F687-4f45-9708-019B960494DF}">
-                  <a14:hiddenLine xmlns="" xmlns:a14="http://schemas.microsoft.com/office/drawing/2010/main" w="9525">
+                  <a14:hiddenLine xmlns:a14="http://schemas.microsoft.com/office/drawing/2010/main" xmlns="" w="9525">
                     <a:solidFill>
                       <a:srgbClr val="000000"/>
                     </a:solidFill>
@@ -10310,7 +10311,7 @@
               </a:ln>
               <a:extLst>
                 <a:ext uri="{91240B29-F687-4f45-9708-019B960494DF}">
-                  <a14:hiddenLine xmlns="" xmlns:a14="http://schemas.microsoft.com/office/drawing/2010/main" w="9525">
+                  <a14:hiddenLine xmlns:a14="http://schemas.microsoft.com/office/drawing/2010/main" xmlns="" w="9525">
                     <a:solidFill>
                       <a:srgbClr val="000000"/>
                     </a:solidFill>
@@ -10420,7 +10421,7 @@
               </a:ln>
               <a:extLst>
                 <a:ext uri="{91240B29-F687-4f45-9708-019B960494DF}">
-                  <a14:hiddenLine xmlns="" xmlns:a14="http://schemas.microsoft.com/office/drawing/2010/main" w="9525">
+                  <a14:hiddenLine xmlns:a14="http://schemas.microsoft.com/office/drawing/2010/main" xmlns="" w="9525">
                     <a:solidFill>
                       <a:srgbClr val="000000"/>
                     </a:solidFill>
@@ -10504,7 +10505,7 @@
               </a:ln>
               <a:extLst>
                 <a:ext uri="{91240B29-F687-4f45-9708-019B960494DF}">
-                  <a14:hiddenLine xmlns="" xmlns:a14="http://schemas.microsoft.com/office/drawing/2010/main" w="9525">
+                  <a14:hiddenLine xmlns:a14="http://schemas.microsoft.com/office/drawing/2010/main" xmlns="" w="9525">
                     <a:solidFill>
                       <a:srgbClr val="000000"/>
                     </a:solidFill>
@@ -10566,7 +10567,7 @@
               </a:ln>
               <a:extLst>
                 <a:ext uri="{91240B29-F687-4f45-9708-019B960494DF}">
-                  <a14:hiddenLine xmlns="" xmlns:a14="http://schemas.microsoft.com/office/drawing/2010/main" w="9525">
+                  <a14:hiddenLine xmlns:a14="http://schemas.microsoft.com/office/drawing/2010/main" xmlns="" w="9525">
                     <a:solidFill>
                       <a:srgbClr val="000000"/>
                     </a:solidFill>
@@ -10628,7 +10629,7 @@
               </a:ln>
               <a:extLst>
                 <a:ext uri="{91240B29-F687-4f45-9708-019B960494DF}">
-                  <a14:hiddenLine xmlns="" xmlns:a14="http://schemas.microsoft.com/office/drawing/2010/main" w="9525">
+                  <a14:hiddenLine xmlns:a14="http://schemas.microsoft.com/office/drawing/2010/main" xmlns="" w="9525">
                     <a:solidFill>
                       <a:srgbClr val="000000"/>
                     </a:solidFill>
@@ -10718,7 +10719,7 @@
               </a:ln>
               <a:extLst>
                 <a:ext uri="{91240B29-F687-4f45-9708-019B960494DF}">
-                  <a14:hiddenLine xmlns="" xmlns:a14="http://schemas.microsoft.com/office/drawing/2010/main" w="9525">
+                  <a14:hiddenLine xmlns:a14="http://schemas.microsoft.com/office/drawing/2010/main" xmlns="" w="9525">
                     <a:solidFill>
                       <a:srgbClr val="000000"/>
                     </a:solidFill>
@@ -10752,7 +10753,7 @@
               </a:ln>
               <a:extLst>
                 <a:ext uri="{91240B29-F687-4f45-9708-019B960494DF}">
-                  <a14:hiddenLine xmlns="" xmlns:a14="http://schemas.microsoft.com/office/drawing/2010/main" w="9525">
+                  <a14:hiddenLine xmlns:a14="http://schemas.microsoft.com/office/drawing/2010/main" xmlns="" w="9525">
                     <a:solidFill>
                       <a:srgbClr val="000000"/>
                     </a:solidFill>
@@ -10817,7 +10818,7 @@
               </a:ln>
               <a:extLst>
                 <a:ext uri="{91240B29-F687-4f45-9708-019B960494DF}">
-                  <a14:hiddenLine xmlns="" xmlns:a14="http://schemas.microsoft.com/office/drawing/2010/main" w="9525">
+                  <a14:hiddenLine xmlns:a14="http://schemas.microsoft.com/office/drawing/2010/main" xmlns="" w="9525">
                     <a:solidFill>
                       <a:srgbClr val="000000"/>
                     </a:solidFill>
@@ -10907,7 +10908,7 @@
               </a:ln>
               <a:extLst>
                 <a:ext uri="{91240B29-F687-4f45-9708-019B960494DF}">
-                  <a14:hiddenLine xmlns="" xmlns:a14="http://schemas.microsoft.com/office/drawing/2010/main" w="9525">
+                  <a14:hiddenLine xmlns:a14="http://schemas.microsoft.com/office/drawing/2010/main" xmlns="" w="9525">
                     <a:solidFill>
                       <a:srgbClr val="000000"/>
                     </a:solidFill>
@@ -10969,7 +10970,7 @@
               </a:ln>
               <a:extLst>
                 <a:ext uri="{91240B29-F687-4f45-9708-019B960494DF}">
-                  <a14:hiddenLine xmlns="" xmlns:a14="http://schemas.microsoft.com/office/drawing/2010/main" w="9525">
+                  <a14:hiddenLine xmlns:a14="http://schemas.microsoft.com/office/drawing/2010/main" xmlns="" w="9525">
                     <a:solidFill>
                       <a:srgbClr val="000000"/>
                     </a:solidFill>
@@ -11059,7 +11060,7 @@
               </a:ln>
               <a:extLst>
                 <a:ext uri="{91240B29-F687-4f45-9708-019B960494DF}">
-                  <a14:hiddenLine xmlns="" xmlns:a14="http://schemas.microsoft.com/office/drawing/2010/main" w="9525">
+                  <a14:hiddenLine xmlns:a14="http://schemas.microsoft.com/office/drawing/2010/main" xmlns="" w="9525">
                     <a:solidFill>
                       <a:srgbClr val="000000"/>
                     </a:solidFill>
@@ -11124,7 +11125,7 @@
               </a:ln>
               <a:extLst>
                 <a:ext uri="{91240B29-F687-4f45-9708-019B960494DF}">
-                  <a14:hiddenLine xmlns="" xmlns:a14="http://schemas.microsoft.com/office/drawing/2010/main" w="9525">
+                  <a14:hiddenLine xmlns:a14="http://schemas.microsoft.com/office/drawing/2010/main" xmlns="" w="9525">
                     <a:solidFill>
                       <a:srgbClr val="000000"/>
                     </a:solidFill>
@@ -11186,7 +11187,7 @@
               </a:ln>
               <a:extLst>
                 <a:ext uri="{91240B29-F687-4f45-9708-019B960494DF}">
-                  <a14:hiddenLine xmlns="" xmlns:a14="http://schemas.microsoft.com/office/drawing/2010/main" w="9525">
+                  <a14:hiddenLine xmlns:a14="http://schemas.microsoft.com/office/drawing/2010/main" xmlns="" w="9525">
                     <a:solidFill>
                       <a:srgbClr val="000000"/>
                     </a:solidFill>
@@ -11276,7 +11277,7 @@
               </a:ln>
               <a:extLst>
                 <a:ext uri="{91240B29-F687-4f45-9708-019B960494DF}">
-                  <a14:hiddenLine xmlns="" xmlns:a14="http://schemas.microsoft.com/office/drawing/2010/main" w="9525">
+                  <a14:hiddenLine xmlns:a14="http://schemas.microsoft.com/office/drawing/2010/main" xmlns="" w="9525">
                     <a:solidFill>
                       <a:srgbClr val="000000"/>
                     </a:solidFill>
@@ -11366,7 +11367,7 @@
               </a:ln>
               <a:extLst>
                 <a:ext uri="{91240B29-F687-4f45-9708-019B960494DF}">
-                  <a14:hiddenLine xmlns="" xmlns:a14="http://schemas.microsoft.com/office/drawing/2010/main" w="9525">
+                  <a14:hiddenLine xmlns:a14="http://schemas.microsoft.com/office/drawing/2010/main" xmlns="" w="9525">
                     <a:solidFill>
                       <a:srgbClr val="000000"/>
                     </a:solidFill>
@@ -11431,7 +11432,7 @@
               </a:ln>
               <a:extLst>
                 <a:ext uri="{91240B29-F687-4f45-9708-019B960494DF}">
-                  <a14:hiddenLine xmlns="" xmlns:a14="http://schemas.microsoft.com/office/drawing/2010/main" w="9525">
+                  <a14:hiddenLine xmlns:a14="http://schemas.microsoft.com/office/drawing/2010/main" xmlns="" w="9525">
                     <a:solidFill>
                       <a:srgbClr val="000000"/>
                     </a:solidFill>
@@ -11551,7 +11552,7 @@
               </a:ln>
               <a:extLst>
                 <a:ext uri="{91240B29-F687-4f45-9708-019B960494DF}">
-                  <a14:hiddenLine xmlns="" xmlns:a14="http://schemas.microsoft.com/office/drawing/2010/main" w="9525">
+                  <a14:hiddenLine xmlns:a14="http://schemas.microsoft.com/office/drawing/2010/main" xmlns="" w="9525">
                     <a:solidFill>
                       <a:srgbClr val="000000"/>
                     </a:solidFill>
@@ -11632,7 +11633,7 @@
               </a:ln>
               <a:extLst>
                 <a:ext uri="{91240B29-F687-4f45-9708-019B960494DF}">
-                  <a14:hiddenLine xmlns="" xmlns:a14="http://schemas.microsoft.com/office/drawing/2010/main" w="9525">
+                  <a14:hiddenLine xmlns:a14="http://schemas.microsoft.com/office/drawing/2010/main" xmlns="" w="9525">
                     <a:solidFill>
                       <a:srgbClr val="000000"/>
                     </a:solidFill>
@@ -11747,7 +11748,7 @@
               </a:ln>
               <a:extLst>
                 <a:ext uri="{91240B29-F687-4f45-9708-019B960494DF}">
-                  <a14:hiddenLine xmlns="" xmlns:a14="http://schemas.microsoft.com/office/drawing/2010/main" w="9525">
+                  <a14:hiddenLine xmlns:a14="http://schemas.microsoft.com/office/drawing/2010/main" xmlns="" w="9525">
                     <a:solidFill>
                       <a:srgbClr val="000000"/>
                     </a:solidFill>
@@ -11837,7 +11838,7 @@
               </a:ln>
               <a:extLst>
                 <a:ext uri="{91240B29-F687-4f45-9708-019B960494DF}">
-                  <a14:hiddenLine xmlns="" xmlns:a14="http://schemas.microsoft.com/office/drawing/2010/main" w="9525">
+                  <a14:hiddenLine xmlns:a14="http://schemas.microsoft.com/office/drawing/2010/main" xmlns="" w="9525">
                     <a:solidFill>
                       <a:srgbClr val="000000"/>
                     </a:solidFill>
@@ -11902,7 +11903,7 @@
               </a:ln>
               <a:extLst>
                 <a:ext uri="{91240B29-F687-4f45-9708-019B960494DF}">
-                  <a14:hiddenLine xmlns="" xmlns:a14="http://schemas.microsoft.com/office/drawing/2010/main" w="9525">
+                  <a14:hiddenLine xmlns:a14="http://schemas.microsoft.com/office/drawing/2010/main" xmlns="" w="9525">
                     <a:solidFill>
                       <a:srgbClr val="000000"/>
                     </a:solidFill>
@@ -11992,7 +11993,7 @@
               </a:ln>
               <a:extLst>
                 <a:ext uri="{91240B29-F687-4f45-9708-019B960494DF}">
-                  <a14:hiddenLine xmlns="" xmlns:a14="http://schemas.microsoft.com/office/drawing/2010/main" w="9525">
+                  <a14:hiddenLine xmlns:a14="http://schemas.microsoft.com/office/drawing/2010/main" xmlns="" w="9525">
                     <a:solidFill>
                       <a:srgbClr val="000000"/>
                     </a:solidFill>
@@ -12060,7 +12061,7 @@
               </a:ln>
               <a:extLst>
                 <a:ext uri="{91240B29-F687-4f45-9708-019B960494DF}">
-                  <a14:hiddenLine xmlns="" xmlns:a14="http://schemas.microsoft.com/office/drawing/2010/main" w="9525">
+                  <a14:hiddenLine xmlns:a14="http://schemas.microsoft.com/office/drawing/2010/main" xmlns="" w="9525">
                     <a:solidFill>
                       <a:srgbClr val="000000"/>
                     </a:solidFill>
@@ -12150,7 +12151,7 @@
               </a:ln>
               <a:extLst>
                 <a:ext uri="{91240B29-F687-4f45-9708-019B960494DF}">
-                  <a14:hiddenLine xmlns="" xmlns:a14="http://schemas.microsoft.com/office/drawing/2010/main" w="9525">
+                  <a14:hiddenLine xmlns:a14="http://schemas.microsoft.com/office/drawing/2010/main" xmlns="" w="9525">
                     <a:solidFill>
                       <a:srgbClr val="000000"/>
                     </a:solidFill>
@@ -12218,7 +12219,7 @@
               </a:ln>
               <a:extLst>
                 <a:ext uri="{91240B29-F687-4f45-9708-019B960494DF}">
-                  <a14:hiddenLine xmlns="" xmlns:a14="http://schemas.microsoft.com/office/drawing/2010/main" w="9525">
+                  <a14:hiddenLine xmlns:a14="http://schemas.microsoft.com/office/drawing/2010/main" xmlns="" w="9525">
                     <a:solidFill>
                       <a:srgbClr val="000000"/>
                     </a:solidFill>
@@ -12308,7 +12309,7 @@
               </a:ln>
               <a:extLst>
                 <a:ext uri="{91240B29-F687-4f45-9708-019B960494DF}">
-                  <a14:hiddenLine xmlns="" xmlns:a14="http://schemas.microsoft.com/office/drawing/2010/main" w="9525">
+                  <a14:hiddenLine xmlns:a14="http://schemas.microsoft.com/office/drawing/2010/main" xmlns="" w="9525">
                     <a:solidFill>
                       <a:srgbClr val="000000"/>
                     </a:solidFill>
@@ -12342,7 +12343,7 @@
               </a:ln>
               <a:extLst>
                 <a:ext uri="{91240B29-F687-4f45-9708-019B960494DF}">
-                  <a14:hiddenLine xmlns="" xmlns:a14="http://schemas.microsoft.com/office/drawing/2010/main" w="9525">
+                  <a14:hiddenLine xmlns:a14="http://schemas.microsoft.com/office/drawing/2010/main" xmlns="" w="9525">
                     <a:solidFill>
                       <a:srgbClr val="000000"/>
                     </a:solidFill>
@@ -12482,7 +12483,7 @@
           <a:p>
             <a:fld id="{92FF8978-FE14-CC4A-93A6-934EB06543C0}" type="datetime1">
               <a:rPr lang="en-US" smtClean="0"/>
-              <a:t>10/15/26</a:t>
+              <a:t>10/20/26</a:t>
             </a:fld>
             <a:endParaRPr lang="en-US"/>
           </a:p>
@@ -15916,6 +15917,278 @@
   <p:cSld>
     <p:spTree>
       <p:nvGrpSpPr>
+        <p:cNvPr id="1" name="">
+          <a:extLst>
+            <a:ext uri="{FF2B5EF4-FFF2-40B4-BE49-F238E27FC236}">
+              <a16:creationId xmlns:a16="http://schemas.microsoft.com/office/drawing/2014/main" id="{15C99F73-633F-DEE4-EAE3-10527E86ABF2}"/>
+            </a:ext>
+          </a:extLst>
+        </p:cNvPr>
+        <p:cNvGrpSpPr/>
+        <p:nvPr/>
+      </p:nvGrpSpPr>
+      <p:grpSpPr>
+        <a:xfrm>
+          <a:off x="0" y="0"/>
+          <a:ext cx="0" cy="0"/>
+          <a:chOff x="0" y="0"/>
+          <a:chExt cx="0" cy="0"/>
+        </a:xfrm>
+      </p:grpSpPr>
+      <p:sp>
+        <p:nvSpPr>
+          <p:cNvPr id="6146" name="Rectangle 2">
+            <a:extLst>
+              <a:ext uri="{FF2B5EF4-FFF2-40B4-BE49-F238E27FC236}">
+                <a16:creationId xmlns:a16="http://schemas.microsoft.com/office/drawing/2014/main" id="{30126199-B56C-0B66-BBEE-CAE6E886E5DB}"/>
+              </a:ext>
+            </a:extLst>
+          </p:cNvPr>
+          <p:cNvSpPr>
+            <a:spLocks noGrp="1" noChangeArrowheads="1"/>
+          </p:cNvSpPr>
+          <p:nvPr>
+            <p:ph type="title"/>
+            <p:custDataLst>
+              <p:tags r:id="rId1"/>
+            </p:custDataLst>
+          </p:nvPr>
+        </p:nvSpPr>
+        <p:spPr>
+          <a:xfrm>
+            <a:off x="1141413" y="284084"/>
+            <a:ext cx="9905998" cy="620791"/>
+          </a:xfrm>
+        </p:spPr>
+        <p:txBody>
+          <a:bodyPr/>
+          <a:lstStyle/>
+          <a:p>
+            <a:pPr algn="ctr"/>
+            <a:r>
+              <a:rPr lang="en-US" dirty="0"/>
+              <a:t>Lecture 16 - Tuesday, Oct. 20</a:t>
+            </a:r>
+          </a:p>
+        </p:txBody>
+      </p:sp>
+      <p:sp>
+        <p:nvSpPr>
+          <p:cNvPr id="6147" name="Rectangle 3">
+            <a:extLst>
+              <a:ext uri="{FF2B5EF4-FFF2-40B4-BE49-F238E27FC236}">
+                <a16:creationId xmlns:a16="http://schemas.microsoft.com/office/drawing/2014/main" id="{6D6B7AFA-4355-DFE5-C67E-692D97E68165}"/>
+              </a:ext>
+            </a:extLst>
+          </p:cNvPr>
+          <p:cNvSpPr>
+            <a:spLocks noGrp="1" noChangeArrowheads="1"/>
+          </p:cNvSpPr>
+          <p:nvPr>
+            <p:ph idx="1"/>
+            <p:custDataLst>
+              <p:tags r:id="rId2"/>
+            </p:custDataLst>
+          </p:nvPr>
+        </p:nvSpPr>
+        <p:spPr>
+          <a:xfrm>
+            <a:off x="1294151" y="904876"/>
+            <a:ext cx="9600522" cy="5749924"/>
+          </a:xfrm>
+        </p:spPr>
+        <p:txBody>
+          <a:bodyPr>
+            <a:normAutofit fontScale="77500" lnSpcReduction="20000"/>
+          </a:bodyPr>
+          <a:lstStyle/>
+          <a:p>
+            <a:r>
+              <a:rPr lang="en-US" dirty="0">
+                <a:latin typeface="Arial" panose="020B0604020202020204" pitchFamily="34" charset="0"/>
+                <a:cs typeface="Arial" panose="020B0604020202020204" pitchFamily="34" charset="0"/>
+              </a:rPr>
+              <a:t>Please remember </a:t>
+            </a:r>
+            <a:r>
+              <a:rPr lang="en-US" b="1" i="1" u="sng" dirty="0">
+                <a:latin typeface="Arial" panose="020B0604020202020204" pitchFamily="34" charset="0"/>
+                <a:cs typeface="Arial" panose="020B0604020202020204" pitchFamily="34" charset="0"/>
+              </a:rPr>
+              <a:t>no laptops / phones</a:t>
+            </a:r>
+            <a:r>
+              <a:rPr lang="en-US" dirty="0">
+                <a:latin typeface="Arial" panose="020B0604020202020204" pitchFamily="34" charset="0"/>
+                <a:cs typeface="Arial" panose="020B0604020202020204" pitchFamily="34" charset="0"/>
+              </a:rPr>
+              <a:t> and </a:t>
+            </a:r>
+            <a:r>
+              <a:rPr lang="en-US" b="1" i="1" u="sng" dirty="0">
+                <a:latin typeface="Arial" panose="020B0604020202020204" pitchFamily="34" charset="0"/>
+                <a:cs typeface="Arial" panose="020B0604020202020204" pitchFamily="34" charset="0"/>
+              </a:rPr>
+              <a:t>attendance policy</a:t>
+            </a:r>
+            <a:endParaRPr lang="en-US" dirty="0">
+              <a:latin typeface="Arial" panose="020B0604020202020204" pitchFamily="34" charset="0"/>
+              <a:cs typeface="Arial" panose="020B0604020202020204" pitchFamily="34" charset="0"/>
+            </a:endParaRPr>
+          </a:p>
+          <a:p>
+            <a:r>
+              <a:rPr lang="en-US" dirty="0">
+                <a:latin typeface="Arial" panose="020B0604020202020204" pitchFamily="34" charset="0"/>
+                <a:cs typeface="Arial" panose="020B0604020202020204" pitchFamily="34" charset="0"/>
+              </a:rPr>
+              <a:t>October! Best month of the year! Woo!</a:t>
+            </a:r>
+          </a:p>
+          <a:p>
+            <a:r>
+              <a:rPr lang="en-US" dirty="0">
+                <a:latin typeface="Arial" panose="020B0604020202020204" pitchFamily="34" charset="0"/>
+                <a:cs typeface="Arial" panose="020B0604020202020204" pitchFamily="34" charset="0"/>
+              </a:rPr>
+              <a:t>This week:</a:t>
+            </a:r>
+          </a:p>
+          <a:p>
+            <a:pPr lvl="1"/>
+            <a:r>
+              <a:rPr lang="en-US" dirty="0">
+                <a:latin typeface="Arial" panose="020B0604020202020204" pitchFamily="34" charset="0"/>
+                <a:cs typeface="Arial" panose="020B0604020202020204" pitchFamily="34" charset="0"/>
+              </a:rPr>
+              <a:t>Nothing due! I **might** send you some Turing Machine practice for the upcoming quiz 3 though</a:t>
+            </a:r>
+          </a:p>
+          <a:p>
+            <a:pPr lvl="1"/>
+            <a:r>
+              <a:rPr lang="en-US" dirty="0">
+                <a:latin typeface="Arial" panose="020B0604020202020204" pitchFamily="34" charset="0"/>
+                <a:cs typeface="Arial" panose="020B0604020202020204" pitchFamily="34" charset="0"/>
+              </a:rPr>
+              <a:t>You can get started on your module 3 written assignment if you want.</a:t>
+            </a:r>
+          </a:p>
+          <a:p>
+            <a:r>
+              <a:rPr lang="en-US" dirty="0">
+                <a:latin typeface="Arial" panose="020B0604020202020204" pitchFamily="34" charset="0"/>
+                <a:cs typeface="Arial" panose="020B0604020202020204" pitchFamily="34" charset="0"/>
+              </a:rPr>
+              <a:t>Next week:</a:t>
+            </a:r>
+          </a:p>
+          <a:p>
+            <a:pPr lvl="1"/>
+            <a:r>
+              <a:rPr lang="en-US" dirty="0">
+                <a:latin typeface="Arial" panose="020B0604020202020204" pitchFamily="34" charset="0"/>
+                <a:cs typeface="Arial" panose="020B0604020202020204" pitchFamily="34" charset="0"/>
+              </a:rPr>
+              <a:t>Module 3 written assignment is due</a:t>
+            </a:r>
+          </a:p>
+          <a:p>
+            <a:r>
+              <a:rPr lang="en-US" dirty="0">
+                <a:latin typeface="Arial" panose="020B0604020202020204" pitchFamily="34" charset="0"/>
+                <a:cs typeface="Arial" panose="020B0604020202020204" pitchFamily="34" charset="0"/>
+              </a:rPr>
+              <a:t>Grading</a:t>
+            </a:r>
+          </a:p>
+          <a:p>
+            <a:pPr lvl="1"/>
+            <a:r>
+              <a:rPr lang="en-US" dirty="0">
+                <a:latin typeface="Arial" panose="020B0604020202020204" pitchFamily="34" charset="0"/>
+                <a:cs typeface="Arial" panose="020B0604020202020204" pitchFamily="34" charset="0"/>
+              </a:rPr>
+              <a:t>Quiz is being graded right now. </a:t>
+            </a:r>
+          </a:p>
+          <a:p>
+            <a:r>
+              <a:rPr lang="en-US" dirty="0">
+                <a:latin typeface="Arial" panose="020B0604020202020204" pitchFamily="34" charset="0"/>
+                <a:cs typeface="Arial" panose="020B0604020202020204" pitchFamily="34" charset="0"/>
+              </a:rPr>
+              <a:t>OH Check-Ins</a:t>
+            </a:r>
+          </a:p>
+          <a:p>
+            <a:pPr lvl="1"/>
+            <a:r>
+              <a:rPr lang="en-US" dirty="0">
+                <a:latin typeface="Arial" panose="020B0604020202020204" pitchFamily="34" charset="0"/>
+                <a:cs typeface="Arial" panose="020B0604020202020204" pitchFamily="34" charset="0"/>
+              </a:rPr>
+              <a:t>Have started. This is week 2. Any issues so far?</a:t>
+            </a:r>
+          </a:p>
+          <a:p>
+            <a:pPr lvl="1"/>
+            <a:r>
+              <a:rPr lang="en-US" dirty="0">
+                <a:latin typeface="Arial" panose="020B0604020202020204" pitchFamily="34" charset="0"/>
+                <a:cs typeface="Arial" panose="020B0604020202020204" pitchFamily="34" charset="0"/>
+              </a:rPr>
+              <a:t>If you need to change weeks for a legitimate reason, email Elina (our OH head TA)</a:t>
+            </a:r>
+          </a:p>
+          <a:p>
+            <a:pPr lvl="1"/>
+            <a:r>
+              <a:rPr lang="en-US" dirty="0">
+                <a:latin typeface="Arial" panose="020B0604020202020204" pitchFamily="34" charset="0"/>
+                <a:cs typeface="Arial" panose="020B0604020202020204" pitchFamily="34" charset="0"/>
+              </a:rPr>
+              <a:t>One change from what I told you: You will NOT be allowed to glance at your submission. Sorry.</a:t>
+            </a:r>
+          </a:p>
+          <a:p>
+            <a:r>
+              <a:rPr lang="en-US" dirty="0">
+                <a:latin typeface="Arial" panose="020B0604020202020204" pitchFamily="34" charset="0"/>
+                <a:cs typeface="Arial" panose="020B0604020202020204" pitchFamily="34" charset="0"/>
+              </a:rPr>
+              <a:t>These slides are linked on the course webpage “slides” page.</a:t>
+            </a:r>
+          </a:p>
+          <a:p>
+            <a:r>
+              <a:rPr lang="en-US" dirty="0">
+                <a:latin typeface="Arial" panose="020B0604020202020204" pitchFamily="34" charset="0"/>
+                <a:cs typeface="Arial" panose="020B0604020202020204" pitchFamily="34" charset="0"/>
+              </a:rPr>
+              <a:t>Today we will continue Module 3 – Turing Machines.</a:t>
+            </a:r>
+          </a:p>
+        </p:txBody>
+      </p:sp>
+    </p:spTree>
+    <p:extLst>
+      <p:ext uri="{BB962C8B-B14F-4D97-AF65-F5344CB8AC3E}">
+        <p14:creationId xmlns:p14="http://schemas.microsoft.com/office/powerpoint/2010/main" val="3276402320"/>
+      </p:ext>
+    </p:extLst>
+  </p:cSld>
+  <p:clrMapOvr>
+    <a:masterClrMapping/>
+  </p:clrMapOvr>
+</p:sld>
+</file>
+
+<file path=ppt/slides/slide21.xml><?xml version="1.0" encoding="utf-8"?>
+<p:sld xmlns:a="http://schemas.openxmlformats.org/drawingml/2006/main" xmlns:r="http://schemas.openxmlformats.org/officeDocument/2006/relationships" xmlns:p="http://schemas.openxmlformats.org/presentationml/2006/main">
+  <p:cSld>
+    <p:spTree>
+      <p:nvGrpSpPr>
         <p:cNvPr id="1" name=""/>
         <p:cNvGrpSpPr/>
         <p:nvPr/>
@@ -16252,7 +16525,7 @@
           <p:nvPr>
             <p:extLst>
               <p:ext uri="{D42A27DB-BD31-4B8C-83A1-F6EECF244321}">
-                <p14:modId xmlns:p14="http://schemas.microsoft.com/office/powerpoint/2010/main" val="4182000880"/>
+                <p14:modId xmlns:p14="http://schemas.microsoft.com/office/powerpoint/2010/main" val="1941164392"/>
               </p:ext>
             </p:extLst>
           </p:nvPr>
@@ -16348,7 +16621,7 @@
                       <a:pPr algn="ctr"/>
                       <a:r>
                         <a:rPr lang="en-US" i="0" dirty="0"/>
-                        <a:t>13</a:t>
+                        <a:t>14</a:t>
                       </a:r>
                     </a:p>
                   </a:txBody>
@@ -16362,7 +16635,7 @@
                       <a:pPr algn="ctr"/>
                       <a:r>
                         <a:rPr lang="en-US" i="0" dirty="0"/>
-                        <a:t>14</a:t>
+                        <a:t>15</a:t>
                       </a:r>
                     </a:p>
                   </a:txBody>
@@ -16376,7 +16649,7 @@
                       <a:pPr algn="ctr"/>
                       <a:r>
                         <a:rPr lang="en-US" b="1" i="0" dirty="0"/>
-                        <a:t>92.9%</a:t>
+                        <a:t>93.3%</a:t>
                       </a:r>
                     </a:p>
                   </a:txBody>
@@ -17207,7 +17480,7 @@
           <p:nvPr>
             <p:extLst>
               <p:ext uri="{D42A27DB-BD31-4B8C-83A1-F6EECF244321}">
-                <p14:modId xmlns:p14="http://schemas.microsoft.com/office/powerpoint/2010/main" val="1695938706"/>
+                <p14:modId xmlns:p14="http://schemas.microsoft.com/office/powerpoint/2010/main" val="1029766422"/>
               </p:ext>
             </p:extLst>
           </p:nvPr>
@@ -17303,7 +17576,7 @@
                       <a:pPr algn="ctr"/>
                       <a:r>
                         <a:rPr lang="en-US" i="0" dirty="0"/>
-                        <a:t>7</a:t>
+                        <a:t>8</a:t>
                       </a:r>
                     </a:p>
                   </a:txBody>
@@ -17317,7 +17590,7 @@
                       <a:pPr algn="ctr"/>
                       <a:r>
                         <a:rPr lang="en-US" i="0" dirty="0"/>
-                        <a:t>7</a:t>
+                        <a:t>8</a:t>
                       </a:r>
                     </a:p>
                   </a:txBody>
@@ -17595,7 +17868,7 @@
           <p:nvPr>
             <p:extLst>
               <p:ext uri="{D42A27DB-BD31-4B8C-83A1-F6EECF244321}">
-                <p14:modId xmlns:p14="http://schemas.microsoft.com/office/powerpoint/2010/main" val="1867092156"/>
+                <p14:modId xmlns:p14="http://schemas.microsoft.com/office/powerpoint/2010/main" val="1742533954"/>
               </p:ext>
             </p:extLst>
           </p:nvPr>
@@ -17691,7 +17964,7 @@
                       <a:pPr algn="ctr"/>
                       <a:r>
                         <a:rPr lang="en-US" i="0" dirty="0"/>
-                        <a:t>14</a:t>
+                        <a:t>15</a:t>
                       </a:r>
                     </a:p>
                   </a:txBody>
@@ -17705,7 +17978,7 @@
                       <a:pPr algn="ctr"/>
                       <a:r>
                         <a:rPr lang="en-US" i="0" dirty="0"/>
-                        <a:t>14</a:t>
+                        <a:t>15</a:t>
                       </a:r>
                     </a:p>
                   </a:txBody>
@@ -17976,7 +18249,7 @@
           <p:nvPr>
             <p:extLst>
               <p:ext uri="{D42A27DB-BD31-4B8C-83A1-F6EECF244321}">
-                <p14:modId xmlns:p14="http://schemas.microsoft.com/office/powerpoint/2010/main" val="3873041530"/>
+                <p14:modId xmlns:p14="http://schemas.microsoft.com/office/powerpoint/2010/main" val="2935608766"/>
               </p:ext>
             </p:extLst>
           </p:nvPr>
@@ -18072,7 +18345,7 @@
                       <a:pPr algn="ctr"/>
                       <a:r>
                         <a:rPr lang="en-US" i="0" dirty="0"/>
-                        <a:t>7</a:t>
+                        <a:t>8</a:t>
                       </a:r>
                     </a:p>
                   </a:txBody>
@@ -18086,7 +18359,7 @@
                       <a:pPr algn="ctr"/>
                       <a:r>
                         <a:rPr lang="en-US" i="0" dirty="0"/>
-                        <a:t>7</a:t>
+                        <a:t>8</a:t>
                       </a:r>
                     </a:p>
                   </a:txBody>
@@ -20166,6 +20439,18 @@
 </file>
 
 <file path=ppt/tags/tag42.xml><?xml version="1.0" encoding="utf-8"?>
+<p:tagLst xmlns:a="http://schemas.openxmlformats.org/drawingml/2006/main" xmlns:r="http://schemas.openxmlformats.org/officeDocument/2006/relationships" xmlns:p="http://schemas.openxmlformats.org/presentationml/2006/main">
+  <p:tag name="_INSTRUCTOR VIEW19C14C36-AC8E-43BC-9DB6-C2AAF774C7DC|PANE__TAG" val="_"/>
+</p:tagLst>
+</file>
+
+<file path=ppt/tags/tag43.xml><?xml version="1.0" encoding="utf-8"?>
+<p:tagLst xmlns:a="http://schemas.openxmlformats.org/drawingml/2006/main" xmlns:r="http://schemas.openxmlformats.org/officeDocument/2006/relationships" xmlns:p="http://schemas.openxmlformats.org/presentationml/2006/main">
+  <p:tag name="_INSTRUCTOR VIEW19C14C36-AC8E-43BC-9DB6-C2AAF774C7DC|PANE__TAG" val="_"/>
+</p:tagLst>
+</file>
+
+<file path=ppt/tags/tag44.xml><?xml version="1.0" encoding="utf-8"?>
 <p:tagLst xmlns:a="http://schemas.openxmlformats.org/drawingml/2006/main" xmlns:r="http://schemas.openxmlformats.org/officeDocument/2006/relationships" xmlns:p="http://schemas.openxmlformats.org/presentationml/2006/main">
   <p:tag name="_INSTRUCTOR VIEW19C14C36-AC8E-43BC-9DB6-C2AAF774C7DC|PANE__TAG" val="_"/>
 </p:tagLst>

--- a/slides/00-DailyAnnouncements.pptx
+++ b/slides/00-DailyAnnouncements.pptx
@@ -5,7 +5,7 @@
     <p:sldMasterId id="2147484006" r:id="rId1"/>
   </p:sldMasterIdLst>
   <p:notesMasterIdLst>
-    <p:notesMasterId r:id="rId23"/>
+    <p:notesMasterId r:id="rId24"/>
   </p:notesMasterIdLst>
   <p:sldIdLst>
     <p:sldId id="256" r:id="rId2"/>
@@ -28,7 +28,8 @@
     <p:sldId id="531" r:id="rId19"/>
     <p:sldId id="532" r:id="rId20"/>
     <p:sldId id="533" r:id="rId21"/>
-    <p:sldId id="515" r:id="rId22"/>
+    <p:sldId id="534" r:id="rId22"/>
+    <p:sldId id="515" r:id="rId23"/>
   </p:sldIdLst>
   <p:sldSz cx="12192000" cy="6858000"/>
   <p:notesSz cx="6858000" cy="9144000"/>
@@ -217,7 +218,7 @@
           <a:p>
             <a:fld id="{C5B45307-6ED4-B142-BD64-10F739779302}" type="datetimeFigureOut">
               <a:rPr lang="en-US" smtClean="0"/>
-              <a:t>10/20/26</a:t>
+              <a:t>10/22/26</a:t>
             </a:fld>
             <a:endParaRPr lang="en-US"/>
           </a:p>
@@ -625,7 +626,7 @@
           <a:noFill/>
           <a:extLst>
             <a:ext uri="{909E8E84-426E-40dd-AFC4-6F175D3DCCD1}">
-              <a14:hiddenFill xmlns:a14="http://schemas.microsoft.com/office/drawing/2010/main" xmlns="">
+              <a14:hiddenFill xmlns="" xmlns:a14="http://schemas.microsoft.com/office/drawing/2010/main">
                 <a:solidFill>
                   <a:srgbClr val="FFFFFF"/>
                 </a:solidFill>
@@ -684,7 +685,7 @@
             </a:ln>
             <a:extLst>
               <a:ext uri="{91240B29-F687-4f45-9708-019B960494DF}">
-                <a14:hiddenLine xmlns:a14="http://schemas.microsoft.com/office/drawing/2010/main" xmlns="" w="9525">
+                <a14:hiddenLine xmlns="" xmlns:a14="http://schemas.microsoft.com/office/drawing/2010/main" w="9525">
                   <a:solidFill>
                     <a:srgbClr val="000000"/>
                   </a:solidFill>
@@ -774,7 +775,7 @@
             </a:ln>
             <a:extLst>
               <a:ext uri="{91240B29-F687-4f45-9708-019B960494DF}">
-                <a14:hiddenLine xmlns:a14="http://schemas.microsoft.com/office/drawing/2010/main" xmlns="" w="9525">
+                <a14:hiddenLine xmlns="" xmlns:a14="http://schemas.microsoft.com/office/drawing/2010/main" w="9525">
                   <a:solidFill>
                     <a:srgbClr val="000000"/>
                   </a:solidFill>
@@ -864,7 +865,7 @@
             </a:ln>
             <a:extLst>
               <a:ext uri="{91240B29-F687-4f45-9708-019B960494DF}">
-                <a14:hiddenLine xmlns:a14="http://schemas.microsoft.com/office/drawing/2010/main" xmlns="" w="9525">
+                <a14:hiddenLine xmlns="" xmlns:a14="http://schemas.microsoft.com/office/drawing/2010/main" w="9525">
                   <a:solidFill>
                     <a:srgbClr val="000000"/>
                   </a:solidFill>
@@ -898,7 +899,7 @@
             </a:ln>
             <a:extLst>
               <a:ext uri="{91240B29-F687-4f45-9708-019B960494DF}">
-                <a14:hiddenLine xmlns:a14="http://schemas.microsoft.com/office/drawing/2010/main" xmlns="" w="9525">
+                <a14:hiddenLine xmlns="" xmlns:a14="http://schemas.microsoft.com/office/drawing/2010/main" w="9525">
                   <a:solidFill>
                     <a:srgbClr val="000000"/>
                   </a:solidFill>
@@ -988,7 +989,7 @@
             </a:ln>
             <a:extLst>
               <a:ext uri="{91240B29-F687-4f45-9708-019B960494DF}">
-                <a14:hiddenLine xmlns:a14="http://schemas.microsoft.com/office/drawing/2010/main" xmlns="" w="9525">
+                <a14:hiddenLine xmlns="" xmlns:a14="http://schemas.microsoft.com/office/drawing/2010/main" w="9525">
                   <a:solidFill>
                     <a:srgbClr val="000000"/>
                   </a:solidFill>
@@ -1050,7 +1051,7 @@
             </a:ln>
             <a:extLst>
               <a:ext uri="{91240B29-F687-4f45-9708-019B960494DF}">
-                <a14:hiddenLine xmlns:a14="http://schemas.microsoft.com/office/drawing/2010/main" xmlns="" w="9525">
+                <a14:hiddenLine xmlns="" xmlns:a14="http://schemas.microsoft.com/office/drawing/2010/main" w="9525">
                   <a:solidFill>
                     <a:srgbClr val="000000"/>
                   </a:solidFill>
@@ -1112,7 +1113,7 @@
             </a:ln>
             <a:extLst>
               <a:ext uri="{91240B29-F687-4f45-9708-019B960494DF}">
-                <a14:hiddenLine xmlns:a14="http://schemas.microsoft.com/office/drawing/2010/main" xmlns="" w="9525">
+                <a14:hiddenLine xmlns="" xmlns:a14="http://schemas.microsoft.com/office/drawing/2010/main" w="9525">
                   <a:solidFill>
                     <a:srgbClr val="000000"/>
                   </a:solidFill>
@@ -1202,7 +1203,7 @@
             </a:ln>
             <a:extLst>
               <a:ext uri="{91240B29-F687-4f45-9708-019B960494DF}">
-                <a14:hiddenLine xmlns:a14="http://schemas.microsoft.com/office/drawing/2010/main" xmlns="" w="9525">
+                <a14:hiddenLine xmlns="" xmlns:a14="http://schemas.microsoft.com/office/drawing/2010/main" w="9525">
                   <a:solidFill>
                     <a:srgbClr val="000000"/>
                   </a:solidFill>
@@ -1264,7 +1265,7 @@
             </a:ln>
             <a:extLst>
               <a:ext uri="{91240B29-F687-4f45-9708-019B960494DF}">
-                <a14:hiddenLine xmlns:a14="http://schemas.microsoft.com/office/drawing/2010/main" xmlns="" w="9525">
+                <a14:hiddenLine xmlns="" xmlns:a14="http://schemas.microsoft.com/office/drawing/2010/main" w="9525">
                   <a:solidFill>
                     <a:srgbClr val="000000"/>
                   </a:solidFill>
@@ -1326,7 +1327,7 @@
             </a:ln>
             <a:extLst>
               <a:ext uri="{91240B29-F687-4f45-9708-019B960494DF}">
-                <a14:hiddenLine xmlns:a14="http://schemas.microsoft.com/office/drawing/2010/main" xmlns="" w="9525">
+                <a14:hiddenLine xmlns="" xmlns:a14="http://schemas.microsoft.com/office/drawing/2010/main" w="9525">
                   <a:solidFill>
                     <a:srgbClr val="000000"/>
                   </a:solidFill>
@@ -1416,7 +1417,7 @@
             </a:ln>
             <a:extLst>
               <a:ext uri="{91240B29-F687-4f45-9708-019B960494DF}">
-                <a14:hiddenLine xmlns:a14="http://schemas.microsoft.com/office/drawing/2010/main" xmlns="" w="9525">
+                <a14:hiddenLine xmlns="" xmlns:a14="http://schemas.microsoft.com/office/drawing/2010/main" w="9525">
                   <a:solidFill>
                     <a:srgbClr val="000000"/>
                   </a:solidFill>
@@ -1506,7 +1507,7 @@
             </a:ln>
             <a:extLst>
               <a:ext uri="{91240B29-F687-4f45-9708-019B960494DF}">
-                <a14:hiddenLine xmlns:a14="http://schemas.microsoft.com/office/drawing/2010/main" xmlns="" w="9525">
+                <a14:hiddenLine xmlns="" xmlns:a14="http://schemas.microsoft.com/office/drawing/2010/main" w="9525">
                   <a:solidFill>
                     <a:srgbClr val="000000"/>
                   </a:solidFill>
@@ -1568,7 +1569,7 @@
             </a:ln>
             <a:extLst>
               <a:ext uri="{91240B29-F687-4f45-9708-019B960494DF}">
-                <a14:hiddenLine xmlns:a14="http://schemas.microsoft.com/office/drawing/2010/main" xmlns="" w="9525">
+                <a14:hiddenLine xmlns="" xmlns:a14="http://schemas.microsoft.com/office/drawing/2010/main" w="9525">
                   <a:solidFill>
                     <a:srgbClr val="000000"/>
                   </a:solidFill>
@@ -1678,7 +1679,7 @@
             </a:ln>
             <a:extLst>
               <a:ext uri="{91240B29-F687-4f45-9708-019B960494DF}">
-                <a14:hiddenLine xmlns:a14="http://schemas.microsoft.com/office/drawing/2010/main" xmlns="" w="9525">
+                <a14:hiddenLine xmlns="" xmlns:a14="http://schemas.microsoft.com/office/drawing/2010/main" w="9525">
                   <a:solidFill>
                     <a:srgbClr val="000000"/>
                   </a:solidFill>
@@ -1740,7 +1741,7 @@
             </a:ln>
             <a:extLst>
               <a:ext uri="{91240B29-F687-4f45-9708-019B960494DF}">
-                <a14:hiddenLine xmlns:a14="http://schemas.microsoft.com/office/drawing/2010/main" xmlns="" w="9525">
+                <a14:hiddenLine xmlns="" xmlns:a14="http://schemas.microsoft.com/office/drawing/2010/main" w="9525">
                   <a:solidFill>
                     <a:srgbClr val="000000"/>
                   </a:solidFill>
@@ -1830,7 +1831,7 @@
             </a:ln>
             <a:extLst>
               <a:ext uri="{91240B29-F687-4f45-9708-019B960494DF}">
-                <a14:hiddenLine xmlns:a14="http://schemas.microsoft.com/office/drawing/2010/main" xmlns="" w="9525">
+                <a14:hiddenLine xmlns="" xmlns:a14="http://schemas.microsoft.com/office/drawing/2010/main" w="9525">
                   <a:solidFill>
                     <a:srgbClr val="000000"/>
                   </a:solidFill>
@@ -1920,7 +1921,7 @@
             </a:ln>
             <a:extLst>
               <a:ext uri="{91240B29-F687-4f45-9708-019B960494DF}">
-                <a14:hiddenLine xmlns:a14="http://schemas.microsoft.com/office/drawing/2010/main" xmlns="" w="9525">
+                <a14:hiddenLine xmlns="" xmlns:a14="http://schemas.microsoft.com/office/drawing/2010/main" w="9525">
                   <a:solidFill>
                     <a:srgbClr val="000000"/>
                   </a:solidFill>
@@ -1982,7 +1983,7 @@
             </a:ln>
             <a:extLst>
               <a:ext uri="{91240B29-F687-4f45-9708-019B960494DF}">
-                <a14:hiddenLine xmlns:a14="http://schemas.microsoft.com/office/drawing/2010/main" xmlns="" w="9525">
+                <a14:hiddenLine xmlns="" xmlns:a14="http://schemas.microsoft.com/office/drawing/2010/main" w="9525">
                   <a:solidFill>
                     <a:srgbClr val="000000"/>
                   </a:solidFill>
@@ -2072,7 +2073,7 @@
             </a:ln>
             <a:extLst>
               <a:ext uri="{91240B29-F687-4f45-9708-019B960494DF}">
-                <a14:hiddenLine xmlns:a14="http://schemas.microsoft.com/office/drawing/2010/main" xmlns="" w="9525">
+                <a14:hiddenLine xmlns="" xmlns:a14="http://schemas.microsoft.com/office/drawing/2010/main" w="9525">
                   <a:solidFill>
                     <a:srgbClr val="000000"/>
                   </a:solidFill>
@@ -2162,7 +2163,7 @@
             </a:ln>
             <a:extLst>
               <a:ext uri="{91240B29-F687-4f45-9708-019B960494DF}">
-                <a14:hiddenLine xmlns:a14="http://schemas.microsoft.com/office/drawing/2010/main" xmlns="" w="9525">
+                <a14:hiddenLine xmlns="" xmlns:a14="http://schemas.microsoft.com/office/drawing/2010/main" w="9525">
                   <a:solidFill>
                     <a:srgbClr val="000000"/>
                   </a:solidFill>
@@ -2218,7 +2219,7 @@
             </a:ln>
             <a:extLst>
               <a:ext uri="{91240B29-F687-4f45-9708-019B960494DF}">
-                <a14:hiddenLine xmlns:a14="http://schemas.microsoft.com/office/drawing/2010/main" xmlns="" w="9525">
+                <a14:hiddenLine xmlns="" xmlns:a14="http://schemas.microsoft.com/office/drawing/2010/main" w="9525">
                   <a:solidFill>
                     <a:srgbClr val="000000"/>
                   </a:solidFill>
@@ -2308,7 +2309,7 @@
             </a:ln>
             <a:extLst>
               <a:ext uri="{91240B29-F687-4f45-9708-019B960494DF}">
-                <a14:hiddenLine xmlns:a14="http://schemas.microsoft.com/office/drawing/2010/main" xmlns="" w="9525">
+                <a14:hiddenLine xmlns="" xmlns:a14="http://schemas.microsoft.com/office/drawing/2010/main" w="9525">
                   <a:solidFill>
                     <a:srgbClr val="000000"/>
                   </a:solidFill>
@@ -2364,7 +2365,7 @@
             </a:ln>
             <a:extLst>
               <a:ext uri="{91240B29-F687-4f45-9708-019B960494DF}">
-                <a14:hiddenLine xmlns:a14="http://schemas.microsoft.com/office/drawing/2010/main" xmlns="" w="9525">
+                <a14:hiddenLine xmlns="" xmlns:a14="http://schemas.microsoft.com/office/drawing/2010/main" w="9525">
                   <a:solidFill>
                     <a:srgbClr val="000000"/>
                   </a:solidFill>
@@ -2454,7 +2455,7 @@
             </a:ln>
             <a:extLst>
               <a:ext uri="{91240B29-F687-4f45-9708-019B960494DF}">
-                <a14:hiddenLine xmlns:a14="http://schemas.microsoft.com/office/drawing/2010/main" xmlns="" w="9525">
+                <a14:hiddenLine xmlns="" xmlns:a14="http://schemas.microsoft.com/office/drawing/2010/main" w="9525">
                   <a:solidFill>
                     <a:srgbClr val="000000"/>
                   </a:solidFill>
@@ -2522,7 +2523,7 @@
             </a:ln>
             <a:extLst>
               <a:ext uri="{91240B29-F687-4f45-9708-019B960494DF}">
-                <a14:hiddenLine xmlns:a14="http://schemas.microsoft.com/office/drawing/2010/main" xmlns="" w="9525">
+                <a14:hiddenLine xmlns="" xmlns:a14="http://schemas.microsoft.com/office/drawing/2010/main" w="9525">
                   <a:solidFill>
                     <a:srgbClr val="000000"/>
                   </a:solidFill>
@@ -2612,7 +2613,7 @@
             </a:ln>
             <a:extLst>
               <a:ext uri="{91240B29-F687-4f45-9708-019B960494DF}">
-                <a14:hiddenLine xmlns:a14="http://schemas.microsoft.com/office/drawing/2010/main" xmlns="" w="9525">
+                <a14:hiddenLine xmlns="" xmlns:a14="http://schemas.microsoft.com/office/drawing/2010/main" w="9525">
                   <a:solidFill>
                     <a:srgbClr val="000000"/>
                   </a:solidFill>
@@ -2680,7 +2681,7 @@
             </a:ln>
             <a:extLst>
               <a:ext uri="{91240B29-F687-4f45-9708-019B960494DF}">
-                <a14:hiddenLine xmlns:a14="http://schemas.microsoft.com/office/drawing/2010/main" xmlns="" w="9525">
+                <a14:hiddenLine xmlns="" xmlns:a14="http://schemas.microsoft.com/office/drawing/2010/main" w="9525">
                   <a:solidFill>
                     <a:srgbClr val="000000"/>
                   </a:solidFill>
@@ -2770,7 +2771,7 @@
             </a:ln>
             <a:extLst>
               <a:ext uri="{91240B29-F687-4f45-9708-019B960494DF}">
-                <a14:hiddenLine xmlns:a14="http://schemas.microsoft.com/office/drawing/2010/main" xmlns="" w="9525">
+                <a14:hiddenLine xmlns="" xmlns:a14="http://schemas.microsoft.com/office/drawing/2010/main" w="9525">
                   <a:solidFill>
                     <a:srgbClr val="000000"/>
                   </a:solidFill>
@@ -2804,7 +2805,7 @@
             </a:ln>
             <a:extLst>
               <a:ext uri="{91240B29-F687-4f45-9708-019B960494DF}">
-                <a14:hiddenLine xmlns:a14="http://schemas.microsoft.com/office/drawing/2010/main" xmlns="" w="9525">
+                <a14:hiddenLine xmlns="" xmlns:a14="http://schemas.microsoft.com/office/drawing/2010/main" w="9525">
                   <a:solidFill>
                     <a:srgbClr val="000000"/>
                   </a:solidFill>
@@ -2894,7 +2895,7 @@
             </a:ln>
             <a:extLst>
               <a:ext uri="{91240B29-F687-4f45-9708-019B960494DF}">
-                <a14:hiddenLine xmlns:a14="http://schemas.microsoft.com/office/drawing/2010/main" xmlns="" w="9525">
+                <a14:hiddenLine xmlns="" xmlns:a14="http://schemas.microsoft.com/office/drawing/2010/main" w="9525">
                   <a:solidFill>
                     <a:srgbClr val="000000"/>
                   </a:solidFill>
@@ -2956,7 +2957,7 @@
             </a:ln>
             <a:extLst>
               <a:ext uri="{91240B29-F687-4f45-9708-019B960494DF}">
-                <a14:hiddenLine xmlns:a14="http://schemas.microsoft.com/office/drawing/2010/main" xmlns="" w="9525">
+                <a14:hiddenLine xmlns="" xmlns:a14="http://schemas.microsoft.com/office/drawing/2010/main" w="9525">
                   <a:solidFill>
                     <a:srgbClr val="000000"/>
                   </a:solidFill>
@@ -3018,7 +3019,7 @@
             </a:ln>
             <a:extLst>
               <a:ext uri="{91240B29-F687-4f45-9708-019B960494DF}">
-                <a14:hiddenLine xmlns:a14="http://schemas.microsoft.com/office/drawing/2010/main" xmlns="" w="9525">
+                <a14:hiddenLine xmlns="" xmlns:a14="http://schemas.microsoft.com/office/drawing/2010/main" w="9525">
                   <a:solidFill>
                     <a:srgbClr val="000000"/>
                   </a:solidFill>
@@ -3108,7 +3109,7 @@
             </a:ln>
             <a:extLst>
               <a:ext uri="{91240B29-F687-4f45-9708-019B960494DF}">
-                <a14:hiddenLine xmlns:a14="http://schemas.microsoft.com/office/drawing/2010/main" xmlns="" w="9525">
+                <a14:hiddenLine xmlns="" xmlns:a14="http://schemas.microsoft.com/office/drawing/2010/main" w="9525">
                   <a:solidFill>
                     <a:srgbClr val="000000"/>
                   </a:solidFill>
@@ -3176,7 +3177,7 @@
             </a:ln>
             <a:extLst>
               <a:ext uri="{91240B29-F687-4f45-9708-019B960494DF}">
-                <a14:hiddenLine xmlns:a14="http://schemas.microsoft.com/office/drawing/2010/main" xmlns="" w="9525">
+                <a14:hiddenLine xmlns="" xmlns:a14="http://schemas.microsoft.com/office/drawing/2010/main" w="9525">
                   <a:solidFill>
                     <a:srgbClr val="000000"/>
                   </a:solidFill>
@@ -3238,7 +3239,7 @@
             </a:ln>
             <a:extLst>
               <a:ext uri="{91240B29-F687-4f45-9708-019B960494DF}">
-                <a14:hiddenLine xmlns:a14="http://schemas.microsoft.com/office/drawing/2010/main" xmlns="" w="9525">
+                <a14:hiddenLine xmlns="" xmlns:a14="http://schemas.microsoft.com/office/drawing/2010/main" w="9525">
                   <a:solidFill>
                     <a:srgbClr val="000000"/>
                   </a:solidFill>
@@ -3328,7 +3329,7 @@
             </a:ln>
             <a:extLst>
               <a:ext uri="{91240B29-F687-4f45-9708-019B960494DF}">
-                <a14:hiddenLine xmlns:a14="http://schemas.microsoft.com/office/drawing/2010/main" xmlns="" w="9525">
+                <a14:hiddenLine xmlns="" xmlns:a14="http://schemas.microsoft.com/office/drawing/2010/main" w="9525">
                   <a:solidFill>
                     <a:srgbClr val="000000"/>
                   </a:solidFill>
@@ -3390,7 +3391,7 @@
             </a:ln>
             <a:extLst>
               <a:ext uri="{91240B29-F687-4f45-9708-019B960494DF}">
-                <a14:hiddenLine xmlns:a14="http://schemas.microsoft.com/office/drawing/2010/main" xmlns="" w="9525">
+                <a14:hiddenLine xmlns="" xmlns:a14="http://schemas.microsoft.com/office/drawing/2010/main" w="9525">
                   <a:solidFill>
                     <a:srgbClr val="000000"/>
                   </a:solidFill>
@@ -3480,7 +3481,7 @@
             </a:ln>
             <a:extLst>
               <a:ext uri="{91240B29-F687-4f45-9708-019B960494DF}">
-                <a14:hiddenLine xmlns:a14="http://schemas.microsoft.com/office/drawing/2010/main" xmlns="" w="9525">
+                <a14:hiddenLine xmlns="" xmlns:a14="http://schemas.microsoft.com/office/drawing/2010/main" w="9525">
                   <a:solidFill>
                     <a:srgbClr val="000000"/>
                   </a:solidFill>
@@ -3542,7 +3543,7 @@
             </a:ln>
             <a:extLst>
               <a:ext uri="{91240B29-F687-4f45-9708-019B960494DF}">
-                <a14:hiddenLine xmlns:a14="http://schemas.microsoft.com/office/drawing/2010/main" xmlns="" w="9525">
+                <a14:hiddenLine xmlns="" xmlns:a14="http://schemas.microsoft.com/office/drawing/2010/main" w="9525">
                   <a:solidFill>
                     <a:srgbClr val="000000"/>
                   </a:solidFill>
@@ -3632,7 +3633,7 @@
             </a:ln>
             <a:extLst>
               <a:ext uri="{91240B29-F687-4f45-9708-019B960494DF}">
-                <a14:hiddenLine xmlns:a14="http://schemas.microsoft.com/office/drawing/2010/main" xmlns="" w="9525">
+                <a14:hiddenLine xmlns="" xmlns:a14="http://schemas.microsoft.com/office/drawing/2010/main" w="9525">
                   <a:solidFill>
                     <a:srgbClr val="000000"/>
                   </a:solidFill>
@@ -3666,7 +3667,7 @@
             </a:ln>
             <a:extLst>
               <a:ext uri="{91240B29-F687-4f45-9708-019B960494DF}">
-                <a14:hiddenLine xmlns:a14="http://schemas.microsoft.com/office/drawing/2010/main" xmlns="" w="9525">
+                <a14:hiddenLine xmlns="" xmlns:a14="http://schemas.microsoft.com/office/drawing/2010/main" w="9525">
                   <a:solidFill>
                     <a:srgbClr val="000000"/>
                   </a:solidFill>
@@ -3731,7 +3732,7 @@
             </a:ln>
             <a:extLst>
               <a:ext uri="{91240B29-F687-4f45-9708-019B960494DF}">
-                <a14:hiddenLine xmlns:a14="http://schemas.microsoft.com/office/drawing/2010/main" xmlns="" w="9525">
+                <a14:hiddenLine xmlns="" xmlns:a14="http://schemas.microsoft.com/office/drawing/2010/main" w="9525">
                   <a:solidFill>
                     <a:srgbClr val="000000"/>
                   </a:solidFill>
@@ -3821,7 +3822,7 @@
             </a:ln>
             <a:extLst>
               <a:ext uri="{91240B29-F687-4f45-9708-019B960494DF}">
-                <a14:hiddenLine xmlns:a14="http://schemas.microsoft.com/office/drawing/2010/main" xmlns="" w="9525">
+                <a14:hiddenLine xmlns="" xmlns:a14="http://schemas.microsoft.com/office/drawing/2010/main" w="9525">
                   <a:solidFill>
                     <a:srgbClr val="000000"/>
                   </a:solidFill>
@@ -3883,7 +3884,7 @@
             </a:ln>
             <a:extLst>
               <a:ext uri="{91240B29-F687-4f45-9708-019B960494DF}">
-                <a14:hiddenLine xmlns:a14="http://schemas.microsoft.com/office/drawing/2010/main" xmlns="" w="9525">
+                <a14:hiddenLine xmlns="" xmlns:a14="http://schemas.microsoft.com/office/drawing/2010/main" w="9525">
                   <a:solidFill>
                     <a:srgbClr val="000000"/>
                   </a:solidFill>
@@ -3973,7 +3974,7 @@
             </a:ln>
             <a:extLst>
               <a:ext uri="{91240B29-F687-4f45-9708-019B960494DF}">
-                <a14:hiddenLine xmlns:a14="http://schemas.microsoft.com/office/drawing/2010/main" xmlns="" w="9525">
+                <a14:hiddenLine xmlns="" xmlns:a14="http://schemas.microsoft.com/office/drawing/2010/main" w="9525">
                   <a:solidFill>
                     <a:srgbClr val="000000"/>
                   </a:solidFill>
@@ -4063,7 +4064,7 @@
             </a:ln>
             <a:extLst>
               <a:ext uri="{91240B29-F687-4f45-9708-019B960494DF}">
-                <a14:hiddenLine xmlns:a14="http://schemas.microsoft.com/office/drawing/2010/main" xmlns="" w="9525">
+                <a14:hiddenLine xmlns="" xmlns:a14="http://schemas.microsoft.com/office/drawing/2010/main" w="9525">
                   <a:solidFill>
                     <a:srgbClr val="000000"/>
                   </a:solidFill>
@@ -4128,7 +4129,7 @@
             </a:ln>
             <a:extLst>
               <a:ext uri="{91240B29-F687-4f45-9708-019B960494DF}">
-                <a14:hiddenLine xmlns:a14="http://schemas.microsoft.com/office/drawing/2010/main" xmlns="" w="9525">
+                <a14:hiddenLine xmlns="" xmlns:a14="http://schemas.microsoft.com/office/drawing/2010/main" w="9525">
                   <a:solidFill>
                     <a:srgbClr val="000000"/>
                   </a:solidFill>
@@ -4190,7 +4191,7 @@
             </a:ln>
             <a:extLst>
               <a:ext uri="{91240B29-F687-4f45-9708-019B960494DF}">
-                <a14:hiddenLine xmlns:a14="http://schemas.microsoft.com/office/drawing/2010/main" xmlns="" w="9525">
+                <a14:hiddenLine xmlns="" xmlns:a14="http://schemas.microsoft.com/office/drawing/2010/main" w="9525">
                   <a:solidFill>
                     <a:srgbClr val="000000"/>
                   </a:solidFill>
@@ -4280,7 +4281,7 @@
             </a:ln>
             <a:extLst>
               <a:ext uri="{91240B29-F687-4f45-9708-019B960494DF}">
-                <a14:hiddenLine xmlns:a14="http://schemas.microsoft.com/office/drawing/2010/main" xmlns="" w="9525">
+                <a14:hiddenLine xmlns="" xmlns:a14="http://schemas.microsoft.com/office/drawing/2010/main" w="9525">
                   <a:solidFill>
                     <a:srgbClr val="000000"/>
                   </a:solidFill>
@@ -4370,7 +4371,7 @@
             </a:ln>
             <a:extLst>
               <a:ext uri="{91240B29-F687-4f45-9708-019B960494DF}">
-                <a14:hiddenLine xmlns:a14="http://schemas.microsoft.com/office/drawing/2010/main" xmlns="" w="9525">
+                <a14:hiddenLine xmlns="" xmlns:a14="http://schemas.microsoft.com/office/drawing/2010/main" w="9525">
                   <a:solidFill>
                     <a:srgbClr val="000000"/>
                   </a:solidFill>
@@ -4432,7 +4433,7 @@
             </a:ln>
             <a:extLst>
               <a:ext uri="{91240B29-F687-4f45-9708-019B960494DF}">
-                <a14:hiddenLine xmlns:a14="http://schemas.microsoft.com/office/drawing/2010/main" xmlns="" w="9525">
+                <a14:hiddenLine xmlns="" xmlns:a14="http://schemas.microsoft.com/office/drawing/2010/main" w="9525">
                   <a:solidFill>
                     <a:srgbClr val="000000"/>
                   </a:solidFill>
@@ -4552,7 +4553,7 @@
             </a:ln>
             <a:extLst>
               <a:ext uri="{91240B29-F687-4f45-9708-019B960494DF}">
-                <a14:hiddenLine xmlns:a14="http://schemas.microsoft.com/office/drawing/2010/main" xmlns="" w="9525">
+                <a14:hiddenLine xmlns="" xmlns:a14="http://schemas.microsoft.com/office/drawing/2010/main" w="9525">
                   <a:solidFill>
                     <a:srgbClr val="000000"/>
                   </a:solidFill>
@@ -4620,7 +4621,7 @@
             </a:ln>
             <a:extLst>
               <a:ext uri="{91240B29-F687-4f45-9708-019B960494DF}">
-                <a14:hiddenLine xmlns:a14="http://schemas.microsoft.com/office/drawing/2010/main" xmlns="" w="9525">
+                <a14:hiddenLine xmlns="" xmlns:a14="http://schemas.microsoft.com/office/drawing/2010/main" w="9525">
                   <a:solidFill>
                     <a:srgbClr val="000000"/>
                   </a:solidFill>
@@ -4710,7 +4711,7 @@
             </a:ln>
             <a:extLst>
               <a:ext uri="{91240B29-F687-4f45-9708-019B960494DF}">
-                <a14:hiddenLine xmlns:a14="http://schemas.microsoft.com/office/drawing/2010/main" xmlns="" w="9525">
+                <a14:hiddenLine xmlns="" xmlns:a14="http://schemas.microsoft.com/office/drawing/2010/main" w="9525">
                   <a:solidFill>
                     <a:srgbClr val="000000"/>
                   </a:solidFill>
@@ -4850,7 +4851,7 @@
           <a:p>
             <a:fld id="{4313F670-7F9A-774D-B73D-573401E44297}" type="datetime1">
               <a:rPr lang="en-US" smtClean="0"/>
-              <a:t>10/20/26</a:t>
+              <a:t>10/22/26</a:t>
             </a:fld>
             <a:endParaRPr lang="en-US"/>
           </a:p>
@@ -5117,7 +5118,7 @@
           <a:p>
             <a:fld id="{446F9669-A8A7-2D40-9D01-B35FC337AA30}" type="datetime1">
               <a:rPr lang="en-US" smtClean="0"/>
-              <a:t>10/20/26</a:t>
+              <a:t>10/22/26</a:t>
             </a:fld>
             <a:endParaRPr lang="en-US"/>
           </a:p>
@@ -5313,7 +5314,7 @@
           <a:p>
             <a:fld id="{FA76CF18-F41B-6B48-B3E5-599E9795C2C3}" type="datetime1">
               <a:rPr lang="en-US" smtClean="0"/>
-              <a:t>10/20/26</a:t>
+              <a:t>10/22/26</a:t>
             </a:fld>
             <a:endParaRPr lang="en-US"/>
           </a:p>
@@ -5576,7 +5577,7 @@
           <a:p>
             <a:fld id="{B9654854-6457-164F-A077-6B3035079B82}" type="datetime1">
               <a:rPr lang="en-US" smtClean="0"/>
-              <a:t>10/20/26</a:t>
+              <a:t>10/22/26</a:t>
             </a:fld>
             <a:endParaRPr lang="en-US"/>
           </a:p>
@@ -6010,7 +6011,7 @@
           <a:p>
             <a:fld id="{CE3DBFD7-E611-8C40-AC73-0C29FF63F0CD}" type="datetime1">
               <a:rPr lang="en-US" smtClean="0"/>
-              <a:t>10/20/26</a:t>
+              <a:t>10/22/26</a:t>
             </a:fld>
             <a:endParaRPr lang="en-US"/>
           </a:p>
@@ -6556,7 +6557,7 @@
           <a:p>
             <a:fld id="{C8B63B06-0493-2840-9F37-30C9412BBF17}" type="datetime1">
               <a:rPr lang="en-US" smtClean="0"/>
-              <a:t>10/20/26</a:t>
+              <a:t>10/22/26</a:t>
             </a:fld>
             <a:endParaRPr lang="en-US"/>
           </a:p>
@@ -7276,7 +7277,7 @@
           <a:p>
             <a:fld id="{72B5C0FA-8C46-E84D-B6D7-B673F2CA0A0E}" type="datetime1">
               <a:rPr lang="en-US" smtClean="0"/>
-              <a:t>10/20/26</a:t>
+              <a:t>10/22/26</a:t>
             </a:fld>
             <a:endParaRPr lang="en-US"/>
           </a:p>
@@ -7446,7 +7447,7 @@
           <a:p>
             <a:fld id="{60B9CDE1-97B4-BF46-B69C-B86855B18820}" type="datetime1">
               <a:rPr lang="en-US" smtClean="0"/>
-              <a:t>10/20/26</a:t>
+              <a:t>10/22/26</a:t>
             </a:fld>
             <a:endParaRPr lang="en-US"/>
           </a:p>
@@ -7626,7 +7627,7 @@
           <a:p>
             <a:fld id="{BE51D3A4-F9E5-FD49-AA87-B395F50451DC}" type="datetime1">
               <a:rPr lang="en-US" smtClean="0"/>
-              <a:t>10/20/26</a:t>
+              <a:t>10/22/26</a:t>
             </a:fld>
             <a:endParaRPr lang="en-US"/>
           </a:p>
@@ -7796,7 +7797,7 @@
           <a:p>
             <a:fld id="{880DFB37-B0AE-9449-85EC-14F9C83B6084}" type="datetime1">
               <a:rPr lang="en-US" smtClean="0"/>
-              <a:t>10/20/26</a:t>
+              <a:t>10/22/26</a:t>
             </a:fld>
             <a:endParaRPr lang="en-US"/>
           </a:p>
@@ -8046,7 +8047,7 @@
           <a:p>
             <a:fld id="{C939124A-616E-6944-A21A-1839F5DBE7BB}" type="datetime1">
               <a:rPr lang="en-US" smtClean="0"/>
-              <a:t>10/20/26</a:t>
+              <a:t>10/22/26</a:t>
             </a:fld>
             <a:endParaRPr lang="en-US"/>
           </a:p>
@@ -8278,7 +8279,7 @@
           <a:p>
             <a:fld id="{C6E9A026-D48C-FD43-8676-CD625DD5D84B}" type="datetime1">
               <a:rPr lang="en-US" smtClean="0"/>
-              <a:t>10/20/26</a:t>
+              <a:t>10/22/26</a:t>
             </a:fld>
             <a:endParaRPr lang="en-US"/>
           </a:p>
@@ -8664,7 +8665,7 @@
           <a:p>
             <a:fld id="{EA35111E-23A3-1440-99A3-C4C665908E3D}" type="datetime1">
               <a:rPr lang="en-US" smtClean="0"/>
-              <a:t>10/20/26</a:t>
+              <a:t>10/22/26</a:t>
             </a:fld>
             <a:endParaRPr lang="en-US"/>
           </a:p>
@@ -8787,7 +8788,7 @@
           <a:p>
             <a:fld id="{249983B9-88EF-D74B-BA6D-6A3BF17C2B38}" type="datetime1">
               <a:rPr lang="en-US" smtClean="0"/>
-              <a:t>10/20/26</a:t>
+              <a:t>10/22/26</a:t>
             </a:fld>
             <a:endParaRPr lang="en-US"/>
           </a:p>
@@ -8882,7 +8883,7 @@
           <a:p>
             <a:fld id="{E2A00AEF-B4EC-084A-8DB8-A225C7981CBB}" type="datetime1">
               <a:rPr lang="en-US" smtClean="0"/>
-              <a:t>10/20/26</a:t>
+              <a:t>10/22/26</a:t>
             </a:fld>
             <a:endParaRPr lang="en-US"/>
           </a:p>
@@ -9131,7 +9132,7 @@
           <a:p>
             <a:fld id="{97860299-21CD-A94A-A7B0-44E787F8D42C}" type="datetime1">
               <a:rPr lang="en-US" smtClean="0"/>
-              <a:t>10/20/26</a:t>
+              <a:t>10/22/26</a:t>
             </a:fld>
             <a:endParaRPr lang="en-US"/>
           </a:p>
@@ -9416,7 +9417,7 @@
           <a:p>
             <a:fld id="{3DFD19CF-4E62-D246-BA61-7B528271315F}" type="datetime1">
               <a:rPr lang="en-US" smtClean="0"/>
-              <a:t>10/20/26</a:t>
+              <a:t>10/22/26</a:t>
             </a:fld>
             <a:endParaRPr lang="en-US"/>
           </a:p>
@@ -9539,7 +9540,7 @@
           <a:noFill/>
           <a:extLst>
             <a:ext uri="{909E8E84-426E-40dd-AFC4-6F175D3DCCD1}">
-              <a14:hiddenFill xmlns:a14="http://schemas.microsoft.com/office/drawing/2010/main" xmlns="">
+              <a14:hiddenFill xmlns="" xmlns:a14="http://schemas.microsoft.com/office/drawing/2010/main">
                 <a:solidFill>
                   <a:srgbClr val="FFFFFF"/>
                 </a:solidFill>
@@ -9613,7 +9614,7 @@
               </a:ln>
               <a:extLst>
                 <a:ext uri="{91240B29-F687-4f45-9708-019B960494DF}">
-                  <a14:hiddenLine xmlns:a14="http://schemas.microsoft.com/office/drawing/2010/main" xmlns="" w="9525">
+                  <a14:hiddenLine xmlns="" xmlns:a14="http://schemas.microsoft.com/office/drawing/2010/main" w="9525">
                     <a:solidFill>
                       <a:srgbClr val="000000"/>
                     </a:solidFill>
@@ -9703,7 +9704,7 @@
               </a:ln>
               <a:extLst>
                 <a:ext uri="{91240B29-F687-4f45-9708-019B960494DF}">
-                  <a14:hiddenLine xmlns:a14="http://schemas.microsoft.com/office/drawing/2010/main" xmlns="" w="9525">
+                  <a14:hiddenLine xmlns="" xmlns:a14="http://schemas.microsoft.com/office/drawing/2010/main" w="9525">
                     <a:solidFill>
                       <a:srgbClr val="000000"/>
                     </a:solidFill>
@@ -9793,7 +9794,7 @@
               </a:ln>
               <a:extLst>
                 <a:ext uri="{91240B29-F687-4f45-9708-019B960494DF}">
-                  <a14:hiddenLine xmlns:a14="http://schemas.microsoft.com/office/drawing/2010/main" xmlns="" w="9525">
+                  <a14:hiddenLine xmlns="" xmlns:a14="http://schemas.microsoft.com/office/drawing/2010/main" w="9525">
                     <a:solidFill>
                       <a:srgbClr val="000000"/>
                     </a:solidFill>
@@ -9855,7 +9856,7 @@
               </a:ln>
               <a:extLst>
                 <a:ext uri="{91240B29-F687-4f45-9708-019B960494DF}">
-                  <a14:hiddenLine xmlns:a14="http://schemas.microsoft.com/office/drawing/2010/main" xmlns="" w="9525">
+                  <a14:hiddenLine xmlns="" xmlns:a14="http://schemas.microsoft.com/office/drawing/2010/main" w="9525">
                     <a:solidFill>
                       <a:srgbClr val="000000"/>
                     </a:solidFill>
@@ -9945,7 +9946,7 @@
               </a:ln>
               <a:extLst>
                 <a:ext uri="{91240B29-F687-4f45-9708-019B960494DF}">
-                  <a14:hiddenLine xmlns:a14="http://schemas.microsoft.com/office/drawing/2010/main" xmlns="" w="9525">
+                  <a14:hiddenLine xmlns="" xmlns:a14="http://schemas.microsoft.com/office/drawing/2010/main" w="9525">
                     <a:solidFill>
                       <a:srgbClr val="000000"/>
                     </a:solidFill>
@@ -10007,7 +10008,7 @@
               </a:ln>
               <a:extLst>
                 <a:ext uri="{91240B29-F687-4f45-9708-019B960494DF}">
-                  <a14:hiddenLine xmlns:a14="http://schemas.microsoft.com/office/drawing/2010/main" xmlns="" w="9525">
+                  <a14:hiddenLine xmlns="" xmlns:a14="http://schemas.microsoft.com/office/drawing/2010/main" w="9525">
                     <a:solidFill>
                       <a:srgbClr val="000000"/>
                     </a:solidFill>
@@ -10069,7 +10070,7 @@
               </a:ln>
               <a:extLst>
                 <a:ext uri="{91240B29-F687-4f45-9708-019B960494DF}">
-                  <a14:hiddenLine xmlns:a14="http://schemas.microsoft.com/office/drawing/2010/main" xmlns="" w="9525">
+                  <a14:hiddenLine xmlns="" xmlns:a14="http://schemas.microsoft.com/office/drawing/2010/main" w="9525">
                     <a:solidFill>
                       <a:srgbClr val="000000"/>
                     </a:solidFill>
@@ -10159,7 +10160,7 @@
               </a:ln>
               <a:extLst>
                 <a:ext uri="{91240B29-F687-4f45-9708-019B960494DF}">
-                  <a14:hiddenLine xmlns:a14="http://schemas.microsoft.com/office/drawing/2010/main" xmlns="" w="9525">
+                  <a14:hiddenLine xmlns="" xmlns:a14="http://schemas.microsoft.com/office/drawing/2010/main" w="9525">
                     <a:solidFill>
                       <a:srgbClr val="000000"/>
                     </a:solidFill>
@@ -10249,7 +10250,7 @@
               </a:ln>
               <a:extLst>
                 <a:ext uri="{91240B29-F687-4f45-9708-019B960494DF}">
-                  <a14:hiddenLine xmlns:a14="http://schemas.microsoft.com/office/drawing/2010/main" xmlns="" w="9525">
+                  <a14:hiddenLine xmlns="" xmlns:a14="http://schemas.microsoft.com/office/drawing/2010/main" w="9525">
                     <a:solidFill>
                       <a:srgbClr val="000000"/>
                     </a:solidFill>
@@ -10311,7 +10312,7 @@
               </a:ln>
               <a:extLst>
                 <a:ext uri="{91240B29-F687-4f45-9708-019B960494DF}">
-                  <a14:hiddenLine xmlns:a14="http://schemas.microsoft.com/office/drawing/2010/main" xmlns="" w="9525">
+                  <a14:hiddenLine xmlns="" xmlns:a14="http://schemas.microsoft.com/office/drawing/2010/main" w="9525">
                     <a:solidFill>
                       <a:srgbClr val="000000"/>
                     </a:solidFill>
@@ -10421,7 +10422,7 @@
               </a:ln>
               <a:extLst>
                 <a:ext uri="{91240B29-F687-4f45-9708-019B960494DF}">
-                  <a14:hiddenLine xmlns:a14="http://schemas.microsoft.com/office/drawing/2010/main" xmlns="" w="9525">
+                  <a14:hiddenLine xmlns="" xmlns:a14="http://schemas.microsoft.com/office/drawing/2010/main" w="9525">
                     <a:solidFill>
                       <a:srgbClr val="000000"/>
                     </a:solidFill>
@@ -10505,7 +10506,7 @@
               </a:ln>
               <a:extLst>
                 <a:ext uri="{91240B29-F687-4f45-9708-019B960494DF}">
-                  <a14:hiddenLine xmlns:a14="http://schemas.microsoft.com/office/drawing/2010/main" xmlns="" w="9525">
+                  <a14:hiddenLine xmlns="" xmlns:a14="http://schemas.microsoft.com/office/drawing/2010/main" w="9525">
                     <a:solidFill>
                       <a:srgbClr val="000000"/>
                     </a:solidFill>
@@ -10567,7 +10568,7 @@
               </a:ln>
               <a:extLst>
                 <a:ext uri="{91240B29-F687-4f45-9708-019B960494DF}">
-                  <a14:hiddenLine xmlns:a14="http://schemas.microsoft.com/office/drawing/2010/main" xmlns="" w="9525">
+                  <a14:hiddenLine xmlns="" xmlns:a14="http://schemas.microsoft.com/office/drawing/2010/main" w="9525">
                     <a:solidFill>
                       <a:srgbClr val="000000"/>
                     </a:solidFill>
@@ -10629,7 +10630,7 @@
               </a:ln>
               <a:extLst>
                 <a:ext uri="{91240B29-F687-4f45-9708-019B960494DF}">
-                  <a14:hiddenLine xmlns:a14="http://schemas.microsoft.com/office/drawing/2010/main" xmlns="" w="9525">
+                  <a14:hiddenLine xmlns="" xmlns:a14="http://schemas.microsoft.com/office/drawing/2010/main" w="9525">
                     <a:solidFill>
                       <a:srgbClr val="000000"/>
                     </a:solidFill>
@@ -10719,7 +10720,7 @@
               </a:ln>
               <a:extLst>
                 <a:ext uri="{91240B29-F687-4f45-9708-019B960494DF}">
-                  <a14:hiddenLine xmlns:a14="http://schemas.microsoft.com/office/drawing/2010/main" xmlns="" w="9525">
+                  <a14:hiddenLine xmlns="" xmlns:a14="http://schemas.microsoft.com/office/drawing/2010/main" w="9525">
                     <a:solidFill>
                       <a:srgbClr val="000000"/>
                     </a:solidFill>
@@ -10753,7 +10754,7 @@
               </a:ln>
               <a:extLst>
                 <a:ext uri="{91240B29-F687-4f45-9708-019B960494DF}">
-                  <a14:hiddenLine xmlns:a14="http://schemas.microsoft.com/office/drawing/2010/main" xmlns="" w="9525">
+                  <a14:hiddenLine xmlns="" xmlns:a14="http://schemas.microsoft.com/office/drawing/2010/main" w="9525">
                     <a:solidFill>
                       <a:srgbClr val="000000"/>
                     </a:solidFill>
@@ -10818,7 +10819,7 @@
               </a:ln>
               <a:extLst>
                 <a:ext uri="{91240B29-F687-4f45-9708-019B960494DF}">
-                  <a14:hiddenLine xmlns:a14="http://schemas.microsoft.com/office/drawing/2010/main" xmlns="" w="9525">
+                  <a14:hiddenLine xmlns="" xmlns:a14="http://schemas.microsoft.com/office/drawing/2010/main" w="9525">
                     <a:solidFill>
                       <a:srgbClr val="000000"/>
                     </a:solidFill>
@@ -10908,7 +10909,7 @@
               </a:ln>
               <a:extLst>
                 <a:ext uri="{91240B29-F687-4f45-9708-019B960494DF}">
-                  <a14:hiddenLine xmlns:a14="http://schemas.microsoft.com/office/drawing/2010/main" xmlns="" w="9525">
+                  <a14:hiddenLine xmlns="" xmlns:a14="http://schemas.microsoft.com/office/drawing/2010/main" w="9525">
                     <a:solidFill>
                       <a:srgbClr val="000000"/>
                     </a:solidFill>
@@ -10970,7 +10971,7 @@
               </a:ln>
               <a:extLst>
                 <a:ext uri="{91240B29-F687-4f45-9708-019B960494DF}">
-                  <a14:hiddenLine xmlns:a14="http://schemas.microsoft.com/office/drawing/2010/main" xmlns="" w="9525">
+                  <a14:hiddenLine xmlns="" xmlns:a14="http://schemas.microsoft.com/office/drawing/2010/main" w="9525">
                     <a:solidFill>
                       <a:srgbClr val="000000"/>
                     </a:solidFill>
@@ -11060,7 +11061,7 @@
               </a:ln>
               <a:extLst>
                 <a:ext uri="{91240B29-F687-4f45-9708-019B960494DF}">
-                  <a14:hiddenLine xmlns:a14="http://schemas.microsoft.com/office/drawing/2010/main" xmlns="" w="9525">
+                  <a14:hiddenLine xmlns="" xmlns:a14="http://schemas.microsoft.com/office/drawing/2010/main" w="9525">
                     <a:solidFill>
                       <a:srgbClr val="000000"/>
                     </a:solidFill>
@@ -11125,7 +11126,7 @@
               </a:ln>
               <a:extLst>
                 <a:ext uri="{91240B29-F687-4f45-9708-019B960494DF}">
-                  <a14:hiddenLine xmlns:a14="http://schemas.microsoft.com/office/drawing/2010/main" xmlns="" w="9525">
+                  <a14:hiddenLine xmlns="" xmlns:a14="http://schemas.microsoft.com/office/drawing/2010/main" w="9525">
                     <a:solidFill>
                       <a:srgbClr val="000000"/>
                     </a:solidFill>
@@ -11187,7 +11188,7 @@
               </a:ln>
               <a:extLst>
                 <a:ext uri="{91240B29-F687-4f45-9708-019B960494DF}">
-                  <a14:hiddenLine xmlns:a14="http://schemas.microsoft.com/office/drawing/2010/main" xmlns="" w="9525">
+                  <a14:hiddenLine xmlns="" xmlns:a14="http://schemas.microsoft.com/office/drawing/2010/main" w="9525">
                     <a:solidFill>
                       <a:srgbClr val="000000"/>
                     </a:solidFill>
@@ -11277,7 +11278,7 @@
               </a:ln>
               <a:extLst>
                 <a:ext uri="{91240B29-F687-4f45-9708-019B960494DF}">
-                  <a14:hiddenLine xmlns:a14="http://schemas.microsoft.com/office/drawing/2010/main" xmlns="" w="9525">
+                  <a14:hiddenLine xmlns="" xmlns:a14="http://schemas.microsoft.com/office/drawing/2010/main" w="9525">
                     <a:solidFill>
                       <a:srgbClr val="000000"/>
                     </a:solidFill>
@@ -11367,7 +11368,7 @@
               </a:ln>
               <a:extLst>
                 <a:ext uri="{91240B29-F687-4f45-9708-019B960494DF}">
-                  <a14:hiddenLine xmlns:a14="http://schemas.microsoft.com/office/drawing/2010/main" xmlns="" w="9525">
+                  <a14:hiddenLine xmlns="" xmlns:a14="http://schemas.microsoft.com/office/drawing/2010/main" w="9525">
                     <a:solidFill>
                       <a:srgbClr val="000000"/>
                     </a:solidFill>
@@ -11432,7 +11433,7 @@
               </a:ln>
               <a:extLst>
                 <a:ext uri="{91240B29-F687-4f45-9708-019B960494DF}">
-                  <a14:hiddenLine xmlns:a14="http://schemas.microsoft.com/office/drawing/2010/main" xmlns="" w="9525">
+                  <a14:hiddenLine xmlns="" xmlns:a14="http://schemas.microsoft.com/office/drawing/2010/main" w="9525">
                     <a:solidFill>
                       <a:srgbClr val="000000"/>
                     </a:solidFill>
@@ -11552,7 +11553,7 @@
               </a:ln>
               <a:extLst>
                 <a:ext uri="{91240B29-F687-4f45-9708-019B960494DF}">
-                  <a14:hiddenLine xmlns:a14="http://schemas.microsoft.com/office/drawing/2010/main" xmlns="" w="9525">
+                  <a14:hiddenLine xmlns="" xmlns:a14="http://schemas.microsoft.com/office/drawing/2010/main" w="9525">
                     <a:solidFill>
                       <a:srgbClr val="000000"/>
                     </a:solidFill>
@@ -11633,7 +11634,7 @@
               </a:ln>
               <a:extLst>
                 <a:ext uri="{91240B29-F687-4f45-9708-019B960494DF}">
-                  <a14:hiddenLine xmlns:a14="http://schemas.microsoft.com/office/drawing/2010/main" xmlns="" w="9525">
+                  <a14:hiddenLine xmlns="" xmlns:a14="http://schemas.microsoft.com/office/drawing/2010/main" w="9525">
                     <a:solidFill>
                       <a:srgbClr val="000000"/>
                     </a:solidFill>
@@ -11748,7 +11749,7 @@
               </a:ln>
               <a:extLst>
                 <a:ext uri="{91240B29-F687-4f45-9708-019B960494DF}">
-                  <a14:hiddenLine xmlns:a14="http://schemas.microsoft.com/office/drawing/2010/main" xmlns="" w="9525">
+                  <a14:hiddenLine xmlns="" xmlns:a14="http://schemas.microsoft.com/office/drawing/2010/main" w="9525">
                     <a:solidFill>
                       <a:srgbClr val="000000"/>
                     </a:solidFill>
@@ -11838,7 +11839,7 @@
               </a:ln>
               <a:extLst>
                 <a:ext uri="{91240B29-F687-4f45-9708-019B960494DF}">
-                  <a14:hiddenLine xmlns:a14="http://schemas.microsoft.com/office/drawing/2010/main" xmlns="" w="9525">
+                  <a14:hiddenLine xmlns="" xmlns:a14="http://schemas.microsoft.com/office/drawing/2010/main" w="9525">
                     <a:solidFill>
                       <a:srgbClr val="000000"/>
                     </a:solidFill>
@@ -11903,7 +11904,7 @@
               </a:ln>
               <a:extLst>
                 <a:ext uri="{91240B29-F687-4f45-9708-019B960494DF}">
-                  <a14:hiddenLine xmlns:a14="http://schemas.microsoft.com/office/drawing/2010/main" xmlns="" w="9525">
+                  <a14:hiddenLine xmlns="" xmlns:a14="http://schemas.microsoft.com/office/drawing/2010/main" w="9525">
                     <a:solidFill>
                       <a:srgbClr val="000000"/>
                     </a:solidFill>
@@ -11993,7 +11994,7 @@
               </a:ln>
               <a:extLst>
                 <a:ext uri="{91240B29-F687-4f45-9708-019B960494DF}">
-                  <a14:hiddenLine xmlns:a14="http://schemas.microsoft.com/office/drawing/2010/main" xmlns="" w="9525">
+                  <a14:hiddenLine xmlns="" xmlns:a14="http://schemas.microsoft.com/office/drawing/2010/main" w="9525">
                     <a:solidFill>
                       <a:srgbClr val="000000"/>
                     </a:solidFill>
@@ -12061,7 +12062,7 @@
               </a:ln>
               <a:extLst>
                 <a:ext uri="{91240B29-F687-4f45-9708-019B960494DF}">
-                  <a14:hiddenLine xmlns:a14="http://schemas.microsoft.com/office/drawing/2010/main" xmlns="" w="9525">
+                  <a14:hiddenLine xmlns="" xmlns:a14="http://schemas.microsoft.com/office/drawing/2010/main" w="9525">
                     <a:solidFill>
                       <a:srgbClr val="000000"/>
                     </a:solidFill>
@@ -12151,7 +12152,7 @@
               </a:ln>
               <a:extLst>
                 <a:ext uri="{91240B29-F687-4f45-9708-019B960494DF}">
-                  <a14:hiddenLine xmlns:a14="http://schemas.microsoft.com/office/drawing/2010/main" xmlns="" w="9525">
+                  <a14:hiddenLine xmlns="" xmlns:a14="http://schemas.microsoft.com/office/drawing/2010/main" w="9525">
                     <a:solidFill>
                       <a:srgbClr val="000000"/>
                     </a:solidFill>
@@ -12219,7 +12220,7 @@
               </a:ln>
               <a:extLst>
                 <a:ext uri="{91240B29-F687-4f45-9708-019B960494DF}">
-                  <a14:hiddenLine xmlns:a14="http://schemas.microsoft.com/office/drawing/2010/main" xmlns="" w="9525">
+                  <a14:hiddenLine xmlns="" xmlns:a14="http://schemas.microsoft.com/office/drawing/2010/main" w="9525">
                     <a:solidFill>
                       <a:srgbClr val="000000"/>
                     </a:solidFill>
@@ -12309,7 +12310,7 @@
               </a:ln>
               <a:extLst>
                 <a:ext uri="{91240B29-F687-4f45-9708-019B960494DF}">
-                  <a14:hiddenLine xmlns:a14="http://schemas.microsoft.com/office/drawing/2010/main" xmlns="" w="9525">
+                  <a14:hiddenLine xmlns="" xmlns:a14="http://schemas.microsoft.com/office/drawing/2010/main" w="9525">
                     <a:solidFill>
                       <a:srgbClr val="000000"/>
                     </a:solidFill>
@@ -12343,7 +12344,7 @@
               </a:ln>
               <a:extLst>
                 <a:ext uri="{91240B29-F687-4f45-9708-019B960494DF}">
-                  <a14:hiddenLine xmlns:a14="http://schemas.microsoft.com/office/drawing/2010/main" xmlns="" w="9525">
+                  <a14:hiddenLine xmlns="" xmlns:a14="http://schemas.microsoft.com/office/drawing/2010/main" w="9525">
                     <a:solidFill>
                       <a:srgbClr val="000000"/>
                     </a:solidFill>
@@ -12483,7 +12484,7 @@
           <a:p>
             <a:fld id="{92FF8978-FE14-CC4A-93A6-934EB06543C0}" type="datetime1">
               <a:rPr lang="en-US" smtClean="0"/>
-              <a:t>10/20/26</a:t>
+              <a:t>10/22/26</a:t>
             </a:fld>
             <a:endParaRPr lang="en-US"/>
           </a:p>
@@ -16185,6 +16186,288 @@
 </file>
 
 <file path=ppt/slides/slide21.xml><?xml version="1.0" encoding="utf-8"?>
+<p:sld xmlns:a="http://schemas.openxmlformats.org/drawingml/2006/main" xmlns:r="http://schemas.openxmlformats.org/officeDocument/2006/relationships" xmlns:p="http://schemas.openxmlformats.org/presentationml/2006/main">
+  <p:cSld>
+    <p:spTree>
+      <p:nvGrpSpPr>
+        <p:cNvPr id="1" name="">
+          <a:extLst>
+            <a:ext uri="{FF2B5EF4-FFF2-40B4-BE49-F238E27FC236}">
+              <a16:creationId xmlns:a16="http://schemas.microsoft.com/office/drawing/2014/main" id="{FCDC3FD1-9453-8F40-90ED-F94E192F083D}"/>
+            </a:ext>
+          </a:extLst>
+        </p:cNvPr>
+        <p:cNvGrpSpPr/>
+        <p:nvPr/>
+      </p:nvGrpSpPr>
+      <p:grpSpPr>
+        <a:xfrm>
+          <a:off x="0" y="0"/>
+          <a:ext cx="0" cy="0"/>
+          <a:chOff x="0" y="0"/>
+          <a:chExt cx="0" cy="0"/>
+        </a:xfrm>
+      </p:grpSpPr>
+      <p:sp>
+        <p:nvSpPr>
+          <p:cNvPr id="6146" name="Rectangle 2">
+            <a:extLst>
+              <a:ext uri="{FF2B5EF4-FFF2-40B4-BE49-F238E27FC236}">
+                <a16:creationId xmlns:a16="http://schemas.microsoft.com/office/drawing/2014/main" id="{8E74F5C0-8BC5-156D-1775-199724E8A0BF}"/>
+              </a:ext>
+            </a:extLst>
+          </p:cNvPr>
+          <p:cNvSpPr>
+            <a:spLocks noGrp="1" noChangeArrowheads="1"/>
+          </p:cNvSpPr>
+          <p:nvPr>
+            <p:ph type="title"/>
+            <p:custDataLst>
+              <p:tags r:id="rId1"/>
+            </p:custDataLst>
+          </p:nvPr>
+        </p:nvSpPr>
+        <p:spPr>
+          <a:xfrm>
+            <a:off x="1141413" y="284084"/>
+            <a:ext cx="9905998" cy="620791"/>
+          </a:xfrm>
+        </p:spPr>
+        <p:txBody>
+          <a:bodyPr/>
+          <a:lstStyle/>
+          <a:p>
+            <a:pPr algn="ctr"/>
+            <a:r>
+              <a:rPr lang="en-US" dirty="0"/>
+              <a:t>Lecture 17 - Thursday, Oct. 22</a:t>
+            </a:r>
+          </a:p>
+        </p:txBody>
+      </p:sp>
+      <p:sp>
+        <p:nvSpPr>
+          <p:cNvPr id="6147" name="Rectangle 3">
+            <a:extLst>
+              <a:ext uri="{FF2B5EF4-FFF2-40B4-BE49-F238E27FC236}">
+                <a16:creationId xmlns:a16="http://schemas.microsoft.com/office/drawing/2014/main" id="{681E031E-59BF-C8F6-FF32-BA05D16BCB1D}"/>
+              </a:ext>
+            </a:extLst>
+          </p:cNvPr>
+          <p:cNvSpPr>
+            <a:spLocks noGrp="1" noChangeArrowheads="1"/>
+          </p:cNvSpPr>
+          <p:nvPr>
+            <p:ph idx="1"/>
+            <p:custDataLst>
+              <p:tags r:id="rId2"/>
+            </p:custDataLst>
+          </p:nvPr>
+        </p:nvSpPr>
+        <p:spPr>
+          <a:xfrm>
+            <a:off x="1294151" y="904876"/>
+            <a:ext cx="9600522" cy="5749924"/>
+          </a:xfrm>
+        </p:spPr>
+        <p:txBody>
+          <a:bodyPr>
+            <a:normAutofit fontScale="70000" lnSpcReduction="20000"/>
+          </a:bodyPr>
+          <a:lstStyle/>
+          <a:p>
+            <a:r>
+              <a:rPr lang="en-US" dirty="0">
+                <a:latin typeface="Arial" panose="020B0604020202020204" pitchFamily="34" charset="0"/>
+                <a:cs typeface="Arial" panose="020B0604020202020204" pitchFamily="34" charset="0"/>
+              </a:rPr>
+              <a:t>Please remember </a:t>
+            </a:r>
+            <a:r>
+              <a:rPr lang="en-US" b="1" i="1" u="sng" dirty="0">
+                <a:latin typeface="Arial" panose="020B0604020202020204" pitchFamily="34" charset="0"/>
+                <a:cs typeface="Arial" panose="020B0604020202020204" pitchFamily="34" charset="0"/>
+              </a:rPr>
+              <a:t>no laptops / phones</a:t>
+            </a:r>
+            <a:r>
+              <a:rPr lang="en-US" dirty="0">
+                <a:latin typeface="Arial" panose="020B0604020202020204" pitchFamily="34" charset="0"/>
+                <a:cs typeface="Arial" panose="020B0604020202020204" pitchFamily="34" charset="0"/>
+              </a:rPr>
+              <a:t> and </a:t>
+            </a:r>
+            <a:r>
+              <a:rPr lang="en-US" b="1" i="1" u="sng" dirty="0">
+                <a:latin typeface="Arial" panose="020B0604020202020204" pitchFamily="34" charset="0"/>
+                <a:cs typeface="Arial" panose="020B0604020202020204" pitchFamily="34" charset="0"/>
+              </a:rPr>
+              <a:t>attendance policy</a:t>
+            </a:r>
+            <a:endParaRPr lang="en-US" dirty="0">
+              <a:latin typeface="Arial" panose="020B0604020202020204" pitchFamily="34" charset="0"/>
+              <a:cs typeface="Arial" panose="020B0604020202020204" pitchFamily="34" charset="0"/>
+            </a:endParaRPr>
+          </a:p>
+          <a:p>
+            <a:r>
+              <a:rPr lang="en-US" dirty="0">
+                <a:latin typeface="Arial" panose="020B0604020202020204" pitchFamily="34" charset="0"/>
+                <a:cs typeface="Arial" panose="020B0604020202020204" pitchFamily="34" charset="0"/>
+              </a:rPr>
+              <a:t>October! Best month of the year! Woo!</a:t>
+            </a:r>
+          </a:p>
+          <a:p>
+            <a:r>
+              <a:rPr lang="en-US" dirty="0">
+                <a:latin typeface="Arial" panose="020B0604020202020204" pitchFamily="34" charset="0"/>
+                <a:cs typeface="Arial" panose="020B0604020202020204" pitchFamily="34" charset="0"/>
+              </a:rPr>
+              <a:t>This week:</a:t>
+            </a:r>
+          </a:p>
+          <a:p>
+            <a:pPr lvl="1"/>
+            <a:r>
+              <a:rPr lang="en-US" dirty="0">
+                <a:latin typeface="Arial" panose="020B0604020202020204" pitchFamily="34" charset="0"/>
+                <a:cs typeface="Arial" panose="020B0604020202020204" pitchFamily="34" charset="0"/>
+              </a:rPr>
+              <a:t>Nothing due!</a:t>
+            </a:r>
+          </a:p>
+          <a:p>
+            <a:pPr lvl="1"/>
+            <a:r>
+              <a:rPr lang="en-US" dirty="0">
+                <a:latin typeface="Arial" panose="020B0604020202020204" pitchFamily="34" charset="0"/>
+                <a:cs typeface="Arial" panose="020B0604020202020204" pitchFamily="34" charset="0"/>
+              </a:rPr>
+              <a:t>I **will be** sending you some Turing Machine practice for the upcoming quiz 3 though</a:t>
+            </a:r>
+          </a:p>
+          <a:p>
+            <a:pPr lvl="1"/>
+            <a:r>
+              <a:rPr lang="en-US" dirty="0">
+                <a:latin typeface="Arial" panose="020B0604020202020204" pitchFamily="34" charset="0"/>
+                <a:cs typeface="Arial" panose="020B0604020202020204" pitchFamily="34" charset="0"/>
+              </a:rPr>
+              <a:t>You can get started on your module 3 written assignment if you want.</a:t>
+            </a:r>
+          </a:p>
+          <a:p>
+            <a:r>
+              <a:rPr lang="en-US" dirty="0">
+                <a:latin typeface="Arial" panose="020B0604020202020204" pitchFamily="34" charset="0"/>
+                <a:cs typeface="Arial" panose="020B0604020202020204" pitchFamily="34" charset="0"/>
+              </a:rPr>
+              <a:t>Next week:</a:t>
+            </a:r>
+          </a:p>
+          <a:p>
+            <a:pPr lvl="1"/>
+            <a:r>
+              <a:rPr lang="en-US" dirty="0">
+                <a:latin typeface="Arial" panose="020B0604020202020204" pitchFamily="34" charset="0"/>
+                <a:cs typeface="Arial" panose="020B0604020202020204" pitchFamily="34" charset="0"/>
+              </a:rPr>
+              <a:t>Module 3 written assignment is due</a:t>
+            </a:r>
+          </a:p>
+          <a:p>
+            <a:r>
+              <a:rPr lang="en-US" dirty="0">
+                <a:latin typeface="Arial" panose="020B0604020202020204" pitchFamily="34" charset="0"/>
+                <a:cs typeface="Arial" panose="020B0604020202020204" pitchFamily="34" charset="0"/>
+              </a:rPr>
+              <a:t>Grading</a:t>
+            </a:r>
+          </a:p>
+          <a:p>
+            <a:pPr lvl="1"/>
+            <a:r>
+              <a:rPr lang="en-US" dirty="0">
+                <a:latin typeface="Arial" panose="020B0604020202020204" pitchFamily="34" charset="0"/>
+                <a:cs typeface="Arial" panose="020B0604020202020204" pitchFamily="34" charset="0"/>
+              </a:rPr>
+              <a:t>Quiz is graded! Will release automatically at noon today. Average was a 77%</a:t>
+            </a:r>
+          </a:p>
+          <a:p>
+            <a:pPr lvl="1"/>
+            <a:r>
+              <a:rPr lang="en-US" dirty="0">
+                <a:latin typeface="Arial" panose="020B0604020202020204" pitchFamily="34" charset="0"/>
+                <a:cs typeface="Arial" panose="020B0604020202020204" pitchFamily="34" charset="0"/>
+              </a:rPr>
+              <a:t>You can see the questions for 5 days like before. </a:t>
+            </a:r>
+          </a:p>
+          <a:p>
+            <a:r>
+              <a:rPr lang="en-US" dirty="0">
+                <a:latin typeface="Arial" panose="020B0604020202020204" pitchFamily="34" charset="0"/>
+                <a:cs typeface="Arial" panose="020B0604020202020204" pitchFamily="34" charset="0"/>
+              </a:rPr>
+              <a:t>OH Check-Ins</a:t>
+            </a:r>
+          </a:p>
+          <a:p>
+            <a:pPr lvl="1"/>
+            <a:r>
+              <a:rPr lang="en-US" dirty="0">
+                <a:latin typeface="Arial" panose="020B0604020202020204" pitchFamily="34" charset="0"/>
+                <a:cs typeface="Arial" panose="020B0604020202020204" pitchFamily="34" charset="0"/>
+              </a:rPr>
+              <a:t>Have started. This is week 2. Any issues so far?</a:t>
+            </a:r>
+          </a:p>
+          <a:p>
+            <a:pPr lvl="1"/>
+            <a:r>
+              <a:rPr lang="en-US" dirty="0">
+                <a:latin typeface="Arial" panose="020B0604020202020204" pitchFamily="34" charset="0"/>
+                <a:cs typeface="Arial" panose="020B0604020202020204" pitchFamily="34" charset="0"/>
+              </a:rPr>
+              <a:t>If you need to change weeks for a legitimate reason, email Elina (our OH head TA)</a:t>
+            </a:r>
+          </a:p>
+          <a:p>
+            <a:r>
+              <a:rPr lang="en-US" dirty="0">
+                <a:latin typeface="Arial" panose="020B0604020202020204" pitchFamily="34" charset="0"/>
+                <a:cs typeface="Arial" panose="020B0604020202020204" pitchFamily="34" charset="0"/>
+              </a:rPr>
+              <a:t>These slides are linked on the course webpage “slides” page.</a:t>
+            </a:r>
+          </a:p>
+          <a:p>
+            <a:r>
+              <a:rPr lang="en-US" dirty="0">
+                <a:latin typeface="Arial" panose="020B0604020202020204" pitchFamily="34" charset="0"/>
+                <a:cs typeface="Arial" panose="020B0604020202020204" pitchFamily="34" charset="0"/>
+              </a:rPr>
+              <a:t>Today we will continue Module 3 – Turing Machines.</a:t>
+            </a:r>
+          </a:p>
+        </p:txBody>
+      </p:sp>
+    </p:spTree>
+    <p:extLst>
+      <p:ext uri="{BB962C8B-B14F-4D97-AF65-F5344CB8AC3E}">
+        <p14:creationId xmlns:p14="http://schemas.microsoft.com/office/powerpoint/2010/main" val="1090913192"/>
+      </p:ext>
+    </p:extLst>
+  </p:cSld>
+  <p:clrMapOvr>
+    <a:masterClrMapping/>
+  </p:clrMapOvr>
+</p:sld>
+</file>
+
+<file path=ppt/slides/slide22.xml><?xml version="1.0" encoding="utf-8"?>
 <p:sld xmlns:a="http://schemas.openxmlformats.org/drawingml/2006/main" xmlns:r="http://schemas.openxmlformats.org/officeDocument/2006/relationships" xmlns:p="http://schemas.openxmlformats.org/presentationml/2006/main">
   <p:cSld>
     <p:spTree>
@@ -20456,6 +20739,18 @@
 </p:tagLst>
 </file>
 
+<file path=ppt/tags/tag45.xml><?xml version="1.0" encoding="utf-8"?>
+<p:tagLst xmlns:a="http://schemas.openxmlformats.org/drawingml/2006/main" xmlns:r="http://schemas.openxmlformats.org/officeDocument/2006/relationships" xmlns:p="http://schemas.openxmlformats.org/presentationml/2006/main">
+  <p:tag name="_INSTRUCTOR VIEW19C14C36-AC8E-43BC-9DB6-C2AAF774C7DC|PANE__TAG" val="_"/>
+</p:tagLst>
+</file>
+
+<file path=ppt/tags/tag46.xml><?xml version="1.0" encoding="utf-8"?>
+<p:tagLst xmlns:a="http://schemas.openxmlformats.org/drawingml/2006/main" xmlns:r="http://schemas.openxmlformats.org/officeDocument/2006/relationships" xmlns:p="http://schemas.openxmlformats.org/presentationml/2006/main">
+  <p:tag name="_INSTRUCTOR VIEW19C14C36-AC8E-43BC-9DB6-C2AAF774C7DC|PANE__TAG" val="_"/>
+</p:tagLst>
+</file>
+
 <file path=ppt/tags/tag5.xml><?xml version="1.0" encoding="utf-8"?>
 <p:tagLst xmlns:a="http://schemas.openxmlformats.org/drawingml/2006/main" xmlns:r="http://schemas.openxmlformats.org/officeDocument/2006/relationships" xmlns:p="http://schemas.openxmlformats.org/presentationml/2006/main">
   <p:tag name="_INSTRUCTOR VIEW19C14C36-AC8E-43BC-9DB6-C2AAF774C7DC|PANE__TAG" val="_"/>

--- a/slides/00-DailyAnnouncements.pptx
+++ b/slides/00-DailyAnnouncements.pptx
@@ -626,7 +626,7 @@
           <a:noFill/>
           <a:extLst>
             <a:ext uri="{909E8E84-426E-40dd-AFC4-6F175D3DCCD1}">
-              <a14:hiddenFill xmlns="" xmlns:a14="http://schemas.microsoft.com/office/drawing/2010/main">
+              <a14:hiddenFill xmlns:a14="http://schemas.microsoft.com/office/drawing/2010/main" xmlns="">
                 <a:solidFill>
                   <a:srgbClr val="FFFFFF"/>
                 </a:solidFill>
@@ -685,7 +685,7 @@
             </a:ln>
             <a:extLst>
               <a:ext uri="{91240B29-F687-4f45-9708-019B960494DF}">
-                <a14:hiddenLine xmlns="" xmlns:a14="http://schemas.microsoft.com/office/drawing/2010/main" w="9525">
+                <a14:hiddenLine xmlns:a14="http://schemas.microsoft.com/office/drawing/2010/main" xmlns="" w="9525">
                   <a:solidFill>
                     <a:srgbClr val="000000"/>
                   </a:solidFill>
@@ -775,7 +775,7 @@
             </a:ln>
             <a:extLst>
               <a:ext uri="{91240B29-F687-4f45-9708-019B960494DF}">
-                <a14:hiddenLine xmlns="" xmlns:a14="http://schemas.microsoft.com/office/drawing/2010/main" w="9525">
+                <a14:hiddenLine xmlns:a14="http://schemas.microsoft.com/office/drawing/2010/main" xmlns="" w="9525">
                   <a:solidFill>
                     <a:srgbClr val="000000"/>
                   </a:solidFill>
@@ -865,7 +865,7 @@
             </a:ln>
             <a:extLst>
               <a:ext uri="{91240B29-F687-4f45-9708-019B960494DF}">
-                <a14:hiddenLine xmlns="" xmlns:a14="http://schemas.microsoft.com/office/drawing/2010/main" w="9525">
+                <a14:hiddenLine xmlns:a14="http://schemas.microsoft.com/office/drawing/2010/main" xmlns="" w="9525">
                   <a:solidFill>
                     <a:srgbClr val="000000"/>
                   </a:solidFill>
@@ -899,7 +899,7 @@
             </a:ln>
             <a:extLst>
               <a:ext uri="{91240B29-F687-4f45-9708-019B960494DF}">
-                <a14:hiddenLine xmlns="" xmlns:a14="http://schemas.microsoft.com/office/drawing/2010/main" w="9525">
+                <a14:hiddenLine xmlns:a14="http://schemas.microsoft.com/office/drawing/2010/main" xmlns="" w="9525">
                   <a:solidFill>
                     <a:srgbClr val="000000"/>
                   </a:solidFill>
@@ -989,7 +989,7 @@
             </a:ln>
             <a:extLst>
               <a:ext uri="{91240B29-F687-4f45-9708-019B960494DF}">
-                <a14:hiddenLine xmlns="" xmlns:a14="http://schemas.microsoft.com/office/drawing/2010/main" w="9525">
+                <a14:hiddenLine xmlns:a14="http://schemas.microsoft.com/office/drawing/2010/main" xmlns="" w="9525">
                   <a:solidFill>
                     <a:srgbClr val="000000"/>
                   </a:solidFill>
@@ -1051,7 +1051,7 @@
             </a:ln>
             <a:extLst>
               <a:ext uri="{91240B29-F687-4f45-9708-019B960494DF}">
-                <a14:hiddenLine xmlns="" xmlns:a14="http://schemas.microsoft.com/office/drawing/2010/main" w="9525">
+                <a14:hiddenLine xmlns:a14="http://schemas.microsoft.com/office/drawing/2010/main" xmlns="" w="9525">
                   <a:solidFill>
                     <a:srgbClr val="000000"/>
                   </a:solidFill>
@@ -1113,7 +1113,7 @@
             </a:ln>
             <a:extLst>
               <a:ext uri="{91240B29-F687-4f45-9708-019B960494DF}">
-                <a14:hiddenLine xmlns="" xmlns:a14="http://schemas.microsoft.com/office/drawing/2010/main" w="9525">
+                <a14:hiddenLine xmlns:a14="http://schemas.microsoft.com/office/drawing/2010/main" xmlns="" w="9525">
                   <a:solidFill>
                     <a:srgbClr val="000000"/>
                   </a:solidFill>
@@ -1203,7 +1203,7 @@
             </a:ln>
             <a:extLst>
               <a:ext uri="{91240B29-F687-4f45-9708-019B960494DF}">
-                <a14:hiddenLine xmlns="" xmlns:a14="http://schemas.microsoft.com/office/drawing/2010/main" w="9525">
+                <a14:hiddenLine xmlns:a14="http://schemas.microsoft.com/office/drawing/2010/main" xmlns="" w="9525">
                   <a:solidFill>
                     <a:srgbClr val="000000"/>
                   </a:solidFill>
@@ -1265,7 +1265,7 @@
             </a:ln>
             <a:extLst>
               <a:ext uri="{91240B29-F687-4f45-9708-019B960494DF}">
-                <a14:hiddenLine xmlns="" xmlns:a14="http://schemas.microsoft.com/office/drawing/2010/main" w="9525">
+                <a14:hiddenLine xmlns:a14="http://schemas.microsoft.com/office/drawing/2010/main" xmlns="" w="9525">
                   <a:solidFill>
                     <a:srgbClr val="000000"/>
                   </a:solidFill>
@@ -1327,7 +1327,7 @@
             </a:ln>
             <a:extLst>
               <a:ext uri="{91240B29-F687-4f45-9708-019B960494DF}">
-                <a14:hiddenLine xmlns="" xmlns:a14="http://schemas.microsoft.com/office/drawing/2010/main" w="9525">
+                <a14:hiddenLine xmlns:a14="http://schemas.microsoft.com/office/drawing/2010/main" xmlns="" w="9525">
                   <a:solidFill>
                     <a:srgbClr val="000000"/>
                   </a:solidFill>
@@ -1417,7 +1417,7 @@
             </a:ln>
             <a:extLst>
               <a:ext uri="{91240B29-F687-4f45-9708-019B960494DF}">
-                <a14:hiddenLine xmlns="" xmlns:a14="http://schemas.microsoft.com/office/drawing/2010/main" w="9525">
+                <a14:hiddenLine xmlns:a14="http://schemas.microsoft.com/office/drawing/2010/main" xmlns="" w="9525">
                   <a:solidFill>
                     <a:srgbClr val="000000"/>
                   </a:solidFill>
@@ -1507,7 +1507,7 @@
             </a:ln>
             <a:extLst>
               <a:ext uri="{91240B29-F687-4f45-9708-019B960494DF}">
-                <a14:hiddenLine xmlns="" xmlns:a14="http://schemas.microsoft.com/office/drawing/2010/main" w="9525">
+                <a14:hiddenLine xmlns:a14="http://schemas.microsoft.com/office/drawing/2010/main" xmlns="" w="9525">
                   <a:solidFill>
                     <a:srgbClr val="000000"/>
                   </a:solidFill>
@@ -1569,7 +1569,7 @@
             </a:ln>
             <a:extLst>
               <a:ext uri="{91240B29-F687-4f45-9708-019B960494DF}">
-                <a14:hiddenLine xmlns="" xmlns:a14="http://schemas.microsoft.com/office/drawing/2010/main" w="9525">
+                <a14:hiddenLine xmlns:a14="http://schemas.microsoft.com/office/drawing/2010/main" xmlns="" w="9525">
                   <a:solidFill>
                     <a:srgbClr val="000000"/>
                   </a:solidFill>
@@ -1679,7 +1679,7 @@
             </a:ln>
             <a:extLst>
               <a:ext uri="{91240B29-F687-4f45-9708-019B960494DF}">
-                <a14:hiddenLine xmlns="" xmlns:a14="http://schemas.microsoft.com/office/drawing/2010/main" w="9525">
+                <a14:hiddenLine xmlns:a14="http://schemas.microsoft.com/office/drawing/2010/main" xmlns="" w="9525">
                   <a:solidFill>
                     <a:srgbClr val="000000"/>
                   </a:solidFill>
@@ -1741,7 +1741,7 @@
             </a:ln>
             <a:extLst>
               <a:ext uri="{91240B29-F687-4f45-9708-019B960494DF}">
-                <a14:hiddenLine xmlns="" xmlns:a14="http://schemas.microsoft.com/office/drawing/2010/main" w="9525">
+                <a14:hiddenLine xmlns:a14="http://schemas.microsoft.com/office/drawing/2010/main" xmlns="" w="9525">
                   <a:solidFill>
                     <a:srgbClr val="000000"/>
                   </a:solidFill>
@@ -1831,7 +1831,7 @@
             </a:ln>
             <a:extLst>
               <a:ext uri="{91240B29-F687-4f45-9708-019B960494DF}">
-                <a14:hiddenLine xmlns="" xmlns:a14="http://schemas.microsoft.com/office/drawing/2010/main" w="9525">
+                <a14:hiddenLine xmlns:a14="http://schemas.microsoft.com/office/drawing/2010/main" xmlns="" w="9525">
                   <a:solidFill>
                     <a:srgbClr val="000000"/>
                   </a:solidFill>
@@ -1921,7 +1921,7 @@
             </a:ln>
             <a:extLst>
               <a:ext uri="{91240B29-F687-4f45-9708-019B960494DF}">
-                <a14:hiddenLine xmlns="" xmlns:a14="http://schemas.microsoft.com/office/drawing/2010/main" w="9525">
+                <a14:hiddenLine xmlns:a14="http://schemas.microsoft.com/office/drawing/2010/main" xmlns="" w="9525">
                   <a:solidFill>
                     <a:srgbClr val="000000"/>
                   </a:solidFill>
@@ -1983,7 +1983,7 @@
             </a:ln>
             <a:extLst>
               <a:ext uri="{91240B29-F687-4f45-9708-019B960494DF}">
-                <a14:hiddenLine xmlns="" xmlns:a14="http://schemas.microsoft.com/office/drawing/2010/main" w="9525">
+                <a14:hiddenLine xmlns:a14="http://schemas.microsoft.com/office/drawing/2010/main" xmlns="" w="9525">
                   <a:solidFill>
                     <a:srgbClr val="000000"/>
                   </a:solidFill>
@@ -2073,7 +2073,7 @@
             </a:ln>
             <a:extLst>
               <a:ext uri="{91240B29-F687-4f45-9708-019B960494DF}">
-                <a14:hiddenLine xmlns="" xmlns:a14="http://schemas.microsoft.com/office/drawing/2010/main" w="9525">
+                <a14:hiddenLine xmlns:a14="http://schemas.microsoft.com/office/drawing/2010/main" xmlns="" w="9525">
                   <a:solidFill>
                     <a:srgbClr val="000000"/>
                   </a:solidFill>
@@ -2163,7 +2163,7 @@
             </a:ln>
             <a:extLst>
               <a:ext uri="{91240B29-F687-4f45-9708-019B960494DF}">
-                <a14:hiddenLine xmlns="" xmlns:a14="http://schemas.microsoft.com/office/drawing/2010/main" w="9525">
+                <a14:hiddenLine xmlns:a14="http://schemas.microsoft.com/office/drawing/2010/main" xmlns="" w="9525">
                   <a:solidFill>
                     <a:srgbClr val="000000"/>
                   </a:solidFill>
@@ -2219,7 +2219,7 @@
             </a:ln>
             <a:extLst>
               <a:ext uri="{91240B29-F687-4f45-9708-019B960494DF}">
-                <a14:hiddenLine xmlns="" xmlns:a14="http://schemas.microsoft.com/office/drawing/2010/main" w="9525">
+                <a14:hiddenLine xmlns:a14="http://schemas.microsoft.com/office/drawing/2010/main" xmlns="" w="9525">
                   <a:solidFill>
                     <a:srgbClr val="000000"/>
                   </a:solidFill>
@@ -2309,7 +2309,7 @@
             </a:ln>
             <a:extLst>
               <a:ext uri="{91240B29-F687-4f45-9708-019B960494DF}">
-                <a14:hiddenLine xmlns="" xmlns:a14="http://schemas.microsoft.com/office/drawing/2010/main" w="9525">
+                <a14:hiddenLine xmlns:a14="http://schemas.microsoft.com/office/drawing/2010/main" xmlns="" w="9525">
                   <a:solidFill>
                     <a:srgbClr val="000000"/>
                   </a:solidFill>
@@ -2365,7 +2365,7 @@
             </a:ln>
             <a:extLst>
               <a:ext uri="{91240B29-F687-4f45-9708-019B960494DF}">
-                <a14:hiddenLine xmlns="" xmlns:a14="http://schemas.microsoft.com/office/drawing/2010/main" w="9525">
+                <a14:hiddenLine xmlns:a14="http://schemas.microsoft.com/office/drawing/2010/main" xmlns="" w="9525">
                   <a:solidFill>
                     <a:srgbClr val="000000"/>
                   </a:solidFill>
@@ -2455,7 +2455,7 @@
             </a:ln>
             <a:extLst>
               <a:ext uri="{91240B29-F687-4f45-9708-019B960494DF}">
-                <a14:hiddenLine xmlns="" xmlns:a14="http://schemas.microsoft.com/office/drawing/2010/main" w="9525">
+                <a14:hiddenLine xmlns:a14="http://schemas.microsoft.com/office/drawing/2010/main" xmlns="" w="9525">
                   <a:solidFill>
                     <a:srgbClr val="000000"/>
                   </a:solidFill>
@@ -2523,7 +2523,7 @@
             </a:ln>
             <a:extLst>
               <a:ext uri="{91240B29-F687-4f45-9708-019B960494DF}">
-                <a14:hiddenLine xmlns="" xmlns:a14="http://schemas.microsoft.com/office/drawing/2010/main" w="9525">
+                <a14:hiddenLine xmlns:a14="http://schemas.microsoft.com/office/drawing/2010/main" xmlns="" w="9525">
                   <a:solidFill>
                     <a:srgbClr val="000000"/>
                   </a:solidFill>
@@ -2613,7 +2613,7 @@
             </a:ln>
             <a:extLst>
               <a:ext uri="{91240B29-F687-4f45-9708-019B960494DF}">
-                <a14:hiddenLine xmlns="" xmlns:a14="http://schemas.microsoft.com/office/drawing/2010/main" w="9525">
+                <a14:hiddenLine xmlns:a14="http://schemas.microsoft.com/office/drawing/2010/main" xmlns="" w="9525">
                   <a:solidFill>
                     <a:srgbClr val="000000"/>
                   </a:solidFill>
@@ -2681,7 +2681,7 @@
             </a:ln>
             <a:extLst>
               <a:ext uri="{91240B29-F687-4f45-9708-019B960494DF}">
-                <a14:hiddenLine xmlns="" xmlns:a14="http://schemas.microsoft.com/office/drawing/2010/main" w="9525">
+                <a14:hiddenLine xmlns:a14="http://schemas.microsoft.com/office/drawing/2010/main" xmlns="" w="9525">
                   <a:solidFill>
                     <a:srgbClr val="000000"/>
                   </a:solidFill>
@@ -2771,7 +2771,7 @@
             </a:ln>
             <a:extLst>
               <a:ext uri="{91240B29-F687-4f45-9708-019B960494DF}">
-                <a14:hiddenLine xmlns="" xmlns:a14="http://schemas.microsoft.com/office/drawing/2010/main" w="9525">
+                <a14:hiddenLine xmlns:a14="http://schemas.microsoft.com/office/drawing/2010/main" xmlns="" w="9525">
                   <a:solidFill>
                     <a:srgbClr val="000000"/>
                   </a:solidFill>
@@ -2805,7 +2805,7 @@
             </a:ln>
             <a:extLst>
               <a:ext uri="{91240B29-F687-4f45-9708-019B960494DF}">
-                <a14:hiddenLine xmlns="" xmlns:a14="http://schemas.microsoft.com/office/drawing/2010/main" w="9525">
+                <a14:hiddenLine xmlns:a14="http://schemas.microsoft.com/office/drawing/2010/main" xmlns="" w="9525">
                   <a:solidFill>
                     <a:srgbClr val="000000"/>
                   </a:solidFill>
@@ -2895,7 +2895,7 @@
             </a:ln>
             <a:extLst>
               <a:ext uri="{91240B29-F687-4f45-9708-019B960494DF}">
-                <a14:hiddenLine xmlns="" xmlns:a14="http://schemas.microsoft.com/office/drawing/2010/main" w="9525">
+                <a14:hiddenLine xmlns:a14="http://schemas.microsoft.com/office/drawing/2010/main" xmlns="" w="9525">
                   <a:solidFill>
                     <a:srgbClr val="000000"/>
                   </a:solidFill>
@@ -2957,7 +2957,7 @@
             </a:ln>
             <a:extLst>
               <a:ext uri="{91240B29-F687-4f45-9708-019B960494DF}">
-                <a14:hiddenLine xmlns="" xmlns:a14="http://schemas.microsoft.com/office/drawing/2010/main" w="9525">
+                <a14:hiddenLine xmlns:a14="http://schemas.microsoft.com/office/drawing/2010/main" xmlns="" w="9525">
                   <a:solidFill>
                     <a:srgbClr val="000000"/>
                   </a:solidFill>
@@ -3019,7 +3019,7 @@
             </a:ln>
             <a:extLst>
               <a:ext uri="{91240B29-F687-4f45-9708-019B960494DF}">
-                <a14:hiddenLine xmlns="" xmlns:a14="http://schemas.microsoft.com/office/drawing/2010/main" w="9525">
+                <a14:hiddenLine xmlns:a14="http://schemas.microsoft.com/office/drawing/2010/main" xmlns="" w="9525">
                   <a:solidFill>
                     <a:srgbClr val="000000"/>
                   </a:solidFill>
@@ -3109,7 +3109,7 @@
             </a:ln>
             <a:extLst>
               <a:ext uri="{91240B29-F687-4f45-9708-019B960494DF}">
-                <a14:hiddenLine xmlns="" xmlns:a14="http://schemas.microsoft.com/office/drawing/2010/main" w="9525">
+                <a14:hiddenLine xmlns:a14="http://schemas.microsoft.com/office/drawing/2010/main" xmlns="" w="9525">
                   <a:solidFill>
                     <a:srgbClr val="000000"/>
                   </a:solidFill>
@@ -3177,7 +3177,7 @@
             </a:ln>
             <a:extLst>
               <a:ext uri="{91240B29-F687-4f45-9708-019B960494DF}">
-                <a14:hiddenLine xmlns="" xmlns:a14="http://schemas.microsoft.com/office/drawing/2010/main" w="9525">
+                <a14:hiddenLine xmlns:a14="http://schemas.microsoft.com/office/drawing/2010/main" xmlns="" w="9525">
                   <a:solidFill>
                     <a:srgbClr val="000000"/>
                   </a:solidFill>
@@ -3239,7 +3239,7 @@
             </a:ln>
             <a:extLst>
               <a:ext uri="{91240B29-F687-4f45-9708-019B960494DF}">
-                <a14:hiddenLine xmlns="" xmlns:a14="http://schemas.microsoft.com/office/drawing/2010/main" w="9525">
+                <a14:hiddenLine xmlns:a14="http://schemas.microsoft.com/office/drawing/2010/main" xmlns="" w="9525">
                   <a:solidFill>
                     <a:srgbClr val="000000"/>
                   </a:solidFill>
@@ -3329,7 +3329,7 @@
             </a:ln>
             <a:extLst>
               <a:ext uri="{91240B29-F687-4f45-9708-019B960494DF}">
-                <a14:hiddenLine xmlns="" xmlns:a14="http://schemas.microsoft.com/office/drawing/2010/main" w="9525">
+                <a14:hiddenLine xmlns:a14="http://schemas.microsoft.com/office/drawing/2010/main" xmlns="" w="9525">
                   <a:solidFill>
                     <a:srgbClr val="000000"/>
                   </a:solidFill>
@@ -3391,7 +3391,7 @@
             </a:ln>
             <a:extLst>
               <a:ext uri="{91240B29-F687-4f45-9708-019B960494DF}">
-                <a14:hiddenLine xmlns="" xmlns:a14="http://schemas.microsoft.com/office/drawing/2010/main" w="9525">
+                <a14:hiddenLine xmlns:a14="http://schemas.microsoft.com/office/drawing/2010/main" xmlns="" w="9525">
                   <a:solidFill>
                     <a:srgbClr val="000000"/>
                   </a:solidFill>
@@ -3481,7 +3481,7 @@
             </a:ln>
             <a:extLst>
               <a:ext uri="{91240B29-F687-4f45-9708-019B960494DF}">
-                <a14:hiddenLine xmlns="" xmlns:a14="http://schemas.microsoft.com/office/drawing/2010/main" w="9525">
+                <a14:hiddenLine xmlns:a14="http://schemas.microsoft.com/office/drawing/2010/main" xmlns="" w="9525">
                   <a:solidFill>
                     <a:srgbClr val="000000"/>
                   </a:solidFill>
@@ -3543,7 +3543,7 @@
             </a:ln>
             <a:extLst>
               <a:ext uri="{91240B29-F687-4f45-9708-019B960494DF}">
-                <a14:hiddenLine xmlns="" xmlns:a14="http://schemas.microsoft.com/office/drawing/2010/main" w="9525">
+                <a14:hiddenLine xmlns:a14="http://schemas.microsoft.com/office/drawing/2010/main" xmlns="" w="9525">
                   <a:solidFill>
                     <a:srgbClr val="000000"/>
                   </a:solidFill>
@@ -3633,7 +3633,7 @@
             </a:ln>
             <a:extLst>
               <a:ext uri="{91240B29-F687-4f45-9708-019B960494DF}">
-                <a14:hiddenLine xmlns="" xmlns:a14="http://schemas.microsoft.com/office/drawing/2010/main" w="9525">
+                <a14:hiddenLine xmlns:a14="http://schemas.microsoft.com/office/drawing/2010/main" xmlns="" w="9525">
                   <a:solidFill>
                     <a:srgbClr val="000000"/>
                   </a:solidFill>
@@ -3667,7 +3667,7 @@
             </a:ln>
             <a:extLst>
               <a:ext uri="{91240B29-F687-4f45-9708-019B960494DF}">
-                <a14:hiddenLine xmlns="" xmlns:a14="http://schemas.microsoft.com/office/drawing/2010/main" w="9525">
+                <a14:hiddenLine xmlns:a14="http://schemas.microsoft.com/office/drawing/2010/main" xmlns="" w="9525">
                   <a:solidFill>
                     <a:srgbClr val="000000"/>
                   </a:solidFill>
@@ -3732,7 +3732,7 @@
             </a:ln>
             <a:extLst>
               <a:ext uri="{91240B29-F687-4f45-9708-019B960494DF}">
-                <a14:hiddenLine xmlns="" xmlns:a14="http://schemas.microsoft.com/office/drawing/2010/main" w="9525">
+                <a14:hiddenLine xmlns:a14="http://schemas.microsoft.com/office/drawing/2010/main" xmlns="" w="9525">
                   <a:solidFill>
                     <a:srgbClr val="000000"/>
                   </a:solidFill>
@@ -3822,7 +3822,7 @@
             </a:ln>
             <a:extLst>
               <a:ext uri="{91240B29-F687-4f45-9708-019B960494DF}">
-                <a14:hiddenLine xmlns="" xmlns:a14="http://schemas.microsoft.com/office/drawing/2010/main" w="9525">
+                <a14:hiddenLine xmlns:a14="http://schemas.microsoft.com/office/drawing/2010/main" xmlns="" w="9525">
                   <a:solidFill>
                     <a:srgbClr val="000000"/>
                   </a:solidFill>
@@ -3884,7 +3884,7 @@
             </a:ln>
             <a:extLst>
               <a:ext uri="{91240B29-F687-4f45-9708-019B960494DF}">
-                <a14:hiddenLine xmlns="" xmlns:a14="http://schemas.microsoft.com/office/drawing/2010/main" w="9525">
+                <a14:hiddenLine xmlns:a14="http://schemas.microsoft.com/office/drawing/2010/main" xmlns="" w="9525">
                   <a:solidFill>
                     <a:srgbClr val="000000"/>
                   </a:solidFill>
@@ -3974,7 +3974,7 @@
             </a:ln>
             <a:extLst>
               <a:ext uri="{91240B29-F687-4f45-9708-019B960494DF}">
-                <a14:hiddenLine xmlns="" xmlns:a14="http://schemas.microsoft.com/office/drawing/2010/main" w="9525">
+                <a14:hiddenLine xmlns:a14="http://schemas.microsoft.com/office/drawing/2010/main" xmlns="" w="9525">
                   <a:solidFill>
                     <a:srgbClr val="000000"/>
                   </a:solidFill>
@@ -4064,7 +4064,7 @@
             </a:ln>
             <a:extLst>
               <a:ext uri="{91240B29-F687-4f45-9708-019B960494DF}">
-                <a14:hiddenLine xmlns="" xmlns:a14="http://schemas.microsoft.com/office/drawing/2010/main" w="9525">
+                <a14:hiddenLine xmlns:a14="http://schemas.microsoft.com/office/drawing/2010/main" xmlns="" w="9525">
                   <a:solidFill>
                     <a:srgbClr val="000000"/>
                   </a:solidFill>
@@ -4129,7 +4129,7 @@
             </a:ln>
             <a:extLst>
               <a:ext uri="{91240B29-F687-4f45-9708-019B960494DF}">
-                <a14:hiddenLine xmlns="" xmlns:a14="http://schemas.microsoft.com/office/drawing/2010/main" w="9525">
+                <a14:hiddenLine xmlns:a14="http://schemas.microsoft.com/office/drawing/2010/main" xmlns="" w="9525">
                   <a:solidFill>
                     <a:srgbClr val="000000"/>
                   </a:solidFill>
@@ -4191,7 +4191,7 @@
             </a:ln>
             <a:extLst>
               <a:ext uri="{91240B29-F687-4f45-9708-019B960494DF}">
-                <a14:hiddenLine xmlns="" xmlns:a14="http://schemas.microsoft.com/office/drawing/2010/main" w="9525">
+                <a14:hiddenLine xmlns:a14="http://schemas.microsoft.com/office/drawing/2010/main" xmlns="" w="9525">
                   <a:solidFill>
                     <a:srgbClr val="000000"/>
                   </a:solidFill>
@@ -4281,7 +4281,7 @@
             </a:ln>
             <a:extLst>
               <a:ext uri="{91240B29-F687-4f45-9708-019B960494DF}">
-                <a14:hiddenLine xmlns="" xmlns:a14="http://schemas.microsoft.com/office/drawing/2010/main" w="9525">
+                <a14:hiddenLine xmlns:a14="http://schemas.microsoft.com/office/drawing/2010/main" xmlns="" w="9525">
                   <a:solidFill>
                     <a:srgbClr val="000000"/>
                   </a:solidFill>
@@ -4371,7 +4371,7 @@
             </a:ln>
             <a:extLst>
               <a:ext uri="{91240B29-F687-4f45-9708-019B960494DF}">
-                <a14:hiddenLine xmlns="" xmlns:a14="http://schemas.microsoft.com/office/drawing/2010/main" w="9525">
+                <a14:hiddenLine xmlns:a14="http://schemas.microsoft.com/office/drawing/2010/main" xmlns="" w="9525">
                   <a:solidFill>
                     <a:srgbClr val="000000"/>
                   </a:solidFill>
@@ -4433,7 +4433,7 @@
             </a:ln>
             <a:extLst>
               <a:ext uri="{91240B29-F687-4f45-9708-019B960494DF}">
-                <a14:hiddenLine xmlns="" xmlns:a14="http://schemas.microsoft.com/office/drawing/2010/main" w="9525">
+                <a14:hiddenLine xmlns:a14="http://schemas.microsoft.com/office/drawing/2010/main" xmlns="" w="9525">
                   <a:solidFill>
                     <a:srgbClr val="000000"/>
                   </a:solidFill>
@@ -4553,7 +4553,7 @@
             </a:ln>
             <a:extLst>
               <a:ext uri="{91240B29-F687-4f45-9708-019B960494DF}">
-                <a14:hiddenLine xmlns="" xmlns:a14="http://schemas.microsoft.com/office/drawing/2010/main" w="9525">
+                <a14:hiddenLine xmlns:a14="http://schemas.microsoft.com/office/drawing/2010/main" xmlns="" w="9525">
                   <a:solidFill>
                     <a:srgbClr val="000000"/>
                   </a:solidFill>
@@ -4621,7 +4621,7 @@
             </a:ln>
             <a:extLst>
               <a:ext uri="{91240B29-F687-4f45-9708-019B960494DF}">
-                <a14:hiddenLine xmlns="" xmlns:a14="http://schemas.microsoft.com/office/drawing/2010/main" w="9525">
+                <a14:hiddenLine xmlns:a14="http://schemas.microsoft.com/office/drawing/2010/main" xmlns="" w="9525">
                   <a:solidFill>
                     <a:srgbClr val="000000"/>
                   </a:solidFill>
@@ -4711,7 +4711,7 @@
             </a:ln>
             <a:extLst>
               <a:ext uri="{91240B29-F687-4f45-9708-019B960494DF}">
-                <a14:hiddenLine xmlns="" xmlns:a14="http://schemas.microsoft.com/office/drawing/2010/main" w="9525">
+                <a14:hiddenLine xmlns:a14="http://schemas.microsoft.com/office/drawing/2010/main" xmlns="" w="9525">
                   <a:solidFill>
                     <a:srgbClr val="000000"/>
                   </a:solidFill>
@@ -9540,7 +9540,7 @@
           <a:noFill/>
           <a:extLst>
             <a:ext uri="{909E8E84-426E-40dd-AFC4-6F175D3DCCD1}">
-              <a14:hiddenFill xmlns="" xmlns:a14="http://schemas.microsoft.com/office/drawing/2010/main">
+              <a14:hiddenFill xmlns:a14="http://schemas.microsoft.com/office/drawing/2010/main" xmlns="">
                 <a:solidFill>
                   <a:srgbClr val="FFFFFF"/>
                 </a:solidFill>
@@ -9614,7 +9614,7 @@
               </a:ln>
               <a:extLst>
                 <a:ext uri="{91240B29-F687-4f45-9708-019B960494DF}">
-                  <a14:hiddenLine xmlns="" xmlns:a14="http://schemas.microsoft.com/office/drawing/2010/main" w="9525">
+                  <a14:hiddenLine xmlns:a14="http://schemas.microsoft.com/office/drawing/2010/main" xmlns="" w="9525">
                     <a:solidFill>
                       <a:srgbClr val="000000"/>
                     </a:solidFill>
@@ -9704,7 +9704,7 @@
               </a:ln>
               <a:extLst>
                 <a:ext uri="{91240B29-F687-4f45-9708-019B960494DF}">
-                  <a14:hiddenLine xmlns="" xmlns:a14="http://schemas.microsoft.com/office/drawing/2010/main" w="9525">
+                  <a14:hiddenLine xmlns:a14="http://schemas.microsoft.com/office/drawing/2010/main" xmlns="" w="9525">
                     <a:solidFill>
                       <a:srgbClr val="000000"/>
                     </a:solidFill>
@@ -9794,7 +9794,7 @@
               </a:ln>
               <a:extLst>
                 <a:ext uri="{91240B29-F687-4f45-9708-019B960494DF}">
-                  <a14:hiddenLine xmlns="" xmlns:a14="http://schemas.microsoft.com/office/drawing/2010/main" w="9525">
+                  <a14:hiddenLine xmlns:a14="http://schemas.microsoft.com/office/drawing/2010/main" xmlns="" w="9525">
                     <a:solidFill>
                       <a:srgbClr val="000000"/>
                     </a:solidFill>
@@ -9856,7 +9856,7 @@
               </a:ln>
               <a:extLst>
                 <a:ext uri="{91240B29-F687-4f45-9708-019B960494DF}">
-                  <a14:hiddenLine xmlns="" xmlns:a14="http://schemas.microsoft.com/office/drawing/2010/main" w="9525">
+                  <a14:hiddenLine xmlns:a14="http://schemas.microsoft.com/office/drawing/2010/main" xmlns="" w="9525">
                     <a:solidFill>
                       <a:srgbClr val="000000"/>
                     </a:solidFill>
@@ -9946,7 +9946,7 @@
               </a:ln>
               <a:extLst>
                 <a:ext uri="{91240B29-F687-4f45-9708-019B960494DF}">
-                  <a14:hiddenLine xmlns="" xmlns:a14="http://schemas.microsoft.com/office/drawing/2010/main" w="9525">
+                  <a14:hiddenLine xmlns:a14="http://schemas.microsoft.com/office/drawing/2010/main" xmlns="" w="9525">
                     <a:solidFill>
                       <a:srgbClr val="000000"/>
                     </a:solidFill>
@@ -10008,7 +10008,7 @@
               </a:ln>
               <a:extLst>
                 <a:ext uri="{91240B29-F687-4f45-9708-019B960494DF}">
-                  <a14:hiddenLine xmlns="" xmlns:a14="http://schemas.microsoft.com/office/drawing/2010/main" w="9525">
+                  <a14:hiddenLine xmlns:a14="http://schemas.microsoft.com/office/drawing/2010/main" xmlns="" w="9525">
                     <a:solidFill>
                       <a:srgbClr val="000000"/>
                     </a:solidFill>
@@ -10070,7 +10070,7 @@
               </a:ln>
               <a:extLst>
                 <a:ext uri="{91240B29-F687-4f45-9708-019B960494DF}">
-                  <a14:hiddenLine xmlns="" xmlns:a14="http://schemas.microsoft.com/office/drawing/2010/main" w="9525">
+                  <a14:hiddenLine xmlns:a14="http://schemas.microsoft.com/office/drawing/2010/main" xmlns="" w="9525">
                     <a:solidFill>
                       <a:srgbClr val="000000"/>
                     </a:solidFill>
@@ -10160,7 +10160,7 @@
               </a:ln>
               <a:extLst>
                 <a:ext uri="{91240B29-F687-4f45-9708-019B960494DF}">
-                  <a14:hiddenLine xmlns="" xmlns:a14="http://schemas.microsoft.com/office/drawing/2010/main" w="9525">
+                  <a14:hiddenLine xmlns:a14="http://schemas.microsoft.com/office/drawing/2010/main" xmlns="" w="9525">
                     <a:solidFill>
                       <a:srgbClr val="000000"/>
                     </a:solidFill>
@@ -10250,7 +10250,7 @@
               </a:ln>
               <a:extLst>
                 <a:ext uri="{91240B29-F687-4f45-9708-019B960494DF}">
-                  <a14:hiddenLine xmlns="" xmlns:a14="http://schemas.microsoft.com/office/drawing/2010/main" w="9525">
+                  <a14:hiddenLine xmlns:a14="http://schemas.microsoft.com/office/drawing/2010/main" xmlns="" w="9525">
                     <a:solidFill>
                       <a:srgbClr val="000000"/>
                     </a:solidFill>
@@ -10312,7 +10312,7 @@
               </a:ln>
               <a:extLst>
                 <a:ext uri="{91240B29-F687-4f45-9708-019B960494DF}">
-                  <a14:hiddenLine xmlns="" xmlns:a14="http://schemas.microsoft.com/office/drawing/2010/main" w="9525">
+                  <a14:hiddenLine xmlns:a14="http://schemas.microsoft.com/office/drawing/2010/main" xmlns="" w="9525">
                     <a:solidFill>
                       <a:srgbClr val="000000"/>
                     </a:solidFill>
@@ -10422,7 +10422,7 @@
               </a:ln>
               <a:extLst>
                 <a:ext uri="{91240B29-F687-4f45-9708-019B960494DF}">
-                  <a14:hiddenLine xmlns="" xmlns:a14="http://schemas.microsoft.com/office/drawing/2010/main" w="9525">
+                  <a14:hiddenLine xmlns:a14="http://schemas.microsoft.com/office/drawing/2010/main" xmlns="" w="9525">
                     <a:solidFill>
                       <a:srgbClr val="000000"/>
                     </a:solidFill>
@@ -10506,7 +10506,7 @@
               </a:ln>
               <a:extLst>
                 <a:ext uri="{91240B29-F687-4f45-9708-019B960494DF}">
-                  <a14:hiddenLine xmlns="" xmlns:a14="http://schemas.microsoft.com/office/drawing/2010/main" w="9525">
+                  <a14:hiddenLine xmlns:a14="http://schemas.microsoft.com/office/drawing/2010/main" xmlns="" w="9525">
                     <a:solidFill>
                       <a:srgbClr val="000000"/>
                     </a:solidFill>
@@ -10568,7 +10568,7 @@
               </a:ln>
               <a:extLst>
                 <a:ext uri="{91240B29-F687-4f45-9708-019B960494DF}">
-                  <a14:hiddenLine xmlns="" xmlns:a14="http://schemas.microsoft.com/office/drawing/2010/main" w="9525">
+                  <a14:hiddenLine xmlns:a14="http://schemas.microsoft.com/office/drawing/2010/main" xmlns="" w="9525">
                     <a:solidFill>
                       <a:srgbClr val="000000"/>
                     </a:solidFill>
@@ -10630,7 +10630,7 @@
               </a:ln>
               <a:extLst>
                 <a:ext uri="{91240B29-F687-4f45-9708-019B960494DF}">
-                  <a14:hiddenLine xmlns="" xmlns:a14="http://schemas.microsoft.com/office/drawing/2010/main" w="9525">
+                  <a14:hiddenLine xmlns:a14="http://schemas.microsoft.com/office/drawing/2010/main" xmlns="" w="9525">
                     <a:solidFill>
                       <a:srgbClr val="000000"/>
                     </a:solidFill>
@@ -10720,7 +10720,7 @@
               </a:ln>
               <a:extLst>
                 <a:ext uri="{91240B29-F687-4f45-9708-019B960494DF}">
-                  <a14:hiddenLine xmlns="" xmlns:a14="http://schemas.microsoft.com/office/drawing/2010/main" w="9525">
+                  <a14:hiddenLine xmlns:a14="http://schemas.microsoft.com/office/drawing/2010/main" xmlns="" w="9525">
                     <a:solidFill>
                       <a:srgbClr val="000000"/>
                     </a:solidFill>
@@ -10754,7 +10754,7 @@
               </a:ln>
               <a:extLst>
                 <a:ext uri="{91240B29-F687-4f45-9708-019B960494DF}">
-                  <a14:hiddenLine xmlns="" xmlns:a14="http://schemas.microsoft.com/office/drawing/2010/main" w="9525">
+                  <a14:hiddenLine xmlns:a14="http://schemas.microsoft.com/office/drawing/2010/main" xmlns="" w="9525">
                     <a:solidFill>
                       <a:srgbClr val="000000"/>
                     </a:solidFill>
@@ -10819,7 +10819,7 @@
               </a:ln>
               <a:extLst>
                 <a:ext uri="{91240B29-F687-4f45-9708-019B960494DF}">
-                  <a14:hiddenLine xmlns="" xmlns:a14="http://schemas.microsoft.com/office/drawing/2010/main" w="9525">
+                  <a14:hiddenLine xmlns:a14="http://schemas.microsoft.com/office/drawing/2010/main" xmlns="" w="9525">
                     <a:solidFill>
                       <a:srgbClr val="000000"/>
                     </a:solidFill>
@@ -10909,7 +10909,7 @@
               </a:ln>
               <a:extLst>
                 <a:ext uri="{91240B29-F687-4f45-9708-019B960494DF}">
-                  <a14:hiddenLine xmlns="" xmlns:a14="http://schemas.microsoft.com/office/drawing/2010/main" w="9525">
+                  <a14:hiddenLine xmlns:a14="http://schemas.microsoft.com/office/drawing/2010/main" xmlns="" w="9525">
                     <a:solidFill>
                       <a:srgbClr val="000000"/>
                     </a:solidFill>
@@ -10971,7 +10971,7 @@
               </a:ln>
               <a:extLst>
                 <a:ext uri="{91240B29-F687-4f45-9708-019B960494DF}">
-                  <a14:hiddenLine xmlns="" xmlns:a14="http://schemas.microsoft.com/office/drawing/2010/main" w="9525">
+                  <a14:hiddenLine xmlns:a14="http://schemas.microsoft.com/office/drawing/2010/main" xmlns="" w="9525">
                     <a:solidFill>
                       <a:srgbClr val="000000"/>
                     </a:solidFill>
@@ -11061,7 +11061,7 @@
               </a:ln>
               <a:extLst>
                 <a:ext uri="{91240B29-F687-4f45-9708-019B960494DF}">
-                  <a14:hiddenLine xmlns="" xmlns:a14="http://schemas.microsoft.com/office/drawing/2010/main" w="9525">
+                  <a14:hiddenLine xmlns:a14="http://schemas.microsoft.com/office/drawing/2010/main" xmlns="" w="9525">
                     <a:solidFill>
                       <a:srgbClr val="000000"/>
                     </a:solidFill>
@@ -11126,7 +11126,7 @@
               </a:ln>
               <a:extLst>
                 <a:ext uri="{91240B29-F687-4f45-9708-019B960494DF}">
-                  <a14:hiddenLine xmlns="" xmlns:a14="http://schemas.microsoft.com/office/drawing/2010/main" w="9525">
+                  <a14:hiddenLine xmlns:a14="http://schemas.microsoft.com/office/drawing/2010/main" xmlns="" w="9525">
                     <a:solidFill>
                       <a:srgbClr val="000000"/>
                     </a:solidFill>
@@ -11188,7 +11188,7 @@
               </a:ln>
               <a:extLst>
                 <a:ext uri="{91240B29-F687-4f45-9708-019B960494DF}">
-                  <a14:hiddenLine xmlns="" xmlns:a14="http://schemas.microsoft.com/office/drawing/2010/main" w="9525">
+                  <a14:hiddenLine xmlns:a14="http://schemas.microsoft.com/office/drawing/2010/main" xmlns="" w="9525">
                     <a:solidFill>
                       <a:srgbClr val="000000"/>
                     </a:solidFill>
@@ -11278,7 +11278,7 @@
               </a:ln>
               <a:extLst>
                 <a:ext uri="{91240B29-F687-4f45-9708-019B960494DF}">
-                  <a14:hiddenLine xmlns="" xmlns:a14="http://schemas.microsoft.com/office/drawing/2010/main" w="9525">
+                  <a14:hiddenLine xmlns:a14="http://schemas.microsoft.com/office/drawing/2010/main" xmlns="" w="9525">
                     <a:solidFill>
                       <a:srgbClr val="000000"/>
                     </a:solidFill>
@@ -11368,7 +11368,7 @@
               </a:ln>
               <a:extLst>
                 <a:ext uri="{91240B29-F687-4f45-9708-019B960494DF}">
-                  <a14:hiddenLine xmlns="" xmlns:a14="http://schemas.microsoft.com/office/drawing/2010/main" w="9525">
+                  <a14:hiddenLine xmlns:a14="http://schemas.microsoft.com/office/drawing/2010/main" xmlns="" w="9525">
                     <a:solidFill>
                       <a:srgbClr val="000000"/>
                     </a:solidFill>
@@ -11433,7 +11433,7 @@
               </a:ln>
               <a:extLst>
                 <a:ext uri="{91240B29-F687-4f45-9708-019B960494DF}">
-                  <a14:hiddenLine xmlns="" xmlns:a14="http://schemas.microsoft.com/office/drawing/2010/main" w="9525">
+                  <a14:hiddenLine xmlns:a14="http://schemas.microsoft.com/office/drawing/2010/main" xmlns="" w="9525">
                     <a:solidFill>
                       <a:srgbClr val="000000"/>
                     </a:solidFill>
@@ -11553,7 +11553,7 @@
               </a:ln>
               <a:extLst>
                 <a:ext uri="{91240B29-F687-4f45-9708-019B960494DF}">
-                  <a14:hiddenLine xmlns="" xmlns:a14="http://schemas.microsoft.com/office/drawing/2010/main" w="9525">
+                  <a14:hiddenLine xmlns:a14="http://schemas.microsoft.com/office/drawing/2010/main" xmlns="" w="9525">
                     <a:solidFill>
                       <a:srgbClr val="000000"/>
                     </a:solidFill>
@@ -11634,7 +11634,7 @@
               </a:ln>
               <a:extLst>
                 <a:ext uri="{91240B29-F687-4f45-9708-019B960494DF}">
-                  <a14:hiddenLine xmlns="" xmlns:a14="http://schemas.microsoft.com/office/drawing/2010/main" w="9525">
+                  <a14:hiddenLine xmlns:a14="http://schemas.microsoft.com/office/drawing/2010/main" xmlns="" w="9525">
                     <a:solidFill>
                       <a:srgbClr val="000000"/>
                     </a:solidFill>
@@ -11749,7 +11749,7 @@
               </a:ln>
               <a:extLst>
                 <a:ext uri="{91240B29-F687-4f45-9708-019B960494DF}">
-                  <a14:hiddenLine xmlns="" xmlns:a14="http://schemas.microsoft.com/office/drawing/2010/main" w="9525">
+                  <a14:hiddenLine xmlns:a14="http://schemas.microsoft.com/office/drawing/2010/main" xmlns="" w="9525">
                     <a:solidFill>
                       <a:srgbClr val="000000"/>
                     </a:solidFill>
@@ -11839,7 +11839,7 @@
               </a:ln>
               <a:extLst>
                 <a:ext uri="{91240B29-F687-4f45-9708-019B960494DF}">
-                  <a14:hiddenLine xmlns="" xmlns:a14="http://schemas.microsoft.com/office/drawing/2010/main" w="9525">
+                  <a14:hiddenLine xmlns:a14="http://schemas.microsoft.com/office/drawing/2010/main" xmlns="" w="9525">
                     <a:solidFill>
                       <a:srgbClr val="000000"/>
                     </a:solidFill>
@@ -11904,7 +11904,7 @@
               </a:ln>
               <a:extLst>
                 <a:ext uri="{91240B29-F687-4f45-9708-019B960494DF}">
-                  <a14:hiddenLine xmlns="" xmlns:a14="http://schemas.microsoft.com/office/drawing/2010/main" w="9525">
+                  <a14:hiddenLine xmlns:a14="http://schemas.microsoft.com/office/drawing/2010/main" xmlns="" w="9525">
                     <a:solidFill>
                       <a:srgbClr val="000000"/>
                     </a:solidFill>
@@ -11994,7 +11994,7 @@
               </a:ln>
               <a:extLst>
                 <a:ext uri="{91240B29-F687-4f45-9708-019B960494DF}">
-                  <a14:hiddenLine xmlns="" xmlns:a14="http://schemas.microsoft.com/office/drawing/2010/main" w="9525">
+                  <a14:hiddenLine xmlns:a14="http://schemas.microsoft.com/office/drawing/2010/main" xmlns="" w="9525">
                     <a:solidFill>
                       <a:srgbClr val="000000"/>
                     </a:solidFill>
@@ -12062,7 +12062,7 @@
               </a:ln>
               <a:extLst>
                 <a:ext uri="{91240B29-F687-4f45-9708-019B960494DF}">
-                  <a14:hiddenLine xmlns="" xmlns:a14="http://schemas.microsoft.com/office/drawing/2010/main" w="9525">
+                  <a14:hiddenLine xmlns:a14="http://schemas.microsoft.com/office/drawing/2010/main" xmlns="" w="9525">
                     <a:solidFill>
                       <a:srgbClr val="000000"/>
                     </a:solidFill>
@@ -12152,7 +12152,7 @@
               </a:ln>
               <a:extLst>
                 <a:ext uri="{91240B29-F687-4f45-9708-019B960494DF}">
-                  <a14:hiddenLine xmlns="" xmlns:a14="http://schemas.microsoft.com/office/drawing/2010/main" w="9525">
+                  <a14:hiddenLine xmlns:a14="http://schemas.microsoft.com/office/drawing/2010/main" xmlns="" w="9525">
                     <a:solidFill>
                       <a:srgbClr val="000000"/>
                     </a:solidFill>
@@ -12220,7 +12220,7 @@
               </a:ln>
               <a:extLst>
                 <a:ext uri="{91240B29-F687-4f45-9708-019B960494DF}">
-                  <a14:hiddenLine xmlns="" xmlns:a14="http://schemas.microsoft.com/office/drawing/2010/main" w="9525">
+                  <a14:hiddenLine xmlns:a14="http://schemas.microsoft.com/office/drawing/2010/main" xmlns="" w="9525">
                     <a:solidFill>
                       <a:srgbClr val="000000"/>
                     </a:solidFill>
@@ -12310,7 +12310,7 @@
               </a:ln>
               <a:extLst>
                 <a:ext uri="{91240B29-F687-4f45-9708-019B960494DF}">
-                  <a14:hiddenLine xmlns="" xmlns:a14="http://schemas.microsoft.com/office/drawing/2010/main" w="9525">
+                  <a14:hiddenLine xmlns:a14="http://schemas.microsoft.com/office/drawing/2010/main" xmlns="" w="9525">
                     <a:solidFill>
                       <a:srgbClr val="000000"/>
                     </a:solidFill>
@@ -12344,7 +12344,7 @@
               </a:ln>
               <a:extLst>
                 <a:ext uri="{91240B29-F687-4f45-9708-019B960494DF}">
-                  <a14:hiddenLine xmlns="" xmlns:a14="http://schemas.microsoft.com/office/drawing/2010/main" w="9525">
+                  <a14:hiddenLine xmlns:a14="http://schemas.microsoft.com/office/drawing/2010/main" xmlns="" w="9525">
                     <a:solidFill>
                       <a:srgbClr val="000000"/>
                     </a:solidFill>
@@ -16808,7 +16808,7 @@
           <p:nvPr>
             <p:extLst>
               <p:ext uri="{D42A27DB-BD31-4B8C-83A1-F6EECF244321}">
-                <p14:modId xmlns:p14="http://schemas.microsoft.com/office/powerpoint/2010/main" val="1941164392"/>
+                <p14:modId xmlns:p14="http://schemas.microsoft.com/office/powerpoint/2010/main" val="648078317"/>
               </p:ext>
             </p:extLst>
           </p:nvPr>
@@ -16904,7 +16904,7 @@
                       <a:pPr algn="ctr"/>
                       <a:r>
                         <a:rPr lang="en-US" i="0" dirty="0"/>
-                        <a:t>14</a:t>
+                        <a:t>15</a:t>
                       </a:r>
                     </a:p>
                   </a:txBody>
@@ -16918,7 +16918,7 @@
                       <a:pPr algn="ctr"/>
                       <a:r>
                         <a:rPr lang="en-US" i="0" dirty="0"/>
-                        <a:t>15</a:t>
+                        <a:t>16</a:t>
                       </a:r>
                     </a:p>
                   </a:txBody>
@@ -16932,7 +16932,7 @@
                       <a:pPr algn="ctr"/>
                       <a:r>
                         <a:rPr lang="en-US" b="1" i="0" dirty="0"/>
-                        <a:t>93.3%</a:t>
+                        <a:t>93.8%</a:t>
                       </a:r>
                     </a:p>
                   </a:txBody>
@@ -17763,7 +17763,7 @@
           <p:nvPr>
             <p:extLst>
               <p:ext uri="{D42A27DB-BD31-4B8C-83A1-F6EECF244321}">
-                <p14:modId xmlns:p14="http://schemas.microsoft.com/office/powerpoint/2010/main" val="1029766422"/>
+                <p14:modId xmlns:p14="http://schemas.microsoft.com/office/powerpoint/2010/main" val="3376121299"/>
               </p:ext>
             </p:extLst>
           </p:nvPr>
@@ -17859,7 +17859,7 @@
                       <a:pPr algn="ctr"/>
                       <a:r>
                         <a:rPr lang="en-US" i="0" dirty="0"/>
-                        <a:t>8</a:t>
+                        <a:t>9</a:t>
                       </a:r>
                     </a:p>
                   </a:txBody>
@@ -17873,7 +17873,7 @@
                       <a:pPr algn="ctr"/>
                       <a:r>
                         <a:rPr lang="en-US" i="0" dirty="0"/>
-                        <a:t>8</a:t>
+                        <a:t>9</a:t>
                       </a:r>
                     </a:p>
                   </a:txBody>
@@ -18151,7 +18151,7 @@
           <p:nvPr>
             <p:extLst>
               <p:ext uri="{D42A27DB-BD31-4B8C-83A1-F6EECF244321}">
-                <p14:modId xmlns:p14="http://schemas.microsoft.com/office/powerpoint/2010/main" val="1742533954"/>
+                <p14:modId xmlns:p14="http://schemas.microsoft.com/office/powerpoint/2010/main" val="746819299"/>
               </p:ext>
             </p:extLst>
           </p:nvPr>
@@ -18247,7 +18247,7 @@
                       <a:pPr algn="ctr"/>
                       <a:r>
                         <a:rPr lang="en-US" i="0" dirty="0"/>
-                        <a:t>15</a:t>
+                        <a:t>16</a:t>
                       </a:r>
                     </a:p>
                   </a:txBody>
@@ -18261,7 +18261,7 @@
                       <a:pPr algn="ctr"/>
                       <a:r>
                         <a:rPr lang="en-US" i="0" dirty="0"/>
-                        <a:t>15</a:t>
+                        <a:t>16</a:t>
                       </a:r>
                     </a:p>
                   </a:txBody>
@@ -18532,7 +18532,7 @@
           <p:nvPr>
             <p:extLst>
               <p:ext uri="{D42A27DB-BD31-4B8C-83A1-F6EECF244321}">
-                <p14:modId xmlns:p14="http://schemas.microsoft.com/office/powerpoint/2010/main" val="2935608766"/>
+                <p14:modId xmlns:p14="http://schemas.microsoft.com/office/powerpoint/2010/main" val="3922045450"/>
               </p:ext>
             </p:extLst>
           </p:nvPr>
@@ -18628,7 +18628,7 @@
                       <a:pPr algn="ctr"/>
                       <a:r>
                         <a:rPr lang="en-US" i="0" dirty="0"/>
-                        <a:t>8</a:t>
+                        <a:t>9</a:t>
                       </a:r>
                     </a:p>
                   </a:txBody>
@@ -18642,7 +18642,7 @@
                       <a:pPr algn="ctr"/>
                       <a:r>
                         <a:rPr lang="en-US" i="0" dirty="0"/>
-                        <a:t>8</a:t>
+                        <a:t>9</a:t>
                       </a:r>
                     </a:p>
                   </a:txBody>

--- a/slides/00-DailyAnnouncements.pptx
+++ b/slides/00-DailyAnnouncements.pptx
@@ -5,7 +5,7 @@
     <p:sldMasterId id="2147484006" r:id="rId1"/>
   </p:sldMasterIdLst>
   <p:notesMasterIdLst>
-    <p:notesMasterId r:id="rId24"/>
+    <p:notesMasterId r:id="rId25"/>
   </p:notesMasterIdLst>
   <p:sldIdLst>
     <p:sldId id="256" r:id="rId2"/>
@@ -29,7 +29,8 @@
     <p:sldId id="532" r:id="rId20"/>
     <p:sldId id="533" r:id="rId21"/>
     <p:sldId id="534" r:id="rId22"/>
-    <p:sldId id="515" r:id="rId23"/>
+    <p:sldId id="535" r:id="rId23"/>
+    <p:sldId id="515" r:id="rId24"/>
   </p:sldIdLst>
   <p:sldSz cx="12192000" cy="6858000"/>
   <p:notesSz cx="6858000" cy="9144000"/>
@@ -218,7 +219,7 @@
           <a:p>
             <a:fld id="{C5B45307-6ED4-B142-BD64-10F739779302}" type="datetimeFigureOut">
               <a:rPr lang="en-US" smtClean="0"/>
-              <a:t>10/22/26</a:t>
+              <a:t>10/27/26</a:t>
             </a:fld>
             <a:endParaRPr lang="en-US"/>
           </a:p>
@@ -626,7 +627,7 @@
           <a:noFill/>
           <a:extLst>
             <a:ext uri="{909E8E84-426E-40dd-AFC4-6F175D3DCCD1}">
-              <a14:hiddenFill xmlns:a14="http://schemas.microsoft.com/office/drawing/2010/main" xmlns="">
+              <a14:hiddenFill xmlns="" xmlns:a14="http://schemas.microsoft.com/office/drawing/2010/main">
                 <a:solidFill>
                   <a:srgbClr val="FFFFFF"/>
                 </a:solidFill>
@@ -685,7 +686,7 @@
             </a:ln>
             <a:extLst>
               <a:ext uri="{91240B29-F687-4f45-9708-019B960494DF}">
-                <a14:hiddenLine xmlns:a14="http://schemas.microsoft.com/office/drawing/2010/main" xmlns="" w="9525">
+                <a14:hiddenLine xmlns="" xmlns:a14="http://schemas.microsoft.com/office/drawing/2010/main" w="9525">
                   <a:solidFill>
                     <a:srgbClr val="000000"/>
                   </a:solidFill>
@@ -775,7 +776,7 @@
             </a:ln>
             <a:extLst>
               <a:ext uri="{91240B29-F687-4f45-9708-019B960494DF}">
-                <a14:hiddenLine xmlns:a14="http://schemas.microsoft.com/office/drawing/2010/main" xmlns="" w="9525">
+                <a14:hiddenLine xmlns="" xmlns:a14="http://schemas.microsoft.com/office/drawing/2010/main" w="9525">
                   <a:solidFill>
                     <a:srgbClr val="000000"/>
                   </a:solidFill>
@@ -865,7 +866,7 @@
             </a:ln>
             <a:extLst>
               <a:ext uri="{91240B29-F687-4f45-9708-019B960494DF}">
-                <a14:hiddenLine xmlns:a14="http://schemas.microsoft.com/office/drawing/2010/main" xmlns="" w="9525">
+                <a14:hiddenLine xmlns="" xmlns:a14="http://schemas.microsoft.com/office/drawing/2010/main" w="9525">
                   <a:solidFill>
                     <a:srgbClr val="000000"/>
                   </a:solidFill>
@@ -899,7 +900,7 @@
             </a:ln>
             <a:extLst>
               <a:ext uri="{91240B29-F687-4f45-9708-019B960494DF}">
-                <a14:hiddenLine xmlns:a14="http://schemas.microsoft.com/office/drawing/2010/main" xmlns="" w="9525">
+                <a14:hiddenLine xmlns="" xmlns:a14="http://schemas.microsoft.com/office/drawing/2010/main" w="9525">
                   <a:solidFill>
                     <a:srgbClr val="000000"/>
                   </a:solidFill>
@@ -989,7 +990,7 @@
             </a:ln>
             <a:extLst>
               <a:ext uri="{91240B29-F687-4f45-9708-019B960494DF}">
-                <a14:hiddenLine xmlns:a14="http://schemas.microsoft.com/office/drawing/2010/main" xmlns="" w="9525">
+                <a14:hiddenLine xmlns="" xmlns:a14="http://schemas.microsoft.com/office/drawing/2010/main" w="9525">
                   <a:solidFill>
                     <a:srgbClr val="000000"/>
                   </a:solidFill>
@@ -1051,7 +1052,7 @@
             </a:ln>
             <a:extLst>
               <a:ext uri="{91240B29-F687-4f45-9708-019B960494DF}">
-                <a14:hiddenLine xmlns:a14="http://schemas.microsoft.com/office/drawing/2010/main" xmlns="" w="9525">
+                <a14:hiddenLine xmlns="" xmlns:a14="http://schemas.microsoft.com/office/drawing/2010/main" w="9525">
                   <a:solidFill>
                     <a:srgbClr val="000000"/>
                   </a:solidFill>
@@ -1113,7 +1114,7 @@
             </a:ln>
             <a:extLst>
               <a:ext uri="{91240B29-F687-4f45-9708-019B960494DF}">
-                <a14:hiddenLine xmlns:a14="http://schemas.microsoft.com/office/drawing/2010/main" xmlns="" w="9525">
+                <a14:hiddenLine xmlns="" xmlns:a14="http://schemas.microsoft.com/office/drawing/2010/main" w="9525">
                   <a:solidFill>
                     <a:srgbClr val="000000"/>
                   </a:solidFill>
@@ -1203,7 +1204,7 @@
             </a:ln>
             <a:extLst>
               <a:ext uri="{91240B29-F687-4f45-9708-019B960494DF}">
-                <a14:hiddenLine xmlns:a14="http://schemas.microsoft.com/office/drawing/2010/main" xmlns="" w="9525">
+                <a14:hiddenLine xmlns="" xmlns:a14="http://schemas.microsoft.com/office/drawing/2010/main" w="9525">
                   <a:solidFill>
                     <a:srgbClr val="000000"/>
                   </a:solidFill>
@@ -1265,7 +1266,7 @@
             </a:ln>
             <a:extLst>
               <a:ext uri="{91240B29-F687-4f45-9708-019B960494DF}">
-                <a14:hiddenLine xmlns:a14="http://schemas.microsoft.com/office/drawing/2010/main" xmlns="" w="9525">
+                <a14:hiddenLine xmlns="" xmlns:a14="http://schemas.microsoft.com/office/drawing/2010/main" w="9525">
                   <a:solidFill>
                     <a:srgbClr val="000000"/>
                   </a:solidFill>
@@ -1327,7 +1328,7 @@
             </a:ln>
             <a:extLst>
               <a:ext uri="{91240B29-F687-4f45-9708-019B960494DF}">
-                <a14:hiddenLine xmlns:a14="http://schemas.microsoft.com/office/drawing/2010/main" xmlns="" w="9525">
+                <a14:hiddenLine xmlns="" xmlns:a14="http://schemas.microsoft.com/office/drawing/2010/main" w="9525">
                   <a:solidFill>
                     <a:srgbClr val="000000"/>
                   </a:solidFill>
@@ -1417,7 +1418,7 @@
             </a:ln>
             <a:extLst>
               <a:ext uri="{91240B29-F687-4f45-9708-019B960494DF}">
-                <a14:hiddenLine xmlns:a14="http://schemas.microsoft.com/office/drawing/2010/main" xmlns="" w="9525">
+                <a14:hiddenLine xmlns="" xmlns:a14="http://schemas.microsoft.com/office/drawing/2010/main" w="9525">
                   <a:solidFill>
                     <a:srgbClr val="000000"/>
                   </a:solidFill>
@@ -1507,7 +1508,7 @@
             </a:ln>
             <a:extLst>
               <a:ext uri="{91240B29-F687-4f45-9708-019B960494DF}">
-                <a14:hiddenLine xmlns:a14="http://schemas.microsoft.com/office/drawing/2010/main" xmlns="" w="9525">
+                <a14:hiddenLine xmlns="" xmlns:a14="http://schemas.microsoft.com/office/drawing/2010/main" w="9525">
                   <a:solidFill>
                     <a:srgbClr val="000000"/>
                   </a:solidFill>
@@ -1569,7 +1570,7 @@
             </a:ln>
             <a:extLst>
               <a:ext uri="{91240B29-F687-4f45-9708-019B960494DF}">
-                <a14:hiddenLine xmlns:a14="http://schemas.microsoft.com/office/drawing/2010/main" xmlns="" w="9525">
+                <a14:hiddenLine xmlns="" xmlns:a14="http://schemas.microsoft.com/office/drawing/2010/main" w="9525">
                   <a:solidFill>
                     <a:srgbClr val="000000"/>
                   </a:solidFill>
@@ -1679,7 +1680,7 @@
             </a:ln>
             <a:extLst>
               <a:ext uri="{91240B29-F687-4f45-9708-019B960494DF}">
-                <a14:hiddenLine xmlns:a14="http://schemas.microsoft.com/office/drawing/2010/main" xmlns="" w="9525">
+                <a14:hiddenLine xmlns="" xmlns:a14="http://schemas.microsoft.com/office/drawing/2010/main" w="9525">
                   <a:solidFill>
                     <a:srgbClr val="000000"/>
                   </a:solidFill>
@@ -1741,7 +1742,7 @@
             </a:ln>
             <a:extLst>
               <a:ext uri="{91240B29-F687-4f45-9708-019B960494DF}">
-                <a14:hiddenLine xmlns:a14="http://schemas.microsoft.com/office/drawing/2010/main" xmlns="" w="9525">
+                <a14:hiddenLine xmlns="" xmlns:a14="http://schemas.microsoft.com/office/drawing/2010/main" w="9525">
                   <a:solidFill>
                     <a:srgbClr val="000000"/>
                   </a:solidFill>
@@ -1831,7 +1832,7 @@
             </a:ln>
             <a:extLst>
               <a:ext uri="{91240B29-F687-4f45-9708-019B960494DF}">
-                <a14:hiddenLine xmlns:a14="http://schemas.microsoft.com/office/drawing/2010/main" xmlns="" w="9525">
+                <a14:hiddenLine xmlns="" xmlns:a14="http://schemas.microsoft.com/office/drawing/2010/main" w="9525">
                   <a:solidFill>
                     <a:srgbClr val="000000"/>
                   </a:solidFill>
@@ -1921,7 +1922,7 @@
             </a:ln>
             <a:extLst>
               <a:ext uri="{91240B29-F687-4f45-9708-019B960494DF}">
-                <a14:hiddenLine xmlns:a14="http://schemas.microsoft.com/office/drawing/2010/main" xmlns="" w="9525">
+                <a14:hiddenLine xmlns="" xmlns:a14="http://schemas.microsoft.com/office/drawing/2010/main" w="9525">
                   <a:solidFill>
                     <a:srgbClr val="000000"/>
                   </a:solidFill>
@@ -1983,7 +1984,7 @@
             </a:ln>
             <a:extLst>
               <a:ext uri="{91240B29-F687-4f45-9708-019B960494DF}">
-                <a14:hiddenLine xmlns:a14="http://schemas.microsoft.com/office/drawing/2010/main" xmlns="" w="9525">
+                <a14:hiddenLine xmlns="" xmlns:a14="http://schemas.microsoft.com/office/drawing/2010/main" w="9525">
                   <a:solidFill>
                     <a:srgbClr val="000000"/>
                   </a:solidFill>
@@ -2073,7 +2074,7 @@
             </a:ln>
             <a:extLst>
               <a:ext uri="{91240B29-F687-4f45-9708-019B960494DF}">
-                <a14:hiddenLine xmlns:a14="http://schemas.microsoft.com/office/drawing/2010/main" xmlns="" w="9525">
+                <a14:hiddenLine xmlns="" xmlns:a14="http://schemas.microsoft.com/office/drawing/2010/main" w="9525">
                   <a:solidFill>
                     <a:srgbClr val="000000"/>
                   </a:solidFill>
@@ -2163,7 +2164,7 @@
             </a:ln>
             <a:extLst>
               <a:ext uri="{91240B29-F687-4f45-9708-019B960494DF}">
-                <a14:hiddenLine xmlns:a14="http://schemas.microsoft.com/office/drawing/2010/main" xmlns="" w="9525">
+                <a14:hiddenLine xmlns="" xmlns:a14="http://schemas.microsoft.com/office/drawing/2010/main" w="9525">
                   <a:solidFill>
                     <a:srgbClr val="000000"/>
                   </a:solidFill>
@@ -2219,7 +2220,7 @@
             </a:ln>
             <a:extLst>
               <a:ext uri="{91240B29-F687-4f45-9708-019B960494DF}">
-                <a14:hiddenLine xmlns:a14="http://schemas.microsoft.com/office/drawing/2010/main" xmlns="" w="9525">
+                <a14:hiddenLine xmlns="" xmlns:a14="http://schemas.microsoft.com/office/drawing/2010/main" w="9525">
                   <a:solidFill>
                     <a:srgbClr val="000000"/>
                   </a:solidFill>
@@ -2309,7 +2310,7 @@
             </a:ln>
             <a:extLst>
               <a:ext uri="{91240B29-F687-4f45-9708-019B960494DF}">
-                <a14:hiddenLine xmlns:a14="http://schemas.microsoft.com/office/drawing/2010/main" xmlns="" w="9525">
+                <a14:hiddenLine xmlns="" xmlns:a14="http://schemas.microsoft.com/office/drawing/2010/main" w="9525">
                   <a:solidFill>
                     <a:srgbClr val="000000"/>
                   </a:solidFill>
@@ -2365,7 +2366,7 @@
             </a:ln>
             <a:extLst>
               <a:ext uri="{91240B29-F687-4f45-9708-019B960494DF}">
-                <a14:hiddenLine xmlns:a14="http://schemas.microsoft.com/office/drawing/2010/main" xmlns="" w="9525">
+                <a14:hiddenLine xmlns="" xmlns:a14="http://schemas.microsoft.com/office/drawing/2010/main" w="9525">
                   <a:solidFill>
                     <a:srgbClr val="000000"/>
                   </a:solidFill>
@@ -2455,7 +2456,7 @@
             </a:ln>
             <a:extLst>
               <a:ext uri="{91240B29-F687-4f45-9708-019B960494DF}">
-                <a14:hiddenLine xmlns:a14="http://schemas.microsoft.com/office/drawing/2010/main" xmlns="" w="9525">
+                <a14:hiddenLine xmlns="" xmlns:a14="http://schemas.microsoft.com/office/drawing/2010/main" w="9525">
                   <a:solidFill>
                     <a:srgbClr val="000000"/>
                   </a:solidFill>
@@ -2523,7 +2524,7 @@
             </a:ln>
             <a:extLst>
               <a:ext uri="{91240B29-F687-4f45-9708-019B960494DF}">
-                <a14:hiddenLine xmlns:a14="http://schemas.microsoft.com/office/drawing/2010/main" xmlns="" w="9525">
+                <a14:hiddenLine xmlns="" xmlns:a14="http://schemas.microsoft.com/office/drawing/2010/main" w="9525">
                   <a:solidFill>
                     <a:srgbClr val="000000"/>
                   </a:solidFill>
@@ -2613,7 +2614,7 @@
             </a:ln>
             <a:extLst>
               <a:ext uri="{91240B29-F687-4f45-9708-019B960494DF}">
-                <a14:hiddenLine xmlns:a14="http://schemas.microsoft.com/office/drawing/2010/main" xmlns="" w="9525">
+                <a14:hiddenLine xmlns="" xmlns:a14="http://schemas.microsoft.com/office/drawing/2010/main" w="9525">
                   <a:solidFill>
                     <a:srgbClr val="000000"/>
                   </a:solidFill>
@@ -2681,7 +2682,7 @@
             </a:ln>
             <a:extLst>
               <a:ext uri="{91240B29-F687-4f45-9708-019B960494DF}">
-                <a14:hiddenLine xmlns:a14="http://schemas.microsoft.com/office/drawing/2010/main" xmlns="" w="9525">
+                <a14:hiddenLine xmlns="" xmlns:a14="http://schemas.microsoft.com/office/drawing/2010/main" w="9525">
                   <a:solidFill>
                     <a:srgbClr val="000000"/>
                   </a:solidFill>
@@ -2771,7 +2772,7 @@
             </a:ln>
             <a:extLst>
               <a:ext uri="{91240B29-F687-4f45-9708-019B960494DF}">
-                <a14:hiddenLine xmlns:a14="http://schemas.microsoft.com/office/drawing/2010/main" xmlns="" w="9525">
+                <a14:hiddenLine xmlns="" xmlns:a14="http://schemas.microsoft.com/office/drawing/2010/main" w="9525">
                   <a:solidFill>
                     <a:srgbClr val="000000"/>
                   </a:solidFill>
@@ -2805,7 +2806,7 @@
             </a:ln>
             <a:extLst>
               <a:ext uri="{91240B29-F687-4f45-9708-019B960494DF}">
-                <a14:hiddenLine xmlns:a14="http://schemas.microsoft.com/office/drawing/2010/main" xmlns="" w="9525">
+                <a14:hiddenLine xmlns="" xmlns:a14="http://schemas.microsoft.com/office/drawing/2010/main" w="9525">
                   <a:solidFill>
                     <a:srgbClr val="000000"/>
                   </a:solidFill>
@@ -2895,7 +2896,7 @@
             </a:ln>
             <a:extLst>
               <a:ext uri="{91240B29-F687-4f45-9708-019B960494DF}">
-                <a14:hiddenLine xmlns:a14="http://schemas.microsoft.com/office/drawing/2010/main" xmlns="" w="9525">
+                <a14:hiddenLine xmlns="" xmlns:a14="http://schemas.microsoft.com/office/drawing/2010/main" w="9525">
                   <a:solidFill>
                     <a:srgbClr val="000000"/>
                   </a:solidFill>
@@ -2957,7 +2958,7 @@
             </a:ln>
             <a:extLst>
               <a:ext uri="{91240B29-F687-4f45-9708-019B960494DF}">
-                <a14:hiddenLine xmlns:a14="http://schemas.microsoft.com/office/drawing/2010/main" xmlns="" w="9525">
+                <a14:hiddenLine xmlns="" xmlns:a14="http://schemas.microsoft.com/office/drawing/2010/main" w="9525">
                   <a:solidFill>
                     <a:srgbClr val="000000"/>
                   </a:solidFill>
@@ -3019,7 +3020,7 @@
             </a:ln>
             <a:extLst>
               <a:ext uri="{91240B29-F687-4f45-9708-019B960494DF}">
-                <a14:hiddenLine xmlns:a14="http://schemas.microsoft.com/office/drawing/2010/main" xmlns="" w="9525">
+                <a14:hiddenLine xmlns="" xmlns:a14="http://schemas.microsoft.com/office/drawing/2010/main" w="9525">
                   <a:solidFill>
                     <a:srgbClr val="000000"/>
                   </a:solidFill>
@@ -3109,7 +3110,7 @@
             </a:ln>
             <a:extLst>
               <a:ext uri="{91240B29-F687-4f45-9708-019B960494DF}">
-                <a14:hiddenLine xmlns:a14="http://schemas.microsoft.com/office/drawing/2010/main" xmlns="" w="9525">
+                <a14:hiddenLine xmlns="" xmlns:a14="http://schemas.microsoft.com/office/drawing/2010/main" w="9525">
                   <a:solidFill>
                     <a:srgbClr val="000000"/>
                   </a:solidFill>
@@ -3177,7 +3178,7 @@
             </a:ln>
             <a:extLst>
               <a:ext uri="{91240B29-F687-4f45-9708-019B960494DF}">
-                <a14:hiddenLine xmlns:a14="http://schemas.microsoft.com/office/drawing/2010/main" xmlns="" w="9525">
+                <a14:hiddenLine xmlns="" xmlns:a14="http://schemas.microsoft.com/office/drawing/2010/main" w="9525">
                   <a:solidFill>
                     <a:srgbClr val="000000"/>
                   </a:solidFill>
@@ -3239,7 +3240,7 @@
             </a:ln>
             <a:extLst>
               <a:ext uri="{91240B29-F687-4f45-9708-019B960494DF}">
-                <a14:hiddenLine xmlns:a14="http://schemas.microsoft.com/office/drawing/2010/main" xmlns="" w="9525">
+                <a14:hiddenLine xmlns="" xmlns:a14="http://schemas.microsoft.com/office/drawing/2010/main" w="9525">
                   <a:solidFill>
                     <a:srgbClr val="000000"/>
                   </a:solidFill>
@@ -3329,7 +3330,7 @@
             </a:ln>
             <a:extLst>
               <a:ext uri="{91240B29-F687-4f45-9708-019B960494DF}">
-                <a14:hiddenLine xmlns:a14="http://schemas.microsoft.com/office/drawing/2010/main" xmlns="" w="9525">
+                <a14:hiddenLine xmlns="" xmlns:a14="http://schemas.microsoft.com/office/drawing/2010/main" w="9525">
                   <a:solidFill>
                     <a:srgbClr val="000000"/>
                   </a:solidFill>
@@ -3391,7 +3392,7 @@
             </a:ln>
             <a:extLst>
               <a:ext uri="{91240B29-F687-4f45-9708-019B960494DF}">
-                <a14:hiddenLine xmlns:a14="http://schemas.microsoft.com/office/drawing/2010/main" xmlns="" w="9525">
+                <a14:hiddenLine xmlns="" xmlns:a14="http://schemas.microsoft.com/office/drawing/2010/main" w="9525">
                   <a:solidFill>
                     <a:srgbClr val="000000"/>
                   </a:solidFill>
@@ -3481,7 +3482,7 @@
             </a:ln>
             <a:extLst>
               <a:ext uri="{91240B29-F687-4f45-9708-019B960494DF}">
-                <a14:hiddenLine xmlns:a14="http://schemas.microsoft.com/office/drawing/2010/main" xmlns="" w="9525">
+                <a14:hiddenLine xmlns="" xmlns:a14="http://schemas.microsoft.com/office/drawing/2010/main" w="9525">
                   <a:solidFill>
                     <a:srgbClr val="000000"/>
                   </a:solidFill>
@@ -3543,7 +3544,7 @@
             </a:ln>
             <a:extLst>
               <a:ext uri="{91240B29-F687-4f45-9708-019B960494DF}">
-                <a14:hiddenLine xmlns:a14="http://schemas.microsoft.com/office/drawing/2010/main" xmlns="" w="9525">
+                <a14:hiddenLine xmlns="" xmlns:a14="http://schemas.microsoft.com/office/drawing/2010/main" w="9525">
                   <a:solidFill>
                     <a:srgbClr val="000000"/>
                   </a:solidFill>
@@ -3633,7 +3634,7 @@
             </a:ln>
             <a:extLst>
               <a:ext uri="{91240B29-F687-4f45-9708-019B960494DF}">
-                <a14:hiddenLine xmlns:a14="http://schemas.microsoft.com/office/drawing/2010/main" xmlns="" w="9525">
+                <a14:hiddenLine xmlns="" xmlns:a14="http://schemas.microsoft.com/office/drawing/2010/main" w="9525">
                   <a:solidFill>
                     <a:srgbClr val="000000"/>
                   </a:solidFill>
@@ -3667,7 +3668,7 @@
             </a:ln>
             <a:extLst>
               <a:ext uri="{91240B29-F687-4f45-9708-019B960494DF}">
-                <a14:hiddenLine xmlns:a14="http://schemas.microsoft.com/office/drawing/2010/main" xmlns="" w="9525">
+                <a14:hiddenLine xmlns="" xmlns:a14="http://schemas.microsoft.com/office/drawing/2010/main" w="9525">
                   <a:solidFill>
                     <a:srgbClr val="000000"/>
                   </a:solidFill>
@@ -3732,7 +3733,7 @@
             </a:ln>
             <a:extLst>
               <a:ext uri="{91240B29-F687-4f45-9708-019B960494DF}">
-                <a14:hiddenLine xmlns:a14="http://schemas.microsoft.com/office/drawing/2010/main" xmlns="" w="9525">
+                <a14:hiddenLine xmlns="" xmlns:a14="http://schemas.microsoft.com/office/drawing/2010/main" w="9525">
                   <a:solidFill>
                     <a:srgbClr val="000000"/>
                   </a:solidFill>
@@ -3822,7 +3823,7 @@
             </a:ln>
             <a:extLst>
               <a:ext uri="{91240B29-F687-4f45-9708-019B960494DF}">
-                <a14:hiddenLine xmlns:a14="http://schemas.microsoft.com/office/drawing/2010/main" xmlns="" w="9525">
+                <a14:hiddenLine xmlns="" xmlns:a14="http://schemas.microsoft.com/office/drawing/2010/main" w="9525">
                   <a:solidFill>
                     <a:srgbClr val="000000"/>
                   </a:solidFill>
@@ -3884,7 +3885,7 @@
             </a:ln>
             <a:extLst>
               <a:ext uri="{91240B29-F687-4f45-9708-019B960494DF}">
-                <a14:hiddenLine xmlns:a14="http://schemas.microsoft.com/office/drawing/2010/main" xmlns="" w="9525">
+                <a14:hiddenLine xmlns="" xmlns:a14="http://schemas.microsoft.com/office/drawing/2010/main" w="9525">
                   <a:solidFill>
                     <a:srgbClr val="000000"/>
                   </a:solidFill>
@@ -3974,7 +3975,7 @@
             </a:ln>
             <a:extLst>
               <a:ext uri="{91240B29-F687-4f45-9708-019B960494DF}">
-                <a14:hiddenLine xmlns:a14="http://schemas.microsoft.com/office/drawing/2010/main" xmlns="" w="9525">
+                <a14:hiddenLine xmlns="" xmlns:a14="http://schemas.microsoft.com/office/drawing/2010/main" w="9525">
                   <a:solidFill>
                     <a:srgbClr val="000000"/>
                   </a:solidFill>
@@ -4064,7 +4065,7 @@
             </a:ln>
             <a:extLst>
               <a:ext uri="{91240B29-F687-4f45-9708-019B960494DF}">
-                <a14:hiddenLine xmlns:a14="http://schemas.microsoft.com/office/drawing/2010/main" xmlns="" w="9525">
+                <a14:hiddenLine xmlns="" xmlns:a14="http://schemas.microsoft.com/office/drawing/2010/main" w="9525">
                   <a:solidFill>
                     <a:srgbClr val="000000"/>
                   </a:solidFill>
@@ -4129,7 +4130,7 @@
             </a:ln>
             <a:extLst>
               <a:ext uri="{91240B29-F687-4f45-9708-019B960494DF}">
-                <a14:hiddenLine xmlns:a14="http://schemas.microsoft.com/office/drawing/2010/main" xmlns="" w="9525">
+                <a14:hiddenLine xmlns="" xmlns:a14="http://schemas.microsoft.com/office/drawing/2010/main" w="9525">
                   <a:solidFill>
                     <a:srgbClr val="000000"/>
                   </a:solidFill>
@@ -4191,7 +4192,7 @@
             </a:ln>
             <a:extLst>
               <a:ext uri="{91240B29-F687-4f45-9708-019B960494DF}">
-                <a14:hiddenLine xmlns:a14="http://schemas.microsoft.com/office/drawing/2010/main" xmlns="" w="9525">
+                <a14:hiddenLine xmlns="" xmlns:a14="http://schemas.microsoft.com/office/drawing/2010/main" w="9525">
                   <a:solidFill>
                     <a:srgbClr val="000000"/>
                   </a:solidFill>
@@ -4281,7 +4282,7 @@
             </a:ln>
             <a:extLst>
               <a:ext uri="{91240B29-F687-4f45-9708-019B960494DF}">
-                <a14:hiddenLine xmlns:a14="http://schemas.microsoft.com/office/drawing/2010/main" xmlns="" w="9525">
+                <a14:hiddenLine xmlns="" xmlns:a14="http://schemas.microsoft.com/office/drawing/2010/main" w="9525">
                   <a:solidFill>
                     <a:srgbClr val="000000"/>
                   </a:solidFill>
@@ -4371,7 +4372,7 @@
             </a:ln>
             <a:extLst>
               <a:ext uri="{91240B29-F687-4f45-9708-019B960494DF}">
-                <a14:hiddenLine xmlns:a14="http://schemas.microsoft.com/office/drawing/2010/main" xmlns="" w="9525">
+                <a14:hiddenLine xmlns="" xmlns:a14="http://schemas.microsoft.com/office/drawing/2010/main" w="9525">
                   <a:solidFill>
                     <a:srgbClr val="000000"/>
                   </a:solidFill>
@@ -4433,7 +4434,7 @@
             </a:ln>
             <a:extLst>
               <a:ext uri="{91240B29-F687-4f45-9708-019B960494DF}">
-                <a14:hiddenLine xmlns:a14="http://schemas.microsoft.com/office/drawing/2010/main" xmlns="" w="9525">
+                <a14:hiddenLine xmlns="" xmlns:a14="http://schemas.microsoft.com/office/drawing/2010/main" w="9525">
                   <a:solidFill>
                     <a:srgbClr val="000000"/>
                   </a:solidFill>
@@ -4553,7 +4554,7 @@
             </a:ln>
             <a:extLst>
               <a:ext uri="{91240B29-F687-4f45-9708-019B960494DF}">
-                <a14:hiddenLine xmlns:a14="http://schemas.microsoft.com/office/drawing/2010/main" xmlns="" w="9525">
+                <a14:hiddenLine xmlns="" xmlns:a14="http://schemas.microsoft.com/office/drawing/2010/main" w="9525">
                   <a:solidFill>
                     <a:srgbClr val="000000"/>
                   </a:solidFill>
@@ -4621,7 +4622,7 @@
             </a:ln>
             <a:extLst>
               <a:ext uri="{91240B29-F687-4f45-9708-019B960494DF}">
-                <a14:hiddenLine xmlns:a14="http://schemas.microsoft.com/office/drawing/2010/main" xmlns="" w="9525">
+                <a14:hiddenLine xmlns="" xmlns:a14="http://schemas.microsoft.com/office/drawing/2010/main" w="9525">
                   <a:solidFill>
                     <a:srgbClr val="000000"/>
                   </a:solidFill>
@@ -4711,7 +4712,7 @@
             </a:ln>
             <a:extLst>
               <a:ext uri="{91240B29-F687-4f45-9708-019B960494DF}">
-                <a14:hiddenLine xmlns:a14="http://schemas.microsoft.com/office/drawing/2010/main" xmlns="" w="9525">
+                <a14:hiddenLine xmlns="" xmlns:a14="http://schemas.microsoft.com/office/drawing/2010/main" w="9525">
                   <a:solidFill>
                     <a:srgbClr val="000000"/>
                   </a:solidFill>
@@ -4851,7 +4852,7 @@
           <a:p>
             <a:fld id="{4313F670-7F9A-774D-B73D-573401E44297}" type="datetime1">
               <a:rPr lang="en-US" smtClean="0"/>
-              <a:t>10/22/26</a:t>
+              <a:t>10/27/26</a:t>
             </a:fld>
             <a:endParaRPr lang="en-US"/>
           </a:p>
@@ -5118,7 +5119,7 @@
           <a:p>
             <a:fld id="{446F9669-A8A7-2D40-9D01-B35FC337AA30}" type="datetime1">
               <a:rPr lang="en-US" smtClean="0"/>
-              <a:t>10/22/26</a:t>
+              <a:t>10/27/26</a:t>
             </a:fld>
             <a:endParaRPr lang="en-US"/>
           </a:p>
@@ -5314,7 +5315,7 @@
           <a:p>
             <a:fld id="{FA76CF18-F41B-6B48-B3E5-599E9795C2C3}" type="datetime1">
               <a:rPr lang="en-US" smtClean="0"/>
-              <a:t>10/22/26</a:t>
+              <a:t>10/27/26</a:t>
             </a:fld>
             <a:endParaRPr lang="en-US"/>
           </a:p>
@@ -5577,7 +5578,7 @@
           <a:p>
             <a:fld id="{B9654854-6457-164F-A077-6B3035079B82}" type="datetime1">
               <a:rPr lang="en-US" smtClean="0"/>
-              <a:t>10/22/26</a:t>
+              <a:t>10/27/26</a:t>
             </a:fld>
             <a:endParaRPr lang="en-US"/>
           </a:p>
@@ -6011,7 +6012,7 @@
           <a:p>
             <a:fld id="{CE3DBFD7-E611-8C40-AC73-0C29FF63F0CD}" type="datetime1">
               <a:rPr lang="en-US" smtClean="0"/>
-              <a:t>10/22/26</a:t>
+              <a:t>10/27/26</a:t>
             </a:fld>
             <a:endParaRPr lang="en-US"/>
           </a:p>
@@ -6557,7 +6558,7 @@
           <a:p>
             <a:fld id="{C8B63B06-0493-2840-9F37-30C9412BBF17}" type="datetime1">
               <a:rPr lang="en-US" smtClean="0"/>
-              <a:t>10/22/26</a:t>
+              <a:t>10/27/26</a:t>
             </a:fld>
             <a:endParaRPr lang="en-US"/>
           </a:p>
@@ -7277,7 +7278,7 @@
           <a:p>
             <a:fld id="{72B5C0FA-8C46-E84D-B6D7-B673F2CA0A0E}" type="datetime1">
               <a:rPr lang="en-US" smtClean="0"/>
-              <a:t>10/22/26</a:t>
+              <a:t>10/27/26</a:t>
             </a:fld>
             <a:endParaRPr lang="en-US"/>
           </a:p>
@@ -7447,7 +7448,7 @@
           <a:p>
             <a:fld id="{60B9CDE1-97B4-BF46-B69C-B86855B18820}" type="datetime1">
               <a:rPr lang="en-US" smtClean="0"/>
-              <a:t>10/22/26</a:t>
+              <a:t>10/27/26</a:t>
             </a:fld>
             <a:endParaRPr lang="en-US"/>
           </a:p>
@@ -7627,7 +7628,7 @@
           <a:p>
             <a:fld id="{BE51D3A4-F9E5-FD49-AA87-B395F50451DC}" type="datetime1">
               <a:rPr lang="en-US" smtClean="0"/>
-              <a:t>10/22/26</a:t>
+              <a:t>10/27/26</a:t>
             </a:fld>
             <a:endParaRPr lang="en-US"/>
           </a:p>
@@ -7797,7 +7798,7 @@
           <a:p>
             <a:fld id="{880DFB37-B0AE-9449-85EC-14F9C83B6084}" type="datetime1">
               <a:rPr lang="en-US" smtClean="0"/>
-              <a:t>10/22/26</a:t>
+              <a:t>10/27/26</a:t>
             </a:fld>
             <a:endParaRPr lang="en-US"/>
           </a:p>
@@ -8047,7 +8048,7 @@
           <a:p>
             <a:fld id="{C939124A-616E-6944-A21A-1839F5DBE7BB}" type="datetime1">
               <a:rPr lang="en-US" smtClean="0"/>
-              <a:t>10/22/26</a:t>
+              <a:t>10/27/26</a:t>
             </a:fld>
             <a:endParaRPr lang="en-US"/>
           </a:p>
@@ -8279,7 +8280,7 @@
           <a:p>
             <a:fld id="{C6E9A026-D48C-FD43-8676-CD625DD5D84B}" type="datetime1">
               <a:rPr lang="en-US" smtClean="0"/>
-              <a:t>10/22/26</a:t>
+              <a:t>10/27/26</a:t>
             </a:fld>
             <a:endParaRPr lang="en-US"/>
           </a:p>
@@ -8665,7 +8666,7 @@
           <a:p>
             <a:fld id="{EA35111E-23A3-1440-99A3-C4C665908E3D}" type="datetime1">
               <a:rPr lang="en-US" smtClean="0"/>
-              <a:t>10/22/26</a:t>
+              <a:t>10/27/26</a:t>
             </a:fld>
             <a:endParaRPr lang="en-US"/>
           </a:p>
@@ -8788,7 +8789,7 @@
           <a:p>
             <a:fld id="{249983B9-88EF-D74B-BA6D-6A3BF17C2B38}" type="datetime1">
               <a:rPr lang="en-US" smtClean="0"/>
-              <a:t>10/22/26</a:t>
+              <a:t>10/27/26</a:t>
             </a:fld>
             <a:endParaRPr lang="en-US"/>
           </a:p>
@@ -8883,7 +8884,7 @@
           <a:p>
             <a:fld id="{E2A00AEF-B4EC-084A-8DB8-A225C7981CBB}" type="datetime1">
               <a:rPr lang="en-US" smtClean="0"/>
-              <a:t>10/22/26</a:t>
+              <a:t>10/27/26</a:t>
             </a:fld>
             <a:endParaRPr lang="en-US"/>
           </a:p>
@@ -9132,7 +9133,7 @@
           <a:p>
             <a:fld id="{97860299-21CD-A94A-A7B0-44E787F8D42C}" type="datetime1">
               <a:rPr lang="en-US" smtClean="0"/>
-              <a:t>10/22/26</a:t>
+              <a:t>10/27/26</a:t>
             </a:fld>
             <a:endParaRPr lang="en-US"/>
           </a:p>
@@ -9417,7 +9418,7 @@
           <a:p>
             <a:fld id="{3DFD19CF-4E62-D246-BA61-7B528271315F}" type="datetime1">
               <a:rPr lang="en-US" smtClean="0"/>
-              <a:t>10/22/26</a:t>
+              <a:t>10/27/26</a:t>
             </a:fld>
             <a:endParaRPr lang="en-US"/>
           </a:p>
@@ -9540,7 +9541,7 @@
           <a:noFill/>
           <a:extLst>
             <a:ext uri="{909E8E84-426E-40dd-AFC4-6F175D3DCCD1}">
-              <a14:hiddenFill xmlns:a14="http://schemas.microsoft.com/office/drawing/2010/main" xmlns="">
+              <a14:hiddenFill xmlns="" xmlns:a14="http://schemas.microsoft.com/office/drawing/2010/main">
                 <a:solidFill>
                   <a:srgbClr val="FFFFFF"/>
                 </a:solidFill>
@@ -9614,7 +9615,7 @@
               </a:ln>
               <a:extLst>
                 <a:ext uri="{91240B29-F687-4f45-9708-019B960494DF}">
-                  <a14:hiddenLine xmlns:a14="http://schemas.microsoft.com/office/drawing/2010/main" xmlns="" w="9525">
+                  <a14:hiddenLine xmlns="" xmlns:a14="http://schemas.microsoft.com/office/drawing/2010/main" w="9525">
                     <a:solidFill>
                       <a:srgbClr val="000000"/>
                     </a:solidFill>
@@ -9704,7 +9705,7 @@
               </a:ln>
               <a:extLst>
                 <a:ext uri="{91240B29-F687-4f45-9708-019B960494DF}">
-                  <a14:hiddenLine xmlns:a14="http://schemas.microsoft.com/office/drawing/2010/main" xmlns="" w="9525">
+                  <a14:hiddenLine xmlns="" xmlns:a14="http://schemas.microsoft.com/office/drawing/2010/main" w="9525">
                     <a:solidFill>
                       <a:srgbClr val="000000"/>
                     </a:solidFill>
@@ -9794,7 +9795,7 @@
               </a:ln>
               <a:extLst>
                 <a:ext uri="{91240B29-F687-4f45-9708-019B960494DF}">
-                  <a14:hiddenLine xmlns:a14="http://schemas.microsoft.com/office/drawing/2010/main" xmlns="" w="9525">
+                  <a14:hiddenLine xmlns="" xmlns:a14="http://schemas.microsoft.com/office/drawing/2010/main" w="9525">
                     <a:solidFill>
                       <a:srgbClr val="000000"/>
                     </a:solidFill>
@@ -9856,7 +9857,7 @@
               </a:ln>
               <a:extLst>
                 <a:ext uri="{91240B29-F687-4f45-9708-019B960494DF}">
-                  <a14:hiddenLine xmlns:a14="http://schemas.microsoft.com/office/drawing/2010/main" xmlns="" w="9525">
+                  <a14:hiddenLine xmlns="" xmlns:a14="http://schemas.microsoft.com/office/drawing/2010/main" w="9525">
                     <a:solidFill>
                       <a:srgbClr val="000000"/>
                     </a:solidFill>
@@ -9946,7 +9947,7 @@
               </a:ln>
               <a:extLst>
                 <a:ext uri="{91240B29-F687-4f45-9708-019B960494DF}">
-                  <a14:hiddenLine xmlns:a14="http://schemas.microsoft.com/office/drawing/2010/main" xmlns="" w="9525">
+                  <a14:hiddenLine xmlns="" xmlns:a14="http://schemas.microsoft.com/office/drawing/2010/main" w="9525">
                     <a:solidFill>
                       <a:srgbClr val="000000"/>
                     </a:solidFill>
@@ -10008,7 +10009,7 @@
               </a:ln>
               <a:extLst>
                 <a:ext uri="{91240B29-F687-4f45-9708-019B960494DF}">
-                  <a14:hiddenLine xmlns:a14="http://schemas.microsoft.com/office/drawing/2010/main" xmlns="" w="9525">
+                  <a14:hiddenLine xmlns="" xmlns:a14="http://schemas.microsoft.com/office/drawing/2010/main" w="9525">
                     <a:solidFill>
                       <a:srgbClr val="000000"/>
                     </a:solidFill>
@@ -10070,7 +10071,7 @@
               </a:ln>
               <a:extLst>
                 <a:ext uri="{91240B29-F687-4f45-9708-019B960494DF}">
-                  <a14:hiddenLine xmlns:a14="http://schemas.microsoft.com/office/drawing/2010/main" xmlns="" w="9525">
+                  <a14:hiddenLine xmlns="" xmlns:a14="http://schemas.microsoft.com/office/drawing/2010/main" w="9525">
                     <a:solidFill>
                       <a:srgbClr val="000000"/>
                     </a:solidFill>
@@ -10160,7 +10161,7 @@
               </a:ln>
               <a:extLst>
                 <a:ext uri="{91240B29-F687-4f45-9708-019B960494DF}">
-                  <a14:hiddenLine xmlns:a14="http://schemas.microsoft.com/office/drawing/2010/main" xmlns="" w="9525">
+                  <a14:hiddenLine xmlns="" xmlns:a14="http://schemas.microsoft.com/office/drawing/2010/main" w="9525">
                     <a:solidFill>
                       <a:srgbClr val="000000"/>
                     </a:solidFill>
@@ -10250,7 +10251,7 @@
               </a:ln>
               <a:extLst>
                 <a:ext uri="{91240B29-F687-4f45-9708-019B960494DF}">
-                  <a14:hiddenLine xmlns:a14="http://schemas.microsoft.com/office/drawing/2010/main" xmlns="" w="9525">
+                  <a14:hiddenLine xmlns="" xmlns:a14="http://schemas.microsoft.com/office/drawing/2010/main" w="9525">
                     <a:solidFill>
                       <a:srgbClr val="000000"/>
                     </a:solidFill>
@@ -10312,7 +10313,7 @@
               </a:ln>
               <a:extLst>
                 <a:ext uri="{91240B29-F687-4f45-9708-019B960494DF}">
-                  <a14:hiddenLine xmlns:a14="http://schemas.microsoft.com/office/drawing/2010/main" xmlns="" w="9525">
+                  <a14:hiddenLine xmlns="" xmlns:a14="http://schemas.microsoft.com/office/drawing/2010/main" w="9525">
                     <a:solidFill>
                       <a:srgbClr val="000000"/>
                     </a:solidFill>
@@ -10422,7 +10423,7 @@
               </a:ln>
               <a:extLst>
                 <a:ext uri="{91240B29-F687-4f45-9708-019B960494DF}">
-                  <a14:hiddenLine xmlns:a14="http://schemas.microsoft.com/office/drawing/2010/main" xmlns="" w="9525">
+                  <a14:hiddenLine xmlns="" xmlns:a14="http://schemas.microsoft.com/office/drawing/2010/main" w="9525">
                     <a:solidFill>
                       <a:srgbClr val="000000"/>
                     </a:solidFill>
@@ -10506,7 +10507,7 @@
               </a:ln>
               <a:extLst>
                 <a:ext uri="{91240B29-F687-4f45-9708-019B960494DF}">
-                  <a14:hiddenLine xmlns:a14="http://schemas.microsoft.com/office/drawing/2010/main" xmlns="" w="9525">
+                  <a14:hiddenLine xmlns="" xmlns:a14="http://schemas.microsoft.com/office/drawing/2010/main" w="9525">
                     <a:solidFill>
                       <a:srgbClr val="000000"/>
                     </a:solidFill>
@@ -10568,7 +10569,7 @@
               </a:ln>
               <a:extLst>
                 <a:ext uri="{91240B29-F687-4f45-9708-019B960494DF}">
-                  <a14:hiddenLine xmlns:a14="http://schemas.microsoft.com/office/drawing/2010/main" xmlns="" w="9525">
+                  <a14:hiddenLine xmlns="" xmlns:a14="http://schemas.microsoft.com/office/drawing/2010/main" w="9525">
                     <a:solidFill>
                       <a:srgbClr val="000000"/>
                     </a:solidFill>
@@ -10630,7 +10631,7 @@
               </a:ln>
               <a:extLst>
                 <a:ext uri="{91240B29-F687-4f45-9708-019B960494DF}">
-                  <a14:hiddenLine xmlns:a14="http://schemas.microsoft.com/office/drawing/2010/main" xmlns="" w="9525">
+                  <a14:hiddenLine xmlns="" xmlns:a14="http://schemas.microsoft.com/office/drawing/2010/main" w="9525">
                     <a:solidFill>
                       <a:srgbClr val="000000"/>
                     </a:solidFill>
@@ -10720,7 +10721,7 @@
               </a:ln>
               <a:extLst>
                 <a:ext uri="{91240B29-F687-4f45-9708-019B960494DF}">
-                  <a14:hiddenLine xmlns:a14="http://schemas.microsoft.com/office/drawing/2010/main" xmlns="" w="9525">
+                  <a14:hiddenLine xmlns="" xmlns:a14="http://schemas.microsoft.com/office/drawing/2010/main" w="9525">
                     <a:solidFill>
                       <a:srgbClr val="000000"/>
                     </a:solidFill>
@@ -10754,7 +10755,7 @@
               </a:ln>
               <a:extLst>
                 <a:ext uri="{91240B29-F687-4f45-9708-019B960494DF}">
-                  <a14:hiddenLine xmlns:a14="http://schemas.microsoft.com/office/drawing/2010/main" xmlns="" w="9525">
+                  <a14:hiddenLine xmlns="" xmlns:a14="http://schemas.microsoft.com/office/drawing/2010/main" w="9525">
                     <a:solidFill>
                       <a:srgbClr val="000000"/>
                     </a:solidFill>
@@ -10819,7 +10820,7 @@
               </a:ln>
               <a:extLst>
                 <a:ext uri="{91240B29-F687-4f45-9708-019B960494DF}">
-                  <a14:hiddenLine xmlns:a14="http://schemas.microsoft.com/office/drawing/2010/main" xmlns="" w="9525">
+                  <a14:hiddenLine xmlns="" xmlns:a14="http://schemas.microsoft.com/office/drawing/2010/main" w="9525">
                     <a:solidFill>
                       <a:srgbClr val="000000"/>
                     </a:solidFill>
@@ -10909,7 +10910,7 @@
               </a:ln>
               <a:extLst>
                 <a:ext uri="{91240B29-F687-4f45-9708-019B960494DF}">
-                  <a14:hiddenLine xmlns:a14="http://schemas.microsoft.com/office/drawing/2010/main" xmlns="" w="9525">
+                  <a14:hiddenLine xmlns="" xmlns:a14="http://schemas.microsoft.com/office/drawing/2010/main" w="9525">
                     <a:solidFill>
                       <a:srgbClr val="000000"/>
                     </a:solidFill>
@@ -10971,7 +10972,7 @@
               </a:ln>
               <a:extLst>
                 <a:ext uri="{91240B29-F687-4f45-9708-019B960494DF}">
-                  <a14:hiddenLine xmlns:a14="http://schemas.microsoft.com/office/drawing/2010/main" xmlns="" w="9525">
+                  <a14:hiddenLine xmlns="" xmlns:a14="http://schemas.microsoft.com/office/drawing/2010/main" w="9525">
                     <a:solidFill>
                       <a:srgbClr val="000000"/>
                     </a:solidFill>
@@ -11061,7 +11062,7 @@
               </a:ln>
               <a:extLst>
                 <a:ext uri="{91240B29-F687-4f45-9708-019B960494DF}">
-                  <a14:hiddenLine xmlns:a14="http://schemas.microsoft.com/office/drawing/2010/main" xmlns="" w="9525">
+                  <a14:hiddenLine xmlns="" xmlns:a14="http://schemas.microsoft.com/office/drawing/2010/main" w="9525">
                     <a:solidFill>
                       <a:srgbClr val="000000"/>
                     </a:solidFill>
@@ -11126,7 +11127,7 @@
               </a:ln>
               <a:extLst>
                 <a:ext uri="{91240B29-F687-4f45-9708-019B960494DF}">
-                  <a14:hiddenLine xmlns:a14="http://schemas.microsoft.com/office/drawing/2010/main" xmlns="" w="9525">
+                  <a14:hiddenLine xmlns="" xmlns:a14="http://schemas.microsoft.com/office/drawing/2010/main" w="9525">
                     <a:solidFill>
                       <a:srgbClr val="000000"/>
                     </a:solidFill>
@@ -11188,7 +11189,7 @@
               </a:ln>
               <a:extLst>
                 <a:ext uri="{91240B29-F687-4f45-9708-019B960494DF}">
-                  <a14:hiddenLine xmlns:a14="http://schemas.microsoft.com/office/drawing/2010/main" xmlns="" w="9525">
+                  <a14:hiddenLine xmlns="" xmlns:a14="http://schemas.microsoft.com/office/drawing/2010/main" w="9525">
                     <a:solidFill>
                       <a:srgbClr val="000000"/>
                     </a:solidFill>
@@ -11278,7 +11279,7 @@
               </a:ln>
               <a:extLst>
                 <a:ext uri="{91240B29-F687-4f45-9708-019B960494DF}">
-                  <a14:hiddenLine xmlns:a14="http://schemas.microsoft.com/office/drawing/2010/main" xmlns="" w="9525">
+                  <a14:hiddenLine xmlns="" xmlns:a14="http://schemas.microsoft.com/office/drawing/2010/main" w="9525">
                     <a:solidFill>
                       <a:srgbClr val="000000"/>
                     </a:solidFill>
@@ -11368,7 +11369,7 @@
               </a:ln>
               <a:extLst>
                 <a:ext uri="{91240B29-F687-4f45-9708-019B960494DF}">
-                  <a14:hiddenLine xmlns:a14="http://schemas.microsoft.com/office/drawing/2010/main" xmlns="" w="9525">
+                  <a14:hiddenLine xmlns="" xmlns:a14="http://schemas.microsoft.com/office/drawing/2010/main" w="9525">
                     <a:solidFill>
                       <a:srgbClr val="000000"/>
                     </a:solidFill>
@@ -11433,7 +11434,7 @@
               </a:ln>
               <a:extLst>
                 <a:ext uri="{91240B29-F687-4f45-9708-019B960494DF}">
-                  <a14:hiddenLine xmlns:a14="http://schemas.microsoft.com/office/drawing/2010/main" xmlns="" w="9525">
+                  <a14:hiddenLine xmlns="" xmlns:a14="http://schemas.microsoft.com/office/drawing/2010/main" w="9525">
                     <a:solidFill>
                       <a:srgbClr val="000000"/>
                     </a:solidFill>
@@ -11553,7 +11554,7 @@
               </a:ln>
               <a:extLst>
                 <a:ext uri="{91240B29-F687-4f45-9708-019B960494DF}">
-                  <a14:hiddenLine xmlns:a14="http://schemas.microsoft.com/office/drawing/2010/main" xmlns="" w="9525">
+                  <a14:hiddenLine xmlns="" xmlns:a14="http://schemas.microsoft.com/office/drawing/2010/main" w="9525">
                     <a:solidFill>
                       <a:srgbClr val="000000"/>
                     </a:solidFill>
@@ -11634,7 +11635,7 @@
               </a:ln>
               <a:extLst>
                 <a:ext uri="{91240B29-F687-4f45-9708-019B960494DF}">
-                  <a14:hiddenLine xmlns:a14="http://schemas.microsoft.com/office/drawing/2010/main" xmlns="" w="9525">
+                  <a14:hiddenLine xmlns="" xmlns:a14="http://schemas.microsoft.com/office/drawing/2010/main" w="9525">
                     <a:solidFill>
                       <a:srgbClr val="000000"/>
                     </a:solidFill>
@@ -11749,7 +11750,7 @@
               </a:ln>
               <a:extLst>
                 <a:ext uri="{91240B29-F687-4f45-9708-019B960494DF}">
-                  <a14:hiddenLine xmlns:a14="http://schemas.microsoft.com/office/drawing/2010/main" xmlns="" w="9525">
+                  <a14:hiddenLine xmlns="" xmlns:a14="http://schemas.microsoft.com/office/drawing/2010/main" w="9525">
                     <a:solidFill>
                       <a:srgbClr val="000000"/>
                     </a:solidFill>
@@ -11839,7 +11840,7 @@
               </a:ln>
               <a:extLst>
                 <a:ext uri="{91240B29-F687-4f45-9708-019B960494DF}">
-                  <a14:hiddenLine xmlns:a14="http://schemas.microsoft.com/office/drawing/2010/main" xmlns="" w="9525">
+                  <a14:hiddenLine xmlns="" xmlns:a14="http://schemas.microsoft.com/office/drawing/2010/main" w="9525">
                     <a:solidFill>
                       <a:srgbClr val="000000"/>
                     </a:solidFill>
@@ -11904,7 +11905,7 @@
               </a:ln>
               <a:extLst>
                 <a:ext uri="{91240B29-F687-4f45-9708-019B960494DF}">
-                  <a14:hiddenLine xmlns:a14="http://schemas.microsoft.com/office/drawing/2010/main" xmlns="" w="9525">
+                  <a14:hiddenLine xmlns="" xmlns:a14="http://schemas.microsoft.com/office/drawing/2010/main" w="9525">
                     <a:solidFill>
                       <a:srgbClr val="000000"/>
                     </a:solidFill>
@@ -11994,7 +11995,7 @@
               </a:ln>
               <a:extLst>
                 <a:ext uri="{91240B29-F687-4f45-9708-019B960494DF}">
-                  <a14:hiddenLine xmlns:a14="http://schemas.microsoft.com/office/drawing/2010/main" xmlns="" w="9525">
+                  <a14:hiddenLine xmlns="" xmlns:a14="http://schemas.microsoft.com/office/drawing/2010/main" w="9525">
                     <a:solidFill>
                       <a:srgbClr val="000000"/>
                     </a:solidFill>
@@ -12062,7 +12063,7 @@
               </a:ln>
               <a:extLst>
                 <a:ext uri="{91240B29-F687-4f45-9708-019B960494DF}">
-                  <a14:hiddenLine xmlns:a14="http://schemas.microsoft.com/office/drawing/2010/main" xmlns="" w="9525">
+                  <a14:hiddenLine xmlns="" xmlns:a14="http://schemas.microsoft.com/office/drawing/2010/main" w="9525">
                     <a:solidFill>
                       <a:srgbClr val="000000"/>
                     </a:solidFill>
@@ -12152,7 +12153,7 @@
               </a:ln>
               <a:extLst>
                 <a:ext uri="{91240B29-F687-4f45-9708-019B960494DF}">
-                  <a14:hiddenLine xmlns:a14="http://schemas.microsoft.com/office/drawing/2010/main" xmlns="" w="9525">
+                  <a14:hiddenLine xmlns="" xmlns:a14="http://schemas.microsoft.com/office/drawing/2010/main" w="9525">
                     <a:solidFill>
                       <a:srgbClr val="000000"/>
                     </a:solidFill>
@@ -12220,7 +12221,7 @@
               </a:ln>
               <a:extLst>
                 <a:ext uri="{91240B29-F687-4f45-9708-019B960494DF}">
-                  <a14:hiddenLine xmlns:a14="http://schemas.microsoft.com/office/drawing/2010/main" xmlns="" w="9525">
+                  <a14:hiddenLine xmlns="" xmlns:a14="http://schemas.microsoft.com/office/drawing/2010/main" w="9525">
                     <a:solidFill>
                       <a:srgbClr val="000000"/>
                     </a:solidFill>
@@ -12310,7 +12311,7 @@
               </a:ln>
               <a:extLst>
                 <a:ext uri="{91240B29-F687-4f45-9708-019B960494DF}">
-                  <a14:hiddenLine xmlns:a14="http://schemas.microsoft.com/office/drawing/2010/main" xmlns="" w="9525">
+                  <a14:hiddenLine xmlns="" xmlns:a14="http://schemas.microsoft.com/office/drawing/2010/main" w="9525">
                     <a:solidFill>
                       <a:srgbClr val="000000"/>
                     </a:solidFill>
@@ -12344,7 +12345,7 @@
               </a:ln>
               <a:extLst>
                 <a:ext uri="{91240B29-F687-4f45-9708-019B960494DF}">
-                  <a14:hiddenLine xmlns:a14="http://schemas.microsoft.com/office/drawing/2010/main" xmlns="" w="9525">
+                  <a14:hiddenLine xmlns="" xmlns:a14="http://schemas.microsoft.com/office/drawing/2010/main" w="9525">
                     <a:solidFill>
                       <a:srgbClr val="000000"/>
                     </a:solidFill>
@@ -12484,7 +12485,7 @@
           <a:p>
             <a:fld id="{92FF8978-FE14-CC4A-93A6-934EB06543C0}" type="datetime1">
               <a:rPr lang="en-US" smtClean="0"/>
-              <a:t>10/22/26</a:t>
+              <a:t>10/27/26</a:t>
             </a:fld>
             <a:endParaRPr lang="en-US"/>
           </a:p>
@@ -16472,6 +16473,298 @@
   <p:cSld>
     <p:spTree>
       <p:nvGrpSpPr>
+        <p:cNvPr id="1" name="">
+          <a:extLst>
+            <a:ext uri="{FF2B5EF4-FFF2-40B4-BE49-F238E27FC236}">
+              <a16:creationId xmlns:a16="http://schemas.microsoft.com/office/drawing/2014/main" id="{EF9A13A2-92B5-1119-9B17-3598755EAA2B}"/>
+            </a:ext>
+          </a:extLst>
+        </p:cNvPr>
+        <p:cNvGrpSpPr/>
+        <p:nvPr/>
+      </p:nvGrpSpPr>
+      <p:grpSpPr>
+        <a:xfrm>
+          <a:off x="0" y="0"/>
+          <a:ext cx="0" cy="0"/>
+          <a:chOff x="0" y="0"/>
+          <a:chExt cx="0" cy="0"/>
+        </a:xfrm>
+      </p:grpSpPr>
+      <p:sp>
+        <p:nvSpPr>
+          <p:cNvPr id="6146" name="Rectangle 2">
+            <a:extLst>
+              <a:ext uri="{FF2B5EF4-FFF2-40B4-BE49-F238E27FC236}">
+                <a16:creationId xmlns:a16="http://schemas.microsoft.com/office/drawing/2014/main" id="{28B09F22-9EF3-8DC4-81D5-1EA0F5AC8599}"/>
+              </a:ext>
+            </a:extLst>
+          </p:cNvPr>
+          <p:cNvSpPr>
+            <a:spLocks noGrp="1" noChangeArrowheads="1"/>
+          </p:cNvSpPr>
+          <p:nvPr>
+            <p:ph type="title"/>
+            <p:custDataLst>
+              <p:tags r:id="rId1"/>
+            </p:custDataLst>
+          </p:nvPr>
+        </p:nvSpPr>
+        <p:spPr>
+          <a:xfrm>
+            <a:off x="1141413" y="284084"/>
+            <a:ext cx="9905998" cy="620791"/>
+          </a:xfrm>
+        </p:spPr>
+        <p:txBody>
+          <a:bodyPr/>
+          <a:lstStyle/>
+          <a:p>
+            <a:pPr algn="ctr"/>
+            <a:r>
+              <a:rPr lang="en-US" dirty="0"/>
+              <a:t>Lecture 18 - Tuesday, Oct. 27</a:t>
+            </a:r>
+          </a:p>
+        </p:txBody>
+      </p:sp>
+      <p:sp>
+        <p:nvSpPr>
+          <p:cNvPr id="6147" name="Rectangle 3">
+            <a:extLst>
+              <a:ext uri="{FF2B5EF4-FFF2-40B4-BE49-F238E27FC236}">
+                <a16:creationId xmlns:a16="http://schemas.microsoft.com/office/drawing/2014/main" id="{F92D55C4-DD3C-4706-DA16-B9A0E4DD13D3}"/>
+              </a:ext>
+            </a:extLst>
+          </p:cNvPr>
+          <p:cNvSpPr>
+            <a:spLocks noGrp="1" noChangeArrowheads="1"/>
+          </p:cNvSpPr>
+          <p:nvPr>
+            <p:ph idx="1"/>
+            <p:custDataLst>
+              <p:tags r:id="rId2"/>
+            </p:custDataLst>
+          </p:nvPr>
+        </p:nvSpPr>
+        <p:spPr>
+          <a:xfrm>
+            <a:off x="1294151" y="904876"/>
+            <a:ext cx="9600522" cy="5749924"/>
+          </a:xfrm>
+        </p:spPr>
+        <p:txBody>
+          <a:bodyPr>
+            <a:normAutofit fontScale="70000" lnSpcReduction="20000"/>
+          </a:bodyPr>
+          <a:lstStyle/>
+          <a:p>
+            <a:r>
+              <a:rPr lang="en-US" dirty="0">
+                <a:latin typeface="Arial" panose="020B0604020202020204" pitchFamily="34" charset="0"/>
+                <a:cs typeface="Arial" panose="020B0604020202020204" pitchFamily="34" charset="0"/>
+              </a:rPr>
+              <a:t>Please remember </a:t>
+            </a:r>
+            <a:r>
+              <a:rPr lang="en-US" b="1" i="1" u="sng" dirty="0">
+                <a:latin typeface="Arial" panose="020B0604020202020204" pitchFamily="34" charset="0"/>
+                <a:cs typeface="Arial" panose="020B0604020202020204" pitchFamily="34" charset="0"/>
+              </a:rPr>
+              <a:t>no laptops / phones</a:t>
+            </a:r>
+            <a:r>
+              <a:rPr lang="en-US" dirty="0">
+                <a:latin typeface="Arial" panose="020B0604020202020204" pitchFamily="34" charset="0"/>
+                <a:cs typeface="Arial" panose="020B0604020202020204" pitchFamily="34" charset="0"/>
+              </a:rPr>
+              <a:t> and </a:t>
+            </a:r>
+            <a:r>
+              <a:rPr lang="en-US" b="1" i="1" u="sng" dirty="0">
+                <a:latin typeface="Arial" panose="020B0604020202020204" pitchFamily="34" charset="0"/>
+                <a:cs typeface="Arial" panose="020B0604020202020204" pitchFamily="34" charset="0"/>
+              </a:rPr>
+              <a:t>attendance policy</a:t>
+            </a:r>
+            <a:endParaRPr lang="en-US" dirty="0">
+              <a:latin typeface="Arial" panose="020B0604020202020204" pitchFamily="34" charset="0"/>
+              <a:cs typeface="Arial" panose="020B0604020202020204" pitchFamily="34" charset="0"/>
+            </a:endParaRPr>
+          </a:p>
+          <a:p>
+            <a:r>
+              <a:rPr lang="en-US" dirty="0">
+                <a:latin typeface="Arial" panose="020B0604020202020204" pitchFamily="34" charset="0"/>
+                <a:cs typeface="Arial" panose="020B0604020202020204" pitchFamily="34" charset="0"/>
+              </a:rPr>
+              <a:t>October! Best month of the year! Woo!</a:t>
+            </a:r>
+          </a:p>
+          <a:p>
+            <a:r>
+              <a:rPr lang="en-US" dirty="0">
+                <a:latin typeface="Arial" panose="020B0604020202020204" pitchFamily="34" charset="0"/>
+                <a:cs typeface="Arial" panose="020B0604020202020204" pitchFamily="34" charset="0"/>
+              </a:rPr>
+              <a:t>This week:</a:t>
+            </a:r>
+          </a:p>
+          <a:p>
+            <a:pPr lvl="1"/>
+            <a:r>
+              <a:rPr lang="en-US" dirty="0">
+                <a:latin typeface="Arial" panose="020B0604020202020204" pitchFamily="34" charset="0"/>
+                <a:cs typeface="Arial" panose="020B0604020202020204" pitchFamily="34" charset="0"/>
+              </a:rPr>
+              <a:t>Homework 3 is due on Thursday! Good luck!</a:t>
+            </a:r>
+          </a:p>
+          <a:p>
+            <a:pPr lvl="1"/>
+            <a:r>
+              <a:rPr lang="en-US" dirty="0">
+                <a:latin typeface="Arial" panose="020B0604020202020204" pitchFamily="34" charset="0"/>
+                <a:cs typeface="Arial" panose="020B0604020202020204" pitchFamily="34" charset="0"/>
+              </a:rPr>
+              <a:t>I sent you some Turing Machine practice for the upcoming quiz 3. Make sure you do that.</a:t>
+            </a:r>
+          </a:p>
+          <a:p>
+            <a:r>
+              <a:rPr lang="en-US" dirty="0">
+                <a:latin typeface="Arial" panose="020B0604020202020204" pitchFamily="34" charset="0"/>
+                <a:cs typeface="Arial" panose="020B0604020202020204" pitchFamily="34" charset="0"/>
+              </a:rPr>
+              <a:t>Next two weeks:</a:t>
+            </a:r>
+          </a:p>
+          <a:p>
+            <a:pPr lvl="1"/>
+            <a:r>
+              <a:rPr lang="en-US" dirty="0">
+                <a:latin typeface="Arial" panose="020B0604020202020204" pitchFamily="34" charset="0"/>
+                <a:cs typeface="Arial" panose="020B0604020202020204" pitchFamily="34" charset="0"/>
+              </a:rPr>
+              <a:t>Nothing due next week (and no class on Tuesday = election day)</a:t>
+            </a:r>
+          </a:p>
+          <a:p>
+            <a:pPr lvl="1"/>
+            <a:r>
+              <a:rPr lang="en-US" dirty="0">
+                <a:latin typeface="Arial" panose="020B0604020202020204" pitchFamily="34" charset="0"/>
+                <a:cs typeface="Arial" panose="020B0604020202020204" pitchFamily="34" charset="0"/>
+              </a:rPr>
+              <a:t>Week after that is exam 3 (sorry I incorrectly said exam 3 was next week)</a:t>
+            </a:r>
+          </a:p>
+          <a:p>
+            <a:r>
+              <a:rPr lang="en-US" dirty="0">
+                <a:latin typeface="Arial" panose="020B0604020202020204" pitchFamily="34" charset="0"/>
+                <a:cs typeface="Arial" panose="020B0604020202020204" pitchFamily="34" charset="0"/>
+              </a:rPr>
+              <a:t>Grading</a:t>
+            </a:r>
+          </a:p>
+          <a:p>
+            <a:pPr lvl="1"/>
+            <a:r>
+              <a:rPr lang="en-US" dirty="0">
+                <a:latin typeface="Arial" panose="020B0604020202020204" pitchFamily="34" charset="0"/>
+                <a:cs typeface="Arial" panose="020B0604020202020204" pitchFamily="34" charset="0"/>
+              </a:rPr>
+              <a:t>Everything is graded right now. Hooray!</a:t>
+            </a:r>
+          </a:p>
+          <a:p>
+            <a:pPr lvl="1"/>
+            <a:r>
+              <a:rPr lang="en-US" dirty="0">
+                <a:latin typeface="Arial" panose="020B0604020202020204" pitchFamily="34" charset="0"/>
+                <a:cs typeface="Arial" panose="020B0604020202020204" pitchFamily="34" charset="0"/>
+              </a:rPr>
+              <a:t>Exam regrades? Come see me in person or email / visit Gustavo </a:t>
+            </a:r>
+          </a:p>
+          <a:p>
+            <a:r>
+              <a:rPr lang="en-US" dirty="0">
+                <a:latin typeface="Arial" panose="020B0604020202020204" pitchFamily="34" charset="0"/>
+                <a:cs typeface="Arial" panose="020B0604020202020204" pitchFamily="34" charset="0"/>
+              </a:rPr>
+              <a:t>OH Check-Ins</a:t>
+            </a:r>
+          </a:p>
+          <a:p>
+            <a:pPr lvl="1"/>
+            <a:r>
+              <a:rPr lang="en-US" dirty="0">
+                <a:latin typeface="Arial" panose="020B0604020202020204" pitchFamily="34" charset="0"/>
+                <a:cs typeface="Arial" panose="020B0604020202020204" pitchFamily="34" charset="0"/>
+              </a:rPr>
+              <a:t>Have started. This is week 3. Any issues so far?</a:t>
+            </a:r>
+          </a:p>
+          <a:p>
+            <a:pPr lvl="1"/>
+            <a:r>
+              <a:rPr lang="en-US" dirty="0">
+                <a:latin typeface="Arial" panose="020B0604020202020204" pitchFamily="34" charset="0"/>
+                <a:cs typeface="Arial" panose="020B0604020202020204" pitchFamily="34" charset="0"/>
+              </a:rPr>
+              <a:t>Elina will be sending out reminders. You need to not miss your scheduled time!</a:t>
+            </a:r>
+          </a:p>
+          <a:p>
+            <a:pPr lvl="1"/>
+            <a:r>
+              <a:rPr lang="en-US" dirty="0">
+                <a:latin typeface="Arial" panose="020B0604020202020204" pitchFamily="34" charset="0"/>
+                <a:cs typeface="Arial" panose="020B0604020202020204" pitchFamily="34" charset="0"/>
+              </a:rPr>
+              <a:t>If you need to change weeks for a legitimate reason, email Elina (our OH head TA)</a:t>
+            </a:r>
+          </a:p>
+          <a:p>
+            <a:r>
+              <a:rPr lang="en-US" dirty="0">
+                <a:latin typeface="Arial" panose="020B0604020202020204" pitchFamily="34" charset="0"/>
+                <a:cs typeface="Arial" panose="020B0604020202020204" pitchFamily="34" charset="0"/>
+              </a:rPr>
+              <a:t>These slides are linked on the course webpage “slides” page.</a:t>
+            </a:r>
+          </a:p>
+          <a:p>
+            <a:r>
+              <a:rPr lang="en-US" dirty="0">
+                <a:latin typeface="Arial" panose="020B0604020202020204" pitchFamily="34" charset="0"/>
+                <a:cs typeface="Arial" panose="020B0604020202020204" pitchFamily="34" charset="0"/>
+              </a:rPr>
+              <a:t>Today we will finish Module 3 – Turing Machines.</a:t>
+            </a:r>
+          </a:p>
+        </p:txBody>
+      </p:sp>
+    </p:spTree>
+    <p:extLst>
+      <p:ext uri="{BB962C8B-B14F-4D97-AF65-F5344CB8AC3E}">
+        <p14:creationId xmlns:p14="http://schemas.microsoft.com/office/powerpoint/2010/main" val="1367325135"/>
+      </p:ext>
+    </p:extLst>
+  </p:cSld>
+  <p:clrMapOvr>
+    <a:masterClrMapping/>
+  </p:clrMapOvr>
+</p:sld>
+</file>
+
+<file path=ppt/slides/slide23.xml><?xml version="1.0" encoding="utf-8"?>
+<p:sld xmlns:a="http://schemas.openxmlformats.org/drawingml/2006/main" xmlns:r="http://schemas.openxmlformats.org/officeDocument/2006/relationships" xmlns:p="http://schemas.openxmlformats.org/presentationml/2006/main">
+  <p:cSld>
+    <p:spTree>
+      <p:nvGrpSpPr>
         <p:cNvPr id="1" name=""/>
         <p:cNvGrpSpPr/>
         <p:nvPr/>
@@ -16808,7 +17101,7 @@
           <p:nvPr>
             <p:extLst>
               <p:ext uri="{D42A27DB-BD31-4B8C-83A1-F6EECF244321}">
-                <p14:modId xmlns:p14="http://schemas.microsoft.com/office/powerpoint/2010/main" val="648078317"/>
+                <p14:modId xmlns:p14="http://schemas.microsoft.com/office/powerpoint/2010/main" val="2763229407"/>
               </p:ext>
             </p:extLst>
           </p:nvPr>
@@ -16904,7 +17197,7 @@
                       <a:pPr algn="ctr"/>
                       <a:r>
                         <a:rPr lang="en-US" i="0" dirty="0"/>
-                        <a:t>15</a:t>
+                        <a:t>16</a:t>
                       </a:r>
                     </a:p>
                   </a:txBody>
@@ -16918,7 +17211,7 @@
                       <a:pPr algn="ctr"/>
                       <a:r>
                         <a:rPr lang="en-US" i="0" dirty="0"/>
-                        <a:t>16</a:t>
+                        <a:t>17</a:t>
                       </a:r>
                     </a:p>
                   </a:txBody>
@@ -16932,7 +17225,7 @@
                       <a:pPr algn="ctr"/>
                       <a:r>
                         <a:rPr lang="en-US" b="1" i="0" dirty="0"/>
-                        <a:t>93.8%</a:t>
+                        <a:t>94.1%</a:t>
                       </a:r>
                     </a:p>
                   </a:txBody>
@@ -17763,7 +18056,7 @@
           <p:nvPr>
             <p:extLst>
               <p:ext uri="{D42A27DB-BD31-4B8C-83A1-F6EECF244321}">
-                <p14:modId xmlns:p14="http://schemas.microsoft.com/office/powerpoint/2010/main" val="3376121299"/>
+                <p14:modId xmlns:p14="http://schemas.microsoft.com/office/powerpoint/2010/main" val="4152426745"/>
               </p:ext>
             </p:extLst>
           </p:nvPr>
@@ -17859,7 +18152,7 @@
                       <a:pPr algn="ctr"/>
                       <a:r>
                         <a:rPr lang="en-US" i="0" dirty="0"/>
-                        <a:t>9</a:t>
+                        <a:t>10</a:t>
                       </a:r>
                     </a:p>
                   </a:txBody>
@@ -17873,7 +18166,7 @@
                       <a:pPr algn="ctr"/>
                       <a:r>
                         <a:rPr lang="en-US" i="0" dirty="0"/>
-                        <a:t>9</a:t>
+                        <a:t>10</a:t>
                       </a:r>
                     </a:p>
                   </a:txBody>
@@ -18151,7 +18444,7 @@
           <p:nvPr>
             <p:extLst>
               <p:ext uri="{D42A27DB-BD31-4B8C-83A1-F6EECF244321}">
-                <p14:modId xmlns:p14="http://schemas.microsoft.com/office/powerpoint/2010/main" val="746819299"/>
+                <p14:modId xmlns:p14="http://schemas.microsoft.com/office/powerpoint/2010/main" val="4215351776"/>
               </p:ext>
             </p:extLst>
           </p:nvPr>
@@ -18247,7 +18540,7 @@
                       <a:pPr algn="ctr"/>
                       <a:r>
                         <a:rPr lang="en-US" i="0" dirty="0"/>
-                        <a:t>16</a:t>
+                        <a:t>17</a:t>
                       </a:r>
                     </a:p>
                   </a:txBody>
@@ -18261,7 +18554,7 @@
                       <a:pPr algn="ctr"/>
                       <a:r>
                         <a:rPr lang="en-US" i="0" dirty="0"/>
-                        <a:t>16</a:t>
+                        <a:t>17</a:t>
                       </a:r>
                     </a:p>
                   </a:txBody>
@@ -18532,7 +18825,7 @@
           <p:nvPr>
             <p:extLst>
               <p:ext uri="{D42A27DB-BD31-4B8C-83A1-F6EECF244321}">
-                <p14:modId xmlns:p14="http://schemas.microsoft.com/office/powerpoint/2010/main" val="3922045450"/>
+                <p14:modId xmlns:p14="http://schemas.microsoft.com/office/powerpoint/2010/main" val="939349229"/>
               </p:ext>
             </p:extLst>
           </p:nvPr>
@@ -18628,7 +18921,7 @@
                       <a:pPr algn="ctr"/>
                       <a:r>
                         <a:rPr lang="en-US" i="0" dirty="0"/>
-                        <a:t>9</a:t>
+                        <a:t>10</a:t>
                       </a:r>
                     </a:p>
                   </a:txBody>
@@ -18642,7 +18935,7 @@
                       <a:pPr algn="ctr"/>
                       <a:r>
                         <a:rPr lang="en-US" i="0" dirty="0"/>
-                        <a:t>9</a:t>
+                        <a:t>10</a:t>
                       </a:r>
                     </a:p>
                   </a:txBody>
@@ -20746,6 +21039,18 @@
 </file>
 
 <file path=ppt/tags/tag46.xml><?xml version="1.0" encoding="utf-8"?>
+<p:tagLst xmlns:a="http://schemas.openxmlformats.org/drawingml/2006/main" xmlns:r="http://schemas.openxmlformats.org/officeDocument/2006/relationships" xmlns:p="http://schemas.openxmlformats.org/presentationml/2006/main">
+  <p:tag name="_INSTRUCTOR VIEW19C14C36-AC8E-43BC-9DB6-C2AAF774C7DC|PANE__TAG" val="_"/>
+</p:tagLst>
+</file>
+
+<file path=ppt/tags/tag47.xml><?xml version="1.0" encoding="utf-8"?>
+<p:tagLst xmlns:a="http://schemas.openxmlformats.org/drawingml/2006/main" xmlns:r="http://schemas.openxmlformats.org/officeDocument/2006/relationships" xmlns:p="http://schemas.openxmlformats.org/presentationml/2006/main">
+  <p:tag name="_INSTRUCTOR VIEW19C14C36-AC8E-43BC-9DB6-C2AAF774C7DC|PANE__TAG" val="_"/>
+</p:tagLst>
+</file>
+
+<file path=ppt/tags/tag48.xml><?xml version="1.0" encoding="utf-8"?>
 <p:tagLst xmlns:a="http://schemas.openxmlformats.org/drawingml/2006/main" xmlns:r="http://schemas.openxmlformats.org/officeDocument/2006/relationships" xmlns:p="http://schemas.openxmlformats.org/presentationml/2006/main">
   <p:tag name="_INSTRUCTOR VIEW19C14C36-AC8E-43BC-9DB6-C2AAF774C7DC|PANE__TAG" val="_"/>
 </p:tagLst>

--- a/slides/00-DailyAnnouncements.pptx
+++ b/slides/00-DailyAnnouncements.pptx
@@ -5,7 +5,7 @@
     <p:sldMasterId id="2147484006" r:id="rId1"/>
   </p:sldMasterIdLst>
   <p:notesMasterIdLst>
-    <p:notesMasterId r:id="rId25"/>
+    <p:notesMasterId r:id="rId26"/>
   </p:notesMasterIdLst>
   <p:sldIdLst>
     <p:sldId id="256" r:id="rId2"/>
@@ -30,7 +30,8 @@
     <p:sldId id="533" r:id="rId21"/>
     <p:sldId id="534" r:id="rId22"/>
     <p:sldId id="535" r:id="rId23"/>
-    <p:sldId id="515" r:id="rId24"/>
+    <p:sldId id="536" r:id="rId24"/>
+    <p:sldId id="515" r:id="rId25"/>
   </p:sldIdLst>
   <p:sldSz cx="12192000" cy="6858000"/>
   <p:notesSz cx="6858000" cy="9144000"/>
@@ -219,7 +220,7 @@
           <a:p>
             <a:fld id="{C5B45307-6ED4-B142-BD64-10F739779302}" type="datetimeFigureOut">
               <a:rPr lang="en-US" smtClean="0"/>
-              <a:t>10/27/26</a:t>
+              <a:t>10/29/26</a:t>
             </a:fld>
             <a:endParaRPr lang="en-US"/>
           </a:p>
@@ -627,7 +628,7 @@
           <a:noFill/>
           <a:extLst>
             <a:ext uri="{909E8E84-426E-40dd-AFC4-6F175D3DCCD1}">
-              <a14:hiddenFill xmlns="" xmlns:a14="http://schemas.microsoft.com/office/drawing/2010/main">
+              <a14:hiddenFill xmlns:a14="http://schemas.microsoft.com/office/drawing/2010/main" xmlns="">
                 <a:solidFill>
                   <a:srgbClr val="FFFFFF"/>
                 </a:solidFill>
@@ -686,7 +687,7 @@
             </a:ln>
             <a:extLst>
               <a:ext uri="{91240B29-F687-4f45-9708-019B960494DF}">
-                <a14:hiddenLine xmlns="" xmlns:a14="http://schemas.microsoft.com/office/drawing/2010/main" w="9525">
+                <a14:hiddenLine xmlns:a14="http://schemas.microsoft.com/office/drawing/2010/main" xmlns="" w="9525">
                   <a:solidFill>
                     <a:srgbClr val="000000"/>
                   </a:solidFill>
@@ -776,7 +777,7 @@
             </a:ln>
             <a:extLst>
               <a:ext uri="{91240B29-F687-4f45-9708-019B960494DF}">
-                <a14:hiddenLine xmlns="" xmlns:a14="http://schemas.microsoft.com/office/drawing/2010/main" w="9525">
+                <a14:hiddenLine xmlns:a14="http://schemas.microsoft.com/office/drawing/2010/main" xmlns="" w="9525">
                   <a:solidFill>
                     <a:srgbClr val="000000"/>
                   </a:solidFill>
@@ -866,7 +867,7 @@
             </a:ln>
             <a:extLst>
               <a:ext uri="{91240B29-F687-4f45-9708-019B960494DF}">
-                <a14:hiddenLine xmlns="" xmlns:a14="http://schemas.microsoft.com/office/drawing/2010/main" w="9525">
+                <a14:hiddenLine xmlns:a14="http://schemas.microsoft.com/office/drawing/2010/main" xmlns="" w="9525">
                   <a:solidFill>
                     <a:srgbClr val="000000"/>
                   </a:solidFill>
@@ -900,7 +901,7 @@
             </a:ln>
             <a:extLst>
               <a:ext uri="{91240B29-F687-4f45-9708-019B960494DF}">
-                <a14:hiddenLine xmlns="" xmlns:a14="http://schemas.microsoft.com/office/drawing/2010/main" w="9525">
+                <a14:hiddenLine xmlns:a14="http://schemas.microsoft.com/office/drawing/2010/main" xmlns="" w="9525">
                   <a:solidFill>
                     <a:srgbClr val="000000"/>
                   </a:solidFill>
@@ -990,7 +991,7 @@
             </a:ln>
             <a:extLst>
               <a:ext uri="{91240B29-F687-4f45-9708-019B960494DF}">
-                <a14:hiddenLine xmlns="" xmlns:a14="http://schemas.microsoft.com/office/drawing/2010/main" w="9525">
+                <a14:hiddenLine xmlns:a14="http://schemas.microsoft.com/office/drawing/2010/main" xmlns="" w="9525">
                   <a:solidFill>
                     <a:srgbClr val="000000"/>
                   </a:solidFill>
@@ -1052,7 +1053,7 @@
             </a:ln>
             <a:extLst>
               <a:ext uri="{91240B29-F687-4f45-9708-019B960494DF}">
-                <a14:hiddenLine xmlns="" xmlns:a14="http://schemas.microsoft.com/office/drawing/2010/main" w="9525">
+                <a14:hiddenLine xmlns:a14="http://schemas.microsoft.com/office/drawing/2010/main" xmlns="" w="9525">
                   <a:solidFill>
                     <a:srgbClr val="000000"/>
                   </a:solidFill>
@@ -1114,7 +1115,7 @@
             </a:ln>
             <a:extLst>
               <a:ext uri="{91240B29-F687-4f45-9708-019B960494DF}">
-                <a14:hiddenLine xmlns="" xmlns:a14="http://schemas.microsoft.com/office/drawing/2010/main" w="9525">
+                <a14:hiddenLine xmlns:a14="http://schemas.microsoft.com/office/drawing/2010/main" xmlns="" w="9525">
                   <a:solidFill>
                     <a:srgbClr val="000000"/>
                   </a:solidFill>
@@ -1204,7 +1205,7 @@
             </a:ln>
             <a:extLst>
               <a:ext uri="{91240B29-F687-4f45-9708-019B960494DF}">
-                <a14:hiddenLine xmlns="" xmlns:a14="http://schemas.microsoft.com/office/drawing/2010/main" w="9525">
+                <a14:hiddenLine xmlns:a14="http://schemas.microsoft.com/office/drawing/2010/main" xmlns="" w="9525">
                   <a:solidFill>
                     <a:srgbClr val="000000"/>
                   </a:solidFill>
@@ -1266,7 +1267,7 @@
             </a:ln>
             <a:extLst>
               <a:ext uri="{91240B29-F687-4f45-9708-019B960494DF}">
-                <a14:hiddenLine xmlns="" xmlns:a14="http://schemas.microsoft.com/office/drawing/2010/main" w="9525">
+                <a14:hiddenLine xmlns:a14="http://schemas.microsoft.com/office/drawing/2010/main" xmlns="" w="9525">
                   <a:solidFill>
                     <a:srgbClr val="000000"/>
                   </a:solidFill>
@@ -1328,7 +1329,7 @@
             </a:ln>
             <a:extLst>
               <a:ext uri="{91240B29-F687-4f45-9708-019B960494DF}">
-                <a14:hiddenLine xmlns="" xmlns:a14="http://schemas.microsoft.com/office/drawing/2010/main" w="9525">
+                <a14:hiddenLine xmlns:a14="http://schemas.microsoft.com/office/drawing/2010/main" xmlns="" w="9525">
                   <a:solidFill>
                     <a:srgbClr val="000000"/>
                   </a:solidFill>
@@ -1418,7 +1419,7 @@
             </a:ln>
             <a:extLst>
               <a:ext uri="{91240B29-F687-4f45-9708-019B960494DF}">
-                <a14:hiddenLine xmlns="" xmlns:a14="http://schemas.microsoft.com/office/drawing/2010/main" w="9525">
+                <a14:hiddenLine xmlns:a14="http://schemas.microsoft.com/office/drawing/2010/main" xmlns="" w="9525">
                   <a:solidFill>
                     <a:srgbClr val="000000"/>
                   </a:solidFill>
@@ -1508,7 +1509,7 @@
             </a:ln>
             <a:extLst>
               <a:ext uri="{91240B29-F687-4f45-9708-019B960494DF}">
-                <a14:hiddenLine xmlns="" xmlns:a14="http://schemas.microsoft.com/office/drawing/2010/main" w="9525">
+                <a14:hiddenLine xmlns:a14="http://schemas.microsoft.com/office/drawing/2010/main" xmlns="" w="9525">
                   <a:solidFill>
                     <a:srgbClr val="000000"/>
                   </a:solidFill>
@@ -1570,7 +1571,7 @@
             </a:ln>
             <a:extLst>
               <a:ext uri="{91240B29-F687-4f45-9708-019B960494DF}">
-                <a14:hiddenLine xmlns="" xmlns:a14="http://schemas.microsoft.com/office/drawing/2010/main" w="9525">
+                <a14:hiddenLine xmlns:a14="http://schemas.microsoft.com/office/drawing/2010/main" xmlns="" w="9525">
                   <a:solidFill>
                     <a:srgbClr val="000000"/>
                   </a:solidFill>
@@ -1680,7 +1681,7 @@
             </a:ln>
             <a:extLst>
               <a:ext uri="{91240B29-F687-4f45-9708-019B960494DF}">
-                <a14:hiddenLine xmlns="" xmlns:a14="http://schemas.microsoft.com/office/drawing/2010/main" w="9525">
+                <a14:hiddenLine xmlns:a14="http://schemas.microsoft.com/office/drawing/2010/main" xmlns="" w="9525">
                   <a:solidFill>
                     <a:srgbClr val="000000"/>
                   </a:solidFill>
@@ -1742,7 +1743,7 @@
             </a:ln>
             <a:extLst>
               <a:ext uri="{91240B29-F687-4f45-9708-019B960494DF}">
-                <a14:hiddenLine xmlns="" xmlns:a14="http://schemas.microsoft.com/office/drawing/2010/main" w="9525">
+                <a14:hiddenLine xmlns:a14="http://schemas.microsoft.com/office/drawing/2010/main" xmlns="" w="9525">
                   <a:solidFill>
                     <a:srgbClr val="000000"/>
                   </a:solidFill>
@@ -1832,7 +1833,7 @@
             </a:ln>
             <a:extLst>
               <a:ext uri="{91240B29-F687-4f45-9708-019B960494DF}">
-                <a14:hiddenLine xmlns="" xmlns:a14="http://schemas.microsoft.com/office/drawing/2010/main" w="9525">
+                <a14:hiddenLine xmlns:a14="http://schemas.microsoft.com/office/drawing/2010/main" xmlns="" w="9525">
                   <a:solidFill>
                     <a:srgbClr val="000000"/>
                   </a:solidFill>
@@ -1922,7 +1923,7 @@
             </a:ln>
             <a:extLst>
               <a:ext uri="{91240B29-F687-4f45-9708-019B960494DF}">
-                <a14:hiddenLine xmlns="" xmlns:a14="http://schemas.microsoft.com/office/drawing/2010/main" w="9525">
+                <a14:hiddenLine xmlns:a14="http://schemas.microsoft.com/office/drawing/2010/main" xmlns="" w="9525">
                   <a:solidFill>
                     <a:srgbClr val="000000"/>
                   </a:solidFill>
@@ -1984,7 +1985,7 @@
             </a:ln>
             <a:extLst>
               <a:ext uri="{91240B29-F687-4f45-9708-019B960494DF}">
-                <a14:hiddenLine xmlns="" xmlns:a14="http://schemas.microsoft.com/office/drawing/2010/main" w="9525">
+                <a14:hiddenLine xmlns:a14="http://schemas.microsoft.com/office/drawing/2010/main" xmlns="" w="9525">
                   <a:solidFill>
                     <a:srgbClr val="000000"/>
                   </a:solidFill>
@@ -2074,7 +2075,7 @@
             </a:ln>
             <a:extLst>
               <a:ext uri="{91240B29-F687-4f45-9708-019B960494DF}">
-                <a14:hiddenLine xmlns="" xmlns:a14="http://schemas.microsoft.com/office/drawing/2010/main" w="9525">
+                <a14:hiddenLine xmlns:a14="http://schemas.microsoft.com/office/drawing/2010/main" xmlns="" w="9525">
                   <a:solidFill>
                     <a:srgbClr val="000000"/>
                   </a:solidFill>
@@ -2164,7 +2165,7 @@
             </a:ln>
             <a:extLst>
               <a:ext uri="{91240B29-F687-4f45-9708-019B960494DF}">
-                <a14:hiddenLine xmlns="" xmlns:a14="http://schemas.microsoft.com/office/drawing/2010/main" w="9525">
+                <a14:hiddenLine xmlns:a14="http://schemas.microsoft.com/office/drawing/2010/main" xmlns="" w="9525">
                   <a:solidFill>
                     <a:srgbClr val="000000"/>
                   </a:solidFill>
@@ -2220,7 +2221,7 @@
             </a:ln>
             <a:extLst>
               <a:ext uri="{91240B29-F687-4f45-9708-019B960494DF}">
-                <a14:hiddenLine xmlns="" xmlns:a14="http://schemas.microsoft.com/office/drawing/2010/main" w="9525">
+                <a14:hiddenLine xmlns:a14="http://schemas.microsoft.com/office/drawing/2010/main" xmlns="" w="9525">
                   <a:solidFill>
                     <a:srgbClr val="000000"/>
                   </a:solidFill>
@@ -2310,7 +2311,7 @@
             </a:ln>
             <a:extLst>
               <a:ext uri="{91240B29-F687-4f45-9708-019B960494DF}">
-                <a14:hiddenLine xmlns="" xmlns:a14="http://schemas.microsoft.com/office/drawing/2010/main" w="9525">
+                <a14:hiddenLine xmlns:a14="http://schemas.microsoft.com/office/drawing/2010/main" xmlns="" w="9525">
                   <a:solidFill>
                     <a:srgbClr val="000000"/>
                   </a:solidFill>
@@ -2366,7 +2367,7 @@
             </a:ln>
             <a:extLst>
               <a:ext uri="{91240B29-F687-4f45-9708-019B960494DF}">
-                <a14:hiddenLine xmlns="" xmlns:a14="http://schemas.microsoft.com/office/drawing/2010/main" w="9525">
+                <a14:hiddenLine xmlns:a14="http://schemas.microsoft.com/office/drawing/2010/main" xmlns="" w="9525">
                   <a:solidFill>
                     <a:srgbClr val="000000"/>
                   </a:solidFill>
@@ -2456,7 +2457,7 @@
             </a:ln>
             <a:extLst>
               <a:ext uri="{91240B29-F687-4f45-9708-019B960494DF}">
-                <a14:hiddenLine xmlns="" xmlns:a14="http://schemas.microsoft.com/office/drawing/2010/main" w="9525">
+                <a14:hiddenLine xmlns:a14="http://schemas.microsoft.com/office/drawing/2010/main" xmlns="" w="9525">
                   <a:solidFill>
                     <a:srgbClr val="000000"/>
                   </a:solidFill>
@@ -2524,7 +2525,7 @@
             </a:ln>
             <a:extLst>
               <a:ext uri="{91240B29-F687-4f45-9708-019B960494DF}">
-                <a14:hiddenLine xmlns="" xmlns:a14="http://schemas.microsoft.com/office/drawing/2010/main" w="9525">
+                <a14:hiddenLine xmlns:a14="http://schemas.microsoft.com/office/drawing/2010/main" xmlns="" w="9525">
                   <a:solidFill>
                     <a:srgbClr val="000000"/>
                   </a:solidFill>
@@ -2614,7 +2615,7 @@
             </a:ln>
             <a:extLst>
               <a:ext uri="{91240B29-F687-4f45-9708-019B960494DF}">
-                <a14:hiddenLine xmlns="" xmlns:a14="http://schemas.microsoft.com/office/drawing/2010/main" w="9525">
+                <a14:hiddenLine xmlns:a14="http://schemas.microsoft.com/office/drawing/2010/main" xmlns="" w="9525">
                   <a:solidFill>
                     <a:srgbClr val="000000"/>
                   </a:solidFill>
@@ -2682,7 +2683,7 @@
             </a:ln>
             <a:extLst>
               <a:ext uri="{91240B29-F687-4f45-9708-019B960494DF}">
-                <a14:hiddenLine xmlns="" xmlns:a14="http://schemas.microsoft.com/office/drawing/2010/main" w="9525">
+                <a14:hiddenLine xmlns:a14="http://schemas.microsoft.com/office/drawing/2010/main" xmlns="" w="9525">
                   <a:solidFill>
                     <a:srgbClr val="000000"/>
                   </a:solidFill>
@@ -2772,7 +2773,7 @@
             </a:ln>
             <a:extLst>
               <a:ext uri="{91240B29-F687-4f45-9708-019B960494DF}">
-                <a14:hiddenLine xmlns="" xmlns:a14="http://schemas.microsoft.com/office/drawing/2010/main" w="9525">
+                <a14:hiddenLine xmlns:a14="http://schemas.microsoft.com/office/drawing/2010/main" xmlns="" w="9525">
                   <a:solidFill>
                     <a:srgbClr val="000000"/>
                   </a:solidFill>
@@ -2806,7 +2807,7 @@
             </a:ln>
             <a:extLst>
               <a:ext uri="{91240B29-F687-4f45-9708-019B960494DF}">
-                <a14:hiddenLine xmlns="" xmlns:a14="http://schemas.microsoft.com/office/drawing/2010/main" w="9525">
+                <a14:hiddenLine xmlns:a14="http://schemas.microsoft.com/office/drawing/2010/main" xmlns="" w="9525">
                   <a:solidFill>
                     <a:srgbClr val="000000"/>
                   </a:solidFill>
@@ -2896,7 +2897,7 @@
             </a:ln>
             <a:extLst>
               <a:ext uri="{91240B29-F687-4f45-9708-019B960494DF}">
-                <a14:hiddenLine xmlns="" xmlns:a14="http://schemas.microsoft.com/office/drawing/2010/main" w="9525">
+                <a14:hiddenLine xmlns:a14="http://schemas.microsoft.com/office/drawing/2010/main" xmlns="" w="9525">
                   <a:solidFill>
                     <a:srgbClr val="000000"/>
                   </a:solidFill>
@@ -2958,7 +2959,7 @@
             </a:ln>
             <a:extLst>
               <a:ext uri="{91240B29-F687-4f45-9708-019B960494DF}">
-                <a14:hiddenLine xmlns="" xmlns:a14="http://schemas.microsoft.com/office/drawing/2010/main" w="9525">
+                <a14:hiddenLine xmlns:a14="http://schemas.microsoft.com/office/drawing/2010/main" xmlns="" w="9525">
                   <a:solidFill>
                     <a:srgbClr val="000000"/>
                   </a:solidFill>
@@ -3020,7 +3021,7 @@
             </a:ln>
             <a:extLst>
               <a:ext uri="{91240B29-F687-4f45-9708-019B960494DF}">
-                <a14:hiddenLine xmlns="" xmlns:a14="http://schemas.microsoft.com/office/drawing/2010/main" w="9525">
+                <a14:hiddenLine xmlns:a14="http://schemas.microsoft.com/office/drawing/2010/main" xmlns="" w="9525">
                   <a:solidFill>
                     <a:srgbClr val="000000"/>
                   </a:solidFill>
@@ -3110,7 +3111,7 @@
             </a:ln>
             <a:extLst>
               <a:ext uri="{91240B29-F687-4f45-9708-019B960494DF}">
-                <a14:hiddenLine xmlns="" xmlns:a14="http://schemas.microsoft.com/office/drawing/2010/main" w="9525">
+                <a14:hiddenLine xmlns:a14="http://schemas.microsoft.com/office/drawing/2010/main" xmlns="" w="9525">
                   <a:solidFill>
                     <a:srgbClr val="000000"/>
                   </a:solidFill>
@@ -3178,7 +3179,7 @@
             </a:ln>
             <a:extLst>
               <a:ext uri="{91240B29-F687-4f45-9708-019B960494DF}">
-                <a14:hiddenLine xmlns="" xmlns:a14="http://schemas.microsoft.com/office/drawing/2010/main" w="9525">
+                <a14:hiddenLine xmlns:a14="http://schemas.microsoft.com/office/drawing/2010/main" xmlns="" w="9525">
                   <a:solidFill>
                     <a:srgbClr val="000000"/>
                   </a:solidFill>
@@ -3240,7 +3241,7 @@
             </a:ln>
             <a:extLst>
               <a:ext uri="{91240B29-F687-4f45-9708-019B960494DF}">
-                <a14:hiddenLine xmlns="" xmlns:a14="http://schemas.microsoft.com/office/drawing/2010/main" w="9525">
+                <a14:hiddenLine xmlns:a14="http://schemas.microsoft.com/office/drawing/2010/main" xmlns="" w="9525">
                   <a:solidFill>
                     <a:srgbClr val="000000"/>
                   </a:solidFill>
@@ -3330,7 +3331,7 @@
             </a:ln>
             <a:extLst>
               <a:ext uri="{91240B29-F687-4f45-9708-019B960494DF}">
-                <a14:hiddenLine xmlns="" xmlns:a14="http://schemas.microsoft.com/office/drawing/2010/main" w="9525">
+                <a14:hiddenLine xmlns:a14="http://schemas.microsoft.com/office/drawing/2010/main" xmlns="" w="9525">
                   <a:solidFill>
                     <a:srgbClr val="000000"/>
                   </a:solidFill>
@@ -3392,7 +3393,7 @@
             </a:ln>
             <a:extLst>
               <a:ext uri="{91240B29-F687-4f45-9708-019B960494DF}">
-                <a14:hiddenLine xmlns="" xmlns:a14="http://schemas.microsoft.com/office/drawing/2010/main" w="9525">
+                <a14:hiddenLine xmlns:a14="http://schemas.microsoft.com/office/drawing/2010/main" xmlns="" w="9525">
                   <a:solidFill>
                     <a:srgbClr val="000000"/>
                   </a:solidFill>
@@ -3482,7 +3483,7 @@
             </a:ln>
             <a:extLst>
               <a:ext uri="{91240B29-F687-4f45-9708-019B960494DF}">
-                <a14:hiddenLine xmlns="" xmlns:a14="http://schemas.microsoft.com/office/drawing/2010/main" w="9525">
+                <a14:hiddenLine xmlns:a14="http://schemas.microsoft.com/office/drawing/2010/main" xmlns="" w="9525">
                   <a:solidFill>
                     <a:srgbClr val="000000"/>
                   </a:solidFill>
@@ -3544,7 +3545,7 @@
             </a:ln>
             <a:extLst>
               <a:ext uri="{91240B29-F687-4f45-9708-019B960494DF}">
-                <a14:hiddenLine xmlns="" xmlns:a14="http://schemas.microsoft.com/office/drawing/2010/main" w="9525">
+                <a14:hiddenLine xmlns:a14="http://schemas.microsoft.com/office/drawing/2010/main" xmlns="" w="9525">
                   <a:solidFill>
                     <a:srgbClr val="000000"/>
                   </a:solidFill>
@@ -3634,7 +3635,7 @@
             </a:ln>
             <a:extLst>
               <a:ext uri="{91240B29-F687-4f45-9708-019B960494DF}">
-                <a14:hiddenLine xmlns="" xmlns:a14="http://schemas.microsoft.com/office/drawing/2010/main" w="9525">
+                <a14:hiddenLine xmlns:a14="http://schemas.microsoft.com/office/drawing/2010/main" xmlns="" w="9525">
                   <a:solidFill>
                     <a:srgbClr val="000000"/>
                   </a:solidFill>
@@ -3668,7 +3669,7 @@
             </a:ln>
             <a:extLst>
               <a:ext uri="{91240B29-F687-4f45-9708-019B960494DF}">
-                <a14:hiddenLine xmlns="" xmlns:a14="http://schemas.microsoft.com/office/drawing/2010/main" w="9525">
+                <a14:hiddenLine xmlns:a14="http://schemas.microsoft.com/office/drawing/2010/main" xmlns="" w="9525">
                   <a:solidFill>
                     <a:srgbClr val="000000"/>
                   </a:solidFill>
@@ -3733,7 +3734,7 @@
             </a:ln>
             <a:extLst>
               <a:ext uri="{91240B29-F687-4f45-9708-019B960494DF}">
-                <a14:hiddenLine xmlns="" xmlns:a14="http://schemas.microsoft.com/office/drawing/2010/main" w="9525">
+                <a14:hiddenLine xmlns:a14="http://schemas.microsoft.com/office/drawing/2010/main" xmlns="" w="9525">
                   <a:solidFill>
                     <a:srgbClr val="000000"/>
                   </a:solidFill>
@@ -3823,7 +3824,7 @@
             </a:ln>
             <a:extLst>
               <a:ext uri="{91240B29-F687-4f45-9708-019B960494DF}">
-                <a14:hiddenLine xmlns="" xmlns:a14="http://schemas.microsoft.com/office/drawing/2010/main" w="9525">
+                <a14:hiddenLine xmlns:a14="http://schemas.microsoft.com/office/drawing/2010/main" xmlns="" w="9525">
                   <a:solidFill>
                     <a:srgbClr val="000000"/>
                   </a:solidFill>
@@ -3885,7 +3886,7 @@
             </a:ln>
             <a:extLst>
               <a:ext uri="{91240B29-F687-4f45-9708-019B960494DF}">
-                <a14:hiddenLine xmlns="" xmlns:a14="http://schemas.microsoft.com/office/drawing/2010/main" w="9525">
+                <a14:hiddenLine xmlns:a14="http://schemas.microsoft.com/office/drawing/2010/main" xmlns="" w="9525">
                   <a:solidFill>
                     <a:srgbClr val="000000"/>
                   </a:solidFill>
@@ -3975,7 +3976,7 @@
             </a:ln>
             <a:extLst>
               <a:ext uri="{91240B29-F687-4f45-9708-019B960494DF}">
-                <a14:hiddenLine xmlns="" xmlns:a14="http://schemas.microsoft.com/office/drawing/2010/main" w="9525">
+                <a14:hiddenLine xmlns:a14="http://schemas.microsoft.com/office/drawing/2010/main" xmlns="" w="9525">
                   <a:solidFill>
                     <a:srgbClr val="000000"/>
                   </a:solidFill>
@@ -4065,7 +4066,7 @@
             </a:ln>
             <a:extLst>
               <a:ext uri="{91240B29-F687-4f45-9708-019B960494DF}">
-                <a14:hiddenLine xmlns="" xmlns:a14="http://schemas.microsoft.com/office/drawing/2010/main" w="9525">
+                <a14:hiddenLine xmlns:a14="http://schemas.microsoft.com/office/drawing/2010/main" xmlns="" w="9525">
                   <a:solidFill>
                     <a:srgbClr val="000000"/>
                   </a:solidFill>
@@ -4130,7 +4131,7 @@
             </a:ln>
             <a:extLst>
               <a:ext uri="{91240B29-F687-4f45-9708-019B960494DF}">
-                <a14:hiddenLine xmlns="" xmlns:a14="http://schemas.microsoft.com/office/drawing/2010/main" w="9525">
+                <a14:hiddenLine xmlns:a14="http://schemas.microsoft.com/office/drawing/2010/main" xmlns="" w="9525">
                   <a:solidFill>
                     <a:srgbClr val="000000"/>
                   </a:solidFill>
@@ -4192,7 +4193,7 @@
             </a:ln>
             <a:extLst>
               <a:ext uri="{91240B29-F687-4f45-9708-019B960494DF}">
-                <a14:hiddenLine xmlns="" xmlns:a14="http://schemas.microsoft.com/office/drawing/2010/main" w="9525">
+                <a14:hiddenLine xmlns:a14="http://schemas.microsoft.com/office/drawing/2010/main" xmlns="" w="9525">
                   <a:solidFill>
                     <a:srgbClr val="000000"/>
                   </a:solidFill>
@@ -4282,7 +4283,7 @@
             </a:ln>
             <a:extLst>
               <a:ext uri="{91240B29-F687-4f45-9708-019B960494DF}">
-                <a14:hiddenLine xmlns="" xmlns:a14="http://schemas.microsoft.com/office/drawing/2010/main" w="9525">
+                <a14:hiddenLine xmlns:a14="http://schemas.microsoft.com/office/drawing/2010/main" xmlns="" w="9525">
                   <a:solidFill>
                     <a:srgbClr val="000000"/>
                   </a:solidFill>
@@ -4372,7 +4373,7 @@
             </a:ln>
             <a:extLst>
               <a:ext uri="{91240B29-F687-4f45-9708-019B960494DF}">
-                <a14:hiddenLine xmlns="" xmlns:a14="http://schemas.microsoft.com/office/drawing/2010/main" w="9525">
+                <a14:hiddenLine xmlns:a14="http://schemas.microsoft.com/office/drawing/2010/main" xmlns="" w="9525">
                   <a:solidFill>
                     <a:srgbClr val="000000"/>
                   </a:solidFill>
@@ -4434,7 +4435,7 @@
             </a:ln>
             <a:extLst>
               <a:ext uri="{91240B29-F687-4f45-9708-019B960494DF}">
-                <a14:hiddenLine xmlns="" xmlns:a14="http://schemas.microsoft.com/office/drawing/2010/main" w="9525">
+                <a14:hiddenLine xmlns:a14="http://schemas.microsoft.com/office/drawing/2010/main" xmlns="" w="9525">
                   <a:solidFill>
                     <a:srgbClr val="000000"/>
                   </a:solidFill>
@@ -4554,7 +4555,7 @@
             </a:ln>
             <a:extLst>
               <a:ext uri="{91240B29-F687-4f45-9708-019B960494DF}">
-                <a14:hiddenLine xmlns="" xmlns:a14="http://schemas.microsoft.com/office/drawing/2010/main" w="9525">
+                <a14:hiddenLine xmlns:a14="http://schemas.microsoft.com/office/drawing/2010/main" xmlns="" w="9525">
                   <a:solidFill>
                     <a:srgbClr val="000000"/>
                   </a:solidFill>
@@ -4622,7 +4623,7 @@
             </a:ln>
             <a:extLst>
               <a:ext uri="{91240B29-F687-4f45-9708-019B960494DF}">
-                <a14:hiddenLine xmlns="" xmlns:a14="http://schemas.microsoft.com/office/drawing/2010/main" w="9525">
+                <a14:hiddenLine xmlns:a14="http://schemas.microsoft.com/office/drawing/2010/main" xmlns="" w="9525">
                   <a:solidFill>
                     <a:srgbClr val="000000"/>
                   </a:solidFill>
@@ -4712,7 +4713,7 @@
             </a:ln>
             <a:extLst>
               <a:ext uri="{91240B29-F687-4f45-9708-019B960494DF}">
-                <a14:hiddenLine xmlns="" xmlns:a14="http://schemas.microsoft.com/office/drawing/2010/main" w="9525">
+                <a14:hiddenLine xmlns:a14="http://schemas.microsoft.com/office/drawing/2010/main" xmlns="" w="9525">
                   <a:solidFill>
                     <a:srgbClr val="000000"/>
                   </a:solidFill>
@@ -4852,7 +4853,7 @@
           <a:p>
             <a:fld id="{4313F670-7F9A-774D-B73D-573401E44297}" type="datetime1">
               <a:rPr lang="en-US" smtClean="0"/>
-              <a:t>10/27/26</a:t>
+              <a:t>10/29/26</a:t>
             </a:fld>
             <a:endParaRPr lang="en-US"/>
           </a:p>
@@ -5119,7 +5120,7 @@
           <a:p>
             <a:fld id="{446F9669-A8A7-2D40-9D01-B35FC337AA30}" type="datetime1">
               <a:rPr lang="en-US" smtClean="0"/>
-              <a:t>10/27/26</a:t>
+              <a:t>10/29/26</a:t>
             </a:fld>
             <a:endParaRPr lang="en-US"/>
           </a:p>
@@ -5315,7 +5316,7 @@
           <a:p>
             <a:fld id="{FA76CF18-F41B-6B48-B3E5-599E9795C2C3}" type="datetime1">
               <a:rPr lang="en-US" smtClean="0"/>
-              <a:t>10/27/26</a:t>
+              <a:t>10/29/26</a:t>
             </a:fld>
             <a:endParaRPr lang="en-US"/>
           </a:p>
@@ -5578,7 +5579,7 @@
           <a:p>
             <a:fld id="{B9654854-6457-164F-A077-6B3035079B82}" type="datetime1">
               <a:rPr lang="en-US" smtClean="0"/>
-              <a:t>10/27/26</a:t>
+              <a:t>10/29/26</a:t>
             </a:fld>
             <a:endParaRPr lang="en-US"/>
           </a:p>
@@ -6012,7 +6013,7 @@
           <a:p>
             <a:fld id="{CE3DBFD7-E611-8C40-AC73-0C29FF63F0CD}" type="datetime1">
               <a:rPr lang="en-US" smtClean="0"/>
-              <a:t>10/27/26</a:t>
+              <a:t>10/29/26</a:t>
             </a:fld>
             <a:endParaRPr lang="en-US"/>
           </a:p>
@@ -6558,7 +6559,7 @@
           <a:p>
             <a:fld id="{C8B63B06-0493-2840-9F37-30C9412BBF17}" type="datetime1">
               <a:rPr lang="en-US" smtClean="0"/>
-              <a:t>10/27/26</a:t>
+              <a:t>10/29/26</a:t>
             </a:fld>
             <a:endParaRPr lang="en-US"/>
           </a:p>
@@ -7278,7 +7279,7 @@
           <a:p>
             <a:fld id="{72B5C0FA-8C46-E84D-B6D7-B673F2CA0A0E}" type="datetime1">
               <a:rPr lang="en-US" smtClean="0"/>
-              <a:t>10/27/26</a:t>
+              <a:t>10/29/26</a:t>
             </a:fld>
             <a:endParaRPr lang="en-US"/>
           </a:p>
@@ -7448,7 +7449,7 @@
           <a:p>
             <a:fld id="{60B9CDE1-97B4-BF46-B69C-B86855B18820}" type="datetime1">
               <a:rPr lang="en-US" smtClean="0"/>
-              <a:t>10/27/26</a:t>
+              <a:t>10/29/26</a:t>
             </a:fld>
             <a:endParaRPr lang="en-US"/>
           </a:p>
@@ -7628,7 +7629,7 @@
           <a:p>
             <a:fld id="{BE51D3A4-F9E5-FD49-AA87-B395F50451DC}" type="datetime1">
               <a:rPr lang="en-US" smtClean="0"/>
-              <a:t>10/27/26</a:t>
+              <a:t>10/29/26</a:t>
             </a:fld>
             <a:endParaRPr lang="en-US"/>
           </a:p>
@@ -7798,7 +7799,7 @@
           <a:p>
             <a:fld id="{880DFB37-B0AE-9449-85EC-14F9C83B6084}" type="datetime1">
               <a:rPr lang="en-US" smtClean="0"/>
-              <a:t>10/27/26</a:t>
+              <a:t>10/29/26</a:t>
             </a:fld>
             <a:endParaRPr lang="en-US"/>
           </a:p>
@@ -8048,7 +8049,7 @@
           <a:p>
             <a:fld id="{C939124A-616E-6944-A21A-1839F5DBE7BB}" type="datetime1">
               <a:rPr lang="en-US" smtClean="0"/>
-              <a:t>10/27/26</a:t>
+              <a:t>10/29/26</a:t>
             </a:fld>
             <a:endParaRPr lang="en-US"/>
           </a:p>
@@ -8280,7 +8281,7 @@
           <a:p>
             <a:fld id="{C6E9A026-D48C-FD43-8676-CD625DD5D84B}" type="datetime1">
               <a:rPr lang="en-US" smtClean="0"/>
-              <a:t>10/27/26</a:t>
+              <a:t>10/29/26</a:t>
             </a:fld>
             <a:endParaRPr lang="en-US"/>
           </a:p>
@@ -8666,7 +8667,7 @@
           <a:p>
             <a:fld id="{EA35111E-23A3-1440-99A3-C4C665908E3D}" type="datetime1">
               <a:rPr lang="en-US" smtClean="0"/>
-              <a:t>10/27/26</a:t>
+              <a:t>10/29/26</a:t>
             </a:fld>
             <a:endParaRPr lang="en-US"/>
           </a:p>
@@ -8789,7 +8790,7 @@
           <a:p>
             <a:fld id="{249983B9-88EF-D74B-BA6D-6A3BF17C2B38}" type="datetime1">
               <a:rPr lang="en-US" smtClean="0"/>
-              <a:t>10/27/26</a:t>
+              <a:t>10/29/26</a:t>
             </a:fld>
             <a:endParaRPr lang="en-US"/>
           </a:p>
@@ -8884,7 +8885,7 @@
           <a:p>
             <a:fld id="{E2A00AEF-B4EC-084A-8DB8-A225C7981CBB}" type="datetime1">
               <a:rPr lang="en-US" smtClean="0"/>
-              <a:t>10/27/26</a:t>
+              <a:t>10/29/26</a:t>
             </a:fld>
             <a:endParaRPr lang="en-US"/>
           </a:p>
@@ -9133,7 +9134,7 @@
           <a:p>
             <a:fld id="{97860299-21CD-A94A-A7B0-44E787F8D42C}" type="datetime1">
               <a:rPr lang="en-US" smtClean="0"/>
-              <a:t>10/27/26</a:t>
+              <a:t>10/29/26</a:t>
             </a:fld>
             <a:endParaRPr lang="en-US"/>
           </a:p>
@@ -9418,7 +9419,7 @@
           <a:p>
             <a:fld id="{3DFD19CF-4E62-D246-BA61-7B528271315F}" type="datetime1">
               <a:rPr lang="en-US" smtClean="0"/>
-              <a:t>10/27/26</a:t>
+              <a:t>10/29/26</a:t>
             </a:fld>
             <a:endParaRPr lang="en-US"/>
           </a:p>
@@ -9541,7 +9542,7 @@
           <a:noFill/>
           <a:extLst>
             <a:ext uri="{909E8E84-426E-40dd-AFC4-6F175D3DCCD1}">
-              <a14:hiddenFill xmlns="" xmlns:a14="http://schemas.microsoft.com/office/drawing/2010/main">
+              <a14:hiddenFill xmlns:a14="http://schemas.microsoft.com/office/drawing/2010/main" xmlns="">
                 <a:solidFill>
                   <a:srgbClr val="FFFFFF"/>
                 </a:solidFill>
@@ -9615,7 +9616,7 @@
               </a:ln>
               <a:extLst>
                 <a:ext uri="{91240B29-F687-4f45-9708-019B960494DF}">
-                  <a14:hiddenLine xmlns="" xmlns:a14="http://schemas.microsoft.com/office/drawing/2010/main" w="9525">
+                  <a14:hiddenLine xmlns:a14="http://schemas.microsoft.com/office/drawing/2010/main" xmlns="" w="9525">
                     <a:solidFill>
                       <a:srgbClr val="000000"/>
                     </a:solidFill>
@@ -9705,7 +9706,7 @@
               </a:ln>
               <a:extLst>
                 <a:ext uri="{91240B29-F687-4f45-9708-019B960494DF}">
-                  <a14:hiddenLine xmlns="" xmlns:a14="http://schemas.microsoft.com/office/drawing/2010/main" w="9525">
+                  <a14:hiddenLine xmlns:a14="http://schemas.microsoft.com/office/drawing/2010/main" xmlns="" w="9525">
                     <a:solidFill>
                       <a:srgbClr val="000000"/>
                     </a:solidFill>
@@ -9795,7 +9796,7 @@
               </a:ln>
               <a:extLst>
                 <a:ext uri="{91240B29-F687-4f45-9708-019B960494DF}">
-                  <a14:hiddenLine xmlns="" xmlns:a14="http://schemas.microsoft.com/office/drawing/2010/main" w="9525">
+                  <a14:hiddenLine xmlns:a14="http://schemas.microsoft.com/office/drawing/2010/main" xmlns="" w="9525">
                     <a:solidFill>
                       <a:srgbClr val="000000"/>
                     </a:solidFill>
@@ -9857,7 +9858,7 @@
               </a:ln>
               <a:extLst>
                 <a:ext uri="{91240B29-F687-4f45-9708-019B960494DF}">
-                  <a14:hiddenLine xmlns="" xmlns:a14="http://schemas.microsoft.com/office/drawing/2010/main" w="9525">
+                  <a14:hiddenLine xmlns:a14="http://schemas.microsoft.com/office/drawing/2010/main" xmlns="" w="9525">
                     <a:solidFill>
                       <a:srgbClr val="000000"/>
                     </a:solidFill>
@@ -9947,7 +9948,7 @@
               </a:ln>
               <a:extLst>
                 <a:ext uri="{91240B29-F687-4f45-9708-019B960494DF}">
-                  <a14:hiddenLine xmlns="" xmlns:a14="http://schemas.microsoft.com/office/drawing/2010/main" w="9525">
+                  <a14:hiddenLine xmlns:a14="http://schemas.microsoft.com/office/drawing/2010/main" xmlns="" w="9525">
                     <a:solidFill>
                       <a:srgbClr val="000000"/>
                     </a:solidFill>
@@ -10009,7 +10010,7 @@
               </a:ln>
               <a:extLst>
                 <a:ext uri="{91240B29-F687-4f45-9708-019B960494DF}">
-                  <a14:hiddenLine xmlns="" xmlns:a14="http://schemas.microsoft.com/office/drawing/2010/main" w="9525">
+                  <a14:hiddenLine xmlns:a14="http://schemas.microsoft.com/office/drawing/2010/main" xmlns="" w="9525">
                     <a:solidFill>
                       <a:srgbClr val="000000"/>
                     </a:solidFill>
@@ -10071,7 +10072,7 @@
               </a:ln>
               <a:extLst>
                 <a:ext uri="{91240B29-F687-4f45-9708-019B960494DF}">
-                  <a14:hiddenLine xmlns="" xmlns:a14="http://schemas.microsoft.com/office/drawing/2010/main" w="9525">
+                  <a14:hiddenLine xmlns:a14="http://schemas.microsoft.com/office/drawing/2010/main" xmlns="" w="9525">
                     <a:solidFill>
                       <a:srgbClr val="000000"/>
                     </a:solidFill>
@@ -10161,7 +10162,7 @@
               </a:ln>
               <a:extLst>
                 <a:ext uri="{91240B29-F687-4f45-9708-019B960494DF}">
-                  <a14:hiddenLine xmlns="" xmlns:a14="http://schemas.microsoft.com/office/drawing/2010/main" w="9525">
+                  <a14:hiddenLine xmlns:a14="http://schemas.microsoft.com/office/drawing/2010/main" xmlns="" w="9525">
                     <a:solidFill>
                       <a:srgbClr val="000000"/>
                     </a:solidFill>
@@ -10251,7 +10252,7 @@
               </a:ln>
               <a:extLst>
                 <a:ext uri="{91240B29-F687-4f45-9708-019B960494DF}">
-                  <a14:hiddenLine xmlns="" xmlns:a14="http://schemas.microsoft.com/office/drawing/2010/main" w="9525">
+                  <a14:hiddenLine xmlns:a14="http://schemas.microsoft.com/office/drawing/2010/main" xmlns="" w="9525">
                     <a:solidFill>
                       <a:srgbClr val="000000"/>
                     </a:solidFill>
@@ -10313,7 +10314,7 @@
               </a:ln>
               <a:extLst>
                 <a:ext uri="{91240B29-F687-4f45-9708-019B960494DF}">
-                  <a14:hiddenLine xmlns="" xmlns:a14="http://schemas.microsoft.com/office/drawing/2010/main" w="9525">
+                  <a14:hiddenLine xmlns:a14="http://schemas.microsoft.com/office/drawing/2010/main" xmlns="" w="9525">
                     <a:solidFill>
                       <a:srgbClr val="000000"/>
                     </a:solidFill>
@@ -10423,7 +10424,7 @@
               </a:ln>
               <a:extLst>
                 <a:ext uri="{91240B29-F687-4f45-9708-019B960494DF}">
-                  <a14:hiddenLine xmlns="" xmlns:a14="http://schemas.microsoft.com/office/drawing/2010/main" w="9525">
+                  <a14:hiddenLine xmlns:a14="http://schemas.microsoft.com/office/drawing/2010/main" xmlns="" w="9525">
                     <a:solidFill>
                       <a:srgbClr val="000000"/>
                     </a:solidFill>
@@ -10507,7 +10508,7 @@
               </a:ln>
               <a:extLst>
                 <a:ext uri="{91240B29-F687-4f45-9708-019B960494DF}">
-                  <a14:hiddenLine xmlns="" xmlns:a14="http://schemas.microsoft.com/office/drawing/2010/main" w="9525">
+                  <a14:hiddenLine xmlns:a14="http://schemas.microsoft.com/office/drawing/2010/main" xmlns="" w="9525">
                     <a:solidFill>
                       <a:srgbClr val="000000"/>
                     </a:solidFill>
@@ -10569,7 +10570,7 @@
               </a:ln>
               <a:extLst>
                 <a:ext uri="{91240B29-F687-4f45-9708-019B960494DF}">
-                  <a14:hiddenLine xmlns="" xmlns:a14="http://schemas.microsoft.com/office/drawing/2010/main" w="9525">
+                  <a14:hiddenLine xmlns:a14="http://schemas.microsoft.com/office/drawing/2010/main" xmlns="" w="9525">
                     <a:solidFill>
                       <a:srgbClr val="000000"/>
                     </a:solidFill>
@@ -10631,7 +10632,7 @@
               </a:ln>
               <a:extLst>
                 <a:ext uri="{91240B29-F687-4f45-9708-019B960494DF}">
-                  <a14:hiddenLine xmlns="" xmlns:a14="http://schemas.microsoft.com/office/drawing/2010/main" w="9525">
+                  <a14:hiddenLine xmlns:a14="http://schemas.microsoft.com/office/drawing/2010/main" xmlns="" w="9525">
                     <a:solidFill>
                       <a:srgbClr val="000000"/>
                     </a:solidFill>
@@ -10721,7 +10722,7 @@
               </a:ln>
               <a:extLst>
                 <a:ext uri="{91240B29-F687-4f45-9708-019B960494DF}">
-                  <a14:hiddenLine xmlns="" xmlns:a14="http://schemas.microsoft.com/office/drawing/2010/main" w="9525">
+                  <a14:hiddenLine xmlns:a14="http://schemas.microsoft.com/office/drawing/2010/main" xmlns="" w="9525">
                     <a:solidFill>
                       <a:srgbClr val="000000"/>
                     </a:solidFill>
@@ -10755,7 +10756,7 @@
               </a:ln>
               <a:extLst>
                 <a:ext uri="{91240B29-F687-4f45-9708-019B960494DF}">
-                  <a14:hiddenLine xmlns="" xmlns:a14="http://schemas.microsoft.com/office/drawing/2010/main" w="9525">
+                  <a14:hiddenLine xmlns:a14="http://schemas.microsoft.com/office/drawing/2010/main" xmlns="" w="9525">
                     <a:solidFill>
                       <a:srgbClr val="000000"/>
                     </a:solidFill>
@@ -10820,7 +10821,7 @@
               </a:ln>
               <a:extLst>
                 <a:ext uri="{91240B29-F687-4f45-9708-019B960494DF}">
-                  <a14:hiddenLine xmlns="" xmlns:a14="http://schemas.microsoft.com/office/drawing/2010/main" w="9525">
+                  <a14:hiddenLine xmlns:a14="http://schemas.microsoft.com/office/drawing/2010/main" xmlns="" w="9525">
                     <a:solidFill>
                       <a:srgbClr val="000000"/>
                     </a:solidFill>
@@ -10910,7 +10911,7 @@
               </a:ln>
               <a:extLst>
                 <a:ext uri="{91240B29-F687-4f45-9708-019B960494DF}">
-                  <a14:hiddenLine xmlns="" xmlns:a14="http://schemas.microsoft.com/office/drawing/2010/main" w="9525">
+                  <a14:hiddenLine xmlns:a14="http://schemas.microsoft.com/office/drawing/2010/main" xmlns="" w="9525">
                     <a:solidFill>
                       <a:srgbClr val="000000"/>
                     </a:solidFill>
@@ -10972,7 +10973,7 @@
               </a:ln>
               <a:extLst>
                 <a:ext uri="{91240B29-F687-4f45-9708-019B960494DF}">
-                  <a14:hiddenLine xmlns="" xmlns:a14="http://schemas.microsoft.com/office/drawing/2010/main" w="9525">
+                  <a14:hiddenLine xmlns:a14="http://schemas.microsoft.com/office/drawing/2010/main" xmlns="" w="9525">
                     <a:solidFill>
                       <a:srgbClr val="000000"/>
                     </a:solidFill>
@@ -11062,7 +11063,7 @@
               </a:ln>
               <a:extLst>
                 <a:ext uri="{91240B29-F687-4f45-9708-019B960494DF}">
-                  <a14:hiddenLine xmlns="" xmlns:a14="http://schemas.microsoft.com/office/drawing/2010/main" w="9525">
+                  <a14:hiddenLine xmlns:a14="http://schemas.microsoft.com/office/drawing/2010/main" xmlns="" w="9525">
                     <a:solidFill>
                       <a:srgbClr val="000000"/>
                     </a:solidFill>
@@ -11127,7 +11128,7 @@
               </a:ln>
               <a:extLst>
                 <a:ext uri="{91240B29-F687-4f45-9708-019B960494DF}">
-                  <a14:hiddenLine xmlns="" xmlns:a14="http://schemas.microsoft.com/office/drawing/2010/main" w="9525">
+                  <a14:hiddenLine xmlns:a14="http://schemas.microsoft.com/office/drawing/2010/main" xmlns="" w="9525">
                     <a:solidFill>
                       <a:srgbClr val="000000"/>
                     </a:solidFill>
@@ -11189,7 +11190,7 @@
               </a:ln>
               <a:extLst>
                 <a:ext uri="{91240B29-F687-4f45-9708-019B960494DF}">
-                  <a14:hiddenLine xmlns="" xmlns:a14="http://schemas.microsoft.com/office/drawing/2010/main" w="9525">
+                  <a14:hiddenLine xmlns:a14="http://schemas.microsoft.com/office/drawing/2010/main" xmlns="" w="9525">
                     <a:solidFill>
                       <a:srgbClr val="000000"/>
                     </a:solidFill>
@@ -11279,7 +11280,7 @@
               </a:ln>
               <a:extLst>
                 <a:ext uri="{91240B29-F687-4f45-9708-019B960494DF}">
-                  <a14:hiddenLine xmlns="" xmlns:a14="http://schemas.microsoft.com/office/drawing/2010/main" w="9525">
+                  <a14:hiddenLine xmlns:a14="http://schemas.microsoft.com/office/drawing/2010/main" xmlns="" w="9525">
                     <a:solidFill>
                       <a:srgbClr val="000000"/>
                     </a:solidFill>
@@ -11369,7 +11370,7 @@
               </a:ln>
               <a:extLst>
                 <a:ext uri="{91240B29-F687-4f45-9708-019B960494DF}">
-                  <a14:hiddenLine xmlns="" xmlns:a14="http://schemas.microsoft.com/office/drawing/2010/main" w="9525">
+                  <a14:hiddenLine xmlns:a14="http://schemas.microsoft.com/office/drawing/2010/main" xmlns="" w="9525">
                     <a:solidFill>
                       <a:srgbClr val="000000"/>
                     </a:solidFill>
@@ -11434,7 +11435,7 @@
               </a:ln>
               <a:extLst>
                 <a:ext uri="{91240B29-F687-4f45-9708-019B960494DF}">
-                  <a14:hiddenLine xmlns="" xmlns:a14="http://schemas.microsoft.com/office/drawing/2010/main" w="9525">
+                  <a14:hiddenLine xmlns:a14="http://schemas.microsoft.com/office/drawing/2010/main" xmlns="" w="9525">
                     <a:solidFill>
                       <a:srgbClr val="000000"/>
                     </a:solidFill>
@@ -11554,7 +11555,7 @@
               </a:ln>
               <a:extLst>
                 <a:ext uri="{91240B29-F687-4f45-9708-019B960494DF}">
-                  <a14:hiddenLine xmlns="" xmlns:a14="http://schemas.microsoft.com/office/drawing/2010/main" w="9525">
+                  <a14:hiddenLine xmlns:a14="http://schemas.microsoft.com/office/drawing/2010/main" xmlns="" w="9525">
                     <a:solidFill>
                       <a:srgbClr val="000000"/>
                     </a:solidFill>
@@ -11635,7 +11636,7 @@
               </a:ln>
               <a:extLst>
                 <a:ext uri="{91240B29-F687-4f45-9708-019B960494DF}">
-                  <a14:hiddenLine xmlns="" xmlns:a14="http://schemas.microsoft.com/office/drawing/2010/main" w="9525">
+                  <a14:hiddenLine xmlns:a14="http://schemas.microsoft.com/office/drawing/2010/main" xmlns="" w="9525">
                     <a:solidFill>
                       <a:srgbClr val="000000"/>
                     </a:solidFill>
@@ -11750,7 +11751,7 @@
               </a:ln>
               <a:extLst>
                 <a:ext uri="{91240B29-F687-4f45-9708-019B960494DF}">
-                  <a14:hiddenLine xmlns="" xmlns:a14="http://schemas.microsoft.com/office/drawing/2010/main" w="9525">
+                  <a14:hiddenLine xmlns:a14="http://schemas.microsoft.com/office/drawing/2010/main" xmlns="" w="9525">
                     <a:solidFill>
                       <a:srgbClr val="000000"/>
                     </a:solidFill>
@@ -11840,7 +11841,7 @@
               </a:ln>
               <a:extLst>
                 <a:ext uri="{91240B29-F687-4f45-9708-019B960494DF}">
-                  <a14:hiddenLine xmlns="" xmlns:a14="http://schemas.microsoft.com/office/drawing/2010/main" w="9525">
+                  <a14:hiddenLine xmlns:a14="http://schemas.microsoft.com/office/drawing/2010/main" xmlns="" w="9525">
                     <a:solidFill>
                       <a:srgbClr val="000000"/>
                     </a:solidFill>
@@ -11905,7 +11906,7 @@
               </a:ln>
               <a:extLst>
                 <a:ext uri="{91240B29-F687-4f45-9708-019B960494DF}">
-                  <a14:hiddenLine xmlns="" xmlns:a14="http://schemas.microsoft.com/office/drawing/2010/main" w="9525">
+                  <a14:hiddenLine xmlns:a14="http://schemas.microsoft.com/office/drawing/2010/main" xmlns="" w="9525">
                     <a:solidFill>
                       <a:srgbClr val="000000"/>
                     </a:solidFill>
@@ -11995,7 +11996,7 @@
               </a:ln>
               <a:extLst>
                 <a:ext uri="{91240B29-F687-4f45-9708-019B960494DF}">
-                  <a14:hiddenLine xmlns="" xmlns:a14="http://schemas.microsoft.com/office/drawing/2010/main" w="9525">
+                  <a14:hiddenLine xmlns:a14="http://schemas.microsoft.com/office/drawing/2010/main" xmlns="" w="9525">
                     <a:solidFill>
                       <a:srgbClr val="000000"/>
                     </a:solidFill>
@@ -12063,7 +12064,7 @@
               </a:ln>
               <a:extLst>
                 <a:ext uri="{91240B29-F687-4f45-9708-019B960494DF}">
-                  <a14:hiddenLine xmlns="" xmlns:a14="http://schemas.microsoft.com/office/drawing/2010/main" w="9525">
+                  <a14:hiddenLine xmlns:a14="http://schemas.microsoft.com/office/drawing/2010/main" xmlns="" w="9525">
                     <a:solidFill>
                       <a:srgbClr val="000000"/>
                     </a:solidFill>
@@ -12153,7 +12154,7 @@
               </a:ln>
               <a:extLst>
                 <a:ext uri="{91240B29-F687-4f45-9708-019B960494DF}">
-                  <a14:hiddenLine xmlns="" xmlns:a14="http://schemas.microsoft.com/office/drawing/2010/main" w="9525">
+                  <a14:hiddenLine xmlns:a14="http://schemas.microsoft.com/office/drawing/2010/main" xmlns="" w="9525">
                     <a:solidFill>
                       <a:srgbClr val="000000"/>
                     </a:solidFill>
@@ -12221,7 +12222,7 @@
               </a:ln>
               <a:extLst>
                 <a:ext uri="{91240B29-F687-4f45-9708-019B960494DF}">
-                  <a14:hiddenLine xmlns="" xmlns:a14="http://schemas.microsoft.com/office/drawing/2010/main" w="9525">
+                  <a14:hiddenLine xmlns:a14="http://schemas.microsoft.com/office/drawing/2010/main" xmlns="" w="9525">
                     <a:solidFill>
                       <a:srgbClr val="000000"/>
                     </a:solidFill>
@@ -12311,7 +12312,7 @@
               </a:ln>
               <a:extLst>
                 <a:ext uri="{91240B29-F687-4f45-9708-019B960494DF}">
-                  <a14:hiddenLine xmlns="" xmlns:a14="http://schemas.microsoft.com/office/drawing/2010/main" w="9525">
+                  <a14:hiddenLine xmlns:a14="http://schemas.microsoft.com/office/drawing/2010/main" xmlns="" w="9525">
                     <a:solidFill>
                       <a:srgbClr val="000000"/>
                     </a:solidFill>
@@ -12345,7 +12346,7 @@
               </a:ln>
               <a:extLst>
                 <a:ext uri="{91240B29-F687-4f45-9708-019B960494DF}">
-                  <a14:hiddenLine xmlns="" xmlns:a14="http://schemas.microsoft.com/office/drawing/2010/main" w="9525">
+                  <a14:hiddenLine xmlns:a14="http://schemas.microsoft.com/office/drawing/2010/main" xmlns="" w="9525">
                     <a:solidFill>
                       <a:srgbClr val="000000"/>
                     </a:solidFill>
@@ -12485,7 +12486,7 @@
           <a:p>
             <a:fld id="{92FF8978-FE14-CC4A-93A6-934EB06543C0}" type="datetime1">
               <a:rPr lang="en-US" smtClean="0"/>
-              <a:t>10/27/26</a:t>
+              <a:t>10/29/26</a:t>
             </a:fld>
             <a:endParaRPr lang="en-US"/>
           </a:p>
@@ -16742,7 +16743,7 @@
                 <a:latin typeface="Arial" panose="020B0604020202020204" pitchFamily="34" charset="0"/>
                 <a:cs typeface="Arial" panose="020B0604020202020204" pitchFamily="34" charset="0"/>
               </a:rPr>
-              <a:t>Today we will finish Module 3 – Turing Machines.</a:t>
+              <a:t>Today we will find module 3 - Turing Machines.</a:t>
             </a:r>
           </a:p>
         </p:txBody>
@@ -16761,6 +16762,298 @@
 </file>
 
 <file path=ppt/slides/slide23.xml><?xml version="1.0" encoding="utf-8"?>
+<p:sld xmlns:a="http://schemas.openxmlformats.org/drawingml/2006/main" xmlns:r="http://schemas.openxmlformats.org/officeDocument/2006/relationships" xmlns:p="http://schemas.openxmlformats.org/presentationml/2006/main">
+  <p:cSld>
+    <p:spTree>
+      <p:nvGrpSpPr>
+        <p:cNvPr id="1" name="">
+          <a:extLst>
+            <a:ext uri="{FF2B5EF4-FFF2-40B4-BE49-F238E27FC236}">
+              <a16:creationId xmlns:a16="http://schemas.microsoft.com/office/drawing/2014/main" id="{AD5C36CF-83DD-F439-E115-431C8A1C9BC3}"/>
+            </a:ext>
+          </a:extLst>
+        </p:cNvPr>
+        <p:cNvGrpSpPr/>
+        <p:nvPr/>
+      </p:nvGrpSpPr>
+      <p:grpSpPr>
+        <a:xfrm>
+          <a:off x="0" y="0"/>
+          <a:ext cx="0" cy="0"/>
+          <a:chOff x="0" y="0"/>
+          <a:chExt cx="0" cy="0"/>
+        </a:xfrm>
+      </p:grpSpPr>
+      <p:sp>
+        <p:nvSpPr>
+          <p:cNvPr id="6146" name="Rectangle 2">
+            <a:extLst>
+              <a:ext uri="{FF2B5EF4-FFF2-40B4-BE49-F238E27FC236}">
+                <a16:creationId xmlns:a16="http://schemas.microsoft.com/office/drawing/2014/main" id="{A15EF06D-35E6-7C60-04DB-BD340AAD029C}"/>
+              </a:ext>
+            </a:extLst>
+          </p:cNvPr>
+          <p:cNvSpPr>
+            <a:spLocks noGrp="1" noChangeArrowheads="1"/>
+          </p:cNvSpPr>
+          <p:nvPr>
+            <p:ph type="title"/>
+            <p:custDataLst>
+              <p:tags r:id="rId1"/>
+            </p:custDataLst>
+          </p:nvPr>
+        </p:nvSpPr>
+        <p:spPr>
+          <a:xfrm>
+            <a:off x="1141413" y="284084"/>
+            <a:ext cx="9905998" cy="620791"/>
+          </a:xfrm>
+        </p:spPr>
+        <p:txBody>
+          <a:bodyPr/>
+          <a:lstStyle/>
+          <a:p>
+            <a:pPr algn="ctr"/>
+            <a:r>
+              <a:rPr lang="en-US" dirty="0"/>
+              <a:t>Lecture 19 - Thursday, Oct. 29</a:t>
+            </a:r>
+          </a:p>
+        </p:txBody>
+      </p:sp>
+      <p:sp>
+        <p:nvSpPr>
+          <p:cNvPr id="6147" name="Rectangle 3">
+            <a:extLst>
+              <a:ext uri="{FF2B5EF4-FFF2-40B4-BE49-F238E27FC236}">
+                <a16:creationId xmlns:a16="http://schemas.microsoft.com/office/drawing/2014/main" id="{2FE92C74-81F4-2FCD-101C-14B174C188DF}"/>
+              </a:ext>
+            </a:extLst>
+          </p:cNvPr>
+          <p:cNvSpPr>
+            <a:spLocks noGrp="1" noChangeArrowheads="1"/>
+          </p:cNvSpPr>
+          <p:nvPr>
+            <p:ph idx="1"/>
+            <p:custDataLst>
+              <p:tags r:id="rId2"/>
+            </p:custDataLst>
+          </p:nvPr>
+        </p:nvSpPr>
+        <p:spPr>
+          <a:xfrm>
+            <a:off x="1294151" y="904876"/>
+            <a:ext cx="9600522" cy="5749924"/>
+          </a:xfrm>
+        </p:spPr>
+        <p:txBody>
+          <a:bodyPr>
+            <a:normAutofit fontScale="70000" lnSpcReduction="20000"/>
+          </a:bodyPr>
+          <a:lstStyle/>
+          <a:p>
+            <a:r>
+              <a:rPr lang="en-US" dirty="0">
+                <a:latin typeface="Arial" panose="020B0604020202020204" pitchFamily="34" charset="0"/>
+                <a:cs typeface="Arial" panose="020B0604020202020204" pitchFamily="34" charset="0"/>
+              </a:rPr>
+              <a:t>Please remember </a:t>
+            </a:r>
+            <a:r>
+              <a:rPr lang="en-US" b="1" i="1" u="sng" dirty="0">
+                <a:latin typeface="Arial" panose="020B0604020202020204" pitchFamily="34" charset="0"/>
+                <a:cs typeface="Arial" panose="020B0604020202020204" pitchFamily="34" charset="0"/>
+              </a:rPr>
+              <a:t>no laptops / phones</a:t>
+            </a:r>
+            <a:r>
+              <a:rPr lang="en-US" dirty="0">
+                <a:latin typeface="Arial" panose="020B0604020202020204" pitchFamily="34" charset="0"/>
+                <a:cs typeface="Arial" panose="020B0604020202020204" pitchFamily="34" charset="0"/>
+              </a:rPr>
+              <a:t> and </a:t>
+            </a:r>
+            <a:r>
+              <a:rPr lang="en-US" b="1" i="1" u="sng" dirty="0">
+                <a:latin typeface="Arial" panose="020B0604020202020204" pitchFamily="34" charset="0"/>
+                <a:cs typeface="Arial" panose="020B0604020202020204" pitchFamily="34" charset="0"/>
+              </a:rPr>
+              <a:t>attendance policy</a:t>
+            </a:r>
+            <a:endParaRPr lang="en-US" dirty="0">
+              <a:latin typeface="Arial" panose="020B0604020202020204" pitchFamily="34" charset="0"/>
+              <a:cs typeface="Arial" panose="020B0604020202020204" pitchFamily="34" charset="0"/>
+            </a:endParaRPr>
+          </a:p>
+          <a:p>
+            <a:r>
+              <a:rPr lang="en-US" dirty="0">
+                <a:latin typeface="Arial" panose="020B0604020202020204" pitchFamily="34" charset="0"/>
+                <a:cs typeface="Arial" panose="020B0604020202020204" pitchFamily="34" charset="0"/>
+              </a:rPr>
+              <a:t>October! Best month of the year! Woo!</a:t>
+            </a:r>
+          </a:p>
+          <a:p>
+            <a:r>
+              <a:rPr lang="en-US" dirty="0">
+                <a:latin typeface="Arial" panose="020B0604020202020204" pitchFamily="34" charset="0"/>
+                <a:cs typeface="Arial" panose="020B0604020202020204" pitchFamily="34" charset="0"/>
+              </a:rPr>
+              <a:t>This week:</a:t>
+            </a:r>
+          </a:p>
+          <a:p>
+            <a:pPr lvl="1"/>
+            <a:r>
+              <a:rPr lang="en-US" dirty="0">
+                <a:latin typeface="Arial" panose="020B0604020202020204" pitchFamily="34" charset="0"/>
+                <a:cs typeface="Arial" panose="020B0604020202020204" pitchFamily="34" charset="0"/>
+              </a:rPr>
+              <a:t>Homework 3 is due TONIGHT!!</a:t>
+            </a:r>
+          </a:p>
+          <a:p>
+            <a:pPr lvl="1"/>
+            <a:r>
+              <a:rPr lang="en-US" dirty="0">
+                <a:latin typeface="Arial" panose="020B0604020202020204" pitchFamily="34" charset="0"/>
+                <a:cs typeface="Arial" panose="020B0604020202020204" pitchFamily="34" charset="0"/>
+              </a:rPr>
+              <a:t>I sent you some Turing Machine practice for the upcoming quiz 3. Make sure you do that.</a:t>
+            </a:r>
+          </a:p>
+          <a:p>
+            <a:r>
+              <a:rPr lang="en-US" dirty="0">
+                <a:latin typeface="Arial" panose="020B0604020202020204" pitchFamily="34" charset="0"/>
+                <a:cs typeface="Arial" panose="020B0604020202020204" pitchFamily="34" charset="0"/>
+              </a:rPr>
+              <a:t>Next two weeks:</a:t>
+            </a:r>
+          </a:p>
+          <a:p>
+            <a:pPr lvl="1"/>
+            <a:r>
+              <a:rPr lang="en-US" dirty="0">
+                <a:latin typeface="Arial" panose="020B0604020202020204" pitchFamily="34" charset="0"/>
+                <a:cs typeface="Arial" panose="020B0604020202020204" pitchFamily="34" charset="0"/>
+              </a:rPr>
+              <a:t>Nothing due next week (and no class on Tuesday = election day)</a:t>
+            </a:r>
+          </a:p>
+          <a:p>
+            <a:pPr lvl="1"/>
+            <a:r>
+              <a:rPr lang="en-US" dirty="0">
+                <a:latin typeface="Arial" panose="020B0604020202020204" pitchFamily="34" charset="0"/>
+                <a:cs typeface="Arial" panose="020B0604020202020204" pitchFamily="34" charset="0"/>
+              </a:rPr>
+              <a:t>Week after that is exam 3 (sorry I incorrectly said exam 3 was next week)</a:t>
+            </a:r>
+          </a:p>
+          <a:p>
+            <a:r>
+              <a:rPr lang="en-US" dirty="0">
+                <a:latin typeface="Arial" panose="020B0604020202020204" pitchFamily="34" charset="0"/>
+                <a:cs typeface="Arial" panose="020B0604020202020204" pitchFamily="34" charset="0"/>
+              </a:rPr>
+              <a:t>Grading</a:t>
+            </a:r>
+          </a:p>
+          <a:p>
+            <a:pPr lvl="1"/>
+            <a:r>
+              <a:rPr lang="en-US" dirty="0">
+                <a:latin typeface="Arial" panose="020B0604020202020204" pitchFamily="34" charset="0"/>
+                <a:cs typeface="Arial" panose="020B0604020202020204" pitchFamily="34" charset="0"/>
+              </a:rPr>
+              <a:t>Everything is graded right now. Hooray!</a:t>
+            </a:r>
+          </a:p>
+          <a:p>
+            <a:pPr lvl="1"/>
+            <a:r>
+              <a:rPr lang="en-US" dirty="0">
+                <a:latin typeface="Arial" panose="020B0604020202020204" pitchFamily="34" charset="0"/>
+                <a:cs typeface="Arial" panose="020B0604020202020204" pitchFamily="34" charset="0"/>
+              </a:rPr>
+              <a:t>Exam regrades? Come see me in person or email / visit Gustavo </a:t>
+            </a:r>
+          </a:p>
+          <a:p>
+            <a:r>
+              <a:rPr lang="en-US" dirty="0">
+                <a:latin typeface="Arial" panose="020B0604020202020204" pitchFamily="34" charset="0"/>
+                <a:cs typeface="Arial" panose="020B0604020202020204" pitchFamily="34" charset="0"/>
+              </a:rPr>
+              <a:t>OH Check-Ins</a:t>
+            </a:r>
+          </a:p>
+          <a:p>
+            <a:pPr lvl="1"/>
+            <a:r>
+              <a:rPr lang="en-US" dirty="0">
+                <a:latin typeface="Arial" panose="020B0604020202020204" pitchFamily="34" charset="0"/>
+                <a:cs typeface="Arial" panose="020B0604020202020204" pitchFamily="34" charset="0"/>
+              </a:rPr>
+              <a:t>Have started. This is week 3. Any issues so far?</a:t>
+            </a:r>
+          </a:p>
+          <a:p>
+            <a:pPr lvl="1"/>
+            <a:r>
+              <a:rPr lang="en-US" dirty="0">
+                <a:latin typeface="Arial" panose="020B0604020202020204" pitchFamily="34" charset="0"/>
+                <a:cs typeface="Arial" panose="020B0604020202020204" pitchFamily="34" charset="0"/>
+              </a:rPr>
+              <a:t>Elina will be sending out reminders. You need to not miss your scheduled time!</a:t>
+            </a:r>
+          </a:p>
+          <a:p>
+            <a:pPr lvl="1"/>
+            <a:r>
+              <a:rPr lang="en-US" dirty="0">
+                <a:latin typeface="Arial" panose="020B0604020202020204" pitchFamily="34" charset="0"/>
+                <a:cs typeface="Arial" panose="020B0604020202020204" pitchFamily="34" charset="0"/>
+              </a:rPr>
+              <a:t>If you need to change weeks for a legitimate reason, email Elina (our OH head TA)</a:t>
+            </a:r>
+          </a:p>
+          <a:p>
+            <a:r>
+              <a:rPr lang="en-US" dirty="0">
+                <a:latin typeface="Arial" panose="020B0604020202020204" pitchFamily="34" charset="0"/>
+                <a:cs typeface="Arial" panose="020B0604020202020204" pitchFamily="34" charset="0"/>
+              </a:rPr>
+              <a:t>These slides are linked on the course webpage “slides” page.</a:t>
+            </a:r>
+          </a:p>
+          <a:p>
+            <a:r>
+              <a:rPr lang="en-US" dirty="0">
+                <a:latin typeface="Arial" panose="020B0604020202020204" pitchFamily="34" charset="0"/>
+                <a:cs typeface="Arial" panose="020B0604020202020204" pitchFamily="34" charset="0"/>
+              </a:rPr>
+              <a:t>Today we will review module 3 by going over old exam questions.</a:t>
+            </a:r>
+          </a:p>
+        </p:txBody>
+      </p:sp>
+    </p:spTree>
+    <p:extLst>
+      <p:ext uri="{BB962C8B-B14F-4D97-AF65-F5344CB8AC3E}">
+        <p14:creationId xmlns:p14="http://schemas.microsoft.com/office/powerpoint/2010/main" val="950976267"/>
+      </p:ext>
+    </p:extLst>
+  </p:cSld>
+  <p:clrMapOvr>
+    <a:masterClrMapping/>
+  </p:clrMapOvr>
+</p:sld>
+</file>
+
+<file path=ppt/slides/slide24.xml><?xml version="1.0" encoding="utf-8"?>
 <p:sld xmlns:a="http://schemas.openxmlformats.org/drawingml/2006/main" xmlns:r="http://schemas.openxmlformats.org/officeDocument/2006/relationships" xmlns:p="http://schemas.openxmlformats.org/presentationml/2006/main">
   <p:cSld>
     <p:spTree>
@@ -17101,7 +17394,7 @@
           <p:nvPr>
             <p:extLst>
               <p:ext uri="{D42A27DB-BD31-4B8C-83A1-F6EECF244321}">
-                <p14:modId xmlns:p14="http://schemas.microsoft.com/office/powerpoint/2010/main" val="2763229407"/>
+                <p14:modId xmlns:p14="http://schemas.microsoft.com/office/powerpoint/2010/main" val="2124627336"/>
               </p:ext>
             </p:extLst>
           </p:nvPr>
@@ -17197,7 +17490,7 @@
                       <a:pPr algn="ctr"/>
                       <a:r>
                         <a:rPr lang="en-US" i="0" dirty="0"/>
-                        <a:t>16</a:t>
+                        <a:t>17</a:t>
                       </a:r>
                     </a:p>
                   </a:txBody>
@@ -17211,7 +17504,7 @@
                       <a:pPr algn="ctr"/>
                       <a:r>
                         <a:rPr lang="en-US" i="0" dirty="0"/>
-                        <a:t>17</a:t>
+                        <a:t>18</a:t>
                       </a:r>
                     </a:p>
                   </a:txBody>
@@ -17225,7 +17518,7 @@
                       <a:pPr algn="ctr"/>
                       <a:r>
                         <a:rPr lang="en-US" b="1" i="0" dirty="0"/>
-                        <a:t>94.1%</a:t>
+                        <a:t>94.4%</a:t>
                       </a:r>
                     </a:p>
                   </a:txBody>
@@ -18444,7 +18737,7 @@
           <p:nvPr>
             <p:extLst>
               <p:ext uri="{D42A27DB-BD31-4B8C-83A1-F6EECF244321}">
-                <p14:modId xmlns:p14="http://schemas.microsoft.com/office/powerpoint/2010/main" val="4215351776"/>
+                <p14:modId xmlns:p14="http://schemas.microsoft.com/office/powerpoint/2010/main" val="3978160642"/>
               </p:ext>
             </p:extLst>
           </p:nvPr>
@@ -18540,7 +18833,7 @@
                       <a:pPr algn="ctr"/>
                       <a:r>
                         <a:rPr lang="en-US" i="0" dirty="0"/>
-                        <a:t>17</a:t>
+                        <a:t>18</a:t>
                       </a:r>
                     </a:p>
                   </a:txBody>
@@ -18554,7 +18847,7 @@
                       <a:pPr algn="ctr"/>
                       <a:r>
                         <a:rPr lang="en-US" i="0" dirty="0"/>
-                        <a:t>17</a:t>
+                        <a:t>18</a:t>
                       </a:r>
                     </a:p>
                   </a:txBody>
@@ -21056,7 +21349,19 @@
 </p:tagLst>
 </file>
 
+<file path=ppt/tags/tag49.xml><?xml version="1.0" encoding="utf-8"?>
+<p:tagLst xmlns:a="http://schemas.openxmlformats.org/drawingml/2006/main" xmlns:r="http://schemas.openxmlformats.org/officeDocument/2006/relationships" xmlns:p="http://schemas.openxmlformats.org/presentationml/2006/main">
+  <p:tag name="_INSTRUCTOR VIEW19C14C36-AC8E-43BC-9DB6-C2AAF774C7DC|PANE__TAG" val="_"/>
+</p:tagLst>
+</file>
+
 <file path=ppt/tags/tag5.xml><?xml version="1.0" encoding="utf-8"?>
+<p:tagLst xmlns:a="http://schemas.openxmlformats.org/drawingml/2006/main" xmlns:r="http://schemas.openxmlformats.org/officeDocument/2006/relationships" xmlns:p="http://schemas.openxmlformats.org/presentationml/2006/main">
+  <p:tag name="_INSTRUCTOR VIEW19C14C36-AC8E-43BC-9DB6-C2AAF774C7DC|PANE__TAG" val="_"/>
+</p:tagLst>
+</file>
+
+<file path=ppt/tags/tag50.xml><?xml version="1.0" encoding="utf-8"?>
 <p:tagLst xmlns:a="http://schemas.openxmlformats.org/drawingml/2006/main" xmlns:r="http://schemas.openxmlformats.org/officeDocument/2006/relationships" xmlns:p="http://schemas.openxmlformats.org/presentationml/2006/main">
   <p:tag name="_INSTRUCTOR VIEW19C14C36-AC8E-43BC-9DB6-C2AAF774C7DC|PANE__TAG" val="_"/>
 </p:tagLst>
